--- a/topics/knowledge-distillation/課外主題_知識蒸餾.pptx
+++ b/topics/knowledge-distillation/課外主題_知識蒸餾.pptx
@@ -3222,7 +3222,7 @@
                 </a:solidFill>
                 <a:latin typeface="Microsoft JhengHei"/>
               </a:rPr>
-              <a:t>課外主題｜知識蒸餾 Knowledge Distillation（KD）</a:t>
+              <a:t>知識蒸餾 Knowledge Distillation（KD）</a:t>
             </a:r>
           </a:p>
         </p:txBody>
@@ -3256,7 +3256,7 @@
                 </a:solidFill>
                 <a:latin typeface="Microsoft JhengHei"/>
               </a:rPr>
-              <a:t>115-1 深度學習於海事應用｜依據 Hinton、Vinyals、Dean（2015）Distilling the Knowledge in a Neural Network</a:t>
+              <a:t>依據 Hinton、Vinyals、Dean（2015）Distilling the Knowledge in a Neural Network</a:t>
             </a:r>
           </a:p>
         </p:txBody>

--- a/topics/knowledge-distillation/課外主題_知識蒸餾.pptx
+++ b/topics/knowledge-distillation/課外主題_知識蒸餾.pptx
@@ -3263,20 +3263,507 @@
       </p:sp>
       <p:sp>
         <p:nvSpPr>
-          <p:cNvPr id="6" name="Rectangle 5"/>
+          <p:cNvPr id="6" name="TextBox 5"/>
+          <p:cNvSpPr txBox="1"/>
+          <p:nvPr/>
+        </p:nvSpPr>
+        <p:spPr>
+          <a:xfrm>
+            <a:off x="731520" y="1005840"/>
+            <a:ext cx="10881360" cy="457200"/>
+          </a:xfrm>
+          <a:prstGeom prst="rect">
+            <a:avLst/>
+          </a:prstGeom>
+          <a:noFill/>
+        </p:spPr>
+        <p:txBody>
+          <a:bodyPr wrap="square">
+            <a:spAutoFit/>
+          </a:bodyPr>
+          <a:lstStyle/>
+          <a:p>
+            <a:r>
+              <a:rPr sz="2400" b="1">
+                <a:solidFill>
+                  <a:srgbClr val="1F4E79"/>
+                </a:solidFill>
+                <a:latin typeface="Microsoft JhengHei"/>
+              </a:rPr>
+              <a:t>本教材大綱</a:t>
+            </a:r>
+          </a:p>
+        </p:txBody>
+      </p:sp>
+      <p:graphicFrame>
+        <p:nvGraphicFramePr>
+          <p:cNvPr id="7" name="Table 6"/>
+          <p:cNvGraphicFramePr>
+            <a:graphicFrameLocks noGrp="1"/>
+          </p:cNvGraphicFramePr>
+          <p:nvPr/>
+        </p:nvGraphicFramePr>
+        <p:xfrm>
+          <a:off x="731520" y="1508760"/>
+          <a:ext cx="10881358" cy="1975104"/>
+        </p:xfrm>
+        <a:graphic>
+          <a:graphicData uri="http://schemas.openxmlformats.org/drawingml/2006/table">
+            <a:tbl>
+              <a:tblPr bandRow="1">
+                <a:tableStyleId>{5C22544A-7EE6-4342-B048-85BDC9FD1C3A}</a:tableStyleId>
+              </a:tblPr>
+              <a:tblGrid>
+                <a:gridCol w="2467937"/>
+                <a:gridCol w="7403811"/>
+                <a:gridCol w="1009610"/>
+              </a:tblGrid>
+              <a:tr h="329184">
+                <a:tc>
+                  <a:txBody>
+                    <a:bodyPr/>
+                    <a:lstStyle/>
+                    <a:p>
+                      <a:pPr algn="ctr"/>
+                      <a:r>
+                        <a:rPr sz="1600" b="1">
+                          <a:solidFill>
+                            <a:srgbClr val="FFFFFF"/>
+                          </a:solidFill>
+                          <a:latin typeface="Microsoft JhengHei"/>
+                        </a:rPr>
+                        <a:t>部分</a:t>
+                      </a:r>
+                    </a:p>
+                  </a:txBody>
+                  <a:tcPr marL="36576" marR="36576" marT="9144" marB="9144">
+                    <a:solidFill>
+                      <a:srgbClr val="1F4E79"/>
+                    </a:solidFill>
+                  </a:tcPr>
+                </a:tc>
+                <a:tc>
+                  <a:txBody>
+                    <a:bodyPr/>
+                    <a:lstStyle/>
+                    <a:p>
+                      <a:pPr algn="ctr"/>
+                      <a:r>
+                        <a:rPr sz="1600" b="1">
+                          <a:solidFill>
+                            <a:srgbClr val="FFFFFF"/>
+                          </a:solidFill>
+                          <a:latin typeface="Microsoft JhengHei"/>
+                        </a:rPr>
+                        <a:t>重點</a:t>
+                      </a:r>
+                    </a:p>
+                  </a:txBody>
+                  <a:tcPr marL="36576" marR="36576" marT="9144" marB="9144">
+                    <a:solidFill>
+                      <a:srgbClr val="1F4E79"/>
+                    </a:solidFill>
+                  </a:tcPr>
+                </a:tc>
+                <a:tc>
+                  <a:txBody>
+                    <a:bodyPr/>
+                    <a:lstStyle/>
+                    <a:p>
+                      <a:pPr algn="ctr"/>
+                      <a:r>
+                        <a:rPr sz="1600" b="1">
+                          <a:solidFill>
+                            <a:srgbClr val="FFFFFF"/>
+                          </a:solidFill>
+                          <a:latin typeface="Microsoft JhengHei"/>
+                        </a:rPr>
+                        <a:t>頁次</a:t>
+                      </a:r>
+                    </a:p>
+                  </a:txBody>
+                  <a:tcPr marL="36576" marR="36576" marT="9144" marB="9144">
+                    <a:solidFill>
+                      <a:srgbClr val="1F4E79"/>
+                    </a:solidFill>
+                  </a:tcPr>
+                </a:tc>
+              </a:tr>
+              <a:tr h="329184">
+                <a:tc>
+                  <a:txBody>
+                    <a:bodyPr/>
+                    <a:lstStyle/>
+                    <a:p>
+                      <a:pPr algn="ctr"/>
+                      <a:r>
+                        <a:rPr sz="1600" b="0">
+                          <a:solidFill>
+                            <a:srgbClr val="202020"/>
+                          </a:solidFill>
+                          <a:latin typeface="Consolas"/>
+                        </a:rPr>
+                        <a:t>一　為什麼要蒸餾</a:t>
+                      </a:r>
+                    </a:p>
+                  </a:txBody>
+                  <a:tcPr marL="36576" marR="36576" marT="9144" marB="9144">
+                    <a:solidFill>
+                      <a:srgbClr val="FFFFFF"/>
+                    </a:solidFill>
+                  </a:tcPr>
+                </a:tc>
+                <a:tc>
+                  <a:txBody>
+                    <a:bodyPr/>
+                    <a:lstStyle/>
+                    <a:p>
+                      <a:pPr algn="ctr"/>
+                      <a:r>
+                        <a:rPr sz="1600" b="0">
+                          <a:solidFill>
+                            <a:srgbClr val="202020"/>
+                          </a:solidFill>
+                          <a:latin typeface="Consolas"/>
+                        </a:rPr>
+                        <a:t>訓練用大模型、部署用小模型；錯誤答案的機率也有資訊</a:t>
+                      </a:r>
+                    </a:p>
+                  </a:txBody>
+                  <a:tcPr marL="36576" marR="36576" marT="9144" marB="9144">
+                    <a:solidFill>
+                      <a:srgbClr val="FFFFFF"/>
+                    </a:solidFill>
+                  </a:tcPr>
+                </a:tc>
+                <a:tc>
+                  <a:txBody>
+                    <a:bodyPr/>
+                    <a:lstStyle/>
+                    <a:p>
+                      <a:pPr algn="ctr"/>
+                      <a:r>
+                        <a:rPr sz="1600" b="0">
+                          <a:solidFill>
+                            <a:srgbClr val="202020"/>
+                          </a:solidFill>
+                          <a:latin typeface="Consolas"/>
+                        </a:rPr>
+                        <a:t>2–3</a:t>
+                      </a:r>
+                    </a:p>
+                  </a:txBody>
+                  <a:tcPr marL="36576" marR="36576" marT="9144" marB="9144">
+                    <a:solidFill>
+                      <a:srgbClr val="FFFFFF"/>
+                    </a:solidFill>
+                  </a:tcPr>
+                </a:tc>
+              </a:tr>
+              <a:tr h="329184">
+                <a:tc>
+                  <a:txBody>
+                    <a:bodyPr/>
+                    <a:lstStyle/>
+                    <a:p>
+                      <a:pPr algn="ctr"/>
+                      <a:r>
+                        <a:rPr sz="1600" b="0">
+                          <a:solidFill>
+                            <a:srgbClr val="202020"/>
+                          </a:solidFill>
+                          <a:latin typeface="Consolas"/>
+                        </a:rPr>
+                        <a:t>二　軟目標與溫度</a:t>
+                      </a:r>
+                    </a:p>
+                  </a:txBody>
+                  <a:tcPr marL="36576" marR="36576" marT="9144" marB="9144">
+                    <a:solidFill>
+                      <a:srgbClr val="FFFFFF"/>
+                    </a:solidFill>
+                  </a:tcPr>
+                </a:tc>
+                <a:tc>
+                  <a:txBody>
+                    <a:bodyPr/>
+                    <a:lstStyle/>
+                    <a:p>
+                      <a:pPr algn="ctr"/>
+                      <a:r>
+                        <a:rPr sz="1600" b="0">
+                          <a:solidFill>
+                            <a:srgbClr val="202020"/>
+                          </a:solidFill>
+                          <a:latin typeface="Consolas"/>
+                        </a:rPr>
+                        <a:t>溫度 T 的 softmax 四步計算；T = 1 與 T = 4 的比較</a:t>
+                      </a:r>
+                    </a:p>
+                  </a:txBody>
+                  <a:tcPr marL="36576" marR="36576" marT="9144" marB="9144">
+                    <a:solidFill>
+                      <a:srgbClr val="FFFFFF"/>
+                    </a:solidFill>
+                  </a:tcPr>
+                </a:tc>
+                <a:tc>
+                  <a:txBody>
+                    <a:bodyPr/>
+                    <a:lstStyle/>
+                    <a:p>
+                      <a:pPr algn="ctr"/>
+                      <a:r>
+                        <a:rPr sz="1600" b="0">
+                          <a:solidFill>
+                            <a:srgbClr val="202020"/>
+                          </a:solidFill>
+                          <a:latin typeface="Consolas"/>
+                        </a:rPr>
+                        <a:t>4–7</a:t>
+                      </a:r>
+                    </a:p>
+                  </a:txBody>
+                  <a:tcPr marL="36576" marR="36576" marT="9144" marB="9144">
+                    <a:solidFill>
+                      <a:srgbClr val="FFFFFF"/>
+                    </a:solidFill>
+                  </a:tcPr>
+                </a:tc>
+              </a:tr>
+              <a:tr h="329184">
+                <a:tc>
+                  <a:txBody>
+                    <a:bodyPr/>
+                    <a:lstStyle/>
+                    <a:p>
+                      <a:pPr algn="ctr"/>
+                      <a:r>
+                        <a:rPr sz="1600" b="0">
+                          <a:solidFill>
+                            <a:srgbClr val="202020"/>
+                          </a:solidFill>
+                          <a:latin typeface="Consolas"/>
+                        </a:rPr>
+                        <a:t>三　蒸餾的損失與梯度</a:t>
+                      </a:r>
+                    </a:p>
+                  </a:txBody>
+                  <a:tcPr marL="36576" marR="36576" marT="9144" marB="9144">
+                    <a:solidFill>
+                      <a:srgbClr val="FFFFFF"/>
+                    </a:solidFill>
+                  </a:tcPr>
+                </a:tc>
+                <a:tc>
+                  <a:txBody>
+                    <a:bodyPr/>
+                    <a:lstStyle/>
+                    <a:p>
+                      <a:pPr algn="ctr"/>
+                      <a:r>
+                        <a:rPr sz="1600" b="0">
+                          <a:solidFill>
+                            <a:srgbClr val="202020"/>
+                          </a:solidFill>
+                          <a:latin typeface="Consolas"/>
+                        </a:rPr>
+                        <a:t>損失 L = α T² C_soft + (1 − α) C_hard 逐步計算；梯度式；為什麼乘 T²</a:t>
+                      </a:r>
+                    </a:p>
+                  </a:txBody>
+                  <a:tcPr marL="36576" marR="36576" marT="9144" marB="9144">
+                    <a:solidFill>
+                      <a:srgbClr val="FFFFFF"/>
+                    </a:solidFill>
+                  </a:tcPr>
+                </a:tc>
+                <a:tc>
+                  <a:txBody>
+                    <a:bodyPr/>
+                    <a:lstStyle/>
+                    <a:p>
+                      <a:pPr algn="ctr"/>
+                      <a:r>
+                        <a:rPr sz="1600" b="0">
+                          <a:solidFill>
+                            <a:srgbClr val="202020"/>
+                          </a:solidFill>
+                          <a:latin typeface="Consolas"/>
+                        </a:rPr>
+                        <a:t>8–12</a:t>
+                      </a:r>
+                    </a:p>
+                  </a:txBody>
+                  <a:tcPr marL="36576" marR="36576" marT="9144" marB="9144">
+                    <a:solidFill>
+                      <a:srgbClr val="FFFFFF"/>
+                    </a:solidFill>
+                  </a:tcPr>
+                </a:tc>
+              </a:tr>
+              <a:tr h="329184">
+                <a:tc>
+                  <a:txBody>
+                    <a:bodyPr/>
+                    <a:lstStyle/>
+                    <a:p>
+                      <a:pPr algn="ctr"/>
+                      <a:r>
+                        <a:rPr sz="1600" b="0">
+                          <a:solidFill>
+                            <a:srgbClr val="202020"/>
+                          </a:solidFill>
+                          <a:latin typeface="Consolas"/>
+                        </a:rPr>
+                        <a:t>四　MNIST 實驗</a:t>
+                      </a:r>
+                    </a:p>
+                  </a:txBody>
+                  <a:tcPr marL="36576" marR="36576" marT="9144" marB="9144">
+                    <a:solidFill>
+                      <a:srgbClr val="FFFFFF"/>
+                    </a:solidFill>
+                  </a:tcPr>
+                </a:tc>
+                <a:tc>
+                  <a:txBody>
+                    <a:bodyPr/>
+                    <a:lstStyle/>
+                    <a:p>
+                      <a:pPr algn="ctr"/>
+                      <a:r>
+                        <a:rPr sz="1600" b="0">
+                          <a:solidFill>
+                            <a:srgbClr val="202020"/>
+                          </a:solidFill>
+                          <a:latin typeface="Consolas"/>
+                        </a:rPr>
+                        <a:t>蒸餾的學生答錯較少；小學生取中間溫度；沒看過 3 也認得出 3</a:t>
+                      </a:r>
+                    </a:p>
+                  </a:txBody>
+                  <a:tcPr marL="36576" marR="36576" marT="9144" marB="9144">
+                    <a:solidFill>
+                      <a:srgbClr val="FFFFFF"/>
+                    </a:solidFill>
+                  </a:tcPr>
+                </a:tc>
+                <a:tc>
+                  <a:txBody>
+                    <a:bodyPr/>
+                    <a:lstStyle/>
+                    <a:p>
+                      <a:pPr algn="ctr"/>
+                      <a:r>
+                        <a:rPr sz="1600" b="0">
+                          <a:solidFill>
+                            <a:srgbClr val="202020"/>
+                          </a:solidFill>
+                          <a:latin typeface="Consolas"/>
+                        </a:rPr>
+                        <a:t>13–17</a:t>
+                      </a:r>
+                    </a:p>
+                  </a:txBody>
+                  <a:tcPr marL="36576" marR="36576" marT="9144" marB="9144">
+                    <a:solidFill>
+                      <a:srgbClr val="FFFFFF"/>
+                    </a:solidFill>
+                  </a:tcPr>
+                </a:tc>
+              </a:tr>
+              <a:tr h="329184">
+                <a:tc>
+                  <a:txBody>
+                    <a:bodyPr/>
+                    <a:lstStyle/>
+                    <a:p>
+                      <a:pPr algn="ctr"/>
+                      <a:r>
+                        <a:rPr sz="1600" b="0">
+                          <a:solidFill>
+                            <a:srgbClr val="202020"/>
+                          </a:solidFill>
+                          <a:latin typeface="Consolas"/>
+                        </a:rPr>
+                        <a:t>整理與練習</a:t>
+                      </a:r>
+                    </a:p>
+                  </a:txBody>
+                  <a:tcPr marL="36576" marR="36576" marT="9144" marB="9144">
+                    <a:solidFill>
+                      <a:srgbClr val="FFFFFF"/>
+                    </a:solidFill>
+                  </a:tcPr>
+                </a:tc>
+                <a:tc>
+                  <a:txBody>
+                    <a:bodyPr/>
+                    <a:lstStyle/>
+                    <a:p>
+                      <a:pPr algn="ctr"/>
+                      <a:r>
+                        <a:rPr sz="1600" b="0">
+                          <a:solidFill>
+                            <a:srgbClr val="202020"/>
+                          </a:solidFill>
+                          <a:latin typeface="Consolas"/>
+                        </a:rPr>
+                        <a:t>三個重點與三題練習</a:t>
+                      </a:r>
+                    </a:p>
+                  </a:txBody>
+                  <a:tcPr marL="36576" marR="36576" marT="9144" marB="9144">
+                    <a:solidFill>
+                      <a:srgbClr val="FFFFFF"/>
+                    </a:solidFill>
+                  </a:tcPr>
+                </a:tc>
+                <a:tc>
+                  <a:txBody>
+                    <a:bodyPr/>
+                    <a:lstStyle/>
+                    <a:p>
+                      <a:pPr algn="ctr"/>
+                      <a:r>
+                        <a:rPr sz="1600" b="0">
+                          <a:solidFill>
+                            <a:srgbClr val="202020"/>
+                          </a:solidFill>
+                          <a:latin typeface="Consolas"/>
+                        </a:rPr>
+                        <a:t>18</a:t>
+                      </a:r>
+                    </a:p>
+                  </a:txBody>
+                  <a:tcPr marL="36576" marR="36576" marT="9144" marB="9144">
+                    <a:solidFill>
+                      <a:srgbClr val="FFFFFF"/>
+                    </a:solidFill>
+                  </a:tcPr>
+                </a:tc>
+              </a:tr>
+            </a:tbl>
+          </a:graphicData>
+        </a:graphic>
+      </p:graphicFrame>
+      <p:sp>
+        <p:nvSpPr>
+          <p:cNvPr id="8" name="Rectangle 7"/>
           <p:cNvSpPr/>
           <p:nvPr/>
         </p:nvSpPr>
         <p:spPr>
           <a:xfrm>
-            <a:off x="822960" y="1188720"/>
-            <a:ext cx="10515600" cy="676656"/>
+            <a:off x="731520" y="3749039"/>
+            <a:ext cx="10881360" cy="1325880"/>
           </a:xfrm>
           <a:prstGeom prst="rect">
             <a:avLst/>
           </a:prstGeom>
           <a:solidFill>
-            <a:srgbClr val="F6F8FA"/>
+            <a:srgbClr val="DCF0E4"/>
           </a:solidFill>
           <a:ln>
             <a:solidFill>
@@ -3305,192 +3792,63 @@
           <a:p>
             <a:pPr algn="l"/>
             <a:r>
-              <a:rPr sz="2200" b="0">
+              <a:rPr sz="1700" b="1">
                 <a:solidFill>
-                  <a:srgbClr val="202020"/>
+                  <a:srgbClr val="1E7A45"/>
                 </a:solidFill>
                 <a:latin typeface="Microsoft JhengHei"/>
               </a:rPr>
-              <a:t>一　為什麼要蒸餾：訓練用大模型，部署用小模型</a:t>
+              <a:t>學完本教材，能夠：</a:t>
+            </a:r>
+          </a:p>
+          <a:p>
+            <a:pPr algn="l"/>
+            <a:r>
+              <a:rPr sz="1700" b="1">
+                <a:solidFill>
+                  <a:srgbClr val="1E7A45"/>
+                </a:solidFill>
+                <a:latin typeface="Microsoft JhengHei"/>
+              </a:rPr>
+              <a:t>1. 手算溫度 T 的 softmax，說明軟目標比硬目標多了什麼資訊</a:t>
+            </a:r>
+          </a:p>
+          <a:p>
+            <a:pPr algn="l"/>
+            <a:r>
+              <a:rPr sz="1700" b="1">
+                <a:solidFill>
+                  <a:srgbClr val="1E7A45"/>
+                </a:solidFill>
+                <a:latin typeface="Microsoft JhengHei"/>
+              </a:rPr>
+              <a:t>2. 寫出蒸餾的損失函數，逐步算出損失與梯度</a:t>
+            </a:r>
+          </a:p>
+          <a:p>
+            <a:pPr algn="l"/>
+            <a:r>
+              <a:rPr sz="1700" b="1">
+                <a:solidFill>
+                  <a:srgbClr val="1E7A45"/>
+                </a:solidFill>
+                <a:latin typeface="Microsoft JhengHei"/>
+              </a:rPr>
+              <a:t>3. 在 Colab 訓練老師與學生模型，並解讀溫度對結果的影響</a:t>
             </a:r>
           </a:p>
         </p:txBody>
       </p:sp>
       <p:sp>
         <p:nvSpPr>
-          <p:cNvPr id="7" name="Rectangle 6"/>
-          <p:cNvSpPr/>
-          <p:nvPr/>
-        </p:nvSpPr>
-        <p:spPr>
-          <a:xfrm>
-            <a:off x="822960" y="1956816"/>
-            <a:ext cx="10515600" cy="676656"/>
-          </a:xfrm>
-          <a:prstGeom prst="rect">
-            <a:avLst/>
-          </a:prstGeom>
-          <a:solidFill>
-            <a:srgbClr val="F6F8FA"/>
-          </a:solidFill>
-          <a:ln>
-            <a:solidFill>
-              <a:srgbClr val="D0D7DE"/>
-            </a:solidFill>
-          </a:ln>
-          <a:effectLst/>
-        </p:spPr>
-        <p:style>
-          <a:lnRef idx="1">
-            <a:schemeClr val="accent1"/>
-          </a:lnRef>
-          <a:fillRef idx="3">
-            <a:schemeClr val="accent1"/>
-          </a:fillRef>
-          <a:effectRef idx="2">
-            <a:schemeClr val="accent1"/>
-          </a:effectRef>
-          <a:fontRef idx="minor">
-            <a:schemeClr val="lt1"/>
-          </a:fontRef>
-        </p:style>
-        <p:txBody>
-          <a:bodyPr rtlCol="0" anchor="ctr" wrap="square"/>
-          <a:lstStyle/>
-          <a:p>
-            <a:pPr algn="l"/>
-            <a:r>
-              <a:rPr sz="2200" b="0">
-                <a:solidFill>
-                  <a:srgbClr val="202020"/>
-                </a:solidFill>
-                <a:latin typeface="Microsoft JhengHei"/>
-              </a:rPr>
-              <a:t>二　軟目標與溫度：把錯誤類別的機率放大到看得見</a:t>
-            </a:r>
-          </a:p>
-        </p:txBody>
-      </p:sp>
-      <p:sp>
-        <p:nvSpPr>
-          <p:cNvPr id="8" name="Rectangle 7"/>
-          <p:cNvSpPr/>
-          <p:nvPr/>
-        </p:nvSpPr>
-        <p:spPr>
-          <a:xfrm>
-            <a:off x="822960" y="2724912"/>
-            <a:ext cx="10515600" cy="676656"/>
-          </a:xfrm>
-          <a:prstGeom prst="rect">
-            <a:avLst/>
-          </a:prstGeom>
-          <a:solidFill>
-            <a:srgbClr val="F6F8FA"/>
-          </a:solidFill>
-          <a:ln>
-            <a:solidFill>
-              <a:srgbClr val="D0D7DE"/>
-            </a:solidFill>
-          </a:ln>
-          <a:effectLst/>
-        </p:spPr>
-        <p:style>
-          <a:lnRef idx="1">
-            <a:schemeClr val="accent1"/>
-          </a:lnRef>
-          <a:fillRef idx="3">
-            <a:schemeClr val="accent1"/>
-          </a:fillRef>
-          <a:effectRef idx="2">
-            <a:schemeClr val="accent1"/>
-          </a:effectRef>
-          <a:fontRef idx="minor">
-            <a:schemeClr val="lt1"/>
-          </a:fontRef>
-        </p:style>
-        <p:txBody>
-          <a:bodyPr rtlCol="0" anchor="ctr" wrap="square"/>
-          <a:lstStyle/>
-          <a:p>
-            <a:pPr algn="l"/>
-            <a:r>
-              <a:rPr sz="2200" b="0">
-                <a:solidFill>
-                  <a:srgbClr val="202020"/>
-                </a:solidFill>
-                <a:latin typeface="Microsoft JhengHei"/>
-              </a:rPr>
-              <a:t>三　蒸餾的損失函數與梯度：一張手寫 2 的逐步計算</a:t>
-            </a:r>
-          </a:p>
-        </p:txBody>
-      </p:sp>
-      <p:sp>
-        <p:nvSpPr>
-          <p:cNvPr id="9" name="Rectangle 8"/>
-          <p:cNvSpPr/>
-          <p:nvPr/>
-        </p:nvSpPr>
-        <p:spPr>
-          <a:xfrm>
-            <a:off x="822960" y="3493008"/>
-            <a:ext cx="10515600" cy="676656"/>
-          </a:xfrm>
-          <a:prstGeom prst="rect">
-            <a:avLst/>
-          </a:prstGeom>
-          <a:solidFill>
-            <a:srgbClr val="F6F8FA"/>
-          </a:solidFill>
-          <a:ln>
-            <a:solidFill>
-              <a:srgbClr val="D0D7DE"/>
-            </a:solidFill>
-          </a:ln>
-          <a:effectLst/>
-        </p:spPr>
-        <p:style>
-          <a:lnRef idx="1">
-            <a:schemeClr val="accent1"/>
-          </a:lnRef>
-          <a:fillRef idx="3">
-            <a:schemeClr val="accent1"/>
-          </a:fillRef>
-          <a:effectRef idx="2">
-            <a:schemeClr val="accent1"/>
-          </a:effectRef>
-          <a:fontRef idx="minor">
-            <a:schemeClr val="lt1"/>
-          </a:fontRef>
-        </p:style>
-        <p:txBody>
-          <a:bodyPr rtlCol="0" anchor="ctr" wrap="square"/>
-          <a:lstStyle/>
-          <a:p>
-            <a:pPr algn="l"/>
-            <a:r>
-              <a:rPr sz="2200" b="0">
-                <a:solidFill>
-                  <a:srgbClr val="202020"/>
-                </a:solidFill>
-                <a:latin typeface="Microsoft JhengHei"/>
-              </a:rPr>
-              <a:t>四　MNIST 實驗：重做論文第 3 節的三個結果</a:t>
-            </a:r>
-          </a:p>
-        </p:txBody>
-      </p:sp>
-      <p:sp>
-        <p:nvSpPr>
-          <p:cNvPr id="10" name="TextBox 9"/>
+          <p:cNvPr id="9" name="TextBox 8"/>
           <p:cNvSpPr txBox="1"/>
           <p:nvPr/>
         </p:nvSpPr>
         <p:spPr>
           <a:xfrm>
-            <a:off x="822960" y="4480560"/>
-            <a:ext cx="10515600" cy="1737360"/>
+            <a:off x="731520" y="5303520"/>
+            <a:ext cx="10881360" cy="1097280"/>
           </a:xfrm>
           <a:prstGeom prst="rect">
             <a:avLst/>
@@ -3504,35 +3862,24 @@
           <a:lstStyle/>
           <a:p>
             <a:r>
-              <a:rPr sz="1900" b="0">
+              <a:rPr sz="1600" b="0">
                 <a:solidFill>
                   <a:srgbClr val="59636E"/>
                 </a:solidFill>
                 <a:latin typeface="Microsoft JhengHei"/>
               </a:rPr>
-              <a:t>本主題附 Colab 程式 knowledge_distillation.ipynb 與資料檔 kd_mnist.npz。</a:t>
+              <a:t>附 Colab 程式 knowledge_distillation.ipynb 與資料檔 kd_mnist.npz。</a:t>
             </a:r>
           </a:p>
           <a:p>
             <a:r>
-              <a:rPr sz="1900" b="0">
+              <a:rPr sz="1600" b="0">
                 <a:solidFill>
                   <a:srgbClr val="59636E"/>
                 </a:solidFill>
                 <a:latin typeface="Microsoft JhengHei"/>
               </a:rPr>
-              <a:t>第三部分的每一個數字，都可以在 Colab 第 2、3 段重算一次；</a:t>
-            </a:r>
-          </a:p>
-          <a:p>
-            <a:r>
-              <a:rPr sz="1900" b="0">
-                <a:solidFill>
-                  <a:srgbClr val="59636E"/>
-                </a:solidFill>
-                <a:latin typeface="Microsoft JhengHei"/>
-              </a:rPr>
-              <a:t>第四部分的結果，是同一份程式在 10,000 張訓練影像上的輸出。</a:t>
+              <a:t>第三部分的每一個數字都可以在 Colab 第 2、3 段重算；第四部分是同一份程式的輸出。</a:t>
             </a:r>
           </a:p>
         </p:txBody>
@@ -3730,51 +4077,6 @@
                       </p:childTnLst>
                     </p:cTn>
                   </p:par>
-                  <p:par>
-                    <p:cTn id="19" fill="hold">
-                      <p:stCondLst>
-                        <p:cond delay="indefinite"/>
-                      </p:stCondLst>
-                      <p:childTnLst>
-                        <p:par>
-                          <p:cTn id="20" fill="hold">
-                            <p:stCondLst>
-                              <p:cond delay="0"/>
-                            </p:stCondLst>
-                            <p:childTnLst>
-                              <p:par>
-                                <p:cTn id="21" presetID="1" presetClass="entr" presetSubtype="0" fill="hold" grpId="0" nodeType="clickEffect">
-                                  <p:stCondLst>
-                                    <p:cond delay="0"/>
-                                  </p:stCondLst>
-                                  <p:childTnLst>
-                                    <p:set>
-                                      <p:cBhvr>
-                                        <p:cTn id="22" dur="1" fill="hold">
-                                          <p:stCondLst>
-                                            <p:cond delay="0"/>
-                                          </p:stCondLst>
-                                        </p:cTn>
-                                        <p:tgtEl>
-                                          <p:spTgt spid="10"/>
-                                        </p:tgtEl>
-                                        <p:attrNameLst>
-                                          <p:attrName>style.visibility</p:attrName>
-                                        </p:attrNameLst>
-                                      </p:cBhvr>
-                                      <p:to>
-                                        <p:strVal val="visible"/>
-                                      </p:to>
-                                    </p:set>
-                                  </p:childTnLst>
-                                </p:cTn>
-                              </p:par>
-                            </p:childTnLst>
-                          </p:cTn>
-                        </p:par>
-                      </p:childTnLst>
-                    </p:cTn>
-                  </p:par>
                 </p:childTnLst>
               </p:cTn>
               <p:prevCondLst>
@@ -3798,10 +4100,11 @@
     </p:tnLst>
     <p:bldLst>
       <p:bldP spid="6" grpId="0" animBg="1"/>
-      <p:bldP spid="7" grpId="0" animBg="1"/>
+      <p:bldGraphic spid="7" grpId="0">
+        <p:bldAsOne/>
+      </p:bldGraphic>
       <p:bldP spid="8" grpId="0" animBg="1"/>
       <p:bldP spid="9" grpId="0" animBg="1"/>
-      <p:bldP spid="10" grpId="0" animBg="1"/>
     </p:bldLst>
   </p:timing>
 </p:sld>

--- a/topics/knowledge-distillation/課外主題_知識蒸餾.pptx
+++ b/topics/knowledge-distillation/課外主題_知識蒸餾.pptx
@@ -3587,7 +3587,7 @@
                 </a:solidFill>
                 <a:latin typeface="Microsoft JhengHei"/>
               </a:rPr>
-              <a:t>學生 z = (4, 2, 2) 先做 softmax，再和老師的 p 算交叉熵</a:t>
+              <a:t>蒸餾模型 z = (4, 2, 2) 的 softmax，再與軟目標 p 算交叉熵</a:t>
             </a:r>
           </a:p>
         </p:txBody>
@@ -3752,7 +3752,7 @@
                           </a:solidFill>
                           <a:latin typeface="Microsoft JhengHei"/>
                         </a:rPr>
-                        <a:t>學生 z</a:t>
+                        <a:t>z</a:t>
                       </a:r>
                     </a:p>
                   </a:txBody>
@@ -4194,7 +4194,7 @@
                           </a:solidFill>
                           <a:latin typeface="Microsoft JhengHei"/>
                         </a:rPr>
-                        <a:t>學生 q</a:t>
+                        <a:t>q</a:t>
                       </a:r>
                     </a:p>
                   </a:txBody>
@@ -4313,7 +4313,7 @@
                 </a:solidFill>
                 <a:latin typeface="Microsoft JhengHei"/>
               </a:rPr>
-              <a:t>學生在 T = 4 下，</a:t>
+              <a:t>T = 4 時，蒸餾模型</a:t>
             </a:r>
           </a:p>
           <a:p>
@@ -4324,7 +4324,7 @@
                 </a:solidFill>
                 <a:latin typeface="Microsoft JhengHei"/>
               </a:rPr>
-              <a:t>3 和 7 的機率相同</a:t>
+              <a:t>給 3 與 7 相同的機率</a:t>
             </a:r>
           </a:p>
         </p:txBody>
@@ -4489,7 +4489,7 @@
                           </a:solidFill>
                           <a:latin typeface="Microsoft JhengHei"/>
                         </a:rPr>
-                        <a:t>老師 p</a:t>
+                        <a:t>p</a:t>
                       </a:r>
                     </a:p>
                   </a:txBody>
@@ -4925,7 +4925,7 @@
                 </a:solidFill>
                 <a:latin typeface="Microsoft JhengHei"/>
               </a:rPr>
-              <a:t>log 是自然對數。各格四捨五入到小數第 4 位，加總用的是未進位的值。</a:t>
+              <a:t>log 為自然對數。各格四捨五入到小數第 4 位，加總以未進位的值計算。</a:t>
             </a:r>
           </a:p>
           <a:p>
@@ -4936,7 +4936,7 @@
                 </a:solidFill>
                 <a:latin typeface="Microsoft JhengHei"/>
               </a:rPr>
-              <a:t>如果學生的 q 和老師的 p 完全相同，C_soft 達到最小值；差得越多，C_soft 越大。</a:t>
+              <a:t>q 與 p 相同時 C_soft 最小，兩者差得越多 C_soft 越大。</a:t>
             </a:r>
           </a:p>
         </p:txBody>
@@ -5724,7 +5724,7 @@
                 </a:solidFill>
                 <a:latin typeface="Microsoft JhengHei"/>
               </a:rPr>
-              <a:t>三、逐步計算 C_hard 與總損失 L</a:t>
+              <a:t>三、逐步計算 C_hard 與目標函數 L</a:t>
             </a:r>
           </a:p>
         </p:txBody>
@@ -5758,7 +5758,7 @@
                 </a:solidFill>
                 <a:latin typeface="Microsoft JhengHei"/>
               </a:rPr>
-              <a:t>C_hard 在 T = 1 下計算；α = 0.9，T = 4</a:t>
+              <a:t>C_hard 在溫度 1 下計算；α = 0.9，T = 4</a:t>
             </a:r>
           </a:p>
         </p:txBody>
@@ -5923,7 +5923,7 @@
                           </a:solidFill>
                           <a:latin typeface="Microsoft JhengHei"/>
                         </a:rPr>
-                        <a:t>學生 z</a:t>
+                        <a:t>z</a:t>
                       </a:r>
                     </a:p>
                   </a:txBody>
@@ -6240,7 +6240,7 @@
                           </a:solidFill>
                           <a:latin typeface="Microsoft JhengHei"/>
                         </a:rPr>
-                        <a:t>學生 q (T=1)</a:t>
+                        <a:t>T = 1 的 q</a:t>
                       </a:r>
                     </a:p>
                   </a:txBody>
@@ -6380,7 +6380,7 @@
                 </a:solidFill>
                 <a:latin typeface="Microsoft JhengHei"/>
               </a:rPr>
-              <a:t>正確答案是 2</a:t>
+              <a:t>正確標籤是 2</a:t>
             </a:r>
           </a:p>
           <a:p>
@@ -6517,7 +6517,7 @@
                           </a:solidFill>
                           <a:latin typeface="Consolas"/>
                         </a:rPr>
-                        <a:t>軟目標項</a:t>
+                        <a:t>軟目標</a:t>
                       </a:r>
                     </a:p>
                   </a:txBody>
@@ -6588,7 +6588,7 @@
                           </a:solidFill>
                           <a:latin typeface="Consolas"/>
                         </a:rPr>
-                        <a:t>硬目標項</a:t>
+                        <a:t>硬目標</a:t>
                       </a:r>
                     </a:p>
                   </a:txBody>
@@ -6659,7 +6659,7 @@
                           </a:solidFill>
                           <a:latin typeface="Consolas"/>
                         </a:rPr>
-                        <a:t>總損失 L</a:t>
+                        <a:t>目標函數 L</a:t>
                       </a:r>
                     </a:p>
                   </a:txBody>
@@ -6749,7 +6749,7 @@
                 </a:solidFill>
                 <a:latin typeface="Microsoft JhengHei"/>
               </a:rPr>
-              <a:t>軟目標項乘了 T² = 16，所以數值比硬目標項大；兩項各自對梯度的貢獻，見下一頁。</a:t>
+              <a:t>軟目標項乘了 T² = 16，所以遠大於硬目標項；兩項各自對梯度的貢獻見下一頁。</a:t>
             </a:r>
           </a:p>
         </p:txBody>
@@ -7333,7 +7333,7 @@
                 </a:solidFill>
                 <a:latin typeface="Microsoft JhengHei"/>
               </a:rPr>
-              <a:t>論文式 (2)：軟目標項對學生 logit 的梯度</a:t>
+              <a:t>論文式 (2)：對蒸餾模型每個 logit 的交叉熵梯度</a:t>
             </a:r>
           </a:p>
         </p:txBody>
@@ -7391,7 +7391,7 @@
                 </a:solidFill>
                 <a:latin typeface="Microsoft JhengHei"/>
               </a:rPr>
-              <a:t>硬目標項的梯度是一般交叉熵的結果：q(T=1) − y</a:t>
+              <a:t>硬目標項的梯度即一般交叉熵的梯度：q(T=1) − y</a:t>
             </a:r>
           </a:p>
         </p:txBody>
@@ -8321,7 +8321,7 @@
                 </a:solidFill>
                 <a:latin typeface="Microsoft JhengHei"/>
               </a:rPr>
-              <a:t>梯度下降往梯度的反方向更新：2 的 logit 會變大，7 的 logit 變小最多，3 只小幅下降。</a:t>
+              <a:t>梯度下降使 2 的 logit 上升、7 的 logit 下降最多、3 的 logit 只略為下降，</a:t>
             </a:r>
           </a:p>
           <a:p>
@@ -8333,7 +8333,7 @@
                 </a:solidFill>
                 <a:latin typeface="Microsoft JhengHei"/>
               </a:rPr>
-              <a:t>學生因此往老師的看法「2 最像、3 其次、7 最不像」靠近。</a:t>
+              <a:t>蒸餾模型因而往笨重模型的看法靠近：先是 2，其次是 3，最後是 7。</a:t>
             </a:r>
           </a:p>
         </p:txBody>
@@ -8367,7 +8367,7 @@
                 </a:solidFill>
                 <a:latin typeface="Microsoft JhengHei"/>
               </a:rPr>
-              <a:t>Colab 第 3 段用 TensorFlow 的自動微分 GradientTape 重算一次，</a:t>
+              <a:t>Colab 第 3 段以自動微分（TensorFlow GradientTape）重算，</a:t>
             </a:r>
           </a:p>
           <a:p>
@@ -8378,7 +8378,7 @@
                 </a:solidFill>
                 <a:latin typeface="Microsoft JhengHei"/>
               </a:rPr>
-              <a:t>得到相同的損失 13.8732 與相同的總梯度。</a:t>
+              <a:t>得到相同的目標函數值 13.8732 與相同的梯度。</a:t>
             </a:r>
           </a:p>
         </p:txBody>
@@ -9070,7 +9070,7 @@
                 </a:solidFill>
                 <a:latin typeface="Microsoft JhengHei"/>
               </a:rPr>
-              <a:t>三、為什麼乘 T²，以及高溫下的極限</a:t>
+              <a:t>三、為什麼乘 T²，以及比對 logit</a:t>
             </a:r>
           </a:p>
         </p:txBody>
@@ -9104,7 +9104,7 @@
                 </a:solidFill>
                 <a:latin typeface="Microsoft JhengHei"/>
               </a:rPr>
-              <a:t>論文式 (2) 到式 (4)</a:t>
+              <a:t>論文式 (2) 至式 (4)</a:t>
             </a:r>
           </a:p>
         </p:txBody>
@@ -9449,7 +9449,7 @@
                 </a:solidFill>
                 <a:latin typeface="Microsoft JhengHei"/>
               </a:rPr>
-              <a:t>T 從 4 升到 20，梯度縮小約 20 倍，接近 (20/4)² = 25 倍。</a:t>
+              <a:t>T 從 4 升到 20，梯度縮小約 20 倍，接近 (20/4)² = 25 倍；</a:t>
             </a:r>
           </a:p>
           <a:p>
@@ -9460,7 +9460,7 @@
                 </a:solidFill>
                 <a:latin typeface="Microsoft JhengHei"/>
               </a:rPr>
-              <a:t>乘上 T² 之後是 0.85 與 1.05，大小相近。</a:t>
+              <a:t>乘上 T² 後是 0.85 與 1.05，大小相近。</a:t>
             </a:r>
           </a:p>
           <a:p>
@@ -9471,7 +9471,7 @@
                 </a:solidFill>
                 <a:latin typeface="Microsoft JhengHei"/>
               </a:rPr>
-              <a:t>1/T² 的比例是高溫下的近似，T = 1 不在這個範圍內。</a:t>
+              <a:t>1/T² 的比例在高溫極限下成立，T = 1 不在此範圍。</a:t>
             </a:r>
           </a:p>
         </p:txBody>
@@ -9529,7 +9529,7 @@
                 </a:solidFill>
                 <a:latin typeface="Microsoft JhengHei"/>
               </a:rPr>
-              <a:t>條件：logit 各自減去平均值，且 T 遠大於 logit。</a:t>
+              <a:t>若溫度遠大於 logit，且 logit 對每個移轉樣本</a:t>
             </a:r>
           </a:p>
           <a:p>
@@ -9540,7 +9540,7 @@
                 </a:solidFill>
                 <a:latin typeface="Microsoft JhengHei"/>
               </a:rPr>
-              <a:t>N 是類別數。這等於最小化</a:t>
+              <a:t>各自減去平均（N 為類別數），蒸餾等於最小化</a:t>
             </a:r>
           </a:p>
         </p:txBody>
@@ -9964,7 +9964,7 @@
                 </a:solidFill>
                 <a:latin typeface="Microsoft JhengHei"/>
               </a:rPr>
-              <a:t>高溫時，蒸餾等於讓學生的 logit 直接貼齊老師的 logit；溫度較低時，非常負的 logit 不必貼齊</a:t>
+              <a:t>比對 logit 是蒸餾的特例。溫度較低時，蒸餾對「比平均負很多的 logit」的比對注意得少得多。</a:t>
             </a:r>
           </a:p>
         </p:txBody>
@@ -10508,7 +10508,7 @@
                 </a:solidFill>
                 <a:latin typeface="Microsoft JhengHei"/>
               </a:rPr>
-              <a:t>換資料：MNIST 手寫數字實驗</a:t>
+              <a:t>MNIST 初步實驗</a:t>
             </a:r>
           </a:p>
         </p:txBody>
@@ -10542,7 +10542,7 @@
                 </a:solidFill>
                 <a:latin typeface="Microsoft JhengHei"/>
               </a:rPr>
-              <a:t>從這一頁到最後，都用 Colab 程式 knowledge_distillation.ipynb 的輸出</a:t>
+              <a:t>從這一頁起，結果都來自 Colab 程式 knowledge_distillation.ipynb</a:t>
             </a:r>
           </a:p>
         </p:txBody>
@@ -10654,7 +10654,7 @@
                           </a:solidFill>
                           <a:latin typeface="Microsoft JhengHei"/>
                         </a:rPr>
-                        <a:t>本主題的 Colab</a:t>
+                        <a:t>本教材的 Colab</a:t>
                       </a:r>
                     </a:p>
                   </a:txBody>
@@ -10677,9 +10677,9 @@
                           <a:solidFill>
                             <a:srgbClr val="202020"/>
                           </a:solidFill>
-                          <a:latin typeface="Consolas"/>
-                        </a:rPr>
-                        <a:t>訓練資料</a:t>
+                          <a:latin typeface="Microsoft JhengHei"/>
+                        </a:rPr>
+                        <a:t>訓練樣本</a:t>
                       </a:r>
                     </a:p>
                   </a:txBody>
@@ -10700,9 +10700,9 @@
                           <a:solidFill>
                             <a:srgbClr val="202020"/>
                           </a:solidFill>
-                          <a:latin typeface="Consolas"/>
-                        </a:rPr>
-                        <a:t>60,000 張</a:t>
+                          <a:latin typeface="Microsoft JhengHei"/>
+                        </a:rPr>
+                        <a:t>60,000</a:t>
                       </a:r>
                     </a:p>
                   </a:txBody>
@@ -10723,9 +10723,9 @@
                           <a:solidFill>
                             <a:srgbClr val="202020"/>
                           </a:solidFill>
-                          <a:latin typeface="Consolas"/>
-                        </a:rPr>
-                        <a:t>10,000 張（0 到 9 各 1,000 張）</a:t>
+                          <a:latin typeface="Microsoft JhengHei"/>
+                        </a:rPr>
+                        <a:t>10,000（每個數字 1000 張）</a:t>
                       </a:r>
                     </a:p>
                   </a:txBody>
@@ -10748,9 +10748,9 @@
                           <a:solidFill>
                             <a:srgbClr val="202020"/>
                           </a:solidFill>
-                          <a:latin typeface="Consolas"/>
-                        </a:rPr>
-                        <a:t>測試資料</a:t>
+                          <a:latin typeface="Microsoft JhengHei"/>
+                        </a:rPr>
+                        <a:t>測試樣本</a:t>
                       </a:r>
                     </a:p>
                   </a:txBody>
@@ -10771,9 +10771,9 @@
                           <a:solidFill>
                             <a:srgbClr val="202020"/>
                           </a:solidFill>
-                          <a:latin typeface="Consolas"/>
-                        </a:rPr>
-                        <a:t>10,000 張</a:t>
+                          <a:latin typeface="Microsoft JhengHei"/>
+                        </a:rPr>
+                        <a:t>10,000</a:t>
                       </a:r>
                     </a:p>
                   </a:txBody>
@@ -10794,9 +10794,9 @@
                           <a:solidFill>
                             <a:srgbClr val="202020"/>
                           </a:solidFill>
-                          <a:latin typeface="Consolas"/>
-                        </a:rPr>
-                        <a:t>10,000 張（同一個測試集）</a:t>
+                          <a:latin typeface="Microsoft JhengHei"/>
+                        </a:rPr>
+                        <a:t>10,000（同一個測試集）</a:t>
                       </a:r>
                     </a:p>
                   </a:txBody>
@@ -10819,9 +10819,9 @@
                           <a:solidFill>
                             <a:srgbClr val="202020"/>
                           </a:solidFill>
-                          <a:latin typeface="Consolas"/>
-                        </a:rPr>
-                        <a:t>老師</a:t>
+                          <a:latin typeface="Microsoft JhengHei"/>
+                        </a:rPr>
+                        <a:t>笨重模型</a:t>
                       </a:r>
                     </a:p>
                   </a:txBody>
@@ -10842,9 +10842,9 @@
                           <a:solidFill>
                             <a:srgbClr val="202020"/>
                           </a:solidFill>
-                          <a:latin typeface="Consolas"/>
-                        </a:rPr>
-                        <a:t>1200-1200，Dropout，平移 2 像素</a:t>
+                          <a:latin typeface="Microsoft JhengHei"/>
+                        </a:rPr>
+                        <a:t>1200-1200，dropout，平移最多 2 像素</a:t>
                       </a:r>
                     </a:p>
                   </a:txBody>
@@ -10865,9 +10865,9 @@
                           <a:solidFill>
                             <a:srgbClr val="202020"/>
                           </a:solidFill>
-                          <a:latin typeface="Consolas"/>
-                        </a:rPr>
-                        <a:t>1200-1200，Dropout，平移 2 像素</a:t>
+                          <a:latin typeface="Microsoft JhengHei"/>
+                        </a:rPr>
+                        <a:t>1200-1200，dropout，平移最多 2 像素</a:t>
                       </a:r>
                     </a:p>
                   </a:txBody>
@@ -10890,9 +10890,9 @@
                           <a:solidFill>
                             <a:srgbClr val="202020"/>
                           </a:solidFill>
-                          <a:latin typeface="Consolas"/>
-                        </a:rPr>
-                        <a:t>學生</a:t>
+                          <a:latin typeface="Microsoft JhengHei"/>
+                        </a:rPr>
+                        <a:t>小網路</a:t>
                       </a:r>
                     </a:p>
                   </a:txBody>
@@ -10913,7 +10913,7 @@
                           <a:solidFill>
                             <a:srgbClr val="202020"/>
                           </a:solidFill>
-                          <a:latin typeface="Consolas"/>
+                          <a:latin typeface="Microsoft JhengHei"/>
                         </a:rPr>
                         <a:t>800-800，無正則化；另試 30-30</a:t>
                       </a:r>
@@ -10936,7 +10936,7 @@
                           <a:solidFill>
                             <a:srgbClr val="202020"/>
                           </a:solidFill>
-                          <a:latin typeface="Consolas"/>
+                          <a:latin typeface="Microsoft JhengHei"/>
                         </a:rPr>
                         <a:t>100-100，無正則化；另試 30-30</a:t>
                       </a:r>
@@ -10961,9 +10961,9 @@
                           <a:solidFill>
                             <a:srgbClr val="202020"/>
                           </a:solidFill>
-                          <a:latin typeface="Consolas"/>
-                        </a:rPr>
-                        <a:t>蒸餾溫度</a:t>
+                          <a:latin typeface="Microsoft JhengHei"/>
+                        </a:rPr>
+                        <a:t>溫度</a:t>
                       </a:r>
                     </a:p>
                   </a:txBody>
@@ -10984,7 +10984,7 @@
                           <a:solidFill>
                             <a:srgbClr val="202020"/>
                           </a:solidFill>
-                          <a:latin typeface="Consolas"/>
+                          <a:latin typeface="Microsoft JhengHei"/>
                         </a:rPr>
                         <a:t>20（另試多種）</a:t>
                       </a:r>
@@ -11007,7 +11007,7 @@
                           <a:solidFill>
                             <a:srgbClr val="202020"/>
                           </a:solidFill>
-                          <a:latin typeface="Consolas"/>
+                          <a:latin typeface="Microsoft JhengHei"/>
                         </a:rPr>
                         <a:t>1、2、4、8、20；α = 0.9</a:t>
                       </a:r>
@@ -11053,7 +11053,7 @@
                 </a:solidFill>
                 <a:latin typeface="Microsoft JhengHei"/>
               </a:rPr>
-              <a:t>數字 1200-1200 表示兩個隱藏層、每層 1,200 個神經元。</a:t>
+              <a:t>1200-1200 表示兩個隱藏層，各有 1200 個整流線性單元。</a:t>
             </a:r>
           </a:p>
           <a:p>
@@ -11064,7 +11064,7 @@
                 </a:solidFill>
                 <a:latin typeface="Microsoft JhengHei"/>
               </a:rPr>
-              <a:t>資料和模型都比論文小，答錯張數不會相同；要看的是三個趨勢是否一致。</a:t>
+              <a:t>訓練集與網路都比論文小，測試錯誤數不會相同；要看的是三個效應是否重現。</a:t>
             </a:r>
           </a:p>
         </p:txBody>
@@ -11376,7 +11376,7 @@
                 </a:solidFill>
                 <a:latin typeface="Microsoft JhengHei"/>
               </a:rPr>
-              <a:t>四、結果一：蒸餾的學生答錯較少</a:t>
+              <a:t>四、蒸餾使測試錯誤數減少</a:t>
             </a:r>
           </a:p>
         </p:txBody>
@@ -11410,7 +11410,7 @@
                 </a:solidFill>
                 <a:latin typeface="Microsoft JhengHei"/>
               </a:rPr>
-              <a:t>測試集 10,000 張的答錯張數</a:t>
+              <a:t>測試集 10,000 個樣本的錯誤數</a:t>
             </a:r>
           </a:p>
         </p:txBody>
@@ -11498,7 +11498,7 @@
                           </a:solidFill>
                           <a:latin typeface="Microsoft JhengHei"/>
                         </a:rPr>
-                        <a:t>本主題</a:t>
+                        <a:t>本教材</a:t>
                       </a:r>
                     </a:p>
                   </a:txBody>
@@ -11521,9 +11521,9 @@
                           <a:solidFill>
                             <a:srgbClr val="202020"/>
                           </a:solidFill>
-                          <a:latin typeface="Consolas"/>
-                        </a:rPr>
-                        <a:t>老師</a:t>
+                          <a:latin typeface="Microsoft JhengHei"/>
+                        </a:rPr>
+                        <a:t>笨重模型</a:t>
                       </a:r>
                     </a:p>
                   </a:txBody>
@@ -11544,7 +11544,7 @@
                           <a:solidFill>
                             <a:srgbClr val="202020"/>
                           </a:solidFill>
-                          <a:latin typeface="Consolas"/>
+                          <a:latin typeface="Microsoft JhengHei"/>
                         </a:rPr>
                         <a:t>67</a:t>
                       </a:r>
@@ -11567,7 +11567,7 @@
                           <a:solidFill>
                             <a:srgbClr val="202020"/>
                           </a:solidFill>
-                          <a:latin typeface="Consolas"/>
+                          <a:latin typeface="Microsoft JhengHei"/>
                         </a:rPr>
                         <a:t>222</a:t>
                       </a:r>
@@ -11592,9 +11592,9 @@
                           <a:solidFill>
                             <a:srgbClr val="202020"/>
                           </a:solidFill>
-                          <a:latin typeface="Consolas"/>
-                        </a:rPr>
-                        <a:t>學生，只學正確答案</a:t>
+                          <a:latin typeface="Microsoft JhengHei"/>
+                        </a:rPr>
+                        <a:t>小網路，只用硬目標</a:t>
                       </a:r>
                     </a:p>
                   </a:txBody>
@@ -11615,7 +11615,7 @@
                           <a:solidFill>
                             <a:srgbClr val="202020"/>
                           </a:solidFill>
-                          <a:latin typeface="Consolas"/>
+                          <a:latin typeface="Microsoft JhengHei"/>
                         </a:rPr>
                         <a:t>146</a:t>
                       </a:r>
@@ -11638,7 +11638,7 @@
                           <a:solidFill>
                             <a:srgbClr val="202020"/>
                           </a:solidFill>
-                          <a:latin typeface="Consolas"/>
+                          <a:latin typeface="Microsoft JhengHei"/>
                         </a:rPr>
                         <a:t>420</a:t>
                       </a:r>
@@ -11663,9 +11663,9 @@
                           <a:solidFill>
                             <a:srgbClr val="202020"/>
                           </a:solidFill>
-                          <a:latin typeface="Consolas"/>
-                        </a:rPr>
-                        <a:t>學生，蒸餾</a:t>
+                          <a:latin typeface="Microsoft JhengHei"/>
+                        </a:rPr>
+                        <a:t>小網路，蒸餾</a:t>
                       </a:r>
                     </a:p>
                   </a:txBody>
@@ -11686,7 +11686,7 @@
                           <a:solidFill>
                             <a:srgbClr val="202020"/>
                           </a:solidFill>
-                          <a:latin typeface="Consolas"/>
+                          <a:latin typeface="Microsoft JhengHei"/>
                         </a:rPr>
                         <a:t>74（T = 20）</a:t>
                       </a:r>
@@ -11709,7 +11709,7 @@
                           <a:solidFill>
                             <a:srgbClr val="202020"/>
                           </a:solidFill>
-                          <a:latin typeface="Consolas"/>
+                          <a:latin typeface="Microsoft JhengHei"/>
                         </a:rPr>
                         <a:t>319（T = 20）</a:t>
                       </a:r>
@@ -11800,7 +11800,7 @@
                 </a:solidFill>
                 <a:latin typeface="Microsoft JhengHei"/>
               </a:rPr>
-              <a:t>本主題：蒸餾把學生和老師之間的差距</a:t>
+              <a:t>本教材：蒸餾把小網路與笨重模型的差距</a:t>
             </a:r>
           </a:p>
           <a:p>
@@ -11812,7 +11812,7 @@
                 </a:solidFill>
                 <a:latin typeface="Microsoft JhengHei"/>
               </a:rPr>
-              <a:t>從 198 張縮小到 97 張</a:t>
+              <a:t>從 198 個錯誤縮小到 97 個</a:t>
             </a:r>
           </a:p>
         </p:txBody>
@@ -11846,7 +11846,7 @@
                 </a:solidFill>
                 <a:latin typeface="Microsoft JhengHei"/>
               </a:rPr>
-              <a:t>論文的老師用平移過的影像訓練，</a:t>
+              <a:t>論文指出：軟目標能把大量知識移轉給蒸餾模型，</a:t>
             </a:r>
           </a:p>
           <a:p>
@@ -11857,7 +11857,7 @@
                 </a:solidFill>
                 <a:latin typeface="Microsoft JhengHei"/>
               </a:rPr>
-              <a:t>學生的移轉集則沒有平移過的影像。</a:t>
+              <a:t>包括從平移過的訓練資料學到的類推方式，</a:t>
             </a:r>
           </a:p>
           <a:p>
@@ -11868,18 +11868,7 @@
                 </a:solidFill>
                 <a:latin typeface="Microsoft JhengHei"/>
               </a:rPr>
-              <a:t>學生仍學到了老師對平移的處理方式，</a:t>
-            </a:r>
-          </a:p>
-          <a:p>
-            <a:r>
-              <a:rPr sz="1700" b="0">
-                <a:solidFill>
-                  <a:srgbClr val="202020"/>
-                </a:solidFill>
-                <a:latin typeface="Microsoft JhengHei"/>
-              </a:rPr>
-              <a:t>因為這個資訊包含在軟目標裡。</a:t>
+              <a:t>即使移轉集裡沒有任何平移過的影像。</a:t>
             </a:r>
           </a:p>
         </p:txBody>
@@ -11913,7 +11902,7 @@
                 </a:solidFill>
                 <a:latin typeface="Microsoft JhengHei"/>
               </a:rPr>
-              <a:t>藍線：學生 100-100。各溫度都比虛線（只學正確答案）少錯。</a:t>
+              <a:t>藍線：小網路 100-100。每個溫度下，蒸餾的測試錯誤數都少於只用硬目標（虛線）。</a:t>
             </a:r>
           </a:p>
         </p:txBody>
@@ -12317,7 +12306,7 @@
                 </a:solidFill>
                 <a:latin typeface="Microsoft JhengHei"/>
               </a:rPr>
-              <a:t>四、結果二：學生很小時，溫度取中間值</a:t>
+              <a:t>四、很小的網路取中間溫度</a:t>
             </a:r>
           </a:p>
         </p:txBody>
@@ -12351,7 +12340,7 @@
                 </a:solidFill>
                 <a:latin typeface="Microsoft JhengHei"/>
               </a:rPr>
-              <a:t>學生縮小為 30-30</a:t>
+              <a:t>小網路縮小為 30-30</a:t>
             </a:r>
           </a:p>
         </p:txBody>
@@ -12416,7 +12405,7 @@
                           </a:solidFill>
                           <a:latin typeface="Microsoft JhengHei"/>
                         </a:rPr>
-                        <a:t>學生 100-100</a:t>
+                        <a:t>小網路 100-100</a:t>
                       </a:r>
                     </a:p>
                   </a:txBody>
@@ -12439,7 +12428,7 @@
                           </a:solidFill>
                           <a:latin typeface="Microsoft JhengHei"/>
                         </a:rPr>
-                        <a:t>學生 30-30</a:t>
+                        <a:t>小網路 30-30</a:t>
                       </a:r>
                     </a:p>
                   </a:txBody>
@@ -12464,7 +12453,7 @@
                           </a:solidFill>
                           <a:latin typeface="Consolas"/>
                         </a:rPr>
-                        <a:t>只學正確答案</a:t>
+                        <a:t>只用硬目標</a:t>
                       </a:r>
                     </a:p>
                   </a:txBody>
@@ -12948,13 +12937,25 @@
           <a:p>
             <a:pPr algn="l"/>
             <a:r>
-              <a:rPr sz="1800" b="1">
+              <a:rPr sz="1700" b="1">
                 <a:solidFill>
                   <a:srgbClr val="1F4E79"/>
                 </a:solidFill>
                 <a:latin typeface="Microsoft JhengHei"/>
               </a:rPr>
-              <a:t>論文：每層 300 個以上時，8 以上的溫度結果相近；每層 30 個時，2.5 到 4 明顯最好</a:t>
+              <a:t>論文：每層 300 個以上單元時，8 以上的溫度結果相當接近；每層縮減為 30 個時，</a:t>
+            </a:r>
+          </a:p>
+          <a:p>
+            <a:pPr algn="l"/>
+            <a:r>
+              <a:rPr sz="1700" b="1">
+                <a:solidFill>
+                  <a:srgbClr val="1F4E79"/>
+                </a:solidFill>
+                <a:latin typeface="Microsoft JhengHei"/>
+              </a:rPr>
+              <a:t>2.5 至 4 的溫度明顯優於更高或更低的溫度</a:t>
             </a:r>
           </a:p>
         </p:txBody>
@@ -13009,7 +13010,7 @@
                 </a:solidFill>
                 <a:latin typeface="Microsoft JhengHei"/>
               </a:rPr>
-              <a:t>本主題：30-30 在 T = 4 最少（498 張），T = 20 反而比只學正確答案還多錯</a:t>
+              <a:t>本教材：30-30 在 T = 4 最好（498 個錯誤），T = 20 反而比只用硬目標還差</a:t>
             </a:r>
           </a:p>
         </p:txBody>
@@ -13043,7 +13044,7 @@
                 </a:solidFill>
                 <a:latin typeface="Microsoft JhengHei"/>
               </a:rPr>
-              <a:t>解釋：溫度越高越接近比對 logit，連非常負的 logit 也要貼齊；太小的學生容量不夠，學這些反而有害。</a:t>
+              <a:t>蒸餾模型小到無法容納笨重模型全部的知識時，忽略那些很負的 logit 反而有幫助。</a:t>
             </a:r>
           </a:p>
         </p:txBody>
@@ -13447,7 +13448,7 @@
                 </a:solidFill>
                 <a:latin typeface="Microsoft JhengHei"/>
               </a:rPr>
-              <a:t>四、結果三：學生從沒看過數字 3</a:t>
+              <a:t>四、未曾見過的數字 3</a:t>
             </a:r>
           </a:p>
         </p:txBody>
@@ -13481,7 +13482,7 @@
                 </a:solidFill>
                 <a:latin typeface="Microsoft JhengHei"/>
               </a:rPr>
-              <a:t>移轉集拿掉所有的 3（本主題剩 9,000 張）；測試集有 1,010 張 3</a:t>
+              <a:t>移轉集拿掉所有的 3（本教材剩 9000 個樣本）；測試集有 1010 個 3</a:t>
             </a:r>
           </a:p>
         </p:txBody>
@@ -13496,7 +13497,7 @@
         </p:nvGraphicFramePr>
         <p:xfrm>
           <a:off x="731520" y="1143000"/>
-          <a:ext cx="10881359" cy="1975104"/>
+          <a:ext cx="10881358" cy="1975104"/>
         </p:xfrm>
         <a:graphic>
           <a:graphicData uri="http://schemas.openxmlformats.org/drawingml/2006/table">
@@ -13505,10 +13506,10 @@
                 <a:tableStyleId>{5C22544A-7EE6-4342-B048-85BDC9FD1C3A}</a:tableStyleId>
               </a:tblPr>
               <a:tblGrid>
-                <a:gridCol w="4932883"/>
-                <a:gridCol w="1886102"/>
-                <a:gridCol w="2176272"/>
-                <a:gridCol w="1886102"/>
+                <a:gridCol w="4804756"/>
+                <a:gridCol w="1837112"/>
+                <a:gridCol w="2119745"/>
+                <a:gridCol w="2119745"/>
               </a:tblGrid>
               <a:tr h="329184">
                 <a:tc>
@@ -13547,7 +13548,7 @@
                           </a:solidFill>
                           <a:latin typeface="Microsoft JhengHei"/>
                         </a:rPr>
-                        <a:t>總共答錯</a:t>
+                        <a:t>測試錯誤數</a:t>
                       </a:r>
                     </a:p>
                   </a:txBody>
@@ -13570,7 +13571,7 @@
                           </a:solidFill>
                           <a:latin typeface="Microsoft JhengHei"/>
                         </a:rPr>
-                        <a:t>其中 3 答錯</a:t>
+                        <a:t>其中 3 的錯誤</a:t>
                       </a:r>
                     </a:p>
                   </a:txBody>
@@ -13593,7 +13594,7 @@
                           </a:solidFill>
                           <a:latin typeface="Microsoft JhengHei"/>
                         </a:rPr>
-                        <a:t>3 的答對率</a:t>
+                        <a:t>測試集 3 答對率</a:t>
                       </a:r>
                     </a:p>
                   </a:txBody>
@@ -13618,7 +13619,7 @@
                           </a:solidFill>
                           <a:latin typeface="Consolas"/>
                         </a:rPr>
-                        <a:t>本主題：只學正確答案</a:t>
+                        <a:t>本教材：只用硬目標</a:t>
                       </a:r>
                     </a:p>
                   </a:txBody>
@@ -13712,7 +13713,7 @@
                           </a:solidFill>
                           <a:latin typeface="Consolas"/>
                         </a:rPr>
-                        <a:t>本主題：蒸餾 T = 8</a:t>
+                        <a:t>本教材：蒸餾 T = 8</a:t>
                       </a:r>
                     </a:p>
                   </a:txBody>
@@ -13806,7 +13807,7 @@
                           </a:solidFill>
                           <a:latin typeface="Consolas"/>
                         </a:rPr>
-                        <a:t>本主題：蒸餾，3 的 logit 加 3.0</a:t>
+                        <a:t>本教材：蒸餾，3 的偏差值加 3.0</a:t>
                       </a:r>
                     </a:p>
                   </a:txBody>
@@ -14128,7 +14129,7 @@
                 </a:solidFill>
                 <a:latin typeface="Microsoft JhengHei"/>
               </a:rPr>
-              <a:t>只學正確答案：訓練時沒有任何一張的答案是 3，</a:t>
+              <a:t>只用硬目標：沒有任何訓練樣本的標籤是 3，</a:t>
             </a:r>
           </a:p>
           <a:p>
@@ -14140,7 +14141,7 @@
                 </a:solidFill>
                 <a:latin typeface="Microsoft JhengHei"/>
               </a:rPr>
-              <a:t>不可能答出 3</a:t>
+              <a:t>網路永遠不會輸出 3</a:t>
             </a:r>
           </a:p>
         </p:txBody>
@@ -14195,7 +14196,7 @@
                 </a:solidFill>
                 <a:latin typeface="Microsoft JhengHei"/>
               </a:rPr>
-              <a:t>蒸餾：老師的軟目標包含「這張 8 有一點像 3」</a:t>
+              <a:t>蒸餾：其他數字的軟目標說明了它們各自</a:t>
             </a:r>
           </a:p>
           <a:p>
@@ -14207,7 +14208,7 @@
                 </a:solidFill>
                 <a:latin typeface="Microsoft JhengHei"/>
               </a:rPr>
-              <a:t>這類資訊，學生由此學到 3 的特徵</a:t>
+              <a:t>有幾分像 3，蒸餾模型由此學到 3</a:t>
             </a:r>
           </a:p>
         </p:txBody>
@@ -14241,7 +14242,7 @@
                 </a:solidFill>
                 <a:latin typeface="Microsoft JhengHei"/>
               </a:rPr>
-              <a:t>答錯的 3 大多是因為 3 這一類的偏差值學得太低：訓練時從來沒有一張圖的答案是 3。</a:t>
+              <a:t>大部分錯誤來自 3 這一類學到的偏差值太低。</a:t>
             </a:r>
           </a:p>
           <a:p>
@@ -14252,7 +14253,7 @@
                 </a:solidFill>
                 <a:latin typeface="Microsoft JhengHei"/>
               </a:rPr>
-              <a:t>論文用測試集挑選加多少，本主題照做；因為用了測試集，加偏差值後的數字偏樂觀。</a:t>
+              <a:t>與論文相同，偏差值加多少是以測試集上的整體表現挑選的，因此修正後的數字偏樂觀。</a:t>
             </a:r>
           </a:p>
         </p:txBody>
@@ -14644,7 +14645,7 @@
                 </a:solidFill>
                 <a:latin typeface="Microsoft JhengHei"/>
               </a:rPr>
-              <a:t>第 4 節語音辨識、第 5 節專家模型、第 6 節軟目標當作正則化</a:t>
+              <a:t>第 4 節語音辨識、第 5 節專家模型、第 6 節軟目標作為正則化</a:t>
             </a:r>
           </a:p>
         </p:txBody>
@@ -14659,7 +14660,7 @@
         </p:nvGraphicFramePr>
         <p:xfrm>
           <a:off x="731520" y="1143000"/>
-          <a:ext cx="5394958" cy="1316736"/>
+          <a:ext cx="5394959" cy="1316736"/>
         </p:xfrm>
         <a:graphic>
           <a:graphicData uri="http://schemas.openxmlformats.org/drawingml/2006/table">
@@ -14668,9 +14669,9 @@
                 <a:tableStyleId>{5C22544A-7EE6-4342-B048-85BDC9FD1C3A}</a:tableStyleId>
               </a:tblPr>
               <a:tblGrid>
-                <a:gridCol w="2525300"/>
-                <a:gridCol w="1492222"/>
-                <a:gridCol w="1377436"/>
+                <a:gridCol w="2472690"/>
+                <a:gridCol w="1798320"/>
+                <a:gridCol w="1123949"/>
               </a:tblGrid>
               <a:tr h="329184">
                 <a:tc>
@@ -14709,7 +14710,7 @@
                           </a:solidFill>
                           <a:latin typeface="Microsoft JhengHei"/>
                         </a:rPr>
-                        <a:t>框架準確率</a:t>
+                        <a:t>測試框架準確率</a:t>
                       </a:r>
                     </a:p>
                   </a:txBody>
@@ -14732,7 +14733,7 @@
                           </a:solidFill>
                           <a:latin typeface="Microsoft JhengHei"/>
                         </a:rPr>
-                        <a:t>詞錯誤率</a:t>
+                        <a:t>WER</a:t>
                       </a:r>
                     </a:p>
                   </a:txBody>
@@ -14757,7 +14758,7 @@
                           </a:solidFill>
                           <a:latin typeface="Consolas"/>
                         </a:rPr>
-                        <a:t>單一模型</a:t>
+                        <a:t>基準模型</a:t>
                       </a:r>
                     </a:p>
                   </a:txBody>
@@ -14989,7 +14990,7 @@
                 </a:solidFill>
                 <a:latin typeface="Microsoft JhengHei"/>
               </a:rPr>
-              <a:t>Android 語音搜尋的聲學模型：10 個模型組合帶來的進步，</a:t>
+              <a:t>Android 語音搜尋的聲學模型：組合模型在框架分類準確率上</a:t>
             </a:r>
           </a:p>
           <a:p>
@@ -15000,7 +15001,7 @@
                 </a:solidFill>
                 <a:latin typeface="Microsoft JhengHei"/>
               </a:rPr>
-              <a:t>超過 80% 移轉到同樣大小的單一模型。</a:t>
+              <a:t>的進步，超過 80% 移轉到蒸餾模型。</a:t>
             </a:r>
           </a:p>
         </p:txBody>
@@ -15024,9 +15025,9 @@
                 <a:tableStyleId>{5C22544A-7EE6-4342-B048-85BDC9FD1C3A}</a:tableStyleId>
               </a:tblPr>
               <a:tblGrid>
-                <a:gridCol w="1818167"/>
-                <a:gridCol w="1575745"/>
-                <a:gridCol w="1818167"/>
+                <a:gridCol w="1776845"/>
+                <a:gridCol w="1421476"/>
+                <a:gridCol w="2013758"/>
               </a:tblGrid>
               <a:tr h="329184">
                 <a:tc>
@@ -15042,7 +15043,7 @@
                           </a:solidFill>
                           <a:latin typeface="Microsoft JhengHei"/>
                         </a:rPr>
-                        <a:t>訓練方式</a:t>
+                        <a:t>系統</a:t>
                       </a:r>
                     </a:p>
                   </a:txBody>
@@ -15065,7 +15066,7 @@
                           </a:solidFill>
                           <a:latin typeface="Microsoft JhengHei"/>
                         </a:rPr>
-                        <a:t>訓練資料</a:t>
+                        <a:t>訓練集</a:t>
                       </a:r>
                     </a:p>
                   </a:txBody>
@@ -15088,7 +15089,7 @@
                           </a:solidFill>
                           <a:latin typeface="Microsoft JhengHei"/>
                         </a:rPr>
-                        <a:t>測試準確率</a:t>
+                        <a:t>測試框架準確率</a:t>
                       </a:r>
                     </a:p>
                   </a:txBody>
@@ -15113,7 +15114,7 @@
                           </a:solidFill>
                           <a:latin typeface="Consolas"/>
                         </a:rPr>
-                        <a:t>硬目標</a:t>
+                        <a:t>基準模型</a:t>
                       </a:r>
                     </a:p>
                   </a:txBody>
@@ -15184,7 +15185,7 @@
                           </a:solidFill>
                           <a:latin typeface="Consolas"/>
                         </a:rPr>
-                        <a:t>硬目標</a:t>
+                        <a:t>基準模型</a:t>
                       </a:r>
                     </a:p>
                   </a:txBody>
@@ -15345,7 +15346,7 @@
                 </a:solidFill>
                 <a:latin typeface="Microsoft JhengHei"/>
               </a:rPr>
-              <a:t>只用 3% 的資料，軟目標仍接近用全部資料的結果；</a:t>
+              <a:t>軟目標讓新模型只用 3% 的訓練集就能良好類推；</a:t>
             </a:r>
           </a:p>
           <a:p>
@@ -15356,7 +15357,7 @@
                 </a:solidFill>
                 <a:latin typeface="Microsoft JhengHei"/>
               </a:rPr>
-              <a:t>硬目標則嚴重過擬合，需要提前停止。</a:t>
+              <a:t>只用硬目標則嚴重過擬合，需要提前停止。</a:t>
             </a:r>
           </a:p>
         </p:txBody>
@@ -15411,7 +15412,7 @@
                 </a:solidFill>
                 <a:latin typeface="Microsoft JhengHei"/>
               </a:rPr>
-              <a:t>專家模型 specialist models：在 1 億張、15,000 類的 JFT 資料集上，</a:t>
+              <a:t>專家模型：在 JFT（1 億張有標籤影像、15,000 個標籤）上，另訓練 61 個專家模型，各自負責一群</a:t>
             </a:r>
           </a:p>
           <a:p>
@@ -15423,7 +15424,7 @@
                 </a:solidFill>
                 <a:latin typeface="Microsoft JhengHei"/>
               </a:rPr>
-              <a:t>另訓練 61 個各自專精一群易混淆類別的模型，與原模型合用，測試準確率由 25.0% 提高到 26.1%。</a:t>
+              <a:t>容易混淆的類別，與通用模型合用，測試準確率由 25.0% 提高到 26.1%。</a:t>
             </a:r>
           </a:p>
         </p:txBody>
@@ -15457,7 +15458,7 @@
                 </a:solidFill>
                 <a:latin typeface="Microsoft JhengHei"/>
               </a:rPr>
-              <a:t>以上數字取自論文表 1、表 3、表 5，本主題沒有重做。</a:t>
+              <a:t>以上數字取自論文表 1、表 3、表 5，本教材沒有重做。</a:t>
             </a:r>
           </a:p>
         </p:txBody>
@@ -15964,7 +15965,7 @@
                 </a:solidFill>
                 <a:latin typeface="Microsoft JhengHei"/>
               </a:rPr>
-              <a:t>1　溫度 T 越高，softmax 的機率越平均，錯誤類別的資訊越看得到</a:t>
+              <a:t>1　溫度越高，分布越軟，錯誤類別的相對機率越能被看見</a:t>
             </a:r>
           </a:p>
         </p:txBody>
@@ -16019,7 +16020,7 @@
                 </a:solidFill>
                 <a:latin typeface="Microsoft JhengHei"/>
               </a:rPr>
-              <a:t>2　損失 = α T² × 軟目標交叉熵 + (1 − α) × 硬目標交叉熵；乘 T² 是為了抵銷 1/T²</a:t>
+              <a:t>2　L = α T² × 與軟目標的交叉熵 + (1 − α) × 與硬目標的交叉熵；T² 抵銷 1/T²</a:t>
             </a:r>
           </a:p>
         </p:txBody>
@@ -16074,7 +16075,7 @@
                 </a:solidFill>
                 <a:latin typeface="Microsoft JhengHei"/>
               </a:rPr>
-              <a:t>3　高溫的極限等於比對 logit；學生很小時，中間的溫度較好</a:t>
+              <a:t>3　比對 logit 是高溫極限；很小的網路在中間溫度最好</a:t>
             </a:r>
           </a:p>
         </p:txBody>
@@ -16129,7 +16130,7 @@
                 </a:solidFill>
                 <a:latin typeface="Microsoft JhengHei"/>
               </a:rPr>
-              <a:t>練習一　T = 2 時，老師 v = (8, 4, 0) 的軟目標是多少？依第 6 頁的四步計算</a:t>
+              <a:t>練習一　T = 2 時，v = (8, 4, 0) 的軟目標是多少？依第 6 頁的四步計算</a:t>
             </a:r>
           </a:p>
         </p:txBody>
@@ -16184,7 +16185,7 @@
                 </a:solidFill>
                 <a:latin typeface="Microsoft JhengHei"/>
               </a:rPr>
-              <a:t>練習二　學生 z 改成 (8, 4, 0)，和老師相同。式 (2) 的梯度是多少？為什麼？</a:t>
+              <a:t>練習二　蒸餾模型的 logit 設為 z = (8, 4, 0)，與 v 相同。式 (2) 的梯度是多少？為什麼？</a:t>
             </a:r>
           </a:p>
         </p:txBody>
@@ -16239,7 +16240,7 @@
                 </a:solidFill>
                 <a:latin typeface="Microsoft JhengHei"/>
               </a:rPr>
-              <a:t>練習三　在 Colab 第 7 段改成拿掉數字 7，重做一次，記錄 7 的答對率</a:t>
+              <a:t>練習三　在 Colab 第 7 段改成拿掉數字 7，記錄測試集 7 的答對率</a:t>
             </a:r>
           </a:p>
         </p:txBody>
@@ -16273,7 +16274,7 @@
                 </a:solidFill>
                 <a:latin typeface="Microsoft JhengHei"/>
               </a:rPr>
-              <a:t>練習一可以在 Colab 第 2 段把 T 改成 2 核對；練習二可以在第 3 段核對。</a:t>
+              <a:t>練習一可在 Colab 第 2 段把 T 改成 2 核對；練習二可在第 3 段核對。</a:t>
             </a:r>
           </a:p>
         </p:txBody>
@@ -16912,9 +16913,9 @@
                           <a:solidFill>
                             <a:srgbClr val="202020"/>
                           </a:solidFill>
-                          <a:latin typeface="Consolas"/>
-                        </a:rPr>
-                        <a:t>一　為什麼要蒸餾</a:t>
+                          <a:latin typeface="Microsoft JhengHei"/>
+                        </a:rPr>
+                        <a:t>一　緒論</a:t>
                       </a:r>
                     </a:p>
                   </a:txBody>
@@ -16935,9 +16936,9 @@
                           <a:solidFill>
                             <a:srgbClr val="202020"/>
                           </a:solidFill>
-                          <a:latin typeface="Consolas"/>
-                        </a:rPr>
-                        <a:t>訓練用大模型、部署用小模型；錯誤答案的機率也有資訊</a:t>
+                          <a:latin typeface="Microsoft JhengHei"/>
+                        </a:rPr>
+                        <a:t>訓練與部署的需求不同；錯誤答案的相對機率</a:t>
                       </a:r>
                     </a:p>
                   </a:txBody>
@@ -16958,7 +16959,7 @@
                           <a:solidFill>
                             <a:srgbClr val="202020"/>
                           </a:solidFill>
-                          <a:latin typeface="Consolas"/>
+                          <a:latin typeface="Microsoft JhengHei"/>
                         </a:rPr>
                         <a:t>3–4</a:t>
                       </a:r>
@@ -16983,9 +16984,9 @@
                           <a:solidFill>
                             <a:srgbClr val="202020"/>
                           </a:solidFill>
-                          <a:latin typeface="Consolas"/>
-                        </a:rPr>
-                        <a:t>二　軟目標與溫度</a:t>
+                          <a:latin typeface="Microsoft JhengHei"/>
+                        </a:rPr>
+                        <a:t>二　軟目標</a:t>
                       </a:r>
                     </a:p>
                   </a:txBody>
@@ -17006,9 +17007,9 @@
                           <a:solidFill>
                             <a:srgbClr val="202020"/>
                           </a:solidFill>
-                          <a:latin typeface="Consolas"/>
-                        </a:rPr>
-                        <a:t>溫度 T 的 softmax 四步計算；T = 1 與 T = 4 的比較</a:t>
+                          <a:latin typeface="Microsoft JhengHei"/>
+                        </a:rPr>
+                        <a:t>帶溫度的 softmax 四步計算；T = 1 與 T = 4 的比較</a:t>
                       </a:r>
                     </a:p>
                   </a:txBody>
@@ -17029,7 +17030,7 @@
                           <a:solidFill>
                             <a:srgbClr val="202020"/>
                           </a:solidFill>
-                          <a:latin typeface="Consolas"/>
+                          <a:latin typeface="Microsoft JhengHei"/>
                         </a:rPr>
                         <a:t>5–8</a:t>
                       </a:r>
@@ -17054,9 +17055,9 @@
                           <a:solidFill>
                             <a:srgbClr val="202020"/>
                           </a:solidFill>
-                          <a:latin typeface="Consolas"/>
-                        </a:rPr>
-                        <a:t>三　蒸餾的損失與梯度</a:t>
+                          <a:latin typeface="Microsoft JhengHei"/>
+                        </a:rPr>
+                        <a:t>三　蒸餾</a:t>
                       </a:r>
                     </a:p>
                   </a:txBody>
@@ -17077,9 +17078,9 @@
                           <a:solidFill>
                             <a:srgbClr val="202020"/>
                           </a:solidFill>
-                          <a:latin typeface="Consolas"/>
-                        </a:rPr>
-                        <a:t>損失 L = α T² C_soft + (1 − α) C_hard 逐步計算；梯度式；為什麼乘 T²</a:t>
+                          <a:latin typeface="Microsoft JhengHei"/>
+                        </a:rPr>
+                        <a:t>L = α T² C_soft + (1 − α) C_hard 逐步計算；梯度；為什麼乘 T²</a:t>
                       </a:r>
                     </a:p>
                   </a:txBody>
@@ -17100,7 +17101,7 @@
                           <a:solidFill>
                             <a:srgbClr val="202020"/>
                           </a:solidFill>
-                          <a:latin typeface="Consolas"/>
+                          <a:latin typeface="Microsoft JhengHei"/>
                         </a:rPr>
                         <a:t>9–13</a:t>
                       </a:r>
@@ -17125,9 +17126,9 @@
                           <a:solidFill>
                             <a:srgbClr val="202020"/>
                           </a:solidFill>
-                          <a:latin typeface="Consolas"/>
-                        </a:rPr>
-                        <a:t>四　MNIST 實驗</a:t>
+                          <a:latin typeface="Microsoft JhengHei"/>
+                        </a:rPr>
+                        <a:t>四　MNIST 初步實驗</a:t>
                       </a:r>
                     </a:p>
                   </a:txBody>
@@ -17148,9 +17149,9 @@
                           <a:solidFill>
                             <a:srgbClr val="202020"/>
                           </a:solidFill>
-                          <a:latin typeface="Consolas"/>
-                        </a:rPr>
-                        <a:t>蒸餾的學生答錯較少；小學生取中間溫度；沒看過 3 也認得出 3</a:t>
+                          <a:latin typeface="Microsoft JhengHei"/>
+                        </a:rPr>
+                        <a:t>測試錯誤數較少；很小的網路取中間溫度；未曾見過的數字 3</a:t>
                       </a:r>
                     </a:p>
                   </a:txBody>
@@ -17171,7 +17172,7 @@
                           <a:solidFill>
                             <a:srgbClr val="202020"/>
                           </a:solidFill>
-                          <a:latin typeface="Consolas"/>
+                          <a:latin typeface="Microsoft JhengHei"/>
                         </a:rPr>
                         <a:t>14–18</a:t>
                       </a:r>
@@ -17196,7 +17197,7 @@
                           <a:solidFill>
                             <a:srgbClr val="202020"/>
                           </a:solidFill>
-                          <a:latin typeface="Consolas"/>
+                          <a:latin typeface="Microsoft JhengHei"/>
                         </a:rPr>
                         <a:t>整理與練習</a:t>
                       </a:r>
@@ -17219,9 +17220,9 @@
                           <a:solidFill>
                             <a:srgbClr val="202020"/>
                           </a:solidFill>
-                          <a:latin typeface="Consolas"/>
-                        </a:rPr>
-                        <a:t>三個重點與三題練習</a:t>
+                          <a:latin typeface="Microsoft JhengHei"/>
+                        </a:rPr>
+                        <a:t>三個要點與三題練習</a:t>
                       </a:r>
                     </a:p>
                   </a:txBody>
@@ -17242,7 +17243,7 @@
                           <a:solidFill>
                             <a:srgbClr val="202020"/>
                           </a:solidFill>
-                          <a:latin typeface="Consolas"/>
+                          <a:latin typeface="Microsoft JhengHei"/>
                         </a:rPr>
                         <a:t>19</a:t>
                       </a:r>
@@ -17267,8 +17268,8 @@
         </p:nvSpPr>
         <p:spPr>
           <a:xfrm>
-            <a:off x="731520" y="3749039"/>
-            <a:ext cx="10881360" cy="1325880"/>
+            <a:off x="731520" y="3429000"/>
+            <a:ext cx="10881360" cy="1463040"/>
           </a:xfrm>
           <a:prstGeom prst="rect">
             <a:avLst/>
@@ -17321,7 +17322,7 @@
                 </a:solidFill>
                 <a:latin typeface="Microsoft JhengHei"/>
               </a:rPr>
-              <a:t>1. 手算溫度 T 的 softmax，說明軟目標比硬目標多了什麼資訊</a:t>
+              <a:t>1. 手算帶溫度的 softmax，說明軟目標比硬目標多傳遞了什麼資訊</a:t>
             </a:r>
           </a:p>
           <a:p>
@@ -17333,7 +17334,7 @@
                 </a:solidFill>
                 <a:latin typeface="Microsoft JhengHei"/>
               </a:rPr>
-              <a:t>2. 寫出蒸餾的損失函數，逐步算出損失與梯度</a:t>
+              <a:t>2. 寫出蒸餾的目標函數，逐步算出其值與梯度</a:t>
             </a:r>
           </a:p>
           <a:p>
@@ -17345,7 +17346,7 @@
                 </a:solidFill>
                 <a:latin typeface="Microsoft JhengHei"/>
               </a:rPr>
-              <a:t>3. 在 Colab 訓練老師與學生模型，並解讀溫度對結果的影響</a:t>
+              <a:t>3. 在 Colab 訓練笨重模型與蒸餾模型，並解讀溫度的影響</a:t>
             </a:r>
           </a:p>
         </p:txBody>
@@ -17358,7 +17359,7 @@
         </p:nvSpPr>
         <p:spPr>
           <a:xfrm>
-            <a:off x="731520" y="5303520"/>
+            <a:off x="731520" y="5166360"/>
             <a:ext cx="10881360" cy="1097280"/>
           </a:xfrm>
           <a:prstGeom prst="rect">
@@ -17702,7 +17703,7 @@
                 </a:solidFill>
                 <a:latin typeface="Microsoft JhengHei"/>
               </a:rPr>
-              <a:t>一、訓練與部署的需求不同</a:t>
+              <a:t>一、緒論</a:t>
             </a:r>
           </a:p>
         </p:txBody>
@@ -17736,7 +17737,7 @@
                 </a:solidFill>
                 <a:latin typeface="Microsoft JhengHei"/>
               </a:rPr>
-              <a:t>論文第 1 節</a:t>
+              <a:t>訓練階段與部署階段的需求大不相同（論文第 1 節）</a:t>
             </a:r>
           </a:p>
         </p:txBody>
@@ -17760,9 +17761,9 @@
                 <a:tableStyleId>{5C22544A-7EE6-4342-B048-85BDC9FD1C3A}</a:tableStyleId>
               </a:tblPr>
               <a:tblGrid>
-                <a:gridCol w="1795549"/>
-                <a:gridCol w="2394065"/>
-                <a:gridCol w="2394065"/>
+                <a:gridCol w="1431234"/>
+                <a:gridCol w="2719346"/>
+                <a:gridCol w="2433099"/>
               </a:tblGrid>
               <a:tr h="329184">
                 <a:tc>
@@ -17847,9 +17848,9 @@
                           <a:solidFill>
                             <a:srgbClr val="202020"/>
                           </a:solidFill>
-                          <a:latin typeface="Consolas"/>
-                        </a:rPr>
-                        <a:t>資料量</a:t>
+                          <a:latin typeface="Microsoft JhengHei"/>
+                        </a:rPr>
+                        <a:t>資料</a:t>
                       </a:r>
                     </a:p>
                   </a:txBody>
@@ -17870,9 +17871,9 @@
                           <a:solidFill>
                             <a:srgbClr val="202020"/>
                           </a:solidFill>
-                          <a:latin typeface="Consolas"/>
-                        </a:rPr>
-                        <a:t>很大</a:t>
+                          <a:latin typeface="Microsoft JhengHei"/>
+                        </a:rPr>
+                        <a:t>非常大、高度重複</a:t>
                       </a:r>
                     </a:p>
                   </a:txBody>
@@ -17893,7 +17894,7 @@
                           <a:solidFill>
                             <a:srgbClr val="202020"/>
                           </a:solidFill>
-                          <a:latin typeface="Consolas"/>
+                          <a:latin typeface="Microsoft JhengHei"/>
                         </a:rPr>
                         <a:t>一次一筆</a:t>
                       </a:r>
@@ -17918,9 +17919,9 @@
                           <a:solidFill>
                             <a:srgbClr val="202020"/>
                           </a:solidFill>
-                          <a:latin typeface="Consolas"/>
-                        </a:rPr>
-                        <a:t>時間限制</a:t>
+                          <a:latin typeface="Microsoft JhengHei"/>
+                        </a:rPr>
+                        <a:t>時間</a:t>
                       </a:r>
                     </a:p>
                   </a:txBody>
@@ -17941,9 +17942,9 @@
                           <a:solidFill>
                             <a:srgbClr val="202020"/>
                           </a:solidFill>
-                          <a:latin typeface="Consolas"/>
-                        </a:rPr>
-                        <a:t>可以算幾天</a:t>
+                          <a:latin typeface="Microsoft JhengHei"/>
+                        </a:rPr>
+                        <a:t>不必即時完成</a:t>
                       </a:r>
                     </a:p>
                   </a:txBody>
@@ -17964,9 +17965,9 @@
                           <a:solidFill>
                             <a:srgbClr val="202020"/>
                           </a:solidFill>
-                          <a:latin typeface="Consolas"/>
-                        </a:rPr>
-                        <a:t>要即時回應</a:t>
+                          <a:latin typeface="Microsoft JhengHei"/>
+                        </a:rPr>
+                        <a:t>延遲要求嚴格</a:t>
                       </a:r>
                     </a:p>
                   </a:txBody>
@@ -17989,9 +17990,9 @@
                           <a:solidFill>
                             <a:srgbClr val="202020"/>
                           </a:solidFill>
-                          <a:latin typeface="Consolas"/>
-                        </a:rPr>
-                        <a:t>計算資源</a:t>
+                          <a:latin typeface="Microsoft JhengHei"/>
+                        </a:rPr>
+                        <a:t>計算</a:t>
                       </a:r>
                     </a:p>
                   </a:txBody>
@@ -18012,9 +18013,9 @@
                           <a:solidFill>
                             <a:srgbClr val="202020"/>
                           </a:solidFill>
-                          <a:latin typeface="Consolas"/>
-                        </a:rPr>
-                        <a:t>大量 GPU</a:t>
+                          <a:latin typeface="Microsoft JhengHei"/>
+                        </a:rPr>
+                        <a:t>可使用大量運算</a:t>
                       </a:r>
                     </a:p>
                   </a:txBody>
@@ -18035,9 +18036,9 @@
                           <a:solidFill>
                             <a:srgbClr val="202020"/>
                           </a:solidFill>
-                          <a:latin typeface="Consolas"/>
-                        </a:rPr>
-                        <a:t>手機、伺服器</a:t>
+                          <a:latin typeface="Microsoft JhengHei"/>
+                        </a:rPr>
+                        <a:t>運算資源有限</a:t>
                       </a:r>
                     </a:p>
                   </a:txBody>
@@ -18060,9 +18061,9 @@
                           <a:solidFill>
                             <a:srgbClr val="202020"/>
                           </a:solidFill>
-                          <a:latin typeface="Consolas"/>
-                        </a:rPr>
-                        <a:t>適合的模型</a:t>
+                          <a:latin typeface="Microsoft JhengHei"/>
+                        </a:rPr>
+                        <a:t>模型</a:t>
                       </a:r>
                     </a:p>
                   </a:txBody>
@@ -18083,9 +18084,9 @@
                           <a:solidFill>
                             <a:srgbClr val="202020"/>
                           </a:solidFill>
-                          <a:latin typeface="Consolas"/>
-                        </a:rPr>
-                        <a:t>大模型或多個模型</a:t>
+                          <a:latin typeface="Microsoft JhengHei"/>
+                        </a:rPr>
+                        <a:t>笨重模型</a:t>
                       </a:r>
                     </a:p>
                   </a:txBody>
@@ -18106,7 +18107,7 @@
                           <a:solidFill>
                             <a:srgbClr val="202020"/>
                           </a:solidFill>
-                          <a:latin typeface="Consolas"/>
+                          <a:latin typeface="Microsoft JhengHei"/>
                         </a:rPr>
                         <a:t>小模型</a:t>
                       </a:r>
@@ -18167,25 +18168,25 @@
           <a:p>
             <a:pPr algn="ctr"/>
             <a:r>
-              <a:rPr sz="2000" b="1">
+              <a:rPr sz="1800" b="1">
                 <a:solidFill>
                   <a:srgbClr val="1F4E79"/>
                 </a:solidFill>
                 <a:latin typeface="Microsoft JhengHei"/>
               </a:rPr>
-              <a:t>老師模型</a:t>
+              <a:t>笨重模型 cumbersome model</a:t>
             </a:r>
           </a:p>
           <a:p>
             <a:pPr algn="ctr"/>
             <a:r>
-              <a:rPr sz="1600" b="0">
+              <a:rPr sz="1400" b="0">
                 <a:solidFill>
                   <a:srgbClr val="1F4E79"/>
                 </a:solidFill>
                 <a:latin typeface="Microsoft JhengHei"/>
               </a:rPr>
-              <a:t>大、訓練好、準確</a:t>
+              <a:t>多個模型的組合，或強正則化的大網路</a:t>
             </a:r>
           </a:p>
         </p:txBody>
@@ -18304,25 +18305,25 @@
           <a:p>
             <a:pPr algn="ctr"/>
             <a:r>
-              <a:rPr sz="2000" b="1">
+              <a:rPr sz="1800" b="1">
                 <a:solidFill>
                   <a:srgbClr val="1E7A45"/>
                 </a:solidFill>
                 <a:latin typeface="Microsoft JhengHei"/>
               </a:rPr>
-              <a:t>學生模型</a:t>
+              <a:t>蒸餾模型 distilled model</a:t>
             </a:r>
           </a:p>
           <a:p>
             <a:pPr algn="ctr"/>
             <a:r>
-              <a:rPr sz="1600" b="0">
+              <a:rPr sz="1400" b="0">
                 <a:solidFill>
                   <a:srgbClr val="1E7A45"/>
                 </a:solidFill>
                 <a:latin typeface="Microsoft JhengHei"/>
               </a:rPr>
-              <a:t>小、快、準備部署</a:t>
+              <a:t>小、適合部署</a:t>
             </a:r>
           </a:p>
         </p:txBody>
@@ -18371,25 +18372,25 @@
           <a:p>
             <a:pPr algn="l"/>
             <a:r>
-              <a:rPr sz="2000" b="1">
+              <a:rPr sz="1900" b="1">
                 <a:solidFill>
                   <a:srgbClr val="1E7A45"/>
                 </a:solidFill>
                 <a:latin typeface="Microsoft JhengHei"/>
               </a:rPr>
-              <a:t>蒸餾 distillation：先訓練好大模型，</a:t>
+              <a:t>蒸餾 distillation：另一種訓練方式，</a:t>
             </a:r>
           </a:p>
           <a:p>
             <a:pPr algn="l"/>
             <a:r>
-              <a:rPr sz="2000" b="1">
+              <a:rPr sz="1900" b="1">
                 <a:solidFill>
                   <a:srgbClr val="1E7A45"/>
                 </a:solidFill>
                 <a:latin typeface="Microsoft JhengHei"/>
               </a:rPr>
-              <a:t>再把它的知識移轉給小模型</a:t>
+              <a:t>把笨重模型的知識移轉到適合部署的小模型</a:t>
             </a:r>
           </a:p>
         </p:txBody>
@@ -18417,35 +18418,24 @@
           <a:lstStyle/>
           <a:p>
             <a:r>
-              <a:rPr sz="1900" b="0">
+              <a:rPr sz="1800" b="0">
                 <a:solidFill>
                   <a:srgbClr val="202020"/>
                 </a:solidFill>
                 <a:latin typeface="Microsoft JhengHei"/>
               </a:rPr>
-              <a:t>一個模型的知識，通常被認為就是它的參數。依這個看法，換了模型的架構，知識就帶不走。</a:t>
+              <a:t>我們往往把一個訓練好的模型的知識，等同於它學到的參數值；這使人難以看出，如何改變模型的形式而保留同樣的知識。</a:t>
             </a:r>
           </a:p>
           <a:p>
             <a:r>
-              <a:rPr sz="1900" b="0">
+              <a:rPr sz="1800" b="0">
                 <a:solidFill>
                   <a:srgbClr val="202020"/>
                 </a:solidFill>
                 <a:latin typeface="Microsoft JhengHei"/>
               </a:rPr>
-              <a:t>論文採用另一個看法：知識是模型學到的「輸入到輸出的對應」。</a:t>
-            </a:r>
-          </a:p>
-          <a:p>
-            <a:r>
-              <a:rPr sz="1900" b="0">
-                <a:solidFill>
-                  <a:srgbClr val="202020"/>
-                </a:solidFill>
-                <a:latin typeface="Microsoft JhengHei"/>
-              </a:rPr>
-              <a:t>依這個看法，只要小模型對每一個輸入給出和大模型相近的輸出，知識就移轉過去了。</a:t>
+              <a:t>一個較抽象、不綁定特定模型的看法是：知識是模型學到的、從輸入向量到輸出向量的對應。</a:t>
             </a:r>
           </a:p>
         </p:txBody>
@@ -18941,7 +18931,7 @@
                 </a:solidFill>
                 <a:latin typeface="Microsoft JhengHei"/>
               </a:rPr>
-              <a:t>一、錯誤答案的機率也有資訊</a:t>
+              <a:t>一、錯誤答案的相對機率</a:t>
             </a:r>
           </a:p>
         </p:txBody>
@@ -18975,7 +18965,7 @@
                 </a:solidFill>
                 <a:latin typeface="Microsoft JhengHei"/>
               </a:rPr>
-              <a:t>論文第 1 節舉的例子</a:t>
+              <a:t>論文第 1 節的例子</a:t>
             </a:r>
           </a:p>
         </p:txBody>
@@ -18988,7 +18978,7 @@
         </p:nvSpPr>
         <p:spPr>
           <a:xfrm>
-            <a:off x="731520" y="1097280"/>
+            <a:off x="731520" y="1051560"/>
             <a:ext cx="10881360" cy="822960"/>
           </a:xfrm>
           <a:prstGeom prst="rect">
@@ -19003,13 +18993,13 @@
           <a:lstStyle/>
           <a:p>
             <a:r>
-              <a:rPr sz="1900" b="0">
+              <a:rPr sz="1800" b="0">
                 <a:solidFill>
                   <a:srgbClr val="202020"/>
                 </a:solidFill>
                 <a:latin typeface="Microsoft JhengHei"/>
               </a:rPr>
-              <a:t>訓練好的分類模型，除了正確類別，也會給每個錯誤類別一個機率。這些機率大小不同，反映模型怎麼看待輸入。</a:t>
+              <a:t>學習的副作用是：訓練好的模型會給所有錯誤答案一個機率。這些機率即使很小，彼此仍可相差許多倍，並透露模型傾向如何類推。</a:t>
             </a:r>
           </a:p>
         </p:txBody>
@@ -19023,8 +19013,8 @@
           <p:nvPr/>
         </p:nvGraphicFramePr>
         <p:xfrm>
-          <a:off x="731520" y="1920240"/>
-          <a:ext cx="6400798" cy="987552"/>
+          <a:off x="731520" y="2011680"/>
+          <a:ext cx="6400799" cy="987552"/>
         </p:xfrm>
         <a:graphic>
           <a:graphicData uri="http://schemas.openxmlformats.org/drawingml/2006/table">
@@ -19033,9 +19023,9 @@
                 <a:tableStyleId>{5C22544A-7EE6-4342-B048-85BDC9FD1C3A}</a:tableStyleId>
               </a:tblPr>
               <a:tblGrid>
-                <a:gridCol w="2438400"/>
-                <a:gridCol w="1981199"/>
-                <a:gridCol w="1981199"/>
+                <a:gridCol w="2381693"/>
+                <a:gridCol w="1935125"/>
+                <a:gridCol w="2083981"/>
               </a:tblGrid>
               <a:tr h="329184">
                 <a:tc>
@@ -19051,7 +19041,7 @@
                           </a:solidFill>
                           <a:latin typeface="Microsoft JhengHei"/>
                         </a:rPr>
-                        <a:t>一張 BMW 的照片</a:t>
+                        <a:t>一張 BMW 的影像</a:t>
                       </a:r>
                     </a:p>
                   </a:txBody>
@@ -19074,7 +19064,7 @@
                           </a:solidFill>
                           <a:latin typeface="Microsoft JhengHei"/>
                         </a:rPr>
-                        <a:t>被認為是</a:t>
+                        <a:t>被誤認為</a:t>
                       </a:r>
                     </a:p>
                   </a:txBody>
@@ -19097,7 +19087,7 @@
                           </a:solidFill>
                           <a:latin typeface="Microsoft JhengHei"/>
                         </a:rPr>
-                        <a:t>機率</a:t>
+                        <a:t>機會</a:t>
                       </a:r>
                     </a:p>
                   </a:txBody>
@@ -19120,7 +19110,7 @@
                           <a:solidFill>
                             <a:srgbClr val="202020"/>
                           </a:solidFill>
-                          <a:latin typeface="Consolas"/>
+                          <a:latin typeface="Microsoft JhengHei"/>
                         </a:rPr>
                         <a:t/>
                       </a:r>
@@ -19143,7 +19133,7 @@
                           <a:solidFill>
                             <a:srgbClr val="202020"/>
                           </a:solidFill>
-                          <a:latin typeface="Consolas"/>
+                          <a:latin typeface="Microsoft JhengHei"/>
                         </a:rPr>
                         <a:t>垃圾車</a:t>
                       </a:r>
@@ -19166,7 +19156,7 @@
                           <a:solidFill>
                             <a:srgbClr val="202020"/>
                           </a:solidFill>
-                          <a:latin typeface="Consolas"/>
+                          <a:latin typeface="Microsoft JhengHei"/>
                         </a:rPr>
                         <a:t>很小</a:t>
                       </a:r>
@@ -19191,7 +19181,7 @@
                           <a:solidFill>
                             <a:srgbClr val="202020"/>
                           </a:solidFill>
-                          <a:latin typeface="Consolas"/>
+                          <a:latin typeface="Microsoft JhengHei"/>
                         </a:rPr>
                         <a:t/>
                       </a:r>
@@ -19214,7 +19204,7 @@
                           <a:solidFill>
                             <a:srgbClr val="202020"/>
                           </a:solidFill>
-                          <a:latin typeface="Consolas"/>
+                          <a:latin typeface="Microsoft JhengHei"/>
                         </a:rPr>
                         <a:t>紅蘿蔔</a:t>
                       </a:r>
@@ -19237,9 +19227,9 @@
                           <a:solidFill>
                             <a:srgbClr val="202020"/>
                           </a:solidFill>
-                          <a:latin typeface="Consolas"/>
-                        </a:rPr>
-                        <a:t>小很多倍</a:t>
+                          <a:latin typeface="Microsoft JhengHei"/>
+                        </a:rPr>
+                        <a:t>還要小很多倍</a:t>
                       </a:r>
                     </a:p>
                   </a:txBody>
@@ -19263,8 +19253,8 @@
           <p:nvPr/>
         </p:nvGraphicFramePr>
         <p:xfrm>
-          <a:off x="731520" y="3200400"/>
-          <a:ext cx="6400798" cy="987552"/>
+          <a:off x="731520" y="3246120"/>
+          <a:ext cx="6400799" cy="987552"/>
         </p:xfrm>
         <a:graphic>
           <a:graphicData uri="http://schemas.openxmlformats.org/drawingml/2006/table">
@@ -19273,9 +19263,9 @@
                 <a:tableStyleId>{5C22544A-7EE6-4342-B048-85BDC9FD1C3A}</a:tableStyleId>
               </a:tblPr>
               <a:tblGrid>
-                <a:gridCol w="2438400"/>
-                <a:gridCol w="1981199"/>
-                <a:gridCol w="1981199"/>
+                <a:gridCol w="2381693"/>
+                <a:gridCol w="1935125"/>
+                <a:gridCol w="2083981"/>
               </a:tblGrid>
               <a:tr h="329184">
                 <a:tc>
@@ -19291,7 +19281,7 @@
                           </a:solidFill>
                           <a:latin typeface="Microsoft JhengHei"/>
                         </a:rPr>
-                        <a:t>一張手寫的 2</a:t>
+                        <a:t>某種寫法的 2</a:t>
                       </a:r>
                     </a:p>
                   </a:txBody>
@@ -19314,7 +19304,7 @@
                           </a:solidFill>
                           <a:latin typeface="Microsoft JhengHei"/>
                         </a:rPr>
-                        <a:t>被認為是 3</a:t>
+                        <a:t>是 3 的機率</a:t>
                       </a:r>
                     </a:p>
                   </a:txBody>
@@ -19337,7 +19327,7 @@
                           </a:solidFill>
                           <a:latin typeface="Microsoft JhengHei"/>
                         </a:rPr>
-                        <a:t>被認為是 7</a:t>
+                        <a:t>是 7 的機率</a:t>
                       </a:r>
                     </a:p>
                   </a:txBody>
@@ -19360,9 +19350,9 @@
                           <a:solidFill>
                             <a:srgbClr val="202020"/>
                           </a:solidFill>
-                          <a:latin typeface="Consolas"/>
-                        </a:rPr>
-                        <a:t>第一種寫法</a:t>
+                          <a:latin typeface="Microsoft JhengHei"/>
+                        </a:rPr>
+                        <a:t>一種寫法</a:t>
                       </a:r>
                     </a:p>
                   </a:txBody>
@@ -19383,7 +19373,7 @@
                           <a:solidFill>
                             <a:srgbClr val="202020"/>
                           </a:solidFill>
-                          <a:latin typeface="Consolas"/>
+                          <a:latin typeface="Microsoft JhengHei"/>
                         </a:rPr>
                         <a:t>10⁻⁶</a:t>
                       </a:r>
@@ -19406,7 +19396,7 @@
                           <a:solidFill>
                             <a:srgbClr val="202020"/>
                           </a:solidFill>
-                          <a:latin typeface="Consolas"/>
+                          <a:latin typeface="Microsoft JhengHei"/>
                         </a:rPr>
                         <a:t>10⁻⁹</a:t>
                       </a:r>
@@ -19431,9 +19421,9 @@
                           <a:solidFill>
                             <a:srgbClr val="202020"/>
                           </a:solidFill>
-                          <a:latin typeface="Consolas"/>
-                        </a:rPr>
-                        <a:t>第二種寫法</a:t>
+                          <a:latin typeface="Microsoft JhengHei"/>
+                        </a:rPr>
+                        <a:t>另一種寫法</a:t>
                       </a:r>
                     </a:p>
                   </a:txBody>
@@ -19454,7 +19444,7 @@
                           <a:solidFill>
                             <a:srgbClr val="202020"/>
                           </a:solidFill>
-                          <a:latin typeface="Consolas"/>
+                          <a:latin typeface="Microsoft JhengHei"/>
                         </a:rPr>
                         <a:t>10⁻⁹</a:t>
                       </a:r>
@@ -19477,7 +19467,7 @@
                           <a:solidFill>
                             <a:srgbClr val="202020"/>
                           </a:solidFill>
-                          <a:latin typeface="Consolas"/>
+                          <a:latin typeface="Microsoft JhengHei"/>
                         </a:rPr>
                         <a:t>10⁻⁶</a:t>
                       </a:r>
@@ -19502,8 +19492,8 @@
         </p:nvSpPr>
         <p:spPr>
           <a:xfrm>
-            <a:off x="7498079" y="1920240"/>
-            <a:ext cx="4114800" cy="2286000"/>
+            <a:off x="7498079" y="2011680"/>
+            <a:ext cx="4114800" cy="2240280"/>
           </a:xfrm>
           <a:prstGeom prst="rect">
             <a:avLst/>
@@ -19544,7 +19534,7 @@
                 </a:solidFill>
                 <a:latin typeface="Microsoft JhengHei"/>
               </a:rPr>
-              <a:t>第一種寫法比較像 3，</a:t>
+              <a:t>這定義了資料之間豐富的相似結構：</a:t>
             </a:r>
           </a:p>
           <a:p>
@@ -19556,43 +19546,7 @@
                 </a:solidFill>
                 <a:latin typeface="Microsoft JhengHei"/>
               </a:rPr>
-              <a:t>第二種寫法比較像 7。</a:t>
-            </a:r>
-          </a:p>
-          <a:p>
-            <a:pPr algn="l"/>
-            <a:r>
-              <a:rPr sz="1900" b="1">
-                <a:solidFill>
-                  <a:srgbClr val="1E7A45"/>
-                </a:solidFill>
-                <a:latin typeface="Microsoft JhengHei"/>
-              </a:rPr>
-              <a:t/>
-            </a:r>
-          </a:p>
-          <a:p>
-            <a:pPr algn="l"/>
-            <a:r>
-              <a:rPr sz="1900" b="1">
-                <a:solidFill>
-                  <a:srgbClr val="1E7A45"/>
-                </a:solidFill>
-                <a:latin typeface="Microsoft JhengHei"/>
-              </a:rPr>
-              <a:t>這是資料之間的相似關係，</a:t>
-            </a:r>
-          </a:p>
-          <a:p>
-            <a:pPr algn="l"/>
-            <a:r>
-              <a:rPr sz="1900" b="1">
-                <a:solidFill>
-                  <a:srgbClr val="1E7A45"/>
-                </a:solidFill>
-                <a:latin typeface="Microsoft JhengHei"/>
-              </a:rPr>
-              <a:t>只看正確答案得不到。</a:t>
+              <a:t>哪些 2 像 3、哪些 2 像 7。</a:t>
             </a:r>
           </a:p>
         </p:txBody>
@@ -19641,25 +19595,25 @@
           <a:p>
             <a:pPr algn="l"/>
             <a:r>
-              <a:rPr sz="1900" b="1">
+              <a:rPr sz="1800" b="1">
                 <a:solidFill>
                   <a:srgbClr val="C03030"/>
                 </a:solidFill>
                 <a:latin typeface="Microsoft JhengHei"/>
               </a:rPr>
-              <a:t>問題：10⁻⁶ 與 10⁻⁹ 都太接近 0，用一般的交叉熵訓練學生時，這兩個數字幾乎不影響損失。</a:t>
+              <a:t>問題：這些機率太接近 0，在移轉階段對交叉熵代價函數幾乎沒有影響。</a:t>
             </a:r>
           </a:p>
           <a:p>
             <a:pPr algn="l"/>
             <a:r>
-              <a:rPr sz="1900" b="1">
+              <a:rPr sz="1800" b="1">
                 <a:solidFill>
                   <a:srgbClr val="C03030"/>
                 </a:solidFill>
                 <a:latin typeface="Microsoft JhengHei"/>
               </a:rPr>
-              <a:t>解法：提高 softmax 的溫度，讓這些小機率變大，見下一部分。</a:t>
+              <a:t>論文的解法：提高最後一層 softmax 的溫度，直到笨重模型產生夠軟的目標（第二部分）。</a:t>
             </a:r>
           </a:p>
         </p:txBody>
@@ -20112,7 +20066,7 @@
         </p:nvSpPr>
         <p:spPr>
           <a:xfrm>
-            <a:off x="731520" y="1097280"/>
+            <a:off x="731520" y="1051560"/>
             <a:ext cx="10881360" cy="822960"/>
           </a:xfrm>
           <a:prstGeom prst="rect">
@@ -20133,18 +20087,7 @@
                 </a:solidFill>
                 <a:latin typeface="Microsoft JhengHei"/>
               </a:rPr>
-              <a:t>神經網路最後一層輸出的數字稱為 logit。softmax 把 logit 轉成機率。</a:t>
-            </a:r>
-          </a:p>
-          <a:p>
-            <a:r>
-              <a:rPr sz="1900" b="0">
-                <a:solidFill>
-                  <a:srgbClr val="202020"/>
-                </a:solidFill>
-                <a:latin typeface="Microsoft JhengHei"/>
-              </a:rPr>
-              <a:t>為了能手算，只取「2、3、7」三個類別。</a:t>
+              <a:t>logit 是最後一層 softmax 的輸入。為了能手算，只考慮 2、3、7 三個類別。</a:t>
             </a:r>
           </a:p>
         </p:txBody>
@@ -20158,8 +20101,8 @@
           <p:nvPr/>
         </p:nvGraphicFramePr>
         <p:xfrm>
-          <a:off x="731520" y="2057400"/>
-          <a:ext cx="5486398" cy="1316736"/>
+          <a:off x="731520" y="1965960"/>
+          <a:ext cx="5852159" cy="1316736"/>
         </p:xfrm>
         <a:graphic>
           <a:graphicData uri="http://schemas.openxmlformats.org/drawingml/2006/table">
@@ -20168,10 +20111,10 @@
                 <a:tableStyleId>{5C22544A-7EE6-4342-B048-85BDC9FD1C3A}</a:tableStyleId>
               </a:tblPr>
               <a:tblGrid>
-                <a:gridCol w="954156"/>
-                <a:gridCol w="1550504"/>
-                <a:gridCol w="1550504"/>
-                <a:gridCol w="1431234"/>
+                <a:gridCol w="900332"/>
+                <a:gridCol w="1688123"/>
+                <a:gridCol w="1688123"/>
+                <a:gridCol w="1575581"/>
               </a:tblGrid>
               <a:tr h="329184">
                 <a:tc>
@@ -20181,7 +20124,7 @@
                     <a:p>
                       <a:pPr algn="ctr"/>
                       <a:r>
-                        <a:rPr sz="1800" b="1">
+                        <a:rPr sz="1700" b="1">
                           <a:solidFill>
                             <a:srgbClr val="FFFFFF"/>
                           </a:solidFill>
@@ -20204,13 +20147,13 @@
                     <a:p>
                       <a:pPr algn="ctr"/>
                       <a:r>
-                        <a:rPr sz="1800" b="1">
+                        <a:rPr sz="1700" b="1">
                           <a:solidFill>
                             <a:srgbClr val="FFFFFF"/>
                           </a:solidFill>
                           <a:latin typeface="Microsoft JhengHei"/>
                         </a:rPr>
-                        <a:t>老師 logit v</a:t>
+                        <a:t>笨重模型 v</a:t>
                       </a:r>
                     </a:p>
                   </a:txBody>
@@ -20227,13 +20170,13 @@
                     <a:p>
                       <a:pPr algn="ctr"/>
                       <a:r>
-                        <a:rPr sz="1800" b="1">
+                        <a:rPr sz="1700" b="1">
                           <a:solidFill>
                             <a:srgbClr val="FFFFFF"/>
                           </a:solidFill>
                           <a:latin typeface="Microsoft JhengHei"/>
                         </a:rPr>
-                        <a:t>學生 logit z</a:t>
+                        <a:t>蒸餾模型 z</a:t>
                       </a:r>
                     </a:p>
                   </a:txBody>
@@ -20250,13 +20193,13 @@
                     <a:p>
                       <a:pPr algn="ctr"/>
                       <a:r>
-                        <a:rPr sz="1800" b="1">
+                        <a:rPr sz="1700" b="1">
                           <a:solidFill>
                             <a:srgbClr val="FFFFFF"/>
                           </a:solidFill>
                           <a:latin typeface="Microsoft JhengHei"/>
                         </a:rPr>
-                        <a:t>正確答案 y</a:t>
+                        <a:t>正確標籤 y</a:t>
                       </a:r>
                     </a:p>
                   </a:txBody>
@@ -20275,7 +20218,7 @@
                     <a:p>
                       <a:pPr algn="ctr"/>
                       <a:r>
-                        <a:rPr sz="1800" b="0">
+                        <a:rPr sz="1700" b="0">
                           <a:solidFill>
                             <a:srgbClr val="202020"/>
                           </a:solidFill>
@@ -20298,7 +20241,7 @@
                     <a:p>
                       <a:pPr algn="ctr"/>
                       <a:r>
-                        <a:rPr sz="1800" b="0">
+                        <a:rPr sz="1700" b="0">
                           <a:solidFill>
                             <a:srgbClr val="202020"/>
                           </a:solidFill>
@@ -20321,7 +20264,7 @@
                     <a:p>
                       <a:pPr algn="ctr"/>
                       <a:r>
-                        <a:rPr sz="1800" b="0">
+                        <a:rPr sz="1700" b="0">
                           <a:solidFill>
                             <a:srgbClr val="202020"/>
                           </a:solidFill>
@@ -20344,7 +20287,7 @@
                     <a:p>
                       <a:pPr algn="ctr"/>
                       <a:r>
-                        <a:rPr sz="1800" b="0">
+                        <a:rPr sz="1700" b="0">
                           <a:solidFill>
                             <a:srgbClr val="202020"/>
                           </a:solidFill>
@@ -20369,7 +20312,7 @@
                     <a:p>
                       <a:pPr algn="ctr"/>
                       <a:r>
-                        <a:rPr sz="1800" b="0">
+                        <a:rPr sz="1700" b="0">
                           <a:solidFill>
                             <a:srgbClr val="202020"/>
                           </a:solidFill>
@@ -20392,7 +20335,7 @@
                     <a:p>
                       <a:pPr algn="ctr"/>
                       <a:r>
-                        <a:rPr sz="1800" b="0">
+                        <a:rPr sz="1700" b="0">
                           <a:solidFill>
                             <a:srgbClr val="202020"/>
                           </a:solidFill>
@@ -20415,7 +20358,7 @@
                     <a:p>
                       <a:pPr algn="ctr"/>
                       <a:r>
-                        <a:rPr sz="1800" b="0">
+                        <a:rPr sz="1700" b="0">
                           <a:solidFill>
                             <a:srgbClr val="202020"/>
                           </a:solidFill>
@@ -20438,7 +20381,7 @@
                     <a:p>
                       <a:pPr algn="ctr"/>
                       <a:r>
-                        <a:rPr sz="1800" b="0">
+                        <a:rPr sz="1700" b="0">
                           <a:solidFill>
                             <a:srgbClr val="202020"/>
                           </a:solidFill>
@@ -20463,7 +20406,7 @@
                     <a:p>
                       <a:pPr algn="ctr"/>
                       <a:r>
-                        <a:rPr sz="1800" b="0">
+                        <a:rPr sz="1700" b="0">
                           <a:solidFill>
                             <a:srgbClr val="202020"/>
                           </a:solidFill>
@@ -20486,7 +20429,7 @@
                     <a:p>
                       <a:pPr algn="ctr"/>
                       <a:r>
-                        <a:rPr sz="1800" b="0">
+                        <a:rPr sz="1700" b="0">
                           <a:solidFill>
                             <a:srgbClr val="202020"/>
                           </a:solidFill>
@@ -20509,7 +20452,7 @@
                     <a:p>
                       <a:pPr algn="ctr"/>
                       <a:r>
-                        <a:rPr sz="1800" b="0">
+                        <a:rPr sz="1700" b="0">
                           <a:solidFill>
                             <a:srgbClr val="202020"/>
                           </a:solidFill>
@@ -20532,7 +20475,7 @@
                     <a:p>
                       <a:pPr algn="ctr"/>
                       <a:r>
-                        <a:rPr sz="1800" b="0">
+                        <a:rPr sz="1700" b="0">
                           <a:solidFill>
                             <a:srgbClr val="202020"/>
                           </a:solidFill>
@@ -20561,8 +20504,8 @@
         </p:nvSpPr>
         <p:spPr>
           <a:xfrm>
-            <a:off x="6675120" y="2057400"/>
-            <a:ext cx="4937760" cy="1325880"/>
+            <a:off x="6858000" y="1965960"/>
+            <a:ext cx="4754880" cy="1325880"/>
           </a:xfrm>
           <a:prstGeom prst="rect">
             <a:avLst/>
@@ -20597,25 +20540,25 @@
           <a:p>
             <a:pPr algn="l"/>
             <a:r>
-              <a:rPr sz="2000" b="1">
+              <a:rPr sz="1900" b="1">
                 <a:solidFill>
                   <a:srgbClr val="1F4E79"/>
                 </a:solidFill>
                 <a:latin typeface="Microsoft JhengHei"/>
               </a:rPr>
-              <a:t>老師很確定是 2，</a:t>
+              <a:t>笨重模型確定這是 2，</a:t>
             </a:r>
           </a:p>
           <a:p>
             <a:pPr algn="l"/>
             <a:r>
-              <a:rPr sz="2000" b="1">
+              <a:rPr sz="1900" b="1">
                 <a:solidFill>
                   <a:srgbClr val="1F4E79"/>
                 </a:solidFill>
                 <a:latin typeface="Microsoft JhengHei"/>
               </a:rPr>
-              <a:t>也認為 3 比 7 像</a:t>
+              <a:t>並認為 3 比 7 像</a:t>
             </a:r>
           </a:p>
         </p:txBody>
@@ -20628,8 +20571,8 @@
         </p:nvSpPr>
         <p:spPr>
           <a:xfrm>
-            <a:off x="6675120" y="3520440"/>
-            <a:ext cx="4937760" cy="1325880"/>
+            <a:off x="6858000" y="3429000"/>
+            <a:ext cx="4754880" cy="1325880"/>
           </a:xfrm>
           <a:prstGeom prst="rect">
             <a:avLst/>
@@ -20664,25 +20607,25 @@
           <a:p>
             <a:pPr algn="l"/>
             <a:r>
-              <a:rPr sz="2000" b="1">
+              <a:rPr sz="1900" b="1">
                 <a:solidFill>
                   <a:srgbClr val="59636E"/>
                 </a:solidFill>
                 <a:latin typeface="Microsoft JhengHei"/>
               </a:rPr>
-              <a:t>學生還沒學好：</a:t>
+              <a:t>蒸餾模型尚未訓練：</a:t>
             </a:r>
           </a:p>
           <a:p>
             <a:pPr algn="l"/>
             <a:r>
-              <a:rPr sz="2000" b="1">
+              <a:rPr sz="1900" b="1">
                 <a:solidFill>
                   <a:srgbClr val="59636E"/>
                 </a:solidFill>
                 <a:latin typeface="Microsoft JhengHei"/>
               </a:rPr>
-              <a:t>分得出 2，但 3 和 7 一樣</a:t>
+              <a:t>分得出 2，但 3 與 7 給相同的 logit</a:t>
             </a:r>
           </a:p>
         </p:txBody>
@@ -20710,24 +20653,24 @@
           <a:lstStyle/>
           <a:p>
             <a:r>
-              <a:rPr sz="1800" b="0">
+              <a:rPr sz="1700" b="0">
                 <a:solidFill>
                   <a:srgbClr val="59636E"/>
                 </a:solidFill>
                 <a:latin typeface="Microsoft JhengHei"/>
               </a:rPr>
-              <a:t>這組數字是為了手算而自訂的，不是實際模型的輸出。</a:t>
+              <a:t>這組 logit 是為手算而選的，不是訓練好的模型的輸出。</a:t>
             </a:r>
           </a:p>
           <a:p>
             <a:r>
-              <a:rPr sz="1800" b="0">
+              <a:rPr sz="1700" b="0">
                 <a:solidFill>
                   <a:srgbClr val="59636E"/>
                 </a:solidFill>
                 <a:latin typeface="Microsoft JhengHei"/>
               </a:rPr>
-              <a:t>溫度 T、權重 α 等參數在用到時再介紹。</a:t>
+              <a:t>溫度 T 與權重 α 在第一次用到時介紹。</a:t>
             </a:r>
           </a:p>
         </p:txBody>
@@ -21131,7 +21074,7 @@
                 </a:solidFill>
                 <a:latin typeface="Microsoft JhengHei"/>
               </a:rPr>
-              <a:t>二、softmax 逐步計算：T = 1</a:t>
+              <a:t>二、帶溫度的 softmax：T = 1</a:t>
             </a:r>
           </a:p>
         </p:txBody>
@@ -21165,7 +21108,7 @@
                 </a:solidFill>
                 <a:latin typeface="Microsoft JhengHei"/>
               </a:rPr>
-              <a:t>論文式 (1)；T = 1 就是一般的 softmax</a:t>
+              <a:t>論文式 (1)；T 通常設為 1</a:t>
             </a:r>
           </a:p>
         </p:txBody>
@@ -21202,8 +21145,8 @@
         </p:nvSpPr>
         <p:spPr>
           <a:xfrm>
-            <a:off x="4754880" y="1143000"/>
-            <a:ext cx="6949440" cy="822960"/>
+            <a:off x="4754880" y="1097280"/>
+            <a:ext cx="6949440" cy="914400"/>
           </a:xfrm>
           <a:prstGeom prst="rect">
             <a:avLst/>
@@ -21223,7 +21166,7 @@
                 </a:solidFill>
                 <a:latin typeface="Microsoft JhengHei"/>
               </a:rPr>
-              <a:t>T 稱為溫度 temperature。分子分母的每個 logit 都先除以 T，</a:t>
+              <a:t>softmax 把每個類別算出的 logit z_i 與其他 logit 比較，</a:t>
             </a:r>
           </a:p>
           <a:p>
@@ -21234,7 +21177,7 @@
                 </a:solidFill>
                 <a:latin typeface="Microsoft JhengHei"/>
               </a:rPr>
-              <a:t>再照一般 softmax 計算：取指數，除以總和。</a:t>
+              <a:t>轉成機率 q_i；T 是溫度。</a:t>
             </a:r>
           </a:p>
         </p:txBody>
@@ -21399,7 +21342,7 @@
                           </a:solidFill>
                           <a:latin typeface="Microsoft JhengHei"/>
                         </a:rPr>
-                        <a:t>老師 v</a:t>
+                        <a:t>v</a:t>
                       </a:r>
                     </a:p>
                   </a:txBody>
@@ -21975,25 +21918,25 @@
           <a:p>
             <a:pPr algn="l"/>
             <a:r>
-              <a:rPr sz="1900" b="1">
+              <a:rPr sz="1800" b="1">
                 <a:solidFill>
                   <a:srgbClr val="C03030"/>
                 </a:solidFill>
                 <a:latin typeface="Microsoft JhengHei"/>
               </a:rPr>
-              <a:t>3 和 7 的機率是 0.0180 與 0.0003，都接近 0。</a:t>
+              <a:t>3 和 7 的機率是 0.0180 與 0.0003。「這個 2 比較像 3、不像 7」的資訊雖然存在，</a:t>
             </a:r>
           </a:p>
           <a:p>
             <a:pPr algn="l"/>
             <a:r>
-              <a:rPr sz="1900" b="1">
+              <a:rPr sz="1800" b="1">
                 <a:solidFill>
                   <a:srgbClr val="C03030"/>
                 </a:solidFill>
                 <a:latin typeface="Microsoft JhengHei"/>
               </a:rPr>
-              <a:t>「3 比 7 像」這個資訊雖然在，但對交叉熵幾乎沒有影響。</a:t>
+              <a:t>對交叉熵代價函數卻幾乎沒有影響。</a:t>
             </a:r>
           </a:p>
         </p:txBody>
@@ -22027,7 +21970,7 @@
                 </a:solidFill>
                 <a:latin typeface="Microsoft JhengHei"/>
               </a:rPr>
-              <a:t>核對：exp(8) = 2980.9580，exp(4) = 54.5982，exp(0) = 1；三者相加 3036.5561。</a:t>
+              <a:t>核對：exp(8) = 2980.9580，exp(4) = 54.5982，exp(0) = 1，三者相加 3036.5561。</a:t>
             </a:r>
           </a:p>
         </p:txBody>
@@ -22669,7 +22612,7 @@
                 </a:solidFill>
                 <a:latin typeface="Microsoft JhengHei"/>
               </a:rPr>
-              <a:t>二、softmax 逐步計算：T = 4</a:t>
+              <a:t>二、帶溫度的 softmax：T = 4</a:t>
             </a:r>
           </a:p>
         </p:txBody>
@@ -22703,7 +22646,7 @@
                 </a:solidFill>
                 <a:latin typeface="Microsoft JhengHei"/>
               </a:rPr>
-              <a:t>同一組老師 logit，只把溫度改成 4</a:t>
+              <a:t>同一組笨重模型的 logit，改用較高的溫度</a:t>
             </a:r>
           </a:p>
         </p:txBody>
@@ -22740,8 +22683,8 @@
         </p:nvSpPr>
         <p:spPr>
           <a:xfrm>
-            <a:off x="4754880" y="1143000"/>
-            <a:ext cx="6949440" cy="822960"/>
+            <a:off x="4754880" y="1097280"/>
+            <a:ext cx="6949440" cy="914400"/>
           </a:xfrm>
           <a:prstGeom prst="rect">
             <a:avLst/>
@@ -22761,7 +22704,7 @@
                 </a:solidFill>
                 <a:latin typeface="Microsoft JhengHei"/>
               </a:rPr>
-              <a:t>第 1 步除以 4 之後，logit 之間的差距縮小到原來的四分之一，</a:t>
+              <a:t>T 取較大的值，類別上的機率分布較軟：</a:t>
             </a:r>
           </a:p>
           <a:p>
@@ -22772,7 +22715,7 @@
                 </a:solidFill>
                 <a:latin typeface="Microsoft JhengHei"/>
               </a:rPr>
-              <a:t>取指數後的差距也跟著縮小。</a:t>
+              <a:t>第 1 步把 logit 之間的差距縮小為四分之一。</a:t>
             </a:r>
           </a:p>
         </p:txBody>
@@ -22937,7 +22880,7 @@
                           </a:solidFill>
                           <a:latin typeface="Microsoft JhengHei"/>
                         </a:rPr>
-                        <a:t>老師 v</a:t>
+                        <a:t>v</a:t>
                       </a:r>
                     </a:p>
                   </a:txBody>
@@ -23513,7 +23456,7 @@
           <a:p>
             <a:pPr algn="l"/>
             <a:r>
-              <a:rPr sz="1900" b="1">
+              <a:rPr sz="1800" b="1">
                 <a:solidFill>
                   <a:srgbClr val="1E7A45"/>
                 </a:solidFill>
@@ -23525,13 +23468,13 @@
           <a:p>
             <a:pPr algn="l"/>
             <a:r>
-              <a:rPr sz="1900" b="1">
+              <a:rPr sz="1800" b="1">
                 <a:solidFill>
                   <a:srgbClr val="1E7A45"/>
                 </a:solidFill>
                 <a:latin typeface="Microsoft JhengHei"/>
               </a:rPr>
-              <a:t>提高溫度之後，錯誤類別的機率大到足以影響訓練。</a:t>
+              <a:t>在這個溫度下，錯誤類別的相對機率大到足以影響學習。</a:t>
             </a:r>
           </a:p>
         </p:txBody>
@@ -23565,7 +23508,7 @@
                 </a:solidFill>
                 <a:latin typeface="Microsoft JhengHei"/>
               </a:rPr>
-              <a:t>核對：exp(2) = 7.3891，exp(1) = 2.7183，exp(0) = 1；三者相加 11.1073。</a:t>
+              <a:t>核對：exp(2) = 7.3891，exp(1) = 2.7183，exp(0) = 1，三者相加 11.1073。</a:t>
             </a:r>
           </a:p>
         </p:txBody>
@@ -24207,7 +24150,7 @@
                 </a:solidFill>
                 <a:latin typeface="Microsoft JhengHei"/>
               </a:rPr>
-              <a:t>二、軟目標 soft targets 與硬目標 hard targets</a:t>
+              <a:t>二、軟目標與硬目標</a:t>
             </a:r>
           </a:p>
         </p:txBody>
@@ -24241,7 +24184,7 @@
                 </a:solidFill>
                 <a:latin typeface="Microsoft JhengHei"/>
               </a:rPr>
-              <a:t>同一張 2，兩種溫度並排</a:t>
+              <a:t>同一個 2，兩種溫度</a:t>
             </a:r>
           </a:p>
         </p:txBody>
@@ -24520,7 +24463,7 @@
                           </a:solidFill>
                           <a:latin typeface="Consolas"/>
                         </a:rPr>
-                        <a:t>P(3) ÷ P(7)</a:t>
+                        <a:t>P(3) / P(7)</a:t>
                       </a:r>
                     </a:p>
                   </a:txBody>
@@ -24610,7 +24553,7 @@
                 </a:solidFill>
                 <a:latin typeface="Microsoft JhengHei"/>
               </a:rPr>
-              <a:t>兩者的比值等於 exp((4 − 0)/T)：</a:t>
+              <a:t>比值等於 exp((4 − 0)/T)：</a:t>
             </a:r>
           </a:p>
           <a:p>
@@ -24676,7 +24619,7 @@
                 </a:solidFill>
                 <a:latin typeface="Microsoft JhengHei"/>
               </a:rPr>
-              <a:t>軟目標：老師在高溫下給出的機率，例如 (0.6652, 0.2447, 0.0900)</a:t>
+              <a:t>軟目標：笨重模型在高溫下產生的類別機率，例如 (0.6652, 0.2447, 0.0900)</a:t>
             </a:r>
           </a:p>
         </p:txBody>
@@ -24731,7 +24674,7 @@
                 </a:solidFill>
                 <a:latin typeface="Microsoft JhengHei"/>
               </a:rPr>
-              <a:t>硬目標：正確答案本身，2 的位置是 1，其餘是 0，即 (1, 0, 0)</a:t>
+              <a:t>硬目標：正確標籤，此例為 (1, 0, 0)</a:t>
             </a:r>
           </a:p>
         </p:txBody>
@@ -24759,13 +24702,24 @@
           <a:lstStyle/>
           <a:p>
             <a:r>
-              <a:rPr sz="1700" b="0">
+              <a:rPr sz="1600" b="0">
                 <a:solidFill>
                   <a:srgbClr val="202020"/>
                 </a:solidFill>
                 <a:latin typeface="Microsoft JhengHei"/>
               </a:rPr>
-              <a:t>軟目標的資訊量比硬目標多，各筆訓練資料之間的梯度變異也比較小；論文指出學生因此可以用較少的資料、較大的學習率訓練。</a:t>
+              <a:t>軟目標的熵較高時，每個訓練樣本提供的資訊比硬目標多得多，訓練樣本之間的梯度變異也小得多；</a:t>
+            </a:r>
+          </a:p>
+          <a:p>
+            <a:r>
+              <a:rPr sz="1600" b="0">
+                <a:solidFill>
+                  <a:srgbClr val="202020"/>
+                </a:solidFill>
+                <a:latin typeface="Microsoft JhengHei"/>
+              </a:rPr>
+              <a:t>因此小模型常可用比笨重模型少得多的資料、高得多的學習率訓練。</a:t>
             </a:r>
           </a:p>
         </p:txBody>
@@ -25215,7 +25169,7 @@
                 </a:solidFill>
                 <a:latin typeface="Microsoft JhengHei"/>
               </a:rPr>
-              <a:t>三、蒸餾的損失函數</a:t>
+              <a:t>三、蒸餾</a:t>
             </a:r>
           </a:p>
         </p:txBody>
@@ -25310,8 +25264,8 @@
         </p:nvSpPr>
         <p:spPr>
           <a:xfrm>
-            <a:off x="5120640" y="2011680"/>
-            <a:ext cx="6583680" cy="731520"/>
+            <a:off x="5120640" y="1965960"/>
+            <a:ext cx="6583680" cy="822960"/>
           </a:xfrm>
           <a:prstGeom prst="rect">
             <a:avLst/>
@@ -25325,13 +25279,13 @@
           <a:lstStyle/>
           <a:p>
             <a:r>
-              <a:rPr sz="1800" b="0">
+              <a:rPr sz="1700" b="0">
                 <a:solidFill>
                   <a:srgbClr val="202020"/>
                 </a:solidFill>
                 <a:latin typeface="Microsoft JhengHei"/>
               </a:rPr>
-              <a:t>軟目標項：老師的 p 與學生的 q 都在同一個溫度 T 下計算</a:t>
+              <a:t>與軟目標的交叉熵：蒸餾模型的 softmax 使用與產生軟目標時相同的高溫</a:t>
             </a:r>
           </a:p>
         </p:txBody>
@@ -25369,7 +25323,7 @@
         <p:spPr>
           <a:xfrm>
             <a:off x="5120640" y="2880360"/>
-            <a:ext cx="6583680" cy="731520"/>
+            <a:ext cx="6583680" cy="822960"/>
           </a:xfrm>
           <a:prstGeom prst="rect">
             <a:avLst/>
@@ -25383,13 +25337,13 @@
           <a:lstStyle/>
           <a:p>
             <a:r>
-              <a:rPr sz="1800" b="0">
+              <a:rPr sz="1700" b="0">
                 <a:solidFill>
                   <a:srgbClr val="202020"/>
                 </a:solidFill>
                 <a:latin typeface="Microsoft JhengHei"/>
               </a:rPr>
-              <a:t>硬目標項：學生在 T = 1 下對正確類別的機率，取負對數</a:t>
+              <a:t>與正確標籤的交叉熵：使用蒸餾模型完全相同的 logit，但溫度為 1</a:t>
             </a:r>
           </a:p>
         </p:txBody>
@@ -25402,7 +25356,7 @@
         </p:nvSpPr>
         <p:spPr>
           <a:xfrm>
-            <a:off x="731520" y="3794760"/>
+            <a:off x="731520" y="3840480"/>
             <a:ext cx="5303520" cy="1188720"/>
           </a:xfrm>
           <a:prstGeom prst="rect">
@@ -25438,37 +25392,37 @@
           <a:p>
             <a:pPr algn="l"/>
             <a:r>
-              <a:rPr sz="1800" b="0">
+              <a:rPr sz="1700" b="0">
                 <a:solidFill>
                   <a:srgbClr val="1F4E79"/>
                 </a:solidFill>
                 <a:latin typeface="Microsoft JhengHei"/>
               </a:rPr>
-              <a:t>α：軟目標項的權重</a:t>
+              <a:t>α：論文發現，第二個目標函數的權重</a:t>
             </a:r>
           </a:p>
           <a:p>
             <a:pPr algn="l"/>
             <a:r>
-              <a:rPr sz="1800" b="0">
+              <a:rPr sz="1700" b="0">
                 <a:solidFill>
                   <a:srgbClr val="1F4E79"/>
                 </a:solidFill>
                 <a:latin typeface="Microsoft JhengHei"/>
               </a:rPr>
-              <a:t>論文指出硬目標項的權重取小較好，</a:t>
+              <a:t>取得低很多時，結果通常最好；</a:t>
             </a:r>
           </a:p>
           <a:p>
             <a:pPr algn="l"/>
             <a:r>
-              <a:rPr sz="1800" b="0">
+              <a:rPr sz="1700" b="0">
                 <a:solidFill>
                   <a:srgbClr val="1F4E79"/>
                 </a:solidFill>
                 <a:latin typeface="Microsoft JhengHei"/>
               </a:rPr>
-              <a:t>本主題取 α = 0.9</a:t>
+              <a:t>本教材取 α = 0.9</a:t>
             </a:r>
           </a:p>
         </p:txBody>
@@ -25481,7 +25435,7 @@
         </p:nvSpPr>
         <p:spPr>
           <a:xfrm>
-            <a:off x="6309360" y="3794760"/>
+            <a:off x="6309360" y="3840480"/>
             <a:ext cx="5303520" cy="1188720"/>
           </a:xfrm>
           <a:prstGeom prst="rect">
@@ -25517,37 +25471,37 @@
           <a:p>
             <a:pPr algn="l"/>
             <a:r>
-              <a:rPr sz="1800" b="0">
+              <a:rPr sz="1700" b="0">
                 <a:solidFill>
                   <a:srgbClr val="C03030"/>
                 </a:solidFill>
                 <a:latin typeface="Microsoft JhengHei"/>
               </a:rPr>
-              <a:t>T²：軟目標項的梯度與 1/T² 成正比，</a:t>
+              <a:t>T²：軟目標產生的梯度大小與 1/T² 成正比，</a:t>
             </a:r>
           </a:p>
           <a:p>
             <a:pPr algn="l"/>
             <a:r>
-              <a:rPr sz="1800" b="0">
+              <a:rPr sz="1700" b="0">
                 <a:solidFill>
                   <a:srgbClr val="C03030"/>
                 </a:solidFill>
                 <a:latin typeface="Microsoft JhengHei"/>
               </a:rPr>
-              <a:t>乘上 T² 後，換溫度時兩項的比重不變</a:t>
+              <a:t>因此乘上 T²，換溫度時兩項的相對貢獻</a:t>
             </a:r>
           </a:p>
           <a:p>
             <a:pPr algn="l"/>
             <a:r>
-              <a:rPr sz="1800" b="0">
+              <a:rPr sz="1700" b="0">
                 <a:solidFill>
                   <a:srgbClr val="C03030"/>
                 </a:solidFill>
                 <a:latin typeface="Microsoft JhengHei"/>
               </a:rPr>
-              <a:t>（第 13 頁驗證）</a:t>
+              <a:t>大致不變（第 13 頁驗證）</a:t>
             </a:r>
           </a:p>
         </p:txBody>
@@ -25581,7 +25535,7 @@
                 </a:solidFill>
                 <a:latin typeface="Microsoft JhengHei"/>
               </a:rPr>
-              <a:t>訓練完成後，學生使用時溫度回到 T = 1。</a:t>
+              <a:t>蒸餾模型訓練完成後，使用時溫度為 1。</a:t>
             </a:r>
           </a:p>
         </p:txBody>

--- a/topics/knowledge-distillation/課外主題_知識蒸餾.pptx
+++ b/topics/knowledge-distillation/課外主題_知識蒸餾.pptx
@@ -24,6 +24,7 @@
     <p:sldId id="272" r:id="rId23"/>
     <p:sldId id="273" r:id="rId24"/>
     <p:sldId id="274" r:id="rId25"/>
+    <p:sldId id="275" r:id="rId26"/>
   </p:sldIdLst>
   <p:sldSz cx="12191695" cy="6858000" type="screen4x3"/>
   <p:notesSz cx="6858000" cy="9144000"/>
@@ -3427,6 +3428,912 @@
 </file>
 
 <file path=ppt/slides/slide10.xml><?xml version="1.0" encoding="utf-8"?>
+<p:sld xmlns:a="http://schemas.openxmlformats.org/drawingml/2006/main" xmlns:p="http://schemas.openxmlformats.org/presentationml/2006/main" xmlns:r="http://schemas.openxmlformats.org/officeDocument/2006/relationships">
+  <p:cSld>
+    <p:spTree>
+      <p:nvGrpSpPr>
+        <p:cNvPr id="1" name=""/>
+        <p:cNvGrpSpPr/>
+        <p:nvPr/>
+      </p:nvGrpSpPr>
+      <p:grpSpPr/>
+      <p:sp>
+        <p:nvSpPr>
+          <p:cNvPr id="2" name="Rectangle 1"/>
+          <p:cNvSpPr/>
+          <p:nvPr/>
+        </p:nvSpPr>
+        <p:spPr>
+          <a:xfrm>
+            <a:off x="0" y="0"/>
+            <a:ext cx="12191695" cy="6858000"/>
+          </a:xfrm>
+          <a:prstGeom prst="rect">
+            <a:avLst/>
+          </a:prstGeom>
+          <a:solidFill>
+            <a:srgbClr val="FFFFFF"/>
+          </a:solidFill>
+          <a:ln>
+            <a:noFill/>
+          </a:ln>
+          <a:effectLst/>
+        </p:spPr>
+        <p:style>
+          <a:lnRef idx="1">
+            <a:schemeClr val="accent1"/>
+          </a:lnRef>
+          <a:fillRef idx="3">
+            <a:schemeClr val="accent1"/>
+          </a:fillRef>
+          <a:effectRef idx="2">
+            <a:schemeClr val="accent1"/>
+          </a:effectRef>
+          <a:fontRef idx="minor">
+            <a:schemeClr val="lt1"/>
+          </a:fontRef>
+        </p:style>
+        <p:txBody>
+          <a:bodyPr rtlCol="0" anchor="ctr"/>
+          <a:lstStyle/>
+          <a:p>
+            <a:pPr algn="ctr"/>
+          </a:p>
+        </p:txBody>
+      </p:sp>
+      <p:sp>
+        <p:nvSpPr>
+          <p:cNvPr id="3" name="Rectangle 2"/>
+          <p:cNvSpPr/>
+          <p:nvPr/>
+        </p:nvSpPr>
+        <p:spPr>
+          <a:xfrm>
+            <a:off x="0" y="0"/>
+            <a:ext cx="12191695" cy="868680"/>
+          </a:xfrm>
+          <a:prstGeom prst="rect">
+            <a:avLst/>
+          </a:prstGeom>
+          <a:solidFill>
+            <a:srgbClr val="1F4E79"/>
+          </a:solidFill>
+          <a:ln>
+            <a:noFill/>
+          </a:ln>
+          <a:effectLst/>
+        </p:spPr>
+        <p:style>
+          <a:lnRef idx="1">
+            <a:schemeClr val="accent1"/>
+          </a:lnRef>
+          <a:fillRef idx="3">
+            <a:schemeClr val="accent1"/>
+          </a:fillRef>
+          <a:effectRef idx="2">
+            <a:schemeClr val="accent1"/>
+          </a:effectRef>
+          <a:fontRef idx="minor">
+            <a:schemeClr val="lt1"/>
+          </a:fontRef>
+        </p:style>
+        <p:txBody>
+          <a:bodyPr rtlCol="0" anchor="ctr"/>
+          <a:lstStyle/>
+          <a:p>
+            <a:pPr algn="ctr"/>
+          </a:p>
+        </p:txBody>
+      </p:sp>
+      <p:sp>
+        <p:nvSpPr>
+          <p:cNvPr id="4" name="TextBox 3"/>
+          <p:cNvSpPr txBox="1"/>
+          <p:nvPr/>
+        </p:nvSpPr>
+        <p:spPr>
+          <a:xfrm>
+            <a:off x="411480" y="73152"/>
+            <a:ext cx="11338560" cy="457200"/>
+          </a:xfrm>
+          <a:prstGeom prst="rect">
+            <a:avLst/>
+          </a:prstGeom>
+          <a:noFill/>
+        </p:spPr>
+        <p:txBody>
+          <a:bodyPr wrap="square">
+            <a:spAutoFit/>
+          </a:bodyPr>
+          <a:lstStyle/>
+          <a:p>
+            <a:r>
+              <a:rPr sz="2700" b="1">
+                <a:solidFill>
+                  <a:srgbClr val="FFFFFF"/>
+                </a:solidFill>
+                <a:latin typeface="Microsoft JhengHei"/>
+              </a:rPr>
+              <a:t>三、蒸餾</a:t>
+            </a:r>
+          </a:p>
+        </p:txBody>
+      </p:sp>
+      <p:sp>
+        <p:nvSpPr>
+          <p:cNvPr id="5" name="TextBox 4"/>
+          <p:cNvSpPr txBox="1"/>
+          <p:nvPr/>
+        </p:nvSpPr>
+        <p:spPr>
+          <a:xfrm>
+            <a:off x="411480" y="521207"/>
+            <a:ext cx="11338560" cy="301752"/>
+          </a:xfrm>
+          <a:prstGeom prst="rect">
+            <a:avLst/>
+          </a:prstGeom>
+          <a:noFill/>
+        </p:spPr>
+        <p:txBody>
+          <a:bodyPr wrap="square">
+            <a:spAutoFit/>
+          </a:bodyPr>
+          <a:lstStyle/>
+          <a:p>
+            <a:r>
+              <a:rPr sz="1300" b="0">
+                <a:solidFill>
+                  <a:srgbClr val="C7D6E5"/>
+                </a:solidFill>
+                <a:latin typeface="Microsoft JhengHei"/>
+              </a:rPr>
+              <a:t>論文第 2 節：兩個目標函數的加權平均</a:t>
+            </a:r>
+          </a:p>
+        </p:txBody>
+      </p:sp>
+      <p:pic>
+        <p:nvPicPr>
+          <p:cNvPr id="6" name="Picture 5" descr="m_loss.png"/>
+          <p:cNvPicPr>
+            <a:picLocks noChangeAspect="1"/>
+          </p:cNvPicPr>
+          <p:nvPr/>
+        </p:nvPicPr>
+        <p:blipFill>
+          <a:blip r:embed="rId2"/>
+          <a:stretch>
+            <a:fillRect/>
+          </a:stretch>
+        </p:blipFill>
+        <p:spPr>
+          <a:xfrm>
+            <a:off x="822960" y="1143000"/>
+            <a:ext cx="5518871" cy="566928"/>
+          </a:xfrm>
+          <a:prstGeom prst="rect">
+            <a:avLst/>
+          </a:prstGeom>
+        </p:spPr>
+      </p:pic>
+      <p:pic>
+        <p:nvPicPr>
+          <p:cNvPr id="7" name="Picture 6" descr="m_csoft.png"/>
+          <p:cNvPicPr>
+            <a:picLocks noChangeAspect="1"/>
+          </p:cNvPicPr>
+          <p:nvPr/>
+        </p:nvPicPr>
+        <p:blipFill>
+          <a:blip r:embed="rId3"/>
+          <a:stretch>
+            <a:fillRect/>
+          </a:stretch>
+        </p:blipFill>
+        <p:spPr>
+          <a:xfrm>
+            <a:off x="822960" y="1965960"/>
+            <a:ext cx="2629506" cy="658368"/>
+          </a:xfrm>
+          <a:prstGeom prst="rect">
+            <a:avLst/>
+          </a:prstGeom>
+        </p:spPr>
+      </p:pic>
+      <p:sp>
+        <p:nvSpPr>
+          <p:cNvPr id="8" name="TextBox 7"/>
+          <p:cNvSpPr txBox="1"/>
+          <p:nvPr/>
+        </p:nvSpPr>
+        <p:spPr>
+          <a:xfrm>
+            <a:off x="5120640" y="1965960"/>
+            <a:ext cx="6583680" cy="822960"/>
+          </a:xfrm>
+          <a:prstGeom prst="rect">
+            <a:avLst/>
+          </a:prstGeom>
+          <a:noFill/>
+        </p:spPr>
+        <p:txBody>
+          <a:bodyPr wrap="square">
+            <a:spAutoFit/>
+          </a:bodyPr>
+          <a:lstStyle/>
+          <a:p>
+            <a:r>
+              <a:rPr sz="1700" b="0">
+                <a:solidFill>
+                  <a:srgbClr val="202020"/>
+                </a:solidFill>
+                <a:latin typeface="Microsoft JhengHei"/>
+              </a:rPr>
+              <a:t>與軟目標的交叉熵：蒸餾模型的 softmax 使用與產生軟目標時相同的高溫</a:t>
+            </a:r>
+          </a:p>
+        </p:txBody>
+      </p:sp>
+      <p:pic>
+        <p:nvPicPr>
+          <p:cNvPr id="9" name="Picture 8" descr="m_chard.png"/>
+          <p:cNvPicPr>
+            <a:picLocks noChangeAspect="1"/>
+          </p:cNvPicPr>
+          <p:nvPr/>
+        </p:nvPicPr>
+        <p:blipFill>
+          <a:blip r:embed="rId4"/>
+          <a:stretch>
+            <a:fillRect/>
+          </a:stretch>
+        </p:blipFill>
+        <p:spPr>
+          <a:xfrm>
+            <a:off x="822960" y="2880360"/>
+            <a:ext cx="3631404" cy="566928"/>
+          </a:xfrm>
+          <a:prstGeom prst="rect">
+            <a:avLst/>
+          </a:prstGeom>
+        </p:spPr>
+      </p:pic>
+      <p:sp>
+        <p:nvSpPr>
+          <p:cNvPr id="10" name="TextBox 9"/>
+          <p:cNvSpPr txBox="1"/>
+          <p:nvPr/>
+        </p:nvSpPr>
+        <p:spPr>
+          <a:xfrm>
+            <a:off x="5120640" y="2880360"/>
+            <a:ext cx="6583680" cy="822960"/>
+          </a:xfrm>
+          <a:prstGeom prst="rect">
+            <a:avLst/>
+          </a:prstGeom>
+          <a:noFill/>
+        </p:spPr>
+        <p:txBody>
+          <a:bodyPr wrap="square">
+            <a:spAutoFit/>
+          </a:bodyPr>
+          <a:lstStyle/>
+          <a:p>
+            <a:r>
+              <a:rPr sz="1700" b="0">
+                <a:solidFill>
+                  <a:srgbClr val="202020"/>
+                </a:solidFill>
+                <a:latin typeface="Microsoft JhengHei"/>
+              </a:rPr>
+              <a:t>與正確標籤的交叉熵：使用蒸餾模型完全相同的 logit，但溫度為 1</a:t>
+            </a:r>
+          </a:p>
+        </p:txBody>
+      </p:sp>
+      <p:sp>
+        <p:nvSpPr>
+          <p:cNvPr id="11" name="Rectangle 10"/>
+          <p:cNvSpPr/>
+          <p:nvPr/>
+        </p:nvSpPr>
+        <p:spPr>
+          <a:xfrm>
+            <a:off x="731520" y="3840480"/>
+            <a:ext cx="5303520" cy="1188720"/>
+          </a:xfrm>
+          <a:prstGeom prst="rect">
+            <a:avLst/>
+          </a:prstGeom>
+          <a:solidFill>
+            <a:srgbClr val="DAE6F2"/>
+          </a:solidFill>
+          <a:ln>
+            <a:solidFill>
+              <a:srgbClr val="D0D7DE"/>
+            </a:solidFill>
+          </a:ln>
+          <a:effectLst/>
+        </p:spPr>
+        <p:style>
+          <a:lnRef idx="1">
+            <a:schemeClr val="accent1"/>
+          </a:lnRef>
+          <a:fillRef idx="3">
+            <a:schemeClr val="accent1"/>
+          </a:fillRef>
+          <a:effectRef idx="2">
+            <a:schemeClr val="accent1"/>
+          </a:effectRef>
+          <a:fontRef idx="minor">
+            <a:schemeClr val="lt1"/>
+          </a:fontRef>
+        </p:style>
+        <p:txBody>
+          <a:bodyPr rtlCol="0" anchor="ctr" wrap="square"/>
+          <a:lstStyle/>
+          <a:p>
+            <a:pPr algn="l"/>
+            <a:r>
+              <a:rPr sz="1700" b="0">
+                <a:solidFill>
+                  <a:srgbClr val="1F4E79"/>
+                </a:solidFill>
+                <a:latin typeface="Microsoft JhengHei"/>
+              </a:rPr>
+              <a:t>α：論文發現，第二個目標函數的權重</a:t>
+            </a:r>
+          </a:p>
+          <a:p>
+            <a:pPr algn="l"/>
+            <a:r>
+              <a:rPr sz="1700" b="0">
+                <a:solidFill>
+                  <a:srgbClr val="1F4E79"/>
+                </a:solidFill>
+                <a:latin typeface="Microsoft JhengHei"/>
+              </a:rPr>
+              <a:t>取得低很多時，結果通常最好；</a:t>
+            </a:r>
+          </a:p>
+          <a:p>
+            <a:pPr algn="l"/>
+            <a:r>
+              <a:rPr sz="1700" b="0">
+                <a:solidFill>
+                  <a:srgbClr val="1F4E79"/>
+                </a:solidFill>
+                <a:latin typeface="Microsoft JhengHei"/>
+              </a:rPr>
+              <a:t>本教材取 α = 0.9</a:t>
+            </a:r>
+          </a:p>
+        </p:txBody>
+      </p:sp>
+      <p:sp>
+        <p:nvSpPr>
+          <p:cNvPr id="12" name="Rectangle 11"/>
+          <p:cNvSpPr/>
+          <p:nvPr/>
+        </p:nvSpPr>
+        <p:spPr>
+          <a:xfrm>
+            <a:off x="6309360" y="3840480"/>
+            <a:ext cx="5303520" cy="1188720"/>
+          </a:xfrm>
+          <a:prstGeom prst="rect">
+            <a:avLst/>
+          </a:prstGeom>
+          <a:solidFill>
+            <a:srgbClr val="FFF3CD"/>
+          </a:solidFill>
+          <a:ln>
+            <a:solidFill>
+              <a:srgbClr val="D0D7DE"/>
+            </a:solidFill>
+          </a:ln>
+          <a:effectLst/>
+        </p:spPr>
+        <p:style>
+          <a:lnRef idx="1">
+            <a:schemeClr val="accent1"/>
+          </a:lnRef>
+          <a:fillRef idx="3">
+            <a:schemeClr val="accent1"/>
+          </a:fillRef>
+          <a:effectRef idx="2">
+            <a:schemeClr val="accent1"/>
+          </a:effectRef>
+          <a:fontRef idx="minor">
+            <a:schemeClr val="lt1"/>
+          </a:fontRef>
+        </p:style>
+        <p:txBody>
+          <a:bodyPr rtlCol="0" anchor="ctr" wrap="square"/>
+          <a:lstStyle/>
+          <a:p>
+            <a:pPr algn="l"/>
+            <a:r>
+              <a:rPr sz="1700" b="0">
+                <a:solidFill>
+                  <a:srgbClr val="C03030"/>
+                </a:solidFill>
+                <a:latin typeface="Microsoft JhengHei"/>
+              </a:rPr>
+              <a:t>T²：軟目標產生的梯度大小與 1/T² 成正比，</a:t>
+            </a:r>
+          </a:p>
+          <a:p>
+            <a:pPr algn="l"/>
+            <a:r>
+              <a:rPr sz="1700" b="0">
+                <a:solidFill>
+                  <a:srgbClr val="C03030"/>
+                </a:solidFill>
+                <a:latin typeface="Microsoft JhengHei"/>
+              </a:rPr>
+              <a:t>因此乘上 T²，換溫度時兩項的相對貢獻</a:t>
+            </a:r>
+          </a:p>
+          <a:p>
+            <a:pPr algn="l"/>
+            <a:r>
+              <a:rPr sz="1700" b="0">
+                <a:solidFill>
+                  <a:srgbClr val="C03030"/>
+                </a:solidFill>
+                <a:latin typeface="Microsoft JhengHei"/>
+              </a:rPr>
+              <a:t>大致不變（第 14 頁驗證）</a:t>
+            </a:r>
+          </a:p>
+        </p:txBody>
+      </p:sp>
+      <p:sp>
+        <p:nvSpPr>
+          <p:cNvPr id="13" name="TextBox 12"/>
+          <p:cNvSpPr txBox="1"/>
+          <p:nvPr/>
+        </p:nvSpPr>
+        <p:spPr>
+          <a:xfrm>
+            <a:off x="731520" y="5257800"/>
+            <a:ext cx="10881360" cy="914400"/>
+          </a:xfrm>
+          <a:prstGeom prst="rect">
+            <a:avLst/>
+          </a:prstGeom>
+          <a:noFill/>
+        </p:spPr>
+        <p:txBody>
+          <a:bodyPr wrap="square">
+            <a:spAutoFit/>
+          </a:bodyPr>
+          <a:lstStyle/>
+          <a:p>
+            <a:r>
+              <a:rPr sz="1900" b="1">
+                <a:solidFill>
+                  <a:srgbClr val="1E7A45"/>
+                </a:solidFill>
+                <a:latin typeface="Microsoft JhengHei"/>
+              </a:rPr>
+              <a:t>蒸餾模型訓練完成後，使用時溫度為 1。</a:t>
+            </a:r>
+          </a:p>
+        </p:txBody>
+      </p:sp>
+    </p:spTree>
+  </p:cSld>
+  <p:clrMapOvr>
+    <a:masterClrMapping/>
+  </p:clrMapOvr>
+  <p:timing>
+    <p:tnLst>
+      <p:par>
+        <p:cTn id="1" dur="indefinite" restart="never" nodeType="tmRoot">
+          <p:childTnLst>
+            <p:seq concurrent="1" nextAc="seek">
+              <p:cTn id="2" dur="indefinite" nodeType="mainSeq">
+                <p:childTnLst>
+                  <p:par>
+                    <p:cTn id="3" fill="hold">
+                      <p:stCondLst>
+                        <p:cond delay="indefinite"/>
+                      </p:stCondLst>
+                      <p:childTnLst>
+                        <p:par>
+                          <p:cTn id="4" fill="hold">
+                            <p:stCondLst>
+                              <p:cond delay="0"/>
+                            </p:stCondLst>
+                            <p:childTnLst>
+                              <p:par>
+                                <p:cTn id="5" presetID="1" presetClass="entr" presetSubtype="0" fill="hold" grpId="0" nodeType="clickEffect">
+                                  <p:stCondLst>
+                                    <p:cond delay="0"/>
+                                  </p:stCondLst>
+                                  <p:childTnLst>
+                                    <p:set>
+                                      <p:cBhvr>
+                                        <p:cTn id="6" dur="1" fill="hold">
+                                          <p:stCondLst>
+                                            <p:cond delay="0"/>
+                                          </p:stCondLst>
+                                        </p:cTn>
+                                        <p:tgtEl>
+                                          <p:spTgt spid="6"/>
+                                        </p:tgtEl>
+                                        <p:attrNameLst>
+                                          <p:attrName>style.visibility</p:attrName>
+                                        </p:attrNameLst>
+                                      </p:cBhvr>
+                                      <p:to>
+                                        <p:strVal val="visible"/>
+                                      </p:to>
+                                    </p:set>
+                                  </p:childTnLst>
+                                </p:cTn>
+                              </p:par>
+                            </p:childTnLst>
+                          </p:cTn>
+                        </p:par>
+                      </p:childTnLst>
+                    </p:cTn>
+                  </p:par>
+                  <p:par>
+                    <p:cTn id="7" fill="hold">
+                      <p:stCondLst>
+                        <p:cond delay="indefinite"/>
+                      </p:stCondLst>
+                      <p:childTnLst>
+                        <p:par>
+                          <p:cTn id="8" fill="hold">
+                            <p:stCondLst>
+                              <p:cond delay="0"/>
+                            </p:stCondLst>
+                            <p:childTnLst>
+                              <p:par>
+                                <p:cTn id="9" presetID="1" presetClass="entr" presetSubtype="0" fill="hold" grpId="0" nodeType="clickEffect">
+                                  <p:stCondLst>
+                                    <p:cond delay="0"/>
+                                  </p:stCondLst>
+                                  <p:childTnLst>
+                                    <p:set>
+                                      <p:cBhvr>
+                                        <p:cTn id="10" dur="1" fill="hold">
+                                          <p:stCondLst>
+                                            <p:cond delay="0"/>
+                                          </p:stCondLst>
+                                        </p:cTn>
+                                        <p:tgtEl>
+                                          <p:spTgt spid="7"/>
+                                        </p:tgtEl>
+                                        <p:attrNameLst>
+                                          <p:attrName>style.visibility</p:attrName>
+                                        </p:attrNameLst>
+                                      </p:cBhvr>
+                                      <p:to>
+                                        <p:strVal val="visible"/>
+                                      </p:to>
+                                    </p:set>
+                                  </p:childTnLst>
+                                </p:cTn>
+                              </p:par>
+                            </p:childTnLst>
+                          </p:cTn>
+                        </p:par>
+                      </p:childTnLst>
+                    </p:cTn>
+                  </p:par>
+                  <p:par>
+                    <p:cTn id="11" fill="hold">
+                      <p:stCondLst>
+                        <p:cond delay="indefinite"/>
+                      </p:stCondLst>
+                      <p:childTnLst>
+                        <p:par>
+                          <p:cTn id="12" fill="hold">
+                            <p:stCondLst>
+                              <p:cond delay="0"/>
+                            </p:stCondLst>
+                            <p:childTnLst>
+                              <p:par>
+                                <p:cTn id="13" presetID="1" presetClass="entr" presetSubtype="0" fill="hold" grpId="0" nodeType="clickEffect">
+                                  <p:stCondLst>
+                                    <p:cond delay="0"/>
+                                  </p:stCondLst>
+                                  <p:childTnLst>
+                                    <p:set>
+                                      <p:cBhvr>
+                                        <p:cTn id="14" dur="1" fill="hold">
+                                          <p:stCondLst>
+                                            <p:cond delay="0"/>
+                                          </p:stCondLst>
+                                        </p:cTn>
+                                        <p:tgtEl>
+                                          <p:spTgt spid="8"/>
+                                        </p:tgtEl>
+                                        <p:attrNameLst>
+                                          <p:attrName>style.visibility</p:attrName>
+                                        </p:attrNameLst>
+                                      </p:cBhvr>
+                                      <p:to>
+                                        <p:strVal val="visible"/>
+                                      </p:to>
+                                    </p:set>
+                                  </p:childTnLst>
+                                </p:cTn>
+                              </p:par>
+                            </p:childTnLst>
+                          </p:cTn>
+                        </p:par>
+                      </p:childTnLst>
+                    </p:cTn>
+                  </p:par>
+                  <p:par>
+                    <p:cTn id="15" fill="hold">
+                      <p:stCondLst>
+                        <p:cond delay="indefinite"/>
+                      </p:stCondLst>
+                      <p:childTnLst>
+                        <p:par>
+                          <p:cTn id="16" fill="hold">
+                            <p:stCondLst>
+                              <p:cond delay="0"/>
+                            </p:stCondLst>
+                            <p:childTnLst>
+                              <p:par>
+                                <p:cTn id="17" presetID="1" presetClass="entr" presetSubtype="0" fill="hold" grpId="0" nodeType="clickEffect">
+                                  <p:stCondLst>
+                                    <p:cond delay="0"/>
+                                  </p:stCondLst>
+                                  <p:childTnLst>
+                                    <p:set>
+                                      <p:cBhvr>
+                                        <p:cTn id="18" dur="1" fill="hold">
+                                          <p:stCondLst>
+                                            <p:cond delay="0"/>
+                                          </p:stCondLst>
+                                        </p:cTn>
+                                        <p:tgtEl>
+                                          <p:spTgt spid="9"/>
+                                        </p:tgtEl>
+                                        <p:attrNameLst>
+                                          <p:attrName>style.visibility</p:attrName>
+                                        </p:attrNameLst>
+                                      </p:cBhvr>
+                                      <p:to>
+                                        <p:strVal val="visible"/>
+                                      </p:to>
+                                    </p:set>
+                                  </p:childTnLst>
+                                </p:cTn>
+                              </p:par>
+                            </p:childTnLst>
+                          </p:cTn>
+                        </p:par>
+                      </p:childTnLst>
+                    </p:cTn>
+                  </p:par>
+                  <p:par>
+                    <p:cTn id="19" fill="hold">
+                      <p:stCondLst>
+                        <p:cond delay="indefinite"/>
+                      </p:stCondLst>
+                      <p:childTnLst>
+                        <p:par>
+                          <p:cTn id="20" fill="hold">
+                            <p:stCondLst>
+                              <p:cond delay="0"/>
+                            </p:stCondLst>
+                            <p:childTnLst>
+                              <p:par>
+                                <p:cTn id="21" presetID="1" presetClass="entr" presetSubtype="0" fill="hold" grpId="0" nodeType="clickEffect">
+                                  <p:stCondLst>
+                                    <p:cond delay="0"/>
+                                  </p:stCondLst>
+                                  <p:childTnLst>
+                                    <p:set>
+                                      <p:cBhvr>
+                                        <p:cTn id="22" dur="1" fill="hold">
+                                          <p:stCondLst>
+                                            <p:cond delay="0"/>
+                                          </p:stCondLst>
+                                        </p:cTn>
+                                        <p:tgtEl>
+                                          <p:spTgt spid="10"/>
+                                        </p:tgtEl>
+                                        <p:attrNameLst>
+                                          <p:attrName>style.visibility</p:attrName>
+                                        </p:attrNameLst>
+                                      </p:cBhvr>
+                                      <p:to>
+                                        <p:strVal val="visible"/>
+                                      </p:to>
+                                    </p:set>
+                                  </p:childTnLst>
+                                </p:cTn>
+                              </p:par>
+                            </p:childTnLst>
+                          </p:cTn>
+                        </p:par>
+                      </p:childTnLst>
+                    </p:cTn>
+                  </p:par>
+                  <p:par>
+                    <p:cTn id="23" fill="hold">
+                      <p:stCondLst>
+                        <p:cond delay="indefinite"/>
+                      </p:stCondLst>
+                      <p:childTnLst>
+                        <p:par>
+                          <p:cTn id="24" fill="hold">
+                            <p:stCondLst>
+                              <p:cond delay="0"/>
+                            </p:stCondLst>
+                            <p:childTnLst>
+                              <p:par>
+                                <p:cTn id="25" presetID="1" presetClass="entr" presetSubtype="0" fill="hold" grpId="0" nodeType="clickEffect">
+                                  <p:stCondLst>
+                                    <p:cond delay="0"/>
+                                  </p:stCondLst>
+                                  <p:childTnLst>
+                                    <p:set>
+                                      <p:cBhvr>
+                                        <p:cTn id="26" dur="1" fill="hold">
+                                          <p:stCondLst>
+                                            <p:cond delay="0"/>
+                                          </p:stCondLst>
+                                        </p:cTn>
+                                        <p:tgtEl>
+                                          <p:spTgt spid="11"/>
+                                        </p:tgtEl>
+                                        <p:attrNameLst>
+                                          <p:attrName>style.visibility</p:attrName>
+                                        </p:attrNameLst>
+                                      </p:cBhvr>
+                                      <p:to>
+                                        <p:strVal val="visible"/>
+                                      </p:to>
+                                    </p:set>
+                                  </p:childTnLst>
+                                </p:cTn>
+                              </p:par>
+                            </p:childTnLst>
+                          </p:cTn>
+                        </p:par>
+                      </p:childTnLst>
+                    </p:cTn>
+                  </p:par>
+                  <p:par>
+                    <p:cTn id="27" fill="hold">
+                      <p:stCondLst>
+                        <p:cond delay="indefinite"/>
+                      </p:stCondLst>
+                      <p:childTnLst>
+                        <p:par>
+                          <p:cTn id="28" fill="hold">
+                            <p:stCondLst>
+                              <p:cond delay="0"/>
+                            </p:stCondLst>
+                            <p:childTnLst>
+                              <p:par>
+                                <p:cTn id="29" presetID="1" presetClass="entr" presetSubtype="0" fill="hold" grpId="0" nodeType="clickEffect">
+                                  <p:stCondLst>
+                                    <p:cond delay="0"/>
+                                  </p:stCondLst>
+                                  <p:childTnLst>
+                                    <p:set>
+                                      <p:cBhvr>
+                                        <p:cTn id="30" dur="1" fill="hold">
+                                          <p:stCondLst>
+                                            <p:cond delay="0"/>
+                                          </p:stCondLst>
+                                        </p:cTn>
+                                        <p:tgtEl>
+                                          <p:spTgt spid="12"/>
+                                        </p:tgtEl>
+                                        <p:attrNameLst>
+                                          <p:attrName>style.visibility</p:attrName>
+                                        </p:attrNameLst>
+                                      </p:cBhvr>
+                                      <p:to>
+                                        <p:strVal val="visible"/>
+                                      </p:to>
+                                    </p:set>
+                                  </p:childTnLst>
+                                </p:cTn>
+                              </p:par>
+                            </p:childTnLst>
+                          </p:cTn>
+                        </p:par>
+                      </p:childTnLst>
+                    </p:cTn>
+                  </p:par>
+                  <p:par>
+                    <p:cTn id="31" fill="hold">
+                      <p:stCondLst>
+                        <p:cond delay="indefinite"/>
+                      </p:stCondLst>
+                      <p:childTnLst>
+                        <p:par>
+                          <p:cTn id="32" fill="hold">
+                            <p:stCondLst>
+                              <p:cond delay="0"/>
+                            </p:stCondLst>
+                            <p:childTnLst>
+                              <p:par>
+                                <p:cTn id="33" presetID="1" presetClass="entr" presetSubtype="0" fill="hold" grpId="0" nodeType="clickEffect">
+                                  <p:stCondLst>
+                                    <p:cond delay="0"/>
+                                  </p:stCondLst>
+                                  <p:childTnLst>
+                                    <p:set>
+                                      <p:cBhvr>
+                                        <p:cTn id="34" dur="1" fill="hold">
+                                          <p:stCondLst>
+                                            <p:cond delay="0"/>
+                                          </p:stCondLst>
+                                        </p:cTn>
+                                        <p:tgtEl>
+                                          <p:spTgt spid="13"/>
+                                        </p:tgtEl>
+                                        <p:attrNameLst>
+                                          <p:attrName>style.visibility</p:attrName>
+                                        </p:attrNameLst>
+                                      </p:cBhvr>
+                                      <p:to>
+                                        <p:strVal val="visible"/>
+                                      </p:to>
+                                    </p:set>
+                                  </p:childTnLst>
+                                </p:cTn>
+                              </p:par>
+                            </p:childTnLst>
+                          </p:cTn>
+                        </p:par>
+                      </p:childTnLst>
+                    </p:cTn>
+                  </p:par>
+                </p:childTnLst>
+              </p:cTn>
+              <p:prevCondLst>
+                <p:cond evt="onPrev" delay="0">
+                  <p:tgtEl>
+                    <p:sldTgt/>
+                  </p:tgtEl>
+                </p:cond>
+              </p:prevCondLst>
+              <p:nextCondLst>
+                <p:cond evt="onNext" delay="0">
+                  <p:tgtEl>
+                    <p:sldTgt/>
+                  </p:tgtEl>
+                </p:cond>
+              </p:nextCondLst>
+            </p:seq>
+          </p:childTnLst>
+        </p:cTn>
+      </p:par>
+    </p:tnLst>
+    <p:bldLst>
+      <p:bldP spid="6" grpId="0" animBg="1"/>
+      <p:bldP spid="7" grpId="0" animBg="1"/>
+      <p:bldP spid="8" grpId="0" animBg="1"/>
+      <p:bldP spid="9" grpId="0" animBg="1"/>
+      <p:bldP spid="10" grpId="0" animBg="1"/>
+      <p:bldP spid="11" grpId="0" animBg="1"/>
+      <p:bldP spid="12" grpId="0" animBg="1"/>
+      <p:bldP spid="13" grpId="0" animBg="1"/>
+    </p:bldLst>
+  </p:timing>
+</p:sld>
+</file>
+
+<file path=ppt/slides/slide11.xml><?xml version="1.0" encoding="utf-8"?>
 <p:sld xmlns:a="http://schemas.openxmlformats.org/drawingml/2006/main" xmlns:p="http://schemas.openxmlformats.org/presentationml/2006/main" xmlns:r="http://schemas.openxmlformats.org/officeDocument/2006/relationships">
   <p:cSld>
     <p:spTree>
@@ -5597,7 +6504,7 @@
 </p:sld>
 </file>
 
-<file path=ppt/slides/slide11.xml><?xml version="1.0" encoding="utf-8"?>
+<file path=ppt/slides/slide12.xml><?xml version="1.0" encoding="utf-8"?>
 <p:sld xmlns:a="http://schemas.openxmlformats.org/drawingml/2006/main" xmlns:p="http://schemas.openxmlformats.org/presentationml/2006/main" xmlns:r="http://schemas.openxmlformats.org/officeDocument/2006/relationships">
   <p:cSld>
     <p:spTree>
@@ -7172,7 +8079,7 @@
 </p:sld>
 </file>
 
-<file path=ppt/slides/slide12.xml><?xml version="1.0" encoding="utf-8"?>
+<file path=ppt/slides/slide13.xml><?xml version="1.0" encoding="utf-8"?>
 <p:sld xmlns:a="http://schemas.openxmlformats.org/drawingml/2006/main" xmlns:p="http://schemas.openxmlformats.org/presentationml/2006/main" xmlns:r="http://schemas.openxmlformats.org/officeDocument/2006/relationships">
   <p:cSld>
     <p:spTree>
@@ -8943,7 +9850,7 @@
 </p:sld>
 </file>
 
-<file path=ppt/slides/slide13.xml><?xml version="1.0" encoding="utf-8"?>
+<file path=ppt/slides/slide14.xml><?xml version="1.0" encoding="utf-8"?>
 <p:sld xmlns:a="http://schemas.openxmlformats.org/drawingml/2006/main" xmlns:p="http://schemas.openxmlformats.org/presentationml/2006/main" xmlns:r="http://schemas.openxmlformats.org/officeDocument/2006/relationships">
   <p:cSld>
     <p:spTree>
@@ -10381,7 +11288,7 @@
 </p:sld>
 </file>
 
-<file path=ppt/slides/slide14.xml><?xml version="1.0" encoding="utf-8"?>
+<file path=ppt/slides/slide15.xml><?xml version="1.0" encoding="utf-8"?>
 <p:sld xmlns:a="http://schemas.openxmlformats.org/drawingml/2006/main" xmlns:p="http://schemas.openxmlformats.org/presentationml/2006/main" xmlns:r="http://schemas.openxmlformats.org/officeDocument/2006/relationships">
   <p:cSld>
     <p:spTree>
@@ -11249,7 +12156,7 @@
 </p:sld>
 </file>
 
-<file path=ppt/slides/slide15.xml><?xml version="1.0" encoding="utf-8"?>
+<file path=ppt/slides/slide16.xml><?xml version="1.0" encoding="utf-8"?>
 <p:sld xmlns:a="http://schemas.openxmlformats.org/drawingml/2006/main" xmlns:p="http://schemas.openxmlformats.org/presentationml/2006/main" xmlns:r="http://schemas.openxmlformats.org/officeDocument/2006/relationships">
   <p:cSld>
     <p:spTree>
@@ -11903,1148 +12810,6 @@
                 <a:latin typeface="Microsoft JhengHei"/>
               </a:rPr>
               <a:t>藍線：小網路 100-100。每個溫度下，蒸餾的測試錯誤數都少於只用硬目標（虛線）。</a:t>
-            </a:r>
-          </a:p>
-        </p:txBody>
-      </p:sp>
-    </p:spTree>
-  </p:cSld>
-  <p:clrMapOvr>
-    <a:masterClrMapping/>
-  </p:clrMapOvr>
-  <p:timing>
-    <p:tnLst>
-      <p:par>
-        <p:cTn id="1" dur="indefinite" restart="never" nodeType="tmRoot">
-          <p:childTnLst>
-            <p:seq concurrent="1" nextAc="seek">
-              <p:cTn id="2" dur="indefinite" nodeType="mainSeq">
-                <p:childTnLst>
-                  <p:par>
-                    <p:cTn id="3" fill="hold">
-                      <p:stCondLst>
-                        <p:cond delay="indefinite"/>
-                      </p:stCondLst>
-                      <p:childTnLst>
-                        <p:par>
-                          <p:cTn id="4" fill="hold">
-                            <p:stCondLst>
-                              <p:cond delay="0"/>
-                            </p:stCondLst>
-                            <p:childTnLst>
-                              <p:par>
-                                <p:cTn id="5" presetID="1" presetClass="entr" presetSubtype="0" fill="hold" grpId="0" nodeType="clickEffect">
-                                  <p:stCondLst>
-                                    <p:cond delay="0"/>
-                                  </p:stCondLst>
-                                  <p:childTnLst>
-                                    <p:set>
-                                      <p:cBhvr>
-                                        <p:cTn id="6" dur="1" fill="hold">
-                                          <p:stCondLst>
-                                            <p:cond delay="0"/>
-                                          </p:stCondLst>
-                                        </p:cTn>
-                                        <p:tgtEl>
-                                          <p:spTgt spid="6"/>
-                                        </p:tgtEl>
-                                        <p:attrNameLst>
-                                          <p:attrName>style.visibility</p:attrName>
-                                        </p:attrNameLst>
-                                      </p:cBhvr>
-                                      <p:to>
-                                        <p:strVal val="visible"/>
-                                      </p:to>
-                                    </p:set>
-                                  </p:childTnLst>
-                                </p:cTn>
-                              </p:par>
-                            </p:childTnLst>
-                          </p:cTn>
-                        </p:par>
-                      </p:childTnLst>
-                    </p:cTn>
-                  </p:par>
-                  <p:par>
-                    <p:cTn id="7" fill="hold">
-                      <p:stCondLst>
-                        <p:cond delay="indefinite"/>
-                      </p:stCondLst>
-                      <p:childTnLst>
-                        <p:par>
-                          <p:cTn id="8" fill="hold">
-                            <p:stCondLst>
-                              <p:cond delay="0"/>
-                            </p:stCondLst>
-                            <p:childTnLst>
-                              <p:par>
-                                <p:cTn id="9" presetID="1" presetClass="entr" presetSubtype="0" fill="hold" grpId="0" nodeType="clickEffect">
-                                  <p:stCondLst>
-                                    <p:cond delay="0"/>
-                                  </p:stCondLst>
-                                  <p:childTnLst>
-                                    <p:set>
-                                      <p:cBhvr>
-                                        <p:cTn id="10" dur="1" fill="hold">
-                                          <p:stCondLst>
-                                            <p:cond delay="0"/>
-                                          </p:stCondLst>
-                                        </p:cTn>
-                                        <p:tgtEl>
-                                          <p:spTgt spid="7"/>
-                                        </p:tgtEl>
-                                        <p:attrNameLst>
-                                          <p:attrName>style.visibility</p:attrName>
-                                        </p:attrNameLst>
-                                      </p:cBhvr>
-                                      <p:to>
-                                        <p:strVal val="visible"/>
-                                      </p:to>
-                                    </p:set>
-                                  </p:childTnLst>
-                                </p:cTn>
-                              </p:par>
-                            </p:childTnLst>
-                          </p:cTn>
-                        </p:par>
-                      </p:childTnLst>
-                    </p:cTn>
-                  </p:par>
-                  <p:par>
-                    <p:cTn id="11" fill="hold">
-                      <p:stCondLst>
-                        <p:cond delay="indefinite"/>
-                      </p:stCondLst>
-                      <p:childTnLst>
-                        <p:par>
-                          <p:cTn id="12" fill="hold">
-                            <p:stCondLst>
-                              <p:cond delay="0"/>
-                            </p:stCondLst>
-                            <p:childTnLst>
-                              <p:par>
-                                <p:cTn id="13" presetID="1" presetClass="entr" presetSubtype="0" fill="hold" grpId="0" nodeType="clickEffect">
-                                  <p:stCondLst>
-                                    <p:cond delay="0"/>
-                                  </p:stCondLst>
-                                  <p:childTnLst>
-                                    <p:set>
-                                      <p:cBhvr>
-                                        <p:cTn id="14" dur="1" fill="hold">
-                                          <p:stCondLst>
-                                            <p:cond delay="0"/>
-                                          </p:stCondLst>
-                                        </p:cTn>
-                                        <p:tgtEl>
-                                          <p:spTgt spid="8"/>
-                                        </p:tgtEl>
-                                        <p:attrNameLst>
-                                          <p:attrName>style.visibility</p:attrName>
-                                        </p:attrNameLst>
-                                      </p:cBhvr>
-                                      <p:to>
-                                        <p:strVal val="visible"/>
-                                      </p:to>
-                                    </p:set>
-                                  </p:childTnLst>
-                                </p:cTn>
-                              </p:par>
-                            </p:childTnLst>
-                          </p:cTn>
-                        </p:par>
-                      </p:childTnLst>
-                    </p:cTn>
-                  </p:par>
-                  <p:par>
-                    <p:cTn id="15" fill="hold">
-                      <p:stCondLst>
-                        <p:cond delay="indefinite"/>
-                      </p:stCondLst>
-                      <p:childTnLst>
-                        <p:par>
-                          <p:cTn id="16" fill="hold">
-                            <p:stCondLst>
-                              <p:cond delay="0"/>
-                            </p:stCondLst>
-                            <p:childTnLst>
-                              <p:par>
-                                <p:cTn id="17" presetID="1" presetClass="entr" presetSubtype="0" fill="hold" grpId="0" nodeType="clickEffect">
-                                  <p:stCondLst>
-                                    <p:cond delay="0"/>
-                                  </p:stCondLst>
-                                  <p:childTnLst>
-                                    <p:set>
-                                      <p:cBhvr>
-                                        <p:cTn id="18" dur="1" fill="hold">
-                                          <p:stCondLst>
-                                            <p:cond delay="0"/>
-                                          </p:stCondLst>
-                                        </p:cTn>
-                                        <p:tgtEl>
-                                          <p:spTgt spid="9"/>
-                                        </p:tgtEl>
-                                        <p:attrNameLst>
-                                          <p:attrName>style.visibility</p:attrName>
-                                        </p:attrNameLst>
-                                      </p:cBhvr>
-                                      <p:to>
-                                        <p:strVal val="visible"/>
-                                      </p:to>
-                                    </p:set>
-                                  </p:childTnLst>
-                                </p:cTn>
-                              </p:par>
-                            </p:childTnLst>
-                          </p:cTn>
-                        </p:par>
-                      </p:childTnLst>
-                    </p:cTn>
-                  </p:par>
-                  <p:par>
-                    <p:cTn id="19" fill="hold">
-                      <p:stCondLst>
-                        <p:cond delay="indefinite"/>
-                      </p:stCondLst>
-                      <p:childTnLst>
-                        <p:par>
-                          <p:cTn id="20" fill="hold">
-                            <p:stCondLst>
-                              <p:cond delay="0"/>
-                            </p:stCondLst>
-                            <p:childTnLst>
-                              <p:par>
-                                <p:cTn id="21" presetID="1" presetClass="entr" presetSubtype="0" fill="hold" grpId="0" nodeType="clickEffect">
-                                  <p:stCondLst>
-                                    <p:cond delay="0"/>
-                                  </p:stCondLst>
-                                  <p:childTnLst>
-                                    <p:set>
-                                      <p:cBhvr>
-                                        <p:cTn id="22" dur="1" fill="hold">
-                                          <p:stCondLst>
-                                            <p:cond delay="0"/>
-                                          </p:stCondLst>
-                                        </p:cTn>
-                                        <p:tgtEl>
-                                          <p:spTgt spid="10"/>
-                                        </p:tgtEl>
-                                        <p:attrNameLst>
-                                          <p:attrName>style.visibility</p:attrName>
-                                        </p:attrNameLst>
-                                      </p:cBhvr>
-                                      <p:to>
-                                        <p:strVal val="visible"/>
-                                      </p:to>
-                                    </p:set>
-                                  </p:childTnLst>
-                                </p:cTn>
-                              </p:par>
-                            </p:childTnLst>
-                          </p:cTn>
-                        </p:par>
-                      </p:childTnLst>
-                    </p:cTn>
-                  </p:par>
-                </p:childTnLst>
-              </p:cTn>
-              <p:prevCondLst>
-                <p:cond evt="onPrev" delay="0">
-                  <p:tgtEl>
-                    <p:sldTgt/>
-                  </p:tgtEl>
-                </p:cond>
-              </p:prevCondLst>
-              <p:nextCondLst>
-                <p:cond evt="onNext" delay="0">
-                  <p:tgtEl>
-                    <p:sldTgt/>
-                  </p:tgtEl>
-                </p:cond>
-              </p:nextCondLst>
-            </p:seq>
-          </p:childTnLst>
-        </p:cTn>
-      </p:par>
-    </p:tnLst>
-    <p:bldLst>
-      <p:bldGraphic spid="6" grpId="0">
-        <p:bldAsOne/>
-      </p:bldGraphic>
-      <p:bldP spid="7" grpId="0" animBg="1"/>
-      <p:bldP spid="8" grpId="0" animBg="1"/>
-      <p:bldP spid="9" grpId="0" animBg="1"/>
-      <p:bldP spid="10" grpId="0" animBg="1"/>
-    </p:bldLst>
-  </p:timing>
-</p:sld>
-</file>
-
-<file path=ppt/slides/slide16.xml><?xml version="1.0" encoding="utf-8"?>
-<p:sld xmlns:a="http://schemas.openxmlformats.org/drawingml/2006/main" xmlns:p="http://schemas.openxmlformats.org/presentationml/2006/main" xmlns:r="http://schemas.openxmlformats.org/officeDocument/2006/relationships">
-  <p:cSld>
-    <p:spTree>
-      <p:nvGrpSpPr>
-        <p:cNvPr id="1" name=""/>
-        <p:cNvGrpSpPr/>
-        <p:nvPr/>
-      </p:nvGrpSpPr>
-      <p:grpSpPr/>
-      <p:sp>
-        <p:nvSpPr>
-          <p:cNvPr id="2" name="Rectangle 1"/>
-          <p:cNvSpPr/>
-          <p:nvPr/>
-        </p:nvSpPr>
-        <p:spPr>
-          <a:xfrm>
-            <a:off x="0" y="0"/>
-            <a:ext cx="12191695" cy="6858000"/>
-          </a:xfrm>
-          <a:prstGeom prst="rect">
-            <a:avLst/>
-          </a:prstGeom>
-          <a:solidFill>
-            <a:srgbClr val="FFFFFF"/>
-          </a:solidFill>
-          <a:ln>
-            <a:noFill/>
-          </a:ln>
-          <a:effectLst/>
-        </p:spPr>
-        <p:style>
-          <a:lnRef idx="1">
-            <a:schemeClr val="accent1"/>
-          </a:lnRef>
-          <a:fillRef idx="3">
-            <a:schemeClr val="accent1"/>
-          </a:fillRef>
-          <a:effectRef idx="2">
-            <a:schemeClr val="accent1"/>
-          </a:effectRef>
-          <a:fontRef idx="minor">
-            <a:schemeClr val="lt1"/>
-          </a:fontRef>
-        </p:style>
-        <p:txBody>
-          <a:bodyPr rtlCol="0" anchor="ctr"/>
-          <a:lstStyle/>
-          <a:p>
-            <a:pPr algn="ctr"/>
-          </a:p>
-        </p:txBody>
-      </p:sp>
-      <p:sp>
-        <p:nvSpPr>
-          <p:cNvPr id="3" name="Rectangle 2"/>
-          <p:cNvSpPr/>
-          <p:nvPr/>
-        </p:nvSpPr>
-        <p:spPr>
-          <a:xfrm>
-            <a:off x="0" y="0"/>
-            <a:ext cx="12191695" cy="868680"/>
-          </a:xfrm>
-          <a:prstGeom prst="rect">
-            <a:avLst/>
-          </a:prstGeom>
-          <a:solidFill>
-            <a:srgbClr val="1F4E79"/>
-          </a:solidFill>
-          <a:ln>
-            <a:noFill/>
-          </a:ln>
-          <a:effectLst/>
-        </p:spPr>
-        <p:style>
-          <a:lnRef idx="1">
-            <a:schemeClr val="accent1"/>
-          </a:lnRef>
-          <a:fillRef idx="3">
-            <a:schemeClr val="accent1"/>
-          </a:fillRef>
-          <a:effectRef idx="2">
-            <a:schemeClr val="accent1"/>
-          </a:effectRef>
-          <a:fontRef idx="minor">
-            <a:schemeClr val="lt1"/>
-          </a:fontRef>
-        </p:style>
-        <p:txBody>
-          <a:bodyPr rtlCol="0" anchor="ctr"/>
-          <a:lstStyle/>
-          <a:p>
-            <a:pPr algn="ctr"/>
-          </a:p>
-        </p:txBody>
-      </p:sp>
-      <p:sp>
-        <p:nvSpPr>
-          <p:cNvPr id="4" name="TextBox 3"/>
-          <p:cNvSpPr txBox="1"/>
-          <p:nvPr/>
-        </p:nvSpPr>
-        <p:spPr>
-          <a:xfrm>
-            <a:off x="411480" y="73152"/>
-            <a:ext cx="11338560" cy="457200"/>
-          </a:xfrm>
-          <a:prstGeom prst="rect">
-            <a:avLst/>
-          </a:prstGeom>
-          <a:noFill/>
-        </p:spPr>
-        <p:txBody>
-          <a:bodyPr wrap="square">
-            <a:spAutoFit/>
-          </a:bodyPr>
-          <a:lstStyle/>
-          <a:p>
-            <a:r>
-              <a:rPr sz="2700" b="1">
-                <a:solidFill>
-                  <a:srgbClr val="FFFFFF"/>
-                </a:solidFill>
-                <a:latin typeface="Microsoft JhengHei"/>
-              </a:rPr>
-              <a:t>四、很小的網路取中間溫度</a:t>
-            </a:r>
-          </a:p>
-        </p:txBody>
-      </p:sp>
-      <p:sp>
-        <p:nvSpPr>
-          <p:cNvPr id="5" name="TextBox 4"/>
-          <p:cNvSpPr txBox="1"/>
-          <p:nvPr/>
-        </p:nvSpPr>
-        <p:spPr>
-          <a:xfrm>
-            <a:off x="411480" y="521207"/>
-            <a:ext cx="11338560" cy="301752"/>
-          </a:xfrm>
-          <a:prstGeom prst="rect">
-            <a:avLst/>
-          </a:prstGeom>
-          <a:noFill/>
-        </p:spPr>
-        <p:txBody>
-          <a:bodyPr wrap="square">
-            <a:spAutoFit/>
-          </a:bodyPr>
-          <a:lstStyle/>
-          <a:p>
-            <a:r>
-              <a:rPr sz="1300" b="0">
-                <a:solidFill>
-                  <a:srgbClr val="C7D6E5"/>
-                </a:solidFill>
-                <a:latin typeface="Microsoft JhengHei"/>
-              </a:rPr>
-              <a:t>小網路縮小為 30-30</a:t>
-            </a:r>
-          </a:p>
-        </p:txBody>
-      </p:sp>
-      <p:graphicFrame>
-        <p:nvGraphicFramePr>
-          <p:cNvPr id="6" name="Table 5"/>
-          <p:cNvGraphicFramePr>
-            <a:graphicFrameLocks noGrp="1"/>
-          </p:cNvGraphicFramePr>
-          <p:nvPr/>
-        </p:nvGraphicFramePr>
-        <p:xfrm>
-          <a:off x="731520" y="1143000"/>
-          <a:ext cx="5669280" cy="2304288"/>
-        </p:xfrm>
-        <a:graphic>
-          <a:graphicData uri="http://schemas.openxmlformats.org/drawingml/2006/table">
-            <a:tbl>
-              <a:tblPr bandRow="1">
-                <a:tableStyleId>{5C22544A-7EE6-4342-B048-85BDC9FD1C3A}</a:tableStyleId>
-              </a:tblPr>
-              <a:tblGrid>
-                <a:gridCol w="1889760"/>
-                <a:gridCol w="1889760"/>
-                <a:gridCol w="1889760"/>
-              </a:tblGrid>
-              <a:tr h="329184">
-                <a:tc>
-                  <a:txBody>
-                    <a:bodyPr/>
-                    <a:lstStyle/>
-                    <a:p>
-                      <a:pPr algn="ctr"/>
-                      <a:r>
-                        <a:rPr sz="1600" b="1">
-                          <a:solidFill>
-                            <a:srgbClr val="FFFFFF"/>
-                          </a:solidFill>
-                          <a:latin typeface="Microsoft JhengHei"/>
-                        </a:rPr>
-                        <a:t>T</a:t>
-                      </a:r>
-                    </a:p>
-                  </a:txBody>
-                  <a:tcPr marL="36576" marR="36576" marT="9144" marB="9144">
-                    <a:solidFill>
-                      <a:srgbClr val="1F4E79"/>
-                    </a:solidFill>
-                  </a:tcPr>
-                </a:tc>
-                <a:tc>
-                  <a:txBody>
-                    <a:bodyPr/>
-                    <a:lstStyle/>
-                    <a:p>
-                      <a:pPr algn="ctr"/>
-                      <a:r>
-                        <a:rPr sz="1600" b="1">
-                          <a:solidFill>
-                            <a:srgbClr val="FFFFFF"/>
-                          </a:solidFill>
-                          <a:latin typeface="Microsoft JhengHei"/>
-                        </a:rPr>
-                        <a:t>小網路 100-100</a:t>
-                      </a:r>
-                    </a:p>
-                  </a:txBody>
-                  <a:tcPr marL="36576" marR="36576" marT="9144" marB="9144">
-                    <a:solidFill>
-                      <a:srgbClr val="1F4E79"/>
-                    </a:solidFill>
-                  </a:tcPr>
-                </a:tc>
-                <a:tc>
-                  <a:txBody>
-                    <a:bodyPr/>
-                    <a:lstStyle/>
-                    <a:p>
-                      <a:pPr algn="ctr"/>
-                      <a:r>
-                        <a:rPr sz="1600" b="1">
-                          <a:solidFill>
-                            <a:srgbClr val="FFFFFF"/>
-                          </a:solidFill>
-                          <a:latin typeface="Microsoft JhengHei"/>
-                        </a:rPr>
-                        <a:t>小網路 30-30</a:t>
-                      </a:r>
-                    </a:p>
-                  </a:txBody>
-                  <a:tcPr marL="36576" marR="36576" marT="9144" marB="9144">
-                    <a:solidFill>
-                      <a:srgbClr val="1F4E79"/>
-                    </a:solidFill>
-                  </a:tcPr>
-                </a:tc>
-              </a:tr>
-              <a:tr h="329184">
-                <a:tc>
-                  <a:txBody>
-                    <a:bodyPr/>
-                    <a:lstStyle/>
-                    <a:p>
-                      <a:pPr algn="ctr"/>
-                      <a:r>
-                        <a:rPr sz="1600" b="0">
-                          <a:solidFill>
-                            <a:srgbClr val="202020"/>
-                          </a:solidFill>
-                          <a:latin typeface="Consolas"/>
-                        </a:rPr>
-                        <a:t>只用硬目標</a:t>
-                      </a:r>
-                    </a:p>
-                  </a:txBody>
-                  <a:tcPr marL="36576" marR="36576" marT="9144" marB="9144">
-                    <a:solidFill>
-                      <a:srgbClr val="FFFFFF"/>
-                    </a:solidFill>
-                  </a:tcPr>
-                </a:tc>
-                <a:tc>
-                  <a:txBody>
-                    <a:bodyPr/>
-                    <a:lstStyle/>
-                    <a:p>
-                      <a:pPr algn="ctr"/>
-                      <a:r>
-                        <a:rPr sz="1600" b="0">
-                          <a:solidFill>
-                            <a:srgbClr val="202020"/>
-                          </a:solidFill>
-                          <a:latin typeface="Consolas"/>
-                        </a:rPr>
-                        <a:t>420</a:t>
-                      </a:r>
-                    </a:p>
-                  </a:txBody>
-                  <a:tcPr marL="36576" marR="36576" marT="9144" marB="9144">
-                    <a:solidFill>
-                      <a:srgbClr val="FFFFFF"/>
-                    </a:solidFill>
-                  </a:tcPr>
-                </a:tc>
-                <a:tc>
-                  <a:txBody>
-                    <a:bodyPr/>
-                    <a:lstStyle/>
-                    <a:p>
-                      <a:pPr algn="ctr"/>
-                      <a:r>
-                        <a:rPr sz="1600" b="0">
-                          <a:solidFill>
-                            <a:srgbClr val="202020"/>
-                          </a:solidFill>
-                          <a:latin typeface="Consolas"/>
-                        </a:rPr>
-                        <a:t>568</a:t>
-                      </a:r>
-                    </a:p>
-                  </a:txBody>
-                  <a:tcPr marL="36576" marR="36576" marT="9144" marB="9144">
-                    <a:solidFill>
-                      <a:srgbClr val="FFFFFF"/>
-                    </a:solidFill>
-                  </a:tcPr>
-                </a:tc>
-              </a:tr>
-              <a:tr h="329184">
-                <a:tc>
-                  <a:txBody>
-                    <a:bodyPr/>
-                    <a:lstStyle/>
-                    <a:p>
-                      <a:pPr algn="ctr"/>
-                      <a:r>
-                        <a:rPr sz="1600" b="0">
-                          <a:solidFill>
-                            <a:srgbClr val="202020"/>
-                          </a:solidFill>
-                          <a:latin typeface="Consolas"/>
-                        </a:rPr>
-                        <a:t>1</a:t>
-                      </a:r>
-                    </a:p>
-                  </a:txBody>
-                  <a:tcPr marL="36576" marR="36576" marT="9144" marB="9144">
-                    <a:solidFill>
-                      <a:srgbClr val="FFFFFF"/>
-                    </a:solidFill>
-                  </a:tcPr>
-                </a:tc>
-                <a:tc>
-                  <a:txBody>
-                    <a:bodyPr/>
-                    <a:lstStyle/>
-                    <a:p>
-                      <a:pPr algn="ctr"/>
-                      <a:r>
-                        <a:rPr sz="1600" b="0">
-                          <a:solidFill>
-                            <a:srgbClr val="202020"/>
-                          </a:solidFill>
-                          <a:latin typeface="Consolas"/>
-                        </a:rPr>
-                        <a:t>397</a:t>
-                      </a:r>
-                    </a:p>
-                  </a:txBody>
-                  <a:tcPr marL="36576" marR="36576" marT="9144" marB="9144">
-                    <a:solidFill>
-                      <a:srgbClr val="FFFFFF"/>
-                    </a:solidFill>
-                  </a:tcPr>
-                </a:tc>
-                <a:tc>
-                  <a:txBody>
-                    <a:bodyPr/>
-                    <a:lstStyle/>
-                    <a:p>
-                      <a:pPr algn="ctr"/>
-                      <a:r>
-                        <a:rPr sz="1600" b="0">
-                          <a:solidFill>
-                            <a:srgbClr val="202020"/>
-                          </a:solidFill>
-                          <a:latin typeface="Consolas"/>
-                        </a:rPr>
-                        <a:t>522</a:t>
-                      </a:r>
-                    </a:p>
-                  </a:txBody>
-                  <a:tcPr marL="36576" marR="36576" marT="9144" marB="9144">
-                    <a:solidFill>
-                      <a:srgbClr val="FFFFFF"/>
-                    </a:solidFill>
-                  </a:tcPr>
-                </a:tc>
-              </a:tr>
-              <a:tr h="329184">
-                <a:tc>
-                  <a:txBody>
-                    <a:bodyPr/>
-                    <a:lstStyle/>
-                    <a:p>
-                      <a:pPr algn="ctr"/>
-                      <a:r>
-                        <a:rPr sz="1600" b="0">
-                          <a:solidFill>
-                            <a:srgbClr val="202020"/>
-                          </a:solidFill>
-                          <a:latin typeface="Consolas"/>
-                        </a:rPr>
-                        <a:t>2</a:t>
-                      </a:r>
-                    </a:p>
-                  </a:txBody>
-                  <a:tcPr marL="36576" marR="36576" marT="9144" marB="9144">
-                    <a:solidFill>
-                      <a:srgbClr val="FFFFFF"/>
-                    </a:solidFill>
-                  </a:tcPr>
-                </a:tc>
-                <a:tc>
-                  <a:txBody>
-                    <a:bodyPr/>
-                    <a:lstStyle/>
-                    <a:p>
-                      <a:pPr algn="ctr"/>
-                      <a:r>
-                        <a:rPr sz="1600" b="0">
-                          <a:solidFill>
-                            <a:srgbClr val="202020"/>
-                          </a:solidFill>
-                          <a:latin typeface="Consolas"/>
-                        </a:rPr>
-                        <a:t>343</a:t>
-                      </a:r>
-                    </a:p>
-                  </a:txBody>
-                  <a:tcPr marL="36576" marR="36576" marT="9144" marB="9144">
-                    <a:solidFill>
-                      <a:srgbClr val="FFFFFF"/>
-                    </a:solidFill>
-                  </a:tcPr>
-                </a:tc>
-                <a:tc>
-                  <a:txBody>
-                    <a:bodyPr/>
-                    <a:lstStyle/>
-                    <a:p>
-                      <a:pPr algn="ctr"/>
-                      <a:r>
-                        <a:rPr sz="1600" b="0">
-                          <a:solidFill>
-                            <a:srgbClr val="202020"/>
-                          </a:solidFill>
-                          <a:latin typeface="Consolas"/>
-                        </a:rPr>
-                        <a:t>545</a:t>
-                      </a:r>
-                    </a:p>
-                  </a:txBody>
-                  <a:tcPr marL="36576" marR="36576" marT="9144" marB="9144">
-                    <a:solidFill>
-                      <a:srgbClr val="FFFFFF"/>
-                    </a:solidFill>
-                  </a:tcPr>
-                </a:tc>
-              </a:tr>
-              <a:tr h="329184">
-                <a:tc>
-                  <a:txBody>
-                    <a:bodyPr/>
-                    <a:lstStyle/>
-                    <a:p>
-                      <a:pPr algn="ctr"/>
-                      <a:r>
-                        <a:rPr sz="1600" b="0">
-                          <a:solidFill>
-                            <a:srgbClr val="202020"/>
-                          </a:solidFill>
-                          <a:latin typeface="Consolas"/>
-                        </a:rPr>
-                        <a:t>4</a:t>
-                      </a:r>
-                    </a:p>
-                  </a:txBody>
-                  <a:tcPr marL="36576" marR="36576" marT="9144" marB="9144">
-                    <a:solidFill>
-                      <a:srgbClr val="FFFFFF"/>
-                    </a:solidFill>
-                  </a:tcPr>
-                </a:tc>
-                <a:tc>
-                  <a:txBody>
-                    <a:bodyPr/>
-                    <a:lstStyle/>
-                    <a:p>
-                      <a:pPr algn="ctr"/>
-                      <a:r>
-                        <a:rPr sz="1600" b="0">
-                          <a:solidFill>
-                            <a:srgbClr val="202020"/>
-                          </a:solidFill>
-                          <a:latin typeface="Consolas"/>
-                        </a:rPr>
-                        <a:t>327</a:t>
-                      </a:r>
-                    </a:p>
-                  </a:txBody>
-                  <a:tcPr marL="36576" marR="36576" marT="9144" marB="9144">
-                    <a:solidFill>
-                      <a:srgbClr val="FFFFFF"/>
-                    </a:solidFill>
-                  </a:tcPr>
-                </a:tc>
-                <a:tc>
-                  <a:txBody>
-                    <a:bodyPr/>
-                    <a:lstStyle/>
-                    <a:p>
-                      <a:pPr algn="ctr"/>
-                      <a:r>
-                        <a:rPr sz="1600" b="0">
-                          <a:solidFill>
-                            <a:srgbClr val="202020"/>
-                          </a:solidFill>
-                          <a:latin typeface="Consolas"/>
-                        </a:rPr>
-                        <a:t>498</a:t>
-                      </a:r>
-                    </a:p>
-                  </a:txBody>
-                  <a:tcPr marL="36576" marR="36576" marT="9144" marB="9144">
-                    <a:solidFill>
-                      <a:srgbClr val="FFF3CD"/>
-                    </a:solidFill>
-                  </a:tcPr>
-                </a:tc>
-              </a:tr>
-              <a:tr h="329184">
-                <a:tc>
-                  <a:txBody>
-                    <a:bodyPr/>
-                    <a:lstStyle/>
-                    <a:p>
-                      <a:pPr algn="ctr"/>
-                      <a:r>
-                        <a:rPr sz="1600" b="0">
-                          <a:solidFill>
-                            <a:srgbClr val="202020"/>
-                          </a:solidFill>
-                          <a:latin typeface="Consolas"/>
-                        </a:rPr>
-                        <a:t>8</a:t>
-                      </a:r>
-                    </a:p>
-                  </a:txBody>
-                  <a:tcPr marL="36576" marR="36576" marT="9144" marB="9144">
-                    <a:solidFill>
-                      <a:srgbClr val="FFFFFF"/>
-                    </a:solidFill>
-                  </a:tcPr>
-                </a:tc>
-                <a:tc>
-                  <a:txBody>
-                    <a:bodyPr/>
-                    <a:lstStyle/>
-                    <a:p>
-                      <a:pPr algn="ctr"/>
-                      <a:r>
-                        <a:rPr sz="1600" b="0">
-                          <a:solidFill>
-                            <a:srgbClr val="202020"/>
-                          </a:solidFill>
-                          <a:latin typeface="Consolas"/>
-                        </a:rPr>
-                        <a:t>322</a:t>
-                      </a:r>
-                    </a:p>
-                  </a:txBody>
-                  <a:tcPr marL="36576" marR="36576" marT="9144" marB="9144">
-                    <a:solidFill>
-                      <a:srgbClr val="FFFFFF"/>
-                    </a:solidFill>
-                  </a:tcPr>
-                </a:tc>
-                <a:tc>
-                  <a:txBody>
-                    <a:bodyPr/>
-                    <a:lstStyle/>
-                    <a:p>
-                      <a:pPr algn="ctr"/>
-                      <a:r>
-                        <a:rPr sz="1600" b="0">
-                          <a:solidFill>
-                            <a:srgbClr val="202020"/>
-                          </a:solidFill>
-                          <a:latin typeface="Consolas"/>
-                        </a:rPr>
-                        <a:t>554</a:t>
-                      </a:r>
-                    </a:p>
-                  </a:txBody>
-                  <a:tcPr marL="36576" marR="36576" marT="9144" marB="9144">
-                    <a:solidFill>
-                      <a:srgbClr val="FFFFFF"/>
-                    </a:solidFill>
-                  </a:tcPr>
-                </a:tc>
-              </a:tr>
-              <a:tr h="329184">
-                <a:tc>
-                  <a:txBody>
-                    <a:bodyPr/>
-                    <a:lstStyle/>
-                    <a:p>
-                      <a:pPr algn="ctr"/>
-                      <a:r>
-                        <a:rPr sz="1600" b="0">
-                          <a:solidFill>
-                            <a:srgbClr val="202020"/>
-                          </a:solidFill>
-                          <a:latin typeface="Consolas"/>
-                        </a:rPr>
-                        <a:t>20</a:t>
-                      </a:r>
-                    </a:p>
-                  </a:txBody>
-                  <a:tcPr marL="36576" marR="36576" marT="9144" marB="9144">
-                    <a:solidFill>
-                      <a:srgbClr val="FFFFFF"/>
-                    </a:solidFill>
-                  </a:tcPr>
-                </a:tc>
-                <a:tc>
-                  <a:txBody>
-                    <a:bodyPr/>
-                    <a:lstStyle/>
-                    <a:p>
-                      <a:pPr algn="ctr"/>
-                      <a:r>
-                        <a:rPr sz="1600" b="0">
-                          <a:solidFill>
-                            <a:srgbClr val="202020"/>
-                          </a:solidFill>
-                          <a:latin typeface="Consolas"/>
-                        </a:rPr>
-                        <a:t>319</a:t>
-                      </a:r>
-                    </a:p>
-                  </a:txBody>
-                  <a:tcPr marL="36576" marR="36576" marT="9144" marB="9144">
-                    <a:solidFill>
-                      <a:srgbClr val="FFFFFF"/>
-                    </a:solidFill>
-                  </a:tcPr>
-                </a:tc>
-                <a:tc>
-                  <a:txBody>
-                    <a:bodyPr/>
-                    <a:lstStyle/>
-                    <a:p>
-                      <a:pPr algn="ctr"/>
-                      <a:r>
-                        <a:rPr sz="1600" b="0">
-                          <a:solidFill>
-                            <a:srgbClr val="202020"/>
-                          </a:solidFill>
-                          <a:latin typeface="Consolas"/>
-                        </a:rPr>
-                        <a:t>599</a:t>
-                      </a:r>
-                    </a:p>
-                  </a:txBody>
-                  <a:tcPr marL="36576" marR="36576" marT="9144" marB="9144">
-                    <a:solidFill>
-                      <a:srgbClr val="FFFFFF"/>
-                    </a:solidFill>
-                  </a:tcPr>
-                </a:tc>
-              </a:tr>
-            </a:tbl>
-          </a:graphicData>
-        </a:graphic>
-      </p:graphicFrame>
-      <p:pic>
-        <p:nvPicPr>
-          <p:cNvPr id="7" name="Picture 6" descr="f_temp.png"/>
-          <p:cNvPicPr>
-            <a:picLocks noChangeAspect="1"/>
-          </p:cNvPicPr>
-          <p:nvPr/>
-        </p:nvPicPr>
-        <p:blipFill>
-          <a:blip r:embed="rId2"/>
-          <a:stretch>
-            <a:fillRect/>
-          </a:stretch>
-        </p:blipFill>
-        <p:spPr>
-          <a:xfrm>
-            <a:off x="6583680" y="1097280"/>
-            <a:ext cx="5120640" cy="2720340"/>
-          </a:xfrm>
-          <a:prstGeom prst="rect">
-            <a:avLst/>
-          </a:prstGeom>
-        </p:spPr>
-      </p:pic>
-      <p:sp>
-        <p:nvSpPr>
-          <p:cNvPr id="8" name="Rectangle 7"/>
-          <p:cNvSpPr/>
-          <p:nvPr/>
-        </p:nvSpPr>
-        <p:spPr>
-          <a:xfrm>
-            <a:off x="731520" y="3886200"/>
-            <a:ext cx="10881360" cy="914400"/>
-          </a:xfrm>
-          <a:prstGeom prst="rect">
-            <a:avLst/>
-          </a:prstGeom>
-          <a:solidFill>
-            <a:srgbClr val="F6F8FA"/>
-          </a:solidFill>
-          <a:ln>
-            <a:solidFill>
-              <a:srgbClr val="D0D7DE"/>
-            </a:solidFill>
-          </a:ln>
-          <a:effectLst/>
-        </p:spPr>
-        <p:style>
-          <a:lnRef idx="1">
-            <a:schemeClr val="accent1"/>
-          </a:lnRef>
-          <a:fillRef idx="3">
-            <a:schemeClr val="accent1"/>
-          </a:fillRef>
-          <a:effectRef idx="2">
-            <a:schemeClr val="accent1"/>
-          </a:effectRef>
-          <a:fontRef idx="minor">
-            <a:schemeClr val="lt1"/>
-          </a:fontRef>
-        </p:style>
-        <p:txBody>
-          <a:bodyPr rtlCol="0" anchor="ctr" wrap="square"/>
-          <a:lstStyle/>
-          <a:p>
-            <a:pPr algn="l"/>
-            <a:r>
-              <a:rPr sz="1700" b="1">
-                <a:solidFill>
-                  <a:srgbClr val="1F4E79"/>
-                </a:solidFill>
-                <a:latin typeface="Microsoft JhengHei"/>
-              </a:rPr>
-              <a:t>論文：每層 300 個以上單元時，8 以上的溫度結果相當接近；每層縮減為 30 個時，</a:t>
-            </a:r>
-          </a:p>
-          <a:p>
-            <a:pPr algn="l"/>
-            <a:r>
-              <a:rPr sz="1700" b="1">
-                <a:solidFill>
-                  <a:srgbClr val="1F4E79"/>
-                </a:solidFill>
-                <a:latin typeface="Microsoft JhengHei"/>
-              </a:rPr>
-              <a:t>2.5 至 4 的溫度明顯優於更高或更低的溫度</a:t>
-            </a:r>
-          </a:p>
-        </p:txBody>
-      </p:sp>
-      <p:sp>
-        <p:nvSpPr>
-          <p:cNvPr id="9" name="Rectangle 8"/>
-          <p:cNvSpPr/>
-          <p:nvPr/>
-        </p:nvSpPr>
-        <p:spPr>
-          <a:xfrm>
-            <a:off x="731520" y="4892040"/>
-            <a:ext cx="10881360" cy="914400"/>
-          </a:xfrm>
-          <a:prstGeom prst="rect">
-            <a:avLst/>
-          </a:prstGeom>
-          <a:solidFill>
-            <a:srgbClr val="DCF0E4"/>
-          </a:solidFill>
-          <a:ln>
-            <a:solidFill>
-              <a:srgbClr val="D0D7DE"/>
-            </a:solidFill>
-          </a:ln>
-          <a:effectLst/>
-        </p:spPr>
-        <p:style>
-          <a:lnRef idx="1">
-            <a:schemeClr val="accent1"/>
-          </a:lnRef>
-          <a:fillRef idx="3">
-            <a:schemeClr val="accent1"/>
-          </a:fillRef>
-          <a:effectRef idx="2">
-            <a:schemeClr val="accent1"/>
-          </a:effectRef>
-          <a:fontRef idx="minor">
-            <a:schemeClr val="lt1"/>
-          </a:fontRef>
-        </p:style>
-        <p:txBody>
-          <a:bodyPr rtlCol="0" anchor="ctr" wrap="square"/>
-          <a:lstStyle/>
-          <a:p>
-            <a:pPr algn="l"/>
-            <a:r>
-              <a:rPr sz="1800" b="1">
-                <a:solidFill>
-                  <a:srgbClr val="1E7A45"/>
-                </a:solidFill>
-                <a:latin typeface="Microsoft JhengHei"/>
-              </a:rPr>
-              <a:t>本教材：30-30 在 T = 4 最好（498 個錯誤），T = 20 反而比只用硬目標還差</a:t>
-            </a:r>
-          </a:p>
-        </p:txBody>
-      </p:sp>
-      <p:sp>
-        <p:nvSpPr>
-          <p:cNvPr id="10" name="TextBox 9"/>
-          <p:cNvSpPr txBox="1"/>
-          <p:nvPr/>
-        </p:nvSpPr>
-        <p:spPr>
-          <a:xfrm>
-            <a:off x="731520" y="5897880"/>
-            <a:ext cx="10881360" cy="731520"/>
-          </a:xfrm>
-          <a:prstGeom prst="rect">
-            <a:avLst/>
-          </a:prstGeom>
-          <a:noFill/>
-        </p:spPr>
-        <p:txBody>
-          <a:bodyPr wrap="square">
-            <a:spAutoFit/>
-          </a:bodyPr>
-          <a:lstStyle/>
-          <a:p>
-            <a:r>
-              <a:rPr sz="1600" b="0">
-                <a:solidFill>
-                  <a:srgbClr val="59636E"/>
-                </a:solidFill>
-                <a:latin typeface="Microsoft JhengHei"/>
-              </a:rPr>
-              <a:t>蒸餾模型小到無法容納笨重模型全部的知識時，忽略那些很負的 logit 反而有幫助。</a:t>
             </a:r>
           </a:p>
         </p:txBody>
@@ -13448,6 +13213,1148 @@
                 </a:solidFill>
                 <a:latin typeface="Microsoft JhengHei"/>
               </a:rPr>
+              <a:t>四、很小的網路取中間溫度</a:t>
+            </a:r>
+          </a:p>
+        </p:txBody>
+      </p:sp>
+      <p:sp>
+        <p:nvSpPr>
+          <p:cNvPr id="5" name="TextBox 4"/>
+          <p:cNvSpPr txBox="1"/>
+          <p:nvPr/>
+        </p:nvSpPr>
+        <p:spPr>
+          <a:xfrm>
+            <a:off x="411480" y="521207"/>
+            <a:ext cx="11338560" cy="301752"/>
+          </a:xfrm>
+          <a:prstGeom prst="rect">
+            <a:avLst/>
+          </a:prstGeom>
+          <a:noFill/>
+        </p:spPr>
+        <p:txBody>
+          <a:bodyPr wrap="square">
+            <a:spAutoFit/>
+          </a:bodyPr>
+          <a:lstStyle/>
+          <a:p>
+            <a:r>
+              <a:rPr sz="1300" b="0">
+                <a:solidFill>
+                  <a:srgbClr val="C7D6E5"/>
+                </a:solidFill>
+                <a:latin typeface="Microsoft JhengHei"/>
+              </a:rPr>
+              <a:t>小網路縮小為 30-30</a:t>
+            </a:r>
+          </a:p>
+        </p:txBody>
+      </p:sp>
+      <p:graphicFrame>
+        <p:nvGraphicFramePr>
+          <p:cNvPr id="6" name="Table 5"/>
+          <p:cNvGraphicFramePr>
+            <a:graphicFrameLocks noGrp="1"/>
+          </p:cNvGraphicFramePr>
+          <p:nvPr/>
+        </p:nvGraphicFramePr>
+        <p:xfrm>
+          <a:off x="731520" y="1143000"/>
+          <a:ext cx="5669280" cy="2304288"/>
+        </p:xfrm>
+        <a:graphic>
+          <a:graphicData uri="http://schemas.openxmlformats.org/drawingml/2006/table">
+            <a:tbl>
+              <a:tblPr bandRow="1">
+                <a:tableStyleId>{5C22544A-7EE6-4342-B048-85BDC9FD1C3A}</a:tableStyleId>
+              </a:tblPr>
+              <a:tblGrid>
+                <a:gridCol w="1889760"/>
+                <a:gridCol w="1889760"/>
+                <a:gridCol w="1889760"/>
+              </a:tblGrid>
+              <a:tr h="329184">
+                <a:tc>
+                  <a:txBody>
+                    <a:bodyPr/>
+                    <a:lstStyle/>
+                    <a:p>
+                      <a:pPr algn="ctr"/>
+                      <a:r>
+                        <a:rPr sz="1600" b="1">
+                          <a:solidFill>
+                            <a:srgbClr val="FFFFFF"/>
+                          </a:solidFill>
+                          <a:latin typeface="Microsoft JhengHei"/>
+                        </a:rPr>
+                        <a:t>T</a:t>
+                      </a:r>
+                    </a:p>
+                  </a:txBody>
+                  <a:tcPr marL="36576" marR="36576" marT="9144" marB="9144">
+                    <a:solidFill>
+                      <a:srgbClr val="1F4E79"/>
+                    </a:solidFill>
+                  </a:tcPr>
+                </a:tc>
+                <a:tc>
+                  <a:txBody>
+                    <a:bodyPr/>
+                    <a:lstStyle/>
+                    <a:p>
+                      <a:pPr algn="ctr"/>
+                      <a:r>
+                        <a:rPr sz="1600" b="1">
+                          <a:solidFill>
+                            <a:srgbClr val="FFFFFF"/>
+                          </a:solidFill>
+                          <a:latin typeface="Microsoft JhengHei"/>
+                        </a:rPr>
+                        <a:t>小網路 100-100</a:t>
+                      </a:r>
+                    </a:p>
+                  </a:txBody>
+                  <a:tcPr marL="36576" marR="36576" marT="9144" marB="9144">
+                    <a:solidFill>
+                      <a:srgbClr val="1F4E79"/>
+                    </a:solidFill>
+                  </a:tcPr>
+                </a:tc>
+                <a:tc>
+                  <a:txBody>
+                    <a:bodyPr/>
+                    <a:lstStyle/>
+                    <a:p>
+                      <a:pPr algn="ctr"/>
+                      <a:r>
+                        <a:rPr sz="1600" b="1">
+                          <a:solidFill>
+                            <a:srgbClr val="FFFFFF"/>
+                          </a:solidFill>
+                          <a:latin typeface="Microsoft JhengHei"/>
+                        </a:rPr>
+                        <a:t>小網路 30-30</a:t>
+                      </a:r>
+                    </a:p>
+                  </a:txBody>
+                  <a:tcPr marL="36576" marR="36576" marT="9144" marB="9144">
+                    <a:solidFill>
+                      <a:srgbClr val="1F4E79"/>
+                    </a:solidFill>
+                  </a:tcPr>
+                </a:tc>
+              </a:tr>
+              <a:tr h="329184">
+                <a:tc>
+                  <a:txBody>
+                    <a:bodyPr/>
+                    <a:lstStyle/>
+                    <a:p>
+                      <a:pPr algn="ctr"/>
+                      <a:r>
+                        <a:rPr sz="1600" b="0">
+                          <a:solidFill>
+                            <a:srgbClr val="202020"/>
+                          </a:solidFill>
+                          <a:latin typeface="Consolas"/>
+                        </a:rPr>
+                        <a:t>只用硬目標</a:t>
+                      </a:r>
+                    </a:p>
+                  </a:txBody>
+                  <a:tcPr marL="36576" marR="36576" marT="9144" marB="9144">
+                    <a:solidFill>
+                      <a:srgbClr val="FFFFFF"/>
+                    </a:solidFill>
+                  </a:tcPr>
+                </a:tc>
+                <a:tc>
+                  <a:txBody>
+                    <a:bodyPr/>
+                    <a:lstStyle/>
+                    <a:p>
+                      <a:pPr algn="ctr"/>
+                      <a:r>
+                        <a:rPr sz="1600" b="0">
+                          <a:solidFill>
+                            <a:srgbClr val="202020"/>
+                          </a:solidFill>
+                          <a:latin typeface="Consolas"/>
+                        </a:rPr>
+                        <a:t>420</a:t>
+                      </a:r>
+                    </a:p>
+                  </a:txBody>
+                  <a:tcPr marL="36576" marR="36576" marT="9144" marB="9144">
+                    <a:solidFill>
+                      <a:srgbClr val="FFFFFF"/>
+                    </a:solidFill>
+                  </a:tcPr>
+                </a:tc>
+                <a:tc>
+                  <a:txBody>
+                    <a:bodyPr/>
+                    <a:lstStyle/>
+                    <a:p>
+                      <a:pPr algn="ctr"/>
+                      <a:r>
+                        <a:rPr sz="1600" b="0">
+                          <a:solidFill>
+                            <a:srgbClr val="202020"/>
+                          </a:solidFill>
+                          <a:latin typeface="Consolas"/>
+                        </a:rPr>
+                        <a:t>568</a:t>
+                      </a:r>
+                    </a:p>
+                  </a:txBody>
+                  <a:tcPr marL="36576" marR="36576" marT="9144" marB="9144">
+                    <a:solidFill>
+                      <a:srgbClr val="FFFFFF"/>
+                    </a:solidFill>
+                  </a:tcPr>
+                </a:tc>
+              </a:tr>
+              <a:tr h="329184">
+                <a:tc>
+                  <a:txBody>
+                    <a:bodyPr/>
+                    <a:lstStyle/>
+                    <a:p>
+                      <a:pPr algn="ctr"/>
+                      <a:r>
+                        <a:rPr sz="1600" b="0">
+                          <a:solidFill>
+                            <a:srgbClr val="202020"/>
+                          </a:solidFill>
+                          <a:latin typeface="Consolas"/>
+                        </a:rPr>
+                        <a:t>1</a:t>
+                      </a:r>
+                    </a:p>
+                  </a:txBody>
+                  <a:tcPr marL="36576" marR="36576" marT="9144" marB="9144">
+                    <a:solidFill>
+                      <a:srgbClr val="FFFFFF"/>
+                    </a:solidFill>
+                  </a:tcPr>
+                </a:tc>
+                <a:tc>
+                  <a:txBody>
+                    <a:bodyPr/>
+                    <a:lstStyle/>
+                    <a:p>
+                      <a:pPr algn="ctr"/>
+                      <a:r>
+                        <a:rPr sz="1600" b="0">
+                          <a:solidFill>
+                            <a:srgbClr val="202020"/>
+                          </a:solidFill>
+                          <a:latin typeface="Consolas"/>
+                        </a:rPr>
+                        <a:t>397</a:t>
+                      </a:r>
+                    </a:p>
+                  </a:txBody>
+                  <a:tcPr marL="36576" marR="36576" marT="9144" marB="9144">
+                    <a:solidFill>
+                      <a:srgbClr val="FFFFFF"/>
+                    </a:solidFill>
+                  </a:tcPr>
+                </a:tc>
+                <a:tc>
+                  <a:txBody>
+                    <a:bodyPr/>
+                    <a:lstStyle/>
+                    <a:p>
+                      <a:pPr algn="ctr"/>
+                      <a:r>
+                        <a:rPr sz="1600" b="0">
+                          <a:solidFill>
+                            <a:srgbClr val="202020"/>
+                          </a:solidFill>
+                          <a:latin typeface="Consolas"/>
+                        </a:rPr>
+                        <a:t>522</a:t>
+                      </a:r>
+                    </a:p>
+                  </a:txBody>
+                  <a:tcPr marL="36576" marR="36576" marT="9144" marB="9144">
+                    <a:solidFill>
+                      <a:srgbClr val="FFFFFF"/>
+                    </a:solidFill>
+                  </a:tcPr>
+                </a:tc>
+              </a:tr>
+              <a:tr h="329184">
+                <a:tc>
+                  <a:txBody>
+                    <a:bodyPr/>
+                    <a:lstStyle/>
+                    <a:p>
+                      <a:pPr algn="ctr"/>
+                      <a:r>
+                        <a:rPr sz="1600" b="0">
+                          <a:solidFill>
+                            <a:srgbClr val="202020"/>
+                          </a:solidFill>
+                          <a:latin typeface="Consolas"/>
+                        </a:rPr>
+                        <a:t>2</a:t>
+                      </a:r>
+                    </a:p>
+                  </a:txBody>
+                  <a:tcPr marL="36576" marR="36576" marT="9144" marB="9144">
+                    <a:solidFill>
+                      <a:srgbClr val="FFFFFF"/>
+                    </a:solidFill>
+                  </a:tcPr>
+                </a:tc>
+                <a:tc>
+                  <a:txBody>
+                    <a:bodyPr/>
+                    <a:lstStyle/>
+                    <a:p>
+                      <a:pPr algn="ctr"/>
+                      <a:r>
+                        <a:rPr sz="1600" b="0">
+                          <a:solidFill>
+                            <a:srgbClr val="202020"/>
+                          </a:solidFill>
+                          <a:latin typeface="Consolas"/>
+                        </a:rPr>
+                        <a:t>343</a:t>
+                      </a:r>
+                    </a:p>
+                  </a:txBody>
+                  <a:tcPr marL="36576" marR="36576" marT="9144" marB="9144">
+                    <a:solidFill>
+                      <a:srgbClr val="FFFFFF"/>
+                    </a:solidFill>
+                  </a:tcPr>
+                </a:tc>
+                <a:tc>
+                  <a:txBody>
+                    <a:bodyPr/>
+                    <a:lstStyle/>
+                    <a:p>
+                      <a:pPr algn="ctr"/>
+                      <a:r>
+                        <a:rPr sz="1600" b="0">
+                          <a:solidFill>
+                            <a:srgbClr val="202020"/>
+                          </a:solidFill>
+                          <a:latin typeface="Consolas"/>
+                        </a:rPr>
+                        <a:t>545</a:t>
+                      </a:r>
+                    </a:p>
+                  </a:txBody>
+                  <a:tcPr marL="36576" marR="36576" marT="9144" marB="9144">
+                    <a:solidFill>
+                      <a:srgbClr val="FFFFFF"/>
+                    </a:solidFill>
+                  </a:tcPr>
+                </a:tc>
+              </a:tr>
+              <a:tr h="329184">
+                <a:tc>
+                  <a:txBody>
+                    <a:bodyPr/>
+                    <a:lstStyle/>
+                    <a:p>
+                      <a:pPr algn="ctr"/>
+                      <a:r>
+                        <a:rPr sz="1600" b="0">
+                          <a:solidFill>
+                            <a:srgbClr val="202020"/>
+                          </a:solidFill>
+                          <a:latin typeface="Consolas"/>
+                        </a:rPr>
+                        <a:t>4</a:t>
+                      </a:r>
+                    </a:p>
+                  </a:txBody>
+                  <a:tcPr marL="36576" marR="36576" marT="9144" marB="9144">
+                    <a:solidFill>
+                      <a:srgbClr val="FFFFFF"/>
+                    </a:solidFill>
+                  </a:tcPr>
+                </a:tc>
+                <a:tc>
+                  <a:txBody>
+                    <a:bodyPr/>
+                    <a:lstStyle/>
+                    <a:p>
+                      <a:pPr algn="ctr"/>
+                      <a:r>
+                        <a:rPr sz="1600" b="0">
+                          <a:solidFill>
+                            <a:srgbClr val="202020"/>
+                          </a:solidFill>
+                          <a:latin typeface="Consolas"/>
+                        </a:rPr>
+                        <a:t>327</a:t>
+                      </a:r>
+                    </a:p>
+                  </a:txBody>
+                  <a:tcPr marL="36576" marR="36576" marT="9144" marB="9144">
+                    <a:solidFill>
+                      <a:srgbClr val="FFFFFF"/>
+                    </a:solidFill>
+                  </a:tcPr>
+                </a:tc>
+                <a:tc>
+                  <a:txBody>
+                    <a:bodyPr/>
+                    <a:lstStyle/>
+                    <a:p>
+                      <a:pPr algn="ctr"/>
+                      <a:r>
+                        <a:rPr sz="1600" b="0">
+                          <a:solidFill>
+                            <a:srgbClr val="202020"/>
+                          </a:solidFill>
+                          <a:latin typeface="Consolas"/>
+                        </a:rPr>
+                        <a:t>498</a:t>
+                      </a:r>
+                    </a:p>
+                  </a:txBody>
+                  <a:tcPr marL="36576" marR="36576" marT="9144" marB="9144">
+                    <a:solidFill>
+                      <a:srgbClr val="FFF3CD"/>
+                    </a:solidFill>
+                  </a:tcPr>
+                </a:tc>
+              </a:tr>
+              <a:tr h="329184">
+                <a:tc>
+                  <a:txBody>
+                    <a:bodyPr/>
+                    <a:lstStyle/>
+                    <a:p>
+                      <a:pPr algn="ctr"/>
+                      <a:r>
+                        <a:rPr sz="1600" b="0">
+                          <a:solidFill>
+                            <a:srgbClr val="202020"/>
+                          </a:solidFill>
+                          <a:latin typeface="Consolas"/>
+                        </a:rPr>
+                        <a:t>8</a:t>
+                      </a:r>
+                    </a:p>
+                  </a:txBody>
+                  <a:tcPr marL="36576" marR="36576" marT="9144" marB="9144">
+                    <a:solidFill>
+                      <a:srgbClr val="FFFFFF"/>
+                    </a:solidFill>
+                  </a:tcPr>
+                </a:tc>
+                <a:tc>
+                  <a:txBody>
+                    <a:bodyPr/>
+                    <a:lstStyle/>
+                    <a:p>
+                      <a:pPr algn="ctr"/>
+                      <a:r>
+                        <a:rPr sz="1600" b="0">
+                          <a:solidFill>
+                            <a:srgbClr val="202020"/>
+                          </a:solidFill>
+                          <a:latin typeface="Consolas"/>
+                        </a:rPr>
+                        <a:t>322</a:t>
+                      </a:r>
+                    </a:p>
+                  </a:txBody>
+                  <a:tcPr marL="36576" marR="36576" marT="9144" marB="9144">
+                    <a:solidFill>
+                      <a:srgbClr val="FFFFFF"/>
+                    </a:solidFill>
+                  </a:tcPr>
+                </a:tc>
+                <a:tc>
+                  <a:txBody>
+                    <a:bodyPr/>
+                    <a:lstStyle/>
+                    <a:p>
+                      <a:pPr algn="ctr"/>
+                      <a:r>
+                        <a:rPr sz="1600" b="0">
+                          <a:solidFill>
+                            <a:srgbClr val="202020"/>
+                          </a:solidFill>
+                          <a:latin typeface="Consolas"/>
+                        </a:rPr>
+                        <a:t>554</a:t>
+                      </a:r>
+                    </a:p>
+                  </a:txBody>
+                  <a:tcPr marL="36576" marR="36576" marT="9144" marB="9144">
+                    <a:solidFill>
+                      <a:srgbClr val="FFFFFF"/>
+                    </a:solidFill>
+                  </a:tcPr>
+                </a:tc>
+              </a:tr>
+              <a:tr h="329184">
+                <a:tc>
+                  <a:txBody>
+                    <a:bodyPr/>
+                    <a:lstStyle/>
+                    <a:p>
+                      <a:pPr algn="ctr"/>
+                      <a:r>
+                        <a:rPr sz="1600" b="0">
+                          <a:solidFill>
+                            <a:srgbClr val="202020"/>
+                          </a:solidFill>
+                          <a:latin typeface="Consolas"/>
+                        </a:rPr>
+                        <a:t>20</a:t>
+                      </a:r>
+                    </a:p>
+                  </a:txBody>
+                  <a:tcPr marL="36576" marR="36576" marT="9144" marB="9144">
+                    <a:solidFill>
+                      <a:srgbClr val="FFFFFF"/>
+                    </a:solidFill>
+                  </a:tcPr>
+                </a:tc>
+                <a:tc>
+                  <a:txBody>
+                    <a:bodyPr/>
+                    <a:lstStyle/>
+                    <a:p>
+                      <a:pPr algn="ctr"/>
+                      <a:r>
+                        <a:rPr sz="1600" b="0">
+                          <a:solidFill>
+                            <a:srgbClr val="202020"/>
+                          </a:solidFill>
+                          <a:latin typeface="Consolas"/>
+                        </a:rPr>
+                        <a:t>319</a:t>
+                      </a:r>
+                    </a:p>
+                  </a:txBody>
+                  <a:tcPr marL="36576" marR="36576" marT="9144" marB="9144">
+                    <a:solidFill>
+                      <a:srgbClr val="FFFFFF"/>
+                    </a:solidFill>
+                  </a:tcPr>
+                </a:tc>
+                <a:tc>
+                  <a:txBody>
+                    <a:bodyPr/>
+                    <a:lstStyle/>
+                    <a:p>
+                      <a:pPr algn="ctr"/>
+                      <a:r>
+                        <a:rPr sz="1600" b="0">
+                          <a:solidFill>
+                            <a:srgbClr val="202020"/>
+                          </a:solidFill>
+                          <a:latin typeface="Consolas"/>
+                        </a:rPr>
+                        <a:t>599</a:t>
+                      </a:r>
+                    </a:p>
+                  </a:txBody>
+                  <a:tcPr marL="36576" marR="36576" marT="9144" marB="9144">
+                    <a:solidFill>
+                      <a:srgbClr val="FFFFFF"/>
+                    </a:solidFill>
+                  </a:tcPr>
+                </a:tc>
+              </a:tr>
+            </a:tbl>
+          </a:graphicData>
+        </a:graphic>
+      </p:graphicFrame>
+      <p:pic>
+        <p:nvPicPr>
+          <p:cNvPr id="7" name="Picture 6" descr="f_temp.png"/>
+          <p:cNvPicPr>
+            <a:picLocks noChangeAspect="1"/>
+          </p:cNvPicPr>
+          <p:nvPr/>
+        </p:nvPicPr>
+        <p:blipFill>
+          <a:blip r:embed="rId2"/>
+          <a:stretch>
+            <a:fillRect/>
+          </a:stretch>
+        </p:blipFill>
+        <p:spPr>
+          <a:xfrm>
+            <a:off x="6583680" y="1097280"/>
+            <a:ext cx="5120640" cy="2720340"/>
+          </a:xfrm>
+          <a:prstGeom prst="rect">
+            <a:avLst/>
+          </a:prstGeom>
+        </p:spPr>
+      </p:pic>
+      <p:sp>
+        <p:nvSpPr>
+          <p:cNvPr id="8" name="Rectangle 7"/>
+          <p:cNvSpPr/>
+          <p:nvPr/>
+        </p:nvSpPr>
+        <p:spPr>
+          <a:xfrm>
+            <a:off x="731520" y="3886200"/>
+            <a:ext cx="10881360" cy="914400"/>
+          </a:xfrm>
+          <a:prstGeom prst="rect">
+            <a:avLst/>
+          </a:prstGeom>
+          <a:solidFill>
+            <a:srgbClr val="F6F8FA"/>
+          </a:solidFill>
+          <a:ln>
+            <a:solidFill>
+              <a:srgbClr val="D0D7DE"/>
+            </a:solidFill>
+          </a:ln>
+          <a:effectLst/>
+        </p:spPr>
+        <p:style>
+          <a:lnRef idx="1">
+            <a:schemeClr val="accent1"/>
+          </a:lnRef>
+          <a:fillRef idx="3">
+            <a:schemeClr val="accent1"/>
+          </a:fillRef>
+          <a:effectRef idx="2">
+            <a:schemeClr val="accent1"/>
+          </a:effectRef>
+          <a:fontRef idx="minor">
+            <a:schemeClr val="lt1"/>
+          </a:fontRef>
+        </p:style>
+        <p:txBody>
+          <a:bodyPr rtlCol="0" anchor="ctr" wrap="square"/>
+          <a:lstStyle/>
+          <a:p>
+            <a:pPr algn="l"/>
+            <a:r>
+              <a:rPr sz="1700" b="1">
+                <a:solidFill>
+                  <a:srgbClr val="1F4E79"/>
+                </a:solidFill>
+                <a:latin typeface="Microsoft JhengHei"/>
+              </a:rPr>
+              <a:t>論文：每層 300 個以上單元時，8 以上的溫度結果相當接近；每層縮減為 30 個時，</a:t>
+            </a:r>
+          </a:p>
+          <a:p>
+            <a:pPr algn="l"/>
+            <a:r>
+              <a:rPr sz="1700" b="1">
+                <a:solidFill>
+                  <a:srgbClr val="1F4E79"/>
+                </a:solidFill>
+                <a:latin typeface="Microsoft JhengHei"/>
+              </a:rPr>
+              <a:t>2.5 至 4 的溫度明顯優於更高或更低的溫度</a:t>
+            </a:r>
+          </a:p>
+        </p:txBody>
+      </p:sp>
+      <p:sp>
+        <p:nvSpPr>
+          <p:cNvPr id="9" name="Rectangle 8"/>
+          <p:cNvSpPr/>
+          <p:nvPr/>
+        </p:nvSpPr>
+        <p:spPr>
+          <a:xfrm>
+            <a:off x="731520" y="4892040"/>
+            <a:ext cx="10881360" cy="914400"/>
+          </a:xfrm>
+          <a:prstGeom prst="rect">
+            <a:avLst/>
+          </a:prstGeom>
+          <a:solidFill>
+            <a:srgbClr val="DCF0E4"/>
+          </a:solidFill>
+          <a:ln>
+            <a:solidFill>
+              <a:srgbClr val="D0D7DE"/>
+            </a:solidFill>
+          </a:ln>
+          <a:effectLst/>
+        </p:spPr>
+        <p:style>
+          <a:lnRef idx="1">
+            <a:schemeClr val="accent1"/>
+          </a:lnRef>
+          <a:fillRef idx="3">
+            <a:schemeClr val="accent1"/>
+          </a:fillRef>
+          <a:effectRef idx="2">
+            <a:schemeClr val="accent1"/>
+          </a:effectRef>
+          <a:fontRef idx="minor">
+            <a:schemeClr val="lt1"/>
+          </a:fontRef>
+        </p:style>
+        <p:txBody>
+          <a:bodyPr rtlCol="0" anchor="ctr" wrap="square"/>
+          <a:lstStyle/>
+          <a:p>
+            <a:pPr algn="l"/>
+            <a:r>
+              <a:rPr sz="1800" b="1">
+                <a:solidFill>
+                  <a:srgbClr val="1E7A45"/>
+                </a:solidFill>
+                <a:latin typeface="Microsoft JhengHei"/>
+              </a:rPr>
+              <a:t>本教材：30-30 在 T = 4 最好（498 個錯誤），T = 20 反而比只用硬目標還差</a:t>
+            </a:r>
+          </a:p>
+        </p:txBody>
+      </p:sp>
+      <p:sp>
+        <p:nvSpPr>
+          <p:cNvPr id="10" name="TextBox 9"/>
+          <p:cNvSpPr txBox="1"/>
+          <p:nvPr/>
+        </p:nvSpPr>
+        <p:spPr>
+          <a:xfrm>
+            <a:off x="731520" y="5897880"/>
+            <a:ext cx="10881360" cy="731520"/>
+          </a:xfrm>
+          <a:prstGeom prst="rect">
+            <a:avLst/>
+          </a:prstGeom>
+          <a:noFill/>
+        </p:spPr>
+        <p:txBody>
+          <a:bodyPr wrap="square">
+            <a:spAutoFit/>
+          </a:bodyPr>
+          <a:lstStyle/>
+          <a:p>
+            <a:r>
+              <a:rPr sz="1600" b="0">
+                <a:solidFill>
+                  <a:srgbClr val="59636E"/>
+                </a:solidFill>
+                <a:latin typeface="Microsoft JhengHei"/>
+              </a:rPr>
+              <a:t>蒸餾模型小到無法容納笨重模型全部的知識時，忽略那些很負的 logit 反而有幫助。</a:t>
+            </a:r>
+          </a:p>
+        </p:txBody>
+      </p:sp>
+    </p:spTree>
+  </p:cSld>
+  <p:clrMapOvr>
+    <a:masterClrMapping/>
+  </p:clrMapOvr>
+  <p:timing>
+    <p:tnLst>
+      <p:par>
+        <p:cTn id="1" dur="indefinite" restart="never" nodeType="tmRoot">
+          <p:childTnLst>
+            <p:seq concurrent="1" nextAc="seek">
+              <p:cTn id="2" dur="indefinite" nodeType="mainSeq">
+                <p:childTnLst>
+                  <p:par>
+                    <p:cTn id="3" fill="hold">
+                      <p:stCondLst>
+                        <p:cond delay="indefinite"/>
+                      </p:stCondLst>
+                      <p:childTnLst>
+                        <p:par>
+                          <p:cTn id="4" fill="hold">
+                            <p:stCondLst>
+                              <p:cond delay="0"/>
+                            </p:stCondLst>
+                            <p:childTnLst>
+                              <p:par>
+                                <p:cTn id="5" presetID="1" presetClass="entr" presetSubtype="0" fill="hold" grpId="0" nodeType="clickEffect">
+                                  <p:stCondLst>
+                                    <p:cond delay="0"/>
+                                  </p:stCondLst>
+                                  <p:childTnLst>
+                                    <p:set>
+                                      <p:cBhvr>
+                                        <p:cTn id="6" dur="1" fill="hold">
+                                          <p:stCondLst>
+                                            <p:cond delay="0"/>
+                                          </p:stCondLst>
+                                        </p:cTn>
+                                        <p:tgtEl>
+                                          <p:spTgt spid="6"/>
+                                        </p:tgtEl>
+                                        <p:attrNameLst>
+                                          <p:attrName>style.visibility</p:attrName>
+                                        </p:attrNameLst>
+                                      </p:cBhvr>
+                                      <p:to>
+                                        <p:strVal val="visible"/>
+                                      </p:to>
+                                    </p:set>
+                                  </p:childTnLst>
+                                </p:cTn>
+                              </p:par>
+                            </p:childTnLst>
+                          </p:cTn>
+                        </p:par>
+                      </p:childTnLst>
+                    </p:cTn>
+                  </p:par>
+                  <p:par>
+                    <p:cTn id="7" fill="hold">
+                      <p:stCondLst>
+                        <p:cond delay="indefinite"/>
+                      </p:stCondLst>
+                      <p:childTnLst>
+                        <p:par>
+                          <p:cTn id="8" fill="hold">
+                            <p:stCondLst>
+                              <p:cond delay="0"/>
+                            </p:stCondLst>
+                            <p:childTnLst>
+                              <p:par>
+                                <p:cTn id="9" presetID="1" presetClass="entr" presetSubtype="0" fill="hold" grpId="0" nodeType="clickEffect">
+                                  <p:stCondLst>
+                                    <p:cond delay="0"/>
+                                  </p:stCondLst>
+                                  <p:childTnLst>
+                                    <p:set>
+                                      <p:cBhvr>
+                                        <p:cTn id="10" dur="1" fill="hold">
+                                          <p:stCondLst>
+                                            <p:cond delay="0"/>
+                                          </p:stCondLst>
+                                        </p:cTn>
+                                        <p:tgtEl>
+                                          <p:spTgt spid="7"/>
+                                        </p:tgtEl>
+                                        <p:attrNameLst>
+                                          <p:attrName>style.visibility</p:attrName>
+                                        </p:attrNameLst>
+                                      </p:cBhvr>
+                                      <p:to>
+                                        <p:strVal val="visible"/>
+                                      </p:to>
+                                    </p:set>
+                                  </p:childTnLst>
+                                </p:cTn>
+                              </p:par>
+                            </p:childTnLst>
+                          </p:cTn>
+                        </p:par>
+                      </p:childTnLst>
+                    </p:cTn>
+                  </p:par>
+                  <p:par>
+                    <p:cTn id="11" fill="hold">
+                      <p:stCondLst>
+                        <p:cond delay="indefinite"/>
+                      </p:stCondLst>
+                      <p:childTnLst>
+                        <p:par>
+                          <p:cTn id="12" fill="hold">
+                            <p:stCondLst>
+                              <p:cond delay="0"/>
+                            </p:stCondLst>
+                            <p:childTnLst>
+                              <p:par>
+                                <p:cTn id="13" presetID="1" presetClass="entr" presetSubtype="0" fill="hold" grpId="0" nodeType="clickEffect">
+                                  <p:stCondLst>
+                                    <p:cond delay="0"/>
+                                  </p:stCondLst>
+                                  <p:childTnLst>
+                                    <p:set>
+                                      <p:cBhvr>
+                                        <p:cTn id="14" dur="1" fill="hold">
+                                          <p:stCondLst>
+                                            <p:cond delay="0"/>
+                                          </p:stCondLst>
+                                        </p:cTn>
+                                        <p:tgtEl>
+                                          <p:spTgt spid="8"/>
+                                        </p:tgtEl>
+                                        <p:attrNameLst>
+                                          <p:attrName>style.visibility</p:attrName>
+                                        </p:attrNameLst>
+                                      </p:cBhvr>
+                                      <p:to>
+                                        <p:strVal val="visible"/>
+                                      </p:to>
+                                    </p:set>
+                                  </p:childTnLst>
+                                </p:cTn>
+                              </p:par>
+                            </p:childTnLst>
+                          </p:cTn>
+                        </p:par>
+                      </p:childTnLst>
+                    </p:cTn>
+                  </p:par>
+                  <p:par>
+                    <p:cTn id="15" fill="hold">
+                      <p:stCondLst>
+                        <p:cond delay="indefinite"/>
+                      </p:stCondLst>
+                      <p:childTnLst>
+                        <p:par>
+                          <p:cTn id="16" fill="hold">
+                            <p:stCondLst>
+                              <p:cond delay="0"/>
+                            </p:stCondLst>
+                            <p:childTnLst>
+                              <p:par>
+                                <p:cTn id="17" presetID="1" presetClass="entr" presetSubtype="0" fill="hold" grpId="0" nodeType="clickEffect">
+                                  <p:stCondLst>
+                                    <p:cond delay="0"/>
+                                  </p:stCondLst>
+                                  <p:childTnLst>
+                                    <p:set>
+                                      <p:cBhvr>
+                                        <p:cTn id="18" dur="1" fill="hold">
+                                          <p:stCondLst>
+                                            <p:cond delay="0"/>
+                                          </p:stCondLst>
+                                        </p:cTn>
+                                        <p:tgtEl>
+                                          <p:spTgt spid="9"/>
+                                        </p:tgtEl>
+                                        <p:attrNameLst>
+                                          <p:attrName>style.visibility</p:attrName>
+                                        </p:attrNameLst>
+                                      </p:cBhvr>
+                                      <p:to>
+                                        <p:strVal val="visible"/>
+                                      </p:to>
+                                    </p:set>
+                                  </p:childTnLst>
+                                </p:cTn>
+                              </p:par>
+                            </p:childTnLst>
+                          </p:cTn>
+                        </p:par>
+                      </p:childTnLst>
+                    </p:cTn>
+                  </p:par>
+                  <p:par>
+                    <p:cTn id="19" fill="hold">
+                      <p:stCondLst>
+                        <p:cond delay="indefinite"/>
+                      </p:stCondLst>
+                      <p:childTnLst>
+                        <p:par>
+                          <p:cTn id="20" fill="hold">
+                            <p:stCondLst>
+                              <p:cond delay="0"/>
+                            </p:stCondLst>
+                            <p:childTnLst>
+                              <p:par>
+                                <p:cTn id="21" presetID="1" presetClass="entr" presetSubtype="0" fill="hold" grpId="0" nodeType="clickEffect">
+                                  <p:stCondLst>
+                                    <p:cond delay="0"/>
+                                  </p:stCondLst>
+                                  <p:childTnLst>
+                                    <p:set>
+                                      <p:cBhvr>
+                                        <p:cTn id="22" dur="1" fill="hold">
+                                          <p:stCondLst>
+                                            <p:cond delay="0"/>
+                                          </p:stCondLst>
+                                        </p:cTn>
+                                        <p:tgtEl>
+                                          <p:spTgt spid="10"/>
+                                        </p:tgtEl>
+                                        <p:attrNameLst>
+                                          <p:attrName>style.visibility</p:attrName>
+                                        </p:attrNameLst>
+                                      </p:cBhvr>
+                                      <p:to>
+                                        <p:strVal val="visible"/>
+                                      </p:to>
+                                    </p:set>
+                                  </p:childTnLst>
+                                </p:cTn>
+                              </p:par>
+                            </p:childTnLst>
+                          </p:cTn>
+                        </p:par>
+                      </p:childTnLst>
+                    </p:cTn>
+                  </p:par>
+                </p:childTnLst>
+              </p:cTn>
+              <p:prevCondLst>
+                <p:cond evt="onPrev" delay="0">
+                  <p:tgtEl>
+                    <p:sldTgt/>
+                  </p:tgtEl>
+                </p:cond>
+              </p:prevCondLst>
+              <p:nextCondLst>
+                <p:cond evt="onNext" delay="0">
+                  <p:tgtEl>
+                    <p:sldTgt/>
+                  </p:tgtEl>
+                </p:cond>
+              </p:nextCondLst>
+            </p:seq>
+          </p:childTnLst>
+        </p:cTn>
+      </p:par>
+    </p:tnLst>
+    <p:bldLst>
+      <p:bldGraphic spid="6" grpId="0">
+        <p:bldAsOne/>
+      </p:bldGraphic>
+      <p:bldP spid="7" grpId="0" animBg="1"/>
+      <p:bldP spid="8" grpId="0" animBg="1"/>
+      <p:bldP spid="9" grpId="0" animBg="1"/>
+      <p:bldP spid="10" grpId="0" animBg="1"/>
+    </p:bldLst>
+  </p:timing>
+</p:sld>
+</file>
+
+<file path=ppt/slides/slide18.xml><?xml version="1.0" encoding="utf-8"?>
+<p:sld xmlns:a="http://schemas.openxmlformats.org/drawingml/2006/main" xmlns:p="http://schemas.openxmlformats.org/presentationml/2006/main" xmlns:r="http://schemas.openxmlformats.org/officeDocument/2006/relationships">
+  <p:cSld>
+    <p:spTree>
+      <p:nvGrpSpPr>
+        <p:cNvPr id="1" name=""/>
+        <p:cNvGrpSpPr/>
+        <p:nvPr/>
+      </p:nvGrpSpPr>
+      <p:grpSpPr/>
+      <p:sp>
+        <p:nvSpPr>
+          <p:cNvPr id="2" name="Rectangle 1"/>
+          <p:cNvSpPr/>
+          <p:nvPr/>
+        </p:nvSpPr>
+        <p:spPr>
+          <a:xfrm>
+            <a:off x="0" y="0"/>
+            <a:ext cx="12191695" cy="6858000"/>
+          </a:xfrm>
+          <a:prstGeom prst="rect">
+            <a:avLst/>
+          </a:prstGeom>
+          <a:solidFill>
+            <a:srgbClr val="FFFFFF"/>
+          </a:solidFill>
+          <a:ln>
+            <a:noFill/>
+          </a:ln>
+          <a:effectLst/>
+        </p:spPr>
+        <p:style>
+          <a:lnRef idx="1">
+            <a:schemeClr val="accent1"/>
+          </a:lnRef>
+          <a:fillRef idx="3">
+            <a:schemeClr val="accent1"/>
+          </a:fillRef>
+          <a:effectRef idx="2">
+            <a:schemeClr val="accent1"/>
+          </a:effectRef>
+          <a:fontRef idx="minor">
+            <a:schemeClr val="lt1"/>
+          </a:fontRef>
+        </p:style>
+        <p:txBody>
+          <a:bodyPr rtlCol="0" anchor="ctr"/>
+          <a:lstStyle/>
+          <a:p>
+            <a:pPr algn="ctr"/>
+          </a:p>
+        </p:txBody>
+      </p:sp>
+      <p:sp>
+        <p:nvSpPr>
+          <p:cNvPr id="3" name="Rectangle 2"/>
+          <p:cNvSpPr/>
+          <p:nvPr/>
+        </p:nvSpPr>
+        <p:spPr>
+          <a:xfrm>
+            <a:off x="0" y="0"/>
+            <a:ext cx="12191695" cy="868680"/>
+          </a:xfrm>
+          <a:prstGeom prst="rect">
+            <a:avLst/>
+          </a:prstGeom>
+          <a:solidFill>
+            <a:srgbClr val="1F4E79"/>
+          </a:solidFill>
+          <a:ln>
+            <a:noFill/>
+          </a:ln>
+          <a:effectLst/>
+        </p:spPr>
+        <p:style>
+          <a:lnRef idx="1">
+            <a:schemeClr val="accent1"/>
+          </a:lnRef>
+          <a:fillRef idx="3">
+            <a:schemeClr val="accent1"/>
+          </a:fillRef>
+          <a:effectRef idx="2">
+            <a:schemeClr val="accent1"/>
+          </a:effectRef>
+          <a:fontRef idx="minor">
+            <a:schemeClr val="lt1"/>
+          </a:fontRef>
+        </p:style>
+        <p:txBody>
+          <a:bodyPr rtlCol="0" anchor="ctr"/>
+          <a:lstStyle/>
+          <a:p>
+            <a:pPr algn="ctr"/>
+          </a:p>
+        </p:txBody>
+      </p:sp>
+      <p:sp>
+        <p:nvSpPr>
+          <p:cNvPr id="4" name="TextBox 3"/>
+          <p:cNvSpPr txBox="1"/>
+          <p:nvPr/>
+        </p:nvSpPr>
+        <p:spPr>
+          <a:xfrm>
+            <a:off x="411480" y="73152"/>
+            <a:ext cx="11338560" cy="457200"/>
+          </a:xfrm>
+          <a:prstGeom prst="rect">
+            <a:avLst/>
+          </a:prstGeom>
+          <a:noFill/>
+        </p:spPr>
+        <p:txBody>
+          <a:bodyPr wrap="square">
+            <a:spAutoFit/>
+          </a:bodyPr>
+          <a:lstStyle/>
+          <a:p>
+            <a:r>
+              <a:rPr sz="2700" b="1">
+                <a:solidFill>
+                  <a:srgbClr val="FFFFFF"/>
+                </a:solidFill>
+                <a:latin typeface="Microsoft JhengHei"/>
+              </a:rPr>
               <a:t>四、未曾見過的數字 3</a:t>
             </a:r>
           </a:p>
@@ -14484,7 +15391,7 @@
 </p:sld>
 </file>
 
-<file path=ppt/slides/slide18.xml><?xml version="1.0" encoding="utf-8"?>
+<file path=ppt/slides/slide19.xml><?xml version="1.0" encoding="utf-8"?>
 <p:sld xmlns:a="http://schemas.openxmlformats.org/drawingml/2006/main" xmlns:p="http://schemas.openxmlformats.org/presentationml/2006/main" xmlns:r="http://schemas.openxmlformats.org/officeDocument/2006/relationships">
   <p:cSld>
     <p:spTree>
@@ -15783,7 +16690,7 @@
 </p:sld>
 </file>
 
-<file path=ppt/slides/slide19.xml><?xml version="1.0" encoding="utf-8"?>
+<file path=ppt/slides/slide2.xml><?xml version="1.0" encoding="utf-8"?>
 <p:sld xmlns:a="http://schemas.openxmlformats.org/drawingml/2006/main" xmlns:p="http://schemas.openxmlformats.org/presentationml/2006/main" xmlns:r="http://schemas.openxmlformats.org/officeDocument/2006/relationships">
   <p:cSld>
     <p:spTree>
@@ -15910,6 +16817,315 @@
                 </a:solidFill>
                 <a:latin typeface="Microsoft JhengHei"/>
               </a:rPr>
+              <a:t>什麼是知識蒸餾</a:t>
+            </a:r>
+          </a:p>
+        </p:txBody>
+      </p:sp>
+      <p:sp>
+        <p:nvSpPr>
+          <p:cNvPr id="5" name="TextBox 4"/>
+          <p:cNvSpPr txBox="1"/>
+          <p:nvPr/>
+        </p:nvSpPr>
+        <p:spPr>
+          <a:xfrm>
+            <a:off x="411480" y="521207"/>
+            <a:ext cx="11338560" cy="301752"/>
+          </a:xfrm>
+          <a:prstGeom prst="rect">
+            <a:avLst/>
+          </a:prstGeom>
+          <a:noFill/>
+        </p:spPr>
+        <p:txBody>
+          <a:bodyPr wrap="square">
+            <a:spAutoFit/>
+          </a:bodyPr>
+          <a:lstStyle/>
+          <a:p>
+            <a:r>
+              <a:rPr sz="1300" b="0">
+                <a:solidFill>
+                  <a:srgbClr val="C7D6E5"/>
+                </a:solidFill>
+                <a:latin typeface="Microsoft JhengHei"/>
+              </a:rPr>
+              <a:t>依據 Hinton、Vinyals、Dean（2015）</a:t>
+            </a:r>
+          </a:p>
+        </p:txBody>
+      </p:sp>
+      <p:sp>
+        <p:nvSpPr>
+          <p:cNvPr id="6" name="TextBox 5"/>
+          <p:cNvSpPr txBox="1"/>
+          <p:nvPr/>
+        </p:nvSpPr>
+        <p:spPr>
+          <a:xfrm>
+            <a:off x="822960" y="1325880"/>
+            <a:ext cx="10515600" cy="4754880"/>
+          </a:xfrm>
+          <a:prstGeom prst="rect">
+            <a:avLst/>
+          </a:prstGeom>
+          <a:noFill/>
+        </p:spPr>
+        <p:txBody>
+          <a:bodyPr wrap="square">
+            <a:spAutoFit/>
+          </a:bodyPr>
+          <a:lstStyle/>
+          <a:p>
+            <a:pPr>
+              <a:lnSpc>
+                <a:spcPct val="135000"/>
+              </a:lnSpc>
+            </a:pPr>
+            <a:r>
+              <a:rPr sz="2100" b="0">
+                <a:solidFill>
+                  <a:srgbClr val="202020"/>
+                </a:solidFill>
+                <a:latin typeface="Microsoft JhengHei"/>
+              </a:rPr>
+              <a:t>為了讓準確的模型能部署給大量使用者即時使用，必須解決一個矛盾：訓練時，笨重模型最能從資料中學到規律，例如多個模型的組合，或以強正則化訓練的大型網路；部署時，需要的卻是小而快的模型；而直接以正確標籤訓練小模型，又學不到笨重模型的類推方式。因此，先訓練好笨重模型，並把它的知識視為從輸入到輸出的對應，而非特定的參數值。接著提高 softmax 的溫度，讓笨重模型對每一個類別給出較平均的機率，稱為軟目標；軟目標保留了錯誤類別之間的相對機率，例如某個 2 像 3 的程度高於像 7。最後讓小模型在同樣的溫度下學習軟目標，同時學習正確標籤，使它能以較少的資料，學到與笨重模型相近的類推方式。這個把笨重模型的知識移轉到小模型的訓練過程，稱之為</a:t>
+            </a:r>
+            <a:r>
+              <a:rPr sz="3600" b="1">
+                <a:solidFill>
+                  <a:srgbClr val="C03030"/>
+                </a:solidFill>
+                <a:latin typeface="Microsoft JhengHei"/>
+              </a:rPr>
+              <a:t>知識蒸餾</a:t>
+            </a:r>
+            <a:r>
+              <a:rPr sz="2100" b="0">
+                <a:solidFill>
+                  <a:srgbClr val="202020"/>
+                </a:solidFill>
+                <a:latin typeface="Microsoft JhengHei"/>
+              </a:rPr>
+              <a:t>。</a:t>
+            </a:r>
+          </a:p>
+        </p:txBody>
+      </p:sp>
+    </p:spTree>
+  </p:cSld>
+  <p:clrMapOvr>
+    <a:masterClrMapping/>
+  </p:clrMapOvr>
+  <p:timing>
+    <p:tnLst>
+      <p:par>
+        <p:cTn id="1" dur="indefinite" restart="never" nodeType="tmRoot">
+          <p:childTnLst>
+            <p:seq concurrent="1" nextAc="seek">
+              <p:cTn id="2" dur="indefinite" nodeType="mainSeq">
+                <p:childTnLst>
+                  <p:par>
+                    <p:cTn id="3" fill="hold">
+                      <p:stCondLst>
+                        <p:cond delay="indefinite"/>
+                      </p:stCondLst>
+                      <p:childTnLst>
+                        <p:par>
+                          <p:cTn id="4" fill="hold">
+                            <p:stCondLst>
+                              <p:cond delay="0"/>
+                            </p:stCondLst>
+                            <p:childTnLst>
+                              <p:par>
+                                <p:cTn id="5" presetID="1" presetClass="entr" presetSubtype="0" fill="hold" grpId="0" nodeType="clickEffect">
+                                  <p:stCondLst>
+                                    <p:cond delay="0"/>
+                                  </p:stCondLst>
+                                  <p:childTnLst>
+                                    <p:set>
+                                      <p:cBhvr>
+                                        <p:cTn id="6" dur="1" fill="hold">
+                                          <p:stCondLst>
+                                            <p:cond delay="0"/>
+                                          </p:stCondLst>
+                                        </p:cTn>
+                                        <p:tgtEl>
+                                          <p:spTgt spid="6"/>
+                                        </p:tgtEl>
+                                        <p:attrNameLst>
+                                          <p:attrName>style.visibility</p:attrName>
+                                        </p:attrNameLst>
+                                      </p:cBhvr>
+                                      <p:to>
+                                        <p:strVal val="visible"/>
+                                      </p:to>
+                                    </p:set>
+                                  </p:childTnLst>
+                                </p:cTn>
+                              </p:par>
+                            </p:childTnLst>
+                          </p:cTn>
+                        </p:par>
+                      </p:childTnLst>
+                    </p:cTn>
+                  </p:par>
+                </p:childTnLst>
+              </p:cTn>
+              <p:prevCondLst>
+                <p:cond evt="onPrev" delay="0">
+                  <p:tgtEl>
+                    <p:sldTgt/>
+                  </p:tgtEl>
+                </p:cond>
+              </p:prevCondLst>
+              <p:nextCondLst>
+                <p:cond evt="onNext" delay="0">
+                  <p:tgtEl>
+                    <p:sldTgt/>
+                  </p:tgtEl>
+                </p:cond>
+              </p:nextCondLst>
+            </p:seq>
+          </p:childTnLst>
+        </p:cTn>
+      </p:par>
+    </p:tnLst>
+    <p:bldLst>
+      <p:bldP spid="6" grpId="0" animBg="1"/>
+    </p:bldLst>
+  </p:timing>
+</p:sld>
+</file>
+
+<file path=ppt/slides/slide20.xml><?xml version="1.0" encoding="utf-8"?>
+<p:sld xmlns:a="http://schemas.openxmlformats.org/drawingml/2006/main" xmlns:p="http://schemas.openxmlformats.org/presentationml/2006/main" xmlns:r="http://schemas.openxmlformats.org/officeDocument/2006/relationships">
+  <p:cSld>
+    <p:spTree>
+      <p:nvGrpSpPr>
+        <p:cNvPr id="1" name=""/>
+        <p:cNvGrpSpPr/>
+        <p:nvPr/>
+      </p:nvGrpSpPr>
+      <p:grpSpPr/>
+      <p:sp>
+        <p:nvSpPr>
+          <p:cNvPr id="2" name="Rectangle 1"/>
+          <p:cNvSpPr/>
+          <p:nvPr/>
+        </p:nvSpPr>
+        <p:spPr>
+          <a:xfrm>
+            <a:off x="0" y="0"/>
+            <a:ext cx="12191695" cy="6858000"/>
+          </a:xfrm>
+          <a:prstGeom prst="rect">
+            <a:avLst/>
+          </a:prstGeom>
+          <a:solidFill>
+            <a:srgbClr val="FFFFFF"/>
+          </a:solidFill>
+          <a:ln>
+            <a:noFill/>
+          </a:ln>
+          <a:effectLst/>
+        </p:spPr>
+        <p:style>
+          <a:lnRef idx="1">
+            <a:schemeClr val="accent1"/>
+          </a:lnRef>
+          <a:fillRef idx="3">
+            <a:schemeClr val="accent1"/>
+          </a:fillRef>
+          <a:effectRef idx="2">
+            <a:schemeClr val="accent1"/>
+          </a:effectRef>
+          <a:fontRef idx="minor">
+            <a:schemeClr val="lt1"/>
+          </a:fontRef>
+        </p:style>
+        <p:txBody>
+          <a:bodyPr rtlCol="0" anchor="ctr"/>
+          <a:lstStyle/>
+          <a:p>
+            <a:pPr algn="ctr"/>
+          </a:p>
+        </p:txBody>
+      </p:sp>
+      <p:sp>
+        <p:nvSpPr>
+          <p:cNvPr id="3" name="Rectangle 2"/>
+          <p:cNvSpPr/>
+          <p:nvPr/>
+        </p:nvSpPr>
+        <p:spPr>
+          <a:xfrm>
+            <a:off x="0" y="0"/>
+            <a:ext cx="12191695" cy="868680"/>
+          </a:xfrm>
+          <a:prstGeom prst="rect">
+            <a:avLst/>
+          </a:prstGeom>
+          <a:solidFill>
+            <a:srgbClr val="1F4E79"/>
+          </a:solidFill>
+          <a:ln>
+            <a:noFill/>
+          </a:ln>
+          <a:effectLst/>
+        </p:spPr>
+        <p:style>
+          <a:lnRef idx="1">
+            <a:schemeClr val="accent1"/>
+          </a:lnRef>
+          <a:fillRef idx="3">
+            <a:schemeClr val="accent1"/>
+          </a:fillRef>
+          <a:effectRef idx="2">
+            <a:schemeClr val="accent1"/>
+          </a:effectRef>
+          <a:fontRef idx="minor">
+            <a:schemeClr val="lt1"/>
+          </a:fontRef>
+        </p:style>
+        <p:txBody>
+          <a:bodyPr rtlCol="0" anchor="ctr"/>
+          <a:lstStyle/>
+          <a:p>
+            <a:pPr algn="ctr"/>
+          </a:p>
+        </p:txBody>
+      </p:sp>
+      <p:sp>
+        <p:nvSpPr>
+          <p:cNvPr id="4" name="TextBox 3"/>
+          <p:cNvSpPr txBox="1"/>
+          <p:nvPr/>
+        </p:nvSpPr>
+        <p:spPr>
+          <a:xfrm>
+            <a:off x="411480" y="73152"/>
+            <a:ext cx="11338560" cy="457200"/>
+          </a:xfrm>
+          <a:prstGeom prst="rect">
+            <a:avLst/>
+          </a:prstGeom>
+          <a:noFill/>
+        </p:spPr>
+        <p:txBody>
+          <a:bodyPr wrap="square">
+            <a:spAutoFit/>
+          </a:bodyPr>
+          <a:lstStyle/>
+          <a:p>
+            <a:r>
+              <a:rPr sz="2700" b="1">
+                <a:solidFill>
+                  <a:srgbClr val="FFFFFF"/>
+                </a:solidFill>
+                <a:latin typeface="Microsoft JhengHei"/>
+              </a:rPr>
               <a:t>整理與練習</a:t>
             </a:r>
           </a:p>
@@ -16130,7 +17346,7 @@
                 </a:solidFill>
                 <a:latin typeface="Microsoft JhengHei"/>
               </a:rPr>
-              <a:t>練習一　T = 2 時，v = (8, 4, 0) 的軟目標是多少？依第 6 頁的四步計算</a:t>
+              <a:t>練習一　T = 2 時，v = (8, 4, 0) 的軟目標是多少？依第 7 頁的四步計算</a:t>
             </a:r>
           </a:p>
         </p:txBody>
@@ -16641,7 +17857,7 @@
 </p:sld>
 </file>
 
-<file path=ppt/slides/slide2.xml><?xml version="1.0" encoding="utf-8"?>
+<file path=ppt/slides/slide3.xml><?xml version="1.0" encoding="utf-8"?>
 <p:sld xmlns:a="http://schemas.openxmlformats.org/drawingml/2006/main" xmlns:p="http://schemas.openxmlformats.org/presentationml/2006/main" xmlns:r="http://schemas.openxmlformats.org/officeDocument/2006/relationships">
   <p:cSld>
     <p:spTree>
@@ -16961,7 +18177,7 @@
                           </a:solidFill>
                           <a:latin typeface="Microsoft JhengHei"/>
                         </a:rPr>
-                        <a:t>3–4</a:t>
+                        <a:t>4–5</a:t>
                       </a:r>
                     </a:p>
                   </a:txBody>
@@ -17032,7 +18248,7 @@
                           </a:solidFill>
                           <a:latin typeface="Microsoft JhengHei"/>
                         </a:rPr>
-                        <a:t>5–8</a:t>
+                        <a:t>6–9</a:t>
                       </a:r>
                     </a:p>
                   </a:txBody>
@@ -17103,7 +18319,7 @@
                           </a:solidFill>
                           <a:latin typeface="Microsoft JhengHei"/>
                         </a:rPr>
-                        <a:t>9–13</a:t>
+                        <a:t>10–14</a:t>
                       </a:r>
                     </a:p>
                   </a:txBody>
@@ -17174,7 +18390,7 @@
                           </a:solidFill>
                           <a:latin typeface="Microsoft JhengHei"/>
                         </a:rPr>
-                        <a:t>14–18</a:t>
+                        <a:t>15–19</a:t>
                       </a:r>
                     </a:p>
                   </a:txBody>
@@ -17245,7 +18461,7 @@
                           </a:solidFill>
                           <a:latin typeface="Microsoft JhengHei"/>
                         </a:rPr>
-                        <a:t>19</a:t>
+                        <a:t>20</a:t>
                       </a:r>
                     </a:p>
                   </a:txBody>
@@ -17576,7 +18792,7 @@
 </p:sld>
 </file>
 
-<file path=ppt/slides/slide3.xml><?xml version="1.0" encoding="utf-8"?>
+<file path=ppt/slides/slide4.xml><?xml version="1.0" encoding="utf-8"?>
 <p:sld xmlns:a="http://schemas.openxmlformats.org/drawingml/2006/main" xmlns:p="http://schemas.openxmlformats.org/presentationml/2006/main" xmlns:r="http://schemas.openxmlformats.org/officeDocument/2006/relationships">
   <p:cSld>
     <p:spTree>
@@ -18804,7 +20020,7 @@
 </p:sld>
 </file>
 
-<file path=ppt/slides/slide4.xml><?xml version="1.0" encoding="utf-8"?>
+<file path=ppt/slides/slide5.xml><?xml version="1.0" encoding="utf-8"?>
 <p:sld xmlns:a="http://schemas.openxmlformats.org/drawingml/2006/main" xmlns:p="http://schemas.openxmlformats.org/presentationml/2006/main" xmlns:r="http://schemas.openxmlformats.org/officeDocument/2006/relationships">
   <p:cSld>
     <p:spTree>
@@ -19892,7 +21108,7 @@
 </p:sld>
 </file>
 
-<file path=ppt/slides/slide5.xml><?xml version="1.0" encoding="utf-8"?>
+<file path=ppt/slides/slide6.xml><?xml version="1.0" encoding="utf-8"?>
 <p:sld xmlns:a="http://schemas.openxmlformats.org/drawingml/2006/main" xmlns:p="http://schemas.openxmlformats.org/presentationml/2006/main" xmlns:r="http://schemas.openxmlformats.org/officeDocument/2006/relationships">
   <p:cSld>
     <p:spTree>
@@ -20053,7 +21269,7 @@
                 </a:solidFill>
                 <a:latin typeface="Microsoft JhengHei"/>
               </a:rPr>
-              <a:t>從這一頁到第 13 頁都用這一組數字</a:t>
+              <a:t>從這一頁到第 14 頁都用這一組數字</a:t>
             </a:r>
           </a:p>
         </p:txBody>
@@ -20947,1544 +22163,6 @@
 </p:sld>
 </file>
 
-<file path=ppt/slides/slide6.xml><?xml version="1.0" encoding="utf-8"?>
-<p:sld xmlns:a="http://schemas.openxmlformats.org/drawingml/2006/main" xmlns:p="http://schemas.openxmlformats.org/presentationml/2006/main" xmlns:r="http://schemas.openxmlformats.org/officeDocument/2006/relationships">
-  <p:cSld>
-    <p:spTree>
-      <p:nvGrpSpPr>
-        <p:cNvPr id="1" name=""/>
-        <p:cNvGrpSpPr/>
-        <p:nvPr/>
-      </p:nvGrpSpPr>
-      <p:grpSpPr/>
-      <p:sp>
-        <p:nvSpPr>
-          <p:cNvPr id="2" name="Rectangle 1"/>
-          <p:cNvSpPr/>
-          <p:nvPr/>
-        </p:nvSpPr>
-        <p:spPr>
-          <a:xfrm>
-            <a:off x="0" y="0"/>
-            <a:ext cx="12191695" cy="6858000"/>
-          </a:xfrm>
-          <a:prstGeom prst="rect">
-            <a:avLst/>
-          </a:prstGeom>
-          <a:solidFill>
-            <a:srgbClr val="FFFFFF"/>
-          </a:solidFill>
-          <a:ln>
-            <a:noFill/>
-          </a:ln>
-          <a:effectLst/>
-        </p:spPr>
-        <p:style>
-          <a:lnRef idx="1">
-            <a:schemeClr val="accent1"/>
-          </a:lnRef>
-          <a:fillRef idx="3">
-            <a:schemeClr val="accent1"/>
-          </a:fillRef>
-          <a:effectRef idx="2">
-            <a:schemeClr val="accent1"/>
-          </a:effectRef>
-          <a:fontRef idx="minor">
-            <a:schemeClr val="lt1"/>
-          </a:fontRef>
-        </p:style>
-        <p:txBody>
-          <a:bodyPr rtlCol="0" anchor="ctr"/>
-          <a:lstStyle/>
-          <a:p>
-            <a:pPr algn="ctr"/>
-          </a:p>
-        </p:txBody>
-      </p:sp>
-      <p:sp>
-        <p:nvSpPr>
-          <p:cNvPr id="3" name="Rectangle 2"/>
-          <p:cNvSpPr/>
-          <p:nvPr/>
-        </p:nvSpPr>
-        <p:spPr>
-          <a:xfrm>
-            <a:off x="0" y="0"/>
-            <a:ext cx="12191695" cy="868680"/>
-          </a:xfrm>
-          <a:prstGeom prst="rect">
-            <a:avLst/>
-          </a:prstGeom>
-          <a:solidFill>
-            <a:srgbClr val="1F4E79"/>
-          </a:solidFill>
-          <a:ln>
-            <a:noFill/>
-          </a:ln>
-          <a:effectLst/>
-        </p:spPr>
-        <p:style>
-          <a:lnRef idx="1">
-            <a:schemeClr val="accent1"/>
-          </a:lnRef>
-          <a:fillRef idx="3">
-            <a:schemeClr val="accent1"/>
-          </a:fillRef>
-          <a:effectRef idx="2">
-            <a:schemeClr val="accent1"/>
-          </a:effectRef>
-          <a:fontRef idx="minor">
-            <a:schemeClr val="lt1"/>
-          </a:fontRef>
-        </p:style>
-        <p:txBody>
-          <a:bodyPr rtlCol="0" anchor="ctr"/>
-          <a:lstStyle/>
-          <a:p>
-            <a:pPr algn="ctr"/>
-          </a:p>
-        </p:txBody>
-      </p:sp>
-      <p:sp>
-        <p:nvSpPr>
-          <p:cNvPr id="4" name="TextBox 3"/>
-          <p:cNvSpPr txBox="1"/>
-          <p:nvPr/>
-        </p:nvSpPr>
-        <p:spPr>
-          <a:xfrm>
-            <a:off x="411480" y="73152"/>
-            <a:ext cx="11338560" cy="457200"/>
-          </a:xfrm>
-          <a:prstGeom prst="rect">
-            <a:avLst/>
-          </a:prstGeom>
-          <a:noFill/>
-        </p:spPr>
-        <p:txBody>
-          <a:bodyPr wrap="square">
-            <a:spAutoFit/>
-          </a:bodyPr>
-          <a:lstStyle/>
-          <a:p>
-            <a:r>
-              <a:rPr sz="2700" b="1">
-                <a:solidFill>
-                  <a:srgbClr val="FFFFFF"/>
-                </a:solidFill>
-                <a:latin typeface="Microsoft JhengHei"/>
-              </a:rPr>
-              <a:t>二、帶溫度的 softmax：T = 1</a:t>
-            </a:r>
-          </a:p>
-        </p:txBody>
-      </p:sp>
-      <p:sp>
-        <p:nvSpPr>
-          <p:cNvPr id="5" name="TextBox 4"/>
-          <p:cNvSpPr txBox="1"/>
-          <p:nvPr/>
-        </p:nvSpPr>
-        <p:spPr>
-          <a:xfrm>
-            <a:off x="411480" y="521207"/>
-            <a:ext cx="11338560" cy="301752"/>
-          </a:xfrm>
-          <a:prstGeom prst="rect">
-            <a:avLst/>
-          </a:prstGeom>
-          <a:noFill/>
-        </p:spPr>
-        <p:txBody>
-          <a:bodyPr wrap="square">
-            <a:spAutoFit/>
-          </a:bodyPr>
-          <a:lstStyle/>
-          <a:p>
-            <a:r>
-              <a:rPr sz="1300" b="0">
-                <a:solidFill>
-                  <a:srgbClr val="C7D6E5"/>
-                </a:solidFill>
-                <a:latin typeface="Microsoft JhengHei"/>
-              </a:rPr>
-              <a:t>論文式 (1)；T 通常設為 1</a:t>
-            </a:r>
-          </a:p>
-        </p:txBody>
-      </p:sp>
-      <p:pic>
-        <p:nvPicPr>
-          <p:cNvPr id="6" name="Picture 5" descr="m_softmax.png"/>
-          <p:cNvPicPr>
-            <a:picLocks noChangeAspect="1"/>
-          </p:cNvPicPr>
-          <p:nvPr/>
-        </p:nvPicPr>
-        <p:blipFill>
-          <a:blip r:embed="rId2"/>
-          <a:stretch>
-            <a:fillRect/>
-          </a:stretch>
-        </p:blipFill>
-        <p:spPr>
-          <a:xfrm>
-            <a:off x="822960" y="1051560"/>
-            <a:ext cx="1867014" cy="868680"/>
-          </a:xfrm>
-          <a:prstGeom prst="rect">
-            <a:avLst/>
-          </a:prstGeom>
-        </p:spPr>
-      </p:pic>
-      <p:sp>
-        <p:nvSpPr>
-          <p:cNvPr id="7" name="TextBox 6"/>
-          <p:cNvSpPr txBox="1"/>
-          <p:nvPr/>
-        </p:nvSpPr>
-        <p:spPr>
-          <a:xfrm>
-            <a:off x="4754880" y="1097280"/>
-            <a:ext cx="6949440" cy="914400"/>
-          </a:xfrm>
-          <a:prstGeom prst="rect">
-            <a:avLst/>
-          </a:prstGeom>
-          <a:noFill/>
-        </p:spPr>
-        <p:txBody>
-          <a:bodyPr wrap="square">
-            <a:spAutoFit/>
-          </a:bodyPr>
-          <a:lstStyle/>
-          <a:p>
-            <a:r>
-              <a:rPr sz="1800" b="0">
-                <a:solidFill>
-                  <a:srgbClr val="202020"/>
-                </a:solidFill>
-                <a:latin typeface="Microsoft JhengHei"/>
-              </a:rPr>
-              <a:t>softmax 把每個類別算出的 logit z_i 與其他 logit 比較，</a:t>
-            </a:r>
-          </a:p>
-          <a:p>
-            <a:r>
-              <a:rPr sz="1800" b="0">
-                <a:solidFill>
-                  <a:srgbClr val="202020"/>
-                </a:solidFill>
-                <a:latin typeface="Microsoft JhengHei"/>
-              </a:rPr>
-              <a:t>轉成機率 q_i；T 是溫度。</a:t>
-            </a:r>
-          </a:p>
-        </p:txBody>
-      </p:sp>
-      <p:graphicFrame>
-        <p:nvGraphicFramePr>
-          <p:cNvPr id="8" name="Table 7"/>
-          <p:cNvGraphicFramePr>
-            <a:graphicFrameLocks noGrp="1"/>
-          </p:cNvGraphicFramePr>
-          <p:nvPr/>
-        </p:nvGraphicFramePr>
-        <p:xfrm>
-          <a:off x="731520" y="2240280"/>
-          <a:ext cx="1188720" cy="1316736"/>
-        </p:xfrm>
-        <a:graphic>
-          <a:graphicData uri="http://schemas.openxmlformats.org/drawingml/2006/table">
-            <a:tbl>
-              <a:tblPr bandRow="1">
-                <a:tableStyleId>{5C22544A-7EE6-4342-B048-85BDC9FD1C3A}</a:tableStyleId>
-              </a:tblPr>
-              <a:tblGrid>
-                <a:gridCol w="1188720"/>
-              </a:tblGrid>
-              <a:tr h="329184">
-                <a:tc>
-                  <a:txBody>
-                    <a:bodyPr/>
-                    <a:lstStyle/>
-                    <a:p>
-                      <a:pPr algn="ctr"/>
-                      <a:r>
-                        <a:rPr sz="1500" b="1">
-                          <a:solidFill>
-                            <a:srgbClr val="FFFFFF"/>
-                          </a:solidFill>
-                          <a:latin typeface="Microsoft JhengHei"/>
-                        </a:rPr>
-                        <a:t>類別</a:t>
-                      </a:r>
-                    </a:p>
-                  </a:txBody>
-                  <a:tcPr marL="36576" marR="36576" marT="9144" marB="9144">
-                    <a:solidFill>
-                      <a:srgbClr val="1F4E79"/>
-                    </a:solidFill>
-                  </a:tcPr>
-                </a:tc>
-              </a:tr>
-              <a:tr h="329184">
-                <a:tc>
-                  <a:txBody>
-                    <a:bodyPr/>
-                    <a:lstStyle/>
-                    <a:p>
-                      <a:pPr algn="ctr"/>
-                      <a:r>
-                        <a:rPr sz="1500" b="0">
-                          <a:solidFill>
-                            <a:srgbClr val="202020"/>
-                          </a:solidFill>
-                          <a:latin typeface="Consolas"/>
-                        </a:rPr>
-                        <a:t>2</a:t>
-                      </a:r>
-                    </a:p>
-                  </a:txBody>
-                  <a:tcPr marL="36576" marR="36576" marT="9144" marB="9144">
-                    <a:solidFill>
-                      <a:srgbClr val="FFFFFF"/>
-                    </a:solidFill>
-                  </a:tcPr>
-                </a:tc>
-              </a:tr>
-              <a:tr h="329184">
-                <a:tc>
-                  <a:txBody>
-                    <a:bodyPr/>
-                    <a:lstStyle/>
-                    <a:p>
-                      <a:pPr algn="ctr"/>
-                      <a:r>
-                        <a:rPr sz="1500" b="0">
-                          <a:solidFill>
-                            <a:srgbClr val="202020"/>
-                          </a:solidFill>
-                          <a:latin typeface="Consolas"/>
-                        </a:rPr>
-                        <a:t>3</a:t>
-                      </a:r>
-                    </a:p>
-                  </a:txBody>
-                  <a:tcPr marL="36576" marR="36576" marT="9144" marB="9144">
-                    <a:solidFill>
-                      <a:srgbClr val="FFFFFF"/>
-                    </a:solidFill>
-                  </a:tcPr>
-                </a:tc>
-              </a:tr>
-              <a:tr h="329184">
-                <a:tc>
-                  <a:txBody>
-                    <a:bodyPr/>
-                    <a:lstStyle/>
-                    <a:p>
-                      <a:pPr algn="ctr"/>
-                      <a:r>
-                        <a:rPr sz="1500" b="0">
-                          <a:solidFill>
-                            <a:srgbClr val="202020"/>
-                          </a:solidFill>
-                          <a:latin typeface="Consolas"/>
-                        </a:rPr>
-                        <a:t>7</a:t>
-                      </a:r>
-                    </a:p>
-                  </a:txBody>
-                  <a:tcPr marL="36576" marR="36576" marT="9144" marB="9144">
-                    <a:solidFill>
-                      <a:srgbClr val="FFFFFF"/>
-                    </a:solidFill>
-                  </a:tcPr>
-                </a:tc>
-              </a:tr>
-            </a:tbl>
-          </a:graphicData>
-        </a:graphic>
-      </p:graphicFrame>
-      <p:graphicFrame>
-        <p:nvGraphicFramePr>
-          <p:cNvPr id="9" name="Table 8"/>
-          <p:cNvGraphicFramePr>
-            <a:graphicFrameLocks noGrp="1"/>
-          </p:cNvGraphicFramePr>
-          <p:nvPr/>
-        </p:nvGraphicFramePr>
-        <p:xfrm>
-          <a:off x="2057400" y="2240280"/>
-          <a:ext cx="1463040" cy="1316736"/>
-        </p:xfrm>
-        <a:graphic>
-          <a:graphicData uri="http://schemas.openxmlformats.org/drawingml/2006/table">
-            <a:tbl>
-              <a:tblPr bandRow="1">
-                <a:tableStyleId>{5C22544A-7EE6-4342-B048-85BDC9FD1C3A}</a:tableStyleId>
-              </a:tblPr>
-              <a:tblGrid>
-                <a:gridCol w="1463040"/>
-              </a:tblGrid>
-              <a:tr h="329184">
-                <a:tc>
-                  <a:txBody>
-                    <a:bodyPr/>
-                    <a:lstStyle/>
-                    <a:p>
-                      <a:pPr algn="ctr"/>
-                      <a:r>
-                        <a:rPr sz="1500" b="1">
-                          <a:solidFill>
-                            <a:srgbClr val="FFFFFF"/>
-                          </a:solidFill>
-                          <a:latin typeface="Microsoft JhengHei"/>
-                        </a:rPr>
-                        <a:t>v</a:t>
-                      </a:r>
-                    </a:p>
-                  </a:txBody>
-                  <a:tcPr marL="36576" marR="36576" marT="9144" marB="9144">
-                    <a:solidFill>
-                      <a:srgbClr val="1F4E79"/>
-                    </a:solidFill>
-                  </a:tcPr>
-                </a:tc>
-              </a:tr>
-              <a:tr h="329184">
-                <a:tc>
-                  <a:txBody>
-                    <a:bodyPr/>
-                    <a:lstStyle/>
-                    <a:p>
-                      <a:pPr algn="ctr"/>
-                      <a:r>
-                        <a:rPr sz="1500" b="0">
-                          <a:solidFill>
-                            <a:srgbClr val="202020"/>
-                          </a:solidFill>
-                          <a:latin typeface="Consolas"/>
-                        </a:rPr>
-                        <a:t>8</a:t>
-                      </a:r>
-                    </a:p>
-                  </a:txBody>
-                  <a:tcPr marL="36576" marR="36576" marT="9144" marB="9144">
-                    <a:solidFill>
-                      <a:srgbClr val="FFFFFF"/>
-                    </a:solidFill>
-                  </a:tcPr>
-                </a:tc>
-              </a:tr>
-              <a:tr h="329184">
-                <a:tc>
-                  <a:txBody>
-                    <a:bodyPr/>
-                    <a:lstStyle/>
-                    <a:p>
-                      <a:pPr algn="ctr"/>
-                      <a:r>
-                        <a:rPr sz="1500" b="0">
-                          <a:solidFill>
-                            <a:srgbClr val="202020"/>
-                          </a:solidFill>
-                          <a:latin typeface="Consolas"/>
-                        </a:rPr>
-                        <a:t>4</a:t>
-                      </a:r>
-                    </a:p>
-                  </a:txBody>
-                  <a:tcPr marL="36576" marR="36576" marT="9144" marB="9144">
-                    <a:solidFill>
-                      <a:srgbClr val="FFFFFF"/>
-                    </a:solidFill>
-                  </a:tcPr>
-                </a:tc>
-              </a:tr>
-              <a:tr h="329184">
-                <a:tc>
-                  <a:txBody>
-                    <a:bodyPr/>
-                    <a:lstStyle/>
-                    <a:p>
-                      <a:pPr algn="ctr"/>
-                      <a:r>
-                        <a:rPr sz="1500" b="0">
-                          <a:solidFill>
-                            <a:srgbClr val="202020"/>
-                          </a:solidFill>
-                          <a:latin typeface="Consolas"/>
-                        </a:rPr>
-                        <a:t>0</a:t>
-                      </a:r>
-                    </a:p>
-                  </a:txBody>
-                  <a:tcPr marL="36576" marR="36576" marT="9144" marB="9144">
-                    <a:solidFill>
-                      <a:srgbClr val="FFFFFF"/>
-                    </a:solidFill>
-                  </a:tcPr>
-                </a:tc>
-              </a:tr>
-            </a:tbl>
-          </a:graphicData>
-        </a:graphic>
-      </p:graphicFrame>
-      <p:graphicFrame>
-        <p:nvGraphicFramePr>
-          <p:cNvPr id="10" name="Table 9"/>
-          <p:cNvGraphicFramePr>
-            <a:graphicFrameLocks noGrp="1"/>
-          </p:cNvGraphicFramePr>
-          <p:nvPr/>
-        </p:nvGraphicFramePr>
-        <p:xfrm>
-          <a:off x="3657600" y="2240280"/>
-          <a:ext cx="1965960" cy="1316736"/>
-        </p:xfrm>
-        <a:graphic>
-          <a:graphicData uri="http://schemas.openxmlformats.org/drawingml/2006/table">
-            <a:tbl>
-              <a:tblPr bandRow="1">
-                <a:tableStyleId>{5C22544A-7EE6-4342-B048-85BDC9FD1C3A}</a:tableStyleId>
-              </a:tblPr>
-              <a:tblGrid>
-                <a:gridCol w="1965960"/>
-              </a:tblGrid>
-              <a:tr h="329184">
-                <a:tc>
-                  <a:txBody>
-                    <a:bodyPr/>
-                    <a:lstStyle/>
-                    <a:p>
-                      <a:pPr algn="ctr"/>
-                      <a:r>
-                        <a:rPr sz="1500" b="1">
-                          <a:solidFill>
-                            <a:srgbClr val="FFFFFF"/>
-                          </a:solidFill>
-                          <a:latin typeface="Microsoft JhengHei"/>
-                        </a:rPr>
-                        <a:t>第 1 步 ÷ T</a:t>
-                      </a:r>
-                    </a:p>
-                  </a:txBody>
-                  <a:tcPr marL="36576" marR="36576" marT="9144" marB="9144">
-                    <a:solidFill>
-                      <a:srgbClr val="1F4E79"/>
-                    </a:solidFill>
-                  </a:tcPr>
-                </a:tc>
-              </a:tr>
-              <a:tr h="329184">
-                <a:tc>
-                  <a:txBody>
-                    <a:bodyPr/>
-                    <a:lstStyle/>
-                    <a:p>
-                      <a:pPr algn="ctr"/>
-                      <a:r>
-                        <a:rPr sz="1500" b="0">
-                          <a:solidFill>
-                            <a:srgbClr val="202020"/>
-                          </a:solidFill>
-                          <a:latin typeface="Consolas"/>
-                        </a:rPr>
-                        <a:t>8.0000</a:t>
-                      </a:r>
-                    </a:p>
-                  </a:txBody>
-                  <a:tcPr marL="36576" marR="36576" marT="9144" marB="9144">
-                    <a:solidFill>
-                      <a:srgbClr val="FFFFFF"/>
-                    </a:solidFill>
-                  </a:tcPr>
-                </a:tc>
-              </a:tr>
-              <a:tr h="329184">
-                <a:tc>
-                  <a:txBody>
-                    <a:bodyPr/>
-                    <a:lstStyle/>
-                    <a:p>
-                      <a:pPr algn="ctr"/>
-                      <a:r>
-                        <a:rPr sz="1500" b="0">
-                          <a:solidFill>
-                            <a:srgbClr val="202020"/>
-                          </a:solidFill>
-                          <a:latin typeface="Consolas"/>
-                        </a:rPr>
-                        <a:t>4.0000</a:t>
-                      </a:r>
-                    </a:p>
-                  </a:txBody>
-                  <a:tcPr marL="36576" marR="36576" marT="9144" marB="9144">
-                    <a:solidFill>
-                      <a:srgbClr val="FFFFFF"/>
-                    </a:solidFill>
-                  </a:tcPr>
-                </a:tc>
-              </a:tr>
-              <a:tr h="329184">
-                <a:tc>
-                  <a:txBody>
-                    <a:bodyPr/>
-                    <a:lstStyle/>
-                    <a:p>
-                      <a:pPr algn="ctr"/>
-                      <a:r>
-                        <a:rPr sz="1500" b="0">
-                          <a:solidFill>
-                            <a:srgbClr val="202020"/>
-                          </a:solidFill>
-                          <a:latin typeface="Consolas"/>
-                        </a:rPr>
-                        <a:t>0.0000</a:t>
-                      </a:r>
-                    </a:p>
-                  </a:txBody>
-                  <a:tcPr marL="36576" marR="36576" marT="9144" marB="9144">
-                    <a:solidFill>
-                      <a:srgbClr val="FFFFFF"/>
-                    </a:solidFill>
-                  </a:tcPr>
-                </a:tc>
-              </a:tr>
-            </a:tbl>
-          </a:graphicData>
-        </a:graphic>
-      </p:graphicFrame>
-      <p:graphicFrame>
-        <p:nvGraphicFramePr>
-          <p:cNvPr id="11" name="Table 10"/>
-          <p:cNvGraphicFramePr>
-            <a:graphicFrameLocks noGrp="1"/>
-          </p:cNvGraphicFramePr>
-          <p:nvPr/>
-        </p:nvGraphicFramePr>
-        <p:xfrm>
-          <a:off x="5760720" y="2240280"/>
-          <a:ext cx="2240279" cy="1316736"/>
-        </p:xfrm>
-        <a:graphic>
-          <a:graphicData uri="http://schemas.openxmlformats.org/drawingml/2006/table">
-            <a:tbl>
-              <a:tblPr bandRow="1">
-                <a:tableStyleId>{5C22544A-7EE6-4342-B048-85BDC9FD1C3A}</a:tableStyleId>
-              </a:tblPr>
-              <a:tblGrid>
-                <a:gridCol w="2240279"/>
-              </a:tblGrid>
-              <a:tr h="329184">
-                <a:tc>
-                  <a:txBody>
-                    <a:bodyPr/>
-                    <a:lstStyle/>
-                    <a:p>
-                      <a:pPr algn="ctr"/>
-                      <a:r>
-                        <a:rPr sz="1500" b="1">
-                          <a:solidFill>
-                            <a:srgbClr val="FFFFFF"/>
-                          </a:solidFill>
-                          <a:latin typeface="Microsoft JhengHei"/>
-                        </a:rPr>
-                        <a:t>第 2 步 exp</a:t>
-                      </a:r>
-                    </a:p>
-                  </a:txBody>
-                  <a:tcPr marL="36576" marR="36576" marT="9144" marB="9144">
-                    <a:solidFill>
-                      <a:srgbClr val="1F4E79"/>
-                    </a:solidFill>
-                  </a:tcPr>
-                </a:tc>
-              </a:tr>
-              <a:tr h="329184">
-                <a:tc>
-                  <a:txBody>
-                    <a:bodyPr/>
-                    <a:lstStyle/>
-                    <a:p>
-                      <a:pPr algn="ctr"/>
-                      <a:r>
-                        <a:rPr sz="1500" b="0">
-                          <a:solidFill>
-                            <a:srgbClr val="202020"/>
-                          </a:solidFill>
-                          <a:latin typeface="Consolas"/>
-                        </a:rPr>
-                        <a:t>2980.9580</a:t>
-                      </a:r>
-                    </a:p>
-                  </a:txBody>
-                  <a:tcPr marL="36576" marR="36576" marT="9144" marB="9144">
-                    <a:solidFill>
-                      <a:srgbClr val="FFFFFF"/>
-                    </a:solidFill>
-                  </a:tcPr>
-                </a:tc>
-              </a:tr>
-              <a:tr h="329184">
-                <a:tc>
-                  <a:txBody>
-                    <a:bodyPr/>
-                    <a:lstStyle/>
-                    <a:p>
-                      <a:pPr algn="ctr"/>
-                      <a:r>
-                        <a:rPr sz="1500" b="0">
-                          <a:solidFill>
-                            <a:srgbClr val="202020"/>
-                          </a:solidFill>
-                          <a:latin typeface="Consolas"/>
-                        </a:rPr>
-                        <a:t>54.5982</a:t>
-                      </a:r>
-                    </a:p>
-                  </a:txBody>
-                  <a:tcPr marL="36576" marR="36576" marT="9144" marB="9144">
-                    <a:solidFill>
-                      <a:srgbClr val="FFFFFF"/>
-                    </a:solidFill>
-                  </a:tcPr>
-                </a:tc>
-              </a:tr>
-              <a:tr h="329184">
-                <a:tc>
-                  <a:txBody>
-                    <a:bodyPr/>
-                    <a:lstStyle/>
-                    <a:p>
-                      <a:pPr algn="ctr"/>
-                      <a:r>
-                        <a:rPr sz="1500" b="0">
-                          <a:solidFill>
-                            <a:srgbClr val="202020"/>
-                          </a:solidFill>
-                          <a:latin typeface="Consolas"/>
-                        </a:rPr>
-                        <a:t>1.0000</a:t>
-                      </a:r>
-                    </a:p>
-                  </a:txBody>
-                  <a:tcPr marL="36576" marR="36576" marT="9144" marB="9144">
-                    <a:solidFill>
-                      <a:srgbClr val="FFFFFF"/>
-                    </a:solidFill>
-                  </a:tcPr>
-                </a:tc>
-              </a:tr>
-            </a:tbl>
-          </a:graphicData>
-        </a:graphic>
-      </p:graphicFrame>
-      <p:sp>
-        <p:nvSpPr>
-          <p:cNvPr id="12" name="Rectangle 11"/>
-          <p:cNvSpPr/>
-          <p:nvPr/>
-        </p:nvSpPr>
-        <p:spPr>
-          <a:xfrm>
-            <a:off x="8138160" y="2240280"/>
-            <a:ext cx="1737360" cy="1316736"/>
-          </a:xfrm>
-          <a:prstGeom prst="rect">
-            <a:avLst/>
-          </a:prstGeom>
-          <a:solidFill>
-            <a:srgbClr val="DAE6F2"/>
-          </a:solidFill>
-          <a:ln>
-            <a:solidFill>
-              <a:srgbClr val="D0D7DE"/>
-            </a:solidFill>
-          </a:ln>
-          <a:effectLst/>
-        </p:spPr>
-        <p:style>
-          <a:lnRef idx="1">
-            <a:schemeClr val="accent1"/>
-          </a:lnRef>
-          <a:fillRef idx="3">
-            <a:schemeClr val="accent1"/>
-          </a:fillRef>
-          <a:effectRef idx="2">
-            <a:schemeClr val="accent1"/>
-          </a:effectRef>
-          <a:fontRef idx="minor">
-            <a:schemeClr val="lt1"/>
-          </a:fontRef>
-        </p:style>
-        <p:txBody>
-          <a:bodyPr rtlCol="0" anchor="ctr" wrap="square"/>
-          <a:lstStyle/>
-          <a:p>
-            <a:pPr algn="ctr"/>
-            <a:r>
-              <a:rPr sz="1700" b="1">
-                <a:solidFill>
-                  <a:srgbClr val="1F4E79"/>
-                </a:solidFill>
-                <a:latin typeface="Microsoft JhengHei"/>
-              </a:rPr>
-              <a:t>第 3 步 加總</a:t>
-            </a:r>
-          </a:p>
-          <a:p>
-            <a:pPr algn="ctr"/>
-            <a:r>
-              <a:rPr sz="1700" b="1">
-                <a:solidFill>
-                  <a:srgbClr val="1F4E79"/>
-                </a:solidFill>
-                <a:latin typeface="Microsoft JhengHei"/>
-              </a:rPr>
-              <a:t>3036.5561</a:t>
-            </a:r>
-          </a:p>
-        </p:txBody>
-      </p:sp>
-      <p:graphicFrame>
-        <p:nvGraphicFramePr>
-          <p:cNvPr id="13" name="Table 12"/>
-          <p:cNvGraphicFramePr>
-            <a:graphicFrameLocks noGrp="1"/>
-          </p:cNvGraphicFramePr>
-          <p:nvPr/>
-        </p:nvGraphicFramePr>
-        <p:xfrm>
-          <a:off x="10012680" y="2240280"/>
-          <a:ext cx="1783080" cy="1316736"/>
-        </p:xfrm>
-        <a:graphic>
-          <a:graphicData uri="http://schemas.openxmlformats.org/drawingml/2006/table">
-            <a:tbl>
-              <a:tblPr bandRow="1">
-                <a:tableStyleId>{5C22544A-7EE6-4342-B048-85BDC9FD1C3A}</a:tableStyleId>
-              </a:tblPr>
-              <a:tblGrid>
-                <a:gridCol w="1783080"/>
-              </a:tblGrid>
-              <a:tr h="329184">
-                <a:tc>
-                  <a:txBody>
-                    <a:bodyPr/>
-                    <a:lstStyle/>
-                    <a:p>
-                      <a:pPr algn="ctr"/>
-                      <a:r>
-                        <a:rPr sz="1500" b="1">
-                          <a:solidFill>
-                            <a:srgbClr val="FFFFFF"/>
-                          </a:solidFill>
-                          <a:latin typeface="Microsoft JhengHei"/>
-                        </a:rPr>
-                        <a:t>第 4 步 p</a:t>
-                      </a:r>
-                    </a:p>
-                  </a:txBody>
-                  <a:tcPr marL="36576" marR="36576" marT="9144" marB="9144">
-                    <a:solidFill>
-                      <a:srgbClr val="1F4E79"/>
-                    </a:solidFill>
-                  </a:tcPr>
-                </a:tc>
-              </a:tr>
-              <a:tr h="329184">
-                <a:tc>
-                  <a:txBody>
-                    <a:bodyPr/>
-                    <a:lstStyle/>
-                    <a:p>
-                      <a:pPr algn="ctr"/>
-                      <a:r>
-                        <a:rPr sz="1500" b="0">
-                          <a:solidFill>
-                            <a:srgbClr val="202020"/>
-                          </a:solidFill>
-                          <a:latin typeface="Consolas"/>
-                        </a:rPr>
-                        <a:t>0.9817</a:t>
-                      </a:r>
-                    </a:p>
-                  </a:txBody>
-                  <a:tcPr marL="36576" marR="36576" marT="9144" marB="9144">
-                    <a:solidFill>
-                      <a:srgbClr val="FFFFFF"/>
-                    </a:solidFill>
-                  </a:tcPr>
-                </a:tc>
-              </a:tr>
-              <a:tr h="329184">
-                <a:tc>
-                  <a:txBody>
-                    <a:bodyPr/>
-                    <a:lstStyle/>
-                    <a:p>
-                      <a:pPr algn="ctr"/>
-                      <a:r>
-                        <a:rPr sz="1500" b="0">
-                          <a:solidFill>
-                            <a:srgbClr val="202020"/>
-                          </a:solidFill>
-                          <a:latin typeface="Consolas"/>
-                        </a:rPr>
-                        <a:t>0.0180</a:t>
-                      </a:r>
-                    </a:p>
-                  </a:txBody>
-                  <a:tcPr marL="36576" marR="36576" marT="9144" marB="9144">
-                    <a:solidFill>
-                      <a:srgbClr val="FFF3CD"/>
-                    </a:solidFill>
-                  </a:tcPr>
-                </a:tc>
-              </a:tr>
-              <a:tr h="329184">
-                <a:tc>
-                  <a:txBody>
-                    <a:bodyPr/>
-                    <a:lstStyle/>
-                    <a:p>
-                      <a:pPr algn="ctr"/>
-                      <a:r>
-                        <a:rPr sz="1500" b="0">
-                          <a:solidFill>
-                            <a:srgbClr val="202020"/>
-                          </a:solidFill>
-                          <a:latin typeface="Consolas"/>
-                        </a:rPr>
-                        <a:t>0.0003</a:t>
-                      </a:r>
-                    </a:p>
-                  </a:txBody>
-                  <a:tcPr marL="36576" marR="36576" marT="9144" marB="9144">
-                    <a:solidFill>
-                      <a:srgbClr val="FFF3CD"/>
-                    </a:solidFill>
-                  </a:tcPr>
-                </a:tc>
-              </a:tr>
-            </a:tbl>
-          </a:graphicData>
-        </a:graphic>
-      </p:graphicFrame>
-      <p:sp>
-        <p:nvSpPr>
-          <p:cNvPr id="14" name="Rectangle 13"/>
-          <p:cNvSpPr/>
-          <p:nvPr/>
-        </p:nvSpPr>
-        <p:spPr>
-          <a:xfrm>
-            <a:off x="731520" y="3931920"/>
-            <a:ext cx="10881360" cy="1051560"/>
-          </a:xfrm>
-          <a:prstGeom prst="rect">
-            <a:avLst/>
-          </a:prstGeom>
-          <a:solidFill>
-            <a:srgbClr val="FFF3CD"/>
-          </a:solidFill>
-          <a:ln>
-            <a:solidFill>
-              <a:srgbClr val="D0D7DE"/>
-            </a:solidFill>
-          </a:ln>
-          <a:effectLst/>
-        </p:spPr>
-        <p:style>
-          <a:lnRef idx="1">
-            <a:schemeClr val="accent1"/>
-          </a:lnRef>
-          <a:fillRef idx="3">
-            <a:schemeClr val="accent1"/>
-          </a:fillRef>
-          <a:effectRef idx="2">
-            <a:schemeClr val="accent1"/>
-          </a:effectRef>
-          <a:fontRef idx="minor">
-            <a:schemeClr val="lt1"/>
-          </a:fontRef>
-        </p:style>
-        <p:txBody>
-          <a:bodyPr rtlCol="0" anchor="ctr" wrap="square"/>
-          <a:lstStyle/>
-          <a:p>
-            <a:pPr algn="l"/>
-            <a:r>
-              <a:rPr sz="1800" b="1">
-                <a:solidFill>
-                  <a:srgbClr val="C03030"/>
-                </a:solidFill>
-                <a:latin typeface="Microsoft JhengHei"/>
-              </a:rPr>
-              <a:t>3 和 7 的機率是 0.0180 與 0.0003。「這個 2 比較像 3、不像 7」的資訊雖然存在，</a:t>
-            </a:r>
-          </a:p>
-          <a:p>
-            <a:pPr algn="l"/>
-            <a:r>
-              <a:rPr sz="1800" b="1">
-                <a:solidFill>
-                  <a:srgbClr val="C03030"/>
-                </a:solidFill>
-                <a:latin typeface="Microsoft JhengHei"/>
-              </a:rPr>
-              <a:t>對交叉熵代價函數卻幾乎沒有影響。</a:t>
-            </a:r>
-          </a:p>
-        </p:txBody>
-      </p:sp>
-      <p:sp>
-        <p:nvSpPr>
-          <p:cNvPr id="15" name="TextBox 14"/>
-          <p:cNvSpPr txBox="1"/>
-          <p:nvPr/>
-        </p:nvSpPr>
-        <p:spPr>
-          <a:xfrm>
-            <a:off x="731520" y="5166360"/>
-            <a:ext cx="10881360" cy="914400"/>
-          </a:xfrm>
-          <a:prstGeom prst="rect">
-            <a:avLst/>
-          </a:prstGeom>
-          <a:noFill/>
-        </p:spPr>
-        <p:txBody>
-          <a:bodyPr wrap="square">
-            <a:spAutoFit/>
-          </a:bodyPr>
-          <a:lstStyle/>
-          <a:p>
-            <a:r>
-              <a:rPr sz="1700" b="0">
-                <a:solidFill>
-                  <a:srgbClr val="59636E"/>
-                </a:solidFill>
-                <a:latin typeface="Microsoft JhengHei"/>
-              </a:rPr>
-              <a:t>核對：exp(8) = 2980.9580，exp(4) = 54.5982，exp(0) = 1，三者相加 3036.5561。</a:t>
-            </a:r>
-          </a:p>
-        </p:txBody>
-      </p:sp>
-    </p:spTree>
-  </p:cSld>
-  <p:clrMapOvr>
-    <a:masterClrMapping/>
-  </p:clrMapOvr>
-  <p:timing>
-    <p:tnLst>
-      <p:par>
-        <p:cTn id="1" dur="indefinite" restart="never" nodeType="tmRoot">
-          <p:childTnLst>
-            <p:seq concurrent="1" nextAc="seek">
-              <p:cTn id="2" dur="indefinite" nodeType="mainSeq">
-                <p:childTnLst>
-                  <p:par>
-                    <p:cTn id="3" fill="hold">
-                      <p:stCondLst>
-                        <p:cond delay="indefinite"/>
-                      </p:stCondLst>
-                      <p:childTnLst>
-                        <p:par>
-                          <p:cTn id="4" fill="hold">
-                            <p:stCondLst>
-                              <p:cond delay="0"/>
-                            </p:stCondLst>
-                            <p:childTnLst>
-                              <p:par>
-                                <p:cTn id="5" presetID="1" presetClass="entr" presetSubtype="0" fill="hold" grpId="0" nodeType="clickEffect">
-                                  <p:stCondLst>
-                                    <p:cond delay="0"/>
-                                  </p:stCondLst>
-                                  <p:childTnLst>
-                                    <p:set>
-                                      <p:cBhvr>
-                                        <p:cTn id="6" dur="1" fill="hold">
-                                          <p:stCondLst>
-                                            <p:cond delay="0"/>
-                                          </p:stCondLst>
-                                        </p:cTn>
-                                        <p:tgtEl>
-                                          <p:spTgt spid="6"/>
-                                        </p:tgtEl>
-                                        <p:attrNameLst>
-                                          <p:attrName>style.visibility</p:attrName>
-                                        </p:attrNameLst>
-                                      </p:cBhvr>
-                                      <p:to>
-                                        <p:strVal val="visible"/>
-                                      </p:to>
-                                    </p:set>
-                                  </p:childTnLst>
-                                </p:cTn>
-                              </p:par>
-                            </p:childTnLst>
-                          </p:cTn>
-                        </p:par>
-                      </p:childTnLst>
-                    </p:cTn>
-                  </p:par>
-                  <p:par>
-                    <p:cTn id="7" fill="hold">
-                      <p:stCondLst>
-                        <p:cond delay="indefinite"/>
-                      </p:stCondLst>
-                      <p:childTnLst>
-                        <p:par>
-                          <p:cTn id="8" fill="hold">
-                            <p:stCondLst>
-                              <p:cond delay="0"/>
-                            </p:stCondLst>
-                            <p:childTnLst>
-                              <p:par>
-                                <p:cTn id="9" presetID="1" presetClass="entr" presetSubtype="0" fill="hold" grpId="0" nodeType="clickEffect">
-                                  <p:stCondLst>
-                                    <p:cond delay="0"/>
-                                  </p:stCondLst>
-                                  <p:childTnLst>
-                                    <p:set>
-                                      <p:cBhvr>
-                                        <p:cTn id="10" dur="1" fill="hold">
-                                          <p:stCondLst>
-                                            <p:cond delay="0"/>
-                                          </p:stCondLst>
-                                        </p:cTn>
-                                        <p:tgtEl>
-                                          <p:spTgt spid="7"/>
-                                        </p:tgtEl>
-                                        <p:attrNameLst>
-                                          <p:attrName>style.visibility</p:attrName>
-                                        </p:attrNameLst>
-                                      </p:cBhvr>
-                                      <p:to>
-                                        <p:strVal val="visible"/>
-                                      </p:to>
-                                    </p:set>
-                                  </p:childTnLst>
-                                </p:cTn>
-                              </p:par>
-                            </p:childTnLst>
-                          </p:cTn>
-                        </p:par>
-                      </p:childTnLst>
-                    </p:cTn>
-                  </p:par>
-                  <p:par>
-                    <p:cTn id="11" fill="hold">
-                      <p:stCondLst>
-                        <p:cond delay="indefinite"/>
-                      </p:stCondLst>
-                      <p:childTnLst>
-                        <p:par>
-                          <p:cTn id="12" fill="hold">
-                            <p:stCondLst>
-                              <p:cond delay="0"/>
-                            </p:stCondLst>
-                            <p:childTnLst>
-                              <p:par>
-                                <p:cTn id="13" presetID="1" presetClass="entr" presetSubtype="0" fill="hold" grpId="0" nodeType="clickEffect">
-                                  <p:stCondLst>
-                                    <p:cond delay="0"/>
-                                  </p:stCondLst>
-                                  <p:childTnLst>
-                                    <p:set>
-                                      <p:cBhvr>
-                                        <p:cTn id="14" dur="1" fill="hold">
-                                          <p:stCondLst>
-                                            <p:cond delay="0"/>
-                                          </p:stCondLst>
-                                        </p:cTn>
-                                        <p:tgtEl>
-                                          <p:spTgt spid="8"/>
-                                        </p:tgtEl>
-                                        <p:attrNameLst>
-                                          <p:attrName>style.visibility</p:attrName>
-                                        </p:attrNameLst>
-                                      </p:cBhvr>
-                                      <p:to>
-                                        <p:strVal val="visible"/>
-                                      </p:to>
-                                    </p:set>
-                                  </p:childTnLst>
-                                </p:cTn>
-                              </p:par>
-                            </p:childTnLst>
-                          </p:cTn>
-                        </p:par>
-                      </p:childTnLst>
-                    </p:cTn>
-                  </p:par>
-                  <p:par>
-                    <p:cTn id="15" fill="hold">
-                      <p:stCondLst>
-                        <p:cond delay="indefinite"/>
-                      </p:stCondLst>
-                      <p:childTnLst>
-                        <p:par>
-                          <p:cTn id="16" fill="hold">
-                            <p:stCondLst>
-                              <p:cond delay="0"/>
-                            </p:stCondLst>
-                            <p:childTnLst>
-                              <p:par>
-                                <p:cTn id="17" presetID="1" presetClass="entr" presetSubtype="0" fill="hold" grpId="0" nodeType="clickEffect">
-                                  <p:stCondLst>
-                                    <p:cond delay="0"/>
-                                  </p:stCondLst>
-                                  <p:childTnLst>
-                                    <p:set>
-                                      <p:cBhvr>
-                                        <p:cTn id="18" dur="1" fill="hold">
-                                          <p:stCondLst>
-                                            <p:cond delay="0"/>
-                                          </p:stCondLst>
-                                        </p:cTn>
-                                        <p:tgtEl>
-                                          <p:spTgt spid="9"/>
-                                        </p:tgtEl>
-                                        <p:attrNameLst>
-                                          <p:attrName>style.visibility</p:attrName>
-                                        </p:attrNameLst>
-                                      </p:cBhvr>
-                                      <p:to>
-                                        <p:strVal val="visible"/>
-                                      </p:to>
-                                    </p:set>
-                                  </p:childTnLst>
-                                </p:cTn>
-                              </p:par>
-                            </p:childTnLst>
-                          </p:cTn>
-                        </p:par>
-                      </p:childTnLst>
-                    </p:cTn>
-                  </p:par>
-                  <p:par>
-                    <p:cTn id="19" fill="hold">
-                      <p:stCondLst>
-                        <p:cond delay="indefinite"/>
-                      </p:stCondLst>
-                      <p:childTnLst>
-                        <p:par>
-                          <p:cTn id="20" fill="hold">
-                            <p:stCondLst>
-                              <p:cond delay="0"/>
-                            </p:stCondLst>
-                            <p:childTnLst>
-                              <p:par>
-                                <p:cTn id="21" presetID="1" presetClass="entr" presetSubtype="0" fill="hold" grpId="0" nodeType="clickEffect">
-                                  <p:stCondLst>
-                                    <p:cond delay="0"/>
-                                  </p:stCondLst>
-                                  <p:childTnLst>
-                                    <p:set>
-                                      <p:cBhvr>
-                                        <p:cTn id="22" dur="1" fill="hold">
-                                          <p:stCondLst>
-                                            <p:cond delay="0"/>
-                                          </p:stCondLst>
-                                        </p:cTn>
-                                        <p:tgtEl>
-                                          <p:spTgt spid="10"/>
-                                        </p:tgtEl>
-                                        <p:attrNameLst>
-                                          <p:attrName>style.visibility</p:attrName>
-                                        </p:attrNameLst>
-                                      </p:cBhvr>
-                                      <p:to>
-                                        <p:strVal val="visible"/>
-                                      </p:to>
-                                    </p:set>
-                                  </p:childTnLst>
-                                </p:cTn>
-                              </p:par>
-                            </p:childTnLst>
-                          </p:cTn>
-                        </p:par>
-                      </p:childTnLst>
-                    </p:cTn>
-                  </p:par>
-                  <p:par>
-                    <p:cTn id="23" fill="hold">
-                      <p:stCondLst>
-                        <p:cond delay="indefinite"/>
-                      </p:stCondLst>
-                      <p:childTnLst>
-                        <p:par>
-                          <p:cTn id="24" fill="hold">
-                            <p:stCondLst>
-                              <p:cond delay="0"/>
-                            </p:stCondLst>
-                            <p:childTnLst>
-                              <p:par>
-                                <p:cTn id="25" presetID="1" presetClass="entr" presetSubtype="0" fill="hold" grpId="0" nodeType="clickEffect">
-                                  <p:stCondLst>
-                                    <p:cond delay="0"/>
-                                  </p:stCondLst>
-                                  <p:childTnLst>
-                                    <p:set>
-                                      <p:cBhvr>
-                                        <p:cTn id="26" dur="1" fill="hold">
-                                          <p:stCondLst>
-                                            <p:cond delay="0"/>
-                                          </p:stCondLst>
-                                        </p:cTn>
-                                        <p:tgtEl>
-                                          <p:spTgt spid="11"/>
-                                        </p:tgtEl>
-                                        <p:attrNameLst>
-                                          <p:attrName>style.visibility</p:attrName>
-                                        </p:attrNameLst>
-                                      </p:cBhvr>
-                                      <p:to>
-                                        <p:strVal val="visible"/>
-                                      </p:to>
-                                    </p:set>
-                                  </p:childTnLst>
-                                </p:cTn>
-                              </p:par>
-                            </p:childTnLst>
-                          </p:cTn>
-                        </p:par>
-                      </p:childTnLst>
-                    </p:cTn>
-                  </p:par>
-                  <p:par>
-                    <p:cTn id="27" fill="hold">
-                      <p:stCondLst>
-                        <p:cond delay="indefinite"/>
-                      </p:stCondLst>
-                      <p:childTnLst>
-                        <p:par>
-                          <p:cTn id="28" fill="hold">
-                            <p:stCondLst>
-                              <p:cond delay="0"/>
-                            </p:stCondLst>
-                            <p:childTnLst>
-                              <p:par>
-                                <p:cTn id="29" presetID="1" presetClass="entr" presetSubtype="0" fill="hold" grpId="0" nodeType="clickEffect">
-                                  <p:stCondLst>
-                                    <p:cond delay="0"/>
-                                  </p:stCondLst>
-                                  <p:childTnLst>
-                                    <p:set>
-                                      <p:cBhvr>
-                                        <p:cTn id="30" dur="1" fill="hold">
-                                          <p:stCondLst>
-                                            <p:cond delay="0"/>
-                                          </p:stCondLst>
-                                        </p:cTn>
-                                        <p:tgtEl>
-                                          <p:spTgt spid="12"/>
-                                        </p:tgtEl>
-                                        <p:attrNameLst>
-                                          <p:attrName>style.visibility</p:attrName>
-                                        </p:attrNameLst>
-                                      </p:cBhvr>
-                                      <p:to>
-                                        <p:strVal val="visible"/>
-                                      </p:to>
-                                    </p:set>
-                                  </p:childTnLst>
-                                </p:cTn>
-                              </p:par>
-                            </p:childTnLst>
-                          </p:cTn>
-                        </p:par>
-                      </p:childTnLst>
-                    </p:cTn>
-                  </p:par>
-                  <p:par>
-                    <p:cTn id="31" fill="hold">
-                      <p:stCondLst>
-                        <p:cond delay="indefinite"/>
-                      </p:stCondLst>
-                      <p:childTnLst>
-                        <p:par>
-                          <p:cTn id="32" fill="hold">
-                            <p:stCondLst>
-                              <p:cond delay="0"/>
-                            </p:stCondLst>
-                            <p:childTnLst>
-                              <p:par>
-                                <p:cTn id="33" presetID="1" presetClass="entr" presetSubtype="0" fill="hold" grpId="0" nodeType="clickEffect">
-                                  <p:stCondLst>
-                                    <p:cond delay="0"/>
-                                  </p:stCondLst>
-                                  <p:childTnLst>
-                                    <p:set>
-                                      <p:cBhvr>
-                                        <p:cTn id="34" dur="1" fill="hold">
-                                          <p:stCondLst>
-                                            <p:cond delay="0"/>
-                                          </p:stCondLst>
-                                        </p:cTn>
-                                        <p:tgtEl>
-                                          <p:spTgt spid="13"/>
-                                        </p:tgtEl>
-                                        <p:attrNameLst>
-                                          <p:attrName>style.visibility</p:attrName>
-                                        </p:attrNameLst>
-                                      </p:cBhvr>
-                                      <p:to>
-                                        <p:strVal val="visible"/>
-                                      </p:to>
-                                    </p:set>
-                                  </p:childTnLst>
-                                </p:cTn>
-                              </p:par>
-                            </p:childTnLst>
-                          </p:cTn>
-                        </p:par>
-                      </p:childTnLst>
-                    </p:cTn>
-                  </p:par>
-                  <p:par>
-                    <p:cTn id="35" fill="hold">
-                      <p:stCondLst>
-                        <p:cond delay="indefinite"/>
-                      </p:stCondLst>
-                      <p:childTnLst>
-                        <p:par>
-                          <p:cTn id="36" fill="hold">
-                            <p:stCondLst>
-                              <p:cond delay="0"/>
-                            </p:stCondLst>
-                            <p:childTnLst>
-                              <p:par>
-                                <p:cTn id="37" presetID="1" presetClass="entr" presetSubtype="0" fill="hold" grpId="0" nodeType="clickEffect">
-                                  <p:stCondLst>
-                                    <p:cond delay="0"/>
-                                  </p:stCondLst>
-                                  <p:childTnLst>
-                                    <p:set>
-                                      <p:cBhvr>
-                                        <p:cTn id="38" dur="1" fill="hold">
-                                          <p:stCondLst>
-                                            <p:cond delay="0"/>
-                                          </p:stCondLst>
-                                        </p:cTn>
-                                        <p:tgtEl>
-                                          <p:spTgt spid="14"/>
-                                        </p:tgtEl>
-                                        <p:attrNameLst>
-                                          <p:attrName>style.visibility</p:attrName>
-                                        </p:attrNameLst>
-                                      </p:cBhvr>
-                                      <p:to>
-                                        <p:strVal val="visible"/>
-                                      </p:to>
-                                    </p:set>
-                                  </p:childTnLst>
-                                </p:cTn>
-                              </p:par>
-                            </p:childTnLst>
-                          </p:cTn>
-                        </p:par>
-                      </p:childTnLst>
-                    </p:cTn>
-                  </p:par>
-                  <p:par>
-                    <p:cTn id="39" fill="hold">
-                      <p:stCondLst>
-                        <p:cond delay="indefinite"/>
-                      </p:stCondLst>
-                      <p:childTnLst>
-                        <p:par>
-                          <p:cTn id="40" fill="hold">
-                            <p:stCondLst>
-                              <p:cond delay="0"/>
-                            </p:stCondLst>
-                            <p:childTnLst>
-                              <p:par>
-                                <p:cTn id="41" presetID="1" presetClass="entr" presetSubtype="0" fill="hold" grpId="0" nodeType="clickEffect">
-                                  <p:stCondLst>
-                                    <p:cond delay="0"/>
-                                  </p:stCondLst>
-                                  <p:childTnLst>
-                                    <p:set>
-                                      <p:cBhvr>
-                                        <p:cTn id="42" dur="1" fill="hold">
-                                          <p:stCondLst>
-                                            <p:cond delay="0"/>
-                                          </p:stCondLst>
-                                        </p:cTn>
-                                        <p:tgtEl>
-                                          <p:spTgt spid="15"/>
-                                        </p:tgtEl>
-                                        <p:attrNameLst>
-                                          <p:attrName>style.visibility</p:attrName>
-                                        </p:attrNameLst>
-                                      </p:cBhvr>
-                                      <p:to>
-                                        <p:strVal val="visible"/>
-                                      </p:to>
-                                    </p:set>
-                                  </p:childTnLst>
-                                </p:cTn>
-                              </p:par>
-                            </p:childTnLst>
-                          </p:cTn>
-                        </p:par>
-                      </p:childTnLst>
-                    </p:cTn>
-                  </p:par>
-                </p:childTnLst>
-              </p:cTn>
-              <p:prevCondLst>
-                <p:cond evt="onPrev" delay="0">
-                  <p:tgtEl>
-                    <p:sldTgt/>
-                  </p:tgtEl>
-                </p:cond>
-              </p:prevCondLst>
-              <p:nextCondLst>
-                <p:cond evt="onNext" delay="0">
-                  <p:tgtEl>
-                    <p:sldTgt/>
-                  </p:tgtEl>
-                </p:cond>
-              </p:nextCondLst>
-            </p:seq>
-          </p:childTnLst>
-        </p:cTn>
-      </p:par>
-    </p:tnLst>
-    <p:bldLst>
-      <p:bldP spid="6" grpId="0" animBg="1"/>
-      <p:bldP spid="7" grpId="0" animBg="1"/>
-      <p:bldGraphic spid="8" grpId="0">
-        <p:bldAsOne/>
-      </p:bldGraphic>
-      <p:bldGraphic spid="9" grpId="0">
-        <p:bldAsOne/>
-      </p:bldGraphic>
-      <p:bldGraphic spid="10" grpId="0">
-        <p:bldAsOne/>
-      </p:bldGraphic>
-      <p:bldGraphic spid="11" grpId="0">
-        <p:bldAsOne/>
-      </p:bldGraphic>
-      <p:bldP spid="12" grpId="0" animBg="1"/>
-      <p:bldGraphic spid="13" grpId="0">
-        <p:bldAsOne/>
-      </p:bldGraphic>
-      <p:bldP spid="14" grpId="0" animBg="1"/>
-      <p:bldP spid="15" grpId="0" animBg="1"/>
-    </p:bldLst>
-  </p:timing>
-</p:sld>
-</file>
-
 <file path=ppt/slides/slide7.xml><?xml version="1.0" encoding="utf-8"?>
 <p:sld xmlns:a="http://schemas.openxmlformats.org/drawingml/2006/main" xmlns:p="http://schemas.openxmlformats.org/presentationml/2006/main" xmlns:r="http://schemas.openxmlformats.org/officeDocument/2006/relationships">
   <p:cSld>
@@ -22612,7 +22290,7 @@
                 </a:solidFill>
                 <a:latin typeface="Microsoft JhengHei"/>
               </a:rPr>
-              <a:t>二、帶溫度的 softmax：T = 4</a:t>
+              <a:t>二、帶溫度的 softmax：T = 1</a:t>
             </a:r>
           </a:p>
         </p:txBody>
@@ -22646,7 +22324,7 @@
                 </a:solidFill>
                 <a:latin typeface="Microsoft JhengHei"/>
               </a:rPr>
-              <a:t>同一組笨重模型的 logit，改用較高的溫度</a:t>
+              <a:t>論文式 (1)；T 通常設為 1</a:t>
             </a:r>
           </a:p>
         </p:txBody>
@@ -22704,7 +22382,7 @@
                 </a:solidFill>
                 <a:latin typeface="Microsoft JhengHei"/>
               </a:rPr>
-              <a:t>T 取較大的值，類別上的機率分布較軟：</a:t>
+              <a:t>softmax 把每個類別算出的 logit z_i 與其他 logit 比較，</a:t>
             </a:r>
           </a:p>
           <a:p>
@@ -22715,7 +22393,7 @@
                 </a:solidFill>
                 <a:latin typeface="Microsoft JhengHei"/>
               </a:rPr>
-              <a:t>第 1 步把 logit 之間的差距縮小為四分之一。</a:t>
+              <a:t>轉成機率 q_i；T 是溫度。</a:t>
             </a:r>
           </a:p>
         </p:txBody>
@@ -23030,7 +22708,7 @@
                           </a:solidFill>
                           <a:latin typeface="Consolas"/>
                         </a:rPr>
-                        <a:t>2.0000</a:t>
+                        <a:t>8.0000</a:t>
                       </a:r>
                     </a:p>
                   </a:txBody>
@@ -23055,7 +22733,7 @@
                           </a:solidFill>
                           <a:latin typeface="Consolas"/>
                         </a:rPr>
-                        <a:t>1.0000</a:t>
+                        <a:t>4.0000</a:t>
                       </a:r>
                     </a:p>
                   </a:txBody>
@@ -23155,7 +22833,7 @@
                           </a:solidFill>
                           <a:latin typeface="Consolas"/>
                         </a:rPr>
-                        <a:t>7.3891</a:t>
+                        <a:t>2980.9580</a:t>
                       </a:r>
                     </a:p>
                   </a:txBody>
@@ -23180,7 +22858,7 @@
                           </a:solidFill>
                           <a:latin typeface="Consolas"/>
                         </a:rPr>
-                        <a:t>2.7183</a:t>
+                        <a:t>54.5982</a:t>
                       </a:r>
                     </a:p>
                   </a:txBody>
@@ -23282,7 +22960,7 @@
                 </a:solidFill>
                 <a:latin typeface="Microsoft JhengHei"/>
               </a:rPr>
-              <a:t>11.1073</a:t>
+              <a:t>3036.5561</a:t>
             </a:r>
           </a:p>
         </p:txBody>
@@ -23347,7 +23025,7 @@
                           </a:solidFill>
                           <a:latin typeface="Consolas"/>
                         </a:rPr>
-                        <a:t>0.6652</a:t>
+                        <a:t>0.9817</a:t>
                       </a:r>
                     </a:p>
                   </a:txBody>
@@ -23372,7 +23050,7 @@
                           </a:solidFill>
                           <a:latin typeface="Consolas"/>
                         </a:rPr>
-                        <a:t>0.2447</a:t>
+                        <a:t>0.0180</a:t>
                       </a:r>
                     </a:p>
                   </a:txBody>
@@ -23397,7 +23075,7 @@
                           </a:solidFill>
                           <a:latin typeface="Consolas"/>
                         </a:rPr>
-                        <a:t>0.0900</a:t>
+                        <a:t>0.0003</a:t>
                       </a:r>
                     </a:p>
                   </a:txBody>
@@ -23427,7 +23105,7 @@
             <a:avLst/>
           </a:prstGeom>
           <a:solidFill>
-            <a:srgbClr val="DCF0E4"/>
+            <a:srgbClr val="FFF3CD"/>
           </a:solidFill>
           <a:ln>
             <a:solidFill>
@@ -23458,11 +23136,11 @@
             <a:r>
               <a:rPr sz="1800" b="1">
                 <a:solidFill>
-                  <a:srgbClr val="1E7A45"/>
+                  <a:srgbClr val="C03030"/>
                 </a:solidFill>
                 <a:latin typeface="Microsoft JhengHei"/>
               </a:rPr>
-              <a:t>3 和 7 的機率變成 0.2447 與 0.0900。</a:t>
+              <a:t>3 和 7 的機率是 0.0180 與 0.0003。「這個 2 比較像 3、不像 7」的資訊雖然存在，</a:t>
             </a:r>
           </a:p>
           <a:p>
@@ -23470,11 +23148,11 @@
             <a:r>
               <a:rPr sz="1800" b="1">
                 <a:solidFill>
-                  <a:srgbClr val="1E7A45"/>
+                  <a:srgbClr val="C03030"/>
                 </a:solidFill>
                 <a:latin typeface="Microsoft JhengHei"/>
               </a:rPr>
-              <a:t>在這個溫度下，錯誤類別的相對機率大到足以影響學習。</a:t>
+              <a:t>對交叉熵代價函數卻幾乎沒有影響。</a:t>
             </a:r>
           </a:p>
         </p:txBody>
@@ -23508,7 +23186,7 @@
                 </a:solidFill>
                 <a:latin typeface="Microsoft JhengHei"/>
               </a:rPr>
-              <a:t>核對：exp(2) = 7.3891，exp(1) = 2.7183，exp(0) = 1，三者相加 11.1073。</a:t>
+              <a:t>核對：exp(8) = 2980.9580，exp(4) = 54.5982，exp(0) = 1，三者相加 3036.5561。</a:t>
             </a:r>
           </a:p>
         </p:txBody>
@@ -24150,7 +23828,7 @@
                 </a:solidFill>
                 <a:latin typeface="Microsoft JhengHei"/>
               </a:rPr>
-              <a:t>二、軟目標與硬目標</a:t>
+              <a:t>二、帶溫度的 softmax：T = 4</a:t>
             </a:r>
           </a:p>
         </p:txBody>
@@ -24184,14 +23862,14 @@
                 </a:solidFill>
                 <a:latin typeface="Microsoft JhengHei"/>
               </a:rPr>
-              <a:t>同一個 2，兩種溫度</a:t>
+              <a:t>同一組笨重模型的 logit，改用較高的溫度</a:t>
             </a:r>
           </a:p>
         </p:txBody>
       </p:sp>
       <p:pic>
         <p:nvPicPr>
-          <p:cNvPr id="6" name="Picture 5" descr="f_soft.png"/>
+          <p:cNvPr id="6" name="Picture 5" descr="m_softmax.png"/>
           <p:cNvPicPr>
             <a:picLocks noChangeAspect="1"/>
           </p:cNvPicPr>
@@ -24205,335 +23883,24 @@
         </p:blipFill>
         <p:spPr>
           <a:xfrm>
-            <a:off x="548640" y="1051560"/>
-            <a:ext cx="6400800" cy="2578100"/>
+            <a:off x="822960" y="1051560"/>
+            <a:ext cx="1867014" cy="868680"/>
           </a:xfrm>
           <a:prstGeom prst="rect">
             <a:avLst/>
           </a:prstGeom>
         </p:spPr>
       </p:pic>
-      <p:graphicFrame>
-        <p:nvGraphicFramePr>
-          <p:cNvPr id="7" name="Table 6"/>
-          <p:cNvGraphicFramePr>
-            <a:graphicFrameLocks noGrp="1"/>
-          </p:cNvGraphicFramePr>
-          <p:nvPr/>
-        </p:nvGraphicFramePr>
-        <p:xfrm>
-          <a:off x="7223760" y="1143000"/>
-          <a:ext cx="4480558" cy="1316736"/>
-        </p:xfrm>
-        <a:graphic>
-          <a:graphicData uri="http://schemas.openxmlformats.org/drawingml/2006/table">
-            <a:tbl>
-              <a:tblPr bandRow="1">
-                <a:tableStyleId>{5C22544A-7EE6-4342-B048-85BDC9FD1C3A}</a:tableStyleId>
-              </a:tblPr>
-              <a:tblGrid>
-                <a:gridCol w="1650732"/>
-                <a:gridCol w="1414913"/>
-                <a:gridCol w="1414913"/>
-              </a:tblGrid>
-              <a:tr h="329184">
-                <a:tc>
-                  <a:txBody>
-                    <a:bodyPr/>
-                    <a:lstStyle/>
-                    <a:p>
-                      <a:pPr algn="ctr"/>
-                      <a:r>
-                        <a:rPr sz="1700" b="1">
-                          <a:solidFill>
-                            <a:srgbClr val="FFFFFF"/>
-                          </a:solidFill>
-                          <a:latin typeface="Microsoft JhengHei"/>
-                        </a:rPr>
-                        <a:t/>
-                      </a:r>
-                    </a:p>
-                  </a:txBody>
-                  <a:tcPr marL="36576" marR="36576" marT="9144" marB="9144">
-                    <a:solidFill>
-                      <a:srgbClr val="1F4E79"/>
-                    </a:solidFill>
-                  </a:tcPr>
-                </a:tc>
-                <a:tc>
-                  <a:txBody>
-                    <a:bodyPr/>
-                    <a:lstStyle/>
-                    <a:p>
-                      <a:pPr algn="ctr"/>
-                      <a:r>
-                        <a:rPr sz="1700" b="1">
-                          <a:solidFill>
-                            <a:srgbClr val="FFFFFF"/>
-                          </a:solidFill>
-                          <a:latin typeface="Microsoft JhengHei"/>
-                        </a:rPr>
-                        <a:t>T = 1</a:t>
-                      </a:r>
-                    </a:p>
-                  </a:txBody>
-                  <a:tcPr marL="36576" marR="36576" marT="9144" marB="9144">
-                    <a:solidFill>
-                      <a:srgbClr val="1F4E79"/>
-                    </a:solidFill>
-                  </a:tcPr>
-                </a:tc>
-                <a:tc>
-                  <a:txBody>
-                    <a:bodyPr/>
-                    <a:lstStyle/>
-                    <a:p>
-                      <a:pPr algn="ctr"/>
-                      <a:r>
-                        <a:rPr sz="1700" b="1">
-                          <a:solidFill>
-                            <a:srgbClr val="FFFFFF"/>
-                          </a:solidFill>
-                          <a:latin typeface="Microsoft JhengHei"/>
-                        </a:rPr>
-                        <a:t>T = 4</a:t>
-                      </a:r>
-                    </a:p>
-                  </a:txBody>
-                  <a:tcPr marL="36576" marR="36576" marT="9144" marB="9144">
-                    <a:solidFill>
-                      <a:srgbClr val="1F4E79"/>
-                    </a:solidFill>
-                  </a:tcPr>
-                </a:tc>
-              </a:tr>
-              <a:tr h="329184">
-                <a:tc>
-                  <a:txBody>
-                    <a:bodyPr/>
-                    <a:lstStyle/>
-                    <a:p>
-                      <a:pPr algn="ctr"/>
-                      <a:r>
-                        <a:rPr sz="1700" b="0">
-                          <a:solidFill>
-                            <a:srgbClr val="202020"/>
-                          </a:solidFill>
-                          <a:latin typeface="Consolas"/>
-                        </a:rPr>
-                        <a:t>P(3)</a:t>
-                      </a:r>
-                    </a:p>
-                  </a:txBody>
-                  <a:tcPr marL="36576" marR="36576" marT="9144" marB="9144">
-                    <a:solidFill>
-                      <a:srgbClr val="FFFFFF"/>
-                    </a:solidFill>
-                  </a:tcPr>
-                </a:tc>
-                <a:tc>
-                  <a:txBody>
-                    <a:bodyPr/>
-                    <a:lstStyle/>
-                    <a:p>
-                      <a:pPr algn="ctr"/>
-                      <a:r>
-                        <a:rPr sz="1700" b="0">
-                          <a:solidFill>
-                            <a:srgbClr val="202020"/>
-                          </a:solidFill>
-                          <a:latin typeface="Consolas"/>
-                        </a:rPr>
-                        <a:t>0.0180</a:t>
-                      </a:r>
-                    </a:p>
-                  </a:txBody>
-                  <a:tcPr marL="36576" marR="36576" marT="9144" marB="9144">
-                    <a:solidFill>
-                      <a:srgbClr val="FFFFFF"/>
-                    </a:solidFill>
-                  </a:tcPr>
-                </a:tc>
-                <a:tc>
-                  <a:txBody>
-                    <a:bodyPr/>
-                    <a:lstStyle/>
-                    <a:p>
-                      <a:pPr algn="ctr"/>
-                      <a:r>
-                        <a:rPr sz="1700" b="0">
-                          <a:solidFill>
-                            <a:srgbClr val="202020"/>
-                          </a:solidFill>
-                          <a:latin typeface="Consolas"/>
-                        </a:rPr>
-                        <a:t>0.2447</a:t>
-                      </a:r>
-                    </a:p>
-                  </a:txBody>
-                  <a:tcPr marL="36576" marR="36576" marT="9144" marB="9144">
-                    <a:solidFill>
-                      <a:srgbClr val="FFFFFF"/>
-                    </a:solidFill>
-                  </a:tcPr>
-                </a:tc>
-              </a:tr>
-              <a:tr h="329184">
-                <a:tc>
-                  <a:txBody>
-                    <a:bodyPr/>
-                    <a:lstStyle/>
-                    <a:p>
-                      <a:pPr algn="ctr"/>
-                      <a:r>
-                        <a:rPr sz="1700" b="0">
-                          <a:solidFill>
-                            <a:srgbClr val="202020"/>
-                          </a:solidFill>
-                          <a:latin typeface="Consolas"/>
-                        </a:rPr>
-                        <a:t>P(7)</a:t>
-                      </a:r>
-                    </a:p>
-                  </a:txBody>
-                  <a:tcPr marL="36576" marR="36576" marT="9144" marB="9144">
-                    <a:solidFill>
-                      <a:srgbClr val="FFFFFF"/>
-                    </a:solidFill>
-                  </a:tcPr>
-                </a:tc>
-                <a:tc>
-                  <a:txBody>
-                    <a:bodyPr/>
-                    <a:lstStyle/>
-                    <a:p>
-                      <a:pPr algn="ctr"/>
-                      <a:r>
-                        <a:rPr sz="1700" b="0">
-                          <a:solidFill>
-                            <a:srgbClr val="202020"/>
-                          </a:solidFill>
-                          <a:latin typeface="Consolas"/>
-                        </a:rPr>
-                        <a:t>0.0003</a:t>
-                      </a:r>
-                    </a:p>
-                  </a:txBody>
-                  <a:tcPr marL="36576" marR="36576" marT="9144" marB="9144">
-                    <a:solidFill>
-                      <a:srgbClr val="FFFFFF"/>
-                    </a:solidFill>
-                  </a:tcPr>
-                </a:tc>
-                <a:tc>
-                  <a:txBody>
-                    <a:bodyPr/>
-                    <a:lstStyle/>
-                    <a:p>
-                      <a:pPr algn="ctr"/>
-                      <a:r>
-                        <a:rPr sz="1700" b="0">
-                          <a:solidFill>
-                            <a:srgbClr val="202020"/>
-                          </a:solidFill>
-                          <a:latin typeface="Consolas"/>
-                        </a:rPr>
-                        <a:t>0.0900</a:t>
-                      </a:r>
-                    </a:p>
-                  </a:txBody>
-                  <a:tcPr marL="36576" marR="36576" marT="9144" marB="9144">
-                    <a:solidFill>
-                      <a:srgbClr val="FFFFFF"/>
-                    </a:solidFill>
-                  </a:tcPr>
-                </a:tc>
-              </a:tr>
-              <a:tr h="329184">
-                <a:tc>
-                  <a:txBody>
-                    <a:bodyPr/>
-                    <a:lstStyle/>
-                    <a:p>
-                      <a:pPr algn="ctr"/>
-                      <a:r>
-                        <a:rPr sz="1700" b="0">
-                          <a:solidFill>
-                            <a:srgbClr val="202020"/>
-                          </a:solidFill>
-                          <a:latin typeface="Consolas"/>
-                        </a:rPr>
-                        <a:t>P(3) / P(7)</a:t>
-                      </a:r>
-                    </a:p>
-                  </a:txBody>
-                  <a:tcPr marL="36576" marR="36576" marT="9144" marB="9144">
-                    <a:solidFill>
-                      <a:srgbClr val="FFFFFF"/>
-                    </a:solidFill>
-                  </a:tcPr>
-                </a:tc>
-                <a:tc>
-                  <a:txBody>
-                    <a:bodyPr/>
-                    <a:lstStyle/>
-                    <a:p>
-                      <a:pPr algn="ctr"/>
-                      <a:r>
-                        <a:rPr sz="1700" b="0">
-                          <a:solidFill>
-                            <a:srgbClr val="202020"/>
-                          </a:solidFill>
-                          <a:latin typeface="Consolas"/>
-                        </a:rPr>
-                        <a:t>54.60</a:t>
-                      </a:r>
-                    </a:p>
-                  </a:txBody>
-                  <a:tcPr marL="36576" marR="36576" marT="9144" marB="9144">
-                    <a:solidFill>
-                      <a:srgbClr val="FFF3CD"/>
-                    </a:solidFill>
-                  </a:tcPr>
-                </a:tc>
-                <a:tc>
-                  <a:txBody>
-                    <a:bodyPr/>
-                    <a:lstStyle/>
-                    <a:p>
-                      <a:pPr algn="ctr"/>
-                      <a:r>
-                        <a:rPr sz="1700" b="0">
-                          <a:solidFill>
-                            <a:srgbClr val="202020"/>
-                          </a:solidFill>
-                          <a:latin typeface="Consolas"/>
-                        </a:rPr>
-                        <a:t>2.72</a:t>
-                      </a:r>
-                    </a:p>
-                  </a:txBody>
-                  <a:tcPr marL="36576" marR="36576" marT="9144" marB="9144">
-                    <a:solidFill>
-                      <a:srgbClr val="FFF3CD"/>
-                    </a:solidFill>
-                  </a:tcPr>
-                </a:tc>
-              </a:tr>
-            </a:tbl>
-          </a:graphicData>
-        </a:graphic>
-      </p:graphicFrame>
       <p:sp>
         <p:nvSpPr>
-          <p:cNvPr id="8" name="TextBox 7"/>
+          <p:cNvPr id="7" name="TextBox 6"/>
           <p:cNvSpPr txBox="1"/>
           <p:nvPr/>
         </p:nvSpPr>
         <p:spPr>
           <a:xfrm>
-            <a:off x="7223760" y="2606040"/>
-            <a:ext cx="4480560" cy="1097280"/>
+            <a:off x="4754880" y="1097280"/>
+            <a:ext cx="6949440" cy="914400"/>
           </a:xfrm>
           <a:prstGeom prst="rect">
             <a:avLst/>
@@ -24547,38 +23914,730 @@
           <a:lstStyle/>
           <a:p>
             <a:r>
-              <a:rPr sz="1600" b="0">
+              <a:rPr sz="1800" b="0">
                 <a:solidFill>
-                  <a:srgbClr val="59636E"/>
+                  <a:srgbClr val="202020"/>
                 </a:solidFill>
                 <a:latin typeface="Microsoft JhengHei"/>
               </a:rPr>
-              <a:t>比值等於 exp((4 − 0)/T)：</a:t>
+              <a:t>T 取較大的值，類別上的機率分布較軟：</a:t>
             </a:r>
           </a:p>
           <a:p>
             <a:r>
-              <a:rPr sz="1600" b="0">
+              <a:rPr sz="1800" b="0">
                 <a:solidFill>
-                  <a:srgbClr val="59636E"/>
+                  <a:srgbClr val="202020"/>
                 </a:solidFill>
                 <a:latin typeface="Microsoft JhengHei"/>
               </a:rPr>
-              <a:t>T = 1 是 e⁴ = 54.60，T = 4 是 e¹ = 2.72。</a:t>
+              <a:t>第 1 步把 logit 之間的差距縮小為四分之一。</a:t>
             </a:r>
           </a:p>
         </p:txBody>
       </p:sp>
+      <p:graphicFrame>
+        <p:nvGraphicFramePr>
+          <p:cNvPr id="8" name="Table 7"/>
+          <p:cNvGraphicFramePr>
+            <a:graphicFrameLocks noGrp="1"/>
+          </p:cNvGraphicFramePr>
+          <p:nvPr/>
+        </p:nvGraphicFramePr>
+        <p:xfrm>
+          <a:off x="731520" y="2240280"/>
+          <a:ext cx="1188720" cy="1316736"/>
+        </p:xfrm>
+        <a:graphic>
+          <a:graphicData uri="http://schemas.openxmlformats.org/drawingml/2006/table">
+            <a:tbl>
+              <a:tblPr bandRow="1">
+                <a:tableStyleId>{5C22544A-7EE6-4342-B048-85BDC9FD1C3A}</a:tableStyleId>
+              </a:tblPr>
+              <a:tblGrid>
+                <a:gridCol w="1188720"/>
+              </a:tblGrid>
+              <a:tr h="329184">
+                <a:tc>
+                  <a:txBody>
+                    <a:bodyPr/>
+                    <a:lstStyle/>
+                    <a:p>
+                      <a:pPr algn="ctr"/>
+                      <a:r>
+                        <a:rPr sz="1500" b="1">
+                          <a:solidFill>
+                            <a:srgbClr val="FFFFFF"/>
+                          </a:solidFill>
+                          <a:latin typeface="Microsoft JhengHei"/>
+                        </a:rPr>
+                        <a:t>類別</a:t>
+                      </a:r>
+                    </a:p>
+                  </a:txBody>
+                  <a:tcPr marL="36576" marR="36576" marT="9144" marB="9144">
+                    <a:solidFill>
+                      <a:srgbClr val="1F4E79"/>
+                    </a:solidFill>
+                  </a:tcPr>
+                </a:tc>
+              </a:tr>
+              <a:tr h="329184">
+                <a:tc>
+                  <a:txBody>
+                    <a:bodyPr/>
+                    <a:lstStyle/>
+                    <a:p>
+                      <a:pPr algn="ctr"/>
+                      <a:r>
+                        <a:rPr sz="1500" b="0">
+                          <a:solidFill>
+                            <a:srgbClr val="202020"/>
+                          </a:solidFill>
+                          <a:latin typeface="Consolas"/>
+                        </a:rPr>
+                        <a:t>2</a:t>
+                      </a:r>
+                    </a:p>
+                  </a:txBody>
+                  <a:tcPr marL="36576" marR="36576" marT="9144" marB="9144">
+                    <a:solidFill>
+                      <a:srgbClr val="FFFFFF"/>
+                    </a:solidFill>
+                  </a:tcPr>
+                </a:tc>
+              </a:tr>
+              <a:tr h="329184">
+                <a:tc>
+                  <a:txBody>
+                    <a:bodyPr/>
+                    <a:lstStyle/>
+                    <a:p>
+                      <a:pPr algn="ctr"/>
+                      <a:r>
+                        <a:rPr sz="1500" b="0">
+                          <a:solidFill>
+                            <a:srgbClr val="202020"/>
+                          </a:solidFill>
+                          <a:latin typeface="Consolas"/>
+                        </a:rPr>
+                        <a:t>3</a:t>
+                      </a:r>
+                    </a:p>
+                  </a:txBody>
+                  <a:tcPr marL="36576" marR="36576" marT="9144" marB="9144">
+                    <a:solidFill>
+                      <a:srgbClr val="FFFFFF"/>
+                    </a:solidFill>
+                  </a:tcPr>
+                </a:tc>
+              </a:tr>
+              <a:tr h="329184">
+                <a:tc>
+                  <a:txBody>
+                    <a:bodyPr/>
+                    <a:lstStyle/>
+                    <a:p>
+                      <a:pPr algn="ctr"/>
+                      <a:r>
+                        <a:rPr sz="1500" b="0">
+                          <a:solidFill>
+                            <a:srgbClr val="202020"/>
+                          </a:solidFill>
+                          <a:latin typeface="Consolas"/>
+                        </a:rPr>
+                        <a:t>7</a:t>
+                      </a:r>
+                    </a:p>
+                  </a:txBody>
+                  <a:tcPr marL="36576" marR="36576" marT="9144" marB="9144">
+                    <a:solidFill>
+                      <a:srgbClr val="FFFFFF"/>
+                    </a:solidFill>
+                  </a:tcPr>
+                </a:tc>
+              </a:tr>
+            </a:tbl>
+          </a:graphicData>
+        </a:graphic>
+      </p:graphicFrame>
+      <p:graphicFrame>
+        <p:nvGraphicFramePr>
+          <p:cNvPr id="9" name="Table 8"/>
+          <p:cNvGraphicFramePr>
+            <a:graphicFrameLocks noGrp="1"/>
+          </p:cNvGraphicFramePr>
+          <p:nvPr/>
+        </p:nvGraphicFramePr>
+        <p:xfrm>
+          <a:off x="2057400" y="2240280"/>
+          <a:ext cx="1463040" cy="1316736"/>
+        </p:xfrm>
+        <a:graphic>
+          <a:graphicData uri="http://schemas.openxmlformats.org/drawingml/2006/table">
+            <a:tbl>
+              <a:tblPr bandRow="1">
+                <a:tableStyleId>{5C22544A-7EE6-4342-B048-85BDC9FD1C3A}</a:tableStyleId>
+              </a:tblPr>
+              <a:tblGrid>
+                <a:gridCol w="1463040"/>
+              </a:tblGrid>
+              <a:tr h="329184">
+                <a:tc>
+                  <a:txBody>
+                    <a:bodyPr/>
+                    <a:lstStyle/>
+                    <a:p>
+                      <a:pPr algn="ctr"/>
+                      <a:r>
+                        <a:rPr sz="1500" b="1">
+                          <a:solidFill>
+                            <a:srgbClr val="FFFFFF"/>
+                          </a:solidFill>
+                          <a:latin typeface="Microsoft JhengHei"/>
+                        </a:rPr>
+                        <a:t>v</a:t>
+                      </a:r>
+                    </a:p>
+                  </a:txBody>
+                  <a:tcPr marL="36576" marR="36576" marT="9144" marB="9144">
+                    <a:solidFill>
+                      <a:srgbClr val="1F4E79"/>
+                    </a:solidFill>
+                  </a:tcPr>
+                </a:tc>
+              </a:tr>
+              <a:tr h="329184">
+                <a:tc>
+                  <a:txBody>
+                    <a:bodyPr/>
+                    <a:lstStyle/>
+                    <a:p>
+                      <a:pPr algn="ctr"/>
+                      <a:r>
+                        <a:rPr sz="1500" b="0">
+                          <a:solidFill>
+                            <a:srgbClr val="202020"/>
+                          </a:solidFill>
+                          <a:latin typeface="Consolas"/>
+                        </a:rPr>
+                        <a:t>8</a:t>
+                      </a:r>
+                    </a:p>
+                  </a:txBody>
+                  <a:tcPr marL="36576" marR="36576" marT="9144" marB="9144">
+                    <a:solidFill>
+                      <a:srgbClr val="FFFFFF"/>
+                    </a:solidFill>
+                  </a:tcPr>
+                </a:tc>
+              </a:tr>
+              <a:tr h="329184">
+                <a:tc>
+                  <a:txBody>
+                    <a:bodyPr/>
+                    <a:lstStyle/>
+                    <a:p>
+                      <a:pPr algn="ctr"/>
+                      <a:r>
+                        <a:rPr sz="1500" b="0">
+                          <a:solidFill>
+                            <a:srgbClr val="202020"/>
+                          </a:solidFill>
+                          <a:latin typeface="Consolas"/>
+                        </a:rPr>
+                        <a:t>4</a:t>
+                      </a:r>
+                    </a:p>
+                  </a:txBody>
+                  <a:tcPr marL="36576" marR="36576" marT="9144" marB="9144">
+                    <a:solidFill>
+                      <a:srgbClr val="FFFFFF"/>
+                    </a:solidFill>
+                  </a:tcPr>
+                </a:tc>
+              </a:tr>
+              <a:tr h="329184">
+                <a:tc>
+                  <a:txBody>
+                    <a:bodyPr/>
+                    <a:lstStyle/>
+                    <a:p>
+                      <a:pPr algn="ctr"/>
+                      <a:r>
+                        <a:rPr sz="1500" b="0">
+                          <a:solidFill>
+                            <a:srgbClr val="202020"/>
+                          </a:solidFill>
+                          <a:latin typeface="Consolas"/>
+                        </a:rPr>
+                        <a:t>0</a:t>
+                      </a:r>
+                    </a:p>
+                  </a:txBody>
+                  <a:tcPr marL="36576" marR="36576" marT="9144" marB="9144">
+                    <a:solidFill>
+                      <a:srgbClr val="FFFFFF"/>
+                    </a:solidFill>
+                  </a:tcPr>
+                </a:tc>
+              </a:tr>
+            </a:tbl>
+          </a:graphicData>
+        </a:graphic>
+      </p:graphicFrame>
+      <p:graphicFrame>
+        <p:nvGraphicFramePr>
+          <p:cNvPr id="10" name="Table 9"/>
+          <p:cNvGraphicFramePr>
+            <a:graphicFrameLocks noGrp="1"/>
+          </p:cNvGraphicFramePr>
+          <p:nvPr/>
+        </p:nvGraphicFramePr>
+        <p:xfrm>
+          <a:off x="3657600" y="2240280"/>
+          <a:ext cx="1965960" cy="1316736"/>
+        </p:xfrm>
+        <a:graphic>
+          <a:graphicData uri="http://schemas.openxmlformats.org/drawingml/2006/table">
+            <a:tbl>
+              <a:tblPr bandRow="1">
+                <a:tableStyleId>{5C22544A-7EE6-4342-B048-85BDC9FD1C3A}</a:tableStyleId>
+              </a:tblPr>
+              <a:tblGrid>
+                <a:gridCol w="1965960"/>
+              </a:tblGrid>
+              <a:tr h="329184">
+                <a:tc>
+                  <a:txBody>
+                    <a:bodyPr/>
+                    <a:lstStyle/>
+                    <a:p>
+                      <a:pPr algn="ctr"/>
+                      <a:r>
+                        <a:rPr sz="1500" b="1">
+                          <a:solidFill>
+                            <a:srgbClr val="FFFFFF"/>
+                          </a:solidFill>
+                          <a:latin typeface="Microsoft JhengHei"/>
+                        </a:rPr>
+                        <a:t>第 1 步 ÷ T</a:t>
+                      </a:r>
+                    </a:p>
+                  </a:txBody>
+                  <a:tcPr marL="36576" marR="36576" marT="9144" marB="9144">
+                    <a:solidFill>
+                      <a:srgbClr val="1F4E79"/>
+                    </a:solidFill>
+                  </a:tcPr>
+                </a:tc>
+              </a:tr>
+              <a:tr h="329184">
+                <a:tc>
+                  <a:txBody>
+                    <a:bodyPr/>
+                    <a:lstStyle/>
+                    <a:p>
+                      <a:pPr algn="ctr"/>
+                      <a:r>
+                        <a:rPr sz="1500" b="0">
+                          <a:solidFill>
+                            <a:srgbClr val="202020"/>
+                          </a:solidFill>
+                          <a:latin typeface="Consolas"/>
+                        </a:rPr>
+                        <a:t>2.0000</a:t>
+                      </a:r>
+                    </a:p>
+                  </a:txBody>
+                  <a:tcPr marL="36576" marR="36576" marT="9144" marB="9144">
+                    <a:solidFill>
+                      <a:srgbClr val="FFFFFF"/>
+                    </a:solidFill>
+                  </a:tcPr>
+                </a:tc>
+              </a:tr>
+              <a:tr h="329184">
+                <a:tc>
+                  <a:txBody>
+                    <a:bodyPr/>
+                    <a:lstStyle/>
+                    <a:p>
+                      <a:pPr algn="ctr"/>
+                      <a:r>
+                        <a:rPr sz="1500" b="0">
+                          <a:solidFill>
+                            <a:srgbClr val="202020"/>
+                          </a:solidFill>
+                          <a:latin typeface="Consolas"/>
+                        </a:rPr>
+                        <a:t>1.0000</a:t>
+                      </a:r>
+                    </a:p>
+                  </a:txBody>
+                  <a:tcPr marL="36576" marR="36576" marT="9144" marB="9144">
+                    <a:solidFill>
+                      <a:srgbClr val="FFFFFF"/>
+                    </a:solidFill>
+                  </a:tcPr>
+                </a:tc>
+              </a:tr>
+              <a:tr h="329184">
+                <a:tc>
+                  <a:txBody>
+                    <a:bodyPr/>
+                    <a:lstStyle/>
+                    <a:p>
+                      <a:pPr algn="ctr"/>
+                      <a:r>
+                        <a:rPr sz="1500" b="0">
+                          <a:solidFill>
+                            <a:srgbClr val="202020"/>
+                          </a:solidFill>
+                          <a:latin typeface="Consolas"/>
+                        </a:rPr>
+                        <a:t>0.0000</a:t>
+                      </a:r>
+                    </a:p>
+                  </a:txBody>
+                  <a:tcPr marL="36576" marR="36576" marT="9144" marB="9144">
+                    <a:solidFill>
+                      <a:srgbClr val="FFFFFF"/>
+                    </a:solidFill>
+                  </a:tcPr>
+                </a:tc>
+              </a:tr>
+            </a:tbl>
+          </a:graphicData>
+        </a:graphic>
+      </p:graphicFrame>
+      <p:graphicFrame>
+        <p:nvGraphicFramePr>
+          <p:cNvPr id="11" name="Table 10"/>
+          <p:cNvGraphicFramePr>
+            <a:graphicFrameLocks noGrp="1"/>
+          </p:cNvGraphicFramePr>
+          <p:nvPr/>
+        </p:nvGraphicFramePr>
+        <p:xfrm>
+          <a:off x="5760720" y="2240280"/>
+          <a:ext cx="2240279" cy="1316736"/>
+        </p:xfrm>
+        <a:graphic>
+          <a:graphicData uri="http://schemas.openxmlformats.org/drawingml/2006/table">
+            <a:tbl>
+              <a:tblPr bandRow="1">
+                <a:tableStyleId>{5C22544A-7EE6-4342-B048-85BDC9FD1C3A}</a:tableStyleId>
+              </a:tblPr>
+              <a:tblGrid>
+                <a:gridCol w="2240279"/>
+              </a:tblGrid>
+              <a:tr h="329184">
+                <a:tc>
+                  <a:txBody>
+                    <a:bodyPr/>
+                    <a:lstStyle/>
+                    <a:p>
+                      <a:pPr algn="ctr"/>
+                      <a:r>
+                        <a:rPr sz="1500" b="1">
+                          <a:solidFill>
+                            <a:srgbClr val="FFFFFF"/>
+                          </a:solidFill>
+                          <a:latin typeface="Microsoft JhengHei"/>
+                        </a:rPr>
+                        <a:t>第 2 步 exp</a:t>
+                      </a:r>
+                    </a:p>
+                  </a:txBody>
+                  <a:tcPr marL="36576" marR="36576" marT="9144" marB="9144">
+                    <a:solidFill>
+                      <a:srgbClr val="1F4E79"/>
+                    </a:solidFill>
+                  </a:tcPr>
+                </a:tc>
+              </a:tr>
+              <a:tr h="329184">
+                <a:tc>
+                  <a:txBody>
+                    <a:bodyPr/>
+                    <a:lstStyle/>
+                    <a:p>
+                      <a:pPr algn="ctr"/>
+                      <a:r>
+                        <a:rPr sz="1500" b="0">
+                          <a:solidFill>
+                            <a:srgbClr val="202020"/>
+                          </a:solidFill>
+                          <a:latin typeface="Consolas"/>
+                        </a:rPr>
+                        <a:t>7.3891</a:t>
+                      </a:r>
+                    </a:p>
+                  </a:txBody>
+                  <a:tcPr marL="36576" marR="36576" marT="9144" marB="9144">
+                    <a:solidFill>
+                      <a:srgbClr val="FFFFFF"/>
+                    </a:solidFill>
+                  </a:tcPr>
+                </a:tc>
+              </a:tr>
+              <a:tr h="329184">
+                <a:tc>
+                  <a:txBody>
+                    <a:bodyPr/>
+                    <a:lstStyle/>
+                    <a:p>
+                      <a:pPr algn="ctr"/>
+                      <a:r>
+                        <a:rPr sz="1500" b="0">
+                          <a:solidFill>
+                            <a:srgbClr val="202020"/>
+                          </a:solidFill>
+                          <a:latin typeface="Consolas"/>
+                        </a:rPr>
+                        <a:t>2.7183</a:t>
+                      </a:r>
+                    </a:p>
+                  </a:txBody>
+                  <a:tcPr marL="36576" marR="36576" marT="9144" marB="9144">
+                    <a:solidFill>
+                      <a:srgbClr val="FFFFFF"/>
+                    </a:solidFill>
+                  </a:tcPr>
+                </a:tc>
+              </a:tr>
+              <a:tr h="329184">
+                <a:tc>
+                  <a:txBody>
+                    <a:bodyPr/>
+                    <a:lstStyle/>
+                    <a:p>
+                      <a:pPr algn="ctr"/>
+                      <a:r>
+                        <a:rPr sz="1500" b="0">
+                          <a:solidFill>
+                            <a:srgbClr val="202020"/>
+                          </a:solidFill>
+                          <a:latin typeface="Consolas"/>
+                        </a:rPr>
+                        <a:t>1.0000</a:t>
+                      </a:r>
+                    </a:p>
+                  </a:txBody>
+                  <a:tcPr marL="36576" marR="36576" marT="9144" marB="9144">
+                    <a:solidFill>
+                      <a:srgbClr val="FFFFFF"/>
+                    </a:solidFill>
+                  </a:tcPr>
+                </a:tc>
+              </a:tr>
+            </a:tbl>
+          </a:graphicData>
+        </a:graphic>
+      </p:graphicFrame>
       <p:sp>
         <p:nvSpPr>
-          <p:cNvPr id="9" name="Rectangle 8"/>
+          <p:cNvPr id="12" name="Rectangle 11"/>
           <p:cNvSpPr/>
           <p:nvPr/>
         </p:nvSpPr>
         <p:spPr>
           <a:xfrm>
-            <a:off x="731520" y="3977639"/>
-            <a:ext cx="10881360" cy="731520"/>
+            <a:off x="8138160" y="2240280"/>
+            <a:ext cx="1737360" cy="1316736"/>
+          </a:xfrm>
+          <a:prstGeom prst="rect">
+            <a:avLst/>
+          </a:prstGeom>
+          <a:solidFill>
+            <a:srgbClr val="DAE6F2"/>
+          </a:solidFill>
+          <a:ln>
+            <a:solidFill>
+              <a:srgbClr val="D0D7DE"/>
+            </a:solidFill>
+          </a:ln>
+          <a:effectLst/>
+        </p:spPr>
+        <p:style>
+          <a:lnRef idx="1">
+            <a:schemeClr val="accent1"/>
+          </a:lnRef>
+          <a:fillRef idx="3">
+            <a:schemeClr val="accent1"/>
+          </a:fillRef>
+          <a:effectRef idx="2">
+            <a:schemeClr val="accent1"/>
+          </a:effectRef>
+          <a:fontRef idx="minor">
+            <a:schemeClr val="lt1"/>
+          </a:fontRef>
+        </p:style>
+        <p:txBody>
+          <a:bodyPr rtlCol="0" anchor="ctr" wrap="square"/>
+          <a:lstStyle/>
+          <a:p>
+            <a:pPr algn="ctr"/>
+            <a:r>
+              <a:rPr sz="1700" b="1">
+                <a:solidFill>
+                  <a:srgbClr val="1F4E79"/>
+                </a:solidFill>
+                <a:latin typeface="Microsoft JhengHei"/>
+              </a:rPr>
+              <a:t>第 3 步 加總</a:t>
+            </a:r>
+          </a:p>
+          <a:p>
+            <a:pPr algn="ctr"/>
+            <a:r>
+              <a:rPr sz="1700" b="1">
+                <a:solidFill>
+                  <a:srgbClr val="1F4E79"/>
+                </a:solidFill>
+                <a:latin typeface="Microsoft JhengHei"/>
+              </a:rPr>
+              <a:t>11.1073</a:t>
+            </a:r>
+          </a:p>
+        </p:txBody>
+      </p:sp>
+      <p:graphicFrame>
+        <p:nvGraphicFramePr>
+          <p:cNvPr id="13" name="Table 12"/>
+          <p:cNvGraphicFramePr>
+            <a:graphicFrameLocks noGrp="1"/>
+          </p:cNvGraphicFramePr>
+          <p:nvPr/>
+        </p:nvGraphicFramePr>
+        <p:xfrm>
+          <a:off x="10012680" y="2240280"/>
+          <a:ext cx="1783080" cy="1316736"/>
+        </p:xfrm>
+        <a:graphic>
+          <a:graphicData uri="http://schemas.openxmlformats.org/drawingml/2006/table">
+            <a:tbl>
+              <a:tblPr bandRow="1">
+                <a:tableStyleId>{5C22544A-7EE6-4342-B048-85BDC9FD1C3A}</a:tableStyleId>
+              </a:tblPr>
+              <a:tblGrid>
+                <a:gridCol w="1783080"/>
+              </a:tblGrid>
+              <a:tr h="329184">
+                <a:tc>
+                  <a:txBody>
+                    <a:bodyPr/>
+                    <a:lstStyle/>
+                    <a:p>
+                      <a:pPr algn="ctr"/>
+                      <a:r>
+                        <a:rPr sz="1500" b="1">
+                          <a:solidFill>
+                            <a:srgbClr val="FFFFFF"/>
+                          </a:solidFill>
+                          <a:latin typeface="Microsoft JhengHei"/>
+                        </a:rPr>
+                        <a:t>第 4 步 p</a:t>
+                      </a:r>
+                    </a:p>
+                  </a:txBody>
+                  <a:tcPr marL="36576" marR="36576" marT="9144" marB="9144">
+                    <a:solidFill>
+                      <a:srgbClr val="1F4E79"/>
+                    </a:solidFill>
+                  </a:tcPr>
+                </a:tc>
+              </a:tr>
+              <a:tr h="329184">
+                <a:tc>
+                  <a:txBody>
+                    <a:bodyPr/>
+                    <a:lstStyle/>
+                    <a:p>
+                      <a:pPr algn="ctr"/>
+                      <a:r>
+                        <a:rPr sz="1500" b="0">
+                          <a:solidFill>
+                            <a:srgbClr val="202020"/>
+                          </a:solidFill>
+                          <a:latin typeface="Consolas"/>
+                        </a:rPr>
+                        <a:t>0.6652</a:t>
+                      </a:r>
+                    </a:p>
+                  </a:txBody>
+                  <a:tcPr marL="36576" marR="36576" marT="9144" marB="9144">
+                    <a:solidFill>
+                      <a:srgbClr val="FFFFFF"/>
+                    </a:solidFill>
+                  </a:tcPr>
+                </a:tc>
+              </a:tr>
+              <a:tr h="329184">
+                <a:tc>
+                  <a:txBody>
+                    <a:bodyPr/>
+                    <a:lstStyle/>
+                    <a:p>
+                      <a:pPr algn="ctr"/>
+                      <a:r>
+                        <a:rPr sz="1500" b="0">
+                          <a:solidFill>
+                            <a:srgbClr val="202020"/>
+                          </a:solidFill>
+                          <a:latin typeface="Consolas"/>
+                        </a:rPr>
+                        <a:t>0.2447</a:t>
+                      </a:r>
+                    </a:p>
+                  </a:txBody>
+                  <a:tcPr marL="36576" marR="36576" marT="9144" marB="9144">
+                    <a:solidFill>
+                      <a:srgbClr val="FFF3CD"/>
+                    </a:solidFill>
+                  </a:tcPr>
+                </a:tc>
+              </a:tr>
+              <a:tr h="329184">
+                <a:tc>
+                  <a:txBody>
+                    <a:bodyPr/>
+                    <a:lstStyle/>
+                    <a:p>
+                      <a:pPr algn="ctr"/>
+                      <a:r>
+                        <a:rPr sz="1500" b="0">
+                          <a:solidFill>
+                            <a:srgbClr val="202020"/>
+                          </a:solidFill>
+                          <a:latin typeface="Consolas"/>
+                        </a:rPr>
+                        <a:t>0.0900</a:t>
+                      </a:r>
+                    </a:p>
+                  </a:txBody>
+                  <a:tcPr marL="36576" marR="36576" marT="9144" marB="9144">
+                    <a:solidFill>
+                      <a:srgbClr val="FFF3CD"/>
+                    </a:solidFill>
+                  </a:tcPr>
+                </a:tc>
+              </a:tr>
+            </a:tbl>
+          </a:graphicData>
+        </a:graphic>
+      </p:graphicFrame>
+      <p:sp>
+        <p:nvSpPr>
+          <p:cNvPr id="14" name="Rectangle 13"/>
+          <p:cNvSpPr/>
+          <p:nvPr/>
+        </p:nvSpPr>
+        <p:spPr>
+          <a:xfrm>
+            <a:off x="731520" y="3931920"/>
+            <a:ext cx="10881360" cy="1051560"/>
           </a:xfrm>
           <a:prstGeom prst="rect">
             <a:avLst/>
@@ -24613,908 +24672,38 @@
           <a:p>
             <a:pPr algn="l"/>
             <a:r>
-              <a:rPr sz="1900" b="1">
+              <a:rPr sz="1800" b="1">
                 <a:solidFill>
                   <a:srgbClr val="1E7A45"/>
                 </a:solidFill>
                 <a:latin typeface="Microsoft JhengHei"/>
               </a:rPr>
-              <a:t>軟目標：笨重模型在高溫下產生的類別機率，例如 (0.6652, 0.2447, 0.0900)</a:t>
+              <a:t>3 和 7 的機率變成 0.2447 與 0.0900。</a:t>
+            </a:r>
+          </a:p>
+          <a:p>
+            <a:pPr algn="l"/>
+            <a:r>
+              <a:rPr sz="1800" b="1">
+                <a:solidFill>
+                  <a:srgbClr val="1E7A45"/>
+                </a:solidFill>
+                <a:latin typeface="Microsoft JhengHei"/>
+              </a:rPr>
+              <a:t>在這個溫度下，錯誤類別的相對機率大到足以影響學習。</a:t>
             </a:r>
           </a:p>
         </p:txBody>
       </p:sp>
       <p:sp>
         <p:nvSpPr>
-          <p:cNvPr id="10" name="Rectangle 9"/>
-          <p:cNvSpPr/>
-          <p:nvPr/>
-        </p:nvSpPr>
-        <p:spPr>
-          <a:xfrm>
-            <a:off x="731520" y="4800600"/>
-            <a:ext cx="10881360" cy="731520"/>
-          </a:xfrm>
-          <a:prstGeom prst="rect">
-            <a:avLst/>
-          </a:prstGeom>
-          <a:solidFill>
-            <a:srgbClr val="F6F8FA"/>
-          </a:solidFill>
-          <a:ln>
-            <a:solidFill>
-              <a:srgbClr val="D0D7DE"/>
-            </a:solidFill>
-          </a:ln>
-          <a:effectLst/>
-        </p:spPr>
-        <p:style>
-          <a:lnRef idx="1">
-            <a:schemeClr val="accent1"/>
-          </a:lnRef>
-          <a:fillRef idx="3">
-            <a:schemeClr val="accent1"/>
-          </a:fillRef>
-          <a:effectRef idx="2">
-            <a:schemeClr val="accent1"/>
-          </a:effectRef>
-          <a:fontRef idx="minor">
-            <a:schemeClr val="lt1"/>
-          </a:fontRef>
-        </p:style>
-        <p:txBody>
-          <a:bodyPr rtlCol="0" anchor="ctr" wrap="square"/>
-          <a:lstStyle/>
-          <a:p>
-            <a:pPr algn="l"/>
-            <a:r>
-              <a:rPr sz="1900" b="1">
-                <a:solidFill>
-                  <a:srgbClr val="1F4E79"/>
-                </a:solidFill>
-                <a:latin typeface="Microsoft JhengHei"/>
-              </a:rPr>
-              <a:t>硬目標：正確標籤，此例為 (1, 0, 0)</a:t>
-            </a:r>
-          </a:p>
-        </p:txBody>
-      </p:sp>
-      <p:sp>
-        <p:nvSpPr>
-          <p:cNvPr id="11" name="TextBox 10"/>
+          <p:cNvPr id="15" name="TextBox 14"/>
           <p:cNvSpPr txBox="1"/>
           <p:nvPr/>
         </p:nvSpPr>
         <p:spPr>
           <a:xfrm>
-            <a:off x="731520" y="5669280"/>
-            <a:ext cx="10881360" cy="822960"/>
-          </a:xfrm>
-          <a:prstGeom prst="rect">
-            <a:avLst/>
-          </a:prstGeom>
-          <a:noFill/>
-        </p:spPr>
-        <p:txBody>
-          <a:bodyPr wrap="square">
-            <a:spAutoFit/>
-          </a:bodyPr>
-          <a:lstStyle/>
-          <a:p>
-            <a:r>
-              <a:rPr sz="1600" b="0">
-                <a:solidFill>
-                  <a:srgbClr val="202020"/>
-                </a:solidFill>
-                <a:latin typeface="Microsoft JhengHei"/>
-              </a:rPr>
-              <a:t>軟目標的熵較高時，每個訓練樣本提供的資訊比硬目標多得多，訓練樣本之間的梯度變異也小得多；</a:t>
-            </a:r>
-          </a:p>
-          <a:p>
-            <a:r>
-              <a:rPr sz="1600" b="0">
-                <a:solidFill>
-                  <a:srgbClr val="202020"/>
-                </a:solidFill>
-                <a:latin typeface="Microsoft JhengHei"/>
-              </a:rPr>
-              <a:t>因此小模型常可用比笨重模型少得多的資料、高得多的學習率訓練。</a:t>
-            </a:r>
-          </a:p>
-        </p:txBody>
-      </p:sp>
-    </p:spTree>
-  </p:cSld>
-  <p:clrMapOvr>
-    <a:masterClrMapping/>
-  </p:clrMapOvr>
-  <p:timing>
-    <p:tnLst>
-      <p:par>
-        <p:cTn id="1" dur="indefinite" restart="never" nodeType="tmRoot">
-          <p:childTnLst>
-            <p:seq concurrent="1" nextAc="seek">
-              <p:cTn id="2" dur="indefinite" nodeType="mainSeq">
-                <p:childTnLst>
-                  <p:par>
-                    <p:cTn id="3" fill="hold">
-                      <p:stCondLst>
-                        <p:cond delay="indefinite"/>
-                      </p:stCondLst>
-                      <p:childTnLst>
-                        <p:par>
-                          <p:cTn id="4" fill="hold">
-                            <p:stCondLst>
-                              <p:cond delay="0"/>
-                            </p:stCondLst>
-                            <p:childTnLst>
-                              <p:par>
-                                <p:cTn id="5" presetID="1" presetClass="entr" presetSubtype="0" fill="hold" grpId="0" nodeType="clickEffect">
-                                  <p:stCondLst>
-                                    <p:cond delay="0"/>
-                                  </p:stCondLst>
-                                  <p:childTnLst>
-                                    <p:set>
-                                      <p:cBhvr>
-                                        <p:cTn id="6" dur="1" fill="hold">
-                                          <p:stCondLst>
-                                            <p:cond delay="0"/>
-                                          </p:stCondLst>
-                                        </p:cTn>
-                                        <p:tgtEl>
-                                          <p:spTgt spid="6"/>
-                                        </p:tgtEl>
-                                        <p:attrNameLst>
-                                          <p:attrName>style.visibility</p:attrName>
-                                        </p:attrNameLst>
-                                      </p:cBhvr>
-                                      <p:to>
-                                        <p:strVal val="visible"/>
-                                      </p:to>
-                                    </p:set>
-                                  </p:childTnLst>
-                                </p:cTn>
-                              </p:par>
-                            </p:childTnLst>
-                          </p:cTn>
-                        </p:par>
-                      </p:childTnLst>
-                    </p:cTn>
-                  </p:par>
-                  <p:par>
-                    <p:cTn id="7" fill="hold">
-                      <p:stCondLst>
-                        <p:cond delay="indefinite"/>
-                      </p:stCondLst>
-                      <p:childTnLst>
-                        <p:par>
-                          <p:cTn id="8" fill="hold">
-                            <p:stCondLst>
-                              <p:cond delay="0"/>
-                            </p:stCondLst>
-                            <p:childTnLst>
-                              <p:par>
-                                <p:cTn id="9" presetID="1" presetClass="entr" presetSubtype="0" fill="hold" grpId="0" nodeType="clickEffect">
-                                  <p:stCondLst>
-                                    <p:cond delay="0"/>
-                                  </p:stCondLst>
-                                  <p:childTnLst>
-                                    <p:set>
-                                      <p:cBhvr>
-                                        <p:cTn id="10" dur="1" fill="hold">
-                                          <p:stCondLst>
-                                            <p:cond delay="0"/>
-                                          </p:stCondLst>
-                                        </p:cTn>
-                                        <p:tgtEl>
-                                          <p:spTgt spid="7"/>
-                                        </p:tgtEl>
-                                        <p:attrNameLst>
-                                          <p:attrName>style.visibility</p:attrName>
-                                        </p:attrNameLst>
-                                      </p:cBhvr>
-                                      <p:to>
-                                        <p:strVal val="visible"/>
-                                      </p:to>
-                                    </p:set>
-                                  </p:childTnLst>
-                                </p:cTn>
-                              </p:par>
-                            </p:childTnLst>
-                          </p:cTn>
-                        </p:par>
-                      </p:childTnLst>
-                    </p:cTn>
-                  </p:par>
-                  <p:par>
-                    <p:cTn id="11" fill="hold">
-                      <p:stCondLst>
-                        <p:cond delay="indefinite"/>
-                      </p:stCondLst>
-                      <p:childTnLst>
-                        <p:par>
-                          <p:cTn id="12" fill="hold">
-                            <p:stCondLst>
-                              <p:cond delay="0"/>
-                            </p:stCondLst>
-                            <p:childTnLst>
-                              <p:par>
-                                <p:cTn id="13" presetID="1" presetClass="entr" presetSubtype="0" fill="hold" grpId="0" nodeType="clickEffect">
-                                  <p:stCondLst>
-                                    <p:cond delay="0"/>
-                                  </p:stCondLst>
-                                  <p:childTnLst>
-                                    <p:set>
-                                      <p:cBhvr>
-                                        <p:cTn id="14" dur="1" fill="hold">
-                                          <p:stCondLst>
-                                            <p:cond delay="0"/>
-                                          </p:stCondLst>
-                                        </p:cTn>
-                                        <p:tgtEl>
-                                          <p:spTgt spid="8"/>
-                                        </p:tgtEl>
-                                        <p:attrNameLst>
-                                          <p:attrName>style.visibility</p:attrName>
-                                        </p:attrNameLst>
-                                      </p:cBhvr>
-                                      <p:to>
-                                        <p:strVal val="visible"/>
-                                      </p:to>
-                                    </p:set>
-                                  </p:childTnLst>
-                                </p:cTn>
-                              </p:par>
-                            </p:childTnLst>
-                          </p:cTn>
-                        </p:par>
-                      </p:childTnLst>
-                    </p:cTn>
-                  </p:par>
-                  <p:par>
-                    <p:cTn id="15" fill="hold">
-                      <p:stCondLst>
-                        <p:cond delay="indefinite"/>
-                      </p:stCondLst>
-                      <p:childTnLst>
-                        <p:par>
-                          <p:cTn id="16" fill="hold">
-                            <p:stCondLst>
-                              <p:cond delay="0"/>
-                            </p:stCondLst>
-                            <p:childTnLst>
-                              <p:par>
-                                <p:cTn id="17" presetID="1" presetClass="entr" presetSubtype="0" fill="hold" grpId="0" nodeType="clickEffect">
-                                  <p:stCondLst>
-                                    <p:cond delay="0"/>
-                                  </p:stCondLst>
-                                  <p:childTnLst>
-                                    <p:set>
-                                      <p:cBhvr>
-                                        <p:cTn id="18" dur="1" fill="hold">
-                                          <p:stCondLst>
-                                            <p:cond delay="0"/>
-                                          </p:stCondLst>
-                                        </p:cTn>
-                                        <p:tgtEl>
-                                          <p:spTgt spid="9"/>
-                                        </p:tgtEl>
-                                        <p:attrNameLst>
-                                          <p:attrName>style.visibility</p:attrName>
-                                        </p:attrNameLst>
-                                      </p:cBhvr>
-                                      <p:to>
-                                        <p:strVal val="visible"/>
-                                      </p:to>
-                                    </p:set>
-                                  </p:childTnLst>
-                                </p:cTn>
-                              </p:par>
-                            </p:childTnLst>
-                          </p:cTn>
-                        </p:par>
-                      </p:childTnLst>
-                    </p:cTn>
-                  </p:par>
-                  <p:par>
-                    <p:cTn id="19" fill="hold">
-                      <p:stCondLst>
-                        <p:cond delay="indefinite"/>
-                      </p:stCondLst>
-                      <p:childTnLst>
-                        <p:par>
-                          <p:cTn id="20" fill="hold">
-                            <p:stCondLst>
-                              <p:cond delay="0"/>
-                            </p:stCondLst>
-                            <p:childTnLst>
-                              <p:par>
-                                <p:cTn id="21" presetID="1" presetClass="entr" presetSubtype="0" fill="hold" grpId="0" nodeType="clickEffect">
-                                  <p:stCondLst>
-                                    <p:cond delay="0"/>
-                                  </p:stCondLst>
-                                  <p:childTnLst>
-                                    <p:set>
-                                      <p:cBhvr>
-                                        <p:cTn id="22" dur="1" fill="hold">
-                                          <p:stCondLst>
-                                            <p:cond delay="0"/>
-                                          </p:stCondLst>
-                                        </p:cTn>
-                                        <p:tgtEl>
-                                          <p:spTgt spid="10"/>
-                                        </p:tgtEl>
-                                        <p:attrNameLst>
-                                          <p:attrName>style.visibility</p:attrName>
-                                        </p:attrNameLst>
-                                      </p:cBhvr>
-                                      <p:to>
-                                        <p:strVal val="visible"/>
-                                      </p:to>
-                                    </p:set>
-                                  </p:childTnLst>
-                                </p:cTn>
-                              </p:par>
-                            </p:childTnLst>
-                          </p:cTn>
-                        </p:par>
-                      </p:childTnLst>
-                    </p:cTn>
-                  </p:par>
-                  <p:par>
-                    <p:cTn id="23" fill="hold">
-                      <p:stCondLst>
-                        <p:cond delay="indefinite"/>
-                      </p:stCondLst>
-                      <p:childTnLst>
-                        <p:par>
-                          <p:cTn id="24" fill="hold">
-                            <p:stCondLst>
-                              <p:cond delay="0"/>
-                            </p:stCondLst>
-                            <p:childTnLst>
-                              <p:par>
-                                <p:cTn id="25" presetID="1" presetClass="entr" presetSubtype="0" fill="hold" grpId="0" nodeType="clickEffect">
-                                  <p:stCondLst>
-                                    <p:cond delay="0"/>
-                                  </p:stCondLst>
-                                  <p:childTnLst>
-                                    <p:set>
-                                      <p:cBhvr>
-                                        <p:cTn id="26" dur="1" fill="hold">
-                                          <p:stCondLst>
-                                            <p:cond delay="0"/>
-                                          </p:stCondLst>
-                                        </p:cTn>
-                                        <p:tgtEl>
-                                          <p:spTgt spid="11"/>
-                                        </p:tgtEl>
-                                        <p:attrNameLst>
-                                          <p:attrName>style.visibility</p:attrName>
-                                        </p:attrNameLst>
-                                      </p:cBhvr>
-                                      <p:to>
-                                        <p:strVal val="visible"/>
-                                      </p:to>
-                                    </p:set>
-                                  </p:childTnLst>
-                                </p:cTn>
-                              </p:par>
-                            </p:childTnLst>
-                          </p:cTn>
-                        </p:par>
-                      </p:childTnLst>
-                    </p:cTn>
-                  </p:par>
-                </p:childTnLst>
-              </p:cTn>
-              <p:prevCondLst>
-                <p:cond evt="onPrev" delay="0">
-                  <p:tgtEl>
-                    <p:sldTgt/>
-                  </p:tgtEl>
-                </p:cond>
-              </p:prevCondLst>
-              <p:nextCondLst>
-                <p:cond evt="onNext" delay="0">
-                  <p:tgtEl>
-                    <p:sldTgt/>
-                  </p:tgtEl>
-                </p:cond>
-              </p:nextCondLst>
-            </p:seq>
-          </p:childTnLst>
-        </p:cTn>
-      </p:par>
-    </p:tnLst>
-    <p:bldLst>
-      <p:bldP spid="6" grpId="0" animBg="1"/>
-      <p:bldGraphic spid="7" grpId="0">
-        <p:bldAsOne/>
-      </p:bldGraphic>
-      <p:bldP spid="8" grpId="0" animBg="1"/>
-      <p:bldP spid="9" grpId="0" animBg="1"/>
-      <p:bldP spid="10" grpId="0" animBg="1"/>
-      <p:bldP spid="11" grpId="0" animBg="1"/>
-    </p:bldLst>
-  </p:timing>
-</p:sld>
-</file>
-
-<file path=ppt/slides/slide9.xml><?xml version="1.0" encoding="utf-8"?>
-<p:sld xmlns:a="http://schemas.openxmlformats.org/drawingml/2006/main" xmlns:p="http://schemas.openxmlformats.org/presentationml/2006/main" xmlns:r="http://schemas.openxmlformats.org/officeDocument/2006/relationships">
-  <p:cSld>
-    <p:spTree>
-      <p:nvGrpSpPr>
-        <p:cNvPr id="1" name=""/>
-        <p:cNvGrpSpPr/>
-        <p:nvPr/>
-      </p:nvGrpSpPr>
-      <p:grpSpPr/>
-      <p:sp>
-        <p:nvSpPr>
-          <p:cNvPr id="2" name="Rectangle 1"/>
-          <p:cNvSpPr/>
-          <p:nvPr/>
-        </p:nvSpPr>
-        <p:spPr>
-          <a:xfrm>
-            <a:off x="0" y="0"/>
-            <a:ext cx="12191695" cy="6858000"/>
-          </a:xfrm>
-          <a:prstGeom prst="rect">
-            <a:avLst/>
-          </a:prstGeom>
-          <a:solidFill>
-            <a:srgbClr val="FFFFFF"/>
-          </a:solidFill>
-          <a:ln>
-            <a:noFill/>
-          </a:ln>
-          <a:effectLst/>
-        </p:spPr>
-        <p:style>
-          <a:lnRef idx="1">
-            <a:schemeClr val="accent1"/>
-          </a:lnRef>
-          <a:fillRef idx="3">
-            <a:schemeClr val="accent1"/>
-          </a:fillRef>
-          <a:effectRef idx="2">
-            <a:schemeClr val="accent1"/>
-          </a:effectRef>
-          <a:fontRef idx="minor">
-            <a:schemeClr val="lt1"/>
-          </a:fontRef>
-        </p:style>
-        <p:txBody>
-          <a:bodyPr rtlCol="0" anchor="ctr"/>
-          <a:lstStyle/>
-          <a:p>
-            <a:pPr algn="ctr"/>
-          </a:p>
-        </p:txBody>
-      </p:sp>
-      <p:sp>
-        <p:nvSpPr>
-          <p:cNvPr id="3" name="Rectangle 2"/>
-          <p:cNvSpPr/>
-          <p:nvPr/>
-        </p:nvSpPr>
-        <p:spPr>
-          <a:xfrm>
-            <a:off x="0" y="0"/>
-            <a:ext cx="12191695" cy="868680"/>
-          </a:xfrm>
-          <a:prstGeom prst="rect">
-            <a:avLst/>
-          </a:prstGeom>
-          <a:solidFill>
-            <a:srgbClr val="1F4E79"/>
-          </a:solidFill>
-          <a:ln>
-            <a:noFill/>
-          </a:ln>
-          <a:effectLst/>
-        </p:spPr>
-        <p:style>
-          <a:lnRef idx="1">
-            <a:schemeClr val="accent1"/>
-          </a:lnRef>
-          <a:fillRef idx="3">
-            <a:schemeClr val="accent1"/>
-          </a:fillRef>
-          <a:effectRef idx="2">
-            <a:schemeClr val="accent1"/>
-          </a:effectRef>
-          <a:fontRef idx="minor">
-            <a:schemeClr val="lt1"/>
-          </a:fontRef>
-        </p:style>
-        <p:txBody>
-          <a:bodyPr rtlCol="0" anchor="ctr"/>
-          <a:lstStyle/>
-          <a:p>
-            <a:pPr algn="ctr"/>
-          </a:p>
-        </p:txBody>
-      </p:sp>
-      <p:sp>
-        <p:nvSpPr>
-          <p:cNvPr id="4" name="TextBox 3"/>
-          <p:cNvSpPr txBox="1"/>
-          <p:nvPr/>
-        </p:nvSpPr>
-        <p:spPr>
-          <a:xfrm>
-            <a:off x="411480" y="73152"/>
-            <a:ext cx="11338560" cy="457200"/>
-          </a:xfrm>
-          <a:prstGeom prst="rect">
-            <a:avLst/>
-          </a:prstGeom>
-          <a:noFill/>
-        </p:spPr>
-        <p:txBody>
-          <a:bodyPr wrap="square">
-            <a:spAutoFit/>
-          </a:bodyPr>
-          <a:lstStyle/>
-          <a:p>
-            <a:r>
-              <a:rPr sz="2700" b="1">
-                <a:solidFill>
-                  <a:srgbClr val="FFFFFF"/>
-                </a:solidFill>
-                <a:latin typeface="Microsoft JhengHei"/>
-              </a:rPr>
-              <a:t>三、蒸餾</a:t>
-            </a:r>
-          </a:p>
-        </p:txBody>
-      </p:sp>
-      <p:sp>
-        <p:nvSpPr>
-          <p:cNvPr id="5" name="TextBox 4"/>
-          <p:cNvSpPr txBox="1"/>
-          <p:nvPr/>
-        </p:nvSpPr>
-        <p:spPr>
-          <a:xfrm>
-            <a:off x="411480" y="521207"/>
-            <a:ext cx="11338560" cy="301752"/>
-          </a:xfrm>
-          <a:prstGeom prst="rect">
-            <a:avLst/>
-          </a:prstGeom>
-          <a:noFill/>
-        </p:spPr>
-        <p:txBody>
-          <a:bodyPr wrap="square">
-            <a:spAutoFit/>
-          </a:bodyPr>
-          <a:lstStyle/>
-          <a:p>
-            <a:r>
-              <a:rPr sz="1300" b="0">
-                <a:solidFill>
-                  <a:srgbClr val="C7D6E5"/>
-                </a:solidFill>
-                <a:latin typeface="Microsoft JhengHei"/>
-              </a:rPr>
-              <a:t>論文第 2 節：兩個目標函數的加權平均</a:t>
-            </a:r>
-          </a:p>
-        </p:txBody>
-      </p:sp>
-      <p:pic>
-        <p:nvPicPr>
-          <p:cNvPr id="6" name="Picture 5" descr="m_loss.png"/>
-          <p:cNvPicPr>
-            <a:picLocks noChangeAspect="1"/>
-          </p:cNvPicPr>
-          <p:nvPr/>
-        </p:nvPicPr>
-        <p:blipFill>
-          <a:blip r:embed="rId2"/>
-          <a:stretch>
-            <a:fillRect/>
-          </a:stretch>
-        </p:blipFill>
-        <p:spPr>
-          <a:xfrm>
-            <a:off x="822960" y="1143000"/>
-            <a:ext cx="5518871" cy="566928"/>
-          </a:xfrm>
-          <a:prstGeom prst="rect">
-            <a:avLst/>
-          </a:prstGeom>
-        </p:spPr>
-      </p:pic>
-      <p:pic>
-        <p:nvPicPr>
-          <p:cNvPr id="7" name="Picture 6" descr="m_csoft.png"/>
-          <p:cNvPicPr>
-            <a:picLocks noChangeAspect="1"/>
-          </p:cNvPicPr>
-          <p:nvPr/>
-        </p:nvPicPr>
-        <p:blipFill>
-          <a:blip r:embed="rId3"/>
-          <a:stretch>
-            <a:fillRect/>
-          </a:stretch>
-        </p:blipFill>
-        <p:spPr>
-          <a:xfrm>
-            <a:off x="822960" y="1965960"/>
-            <a:ext cx="2629506" cy="658368"/>
-          </a:xfrm>
-          <a:prstGeom prst="rect">
-            <a:avLst/>
-          </a:prstGeom>
-        </p:spPr>
-      </p:pic>
-      <p:sp>
-        <p:nvSpPr>
-          <p:cNvPr id="8" name="TextBox 7"/>
-          <p:cNvSpPr txBox="1"/>
-          <p:nvPr/>
-        </p:nvSpPr>
-        <p:spPr>
-          <a:xfrm>
-            <a:off x="5120640" y="1965960"/>
-            <a:ext cx="6583680" cy="822960"/>
-          </a:xfrm>
-          <a:prstGeom prst="rect">
-            <a:avLst/>
-          </a:prstGeom>
-          <a:noFill/>
-        </p:spPr>
-        <p:txBody>
-          <a:bodyPr wrap="square">
-            <a:spAutoFit/>
-          </a:bodyPr>
-          <a:lstStyle/>
-          <a:p>
-            <a:r>
-              <a:rPr sz="1700" b="0">
-                <a:solidFill>
-                  <a:srgbClr val="202020"/>
-                </a:solidFill>
-                <a:latin typeface="Microsoft JhengHei"/>
-              </a:rPr>
-              <a:t>與軟目標的交叉熵：蒸餾模型的 softmax 使用與產生軟目標時相同的高溫</a:t>
-            </a:r>
-          </a:p>
-        </p:txBody>
-      </p:sp>
-      <p:pic>
-        <p:nvPicPr>
-          <p:cNvPr id="9" name="Picture 8" descr="m_chard.png"/>
-          <p:cNvPicPr>
-            <a:picLocks noChangeAspect="1"/>
-          </p:cNvPicPr>
-          <p:nvPr/>
-        </p:nvPicPr>
-        <p:blipFill>
-          <a:blip r:embed="rId4"/>
-          <a:stretch>
-            <a:fillRect/>
-          </a:stretch>
-        </p:blipFill>
-        <p:spPr>
-          <a:xfrm>
-            <a:off x="822960" y="2880360"/>
-            <a:ext cx="3631404" cy="566928"/>
-          </a:xfrm>
-          <a:prstGeom prst="rect">
-            <a:avLst/>
-          </a:prstGeom>
-        </p:spPr>
-      </p:pic>
-      <p:sp>
-        <p:nvSpPr>
-          <p:cNvPr id="10" name="TextBox 9"/>
-          <p:cNvSpPr txBox="1"/>
-          <p:nvPr/>
-        </p:nvSpPr>
-        <p:spPr>
-          <a:xfrm>
-            <a:off x="5120640" y="2880360"/>
-            <a:ext cx="6583680" cy="822960"/>
-          </a:xfrm>
-          <a:prstGeom prst="rect">
-            <a:avLst/>
-          </a:prstGeom>
-          <a:noFill/>
-        </p:spPr>
-        <p:txBody>
-          <a:bodyPr wrap="square">
-            <a:spAutoFit/>
-          </a:bodyPr>
-          <a:lstStyle/>
-          <a:p>
-            <a:r>
-              <a:rPr sz="1700" b="0">
-                <a:solidFill>
-                  <a:srgbClr val="202020"/>
-                </a:solidFill>
-                <a:latin typeface="Microsoft JhengHei"/>
-              </a:rPr>
-              <a:t>與正確標籤的交叉熵：使用蒸餾模型完全相同的 logit，但溫度為 1</a:t>
-            </a:r>
-          </a:p>
-        </p:txBody>
-      </p:sp>
-      <p:sp>
-        <p:nvSpPr>
-          <p:cNvPr id="11" name="Rectangle 10"/>
-          <p:cNvSpPr/>
-          <p:nvPr/>
-        </p:nvSpPr>
-        <p:spPr>
-          <a:xfrm>
-            <a:off x="731520" y="3840480"/>
-            <a:ext cx="5303520" cy="1188720"/>
-          </a:xfrm>
-          <a:prstGeom prst="rect">
-            <a:avLst/>
-          </a:prstGeom>
-          <a:solidFill>
-            <a:srgbClr val="DAE6F2"/>
-          </a:solidFill>
-          <a:ln>
-            <a:solidFill>
-              <a:srgbClr val="D0D7DE"/>
-            </a:solidFill>
-          </a:ln>
-          <a:effectLst/>
-        </p:spPr>
-        <p:style>
-          <a:lnRef idx="1">
-            <a:schemeClr val="accent1"/>
-          </a:lnRef>
-          <a:fillRef idx="3">
-            <a:schemeClr val="accent1"/>
-          </a:fillRef>
-          <a:effectRef idx="2">
-            <a:schemeClr val="accent1"/>
-          </a:effectRef>
-          <a:fontRef idx="minor">
-            <a:schemeClr val="lt1"/>
-          </a:fontRef>
-        </p:style>
-        <p:txBody>
-          <a:bodyPr rtlCol="0" anchor="ctr" wrap="square"/>
-          <a:lstStyle/>
-          <a:p>
-            <a:pPr algn="l"/>
-            <a:r>
-              <a:rPr sz="1700" b="0">
-                <a:solidFill>
-                  <a:srgbClr val="1F4E79"/>
-                </a:solidFill>
-                <a:latin typeface="Microsoft JhengHei"/>
-              </a:rPr>
-              <a:t>α：論文發現，第二個目標函數的權重</a:t>
-            </a:r>
-          </a:p>
-          <a:p>
-            <a:pPr algn="l"/>
-            <a:r>
-              <a:rPr sz="1700" b="0">
-                <a:solidFill>
-                  <a:srgbClr val="1F4E79"/>
-                </a:solidFill>
-                <a:latin typeface="Microsoft JhengHei"/>
-              </a:rPr>
-              <a:t>取得低很多時，結果通常最好；</a:t>
-            </a:r>
-          </a:p>
-          <a:p>
-            <a:pPr algn="l"/>
-            <a:r>
-              <a:rPr sz="1700" b="0">
-                <a:solidFill>
-                  <a:srgbClr val="1F4E79"/>
-                </a:solidFill>
-                <a:latin typeface="Microsoft JhengHei"/>
-              </a:rPr>
-              <a:t>本教材取 α = 0.9</a:t>
-            </a:r>
-          </a:p>
-        </p:txBody>
-      </p:sp>
-      <p:sp>
-        <p:nvSpPr>
-          <p:cNvPr id="12" name="Rectangle 11"/>
-          <p:cNvSpPr/>
-          <p:nvPr/>
-        </p:nvSpPr>
-        <p:spPr>
-          <a:xfrm>
-            <a:off x="6309360" y="3840480"/>
-            <a:ext cx="5303520" cy="1188720"/>
-          </a:xfrm>
-          <a:prstGeom prst="rect">
-            <a:avLst/>
-          </a:prstGeom>
-          <a:solidFill>
-            <a:srgbClr val="FFF3CD"/>
-          </a:solidFill>
-          <a:ln>
-            <a:solidFill>
-              <a:srgbClr val="D0D7DE"/>
-            </a:solidFill>
-          </a:ln>
-          <a:effectLst/>
-        </p:spPr>
-        <p:style>
-          <a:lnRef idx="1">
-            <a:schemeClr val="accent1"/>
-          </a:lnRef>
-          <a:fillRef idx="3">
-            <a:schemeClr val="accent1"/>
-          </a:fillRef>
-          <a:effectRef idx="2">
-            <a:schemeClr val="accent1"/>
-          </a:effectRef>
-          <a:fontRef idx="minor">
-            <a:schemeClr val="lt1"/>
-          </a:fontRef>
-        </p:style>
-        <p:txBody>
-          <a:bodyPr rtlCol="0" anchor="ctr" wrap="square"/>
-          <a:lstStyle/>
-          <a:p>
-            <a:pPr algn="l"/>
-            <a:r>
-              <a:rPr sz="1700" b="0">
-                <a:solidFill>
-                  <a:srgbClr val="C03030"/>
-                </a:solidFill>
-                <a:latin typeface="Microsoft JhengHei"/>
-              </a:rPr>
-              <a:t>T²：軟目標產生的梯度大小與 1/T² 成正比，</a:t>
-            </a:r>
-          </a:p>
-          <a:p>
-            <a:pPr algn="l"/>
-            <a:r>
-              <a:rPr sz="1700" b="0">
-                <a:solidFill>
-                  <a:srgbClr val="C03030"/>
-                </a:solidFill>
-                <a:latin typeface="Microsoft JhengHei"/>
-              </a:rPr>
-              <a:t>因此乘上 T²，換溫度時兩項的相對貢獻</a:t>
-            </a:r>
-          </a:p>
-          <a:p>
-            <a:pPr algn="l"/>
-            <a:r>
-              <a:rPr sz="1700" b="0">
-                <a:solidFill>
-                  <a:srgbClr val="C03030"/>
-                </a:solidFill>
-                <a:latin typeface="Microsoft JhengHei"/>
-              </a:rPr>
-              <a:t>大致不變（第 13 頁驗證）</a:t>
-            </a:r>
-          </a:p>
-        </p:txBody>
-      </p:sp>
-      <p:sp>
-        <p:nvSpPr>
-          <p:cNvPr id="13" name="TextBox 12"/>
-          <p:cNvSpPr txBox="1"/>
-          <p:nvPr/>
-        </p:nvSpPr>
-        <p:spPr>
-          <a:xfrm>
-            <a:off x="731520" y="5257800"/>
+            <a:off x="731520" y="5166360"/>
             <a:ext cx="10881360" cy="914400"/>
           </a:xfrm>
           <a:prstGeom prst="rect">
@@ -25529,13 +24718,13 @@
           <a:lstStyle/>
           <a:p>
             <a:r>
-              <a:rPr sz="1900" b="1">
+              <a:rPr sz="1700" b="0">
                 <a:solidFill>
-                  <a:srgbClr val="1E7A45"/>
+                  <a:srgbClr val="59636E"/>
                 </a:solidFill>
                 <a:latin typeface="Microsoft JhengHei"/>
               </a:rPr>
-              <a:t>蒸餾模型訓練完成後，使用時溫度為 1。</a:t>
+              <a:t>核對：exp(2) = 7.3891，exp(1) = 2.7183，exp(0) = 1，三者相加 11.1073。</a:t>
             </a:r>
           </a:p>
         </p:txBody>
@@ -25913,6 +25102,96 @@
                       </p:childTnLst>
                     </p:cTn>
                   </p:par>
+                  <p:par>
+                    <p:cTn id="35" fill="hold">
+                      <p:stCondLst>
+                        <p:cond delay="indefinite"/>
+                      </p:stCondLst>
+                      <p:childTnLst>
+                        <p:par>
+                          <p:cTn id="36" fill="hold">
+                            <p:stCondLst>
+                              <p:cond delay="0"/>
+                            </p:stCondLst>
+                            <p:childTnLst>
+                              <p:par>
+                                <p:cTn id="37" presetID="1" presetClass="entr" presetSubtype="0" fill="hold" grpId="0" nodeType="clickEffect">
+                                  <p:stCondLst>
+                                    <p:cond delay="0"/>
+                                  </p:stCondLst>
+                                  <p:childTnLst>
+                                    <p:set>
+                                      <p:cBhvr>
+                                        <p:cTn id="38" dur="1" fill="hold">
+                                          <p:stCondLst>
+                                            <p:cond delay="0"/>
+                                          </p:stCondLst>
+                                        </p:cTn>
+                                        <p:tgtEl>
+                                          <p:spTgt spid="14"/>
+                                        </p:tgtEl>
+                                        <p:attrNameLst>
+                                          <p:attrName>style.visibility</p:attrName>
+                                        </p:attrNameLst>
+                                      </p:cBhvr>
+                                      <p:to>
+                                        <p:strVal val="visible"/>
+                                      </p:to>
+                                    </p:set>
+                                  </p:childTnLst>
+                                </p:cTn>
+                              </p:par>
+                            </p:childTnLst>
+                          </p:cTn>
+                        </p:par>
+                      </p:childTnLst>
+                    </p:cTn>
+                  </p:par>
+                  <p:par>
+                    <p:cTn id="39" fill="hold">
+                      <p:stCondLst>
+                        <p:cond delay="indefinite"/>
+                      </p:stCondLst>
+                      <p:childTnLst>
+                        <p:par>
+                          <p:cTn id="40" fill="hold">
+                            <p:stCondLst>
+                              <p:cond delay="0"/>
+                            </p:stCondLst>
+                            <p:childTnLst>
+                              <p:par>
+                                <p:cTn id="41" presetID="1" presetClass="entr" presetSubtype="0" fill="hold" grpId="0" nodeType="clickEffect">
+                                  <p:stCondLst>
+                                    <p:cond delay="0"/>
+                                  </p:stCondLst>
+                                  <p:childTnLst>
+                                    <p:set>
+                                      <p:cBhvr>
+                                        <p:cTn id="42" dur="1" fill="hold">
+                                          <p:stCondLst>
+                                            <p:cond delay="0"/>
+                                          </p:stCondLst>
+                                        </p:cTn>
+                                        <p:tgtEl>
+                                          <p:spTgt spid="15"/>
+                                        </p:tgtEl>
+                                        <p:attrNameLst>
+                                          <p:attrName>style.visibility</p:attrName>
+                                        </p:attrNameLst>
+                                      </p:cBhvr>
+                                      <p:to>
+                                        <p:strVal val="visible"/>
+                                      </p:to>
+                                    </p:set>
+                                  </p:childTnLst>
+                                </p:cTn>
+                              </p:par>
+                            </p:childTnLst>
+                          </p:cTn>
+                        </p:par>
+                      </p:childTnLst>
+                    </p:cTn>
+                  </p:par>
                 </p:childTnLst>
               </p:cTn>
               <p:prevCondLst>
@@ -25937,12 +25216,1043 @@
     <p:bldLst>
       <p:bldP spid="6" grpId="0" animBg="1"/>
       <p:bldP spid="7" grpId="0" animBg="1"/>
+      <p:bldGraphic spid="8" grpId="0">
+        <p:bldAsOne/>
+      </p:bldGraphic>
+      <p:bldGraphic spid="9" grpId="0">
+        <p:bldAsOne/>
+      </p:bldGraphic>
+      <p:bldGraphic spid="10" grpId="0">
+        <p:bldAsOne/>
+      </p:bldGraphic>
+      <p:bldGraphic spid="11" grpId="0">
+        <p:bldAsOne/>
+      </p:bldGraphic>
+      <p:bldP spid="12" grpId="0" animBg="1"/>
+      <p:bldGraphic spid="13" grpId="0">
+        <p:bldAsOne/>
+      </p:bldGraphic>
+      <p:bldP spid="14" grpId="0" animBg="1"/>
+      <p:bldP spid="15" grpId="0" animBg="1"/>
+    </p:bldLst>
+  </p:timing>
+</p:sld>
+</file>
+
+<file path=ppt/slides/slide9.xml><?xml version="1.0" encoding="utf-8"?>
+<p:sld xmlns:a="http://schemas.openxmlformats.org/drawingml/2006/main" xmlns:p="http://schemas.openxmlformats.org/presentationml/2006/main" xmlns:r="http://schemas.openxmlformats.org/officeDocument/2006/relationships">
+  <p:cSld>
+    <p:spTree>
+      <p:nvGrpSpPr>
+        <p:cNvPr id="1" name=""/>
+        <p:cNvGrpSpPr/>
+        <p:nvPr/>
+      </p:nvGrpSpPr>
+      <p:grpSpPr/>
+      <p:sp>
+        <p:nvSpPr>
+          <p:cNvPr id="2" name="Rectangle 1"/>
+          <p:cNvSpPr/>
+          <p:nvPr/>
+        </p:nvSpPr>
+        <p:spPr>
+          <a:xfrm>
+            <a:off x="0" y="0"/>
+            <a:ext cx="12191695" cy="6858000"/>
+          </a:xfrm>
+          <a:prstGeom prst="rect">
+            <a:avLst/>
+          </a:prstGeom>
+          <a:solidFill>
+            <a:srgbClr val="FFFFFF"/>
+          </a:solidFill>
+          <a:ln>
+            <a:noFill/>
+          </a:ln>
+          <a:effectLst/>
+        </p:spPr>
+        <p:style>
+          <a:lnRef idx="1">
+            <a:schemeClr val="accent1"/>
+          </a:lnRef>
+          <a:fillRef idx="3">
+            <a:schemeClr val="accent1"/>
+          </a:fillRef>
+          <a:effectRef idx="2">
+            <a:schemeClr val="accent1"/>
+          </a:effectRef>
+          <a:fontRef idx="minor">
+            <a:schemeClr val="lt1"/>
+          </a:fontRef>
+        </p:style>
+        <p:txBody>
+          <a:bodyPr rtlCol="0" anchor="ctr"/>
+          <a:lstStyle/>
+          <a:p>
+            <a:pPr algn="ctr"/>
+          </a:p>
+        </p:txBody>
+      </p:sp>
+      <p:sp>
+        <p:nvSpPr>
+          <p:cNvPr id="3" name="Rectangle 2"/>
+          <p:cNvSpPr/>
+          <p:nvPr/>
+        </p:nvSpPr>
+        <p:spPr>
+          <a:xfrm>
+            <a:off x="0" y="0"/>
+            <a:ext cx="12191695" cy="868680"/>
+          </a:xfrm>
+          <a:prstGeom prst="rect">
+            <a:avLst/>
+          </a:prstGeom>
+          <a:solidFill>
+            <a:srgbClr val="1F4E79"/>
+          </a:solidFill>
+          <a:ln>
+            <a:noFill/>
+          </a:ln>
+          <a:effectLst/>
+        </p:spPr>
+        <p:style>
+          <a:lnRef idx="1">
+            <a:schemeClr val="accent1"/>
+          </a:lnRef>
+          <a:fillRef idx="3">
+            <a:schemeClr val="accent1"/>
+          </a:fillRef>
+          <a:effectRef idx="2">
+            <a:schemeClr val="accent1"/>
+          </a:effectRef>
+          <a:fontRef idx="minor">
+            <a:schemeClr val="lt1"/>
+          </a:fontRef>
+        </p:style>
+        <p:txBody>
+          <a:bodyPr rtlCol="0" anchor="ctr"/>
+          <a:lstStyle/>
+          <a:p>
+            <a:pPr algn="ctr"/>
+          </a:p>
+        </p:txBody>
+      </p:sp>
+      <p:sp>
+        <p:nvSpPr>
+          <p:cNvPr id="4" name="TextBox 3"/>
+          <p:cNvSpPr txBox="1"/>
+          <p:nvPr/>
+        </p:nvSpPr>
+        <p:spPr>
+          <a:xfrm>
+            <a:off x="411480" y="73152"/>
+            <a:ext cx="11338560" cy="457200"/>
+          </a:xfrm>
+          <a:prstGeom prst="rect">
+            <a:avLst/>
+          </a:prstGeom>
+          <a:noFill/>
+        </p:spPr>
+        <p:txBody>
+          <a:bodyPr wrap="square">
+            <a:spAutoFit/>
+          </a:bodyPr>
+          <a:lstStyle/>
+          <a:p>
+            <a:r>
+              <a:rPr sz="2700" b="1">
+                <a:solidFill>
+                  <a:srgbClr val="FFFFFF"/>
+                </a:solidFill>
+                <a:latin typeface="Microsoft JhengHei"/>
+              </a:rPr>
+              <a:t>二、軟目標與硬目標</a:t>
+            </a:r>
+          </a:p>
+        </p:txBody>
+      </p:sp>
+      <p:sp>
+        <p:nvSpPr>
+          <p:cNvPr id="5" name="TextBox 4"/>
+          <p:cNvSpPr txBox="1"/>
+          <p:nvPr/>
+        </p:nvSpPr>
+        <p:spPr>
+          <a:xfrm>
+            <a:off x="411480" y="521207"/>
+            <a:ext cx="11338560" cy="301752"/>
+          </a:xfrm>
+          <a:prstGeom prst="rect">
+            <a:avLst/>
+          </a:prstGeom>
+          <a:noFill/>
+        </p:spPr>
+        <p:txBody>
+          <a:bodyPr wrap="square">
+            <a:spAutoFit/>
+          </a:bodyPr>
+          <a:lstStyle/>
+          <a:p>
+            <a:r>
+              <a:rPr sz="1300" b="0">
+                <a:solidFill>
+                  <a:srgbClr val="C7D6E5"/>
+                </a:solidFill>
+                <a:latin typeface="Microsoft JhengHei"/>
+              </a:rPr>
+              <a:t>同一個 2，兩種溫度</a:t>
+            </a:r>
+          </a:p>
+        </p:txBody>
+      </p:sp>
+      <p:pic>
+        <p:nvPicPr>
+          <p:cNvPr id="6" name="Picture 5" descr="f_soft.png"/>
+          <p:cNvPicPr>
+            <a:picLocks noChangeAspect="1"/>
+          </p:cNvPicPr>
+          <p:nvPr/>
+        </p:nvPicPr>
+        <p:blipFill>
+          <a:blip r:embed="rId2"/>
+          <a:stretch>
+            <a:fillRect/>
+          </a:stretch>
+        </p:blipFill>
+        <p:spPr>
+          <a:xfrm>
+            <a:off x="548640" y="1051560"/>
+            <a:ext cx="6400800" cy="2578100"/>
+          </a:xfrm>
+          <a:prstGeom prst="rect">
+            <a:avLst/>
+          </a:prstGeom>
+        </p:spPr>
+      </p:pic>
+      <p:graphicFrame>
+        <p:nvGraphicFramePr>
+          <p:cNvPr id="7" name="Table 6"/>
+          <p:cNvGraphicFramePr>
+            <a:graphicFrameLocks noGrp="1"/>
+          </p:cNvGraphicFramePr>
+          <p:nvPr/>
+        </p:nvGraphicFramePr>
+        <p:xfrm>
+          <a:off x="7223760" y="1143000"/>
+          <a:ext cx="4480558" cy="1316736"/>
+        </p:xfrm>
+        <a:graphic>
+          <a:graphicData uri="http://schemas.openxmlformats.org/drawingml/2006/table">
+            <a:tbl>
+              <a:tblPr bandRow="1">
+                <a:tableStyleId>{5C22544A-7EE6-4342-B048-85BDC9FD1C3A}</a:tableStyleId>
+              </a:tblPr>
+              <a:tblGrid>
+                <a:gridCol w="1650732"/>
+                <a:gridCol w="1414913"/>
+                <a:gridCol w="1414913"/>
+              </a:tblGrid>
+              <a:tr h="329184">
+                <a:tc>
+                  <a:txBody>
+                    <a:bodyPr/>
+                    <a:lstStyle/>
+                    <a:p>
+                      <a:pPr algn="ctr"/>
+                      <a:r>
+                        <a:rPr sz="1700" b="1">
+                          <a:solidFill>
+                            <a:srgbClr val="FFFFFF"/>
+                          </a:solidFill>
+                          <a:latin typeface="Microsoft JhengHei"/>
+                        </a:rPr>
+                        <a:t/>
+                      </a:r>
+                    </a:p>
+                  </a:txBody>
+                  <a:tcPr marL="36576" marR="36576" marT="9144" marB="9144">
+                    <a:solidFill>
+                      <a:srgbClr val="1F4E79"/>
+                    </a:solidFill>
+                  </a:tcPr>
+                </a:tc>
+                <a:tc>
+                  <a:txBody>
+                    <a:bodyPr/>
+                    <a:lstStyle/>
+                    <a:p>
+                      <a:pPr algn="ctr"/>
+                      <a:r>
+                        <a:rPr sz="1700" b="1">
+                          <a:solidFill>
+                            <a:srgbClr val="FFFFFF"/>
+                          </a:solidFill>
+                          <a:latin typeface="Microsoft JhengHei"/>
+                        </a:rPr>
+                        <a:t>T = 1</a:t>
+                      </a:r>
+                    </a:p>
+                  </a:txBody>
+                  <a:tcPr marL="36576" marR="36576" marT="9144" marB="9144">
+                    <a:solidFill>
+                      <a:srgbClr val="1F4E79"/>
+                    </a:solidFill>
+                  </a:tcPr>
+                </a:tc>
+                <a:tc>
+                  <a:txBody>
+                    <a:bodyPr/>
+                    <a:lstStyle/>
+                    <a:p>
+                      <a:pPr algn="ctr"/>
+                      <a:r>
+                        <a:rPr sz="1700" b="1">
+                          <a:solidFill>
+                            <a:srgbClr val="FFFFFF"/>
+                          </a:solidFill>
+                          <a:latin typeface="Microsoft JhengHei"/>
+                        </a:rPr>
+                        <a:t>T = 4</a:t>
+                      </a:r>
+                    </a:p>
+                  </a:txBody>
+                  <a:tcPr marL="36576" marR="36576" marT="9144" marB="9144">
+                    <a:solidFill>
+                      <a:srgbClr val="1F4E79"/>
+                    </a:solidFill>
+                  </a:tcPr>
+                </a:tc>
+              </a:tr>
+              <a:tr h="329184">
+                <a:tc>
+                  <a:txBody>
+                    <a:bodyPr/>
+                    <a:lstStyle/>
+                    <a:p>
+                      <a:pPr algn="ctr"/>
+                      <a:r>
+                        <a:rPr sz="1700" b="0">
+                          <a:solidFill>
+                            <a:srgbClr val="202020"/>
+                          </a:solidFill>
+                          <a:latin typeface="Consolas"/>
+                        </a:rPr>
+                        <a:t>P(3)</a:t>
+                      </a:r>
+                    </a:p>
+                  </a:txBody>
+                  <a:tcPr marL="36576" marR="36576" marT="9144" marB="9144">
+                    <a:solidFill>
+                      <a:srgbClr val="FFFFFF"/>
+                    </a:solidFill>
+                  </a:tcPr>
+                </a:tc>
+                <a:tc>
+                  <a:txBody>
+                    <a:bodyPr/>
+                    <a:lstStyle/>
+                    <a:p>
+                      <a:pPr algn="ctr"/>
+                      <a:r>
+                        <a:rPr sz="1700" b="0">
+                          <a:solidFill>
+                            <a:srgbClr val="202020"/>
+                          </a:solidFill>
+                          <a:latin typeface="Consolas"/>
+                        </a:rPr>
+                        <a:t>0.0180</a:t>
+                      </a:r>
+                    </a:p>
+                  </a:txBody>
+                  <a:tcPr marL="36576" marR="36576" marT="9144" marB="9144">
+                    <a:solidFill>
+                      <a:srgbClr val="FFFFFF"/>
+                    </a:solidFill>
+                  </a:tcPr>
+                </a:tc>
+                <a:tc>
+                  <a:txBody>
+                    <a:bodyPr/>
+                    <a:lstStyle/>
+                    <a:p>
+                      <a:pPr algn="ctr"/>
+                      <a:r>
+                        <a:rPr sz="1700" b="0">
+                          <a:solidFill>
+                            <a:srgbClr val="202020"/>
+                          </a:solidFill>
+                          <a:latin typeface="Consolas"/>
+                        </a:rPr>
+                        <a:t>0.2447</a:t>
+                      </a:r>
+                    </a:p>
+                  </a:txBody>
+                  <a:tcPr marL="36576" marR="36576" marT="9144" marB="9144">
+                    <a:solidFill>
+                      <a:srgbClr val="FFFFFF"/>
+                    </a:solidFill>
+                  </a:tcPr>
+                </a:tc>
+              </a:tr>
+              <a:tr h="329184">
+                <a:tc>
+                  <a:txBody>
+                    <a:bodyPr/>
+                    <a:lstStyle/>
+                    <a:p>
+                      <a:pPr algn="ctr"/>
+                      <a:r>
+                        <a:rPr sz="1700" b="0">
+                          <a:solidFill>
+                            <a:srgbClr val="202020"/>
+                          </a:solidFill>
+                          <a:latin typeface="Consolas"/>
+                        </a:rPr>
+                        <a:t>P(7)</a:t>
+                      </a:r>
+                    </a:p>
+                  </a:txBody>
+                  <a:tcPr marL="36576" marR="36576" marT="9144" marB="9144">
+                    <a:solidFill>
+                      <a:srgbClr val="FFFFFF"/>
+                    </a:solidFill>
+                  </a:tcPr>
+                </a:tc>
+                <a:tc>
+                  <a:txBody>
+                    <a:bodyPr/>
+                    <a:lstStyle/>
+                    <a:p>
+                      <a:pPr algn="ctr"/>
+                      <a:r>
+                        <a:rPr sz="1700" b="0">
+                          <a:solidFill>
+                            <a:srgbClr val="202020"/>
+                          </a:solidFill>
+                          <a:latin typeface="Consolas"/>
+                        </a:rPr>
+                        <a:t>0.0003</a:t>
+                      </a:r>
+                    </a:p>
+                  </a:txBody>
+                  <a:tcPr marL="36576" marR="36576" marT="9144" marB="9144">
+                    <a:solidFill>
+                      <a:srgbClr val="FFFFFF"/>
+                    </a:solidFill>
+                  </a:tcPr>
+                </a:tc>
+                <a:tc>
+                  <a:txBody>
+                    <a:bodyPr/>
+                    <a:lstStyle/>
+                    <a:p>
+                      <a:pPr algn="ctr"/>
+                      <a:r>
+                        <a:rPr sz="1700" b="0">
+                          <a:solidFill>
+                            <a:srgbClr val="202020"/>
+                          </a:solidFill>
+                          <a:latin typeface="Consolas"/>
+                        </a:rPr>
+                        <a:t>0.0900</a:t>
+                      </a:r>
+                    </a:p>
+                  </a:txBody>
+                  <a:tcPr marL="36576" marR="36576" marT="9144" marB="9144">
+                    <a:solidFill>
+                      <a:srgbClr val="FFFFFF"/>
+                    </a:solidFill>
+                  </a:tcPr>
+                </a:tc>
+              </a:tr>
+              <a:tr h="329184">
+                <a:tc>
+                  <a:txBody>
+                    <a:bodyPr/>
+                    <a:lstStyle/>
+                    <a:p>
+                      <a:pPr algn="ctr"/>
+                      <a:r>
+                        <a:rPr sz="1700" b="0">
+                          <a:solidFill>
+                            <a:srgbClr val="202020"/>
+                          </a:solidFill>
+                          <a:latin typeface="Consolas"/>
+                        </a:rPr>
+                        <a:t>P(3) / P(7)</a:t>
+                      </a:r>
+                    </a:p>
+                  </a:txBody>
+                  <a:tcPr marL="36576" marR="36576" marT="9144" marB="9144">
+                    <a:solidFill>
+                      <a:srgbClr val="FFFFFF"/>
+                    </a:solidFill>
+                  </a:tcPr>
+                </a:tc>
+                <a:tc>
+                  <a:txBody>
+                    <a:bodyPr/>
+                    <a:lstStyle/>
+                    <a:p>
+                      <a:pPr algn="ctr"/>
+                      <a:r>
+                        <a:rPr sz="1700" b="0">
+                          <a:solidFill>
+                            <a:srgbClr val="202020"/>
+                          </a:solidFill>
+                          <a:latin typeface="Consolas"/>
+                        </a:rPr>
+                        <a:t>54.60</a:t>
+                      </a:r>
+                    </a:p>
+                  </a:txBody>
+                  <a:tcPr marL="36576" marR="36576" marT="9144" marB="9144">
+                    <a:solidFill>
+                      <a:srgbClr val="FFF3CD"/>
+                    </a:solidFill>
+                  </a:tcPr>
+                </a:tc>
+                <a:tc>
+                  <a:txBody>
+                    <a:bodyPr/>
+                    <a:lstStyle/>
+                    <a:p>
+                      <a:pPr algn="ctr"/>
+                      <a:r>
+                        <a:rPr sz="1700" b="0">
+                          <a:solidFill>
+                            <a:srgbClr val="202020"/>
+                          </a:solidFill>
+                          <a:latin typeface="Consolas"/>
+                        </a:rPr>
+                        <a:t>2.72</a:t>
+                      </a:r>
+                    </a:p>
+                  </a:txBody>
+                  <a:tcPr marL="36576" marR="36576" marT="9144" marB="9144">
+                    <a:solidFill>
+                      <a:srgbClr val="FFF3CD"/>
+                    </a:solidFill>
+                  </a:tcPr>
+                </a:tc>
+              </a:tr>
+            </a:tbl>
+          </a:graphicData>
+        </a:graphic>
+      </p:graphicFrame>
+      <p:sp>
+        <p:nvSpPr>
+          <p:cNvPr id="8" name="TextBox 7"/>
+          <p:cNvSpPr txBox="1"/>
+          <p:nvPr/>
+        </p:nvSpPr>
+        <p:spPr>
+          <a:xfrm>
+            <a:off x="7223760" y="2606040"/>
+            <a:ext cx="4480560" cy="1097280"/>
+          </a:xfrm>
+          <a:prstGeom prst="rect">
+            <a:avLst/>
+          </a:prstGeom>
+          <a:noFill/>
+        </p:spPr>
+        <p:txBody>
+          <a:bodyPr wrap="square">
+            <a:spAutoFit/>
+          </a:bodyPr>
+          <a:lstStyle/>
+          <a:p>
+            <a:r>
+              <a:rPr sz="1600" b="0">
+                <a:solidFill>
+                  <a:srgbClr val="59636E"/>
+                </a:solidFill>
+                <a:latin typeface="Microsoft JhengHei"/>
+              </a:rPr>
+              <a:t>比值等於 exp((4 − 0)/T)：</a:t>
+            </a:r>
+          </a:p>
+          <a:p>
+            <a:r>
+              <a:rPr sz="1600" b="0">
+                <a:solidFill>
+                  <a:srgbClr val="59636E"/>
+                </a:solidFill>
+                <a:latin typeface="Microsoft JhengHei"/>
+              </a:rPr>
+              <a:t>T = 1 是 e⁴ = 54.60，T = 4 是 e¹ = 2.72。</a:t>
+            </a:r>
+          </a:p>
+        </p:txBody>
+      </p:sp>
+      <p:sp>
+        <p:nvSpPr>
+          <p:cNvPr id="9" name="Rectangle 8"/>
+          <p:cNvSpPr/>
+          <p:nvPr/>
+        </p:nvSpPr>
+        <p:spPr>
+          <a:xfrm>
+            <a:off x="731520" y="3977639"/>
+            <a:ext cx="10881360" cy="731520"/>
+          </a:xfrm>
+          <a:prstGeom prst="rect">
+            <a:avLst/>
+          </a:prstGeom>
+          <a:solidFill>
+            <a:srgbClr val="DCF0E4"/>
+          </a:solidFill>
+          <a:ln>
+            <a:solidFill>
+              <a:srgbClr val="D0D7DE"/>
+            </a:solidFill>
+          </a:ln>
+          <a:effectLst/>
+        </p:spPr>
+        <p:style>
+          <a:lnRef idx="1">
+            <a:schemeClr val="accent1"/>
+          </a:lnRef>
+          <a:fillRef idx="3">
+            <a:schemeClr val="accent1"/>
+          </a:fillRef>
+          <a:effectRef idx="2">
+            <a:schemeClr val="accent1"/>
+          </a:effectRef>
+          <a:fontRef idx="minor">
+            <a:schemeClr val="lt1"/>
+          </a:fontRef>
+        </p:style>
+        <p:txBody>
+          <a:bodyPr rtlCol="0" anchor="ctr" wrap="square"/>
+          <a:lstStyle/>
+          <a:p>
+            <a:pPr algn="l"/>
+            <a:r>
+              <a:rPr sz="1900" b="1">
+                <a:solidFill>
+                  <a:srgbClr val="1E7A45"/>
+                </a:solidFill>
+                <a:latin typeface="Microsoft JhengHei"/>
+              </a:rPr>
+              <a:t>軟目標：笨重模型在高溫下產生的類別機率，例如 (0.6652, 0.2447, 0.0900)</a:t>
+            </a:r>
+          </a:p>
+        </p:txBody>
+      </p:sp>
+      <p:sp>
+        <p:nvSpPr>
+          <p:cNvPr id="10" name="Rectangle 9"/>
+          <p:cNvSpPr/>
+          <p:nvPr/>
+        </p:nvSpPr>
+        <p:spPr>
+          <a:xfrm>
+            <a:off x="731520" y="4800600"/>
+            <a:ext cx="10881360" cy="731520"/>
+          </a:xfrm>
+          <a:prstGeom prst="rect">
+            <a:avLst/>
+          </a:prstGeom>
+          <a:solidFill>
+            <a:srgbClr val="F6F8FA"/>
+          </a:solidFill>
+          <a:ln>
+            <a:solidFill>
+              <a:srgbClr val="D0D7DE"/>
+            </a:solidFill>
+          </a:ln>
+          <a:effectLst/>
+        </p:spPr>
+        <p:style>
+          <a:lnRef idx="1">
+            <a:schemeClr val="accent1"/>
+          </a:lnRef>
+          <a:fillRef idx="3">
+            <a:schemeClr val="accent1"/>
+          </a:fillRef>
+          <a:effectRef idx="2">
+            <a:schemeClr val="accent1"/>
+          </a:effectRef>
+          <a:fontRef idx="minor">
+            <a:schemeClr val="lt1"/>
+          </a:fontRef>
+        </p:style>
+        <p:txBody>
+          <a:bodyPr rtlCol="0" anchor="ctr" wrap="square"/>
+          <a:lstStyle/>
+          <a:p>
+            <a:pPr algn="l"/>
+            <a:r>
+              <a:rPr sz="1900" b="1">
+                <a:solidFill>
+                  <a:srgbClr val="1F4E79"/>
+                </a:solidFill>
+                <a:latin typeface="Microsoft JhengHei"/>
+              </a:rPr>
+              <a:t>硬目標：正確標籤，此例為 (1, 0, 0)</a:t>
+            </a:r>
+          </a:p>
+        </p:txBody>
+      </p:sp>
+      <p:sp>
+        <p:nvSpPr>
+          <p:cNvPr id="11" name="TextBox 10"/>
+          <p:cNvSpPr txBox="1"/>
+          <p:nvPr/>
+        </p:nvSpPr>
+        <p:spPr>
+          <a:xfrm>
+            <a:off x="731520" y="5669280"/>
+            <a:ext cx="10881360" cy="822960"/>
+          </a:xfrm>
+          <a:prstGeom prst="rect">
+            <a:avLst/>
+          </a:prstGeom>
+          <a:noFill/>
+        </p:spPr>
+        <p:txBody>
+          <a:bodyPr wrap="square">
+            <a:spAutoFit/>
+          </a:bodyPr>
+          <a:lstStyle/>
+          <a:p>
+            <a:r>
+              <a:rPr sz="1600" b="0">
+                <a:solidFill>
+                  <a:srgbClr val="202020"/>
+                </a:solidFill>
+                <a:latin typeface="Microsoft JhengHei"/>
+              </a:rPr>
+              <a:t>軟目標的熵較高時，每個訓練樣本提供的資訊比硬目標多得多，訓練樣本之間的梯度變異也小得多；</a:t>
+            </a:r>
+          </a:p>
+          <a:p>
+            <a:r>
+              <a:rPr sz="1600" b="0">
+                <a:solidFill>
+                  <a:srgbClr val="202020"/>
+                </a:solidFill>
+                <a:latin typeface="Microsoft JhengHei"/>
+              </a:rPr>
+              <a:t>因此小模型常可用比笨重模型少得多的資料、高得多的學習率訓練。</a:t>
+            </a:r>
+          </a:p>
+        </p:txBody>
+      </p:sp>
+    </p:spTree>
+  </p:cSld>
+  <p:clrMapOvr>
+    <a:masterClrMapping/>
+  </p:clrMapOvr>
+  <p:timing>
+    <p:tnLst>
+      <p:par>
+        <p:cTn id="1" dur="indefinite" restart="never" nodeType="tmRoot">
+          <p:childTnLst>
+            <p:seq concurrent="1" nextAc="seek">
+              <p:cTn id="2" dur="indefinite" nodeType="mainSeq">
+                <p:childTnLst>
+                  <p:par>
+                    <p:cTn id="3" fill="hold">
+                      <p:stCondLst>
+                        <p:cond delay="indefinite"/>
+                      </p:stCondLst>
+                      <p:childTnLst>
+                        <p:par>
+                          <p:cTn id="4" fill="hold">
+                            <p:stCondLst>
+                              <p:cond delay="0"/>
+                            </p:stCondLst>
+                            <p:childTnLst>
+                              <p:par>
+                                <p:cTn id="5" presetID="1" presetClass="entr" presetSubtype="0" fill="hold" grpId="0" nodeType="clickEffect">
+                                  <p:stCondLst>
+                                    <p:cond delay="0"/>
+                                  </p:stCondLst>
+                                  <p:childTnLst>
+                                    <p:set>
+                                      <p:cBhvr>
+                                        <p:cTn id="6" dur="1" fill="hold">
+                                          <p:stCondLst>
+                                            <p:cond delay="0"/>
+                                          </p:stCondLst>
+                                        </p:cTn>
+                                        <p:tgtEl>
+                                          <p:spTgt spid="6"/>
+                                        </p:tgtEl>
+                                        <p:attrNameLst>
+                                          <p:attrName>style.visibility</p:attrName>
+                                        </p:attrNameLst>
+                                      </p:cBhvr>
+                                      <p:to>
+                                        <p:strVal val="visible"/>
+                                      </p:to>
+                                    </p:set>
+                                  </p:childTnLst>
+                                </p:cTn>
+                              </p:par>
+                            </p:childTnLst>
+                          </p:cTn>
+                        </p:par>
+                      </p:childTnLst>
+                    </p:cTn>
+                  </p:par>
+                  <p:par>
+                    <p:cTn id="7" fill="hold">
+                      <p:stCondLst>
+                        <p:cond delay="indefinite"/>
+                      </p:stCondLst>
+                      <p:childTnLst>
+                        <p:par>
+                          <p:cTn id="8" fill="hold">
+                            <p:stCondLst>
+                              <p:cond delay="0"/>
+                            </p:stCondLst>
+                            <p:childTnLst>
+                              <p:par>
+                                <p:cTn id="9" presetID="1" presetClass="entr" presetSubtype="0" fill="hold" grpId="0" nodeType="clickEffect">
+                                  <p:stCondLst>
+                                    <p:cond delay="0"/>
+                                  </p:stCondLst>
+                                  <p:childTnLst>
+                                    <p:set>
+                                      <p:cBhvr>
+                                        <p:cTn id="10" dur="1" fill="hold">
+                                          <p:stCondLst>
+                                            <p:cond delay="0"/>
+                                          </p:stCondLst>
+                                        </p:cTn>
+                                        <p:tgtEl>
+                                          <p:spTgt spid="7"/>
+                                        </p:tgtEl>
+                                        <p:attrNameLst>
+                                          <p:attrName>style.visibility</p:attrName>
+                                        </p:attrNameLst>
+                                      </p:cBhvr>
+                                      <p:to>
+                                        <p:strVal val="visible"/>
+                                      </p:to>
+                                    </p:set>
+                                  </p:childTnLst>
+                                </p:cTn>
+                              </p:par>
+                            </p:childTnLst>
+                          </p:cTn>
+                        </p:par>
+                      </p:childTnLst>
+                    </p:cTn>
+                  </p:par>
+                  <p:par>
+                    <p:cTn id="11" fill="hold">
+                      <p:stCondLst>
+                        <p:cond delay="indefinite"/>
+                      </p:stCondLst>
+                      <p:childTnLst>
+                        <p:par>
+                          <p:cTn id="12" fill="hold">
+                            <p:stCondLst>
+                              <p:cond delay="0"/>
+                            </p:stCondLst>
+                            <p:childTnLst>
+                              <p:par>
+                                <p:cTn id="13" presetID="1" presetClass="entr" presetSubtype="0" fill="hold" grpId="0" nodeType="clickEffect">
+                                  <p:stCondLst>
+                                    <p:cond delay="0"/>
+                                  </p:stCondLst>
+                                  <p:childTnLst>
+                                    <p:set>
+                                      <p:cBhvr>
+                                        <p:cTn id="14" dur="1" fill="hold">
+                                          <p:stCondLst>
+                                            <p:cond delay="0"/>
+                                          </p:stCondLst>
+                                        </p:cTn>
+                                        <p:tgtEl>
+                                          <p:spTgt spid="8"/>
+                                        </p:tgtEl>
+                                        <p:attrNameLst>
+                                          <p:attrName>style.visibility</p:attrName>
+                                        </p:attrNameLst>
+                                      </p:cBhvr>
+                                      <p:to>
+                                        <p:strVal val="visible"/>
+                                      </p:to>
+                                    </p:set>
+                                  </p:childTnLst>
+                                </p:cTn>
+                              </p:par>
+                            </p:childTnLst>
+                          </p:cTn>
+                        </p:par>
+                      </p:childTnLst>
+                    </p:cTn>
+                  </p:par>
+                  <p:par>
+                    <p:cTn id="15" fill="hold">
+                      <p:stCondLst>
+                        <p:cond delay="indefinite"/>
+                      </p:stCondLst>
+                      <p:childTnLst>
+                        <p:par>
+                          <p:cTn id="16" fill="hold">
+                            <p:stCondLst>
+                              <p:cond delay="0"/>
+                            </p:stCondLst>
+                            <p:childTnLst>
+                              <p:par>
+                                <p:cTn id="17" presetID="1" presetClass="entr" presetSubtype="0" fill="hold" grpId="0" nodeType="clickEffect">
+                                  <p:stCondLst>
+                                    <p:cond delay="0"/>
+                                  </p:stCondLst>
+                                  <p:childTnLst>
+                                    <p:set>
+                                      <p:cBhvr>
+                                        <p:cTn id="18" dur="1" fill="hold">
+                                          <p:stCondLst>
+                                            <p:cond delay="0"/>
+                                          </p:stCondLst>
+                                        </p:cTn>
+                                        <p:tgtEl>
+                                          <p:spTgt spid="9"/>
+                                        </p:tgtEl>
+                                        <p:attrNameLst>
+                                          <p:attrName>style.visibility</p:attrName>
+                                        </p:attrNameLst>
+                                      </p:cBhvr>
+                                      <p:to>
+                                        <p:strVal val="visible"/>
+                                      </p:to>
+                                    </p:set>
+                                  </p:childTnLst>
+                                </p:cTn>
+                              </p:par>
+                            </p:childTnLst>
+                          </p:cTn>
+                        </p:par>
+                      </p:childTnLst>
+                    </p:cTn>
+                  </p:par>
+                  <p:par>
+                    <p:cTn id="19" fill="hold">
+                      <p:stCondLst>
+                        <p:cond delay="indefinite"/>
+                      </p:stCondLst>
+                      <p:childTnLst>
+                        <p:par>
+                          <p:cTn id="20" fill="hold">
+                            <p:stCondLst>
+                              <p:cond delay="0"/>
+                            </p:stCondLst>
+                            <p:childTnLst>
+                              <p:par>
+                                <p:cTn id="21" presetID="1" presetClass="entr" presetSubtype="0" fill="hold" grpId="0" nodeType="clickEffect">
+                                  <p:stCondLst>
+                                    <p:cond delay="0"/>
+                                  </p:stCondLst>
+                                  <p:childTnLst>
+                                    <p:set>
+                                      <p:cBhvr>
+                                        <p:cTn id="22" dur="1" fill="hold">
+                                          <p:stCondLst>
+                                            <p:cond delay="0"/>
+                                          </p:stCondLst>
+                                        </p:cTn>
+                                        <p:tgtEl>
+                                          <p:spTgt spid="10"/>
+                                        </p:tgtEl>
+                                        <p:attrNameLst>
+                                          <p:attrName>style.visibility</p:attrName>
+                                        </p:attrNameLst>
+                                      </p:cBhvr>
+                                      <p:to>
+                                        <p:strVal val="visible"/>
+                                      </p:to>
+                                    </p:set>
+                                  </p:childTnLst>
+                                </p:cTn>
+                              </p:par>
+                            </p:childTnLst>
+                          </p:cTn>
+                        </p:par>
+                      </p:childTnLst>
+                    </p:cTn>
+                  </p:par>
+                  <p:par>
+                    <p:cTn id="23" fill="hold">
+                      <p:stCondLst>
+                        <p:cond delay="indefinite"/>
+                      </p:stCondLst>
+                      <p:childTnLst>
+                        <p:par>
+                          <p:cTn id="24" fill="hold">
+                            <p:stCondLst>
+                              <p:cond delay="0"/>
+                            </p:stCondLst>
+                            <p:childTnLst>
+                              <p:par>
+                                <p:cTn id="25" presetID="1" presetClass="entr" presetSubtype="0" fill="hold" grpId="0" nodeType="clickEffect">
+                                  <p:stCondLst>
+                                    <p:cond delay="0"/>
+                                  </p:stCondLst>
+                                  <p:childTnLst>
+                                    <p:set>
+                                      <p:cBhvr>
+                                        <p:cTn id="26" dur="1" fill="hold">
+                                          <p:stCondLst>
+                                            <p:cond delay="0"/>
+                                          </p:stCondLst>
+                                        </p:cTn>
+                                        <p:tgtEl>
+                                          <p:spTgt spid="11"/>
+                                        </p:tgtEl>
+                                        <p:attrNameLst>
+                                          <p:attrName>style.visibility</p:attrName>
+                                        </p:attrNameLst>
+                                      </p:cBhvr>
+                                      <p:to>
+                                        <p:strVal val="visible"/>
+                                      </p:to>
+                                    </p:set>
+                                  </p:childTnLst>
+                                </p:cTn>
+                              </p:par>
+                            </p:childTnLst>
+                          </p:cTn>
+                        </p:par>
+                      </p:childTnLst>
+                    </p:cTn>
+                  </p:par>
+                </p:childTnLst>
+              </p:cTn>
+              <p:prevCondLst>
+                <p:cond evt="onPrev" delay="0">
+                  <p:tgtEl>
+                    <p:sldTgt/>
+                  </p:tgtEl>
+                </p:cond>
+              </p:prevCondLst>
+              <p:nextCondLst>
+                <p:cond evt="onNext" delay="0">
+                  <p:tgtEl>
+                    <p:sldTgt/>
+                  </p:tgtEl>
+                </p:cond>
+              </p:nextCondLst>
+            </p:seq>
+          </p:childTnLst>
+        </p:cTn>
+      </p:par>
+    </p:tnLst>
+    <p:bldLst>
+      <p:bldP spid="6" grpId="0" animBg="1"/>
+      <p:bldGraphic spid="7" grpId="0">
+        <p:bldAsOne/>
+      </p:bldGraphic>
       <p:bldP spid="8" grpId="0" animBg="1"/>
       <p:bldP spid="9" grpId="0" animBg="1"/>
       <p:bldP spid="10" grpId="0" animBg="1"/>
       <p:bldP spid="11" grpId="0" animBg="1"/>
-      <p:bldP spid="12" grpId="0" animBg="1"/>
-      <p:bldP spid="13" grpId="0" animBg="1"/>
     </p:bldLst>
   </p:timing>
 </p:sld>

--- a/topics/knowledge-distillation/課外主題_知識蒸餾.pptx
+++ b/topics/knowledge-distillation/課外主題_知識蒸餾.pptx
@@ -3173,6 +3173,7 @@
           </a:bodyPr>
           <a:lstStyle/>
           <a:p>
+            <a:pPr algn="just"/>
             <a:r>
               <a:rPr sz="5400" b="1">
                 <a:solidFill>
@@ -3207,6 +3208,7 @@
           </a:bodyPr>
           <a:lstStyle/>
           <a:p>
+            <a:pPr algn="just"/>
             <a:r>
               <a:rPr sz="3200" b="0">
                 <a:solidFill>
@@ -3284,6 +3286,7 @@
           </a:bodyPr>
           <a:lstStyle/>
           <a:p>
+            <a:pPr algn="just"/>
             <a:r>
               <a:rPr sz="1800" b="0">
                 <a:solidFill>
@@ -3295,6 +3298,7 @@
             </a:r>
           </a:p>
           <a:p>
+            <a:pPr algn="just"/>
             <a:r>
               <a:rPr sz="1800" b="0">
                 <a:solidFill>
@@ -3329,6 +3333,7 @@
           </a:bodyPr>
           <a:lstStyle/>
           <a:p>
+            <a:pPr algn="just"/>
             <a:r>
               <a:rPr sz="1400" b="0">
                 <a:solidFill>
@@ -3547,6 +3552,7 @@
           </a:bodyPr>
           <a:lstStyle/>
           <a:p>
+            <a:pPr algn="just"/>
             <a:r>
               <a:rPr sz="2700" b="1">
                 <a:solidFill>
@@ -3581,6 +3587,7 @@
           </a:bodyPr>
           <a:lstStyle/>
           <a:p>
+            <a:pPr algn="just"/>
             <a:r>
               <a:rPr sz="1300" b="0">
                 <a:solidFill>
@@ -3663,6 +3670,7 @@
           </a:bodyPr>
           <a:lstStyle/>
           <a:p>
+            <a:pPr algn="just"/>
             <a:r>
               <a:rPr sz="1700" b="0">
                 <a:solidFill>
@@ -3721,6 +3729,7 @@
           </a:bodyPr>
           <a:lstStyle/>
           <a:p>
+            <a:pPr algn="just"/>
             <a:r>
               <a:rPr sz="1700" b="0">
                 <a:solidFill>
@@ -3775,7 +3784,7 @@
           <a:bodyPr rtlCol="0" anchor="ctr" wrap="square"/>
           <a:lstStyle/>
           <a:p>
-            <a:pPr algn="l"/>
+            <a:pPr algn="just"/>
             <a:r>
               <a:rPr sz="1700" b="0">
                 <a:solidFill>
@@ -3787,7 +3796,7 @@
             </a:r>
           </a:p>
           <a:p>
-            <a:pPr algn="l"/>
+            <a:pPr algn="just"/>
             <a:r>
               <a:rPr sz="1700" b="0">
                 <a:solidFill>
@@ -3799,7 +3808,7 @@
             </a:r>
           </a:p>
           <a:p>
-            <a:pPr algn="l"/>
+            <a:pPr algn="just"/>
             <a:r>
               <a:rPr sz="1700" b="0">
                 <a:solidFill>
@@ -3854,7 +3863,7 @@
           <a:bodyPr rtlCol="0" anchor="ctr" wrap="square"/>
           <a:lstStyle/>
           <a:p>
-            <a:pPr algn="l"/>
+            <a:pPr algn="just"/>
             <a:r>
               <a:rPr sz="1700" b="0">
                 <a:solidFill>
@@ -3866,7 +3875,7 @@
             </a:r>
           </a:p>
           <a:p>
-            <a:pPr algn="l"/>
+            <a:pPr algn="just"/>
             <a:r>
               <a:rPr sz="1700" b="0">
                 <a:solidFill>
@@ -3878,7 +3887,7 @@
             </a:r>
           </a:p>
           <a:p>
-            <a:pPr algn="l"/>
+            <a:pPr algn="just"/>
             <a:r>
               <a:rPr sz="1700" b="0">
                 <a:solidFill>
@@ -3913,6 +3922,7 @@
           </a:bodyPr>
           <a:lstStyle/>
           <a:p>
+            <a:pPr algn="just"/>
             <a:r>
               <a:rPr sz="1900" b="1">
                 <a:solidFill>
@@ -4453,6 +4463,7 @@
           </a:bodyPr>
           <a:lstStyle/>
           <a:p>
+            <a:pPr algn="just"/>
             <a:r>
               <a:rPr sz="2700" b="1">
                 <a:solidFill>
@@ -4487,6 +4498,7 @@
           </a:bodyPr>
           <a:lstStyle/>
           <a:p>
+            <a:pPr algn="just"/>
             <a:r>
               <a:rPr sz="1300" b="0">
                 <a:solidFill>
@@ -5213,6 +5225,7 @@
           </a:bodyPr>
           <a:lstStyle/>
           <a:p>
+            <a:pPr algn="just"/>
             <a:r>
               <a:rPr sz="1600" b="0">
                 <a:solidFill>
@@ -5224,6 +5237,7 @@
             </a:r>
           </a:p>
           <a:p>
+            <a:pPr algn="just"/>
             <a:r>
               <a:rPr sz="1600" b="0">
                 <a:solidFill>
@@ -5825,6 +5839,7 @@
           </a:bodyPr>
           <a:lstStyle/>
           <a:p>
+            <a:pPr algn="just"/>
             <a:r>
               <a:rPr sz="1700" b="0">
                 <a:solidFill>
@@ -5836,6 +5851,7 @@
             </a:r>
           </a:p>
           <a:p>
+            <a:pPr algn="just"/>
             <a:r>
               <a:rPr sz="1700" b="0">
                 <a:solidFill>
@@ -6624,6 +6640,7 @@
           </a:bodyPr>
           <a:lstStyle/>
           <a:p>
+            <a:pPr algn="just"/>
             <a:r>
               <a:rPr sz="2700" b="1">
                 <a:solidFill>
@@ -6658,6 +6675,7 @@
           </a:bodyPr>
           <a:lstStyle/>
           <a:p>
+            <a:pPr algn="just"/>
             <a:r>
               <a:rPr sz="1300" b="0">
                 <a:solidFill>
@@ -7649,6 +7667,7 @@
           </a:bodyPr>
           <a:lstStyle/>
           <a:p>
+            <a:pPr algn="just"/>
             <a:r>
               <a:rPr sz="1700" b="0">
                 <a:solidFill>
@@ -8199,6 +8218,7 @@
           </a:bodyPr>
           <a:lstStyle/>
           <a:p>
+            <a:pPr algn="just"/>
             <a:r>
               <a:rPr sz="2700" b="1">
                 <a:solidFill>
@@ -8233,6 +8253,7 @@
           </a:bodyPr>
           <a:lstStyle/>
           <a:p>
+            <a:pPr algn="just"/>
             <a:r>
               <a:rPr sz="1300" b="0">
                 <a:solidFill>
@@ -8291,6 +8312,7 @@
           </a:bodyPr>
           <a:lstStyle/>
           <a:p>
+            <a:pPr algn="just"/>
             <a:r>
               <a:rPr sz="1800" b="0">
                 <a:solidFill>
@@ -9220,7 +9242,7 @@
           <a:bodyPr rtlCol="0" anchor="ctr" wrap="square"/>
           <a:lstStyle/>
           <a:p>
-            <a:pPr algn="l"/>
+            <a:pPr algn="just"/>
             <a:r>
               <a:rPr sz="1800" b="1">
                 <a:solidFill>
@@ -9232,7 +9254,7 @@
             </a:r>
           </a:p>
           <a:p>
-            <a:pPr algn="l"/>
+            <a:pPr algn="just"/>
             <a:r>
               <a:rPr sz="1800" b="1">
                 <a:solidFill>
@@ -9267,6 +9289,7 @@
           </a:bodyPr>
           <a:lstStyle/>
           <a:p>
+            <a:pPr algn="just"/>
             <a:r>
               <a:rPr sz="1700" b="0">
                 <a:solidFill>
@@ -9278,6 +9301,7 @@
             </a:r>
           </a:p>
           <a:p>
+            <a:pPr algn="just"/>
             <a:r>
               <a:rPr sz="1700" b="0">
                 <a:solidFill>
@@ -9970,6 +9994,7 @@
           </a:bodyPr>
           <a:lstStyle/>
           <a:p>
+            <a:pPr algn="just"/>
             <a:r>
               <a:rPr sz="2700" b="1">
                 <a:solidFill>
@@ -10004,6 +10029,7 @@
           </a:bodyPr>
           <a:lstStyle/>
           <a:p>
+            <a:pPr algn="just"/>
             <a:r>
               <a:rPr sz="1300" b="0">
                 <a:solidFill>
@@ -10349,6 +10375,7 @@
           </a:bodyPr>
           <a:lstStyle/>
           <a:p>
+            <a:pPr algn="just"/>
             <a:r>
               <a:rPr sz="1600" b="0">
                 <a:solidFill>
@@ -10360,6 +10387,7 @@
             </a:r>
           </a:p>
           <a:p>
+            <a:pPr algn="just"/>
             <a:r>
               <a:rPr sz="1600" b="0">
                 <a:solidFill>
@@ -10371,6 +10399,7 @@
             </a:r>
           </a:p>
           <a:p>
+            <a:pPr algn="just"/>
             <a:r>
               <a:rPr sz="1600" b="0">
                 <a:solidFill>
@@ -10429,6 +10458,7 @@
           </a:bodyPr>
           <a:lstStyle/>
           <a:p>
+            <a:pPr algn="just"/>
             <a:r>
               <a:rPr sz="1600" b="0">
                 <a:solidFill>
@@ -10440,6 +10470,7 @@
             </a:r>
           </a:p>
           <a:p>
+            <a:pPr algn="just"/>
             <a:r>
               <a:rPr sz="1600" b="0">
                 <a:solidFill>
@@ -10809,6 +10840,7 @@
           </a:bodyPr>
           <a:lstStyle/>
           <a:p>
+            <a:pPr algn="just"/>
             <a:r>
               <a:rPr sz="1400" b="0">
                 <a:solidFill>
@@ -10863,7 +10895,7 @@
           <a:bodyPr rtlCol="0" anchor="ctr" wrap="square"/>
           <a:lstStyle/>
           <a:p>
-            <a:pPr algn="l"/>
+            <a:pPr algn="just"/>
             <a:r>
               <a:rPr sz="1800" b="1">
                 <a:solidFill>
@@ -11408,6 +11440,7 @@
           </a:bodyPr>
           <a:lstStyle/>
           <a:p>
+            <a:pPr algn="just"/>
             <a:r>
               <a:rPr sz="2700" b="1">
                 <a:solidFill>
@@ -11442,6 +11475,7 @@
           </a:bodyPr>
           <a:lstStyle/>
           <a:p>
+            <a:pPr algn="just"/>
             <a:r>
               <a:rPr sz="1300" b="0">
                 <a:solidFill>
@@ -11953,6 +11987,7 @@
           </a:bodyPr>
           <a:lstStyle/>
           <a:p>
+            <a:pPr algn="just"/>
             <a:r>
               <a:rPr sz="1700" b="0">
                 <a:solidFill>
@@ -11964,6 +11999,7 @@
             </a:r>
           </a:p>
           <a:p>
+            <a:pPr algn="just"/>
             <a:r>
               <a:rPr sz="1700" b="0">
                 <a:solidFill>
@@ -12276,6 +12312,7 @@
           </a:bodyPr>
           <a:lstStyle/>
           <a:p>
+            <a:pPr algn="just"/>
             <a:r>
               <a:rPr sz="2700" b="1">
                 <a:solidFill>
@@ -12310,6 +12347,7 @@
           </a:bodyPr>
           <a:lstStyle/>
           <a:p>
+            <a:pPr algn="just"/>
             <a:r>
               <a:rPr sz="1300" b="0">
                 <a:solidFill>
@@ -12699,7 +12737,7 @@
           <a:bodyPr rtlCol="0" anchor="ctr" wrap="square"/>
           <a:lstStyle/>
           <a:p>
-            <a:pPr algn="l"/>
+            <a:pPr algn="just"/>
             <a:r>
               <a:rPr sz="1800" b="1">
                 <a:solidFill>
@@ -12711,7 +12749,7 @@
             </a:r>
           </a:p>
           <a:p>
-            <a:pPr algn="l"/>
+            <a:pPr algn="just"/>
             <a:r>
               <a:rPr sz="1800" b="1">
                 <a:solidFill>
@@ -12746,6 +12784,7 @@
           </a:bodyPr>
           <a:lstStyle/>
           <a:p>
+            <a:pPr algn="just"/>
             <a:r>
               <a:rPr sz="1700" b="0">
                 <a:solidFill>
@@ -12757,6 +12796,7 @@
             </a:r>
           </a:p>
           <a:p>
+            <a:pPr algn="just"/>
             <a:r>
               <a:rPr sz="1700" b="0">
                 <a:solidFill>
@@ -12768,6 +12808,7 @@
             </a:r>
           </a:p>
           <a:p>
+            <a:pPr algn="just"/>
             <a:r>
               <a:rPr sz="1700" b="0">
                 <a:solidFill>
@@ -12802,6 +12843,7 @@
           </a:bodyPr>
           <a:lstStyle/>
           <a:p>
+            <a:pPr algn="just"/>
             <a:r>
               <a:rPr sz="1500" b="0">
                 <a:solidFill>
@@ -13206,6 +13248,7 @@
           </a:bodyPr>
           <a:lstStyle/>
           <a:p>
+            <a:pPr algn="just"/>
             <a:r>
               <a:rPr sz="2700" b="1">
                 <a:solidFill>
@@ -13240,6 +13283,7 @@
           </a:bodyPr>
           <a:lstStyle/>
           <a:p>
+            <a:pPr algn="just"/>
             <a:r>
               <a:rPr sz="1300" b="0">
                 <a:solidFill>
@@ -13842,7 +13886,7 @@
           <a:bodyPr rtlCol="0" anchor="ctr" wrap="square"/>
           <a:lstStyle/>
           <a:p>
-            <a:pPr algn="l"/>
+            <a:pPr algn="just"/>
             <a:r>
               <a:rPr sz="1700" b="1">
                 <a:solidFill>
@@ -13854,7 +13898,7 @@
             </a:r>
           </a:p>
           <a:p>
-            <a:pPr algn="l"/>
+            <a:pPr algn="just"/>
             <a:r>
               <a:rPr sz="1700" b="1">
                 <a:solidFill>
@@ -13909,7 +13953,7 @@
           <a:bodyPr rtlCol="0" anchor="ctr" wrap="square"/>
           <a:lstStyle/>
           <a:p>
-            <a:pPr algn="l"/>
+            <a:pPr algn="just"/>
             <a:r>
               <a:rPr sz="1800" b="1">
                 <a:solidFill>
@@ -13944,6 +13988,7 @@
           </a:bodyPr>
           <a:lstStyle/>
           <a:p>
+            <a:pPr algn="just"/>
             <a:r>
               <a:rPr sz="1600" b="0">
                 <a:solidFill>
@@ -14348,6 +14393,7 @@
           </a:bodyPr>
           <a:lstStyle/>
           <a:p>
+            <a:pPr algn="just"/>
             <a:r>
               <a:rPr sz="2700" b="1">
                 <a:solidFill>
@@ -14382,6 +14428,7 @@
           </a:bodyPr>
           <a:lstStyle/>
           <a:p>
+            <a:pPr algn="just"/>
             <a:r>
               <a:rPr sz="1300" b="0">
                 <a:solidFill>
@@ -15028,7 +15075,7 @@
           <a:bodyPr rtlCol="0" anchor="ctr" wrap="square"/>
           <a:lstStyle/>
           <a:p>
-            <a:pPr algn="l"/>
+            <a:pPr algn="just"/>
             <a:r>
               <a:rPr sz="1700" b="1">
                 <a:solidFill>
@@ -15040,7 +15087,7 @@
             </a:r>
           </a:p>
           <a:p>
-            <a:pPr algn="l"/>
+            <a:pPr algn="just"/>
             <a:r>
               <a:rPr sz="1700" b="1">
                 <a:solidFill>
@@ -15095,7 +15142,7 @@
           <a:bodyPr rtlCol="0" anchor="ctr" wrap="square"/>
           <a:lstStyle/>
           <a:p>
-            <a:pPr algn="l"/>
+            <a:pPr algn="just"/>
             <a:r>
               <a:rPr sz="1700" b="1">
                 <a:solidFill>
@@ -15107,7 +15154,7 @@
             </a:r>
           </a:p>
           <a:p>
-            <a:pPr algn="l"/>
+            <a:pPr algn="just"/>
             <a:r>
               <a:rPr sz="1700" b="1">
                 <a:solidFill>
@@ -15142,6 +15189,7 @@
           </a:bodyPr>
           <a:lstStyle/>
           <a:p>
+            <a:pPr algn="just"/>
             <a:r>
               <a:rPr sz="1700" b="0">
                 <a:solidFill>
@@ -15153,6 +15201,7 @@
             </a:r>
           </a:p>
           <a:p>
+            <a:pPr algn="just"/>
             <a:r>
               <a:rPr sz="1700" b="0">
                 <a:solidFill>
@@ -15511,6 +15560,7 @@
           </a:bodyPr>
           <a:lstStyle/>
           <a:p>
+            <a:pPr algn="just"/>
             <a:r>
               <a:rPr sz="2700" b="1">
                 <a:solidFill>
@@ -15545,6 +15595,7 @@
           </a:bodyPr>
           <a:lstStyle/>
           <a:p>
+            <a:pPr algn="just"/>
             <a:r>
               <a:rPr sz="1300" b="0">
                 <a:solidFill>
@@ -15890,6 +15941,7 @@
           </a:bodyPr>
           <a:lstStyle/>
           <a:p>
+            <a:pPr algn="just"/>
             <a:r>
               <a:rPr sz="1500" b="0">
                 <a:solidFill>
@@ -15901,6 +15953,7 @@
             </a:r>
           </a:p>
           <a:p>
+            <a:pPr algn="just"/>
             <a:r>
               <a:rPr sz="1500" b="0">
                 <a:solidFill>
@@ -16246,6 +16299,7 @@
           </a:bodyPr>
           <a:lstStyle/>
           <a:p>
+            <a:pPr algn="just"/>
             <a:r>
               <a:rPr sz="1500" b="0">
                 <a:solidFill>
@@ -16257,6 +16311,7 @@
             </a:r>
           </a:p>
           <a:p>
+            <a:pPr algn="just"/>
             <a:r>
               <a:rPr sz="1500" b="0">
                 <a:solidFill>
@@ -16311,7 +16366,7 @@
           <a:bodyPr rtlCol="0" anchor="ctr" wrap="square"/>
           <a:lstStyle/>
           <a:p>
-            <a:pPr algn="l"/>
+            <a:pPr algn="just"/>
             <a:r>
               <a:rPr sz="1700" b="0">
                 <a:solidFill>
@@ -16323,7 +16378,7 @@
             </a:r>
           </a:p>
           <a:p>
-            <a:pPr algn="l"/>
+            <a:pPr algn="just"/>
             <a:r>
               <a:rPr sz="1700" b="0">
                 <a:solidFill>
@@ -16358,6 +16413,7 @@
           </a:bodyPr>
           <a:lstStyle/>
           <a:p>
+            <a:pPr algn="just"/>
             <a:r>
               <a:rPr sz="1500" b="0">
                 <a:solidFill>
@@ -16810,6 +16866,7 @@
           </a:bodyPr>
           <a:lstStyle/>
           <a:p>
+            <a:pPr algn="just"/>
             <a:r>
               <a:rPr sz="2700" b="1">
                 <a:solidFill>
@@ -16844,6 +16901,7 @@
           </a:bodyPr>
           <a:lstStyle/>
           <a:p>
+            <a:pPr algn="just"/>
             <a:r>
               <a:rPr sz="1300" b="0">
                 <a:solidFill>
@@ -16878,7 +16936,7 @@
           </a:bodyPr>
           <a:lstStyle/>
           <a:p>
-            <a:pPr>
+            <a:pPr algn="just">
               <a:lnSpc>
                 <a:spcPct val="135000"/>
               </a:lnSpc>
@@ -17119,6 +17177,7 @@
           </a:bodyPr>
           <a:lstStyle/>
           <a:p>
+            <a:pPr algn="just"/>
             <a:r>
               <a:rPr sz="2700" b="1">
                 <a:solidFill>
@@ -17173,7 +17232,7 @@
           <a:bodyPr rtlCol="0" anchor="ctr" wrap="square"/>
           <a:lstStyle/>
           <a:p>
-            <a:pPr algn="l"/>
+            <a:pPr algn="just"/>
             <a:r>
               <a:rPr sz="1900" b="1">
                 <a:solidFill>
@@ -17228,7 +17287,7 @@
           <a:bodyPr rtlCol="0" anchor="ctr" wrap="square"/>
           <a:lstStyle/>
           <a:p>
-            <a:pPr algn="l"/>
+            <a:pPr algn="just"/>
             <a:r>
               <a:rPr sz="1900" b="1">
                 <a:solidFill>
@@ -17283,7 +17342,7 @@
           <a:bodyPr rtlCol="0" anchor="ctr" wrap="square"/>
           <a:lstStyle/>
           <a:p>
-            <a:pPr algn="l"/>
+            <a:pPr algn="just"/>
             <a:r>
               <a:rPr sz="1900" b="1">
                 <a:solidFill>
@@ -17338,7 +17397,7 @@
           <a:bodyPr rtlCol="0" anchor="ctr" wrap="square"/>
           <a:lstStyle/>
           <a:p>
-            <a:pPr algn="l"/>
+            <a:pPr algn="just"/>
             <a:r>
               <a:rPr sz="1800" b="1">
                 <a:solidFill>
@@ -17393,7 +17452,7 @@
           <a:bodyPr rtlCol="0" anchor="ctr" wrap="square"/>
           <a:lstStyle/>
           <a:p>
-            <a:pPr algn="l"/>
+            <a:pPr algn="just"/>
             <a:r>
               <a:rPr sz="1800" b="1">
                 <a:solidFill>
@@ -17448,7 +17507,7 @@
           <a:bodyPr rtlCol="0" anchor="ctr" wrap="square"/>
           <a:lstStyle/>
           <a:p>
-            <a:pPr algn="l"/>
+            <a:pPr algn="just"/>
             <a:r>
               <a:rPr sz="1800" b="1">
                 <a:solidFill>
@@ -17483,6 +17542,7 @@
           </a:bodyPr>
           <a:lstStyle/>
           <a:p>
+            <a:pPr algn="just"/>
             <a:r>
               <a:rPr sz="1700" b="1">
                 <a:solidFill>
@@ -17977,6 +18037,7 @@
           </a:bodyPr>
           <a:lstStyle/>
           <a:p>
+            <a:pPr algn="just"/>
             <a:r>
               <a:rPr sz="2700" b="1">
                 <a:solidFill>
@@ -18011,6 +18072,7 @@
           </a:bodyPr>
           <a:lstStyle/>
           <a:p>
+            <a:pPr algn="just"/>
             <a:r>
               <a:rPr sz="1300" b="0">
                 <a:solidFill>
@@ -18518,7 +18580,7 @@
           <a:bodyPr rtlCol="0" anchor="ctr" wrap="square"/>
           <a:lstStyle/>
           <a:p>
-            <a:pPr algn="l"/>
+            <a:pPr algn="just"/>
             <a:r>
               <a:rPr sz="1700" b="1">
                 <a:solidFill>
@@ -18530,7 +18592,7 @@
             </a:r>
           </a:p>
           <a:p>
-            <a:pPr algn="l"/>
+            <a:pPr algn="just"/>
             <a:r>
               <a:rPr sz="1700" b="1">
                 <a:solidFill>
@@ -18542,7 +18604,7 @@
             </a:r>
           </a:p>
           <a:p>
-            <a:pPr algn="l"/>
+            <a:pPr algn="just"/>
             <a:r>
               <a:rPr sz="1700" b="1">
                 <a:solidFill>
@@ -18554,7 +18616,7 @@
             </a:r>
           </a:p>
           <a:p>
-            <a:pPr algn="l"/>
+            <a:pPr algn="just"/>
             <a:r>
               <a:rPr sz="1700" b="1">
                 <a:solidFill>
@@ -18589,6 +18651,7 @@
           </a:bodyPr>
           <a:lstStyle/>
           <a:p>
+            <a:pPr algn="just"/>
             <a:r>
               <a:rPr sz="1600" b="0">
                 <a:solidFill>
@@ -18600,6 +18663,7 @@
             </a:r>
           </a:p>
           <a:p>
+            <a:pPr algn="just"/>
             <a:r>
               <a:rPr sz="1600" b="0">
                 <a:solidFill>
@@ -18912,6 +18976,7 @@
           </a:bodyPr>
           <a:lstStyle/>
           <a:p>
+            <a:pPr algn="just"/>
             <a:r>
               <a:rPr sz="2700" b="1">
                 <a:solidFill>
@@ -18946,6 +19011,7 @@
           </a:bodyPr>
           <a:lstStyle/>
           <a:p>
+            <a:pPr algn="just"/>
             <a:r>
               <a:rPr sz="1300" b="0">
                 <a:solidFill>
@@ -19465,6 +19531,7 @@
           </a:bodyPr>
           <a:lstStyle/>
           <a:p>
+            <a:pPr algn="just"/>
             <a:r>
               <a:rPr sz="1800" b="1">
                 <a:solidFill>
@@ -19586,7 +19653,7 @@
           <a:bodyPr rtlCol="0" anchor="ctr" wrap="square"/>
           <a:lstStyle/>
           <a:p>
-            <a:pPr algn="l"/>
+            <a:pPr algn="just"/>
             <a:r>
               <a:rPr sz="1900" b="1">
                 <a:solidFill>
@@ -19598,7 +19665,7 @@
             </a:r>
           </a:p>
           <a:p>
-            <a:pPr algn="l"/>
+            <a:pPr algn="just"/>
             <a:r>
               <a:rPr sz="1900" b="1">
                 <a:solidFill>
@@ -19633,6 +19700,7 @@
           </a:bodyPr>
           <a:lstStyle/>
           <a:p>
+            <a:pPr algn="just"/>
             <a:r>
               <a:rPr sz="1800" b="0">
                 <a:solidFill>
@@ -19644,6 +19712,7 @@
             </a:r>
           </a:p>
           <a:p>
+            <a:pPr algn="just"/>
             <a:r>
               <a:rPr sz="1800" b="0">
                 <a:solidFill>
@@ -20140,6 +20209,7 @@
           </a:bodyPr>
           <a:lstStyle/>
           <a:p>
+            <a:pPr algn="just"/>
             <a:r>
               <a:rPr sz="2700" b="1">
                 <a:solidFill>
@@ -20174,6 +20244,7 @@
           </a:bodyPr>
           <a:lstStyle/>
           <a:p>
+            <a:pPr algn="just"/>
             <a:r>
               <a:rPr sz="1300" b="0">
                 <a:solidFill>
@@ -20208,6 +20279,7 @@
           </a:bodyPr>
           <a:lstStyle/>
           <a:p>
+            <a:pPr algn="just"/>
             <a:r>
               <a:rPr sz="1800" b="0">
                 <a:solidFill>
@@ -20742,7 +20814,7 @@
           <a:bodyPr rtlCol="0" anchor="ctr" wrap="square"/>
           <a:lstStyle/>
           <a:p>
-            <a:pPr algn="l"/>
+            <a:pPr algn="just"/>
             <a:r>
               <a:rPr sz="1900" b="1">
                 <a:solidFill>
@@ -20754,7 +20826,7 @@
             </a:r>
           </a:p>
           <a:p>
-            <a:pPr algn="l"/>
+            <a:pPr algn="just"/>
             <a:r>
               <a:rPr sz="1900" b="1">
                 <a:solidFill>
@@ -20809,7 +20881,7 @@
           <a:bodyPr rtlCol="0" anchor="ctr" wrap="square"/>
           <a:lstStyle/>
           <a:p>
-            <a:pPr algn="l"/>
+            <a:pPr algn="just"/>
             <a:r>
               <a:rPr sz="1800" b="1">
                 <a:solidFill>
@@ -20821,7 +20893,7 @@
             </a:r>
           </a:p>
           <a:p>
-            <a:pPr algn="l"/>
+            <a:pPr algn="just"/>
             <a:r>
               <a:rPr sz="1800" b="1">
                 <a:solidFill>
@@ -21228,6 +21300,7 @@
           </a:bodyPr>
           <a:lstStyle/>
           <a:p>
+            <a:pPr algn="just"/>
             <a:r>
               <a:rPr sz="2700" b="1">
                 <a:solidFill>
@@ -21262,6 +21335,7 @@
           </a:bodyPr>
           <a:lstStyle/>
           <a:p>
+            <a:pPr algn="just"/>
             <a:r>
               <a:rPr sz="1300" b="0">
                 <a:solidFill>
@@ -21296,6 +21370,7 @@
           </a:bodyPr>
           <a:lstStyle/>
           <a:p>
+            <a:pPr algn="just"/>
             <a:r>
               <a:rPr sz="1900" b="0">
                 <a:solidFill>
@@ -21754,7 +21829,7 @@
           <a:bodyPr rtlCol="0" anchor="ctr" wrap="square"/>
           <a:lstStyle/>
           <a:p>
-            <a:pPr algn="l"/>
+            <a:pPr algn="just"/>
             <a:r>
               <a:rPr sz="1900" b="1">
                 <a:solidFill>
@@ -21766,7 +21841,7 @@
             </a:r>
           </a:p>
           <a:p>
-            <a:pPr algn="l"/>
+            <a:pPr algn="just"/>
             <a:r>
               <a:rPr sz="1900" b="1">
                 <a:solidFill>
@@ -21821,7 +21896,7 @@
           <a:bodyPr rtlCol="0" anchor="ctr" wrap="square"/>
           <a:lstStyle/>
           <a:p>
-            <a:pPr algn="l"/>
+            <a:pPr algn="just"/>
             <a:r>
               <a:rPr sz="1900" b="1">
                 <a:solidFill>
@@ -21833,7 +21908,7 @@
             </a:r>
           </a:p>
           <a:p>
-            <a:pPr algn="l"/>
+            <a:pPr algn="just"/>
             <a:r>
               <a:rPr sz="1900" b="1">
                 <a:solidFill>
@@ -21868,6 +21943,7 @@
           </a:bodyPr>
           <a:lstStyle/>
           <a:p>
+            <a:pPr algn="just"/>
             <a:r>
               <a:rPr sz="1700" b="0">
                 <a:solidFill>
@@ -21879,6 +21955,7 @@
             </a:r>
           </a:p>
           <a:p>
+            <a:pPr algn="just"/>
             <a:r>
               <a:rPr sz="1700" b="0">
                 <a:solidFill>
@@ -22283,6 +22360,7 @@
           </a:bodyPr>
           <a:lstStyle/>
           <a:p>
+            <a:pPr algn="just"/>
             <a:r>
               <a:rPr sz="2700" b="1">
                 <a:solidFill>
@@ -22317,6 +22395,7 @@
           </a:bodyPr>
           <a:lstStyle/>
           <a:p>
+            <a:pPr algn="just"/>
             <a:r>
               <a:rPr sz="1300" b="0">
                 <a:solidFill>
@@ -22375,6 +22454,7 @@
           </a:bodyPr>
           <a:lstStyle/>
           <a:p>
+            <a:pPr algn="just"/>
             <a:r>
               <a:rPr sz="1800" b="0">
                 <a:solidFill>
@@ -22386,6 +22466,7 @@
             </a:r>
           </a:p>
           <a:p>
+            <a:pPr algn="just"/>
             <a:r>
               <a:rPr sz="1800" b="0">
                 <a:solidFill>
@@ -23132,7 +23213,7 @@
           <a:bodyPr rtlCol="0" anchor="ctr" wrap="square"/>
           <a:lstStyle/>
           <a:p>
-            <a:pPr algn="l"/>
+            <a:pPr algn="just"/>
             <a:r>
               <a:rPr sz="1800" b="1">
                 <a:solidFill>
@@ -23144,7 +23225,7 @@
             </a:r>
           </a:p>
           <a:p>
-            <a:pPr algn="l"/>
+            <a:pPr algn="just"/>
             <a:r>
               <a:rPr sz="1800" b="1">
                 <a:solidFill>
@@ -23179,6 +23260,7 @@
           </a:bodyPr>
           <a:lstStyle/>
           <a:p>
+            <a:pPr algn="just"/>
             <a:r>
               <a:rPr sz="1700" b="0">
                 <a:solidFill>
@@ -23821,6 +23903,7 @@
           </a:bodyPr>
           <a:lstStyle/>
           <a:p>
+            <a:pPr algn="just"/>
             <a:r>
               <a:rPr sz="2700" b="1">
                 <a:solidFill>
@@ -23855,6 +23938,7 @@
           </a:bodyPr>
           <a:lstStyle/>
           <a:p>
+            <a:pPr algn="just"/>
             <a:r>
               <a:rPr sz="1300" b="0">
                 <a:solidFill>
@@ -23913,6 +23997,7 @@
           </a:bodyPr>
           <a:lstStyle/>
           <a:p>
+            <a:pPr algn="just"/>
             <a:r>
               <a:rPr sz="1800" b="0">
                 <a:solidFill>
@@ -23924,6 +24009,7 @@
             </a:r>
           </a:p>
           <a:p>
+            <a:pPr algn="just"/>
             <a:r>
               <a:rPr sz="1800" b="0">
                 <a:solidFill>
@@ -24670,7 +24756,7 @@
           <a:bodyPr rtlCol="0" anchor="ctr" wrap="square"/>
           <a:lstStyle/>
           <a:p>
-            <a:pPr algn="l"/>
+            <a:pPr algn="just"/>
             <a:r>
               <a:rPr sz="1800" b="1">
                 <a:solidFill>
@@ -24682,7 +24768,7 @@
             </a:r>
           </a:p>
           <a:p>
-            <a:pPr algn="l"/>
+            <a:pPr algn="just"/>
             <a:r>
               <a:rPr sz="1800" b="1">
                 <a:solidFill>
@@ -24717,6 +24803,7 @@
           </a:bodyPr>
           <a:lstStyle/>
           <a:p>
+            <a:pPr algn="just"/>
             <a:r>
               <a:rPr sz="1700" b="0">
                 <a:solidFill>
@@ -25359,6 +25446,7 @@
           </a:bodyPr>
           <a:lstStyle/>
           <a:p>
+            <a:pPr algn="just"/>
             <a:r>
               <a:rPr sz="2700" b="1">
                 <a:solidFill>
@@ -25393,6 +25481,7 @@
           </a:bodyPr>
           <a:lstStyle/>
           <a:p>
+            <a:pPr algn="just"/>
             <a:r>
               <a:rPr sz="1300" b="0">
                 <a:solidFill>
@@ -25762,6 +25851,7 @@
           </a:bodyPr>
           <a:lstStyle/>
           <a:p>
+            <a:pPr algn="just"/>
             <a:r>
               <a:rPr sz="1600" b="0">
                 <a:solidFill>
@@ -25773,6 +25863,7 @@
             </a:r>
           </a:p>
           <a:p>
+            <a:pPr algn="just"/>
             <a:r>
               <a:rPr sz="1600" b="0">
                 <a:solidFill>
@@ -25827,7 +25918,7 @@
           <a:bodyPr rtlCol="0" anchor="ctr" wrap="square"/>
           <a:lstStyle/>
           <a:p>
-            <a:pPr algn="l"/>
+            <a:pPr algn="just"/>
             <a:r>
               <a:rPr sz="1900" b="1">
                 <a:solidFill>
@@ -25882,7 +25973,7 @@
           <a:bodyPr rtlCol="0" anchor="ctr" wrap="square"/>
           <a:lstStyle/>
           <a:p>
-            <a:pPr algn="l"/>
+            <a:pPr algn="just"/>
             <a:r>
               <a:rPr sz="1900" b="1">
                 <a:solidFill>
@@ -25917,6 +26008,7 @@
           </a:bodyPr>
           <a:lstStyle/>
           <a:p>
+            <a:pPr algn="just"/>
             <a:r>
               <a:rPr sz="1600" b="0">
                 <a:solidFill>
@@ -25928,6 +26020,7 @@
             </a:r>
           </a:p>
           <a:p>
+            <a:pPr algn="just"/>
             <a:r>
               <a:rPr sz="1600" b="0">
                 <a:solidFill>

--- a/topics/knowledge-distillation/課外主題_知識蒸餾.pptx
+++ b/topics/knowledge-distillation/課外主題_知識蒸餾.pptx
@@ -3152,16 +3152,40 @@
           </a:p>
         </p:txBody>
       </p:sp>
+      <p:pic>
+        <p:nvPicPr>
+          <p:cNvPr id="3" name="Picture 2" descr="cover_art.png"/>
+          <p:cNvPicPr>
+            <a:picLocks noChangeAspect="1"/>
+          </p:cNvPicPr>
+          <p:nvPr/>
+        </p:nvPicPr>
+        <p:blipFill>
+          <a:blip r:embed="rId2"/>
+          <a:stretch>
+            <a:fillRect/>
+          </a:stretch>
+        </p:blipFill>
+        <p:spPr>
+          <a:xfrm>
+            <a:off x="6172200" y="1051560"/>
+            <a:ext cx="5760720" cy="4279392"/>
+          </a:xfrm>
+          <a:prstGeom prst="rect">
+            <a:avLst/>
+          </a:prstGeom>
+        </p:spPr>
+      </p:pic>
       <p:sp>
         <p:nvSpPr>
-          <p:cNvPr id="3" name="TextBox 2"/>
+          <p:cNvPr id="4" name="TextBox 3"/>
           <p:cNvSpPr txBox="1"/>
           <p:nvPr/>
         </p:nvSpPr>
         <p:spPr>
           <a:xfrm>
             <a:off x="822960" y="1737360"/>
-            <a:ext cx="10515600" cy="1005840"/>
+            <a:ext cx="5303520" cy="1005840"/>
           </a:xfrm>
           <a:prstGeom prst="rect">
             <a:avLst/>
@@ -3174,7 +3198,7 @@
           </a:bodyPr>
           <a:lstStyle/>
           <a:p>
-            <a:pPr algn="just"/>
+            <a:pPr algn="l"/>
             <a:r>
               <a:rPr sz="5400" b="1">
                 <a:solidFill>
@@ -3189,14 +3213,14 @@
       </p:sp>
       <p:sp>
         <p:nvSpPr>
-          <p:cNvPr id="4" name="TextBox 3"/>
+          <p:cNvPr id="5" name="TextBox 4"/>
           <p:cNvSpPr txBox="1"/>
           <p:nvPr/>
         </p:nvSpPr>
         <p:spPr>
           <a:xfrm>
             <a:off x="822960" y="2743200"/>
-            <a:ext cx="10515600" cy="731520"/>
+            <a:ext cx="5303520" cy="731520"/>
           </a:xfrm>
           <a:prstGeom prst="rect">
             <a:avLst/>
@@ -3209,22 +3233,22 @@
           </a:bodyPr>
           <a:lstStyle/>
           <a:p>
-            <a:pPr algn="just"/>
+            <a:pPr algn="l"/>
             <a:r>
-              <a:rPr sz="3200" b="0">
+              <a:rPr sz="2600" b="0">
                 <a:solidFill>
                   <a:srgbClr val="FFFFFF"/>
                 </a:solidFill>
                 <a:latin typeface="Microsoft JhengHei"/>
               </a:rPr>
-              <a:t>Knowledge Distillation（KD）</a:t>
+              <a:t>Knowledge Distillation (KD)</a:t>
             </a:r>
           </a:p>
         </p:txBody>
       </p:sp>
       <p:sp>
         <p:nvSpPr>
-          <p:cNvPr id="5" name="Rectangle 4"/>
+          <p:cNvPr id="6" name="Rectangle 5"/>
           <p:cNvSpPr/>
           <p:nvPr/>
         </p:nvSpPr>
@@ -3267,14 +3291,14 @@
       </p:sp>
       <p:sp>
         <p:nvSpPr>
-          <p:cNvPr id="6" name="TextBox 5"/>
+          <p:cNvPr id="7" name="TextBox 6"/>
           <p:cNvSpPr txBox="1"/>
           <p:nvPr/>
         </p:nvSpPr>
         <p:spPr>
           <a:xfrm>
             <a:off x="822960" y="3840480"/>
-            <a:ext cx="10515600" cy="822960"/>
+            <a:ext cx="5303520" cy="822960"/>
           </a:xfrm>
           <a:prstGeom prst="rect">
             <a:avLst/>
@@ -3287,9 +3311,9 @@
           </a:bodyPr>
           <a:lstStyle/>
           <a:p>
-            <a:pPr algn="just"/>
+            <a:pPr algn="l"/>
             <a:r>
-              <a:rPr sz="1800" b="0">
+              <a:rPr sz="1700" b="0">
                 <a:solidFill>
                   <a:srgbClr val="C7D6E5"/>
                 </a:solidFill>
@@ -3299,9 +3323,9 @@
             </a:r>
           </a:p>
           <a:p>
-            <a:pPr algn="just"/>
+            <a:pPr algn="l"/>
             <a:r>
-              <a:rPr sz="1800" b="0">
+              <a:rPr sz="1700" b="0">
                 <a:solidFill>
                   <a:srgbClr val="C7D6E5"/>
                 </a:solidFill>
@@ -3314,7 +3338,7 @@
       </p:sp>
       <p:sp>
         <p:nvSpPr>
-          <p:cNvPr id="7" name="TextBox 6"/>
+          <p:cNvPr id="8" name="TextBox 7"/>
           <p:cNvSpPr txBox="1"/>
           <p:nvPr/>
         </p:nvSpPr>
@@ -3334,7 +3358,7 @@
           </a:bodyPr>
           <a:lstStyle/>
           <a:p>
-            <a:pPr algn="just"/>
+            <a:pPr algn="l"/>
             <a:r>
               <a:rPr sz="1400" b="0">
                 <a:solidFill>
@@ -3386,7 +3410,7 @@
                                           </p:stCondLst>
                                         </p:cTn>
                                         <p:tgtEl>
-                                          <p:spTgt spid="6"/>
+                                          <p:spTgt spid="7"/>
                                         </p:tgtEl>
                                         <p:attrNameLst>
                                           <p:attrName>style.visibility</p:attrName>
@@ -3427,7 +3451,7 @@
       </p:par>
     </p:tnLst>
     <p:bldLst>
-      <p:bldP spid="6" grpId="0" animBg="1"/>
+      <p:bldP spid="7" grpId="0" animBg="1"/>
     </p:bldLst>
   </p:timing>
 </p:sld>

--- a/topics/knowledge-distillation/課外主題_知識蒸餾.pptx
+++ b/topics/knowledge-distillation/課外主題_知識蒸餾.pptx
@@ -26,6 +26,7 @@
     <p:sldId id="274" r:id="rId25"/>
     <p:sldId id="275" r:id="rId26"/>
     <p:sldId id="276" r:id="rId27"/>
+    <p:sldId id="277" r:id="rId28"/>
   </p:sldIdLst>
   <p:sldSz cx="12191695" cy="6858000" type="screen4x3"/>
   <p:notesSz cx="6858000" cy="9144000"/>
@@ -3585,6 +3586,1549 @@
                 </a:solidFill>
                 <a:latin typeface="Microsoft JhengHei"/>
               </a:rPr>
+              <a:t>二、帶溫度的 softmax：T = 4</a:t>
+            </a:r>
+          </a:p>
+        </p:txBody>
+      </p:sp>
+      <p:sp>
+        <p:nvSpPr>
+          <p:cNvPr id="5" name="TextBox 4"/>
+          <p:cNvSpPr txBox="1"/>
+          <p:nvPr/>
+        </p:nvSpPr>
+        <p:spPr>
+          <a:xfrm>
+            <a:off x="411480" y="521207"/>
+            <a:ext cx="11338560" cy="301752"/>
+          </a:xfrm>
+          <a:prstGeom prst="rect">
+            <a:avLst/>
+          </a:prstGeom>
+          <a:noFill/>
+        </p:spPr>
+        <p:txBody>
+          <a:bodyPr wrap="square">
+            <a:spAutoFit/>
+          </a:bodyPr>
+          <a:lstStyle/>
+          <a:p>
+            <a:pPr algn="just"/>
+            <a:r>
+              <a:rPr sz="1300" b="0">
+                <a:solidFill>
+                  <a:srgbClr val="C7D6E5"/>
+                </a:solidFill>
+                <a:latin typeface="Microsoft JhengHei"/>
+              </a:rPr>
+              <a:t>同一組笨重模型的 logit，改用較高的溫度</a:t>
+            </a:r>
+          </a:p>
+        </p:txBody>
+      </p:sp>
+      <p:pic>
+        <p:nvPicPr>
+          <p:cNvPr id="6" name="Picture 5" descr="m_softmax.png"/>
+          <p:cNvPicPr>
+            <a:picLocks noChangeAspect="1"/>
+          </p:cNvPicPr>
+          <p:nvPr/>
+        </p:nvPicPr>
+        <p:blipFill>
+          <a:blip r:embed="rId2"/>
+          <a:stretch>
+            <a:fillRect/>
+          </a:stretch>
+        </p:blipFill>
+        <p:spPr>
+          <a:xfrm>
+            <a:off x="822960" y="1051560"/>
+            <a:ext cx="1867014" cy="868680"/>
+          </a:xfrm>
+          <a:prstGeom prst="rect">
+            <a:avLst/>
+          </a:prstGeom>
+        </p:spPr>
+      </p:pic>
+      <p:sp>
+        <p:nvSpPr>
+          <p:cNvPr id="7" name="TextBox 6"/>
+          <p:cNvSpPr txBox="1"/>
+          <p:nvPr/>
+        </p:nvSpPr>
+        <p:spPr>
+          <a:xfrm>
+            <a:off x="4754880" y="1097280"/>
+            <a:ext cx="6949440" cy="914400"/>
+          </a:xfrm>
+          <a:prstGeom prst="rect">
+            <a:avLst/>
+          </a:prstGeom>
+          <a:noFill/>
+        </p:spPr>
+        <p:txBody>
+          <a:bodyPr wrap="square">
+            <a:spAutoFit/>
+          </a:bodyPr>
+          <a:lstStyle/>
+          <a:p>
+            <a:pPr algn="just"/>
+            <a:r>
+              <a:rPr sz="1800" b="0">
+                <a:solidFill>
+                  <a:srgbClr val="202020"/>
+                </a:solidFill>
+                <a:latin typeface="Microsoft JhengHei"/>
+              </a:rPr>
+              <a:t>T 取較大的值，類別上的機率分布較軟：</a:t>
+            </a:r>
+          </a:p>
+          <a:p>
+            <a:pPr algn="just"/>
+            <a:r>
+              <a:rPr sz="1800" b="0">
+                <a:solidFill>
+                  <a:srgbClr val="202020"/>
+                </a:solidFill>
+                <a:latin typeface="Microsoft JhengHei"/>
+              </a:rPr>
+              <a:t>第 1 步把 logit 之間的差距縮小為四分之一。</a:t>
+            </a:r>
+          </a:p>
+        </p:txBody>
+      </p:sp>
+      <p:graphicFrame>
+        <p:nvGraphicFramePr>
+          <p:cNvPr id="8" name="Table 7"/>
+          <p:cNvGraphicFramePr>
+            <a:graphicFrameLocks noGrp="1"/>
+          </p:cNvGraphicFramePr>
+          <p:nvPr/>
+        </p:nvGraphicFramePr>
+        <p:xfrm>
+          <a:off x="731520" y="2240280"/>
+          <a:ext cx="1188720" cy="1316736"/>
+        </p:xfrm>
+        <a:graphic>
+          <a:graphicData uri="http://schemas.openxmlformats.org/drawingml/2006/table">
+            <a:tbl>
+              <a:tblPr bandRow="1">
+                <a:tableStyleId>{5C22544A-7EE6-4342-B048-85BDC9FD1C3A}</a:tableStyleId>
+              </a:tblPr>
+              <a:tblGrid>
+                <a:gridCol w="1188720"/>
+              </a:tblGrid>
+              <a:tr h="329184">
+                <a:tc>
+                  <a:txBody>
+                    <a:bodyPr/>
+                    <a:lstStyle/>
+                    <a:p>
+                      <a:pPr algn="ctr"/>
+                      <a:r>
+                        <a:rPr sz="1500" b="1">
+                          <a:solidFill>
+                            <a:srgbClr val="FFFFFF"/>
+                          </a:solidFill>
+                          <a:latin typeface="Microsoft JhengHei"/>
+                        </a:rPr>
+                        <a:t>類別</a:t>
+                      </a:r>
+                    </a:p>
+                  </a:txBody>
+                  <a:tcPr marL="36576" marR="36576" marT="9144" marB="9144">
+                    <a:solidFill>
+                      <a:srgbClr val="1F4E79"/>
+                    </a:solidFill>
+                  </a:tcPr>
+                </a:tc>
+              </a:tr>
+              <a:tr h="329184">
+                <a:tc>
+                  <a:txBody>
+                    <a:bodyPr/>
+                    <a:lstStyle/>
+                    <a:p>
+                      <a:pPr algn="ctr"/>
+                      <a:r>
+                        <a:rPr sz="1500" b="0">
+                          <a:solidFill>
+                            <a:srgbClr val="202020"/>
+                          </a:solidFill>
+                          <a:latin typeface="Consolas"/>
+                        </a:rPr>
+                        <a:t>2</a:t>
+                      </a:r>
+                    </a:p>
+                  </a:txBody>
+                  <a:tcPr marL="36576" marR="36576" marT="9144" marB="9144">
+                    <a:solidFill>
+                      <a:srgbClr val="FFFFFF"/>
+                    </a:solidFill>
+                  </a:tcPr>
+                </a:tc>
+              </a:tr>
+              <a:tr h="329184">
+                <a:tc>
+                  <a:txBody>
+                    <a:bodyPr/>
+                    <a:lstStyle/>
+                    <a:p>
+                      <a:pPr algn="ctr"/>
+                      <a:r>
+                        <a:rPr sz="1500" b="0">
+                          <a:solidFill>
+                            <a:srgbClr val="202020"/>
+                          </a:solidFill>
+                          <a:latin typeface="Consolas"/>
+                        </a:rPr>
+                        <a:t>3</a:t>
+                      </a:r>
+                    </a:p>
+                  </a:txBody>
+                  <a:tcPr marL="36576" marR="36576" marT="9144" marB="9144">
+                    <a:solidFill>
+                      <a:srgbClr val="FFFFFF"/>
+                    </a:solidFill>
+                  </a:tcPr>
+                </a:tc>
+              </a:tr>
+              <a:tr h="329184">
+                <a:tc>
+                  <a:txBody>
+                    <a:bodyPr/>
+                    <a:lstStyle/>
+                    <a:p>
+                      <a:pPr algn="ctr"/>
+                      <a:r>
+                        <a:rPr sz="1500" b="0">
+                          <a:solidFill>
+                            <a:srgbClr val="202020"/>
+                          </a:solidFill>
+                          <a:latin typeface="Consolas"/>
+                        </a:rPr>
+                        <a:t>7</a:t>
+                      </a:r>
+                    </a:p>
+                  </a:txBody>
+                  <a:tcPr marL="36576" marR="36576" marT="9144" marB="9144">
+                    <a:solidFill>
+                      <a:srgbClr val="FFFFFF"/>
+                    </a:solidFill>
+                  </a:tcPr>
+                </a:tc>
+              </a:tr>
+            </a:tbl>
+          </a:graphicData>
+        </a:graphic>
+      </p:graphicFrame>
+      <p:graphicFrame>
+        <p:nvGraphicFramePr>
+          <p:cNvPr id="9" name="Table 8"/>
+          <p:cNvGraphicFramePr>
+            <a:graphicFrameLocks noGrp="1"/>
+          </p:cNvGraphicFramePr>
+          <p:nvPr/>
+        </p:nvGraphicFramePr>
+        <p:xfrm>
+          <a:off x="2057400" y="2240280"/>
+          <a:ext cx="1463040" cy="1316736"/>
+        </p:xfrm>
+        <a:graphic>
+          <a:graphicData uri="http://schemas.openxmlformats.org/drawingml/2006/table">
+            <a:tbl>
+              <a:tblPr bandRow="1">
+                <a:tableStyleId>{5C22544A-7EE6-4342-B048-85BDC9FD1C3A}</a:tableStyleId>
+              </a:tblPr>
+              <a:tblGrid>
+                <a:gridCol w="1463040"/>
+              </a:tblGrid>
+              <a:tr h="329184">
+                <a:tc>
+                  <a:txBody>
+                    <a:bodyPr/>
+                    <a:lstStyle/>
+                    <a:p>
+                      <a:pPr algn="ctr"/>
+                      <a:r>
+                        <a:rPr sz="1500" b="1">
+                          <a:solidFill>
+                            <a:srgbClr val="FFFFFF"/>
+                          </a:solidFill>
+                          <a:latin typeface="Microsoft JhengHei"/>
+                        </a:rPr>
+                        <a:t>v</a:t>
+                      </a:r>
+                    </a:p>
+                  </a:txBody>
+                  <a:tcPr marL="36576" marR="36576" marT="9144" marB="9144">
+                    <a:solidFill>
+                      <a:srgbClr val="1F4E79"/>
+                    </a:solidFill>
+                  </a:tcPr>
+                </a:tc>
+              </a:tr>
+              <a:tr h="329184">
+                <a:tc>
+                  <a:txBody>
+                    <a:bodyPr/>
+                    <a:lstStyle/>
+                    <a:p>
+                      <a:pPr algn="ctr"/>
+                      <a:r>
+                        <a:rPr sz="1500" b="0">
+                          <a:solidFill>
+                            <a:srgbClr val="202020"/>
+                          </a:solidFill>
+                          <a:latin typeface="Consolas"/>
+                        </a:rPr>
+                        <a:t>8</a:t>
+                      </a:r>
+                    </a:p>
+                  </a:txBody>
+                  <a:tcPr marL="36576" marR="36576" marT="9144" marB="9144">
+                    <a:solidFill>
+                      <a:srgbClr val="FFFFFF"/>
+                    </a:solidFill>
+                  </a:tcPr>
+                </a:tc>
+              </a:tr>
+              <a:tr h="329184">
+                <a:tc>
+                  <a:txBody>
+                    <a:bodyPr/>
+                    <a:lstStyle/>
+                    <a:p>
+                      <a:pPr algn="ctr"/>
+                      <a:r>
+                        <a:rPr sz="1500" b="0">
+                          <a:solidFill>
+                            <a:srgbClr val="202020"/>
+                          </a:solidFill>
+                          <a:latin typeface="Consolas"/>
+                        </a:rPr>
+                        <a:t>4</a:t>
+                      </a:r>
+                    </a:p>
+                  </a:txBody>
+                  <a:tcPr marL="36576" marR="36576" marT="9144" marB="9144">
+                    <a:solidFill>
+                      <a:srgbClr val="FFFFFF"/>
+                    </a:solidFill>
+                  </a:tcPr>
+                </a:tc>
+              </a:tr>
+              <a:tr h="329184">
+                <a:tc>
+                  <a:txBody>
+                    <a:bodyPr/>
+                    <a:lstStyle/>
+                    <a:p>
+                      <a:pPr algn="ctr"/>
+                      <a:r>
+                        <a:rPr sz="1500" b="0">
+                          <a:solidFill>
+                            <a:srgbClr val="202020"/>
+                          </a:solidFill>
+                          <a:latin typeface="Consolas"/>
+                        </a:rPr>
+                        <a:t>0</a:t>
+                      </a:r>
+                    </a:p>
+                  </a:txBody>
+                  <a:tcPr marL="36576" marR="36576" marT="9144" marB="9144">
+                    <a:solidFill>
+                      <a:srgbClr val="FFFFFF"/>
+                    </a:solidFill>
+                  </a:tcPr>
+                </a:tc>
+              </a:tr>
+            </a:tbl>
+          </a:graphicData>
+        </a:graphic>
+      </p:graphicFrame>
+      <p:graphicFrame>
+        <p:nvGraphicFramePr>
+          <p:cNvPr id="10" name="Table 9"/>
+          <p:cNvGraphicFramePr>
+            <a:graphicFrameLocks noGrp="1"/>
+          </p:cNvGraphicFramePr>
+          <p:nvPr/>
+        </p:nvGraphicFramePr>
+        <p:xfrm>
+          <a:off x="3657600" y="2240280"/>
+          <a:ext cx="1965960" cy="1316736"/>
+        </p:xfrm>
+        <a:graphic>
+          <a:graphicData uri="http://schemas.openxmlformats.org/drawingml/2006/table">
+            <a:tbl>
+              <a:tblPr bandRow="1">
+                <a:tableStyleId>{5C22544A-7EE6-4342-B048-85BDC9FD1C3A}</a:tableStyleId>
+              </a:tblPr>
+              <a:tblGrid>
+                <a:gridCol w="1965960"/>
+              </a:tblGrid>
+              <a:tr h="329184">
+                <a:tc>
+                  <a:txBody>
+                    <a:bodyPr/>
+                    <a:lstStyle/>
+                    <a:p>
+                      <a:pPr algn="ctr"/>
+                      <a:r>
+                        <a:rPr sz="1500" b="1">
+                          <a:solidFill>
+                            <a:srgbClr val="FFFFFF"/>
+                          </a:solidFill>
+                          <a:latin typeface="Microsoft JhengHei"/>
+                        </a:rPr>
+                        <a:t>第 1 步 ÷ T</a:t>
+                      </a:r>
+                    </a:p>
+                  </a:txBody>
+                  <a:tcPr marL="36576" marR="36576" marT="9144" marB="9144">
+                    <a:solidFill>
+                      <a:srgbClr val="1F4E79"/>
+                    </a:solidFill>
+                  </a:tcPr>
+                </a:tc>
+              </a:tr>
+              <a:tr h="329184">
+                <a:tc>
+                  <a:txBody>
+                    <a:bodyPr/>
+                    <a:lstStyle/>
+                    <a:p>
+                      <a:pPr algn="ctr"/>
+                      <a:r>
+                        <a:rPr sz="1500" b="0">
+                          <a:solidFill>
+                            <a:srgbClr val="202020"/>
+                          </a:solidFill>
+                          <a:latin typeface="Consolas"/>
+                        </a:rPr>
+                        <a:t>2.0000</a:t>
+                      </a:r>
+                    </a:p>
+                  </a:txBody>
+                  <a:tcPr marL="36576" marR="36576" marT="9144" marB="9144">
+                    <a:solidFill>
+                      <a:srgbClr val="FFFFFF"/>
+                    </a:solidFill>
+                  </a:tcPr>
+                </a:tc>
+              </a:tr>
+              <a:tr h="329184">
+                <a:tc>
+                  <a:txBody>
+                    <a:bodyPr/>
+                    <a:lstStyle/>
+                    <a:p>
+                      <a:pPr algn="ctr"/>
+                      <a:r>
+                        <a:rPr sz="1500" b="0">
+                          <a:solidFill>
+                            <a:srgbClr val="202020"/>
+                          </a:solidFill>
+                          <a:latin typeface="Consolas"/>
+                        </a:rPr>
+                        <a:t>1.0000</a:t>
+                      </a:r>
+                    </a:p>
+                  </a:txBody>
+                  <a:tcPr marL="36576" marR="36576" marT="9144" marB="9144">
+                    <a:solidFill>
+                      <a:srgbClr val="FFFFFF"/>
+                    </a:solidFill>
+                  </a:tcPr>
+                </a:tc>
+              </a:tr>
+              <a:tr h="329184">
+                <a:tc>
+                  <a:txBody>
+                    <a:bodyPr/>
+                    <a:lstStyle/>
+                    <a:p>
+                      <a:pPr algn="ctr"/>
+                      <a:r>
+                        <a:rPr sz="1500" b="0">
+                          <a:solidFill>
+                            <a:srgbClr val="202020"/>
+                          </a:solidFill>
+                          <a:latin typeface="Consolas"/>
+                        </a:rPr>
+                        <a:t>0.0000</a:t>
+                      </a:r>
+                    </a:p>
+                  </a:txBody>
+                  <a:tcPr marL="36576" marR="36576" marT="9144" marB="9144">
+                    <a:solidFill>
+                      <a:srgbClr val="FFFFFF"/>
+                    </a:solidFill>
+                  </a:tcPr>
+                </a:tc>
+              </a:tr>
+            </a:tbl>
+          </a:graphicData>
+        </a:graphic>
+      </p:graphicFrame>
+      <p:graphicFrame>
+        <p:nvGraphicFramePr>
+          <p:cNvPr id="11" name="Table 10"/>
+          <p:cNvGraphicFramePr>
+            <a:graphicFrameLocks noGrp="1"/>
+          </p:cNvGraphicFramePr>
+          <p:nvPr/>
+        </p:nvGraphicFramePr>
+        <p:xfrm>
+          <a:off x="5760720" y="2240280"/>
+          <a:ext cx="2240279" cy="1316736"/>
+        </p:xfrm>
+        <a:graphic>
+          <a:graphicData uri="http://schemas.openxmlformats.org/drawingml/2006/table">
+            <a:tbl>
+              <a:tblPr bandRow="1">
+                <a:tableStyleId>{5C22544A-7EE6-4342-B048-85BDC9FD1C3A}</a:tableStyleId>
+              </a:tblPr>
+              <a:tblGrid>
+                <a:gridCol w="2240279"/>
+              </a:tblGrid>
+              <a:tr h="329184">
+                <a:tc>
+                  <a:txBody>
+                    <a:bodyPr/>
+                    <a:lstStyle/>
+                    <a:p>
+                      <a:pPr algn="ctr"/>
+                      <a:r>
+                        <a:rPr sz="1500" b="1">
+                          <a:solidFill>
+                            <a:srgbClr val="FFFFFF"/>
+                          </a:solidFill>
+                          <a:latin typeface="Microsoft JhengHei"/>
+                        </a:rPr>
+                        <a:t>第 2 步 exp</a:t>
+                      </a:r>
+                    </a:p>
+                  </a:txBody>
+                  <a:tcPr marL="36576" marR="36576" marT="9144" marB="9144">
+                    <a:solidFill>
+                      <a:srgbClr val="1F4E79"/>
+                    </a:solidFill>
+                  </a:tcPr>
+                </a:tc>
+              </a:tr>
+              <a:tr h="329184">
+                <a:tc>
+                  <a:txBody>
+                    <a:bodyPr/>
+                    <a:lstStyle/>
+                    <a:p>
+                      <a:pPr algn="ctr"/>
+                      <a:r>
+                        <a:rPr sz="1500" b="0">
+                          <a:solidFill>
+                            <a:srgbClr val="202020"/>
+                          </a:solidFill>
+                          <a:latin typeface="Consolas"/>
+                        </a:rPr>
+                        <a:t>7.3891</a:t>
+                      </a:r>
+                    </a:p>
+                  </a:txBody>
+                  <a:tcPr marL="36576" marR="36576" marT="9144" marB="9144">
+                    <a:solidFill>
+                      <a:srgbClr val="FFFFFF"/>
+                    </a:solidFill>
+                  </a:tcPr>
+                </a:tc>
+              </a:tr>
+              <a:tr h="329184">
+                <a:tc>
+                  <a:txBody>
+                    <a:bodyPr/>
+                    <a:lstStyle/>
+                    <a:p>
+                      <a:pPr algn="ctr"/>
+                      <a:r>
+                        <a:rPr sz="1500" b="0">
+                          <a:solidFill>
+                            <a:srgbClr val="202020"/>
+                          </a:solidFill>
+                          <a:latin typeface="Consolas"/>
+                        </a:rPr>
+                        <a:t>2.7183</a:t>
+                      </a:r>
+                    </a:p>
+                  </a:txBody>
+                  <a:tcPr marL="36576" marR="36576" marT="9144" marB="9144">
+                    <a:solidFill>
+                      <a:srgbClr val="FFFFFF"/>
+                    </a:solidFill>
+                  </a:tcPr>
+                </a:tc>
+              </a:tr>
+              <a:tr h="329184">
+                <a:tc>
+                  <a:txBody>
+                    <a:bodyPr/>
+                    <a:lstStyle/>
+                    <a:p>
+                      <a:pPr algn="ctr"/>
+                      <a:r>
+                        <a:rPr sz="1500" b="0">
+                          <a:solidFill>
+                            <a:srgbClr val="202020"/>
+                          </a:solidFill>
+                          <a:latin typeface="Consolas"/>
+                        </a:rPr>
+                        <a:t>1.0000</a:t>
+                      </a:r>
+                    </a:p>
+                  </a:txBody>
+                  <a:tcPr marL="36576" marR="36576" marT="9144" marB="9144">
+                    <a:solidFill>
+                      <a:srgbClr val="FFFFFF"/>
+                    </a:solidFill>
+                  </a:tcPr>
+                </a:tc>
+              </a:tr>
+            </a:tbl>
+          </a:graphicData>
+        </a:graphic>
+      </p:graphicFrame>
+      <p:sp>
+        <p:nvSpPr>
+          <p:cNvPr id="12" name="Rectangle 11"/>
+          <p:cNvSpPr/>
+          <p:nvPr/>
+        </p:nvSpPr>
+        <p:spPr>
+          <a:xfrm>
+            <a:off x="8138160" y="2240280"/>
+            <a:ext cx="1737360" cy="1316736"/>
+          </a:xfrm>
+          <a:prstGeom prst="rect">
+            <a:avLst/>
+          </a:prstGeom>
+          <a:solidFill>
+            <a:srgbClr val="DAE6F2"/>
+          </a:solidFill>
+          <a:ln>
+            <a:solidFill>
+              <a:srgbClr val="D0D7DE"/>
+            </a:solidFill>
+          </a:ln>
+          <a:effectLst/>
+        </p:spPr>
+        <p:style>
+          <a:lnRef idx="1">
+            <a:schemeClr val="accent1"/>
+          </a:lnRef>
+          <a:fillRef idx="3">
+            <a:schemeClr val="accent1"/>
+          </a:fillRef>
+          <a:effectRef idx="2">
+            <a:schemeClr val="accent1"/>
+          </a:effectRef>
+          <a:fontRef idx="minor">
+            <a:schemeClr val="lt1"/>
+          </a:fontRef>
+        </p:style>
+        <p:txBody>
+          <a:bodyPr rtlCol="0" anchor="ctr" wrap="square"/>
+          <a:lstStyle/>
+          <a:p>
+            <a:pPr algn="ctr"/>
+            <a:r>
+              <a:rPr sz="1700" b="1">
+                <a:solidFill>
+                  <a:srgbClr val="1F4E79"/>
+                </a:solidFill>
+                <a:latin typeface="Microsoft JhengHei"/>
+              </a:rPr>
+              <a:t>第 3 步 加總</a:t>
+            </a:r>
+          </a:p>
+          <a:p>
+            <a:pPr algn="ctr"/>
+            <a:r>
+              <a:rPr sz="1700" b="1">
+                <a:solidFill>
+                  <a:srgbClr val="1F4E79"/>
+                </a:solidFill>
+                <a:latin typeface="Microsoft JhengHei"/>
+              </a:rPr>
+              <a:t>11.1073</a:t>
+            </a:r>
+          </a:p>
+        </p:txBody>
+      </p:sp>
+      <p:graphicFrame>
+        <p:nvGraphicFramePr>
+          <p:cNvPr id="13" name="Table 12"/>
+          <p:cNvGraphicFramePr>
+            <a:graphicFrameLocks noGrp="1"/>
+          </p:cNvGraphicFramePr>
+          <p:nvPr/>
+        </p:nvGraphicFramePr>
+        <p:xfrm>
+          <a:off x="10012680" y="2240280"/>
+          <a:ext cx="1783080" cy="1316736"/>
+        </p:xfrm>
+        <a:graphic>
+          <a:graphicData uri="http://schemas.openxmlformats.org/drawingml/2006/table">
+            <a:tbl>
+              <a:tblPr bandRow="1">
+                <a:tableStyleId>{5C22544A-7EE6-4342-B048-85BDC9FD1C3A}</a:tableStyleId>
+              </a:tblPr>
+              <a:tblGrid>
+                <a:gridCol w="1783080"/>
+              </a:tblGrid>
+              <a:tr h="329184">
+                <a:tc>
+                  <a:txBody>
+                    <a:bodyPr/>
+                    <a:lstStyle/>
+                    <a:p>
+                      <a:pPr algn="ctr"/>
+                      <a:r>
+                        <a:rPr sz="1500" b="1">
+                          <a:solidFill>
+                            <a:srgbClr val="FFFFFF"/>
+                          </a:solidFill>
+                          <a:latin typeface="Microsoft JhengHei"/>
+                        </a:rPr>
+                        <a:t>第 4 步 p</a:t>
+                      </a:r>
+                    </a:p>
+                  </a:txBody>
+                  <a:tcPr marL="36576" marR="36576" marT="9144" marB="9144">
+                    <a:solidFill>
+                      <a:srgbClr val="1F4E79"/>
+                    </a:solidFill>
+                  </a:tcPr>
+                </a:tc>
+              </a:tr>
+              <a:tr h="329184">
+                <a:tc>
+                  <a:txBody>
+                    <a:bodyPr/>
+                    <a:lstStyle/>
+                    <a:p>
+                      <a:pPr algn="ctr"/>
+                      <a:r>
+                        <a:rPr sz="1500" b="0">
+                          <a:solidFill>
+                            <a:srgbClr val="202020"/>
+                          </a:solidFill>
+                          <a:latin typeface="Consolas"/>
+                        </a:rPr>
+                        <a:t>0.6652</a:t>
+                      </a:r>
+                    </a:p>
+                  </a:txBody>
+                  <a:tcPr marL="36576" marR="36576" marT="9144" marB="9144">
+                    <a:solidFill>
+                      <a:srgbClr val="FFFFFF"/>
+                    </a:solidFill>
+                  </a:tcPr>
+                </a:tc>
+              </a:tr>
+              <a:tr h="329184">
+                <a:tc>
+                  <a:txBody>
+                    <a:bodyPr/>
+                    <a:lstStyle/>
+                    <a:p>
+                      <a:pPr algn="ctr"/>
+                      <a:r>
+                        <a:rPr sz="1500" b="0">
+                          <a:solidFill>
+                            <a:srgbClr val="202020"/>
+                          </a:solidFill>
+                          <a:latin typeface="Consolas"/>
+                        </a:rPr>
+                        <a:t>0.2447</a:t>
+                      </a:r>
+                    </a:p>
+                  </a:txBody>
+                  <a:tcPr marL="36576" marR="36576" marT="9144" marB="9144">
+                    <a:solidFill>
+                      <a:srgbClr val="FFF3CD"/>
+                    </a:solidFill>
+                  </a:tcPr>
+                </a:tc>
+              </a:tr>
+              <a:tr h="329184">
+                <a:tc>
+                  <a:txBody>
+                    <a:bodyPr/>
+                    <a:lstStyle/>
+                    <a:p>
+                      <a:pPr algn="ctr"/>
+                      <a:r>
+                        <a:rPr sz="1500" b="0">
+                          <a:solidFill>
+                            <a:srgbClr val="202020"/>
+                          </a:solidFill>
+                          <a:latin typeface="Consolas"/>
+                        </a:rPr>
+                        <a:t>0.0900</a:t>
+                      </a:r>
+                    </a:p>
+                  </a:txBody>
+                  <a:tcPr marL="36576" marR="36576" marT="9144" marB="9144">
+                    <a:solidFill>
+                      <a:srgbClr val="FFF3CD"/>
+                    </a:solidFill>
+                  </a:tcPr>
+                </a:tc>
+              </a:tr>
+            </a:tbl>
+          </a:graphicData>
+        </a:graphic>
+      </p:graphicFrame>
+      <p:sp>
+        <p:nvSpPr>
+          <p:cNvPr id="14" name="Rectangle 13"/>
+          <p:cNvSpPr/>
+          <p:nvPr/>
+        </p:nvSpPr>
+        <p:spPr>
+          <a:xfrm>
+            <a:off x="731520" y="3931920"/>
+            <a:ext cx="10881360" cy="1051560"/>
+          </a:xfrm>
+          <a:prstGeom prst="rect">
+            <a:avLst/>
+          </a:prstGeom>
+          <a:solidFill>
+            <a:srgbClr val="DCF0E4"/>
+          </a:solidFill>
+          <a:ln>
+            <a:solidFill>
+              <a:srgbClr val="D0D7DE"/>
+            </a:solidFill>
+          </a:ln>
+          <a:effectLst/>
+        </p:spPr>
+        <p:style>
+          <a:lnRef idx="1">
+            <a:schemeClr val="accent1"/>
+          </a:lnRef>
+          <a:fillRef idx="3">
+            <a:schemeClr val="accent1"/>
+          </a:fillRef>
+          <a:effectRef idx="2">
+            <a:schemeClr val="accent1"/>
+          </a:effectRef>
+          <a:fontRef idx="minor">
+            <a:schemeClr val="lt1"/>
+          </a:fontRef>
+        </p:style>
+        <p:txBody>
+          <a:bodyPr rtlCol="0" anchor="ctr" wrap="square"/>
+          <a:lstStyle/>
+          <a:p>
+            <a:pPr algn="just"/>
+            <a:r>
+              <a:rPr sz="1800" b="1">
+                <a:solidFill>
+                  <a:srgbClr val="1E7A45"/>
+                </a:solidFill>
+                <a:latin typeface="Microsoft JhengHei"/>
+              </a:rPr>
+              <a:t>3 和 7 的機率變成 0.2447 與 0.0900。</a:t>
+            </a:r>
+          </a:p>
+          <a:p>
+            <a:pPr algn="just"/>
+            <a:r>
+              <a:rPr sz="1800" b="1">
+                <a:solidFill>
+                  <a:srgbClr val="1E7A45"/>
+                </a:solidFill>
+                <a:latin typeface="Microsoft JhengHei"/>
+              </a:rPr>
+              <a:t>在這個溫度下，錯誤類別的相對機率大到足以影響學習。</a:t>
+            </a:r>
+          </a:p>
+        </p:txBody>
+      </p:sp>
+      <p:sp>
+        <p:nvSpPr>
+          <p:cNvPr id="15" name="TextBox 14"/>
+          <p:cNvSpPr txBox="1"/>
+          <p:nvPr/>
+        </p:nvSpPr>
+        <p:spPr>
+          <a:xfrm>
+            <a:off x="731520" y="5166360"/>
+            <a:ext cx="10881360" cy="914400"/>
+          </a:xfrm>
+          <a:prstGeom prst="rect">
+            <a:avLst/>
+          </a:prstGeom>
+          <a:noFill/>
+        </p:spPr>
+        <p:txBody>
+          <a:bodyPr wrap="square">
+            <a:spAutoFit/>
+          </a:bodyPr>
+          <a:lstStyle/>
+          <a:p>
+            <a:pPr algn="just"/>
+            <a:r>
+              <a:rPr sz="1700" b="0">
+                <a:solidFill>
+                  <a:srgbClr val="59636E"/>
+                </a:solidFill>
+                <a:latin typeface="Microsoft JhengHei"/>
+              </a:rPr>
+              <a:t>核對：exp(2) = 7.3891，exp(1) = 2.7183，exp(0) = 1，三者相加 11.1073。</a:t>
+            </a:r>
+          </a:p>
+        </p:txBody>
+      </p:sp>
+    </p:spTree>
+  </p:cSld>
+  <p:clrMapOvr>
+    <a:masterClrMapping/>
+  </p:clrMapOvr>
+  <p:timing>
+    <p:tnLst>
+      <p:par>
+        <p:cTn id="1" dur="indefinite" restart="never" nodeType="tmRoot">
+          <p:childTnLst>
+            <p:seq concurrent="1" nextAc="seek">
+              <p:cTn id="2" dur="indefinite" nodeType="mainSeq">
+                <p:childTnLst>
+                  <p:par>
+                    <p:cTn id="3" fill="hold">
+                      <p:stCondLst>
+                        <p:cond delay="indefinite"/>
+                      </p:stCondLst>
+                      <p:childTnLst>
+                        <p:par>
+                          <p:cTn id="4" fill="hold">
+                            <p:stCondLst>
+                              <p:cond delay="0"/>
+                            </p:stCondLst>
+                            <p:childTnLst>
+                              <p:par>
+                                <p:cTn id="5" presetID="1" presetClass="entr" presetSubtype="0" fill="hold" grpId="0" nodeType="clickEffect">
+                                  <p:stCondLst>
+                                    <p:cond delay="0"/>
+                                  </p:stCondLst>
+                                  <p:childTnLst>
+                                    <p:set>
+                                      <p:cBhvr>
+                                        <p:cTn id="6" dur="1" fill="hold">
+                                          <p:stCondLst>
+                                            <p:cond delay="0"/>
+                                          </p:stCondLst>
+                                        </p:cTn>
+                                        <p:tgtEl>
+                                          <p:spTgt spid="6"/>
+                                        </p:tgtEl>
+                                        <p:attrNameLst>
+                                          <p:attrName>style.visibility</p:attrName>
+                                        </p:attrNameLst>
+                                      </p:cBhvr>
+                                      <p:to>
+                                        <p:strVal val="visible"/>
+                                      </p:to>
+                                    </p:set>
+                                  </p:childTnLst>
+                                </p:cTn>
+                              </p:par>
+                            </p:childTnLst>
+                          </p:cTn>
+                        </p:par>
+                      </p:childTnLst>
+                    </p:cTn>
+                  </p:par>
+                  <p:par>
+                    <p:cTn id="7" fill="hold">
+                      <p:stCondLst>
+                        <p:cond delay="indefinite"/>
+                      </p:stCondLst>
+                      <p:childTnLst>
+                        <p:par>
+                          <p:cTn id="8" fill="hold">
+                            <p:stCondLst>
+                              <p:cond delay="0"/>
+                            </p:stCondLst>
+                            <p:childTnLst>
+                              <p:par>
+                                <p:cTn id="9" presetID="1" presetClass="entr" presetSubtype="0" fill="hold" grpId="0" nodeType="clickEffect">
+                                  <p:stCondLst>
+                                    <p:cond delay="0"/>
+                                  </p:stCondLst>
+                                  <p:childTnLst>
+                                    <p:set>
+                                      <p:cBhvr>
+                                        <p:cTn id="10" dur="1" fill="hold">
+                                          <p:stCondLst>
+                                            <p:cond delay="0"/>
+                                          </p:stCondLst>
+                                        </p:cTn>
+                                        <p:tgtEl>
+                                          <p:spTgt spid="7"/>
+                                        </p:tgtEl>
+                                        <p:attrNameLst>
+                                          <p:attrName>style.visibility</p:attrName>
+                                        </p:attrNameLst>
+                                      </p:cBhvr>
+                                      <p:to>
+                                        <p:strVal val="visible"/>
+                                      </p:to>
+                                    </p:set>
+                                  </p:childTnLst>
+                                </p:cTn>
+                              </p:par>
+                            </p:childTnLst>
+                          </p:cTn>
+                        </p:par>
+                      </p:childTnLst>
+                    </p:cTn>
+                  </p:par>
+                  <p:par>
+                    <p:cTn id="11" fill="hold">
+                      <p:stCondLst>
+                        <p:cond delay="indefinite"/>
+                      </p:stCondLst>
+                      <p:childTnLst>
+                        <p:par>
+                          <p:cTn id="12" fill="hold">
+                            <p:stCondLst>
+                              <p:cond delay="0"/>
+                            </p:stCondLst>
+                            <p:childTnLst>
+                              <p:par>
+                                <p:cTn id="13" presetID="1" presetClass="entr" presetSubtype="0" fill="hold" grpId="0" nodeType="clickEffect">
+                                  <p:stCondLst>
+                                    <p:cond delay="0"/>
+                                  </p:stCondLst>
+                                  <p:childTnLst>
+                                    <p:set>
+                                      <p:cBhvr>
+                                        <p:cTn id="14" dur="1" fill="hold">
+                                          <p:stCondLst>
+                                            <p:cond delay="0"/>
+                                          </p:stCondLst>
+                                        </p:cTn>
+                                        <p:tgtEl>
+                                          <p:spTgt spid="8"/>
+                                        </p:tgtEl>
+                                        <p:attrNameLst>
+                                          <p:attrName>style.visibility</p:attrName>
+                                        </p:attrNameLst>
+                                      </p:cBhvr>
+                                      <p:to>
+                                        <p:strVal val="visible"/>
+                                      </p:to>
+                                    </p:set>
+                                  </p:childTnLst>
+                                </p:cTn>
+                              </p:par>
+                            </p:childTnLst>
+                          </p:cTn>
+                        </p:par>
+                      </p:childTnLst>
+                    </p:cTn>
+                  </p:par>
+                  <p:par>
+                    <p:cTn id="15" fill="hold">
+                      <p:stCondLst>
+                        <p:cond delay="indefinite"/>
+                      </p:stCondLst>
+                      <p:childTnLst>
+                        <p:par>
+                          <p:cTn id="16" fill="hold">
+                            <p:stCondLst>
+                              <p:cond delay="0"/>
+                            </p:stCondLst>
+                            <p:childTnLst>
+                              <p:par>
+                                <p:cTn id="17" presetID="1" presetClass="entr" presetSubtype="0" fill="hold" grpId="0" nodeType="clickEffect">
+                                  <p:stCondLst>
+                                    <p:cond delay="0"/>
+                                  </p:stCondLst>
+                                  <p:childTnLst>
+                                    <p:set>
+                                      <p:cBhvr>
+                                        <p:cTn id="18" dur="1" fill="hold">
+                                          <p:stCondLst>
+                                            <p:cond delay="0"/>
+                                          </p:stCondLst>
+                                        </p:cTn>
+                                        <p:tgtEl>
+                                          <p:spTgt spid="9"/>
+                                        </p:tgtEl>
+                                        <p:attrNameLst>
+                                          <p:attrName>style.visibility</p:attrName>
+                                        </p:attrNameLst>
+                                      </p:cBhvr>
+                                      <p:to>
+                                        <p:strVal val="visible"/>
+                                      </p:to>
+                                    </p:set>
+                                  </p:childTnLst>
+                                </p:cTn>
+                              </p:par>
+                            </p:childTnLst>
+                          </p:cTn>
+                        </p:par>
+                      </p:childTnLst>
+                    </p:cTn>
+                  </p:par>
+                  <p:par>
+                    <p:cTn id="19" fill="hold">
+                      <p:stCondLst>
+                        <p:cond delay="indefinite"/>
+                      </p:stCondLst>
+                      <p:childTnLst>
+                        <p:par>
+                          <p:cTn id="20" fill="hold">
+                            <p:stCondLst>
+                              <p:cond delay="0"/>
+                            </p:stCondLst>
+                            <p:childTnLst>
+                              <p:par>
+                                <p:cTn id="21" presetID="1" presetClass="entr" presetSubtype="0" fill="hold" grpId="0" nodeType="clickEffect">
+                                  <p:stCondLst>
+                                    <p:cond delay="0"/>
+                                  </p:stCondLst>
+                                  <p:childTnLst>
+                                    <p:set>
+                                      <p:cBhvr>
+                                        <p:cTn id="22" dur="1" fill="hold">
+                                          <p:stCondLst>
+                                            <p:cond delay="0"/>
+                                          </p:stCondLst>
+                                        </p:cTn>
+                                        <p:tgtEl>
+                                          <p:spTgt spid="10"/>
+                                        </p:tgtEl>
+                                        <p:attrNameLst>
+                                          <p:attrName>style.visibility</p:attrName>
+                                        </p:attrNameLst>
+                                      </p:cBhvr>
+                                      <p:to>
+                                        <p:strVal val="visible"/>
+                                      </p:to>
+                                    </p:set>
+                                  </p:childTnLst>
+                                </p:cTn>
+                              </p:par>
+                            </p:childTnLst>
+                          </p:cTn>
+                        </p:par>
+                      </p:childTnLst>
+                    </p:cTn>
+                  </p:par>
+                  <p:par>
+                    <p:cTn id="23" fill="hold">
+                      <p:stCondLst>
+                        <p:cond delay="indefinite"/>
+                      </p:stCondLst>
+                      <p:childTnLst>
+                        <p:par>
+                          <p:cTn id="24" fill="hold">
+                            <p:stCondLst>
+                              <p:cond delay="0"/>
+                            </p:stCondLst>
+                            <p:childTnLst>
+                              <p:par>
+                                <p:cTn id="25" presetID="1" presetClass="entr" presetSubtype="0" fill="hold" grpId="0" nodeType="clickEffect">
+                                  <p:stCondLst>
+                                    <p:cond delay="0"/>
+                                  </p:stCondLst>
+                                  <p:childTnLst>
+                                    <p:set>
+                                      <p:cBhvr>
+                                        <p:cTn id="26" dur="1" fill="hold">
+                                          <p:stCondLst>
+                                            <p:cond delay="0"/>
+                                          </p:stCondLst>
+                                        </p:cTn>
+                                        <p:tgtEl>
+                                          <p:spTgt spid="11"/>
+                                        </p:tgtEl>
+                                        <p:attrNameLst>
+                                          <p:attrName>style.visibility</p:attrName>
+                                        </p:attrNameLst>
+                                      </p:cBhvr>
+                                      <p:to>
+                                        <p:strVal val="visible"/>
+                                      </p:to>
+                                    </p:set>
+                                  </p:childTnLst>
+                                </p:cTn>
+                              </p:par>
+                            </p:childTnLst>
+                          </p:cTn>
+                        </p:par>
+                      </p:childTnLst>
+                    </p:cTn>
+                  </p:par>
+                  <p:par>
+                    <p:cTn id="27" fill="hold">
+                      <p:stCondLst>
+                        <p:cond delay="indefinite"/>
+                      </p:stCondLst>
+                      <p:childTnLst>
+                        <p:par>
+                          <p:cTn id="28" fill="hold">
+                            <p:stCondLst>
+                              <p:cond delay="0"/>
+                            </p:stCondLst>
+                            <p:childTnLst>
+                              <p:par>
+                                <p:cTn id="29" presetID="1" presetClass="entr" presetSubtype="0" fill="hold" grpId="0" nodeType="clickEffect">
+                                  <p:stCondLst>
+                                    <p:cond delay="0"/>
+                                  </p:stCondLst>
+                                  <p:childTnLst>
+                                    <p:set>
+                                      <p:cBhvr>
+                                        <p:cTn id="30" dur="1" fill="hold">
+                                          <p:stCondLst>
+                                            <p:cond delay="0"/>
+                                          </p:stCondLst>
+                                        </p:cTn>
+                                        <p:tgtEl>
+                                          <p:spTgt spid="12"/>
+                                        </p:tgtEl>
+                                        <p:attrNameLst>
+                                          <p:attrName>style.visibility</p:attrName>
+                                        </p:attrNameLst>
+                                      </p:cBhvr>
+                                      <p:to>
+                                        <p:strVal val="visible"/>
+                                      </p:to>
+                                    </p:set>
+                                  </p:childTnLst>
+                                </p:cTn>
+                              </p:par>
+                            </p:childTnLst>
+                          </p:cTn>
+                        </p:par>
+                      </p:childTnLst>
+                    </p:cTn>
+                  </p:par>
+                  <p:par>
+                    <p:cTn id="31" fill="hold">
+                      <p:stCondLst>
+                        <p:cond delay="indefinite"/>
+                      </p:stCondLst>
+                      <p:childTnLst>
+                        <p:par>
+                          <p:cTn id="32" fill="hold">
+                            <p:stCondLst>
+                              <p:cond delay="0"/>
+                            </p:stCondLst>
+                            <p:childTnLst>
+                              <p:par>
+                                <p:cTn id="33" presetID="1" presetClass="entr" presetSubtype="0" fill="hold" grpId="0" nodeType="clickEffect">
+                                  <p:stCondLst>
+                                    <p:cond delay="0"/>
+                                  </p:stCondLst>
+                                  <p:childTnLst>
+                                    <p:set>
+                                      <p:cBhvr>
+                                        <p:cTn id="34" dur="1" fill="hold">
+                                          <p:stCondLst>
+                                            <p:cond delay="0"/>
+                                          </p:stCondLst>
+                                        </p:cTn>
+                                        <p:tgtEl>
+                                          <p:spTgt spid="13"/>
+                                        </p:tgtEl>
+                                        <p:attrNameLst>
+                                          <p:attrName>style.visibility</p:attrName>
+                                        </p:attrNameLst>
+                                      </p:cBhvr>
+                                      <p:to>
+                                        <p:strVal val="visible"/>
+                                      </p:to>
+                                    </p:set>
+                                  </p:childTnLst>
+                                </p:cTn>
+                              </p:par>
+                            </p:childTnLst>
+                          </p:cTn>
+                        </p:par>
+                      </p:childTnLst>
+                    </p:cTn>
+                  </p:par>
+                  <p:par>
+                    <p:cTn id="35" fill="hold">
+                      <p:stCondLst>
+                        <p:cond delay="indefinite"/>
+                      </p:stCondLst>
+                      <p:childTnLst>
+                        <p:par>
+                          <p:cTn id="36" fill="hold">
+                            <p:stCondLst>
+                              <p:cond delay="0"/>
+                            </p:stCondLst>
+                            <p:childTnLst>
+                              <p:par>
+                                <p:cTn id="37" presetID="1" presetClass="entr" presetSubtype="0" fill="hold" grpId="0" nodeType="clickEffect">
+                                  <p:stCondLst>
+                                    <p:cond delay="0"/>
+                                  </p:stCondLst>
+                                  <p:childTnLst>
+                                    <p:set>
+                                      <p:cBhvr>
+                                        <p:cTn id="38" dur="1" fill="hold">
+                                          <p:stCondLst>
+                                            <p:cond delay="0"/>
+                                          </p:stCondLst>
+                                        </p:cTn>
+                                        <p:tgtEl>
+                                          <p:spTgt spid="14"/>
+                                        </p:tgtEl>
+                                        <p:attrNameLst>
+                                          <p:attrName>style.visibility</p:attrName>
+                                        </p:attrNameLst>
+                                      </p:cBhvr>
+                                      <p:to>
+                                        <p:strVal val="visible"/>
+                                      </p:to>
+                                    </p:set>
+                                  </p:childTnLst>
+                                </p:cTn>
+                              </p:par>
+                            </p:childTnLst>
+                          </p:cTn>
+                        </p:par>
+                      </p:childTnLst>
+                    </p:cTn>
+                  </p:par>
+                  <p:par>
+                    <p:cTn id="39" fill="hold">
+                      <p:stCondLst>
+                        <p:cond delay="indefinite"/>
+                      </p:stCondLst>
+                      <p:childTnLst>
+                        <p:par>
+                          <p:cTn id="40" fill="hold">
+                            <p:stCondLst>
+                              <p:cond delay="0"/>
+                            </p:stCondLst>
+                            <p:childTnLst>
+                              <p:par>
+                                <p:cTn id="41" presetID="1" presetClass="entr" presetSubtype="0" fill="hold" grpId="0" nodeType="clickEffect">
+                                  <p:stCondLst>
+                                    <p:cond delay="0"/>
+                                  </p:stCondLst>
+                                  <p:childTnLst>
+                                    <p:set>
+                                      <p:cBhvr>
+                                        <p:cTn id="42" dur="1" fill="hold">
+                                          <p:stCondLst>
+                                            <p:cond delay="0"/>
+                                          </p:stCondLst>
+                                        </p:cTn>
+                                        <p:tgtEl>
+                                          <p:spTgt spid="15"/>
+                                        </p:tgtEl>
+                                        <p:attrNameLst>
+                                          <p:attrName>style.visibility</p:attrName>
+                                        </p:attrNameLst>
+                                      </p:cBhvr>
+                                      <p:to>
+                                        <p:strVal val="visible"/>
+                                      </p:to>
+                                    </p:set>
+                                  </p:childTnLst>
+                                </p:cTn>
+                              </p:par>
+                            </p:childTnLst>
+                          </p:cTn>
+                        </p:par>
+                      </p:childTnLst>
+                    </p:cTn>
+                  </p:par>
+                </p:childTnLst>
+              </p:cTn>
+              <p:prevCondLst>
+                <p:cond evt="onPrev" delay="0">
+                  <p:tgtEl>
+                    <p:sldTgt/>
+                  </p:tgtEl>
+                </p:cond>
+              </p:prevCondLst>
+              <p:nextCondLst>
+                <p:cond evt="onNext" delay="0">
+                  <p:tgtEl>
+                    <p:sldTgt/>
+                  </p:tgtEl>
+                </p:cond>
+              </p:nextCondLst>
+            </p:seq>
+          </p:childTnLst>
+        </p:cTn>
+      </p:par>
+    </p:tnLst>
+    <p:bldLst>
+      <p:bldP spid="6" grpId="0" animBg="1"/>
+      <p:bldP spid="7" grpId="0" animBg="1"/>
+      <p:bldGraphic spid="8" grpId="0">
+        <p:bldAsOne/>
+      </p:bldGraphic>
+      <p:bldGraphic spid="9" grpId="0">
+        <p:bldAsOne/>
+      </p:bldGraphic>
+      <p:bldGraphic spid="10" grpId="0">
+        <p:bldAsOne/>
+      </p:bldGraphic>
+      <p:bldGraphic spid="11" grpId="0">
+        <p:bldAsOne/>
+      </p:bldGraphic>
+      <p:bldP spid="12" grpId="0" animBg="1"/>
+      <p:bldGraphic spid="13" grpId="0">
+        <p:bldAsOne/>
+      </p:bldGraphic>
+      <p:bldP spid="14" grpId="0" animBg="1"/>
+      <p:bldP spid="15" grpId="0" animBg="1"/>
+    </p:bldLst>
+  </p:timing>
+</p:sld>
+</file>
+
+<file path=ppt/slides/slide11.xml><?xml version="1.0" encoding="utf-8"?>
+<p:sld xmlns:a="http://schemas.openxmlformats.org/drawingml/2006/main" xmlns:p="http://schemas.openxmlformats.org/presentationml/2006/main" xmlns:r="http://schemas.openxmlformats.org/officeDocument/2006/relationships">
+  <p:cSld>
+    <p:spTree>
+      <p:nvGrpSpPr>
+        <p:cNvPr id="1" name=""/>
+        <p:cNvGrpSpPr/>
+        <p:nvPr/>
+      </p:nvGrpSpPr>
+      <p:grpSpPr/>
+      <p:sp>
+        <p:nvSpPr>
+          <p:cNvPr id="2" name="Rectangle 1"/>
+          <p:cNvSpPr/>
+          <p:nvPr/>
+        </p:nvSpPr>
+        <p:spPr>
+          <a:xfrm>
+            <a:off x="0" y="0"/>
+            <a:ext cx="12191695" cy="6858000"/>
+          </a:xfrm>
+          <a:prstGeom prst="rect">
+            <a:avLst/>
+          </a:prstGeom>
+          <a:solidFill>
+            <a:srgbClr val="FFFFFF"/>
+          </a:solidFill>
+          <a:ln>
+            <a:noFill/>
+          </a:ln>
+          <a:effectLst/>
+        </p:spPr>
+        <p:style>
+          <a:lnRef idx="1">
+            <a:schemeClr val="accent1"/>
+          </a:lnRef>
+          <a:fillRef idx="3">
+            <a:schemeClr val="accent1"/>
+          </a:fillRef>
+          <a:effectRef idx="2">
+            <a:schemeClr val="accent1"/>
+          </a:effectRef>
+          <a:fontRef idx="minor">
+            <a:schemeClr val="lt1"/>
+          </a:fontRef>
+        </p:style>
+        <p:txBody>
+          <a:bodyPr rtlCol="0" anchor="ctr"/>
+          <a:lstStyle/>
+          <a:p>
+            <a:pPr algn="ctr"/>
+          </a:p>
+        </p:txBody>
+      </p:sp>
+      <p:sp>
+        <p:nvSpPr>
+          <p:cNvPr id="3" name="Rectangle 2"/>
+          <p:cNvSpPr/>
+          <p:nvPr/>
+        </p:nvSpPr>
+        <p:spPr>
+          <a:xfrm>
+            <a:off x="0" y="0"/>
+            <a:ext cx="12191695" cy="868680"/>
+          </a:xfrm>
+          <a:prstGeom prst="rect">
+            <a:avLst/>
+          </a:prstGeom>
+          <a:solidFill>
+            <a:srgbClr val="1F4E79"/>
+          </a:solidFill>
+          <a:ln>
+            <a:noFill/>
+          </a:ln>
+          <a:effectLst/>
+        </p:spPr>
+        <p:style>
+          <a:lnRef idx="1">
+            <a:schemeClr val="accent1"/>
+          </a:lnRef>
+          <a:fillRef idx="3">
+            <a:schemeClr val="accent1"/>
+          </a:fillRef>
+          <a:effectRef idx="2">
+            <a:schemeClr val="accent1"/>
+          </a:effectRef>
+          <a:fontRef idx="minor">
+            <a:schemeClr val="lt1"/>
+          </a:fontRef>
+        </p:style>
+        <p:txBody>
+          <a:bodyPr rtlCol="0" anchor="ctr"/>
+          <a:lstStyle/>
+          <a:p>
+            <a:pPr algn="ctr"/>
+          </a:p>
+        </p:txBody>
+      </p:sp>
+      <p:sp>
+        <p:nvSpPr>
+          <p:cNvPr id="4" name="TextBox 3"/>
+          <p:cNvSpPr txBox="1"/>
+          <p:nvPr/>
+        </p:nvSpPr>
+        <p:spPr>
+          <a:xfrm>
+            <a:off x="411480" y="73152"/>
+            <a:ext cx="11338560" cy="457200"/>
+          </a:xfrm>
+          <a:prstGeom prst="rect">
+            <a:avLst/>
+          </a:prstGeom>
+          <a:noFill/>
+        </p:spPr>
+        <p:txBody>
+          <a:bodyPr wrap="square">
+            <a:spAutoFit/>
+          </a:bodyPr>
+          <a:lstStyle/>
+          <a:p>
+            <a:pPr algn="just"/>
+            <a:r>
+              <a:rPr sz="2700" b="1">
+                <a:solidFill>
+                  <a:srgbClr val="FFFFFF"/>
+                </a:solidFill>
+                <a:latin typeface="Microsoft JhengHei"/>
+              </a:rPr>
               <a:t>二、軟目標與硬目標</a:t>
             </a:r>
           </a:p>
@@ -4482,7 +6026,7 @@
 </p:sld>
 </file>
 
-<file path=ppt/slides/slide11.xml><?xml version="1.0" encoding="utf-8"?>
+<file path=ppt/slides/slide12.xml><?xml version="1.0" encoding="utf-8"?>
 <p:sld xmlns:a="http://schemas.openxmlformats.org/drawingml/2006/main" xmlns:p="http://schemas.openxmlformats.org/presentationml/2006/main" xmlns:r="http://schemas.openxmlformats.org/officeDocument/2006/relationships">
   <p:cSld>
     <p:spTree>
@@ -4945,7 +6489,7 @@
                 </a:solidFill>
                 <a:latin typeface="Microsoft JhengHei"/>
               </a:rPr>
-              <a:t>大致不變（第 15 頁驗證）</a:t>
+              <a:t>大致不變（第 16 頁驗證）</a:t>
             </a:r>
           </a:p>
         </p:txBody>
@@ -5393,7 +6937,7 @@
 </p:sld>
 </file>
 
-<file path=ppt/slides/slide12.xml><?xml version="1.0" encoding="utf-8"?>
+<file path=ppt/slides/slide13.xml><?xml version="1.0" encoding="utf-8"?>
 <p:sld xmlns:a="http://schemas.openxmlformats.org/drawingml/2006/main" xmlns:p="http://schemas.openxmlformats.org/presentationml/2006/main" xmlns:r="http://schemas.openxmlformats.org/officeDocument/2006/relationships">
   <p:cSld>
     <p:spTree>
@@ -7570,7 +9114,7 @@
 </p:sld>
 </file>
 
-<file path=ppt/slides/slide13.xml><?xml version="1.0" encoding="utf-8"?>
+<file path=ppt/slides/slide14.xml><?xml version="1.0" encoding="utf-8"?>
 <p:sld xmlns:a="http://schemas.openxmlformats.org/drawingml/2006/main" xmlns:p="http://schemas.openxmlformats.org/presentationml/2006/main" xmlns:r="http://schemas.openxmlformats.org/officeDocument/2006/relationships">
   <p:cSld>
     <p:spTree>
@@ -9148,7 +10692,7 @@
 </p:sld>
 </file>
 
-<file path=ppt/slides/slide14.xml><?xml version="1.0" encoding="utf-8"?>
+<file path=ppt/slides/slide15.xml><?xml version="1.0" encoding="utf-8"?>
 <p:sld xmlns:a="http://schemas.openxmlformats.org/drawingml/2006/main" xmlns:p="http://schemas.openxmlformats.org/presentationml/2006/main" xmlns:r="http://schemas.openxmlformats.org/officeDocument/2006/relationships">
   <p:cSld>
     <p:spTree>
@@ -10924,7 +12468,7 @@
 </p:sld>
 </file>
 
-<file path=ppt/slides/slide15.xml><?xml version="1.0" encoding="utf-8"?>
+<file path=ppt/slides/slide16.xml><?xml version="1.0" encoding="utf-8"?>
 <p:sld xmlns:a="http://schemas.openxmlformats.org/drawingml/2006/main" xmlns:p="http://schemas.openxmlformats.org/presentationml/2006/main" xmlns:r="http://schemas.openxmlformats.org/officeDocument/2006/relationships">
   <p:cSld>
     <p:spTree>
@@ -12370,7 +13914,7 @@
 </p:sld>
 </file>
 
-<file path=ppt/slides/slide16.xml><?xml version="1.0" encoding="utf-8"?>
+<file path=ppt/slides/slide17.xml><?xml version="1.0" encoding="utf-8"?>
 <p:sld xmlns:a="http://schemas.openxmlformats.org/drawingml/2006/main" xmlns:p="http://schemas.openxmlformats.org/presentationml/2006/main" xmlns:r="http://schemas.openxmlformats.org/officeDocument/2006/relationships">
   <p:cSld>
     <p:spTree>
@@ -13242,7 +14786,7 @@
 </p:sld>
 </file>
 
-<file path=ppt/slides/slide17.xml><?xml version="1.0" encoding="utf-8"?>
+<file path=ppt/slides/slide18.xml><?xml version="1.0" encoding="utf-8"?>
 <p:sld xmlns:a="http://schemas.openxmlformats.org/drawingml/2006/main" xmlns:p="http://schemas.openxmlformats.org/presentationml/2006/main" xmlns:r="http://schemas.openxmlformats.org/officeDocument/2006/relationships">
   <p:cSld>
     <p:spTree>
@@ -13902,1151 +15446,6 @@
                 <a:latin typeface="Microsoft JhengHei"/>
               </a:rPr>
               <a:t>藍線：小網路 100-100。每個溫度下，蒸餾的測試錯誤數都少於只用硬目標（虛線）。</a:t>
-            </a:r>
-          </a:p>
-        </p:txBody>
-      </p:sp>
-    </p:spTree>
-  </p:cSld>
-  <p:clrMapOvr>
-    <a:masterClrMapping/>
-  </p:clrMapOvr>
-  <p:timing>
-    <p:tnLst>
-      <p:par>
-        <p:cTn id="1" dur="indefinite" restart="never" nodeType="tmRoot">
-          <p:childTnLst>
-            <p:seq concurrent="1" nextAc="seek">
-              <p:cTn id="2" dur="indefinite" nodeType="mainSeq">
-                <p:childTnLst>
-                  <p:par>
-                    <p:cTn id="3" fill="hold">
-                      <p:stCondLst>
-                        <p:cond delay="indefinite"/>
-                      </p:stCondLst>
-                      <p:childTnLst>
-                        <p:par>
-                          <p:cTn id="4" fill="hold">
-                            <p:stCondLst>
-                              <p:cond delay="0"/>
-                            </p:stCondLst>
-                            <p:childTnLst>
-                              <p:par>
-                                <p:cTn id="5" presetID="1" presetClass="entr" presetSubtype="0" fill="hold" grpId="0" nodeType="clickEffect">
-                                  <p:stCondLst>
-                                    <p:cond delay="0"/>
-                                  </p:stCondLst>
-                                  <p:childTnLst>
-                                    <p:set>
-                                      <p:cBhvr>
-                                        <p:cTn id="6" dur="1" fill="hold">
-                                          <p:stCondLst>
-                                            <p:cond delay="0"/>
-                                          </p:stCondLst>
-                                        </p:cTn>
-                                        <p:tgtEl>
-                                          <p:spTgt spid="6"/>
-                                        </p:tgtEl>
-                                        <p:attrNameLst>
-                                          <p:attrName>style.visibility</p:attrName>
-                                        </p:attrNameLst>
-                                      </p:cBhvr>
-                                      <p:to>
-                                        <p:strVal val="visible"/>
-                                      </p:to>
-                                    </p:set>
-                                  </p:childTnLst>
-                                </p:cTn>
-                              </p:par>
-                            </p:childTnLst>
-                          </p:cTn>
-                        </p:par>
-                      </p:childTnLst>
-                    </p:cTn>
-                  </p:par>
-                  <p:par>
-                    <p:cTn id="7" fill="hold">
-                      <p:stCondLst>
-                        <p:cond delay="indefinite"/>
-                      </p:stCondLst>
-                      <p:childTnLst>
-                        <p:par>
-                          <p:cTn id="8" fill="hold">
-                            <p:stCondLst>
-                              <p:cond delay="0"/>
-                            </p:stCondLst>
-                            <p:childTnLst>
-                              <p:par>
-                                <p:cTn id="9" presetID="1" presetClass="entr" presetSubtype="0" fill="hold" grpId="0" nodeType="clickEffect">
-                                  <p:stCondLst>
-                                    <p:cond delay="0"/>
-                                  </p:stCondLst>
-                                  <p:childTnLst>
-                                    <p:set>
-                                      <p:cBhvr>
-                                        <p:cTn id="10" dur="1" fill="hold">
-                                          <p:stCondLst>
-                                            <p:cond delay="0"/>
-                                          </p:stCondLst>
-                                        </p:cTn>
-                                        <p:tgtEl>
-                                          <p:spTgt spid="7"/>
-                                        </p:tgtEl>
-                                        <p:attrNameLst>
-                                          <p:attrName>style.visibility</p:attrName>
-                                        </p:attrNameLst>
-                                      </p:cBhvr>
-                                      <p:to>
-                                        <p:strVal val="visible"/>
-                                      </p:to>
-                                    </p:set>
-                                  </p:childTnLst>
-                                </p:cTn>
-                              </p:par>
-                            </p:childTnLst>
-                          </p:cTn>
-                        </p:par>
-                      </p:childTnLst>
-                    </p:cTn>
-                  </p:par>
-                  <p:par>
-                    <p:cTn id="11" fill="hold">
-                      <p:stCondLst>
-                        <p:cond delay="indefinite"/>
-                      </p:stCondLst>
-                      <p:childTnLst>
-                        <p:par>
-                          <p:cTn id="12" fill="hold">
-                            <p:stCondLst>
-                              <p:cond delay="0"/>
-                            </p:stCondLst>
-                            <p:childTnLst>
-                              <p:par>
-                                <p:cTn id="13" presetID="1" presetClass="entr" presetSubtype="0" fill="hold" grpId="0" nodeType="clickEffect">
-                                  <p:stCondLst>
-                                    <p:cond delay="0"/>
-                                  </p:stCondLst>
-                                  <p:childTnLst>
-                                    <p:set>
-                                      <p:cBhvr>
-                                        <p:cTn id="14" dur="1" fill="hold">
-                                          <p:stCondLst>
-                                            <p:cond delay="0"/>
-                                          </p:stCondLst>
-                                        </p:cTn>
-                                        <p:tgtEl>
-                                          <p:spTgt spid="8"/>
-                                        </p:tgtEl>
-                                        <p:attrNameLst>
-                                          <p:attrName>style.visibility</p:attrName>
-                                        </p:attrNameLst>
-                                      </p:cBhvr>
-                                      <p:to>
-                                        <p:strVal val="visible"/>
-                                      </p:to>
-                                    </p:set>
-                                  </p:childTnLst>
-                                </p:cTn>
-                              </p:par>
-                            </p:childTnLst>
-                          </p:cTn>
-                        </p:par>
-                      </p:childTnLst>
-                    </p:cTn>
-                  </p:par>
-                  <p:par>
-                    <p:cTn id="15" fill="hold">
-                      <p:stCondLst>
-                        <p:cond delay="indefinite"/>
-                      </p:stCondLst>
-                      <p:childTnLst>
-                        <p:par>
-                          <p:cTn id="16" fill="hold">
-                            <p:stCondLst>
-                              <p:cond delay="0"/>
-                            </p:stCondLst>
-                            <p:childTnLst>
-                              <p:par>
-                                <p:cTn id="17" presetID="1" presetClass="entr" presetSubtype="0" fill="hold" grpId="0" nodeType="clickEffect">
-                                  <p:stCondLst>
-                                    <p:cond delay="0"/>
-                                  </p:stCondLst>
-                                  <p:childTnLst>
-                                    <p:set>
-                                      <p:cBhvr>
-                                        <p:cTn id="18" dur="1" fill="hold">
-                                          <p:stCondLst>
-                                            <p:cond delay="0"/>
-                                          </p:stCondLst>
-                                        </p:cTn>
-                                        <p:tgtEl>
-                                          <p:spTgt spid="9"/>
-                                        </p:tgtEl>
-                                        <p:attrNameLst>
-                                          <p:attrName>style.visibility</p:attrName>
-                                        </p:attrNameLst>
-                                      </p:cBhvr>
-                                      <p:to>
-                                        <p:strVal val="visible"/>
-                                      </p:to>
-                                    </p:set>
-                                  </p:childTnLst>
-                                </p:cTn>
-                              </p:par>
-                            </p:childTnLst>
-                          </p:cTn>
-                        </p:par>
-                      </p:childTnLst>
-                    </p:cTn>
-                  </p:par>
-                  <p:par>
-                    <p:cTn id="19" fill="hold">
-                      <p:stCondLst>
-                        <p:cond delay="indefinite"/>
-                      </p:stCondLst>
-                      <p:childTnLst>
-                        <p:par>
-                          <p:cTn id="20" fill="hold">
-                            <p:stCondLst>
-                              <p:cond delay="0"/>
-                            </p:stCondLst>
-                            <p:childTnLst>
-                              <p:par>
-                                <p:cTn id="21" presetID="1" presetClass="entr" presetSubtype="0" fill="hold" grpId="0" nodeType="clickEffect">
-                                  <p:stCondLst>
-                                    <p:cond delay="0"/>
-                                  </p:stCondLst>
-                                  <p:childTnLst>
-                                    <p:set>
-                                      <p:cBhvr>
-                                        <p:cTn id="22" dur="1" fill="hold">
-                                          <p:stCondLst>
-                                            <p:cond delay="0"/>
-                                          </p:stCondLst>
-                                        </p:cTn>
-                                        <p:tgtEl>
-                                          <p:spTgt spid="10"/>
-                                        </p:tgtEl>
-                                        <p:attrNameLst>
-                                          <p:attrName>style.visibility</p:attrName>
-                                        </p:attrNameLst>
-                                      </p:cBhvr>
-                                      <p:to>
-                                        <p:strVal val="visible"/>
-                                      </p:to>
-                                    </p:set>
-                                  </p:childTnLst>
-                                </p:cTn>
-                              </p:par>
-                            </p:childTnLst>
-                          </p:cTn>
-                        </p:par>
-                      </p:childTnLst>
-                    </p:cTn>
-                  </p:par>
-                </p:childTnLst>
-              </p:cTn>
-              <p:prevCondLst>
-                <p:cond evt="onPrev" delay="0">
-                  <p:tgtEl>
-                    <p:sldTgt/>
-                  </p:tgtEl>
-                </p:cond>
-              </p:prevCondLst>
-              <p:nextCondLst>
-                <p:cond evt="onNext" delay="0">
-                  <p:tgtEl>
-                    <p:sldTgt/>
-                  </p:tgtEl>
-                </p:cond>
-              </p:nextCondLst>
-            </p:seq>
-          </p:childTnLst>
-        </p:cTn>
-      </p:par>
-    </p:tnLst>
-    <p:bldLst>
-      <p:bldGraphic spid="6" grpId="0">
-        <p:bldAsOne/>
-      </p:bldGraphic>
-      <p:bldP spid="7" grpId="0" animBg="1"/>
-      <p:bldP spid="8" grpId="0" animBg="1"/>
-      <p:bldP spid="9" grpId="0" animBg="1"/>
-      <p:bldP spid="10" grpId="0" animBg="1"/>
-    </p:bldLst>
-  </p:timing>
-</p:sld>
-</file>
-
-<file path=ppt/slides/slide18.xml><?xml version="1.0" encoding="utf-8"?>
-<p:sld xmlns:a="http://schemas.openxmlformats.org/drawingml/2006/main" xmlns:p="http://schemas.openxmlformats.org/presentationml/2006/main" xmlns:r="http://schemas.openxmlformats.org/officeDocument/2006/relationships">
-  <p:cSld>
-    <p:spTree>
-      <p:nvGrpSpPr>
-        <p:cNvPr id="1" name=""/>
-        <p:cNvGrpSpPr/>
-        <p:nvPr/>
-      </p:nvGrpSpPr>
-      <p:grpSpPr/>
-      <p:sp>
-        <p:nvSpPr>
-          <p:cNvPr id="2" name="Rectangle 1"/>
-          <p:cNvSpPr/>
-          <p:nvPr/>
-        </p:nvSpPr>
-        <p:spPr>
-          <a:xfrm>
-            <a:off x="0" y="0"/>
-            <a:ext cx="12191695" cy="6858000"/>
-          </a:xfrm>
-          <a:prstGeom prst="rect">
-            <a:avLst/>
-          </a:prstGeom>
-          <a:solidFill>
-            <a:srgbClr val="FFFFFF"/>
-          </a:solidFill>
-          <a:ln>
-            <a:noFill/>
-          </a:ln>
-          <a:effectLst/>
-        </p:spPr>
-        <p:style>
-          <a:lnRef idx="1">
-            <a:schemeClr val="accent1"/>
-          </a:lnRef>
-          <a:fillRef idx="3">
-            <a:schemeClr val="accent1"/>
-          </a:fillRef>
-          <a:effectRef idx="2">
-            <a:schemeClr val="accent1"/>
-          </a:effectRef>
-          <a:fontRef idx="minor">
-            <a:schemeClr val="lt1"/>
-          </a:fontRef>
-        </p:style>
-        <p:txBody>
-          <a:bodyPr rtlCol="0" anchor="ctr"/>
-          <a:lstStyle/>
-          <a:p>
-            <a:pPr algn="ctr"/>
-          </a:p>
-        </p:txBody>
-      </p:sp>
-      <p:sp>
-        <p:nvSpPr>
-          <p:cNvPr id="3" name="Rectangle 2"/>
-          <p:cNvSpPr/>
-          <p:nvPr/>
-        </p:nvSpPr>
-        <p:spPr>
-          <a:xfrm>
-            <a:off x="0" y="0"/>
-            <a:ext cx="12191695" cy="868680"/>
-          </a:xfrm>
-          <a:prstGeom prst="rect">
-            <a:avLst/>
-          </a:prstGeom>
-          <a:solidFill>
-            <a:srgbClr val="1F4E79"/>
-          </a:solidFill>
-          <a:ln>
-            <a:noFill/>
-          </a:ln>
-          <a:effectLst/>
-        </p:spPr>
-        <p:style>
-          <a:lnRef idx="1">
-            <a:schemeClr val="accent1"/>
-          </a:lnRef>
-          <a:fillRef idx="3">
-            <a:schemeClr val="accent1"/>
-          </a:fillRef>
-          <a:effectRef idx="2">
-            <a:schemeClr val="accent1"/>
-          </a:effectRef>
-          <a:fontRef idx="minor">
-            <a:schemeClr val="lt1"/>
-          </a:fontRef>
-        </p:style>
-        <p:txBody>
-          <a:bodyPr rtlCol="0" anchor="ctr"/>
-          <a:lstStyle/>
-          <a:p>
-            <a:pPr algn="ctr"/>
-          </a:p>
-        </p:txBody>
-      </p:sp>
-      <p:sp>
-        <p:nvSpPr>
-          <p:cNvPr id="4" name="TextBox 3"/>
-          <p:cNvSpPr txBox="1"/>
-          <p:nvPr/>
-        </p:nvSpPr>
-        <p:spPr>
-          <a:xfrm>
-            <a:off x="411480" y="73152"/>
-            <a:ext cx="11338560" cy="457200"/>
-          </a:xfrm>
-          <a:prstGeom prst="rect">
-            <a:avLst/>
-          </a:prstGeom>
-          <a:noFill/>
-        </p:spPr>
-        <p:txBody>
-          <a:bodyPr wrap="square">
-            <a:spAutoFit/>
-          </a:bodyPr>
-          <a:lstStyle/>
-          <a:p>
-            <a:pPr algn="just"/>
-            <a:r>
-              <a:rPr sz="2700" b="1">
-                <a:solidFill>
-                  <a:srgbClr val="FFFFFF"/>
-                </a:solidFill>
-                <a:latin typeface="Microsoft JhengHei"/>
-              </a:rPr>
-              <a:t>四、很小的網路取中間溫度</a:t>
-            </a:r>
-          </a:p>
-        </p:txBody>
-      </p:sp>
-      <p:sp>
-        <p:nvSpPr>
-          <p:cNvPr id="5" name="TextBox 4"/>
-          <p:cNvSpPr txBox="1"/>
-          <p:nvPr/>
-        </p:nvSpPr>
-        <p:spPr>
-          <a:xfrm>
-            <a:off x="411480" y="521207"/>
-            <a:ext cx="11338560" cy="301752"/>
-          </a:xfrm>
-          <a:prstGeom prst="rect">
-            <a:avLst/>
-          </a:prstGeom>
-          <a:noFill/>
-        </p:spPr>
-        <p:txBody>
-          <a:bodyPr wrap="square">
-            <a:spAutoFit/>
-          </a:bodyPr>
-          <a:lstStyle/>
-          <a:p>
-            <a:pPr algn="just"/>
-            <a:r>
-              <a:rPr sz="1300" b="0">
-                <a:solidFill>
-                  <a:srgbClr val="C7D6E5"/>
-                </a:solidFill>
-                <a:latin typeface="Microsoft JhengHei"/>
-              </a:rPr>
-              <a:t>小網路縮小為 30-30</a:t>
-            </a:r>
-          </a:p>
-        </p:txBody>
-      </p:sp>
-      <p:graphicFrame>
-        <p:nvGraphicFramePr>
-          <p:cNvPr id="6" name="Table 5"/>
-          <p:cNvGraphicFramePr>
-            <a:graphicFrameLocks noGrp="1"/>
-          </p:cNvGraphicFramePr>
-          <p:nvPr/>
-        </p:nvGraphicFramePr>
-        <p:xfrm>
-          <a:off x="731520" y="1143000"/>
-          <a:ext cx="5669280" cy="2304288"/>
-        </p:xfrm>
-        <a:graphic>
-          <a:graphicData uri="http://schemas.openxmlformats.org/drawingml/2006/table">
-            <a:tbl>
-              <a:tblPr bandRow="1">
-                <a:tableStyleId>{5C22544A-7EE6-4342-B048-85BDC9FD1C3A}</a:tableStyleId>
-              </a:tblPr>
-              <a:tblGrid>
-                <a:gridCol w="1889760"/>
-                <a:gridCol w="1889760"/>
-                <a:gridCol w="1889760"/>
-              </a:tblGrid>
-              <a:tr h="329184">
-                <a:tc>
-                  <a:txBody>
-                    <a:bodyPr/>
-                    <a:lstStyle/>
-                    <a:p>
-                      <a:pPr algn="ctr"/>
-                      <a:r>
-                        <a:rPr sz="1600" b="1">
-                          <a:solidFill>
-                            <a:srgbClr val="FFFFFF"/>
-                          </a:solidFill>
-                          <a:latin typeface="Microsoft JhengHei"/>
-                        </a:rPr>
-                        <a:t>T</a:t>
-                      </a:r>
-                    </a:p>
-                  </a:txBody>
-                  <a:tcPr marL="36576" marR="36576" marT="9144" marB="9144">
-                    <a:solidFill>
-                      <a:srgbClr val="1F4E79"/>
-                    </a:solidFill>
-                  </a:tcPr>
-                </a:tc>
-                <a:tc>
-                  <a:txBody>
-                    <a:bodyPr/>
-                    <a:lstStyle/>
-                    <a:p>
-                      <a:pPr algn="ctr"/>
-                      <a:r>
-                        <a:rPr sz="1600" b="1">
-                          <a:solidFill>
-                            <a:srgbClr val="FFFFFF"/>
-                          </a:solidFill>
-                          <a:latin typeface="Microsoft JhengHei"/>
-                        </a:rPr>
-                        <a:t>小網路 100-100</a:t>
-                      </a:r>
-                    </a:p>
-                  </a:txBody>
-                  <a:tcPr marL="36576" marR="36576" marT="9144" marB="9144">
-                    <a:solidFill>
-                      <a:srgbClr val="1F4E79"/>
-                    </a:solidFill>
-                  </a:tcPr>
-                </a:tc>
-                <a:tc>
-                  <a:txBody>
-                    <a:bodyPr/>
-                    <a:lstStyle/>
-                    <a:p>
-                      <a:pPr algn="ctr"/>
-                      <a:r>
-                        <a:rPr sz="1600" b="1">
-                          <a:solidFill>
-                            <a:srgbClr val="FFFFFF"/>
-                          </a:solidFill>
-                          <a:latin typeface="Microsoft JhengHei"/>
-                        </a:rPr>
-                        <a:t>小網路 30-30</a:t>
-                      </a:r>
-                    </a:p>
-                  </a:txBody>
-                  <a:tcPr marL="36576" marR="36576" marT="9144" marB="9144">
-                    <a:solidFill>
-                      <a:srgbClr val="1F4E79"/>
-                    </a:solidFill>
-                  </a:tcPr>
-                </a:tc>
-              </a:tr>
-              <a:tr h="329184">
-                <a:tc>
-                  <a:txBody>
-                    <a:bodyPr/>
-                    <a:lstStyle/>
-                    <a:p>
-                      <a:pPr algn="ctr"/>
-                      <a:r>
-                        <a:rPr sz="1600" b="0">
-                          <a:solidFill>
-                            <a:srgbClr val="202020"/>
-                          </a:solidFill>
-                          <a:latin typeface="Consolas"/>
-                        </a:rPr>
-                        <a:t>只用硬目標</a:t>
-                      </a:r>
-                    </a:p>
-                  </a:txBody>
-                  <a:tcPr marL="36576" marR="36576" marT="9144" marB="9144">
-                    <a:solidFill>
-                      <a:srgbClr val="FFFFFF"/>
-                    </a:solidFill>
-                  </a:tcPr>
-                </a:tc>
-                <a:tc>
-                  <a:txBody>
-                    <a:bodyPr/>
-                    <a:lstStyle/>
-                    <a:p>
-                      <a:pPr algn="ctr"/>
-                      <a:r>
-                        <a:rPr sz="1600" b="0">
-                          <a:solidFill>
-                            <a:srgbClr val="202020"/>
-                          </a:solidFill>
-                          <a:latin typeface="Consolas"/>
-                        </a:rPr>
-                        <a:t>420</a:t>
-                      </a:r>
-                    </a:p>
-                  </a:txBody>
-                  <a:tcPr marL="36576" marR="36576" marT="9144" marB="9144">
-                    <a:solidFill>
-                      <a:srgbClr val="FFFFFF"/>
-                    </a:solidFill>
-                  </a:tcPr>
-                </a:tc>
-                <a:tc>
-                  <a:txBody>
-                    <a:bodyPr/>
-                    <a:lstStyle/>
-                    <a:p>
-                      <a:pPr algn="ctr"/>
-                      <a:r>
-                        <a:rPr sz="1600" b="0">
-                          <a:solidFill>
-                            <a:srgbClr val="202020"/>
-                          </a:solidFill>
-                          <a:latin typeface="Consolas"/>
-                        </a:rPr>
-                        <a:t>568</a:t>
-                      </a:r>
-                    </a:p>
-                  </a:txBody>
-                  <a:tcPr marL="36576" marR="36576" marT="9144" marB="9144">
-                    <a:solidFill>
-                      <a:srgbClr val="FFFFFF"/>
-                    </a:solidFill>
-                  </a:tcPr>
-                </a:tc>
-              </a:tr>
-              <a:tr h="329184">
-                <a:tc>
-                  <a:txBody>
-                    <a:bodyPr/>
-                    <a:lstStyle/>
-                    <a:p>
-                      <a:pPr algn="ctr"/>
-                      <a:r>
-                        <a:rPr sz="1600" b="0">
-                          <a:solidFill>
-                            <a:srgbClr val="202020"/>
-                          </a:solidFill>
-                          <a:latin typeface="Consolas"/>
-                        </a:rPr>
-                        <a:t>1</a:t>
-                      </a:r>
-                    </a:p>
-                  </a:txBody>
-                  <a:tcPr marL="36576" marR="36576" marT="9144" marB="9144">
-                    <a:solidFill>
-                      <a:srgbClr val="FFFFFF"/>
-                    </a:solidFill>
-                  </a:tcPr>
-                </a:tc>
-                <a:tc>
-                  <a:txBody>
-                    <a:bodyPr/>
-                    <a:lstStyle/>
-                    <a:p>
-                      <a:pPr algn="ctr"/>
-                      <a:r>
-                        <a:rPr sz="1600" b="0">
-                          <a:solidFill>
-                            <a:srgbClr val="202020"/>
-                          </a:solidFill>
-                          <a:latin typeface="Consolas"/>
-                        </a:rPr>
-                        <a:t>397</a:t>
-                      </a:r>
-                    </a:p>
-                  </a:txBody>
-                  <a:tcPr marL="36576" marR="36576" marT="9144" marB="9144">
-                    <a:solidFill>
-                      <a:srgbClr val="FFFFFF"/>
-                    </a:solidFill>
-                  </a:tcPr>
-                </a:tc>
-                <a:tc>
-                  <a:txBody>
-                    <a:bodyPr/>
-                    <a:lstStyle/>
-                    <a:p>
-                      <a:pPr algn="ctr"/>
-                      <a:r>
-                        <a:rPr sz="1600" b="0">
-                          <a:solidFill>
-                            <a:srgbClr val="202020"/>
-                          </a:solidFill>
-                          <a:latin typeface="Consolas"/>
-                        </a:rPr>
-                        <a:t>522</a:t>
-                      </a:r>
-                    </a:p>
-                  </a:txBody>
-                  <a:tcPr marL="36576" marR="36576" marT="9144" marB="9144">
-                    <a:solidFill>
-                      <a:srgbClr val="FFFFFF"/>
-                    </a:solidFill>
-                  </a:tcPr>
-                </a:tc>
-              </a:tr>
-              <a:tr h="329184">
-                <a:tc>
-                  <a:txBody>
-                    <a:bodyPr/>
-                    <a:lstStyle/>
-                    <a:p>
-                      <a:pPr algn="ctr"/>
-                      <a:r>
-                        <a:rPr sz="1600" b="0">
-                          <a:solidFill>
-                            <a:srgbClr val="202020"/>
-                          </a:solidFill>
-                          <a:latin typeface="Consolas"/>
-                        </a:rPr>
-                        <a:t>2</a:t>
-                      </a:r>
-                    </a:p>
-                  </a:txBody>
-                  <a:tcPr marL="36576" marR="36576" marT="9144" marB="9144">
-                    <a:solidFill>
-                      <a:srgbClr val="FFFFFF"/>
-                    </a:solidFill>
-                  </a:tcPr>
-                </a:tc>
-                <a:tc>
-                  <a:txBody>
-                    <a:bodyPr/>
-                    <a:lstStyle/>
-                    <a:p>
-                      <a:pPr algn="ctr"/>
-                      <a:r>
-                        <a:rPr sz="1600" b="0">
-                          <a:solidFill>
-                            <a:srgbClr val="202020"/>
-                          </a:solidFill>
-                          <a:latin typeface="Consolas"/>
-                        </a:rPr>
-                        <a:t>343</a:t>
-                      </a:r>
-                    </a:p>
-                  </a:txBody>
-                  <a:tcPr marL="36576" marR="36576" marT="9144" marB="9144">
-                    <a:solidFill>
-                      <a:srgbClr val="FFFFFF"/>
-                    </a:solidFill>
-                  </a:tcPr>
-                </a:tc>
-                <a:tc>
-                  <a:txBody>
-                    <a:bodyPr/>
-                    <a:lstStyle/>
-                    <a:p>
-                      <a:pPr algn="ctr"/>
-                      <a:r>
-                        <a:rPr sz="1600" b="0">
-                          <a:solidFill>
-                            <a:srgbClr val="202020"/>
-                          </a:solidFill>
-                          <a:latin typeface="Consolas"/>
-                        </a:rPr>
-                        <a:t>545</a:t>
-                      </a:r>
-                    </a:p>
-                  </a:txBody>
-                  <a:tcPr marL="36576" marR="36576" marT="9144" marB="9144">
-                    <a:solidFill>
-                      <a:srgbClr val="FFFFFF"/>
-                    </a:solidFill>
-                  </a:tcPr>
-                </a:tc>
-              </a:tr>
-              <a:tr h="329184">
-                <a:tc>
-                  <a:txBody>
-                    <a:bodyPr/>
-                    <a:lstStyle/>
-                    <a:p>
-                      <a:pPr algn="ctr"/>
-                      <a:r>
-                        <a:rPr sz="1600" b="0">
-                          <a:solidFill>
-                            <a:srgbClr val="202020"/>
-                          </a:solidFill>
-                          <a:latin typeface="Consolas"/>
-                        </a:rPr>
-                        <a:t>4</a:t>
-                      </a:r>
-                    </a:p>
-                  </a:txBody>
-                  <a:tcPr marL="36576" marR="36576" marT="9144" marB="9144">
-                    <a:solidFill>
-                      <a:srgbClr val="FFFFFF"/>
-                    </a:solidFill>
-                  </a:tcPr>
-                </a:tc>
-                <a:tc>
-                  <a:txBody>
-                    <a:bodyPr/>
-                    <a:lstStyle/>
-                    <a:p>
-                      <a:pPr algn="ctr"/>
-                      <a:r>
-                        <a:rPr sz="1600" b="0">
-                          <a:solidFill>
-                            <a:srgbClr val="202020"/>
-                          </a:solidFill>
-                          <a:latin typeface="Consolas"/>
-                        </a:rPr>
-                        <a:t>327</a:t>
-                      </a:r>
-                    </a:p>
-                  </a:txBody>
-                  <a:tcPr marL="36576" marR="36576" marT="9144" marB="9144">
-                    <a:solidFill>
-                      <a:srgbClr val="FFFFFF"/>
-                    </a:solidFill>
-                  </a:tcPr>
-                </a:tc>
-                <a:tc>
-                  <a:txBody>
-                    <a:bodyPr/>
-                    <a:lstStyle/>
-                    <a:p>
-                      <a:pPr algn="ctr"/>
-                      <a:r>
-                        <a:rPr sz="1600" b="0">
-                          <a:solidFill>
-                            <a:srgbClr val="202020"/>
-                          </a:solidFill>
-                          <a:latin typeface="Consolas"/>
-                        </a:rPr>
-                        <a:t>498</a:t>
-                      </a:r>
-                    </a:p>
-                  </a:txBody>
-                  <a:tcPr marL="36576" marR="36576" marT="9144" marB="9144">
-                    <a:solidFill>
-                      <a:srgbClr val="FFF3CD"/>
-                    </a:solidFill>
-                  </a:tcPr>
-                </a:tc>
-              </a:tr>
-              <a:tr h="329184">
-                <a:tc>
-                  <a:txBody>
-                    <a:bodyPr/>
-                    <a:lstStyle/>
-                    <a:p>
-                      <a:pPr algn="ctr"/>
-                      <a:r>
-                        <a:rPr sz="1600" b="0">
-                          <a:solidFill>
-                            <a:srgbClr val="202020"/>
-                          </a:solidFill>
-                          <a:latin typeface="Consolas"/>
-                        </a:rPr>
-                        <a:t>8</a:t>
-                      </a:r>
-                    </a:p>
-                  </a:txBody>
-                  <a:tcPr marL="36576" marR="36576" marT="9144" marB="9144">
-                    <a:solidFill>
-                      <a:srgbClr val="FFFFFF"/>
-                    </a:solidFill>
-                  </a:tcPr>
-                </a:tc>
-                <a:tc>
-                  <a:txBody>
-                    <a:bodyPr/>
-                    <a:lstStyle/>
-                    <a:p>
-                      <a:pPr algn="ctr"/>
-                      <a:r>
-                        <a:rPr sz="1600" b="0">
-                          <a:solidFill>
-                            <a:srgbClr val="202020"/>
-                          </a:solidFill>
-                          <a:latin typeface="Consolas"/>
-                        </a:rPr>
-                        <a:t>322</a:t>
-                      </a:r>
-                    </a:p>
-                  </a:txBody>
-                  <a:tcPr marL="36576" marR="36576" marT="9144" marB="9144">
-                    <a:solidFill>
-                      <a:srgbClr val="FFFFFF"/>
-                    </a:solidFill>
-                  </a:tcPr>
-                </a:tc>
-                <a:tc>
-                  <a:txBody>
-                    <a:bodyPr/>
-                    <a:lstStyle/>
-                    <a:p>
-                      <a:pPr algn="ctr"/>
-                      <a:r>
-                        <a:rPr sz="1600" b="0">
-                          <a:solidFill>
-                            <a:srgbClr val="202020"/>
-                          </a:solidFill>
-                          <a:latin typeface="Consolas"/>
-                        </a:rPr>
-                        <a:t>554</a:t>
-                      </a:r>
-                    </a:p>
-                  </a:txBody>
-                  <a:tcPr marL="36576" marR="36576" marT="9144" marB="9144">
-                    <a:solidFill>
-                      <a:srgbClr val="FFFFFF"/>
-                    </a:solidFill>
-                  </a:tcPr>
-                </a:tc>
-              </a:tr>
-              <a:tr h="329184">
-                <a:tc>
-                  <a:txBody>
-                    <a:bodyPr/>
-                    <a:lstStyle/>
-                    <a:p>
-                      <a:pPr algn="ctr"/>
-                      <a:r>
-                        <a:rPr sz="1600" b="0">
-                          <a:solidFill>
-                            <a:srgbClr val="202020"/>
-                          </a:solidFill>
-                          <a:latin typeface="Consolas"/>
-                        </a:rPr>
-                        <a:t>20</a:t>
-                      </a:r>
-                    </a:p>
-                  </a:txBody>
-                  <a:tcPr marL="36576" marR="36576" marT="9144" marB="9144">
-                    <a:solidFill>
-                      <a:srgbClr val="FFFFFF"/>
-                    </a:solidFill>
-                  </a:tcPr>
-                </a:tc>
-                <a:tc>
-                  <a:txBody>
-                    <a:bodyPr/>
-                    <a:lstStyle/>
-                    <a:p>
-                      <a:pPr algn="ctr"/>
-                      <a:r>
-                        <a:rPr sz="1600" b="0">
-                          <a:solidFill>
-                            <a:srgbClr val="202020"/>
-                          </a:solidFill>
-                          <a:latin typeface="Consolas"/>
-                        </a:rPr>
-                        <a:t>319</a:t>
-                      </a:r>
-                    </a:p>
-                  </a:txBody>
-                  <a:tcPr marL="36576" marR="36576" marT="9144" marB="9144">
-                    <a:solidFill>
-                      <a:srgbClr val="FFFFFF"/>
-                    </a:solidFill>
-                  </a:tcPr>
-                </a:tc>
-                <a:tc>
-                  <a:txBody>
-                    <a:bodyPr/>
-                    <a:lstStyle/>
-                    <a:p>
-                      <a:pPr algn="ctr"/>
-                      <a:r>
-                        <a:rPr sz="1600" b="0">
-                          <a:solidFill>
-                            <a:srgbClr val="202020"/>
-                          </a:solidFill>
-                          <a:latin typeface="Consolas"/>
-                        </a:rPr>
-                        <a:t>599</a:t>
-                      </a:r>
-                    </a:p>
-                  </a:txBody>
-                  <a:tcPr marL="36576" marR="36576" marT="9144" marB="9144">
-                    <a:solidFill>
-                      <a:srgbClr val="FFFFFF"/>
-                    </a:solidFill>
-                  </a:tcPr>
-                </a:tc>
-              </a:tr>
-            </a:tbl>
-          </a:graphicData>
-        </a:graphic>
-      </p:graphicFrame>
-      <p:pic>
-        <p:nvPicPr>
-          <p:cNvPr id="7" name="Picture 6" descr="f_temp.png"/>
-          <p:cNvPicPr>
-            <a:picLocks noChangeAspect="1"/>
-          </p:cNvPicPr>
-          <p:nvPr/>
-        </p:nvPicPr>
-        <p:blipFill>
-          <a:blip r:embed="rId2"/>
-          <a:stretch>
-            <a:fillRect/>
-          </a:stretch>
-        </p:blipFill>
-        <p:spPr>
-          <a:xfrm>
-            <a:off x="6583680" y="1097280"/>
-            <a:ext cx="5120640" cy="2720340"/>
-          </a:xfrm>
-          <a:prstGeom prst="rect">
-            <a:avLst/>
-          </a:prstGeom>
-        </p:spPr>
-      </p:pic>
-      <p:sp>
-        <p:nvSpPr>
-          <p:cNvPr id="8" name="Rectangle 7"/>
-          <p:cNvSpPr/>
-          <p:nvPr/>
-        </p:nvSpPr>
-        <p:spPr>
-          <a:xfrm>
-            <a:off x="731520" y="3886200"/>
-            <a:ext cx="10881360" cy="914400"/>
-          </a:xfrm>
-          <a:prstGeom prst="rect">
-            <a:avLst/>
-          </a:prstGeom>
-          <a:solidFill>
-            <a:srgbClr val="F6F8FA"/>
-          </a:solidFill>
-          <a:ln>
-            <a:solidFill>
-              <a:srgbClr val="D0D7DE"/>
-            </a:solidFill>
-          </a:ln>
-          <a:effectLst/>
-        </p:spPr>
-        <p:style>
-          <a:lnRef idx="1">
-            <a:schemeClr val="accent1"/>
-          </a:lnRef>
-          <a:fillRef idx="3">
-            <a:schemeClr val="accent1"/>
-          </a:fillRef>
-          <a:effectRef idx="2">
-            <a:schemeClr val="accent1"/>
-          </a:effectRef>
-          <a:fontRef idx="minor">
-            <a:schemeClr val="lt1"/>
-          </a:fontRef>
-        </p:style>
-        <p:txBody>
-          <a:bodyPr rtlCol="0" anchor="ctr" wrap="square"/>
-          <a:lstStyle/>
-          <a:p>
-            <a:pPr algn="just"/>
-            <a:r>
-              <a:rPr sz="1700" b="1">
-                <a:solidFill>
-                  <a:srgbClr val="1F4E79"/>
-                </a:solidFill>
-                <a:latin typeface="Microsoft JhengHei"/>
-              </a:rPr>
-              <a:t>論文：每層 300 個以上單元時，8 以上的溫度結果相當接近；每層縮減為 30 個時，</a:t>
-            </a:r>
-          </a:p>
-          <a:p>
-            <a:pPr algn="just"/>
-            <a:r>
-              <a:rPr sz="1700" b="1">
-                <a:solidFill>
-                  <a:srgbClr val="1F4E79"/>
-                </a:solidFill>
-                <a:latin typeface="Microsoft JhengHei"/>
-              </a:rPr>
-              <a:t>2.5 至 4 的溫度明顯優於更高或更低的溫度</a:t>
-            </a:r>
-          </a:p>
-        </p:txBody>
-      </p:sp>
-      <p:sp>
-        <p:nvSpPr>
-          <p:cNvPr id="9" name="Rectangle 8"/>
-          <p:cNvSpPr/>
-          <p:nvPr/>
-        </p:nvSpPr>
-        <p:spPr>
-          <a:xfrm>
-            <a:off x="731520" y="4892040"/>
-            <a:ext cx="10881360" cy="914400"/>
-          </a:xfrm>
-          <a:prstGeom prst="rect">
-            <a:avLst/>
-          </a:prstGeom>
-          <a:solidFill>
-            <a:srgbClr val="DCF0E4"/>
-          </a:solidFill>
-          <a:ln>
-            <a:solidFill>
-              <a:srgbClr val="D0D7DE"/>
-            </a:solidFill>
-          </a:ln>
-          <a:effectLst/>
-        </p:spPr>
-        <p:style>
-          <a:lnRef idx="1">
-            <a:schemeClr val="accent1"/>
-          </a:lnRef>
-          <a:fillRef idx="3">
-            <a:schemeClr val="accent1"/>
-          </a:fillRef>
-          <a:effectRef idx="2">
-            <a:schemeClr val="accent1"/>
-          </a:effectRef>
-          <a:fontRef idx="minor">
-            <a:schemeClr val="lt1"/>
-          </a:fontRef>
-        </p:style>
-        <p:txBody>
-          <a:bodyPr rtlCol="0" anchor="ctr" wrap="square"/>
-          <a:lstStyle/>
-          <a:p>
-            <a:pPr algn="just"/>
-            <a:r>
-              <a:rPr sz="1800" b="1">
-                <a:solidFill>
-                  <a:srgbClr val="1E7A45"/>
-                </a:solidFill>
-                <a:latin typeface="Microsoft JhengHei"/>
-              </a:rPr>
-              <a:t>本教材：30-30 在 T = 4 最好（498 個錯誤），T = 20 反而比只用硬目標還差</a:t>
-            </a:r>
-          </a:p>
-        </p:txBody>
-      </p:sp>
-      <p:sp>
-        <p:nvSpPr>
-          <p:cNvPr id="10" name="TextBox 9"/>
-          <p:cNvSpPr txBox="1"/>
-          <p:nvPr/>
-        </p:nvSpPr>
-        <p:spPr>
-          <a:xfrm>
-            <a:off x="731520" y="5897880"/>
-            <a:ext cx="10881360" cy="731520"/>
-          </a:xfrm>
-          <a:prstGeom prst="rect">
-            <a:avLst/>
-          </a:prstGeom>
-          <a:noFill/>
-        </p:spPr>
-        <p:txBody>
-          <a:bodyPr wrap="square">
-            <a:spAutoFit/>
-          </a:bodyPr>
-          <a:lstStyle/>
-          <a:p>
-            <a:pPr algn="just"/>
-            <a:r>
-              <a:rPr sz="1600" b="0">
-                <a:solidFill>
-                  <a:srgbClr val="59636E"/>
-                </a:solidFill>
-                <a:latin typeface="Microsoft JhengHei"/>
-              </a:rPr>
-              <a:t>蒸餾模型小到無法容納笨重模型全部的知識時，忽略那些很負的 logit 反而有幫助。</a:t>
             </a:r>
           </a:p>
         </p:txBody>
@@ -15451,6 +15850,1462 @@
                 </a:solidFill>
                 <a:latin typeface="Microsoft JhengHei"/>
               </a:rPr>
+              <a:t>四、很小的網路取中間溫度</a:t>
+            </a:r>
+          </a:p>
+        </p:txBody>
+      </p:sp>
+      <p:sp>
+        <p:nvSpPr>
+          <p:cNvPr id="5" name="TextBox 4"/>
+          <p:cNvSpPr txBox="1"/>
+          <p:nvPr/>
+        </p:nvSpPr>
+        <p:spPr>
+          <a:xfrm>
+            <a:off x="411480" y="521207"/>
+            <a:ext cx="11338560" cy="301752"/>
+          </a:xfrm>
+          <a:prstGeom prst="rect">
+            <a:avLst/>
+          </a:prstGeom>
+          <a:noFill/>
+        </p:spPr>
+        <p:txBody>
+          <a:bodyPr wrap="square">
+            <a:spAutoFit/>
+          </a:bodyPr>
+          <a:lstStyle/>
+          <a:p>
+            <a:pPr algn="just"/>
+            <a:r>
+              <a:rPr sz="1300" b="0">
+                <a:solidFill>
+                  <a:srgbClr val="C7D6E5"/>
+                </a:solidFill>
+                <a:latin typeface="Microsoft JhengHei"/>
+              </a:rPr>
+              <a:t>小網路縮小為 30-30</a:t>
+            </a:r>
+          </a:p>
+        </p:txBody>
+      </p:sp>
+      <p:graphicFrame>
+        <p:nvGraphicFramePr>
+          <p:cNvPr id="6" name="Table 5"/>
+          <p:cNvGraphicFramePr>
+            <a:graphicFrameLocks noGrp="1"/>
+          </p:cNvGraphicFramePr>
+          <p:nvPr/>
+        </p:nvGraphicFramePr>
+        <p:xfrm>
+          <a:off x="731520" y="1143000"/>
+          <a:ext cx="5669280" cy="2304288"/>
+        </p:xfrm>
+        <a:graphic>
+          <a:graphicData uri="http://schemas.openxmlformats.org/drawingml/2006/table">
+            <a:tbl>
+              <a:tblPr bandRow="1">
+                <a:tableStyleId>{5C22544A-7EE6-4342-B048-85BDC9FD1C3A}</a:tableStyleId>
+              </a:tblPr>
+              <a:tblGrid>
+                <a:gridCol w="1889760"/>
+                <a:gridCol w="1889760"/>
+                <a:gridCol w="1889760"/>
+              </a:tblGrid>
+              <a:tr h="329184">
+                <a:tc>
+                  <a:txBody>
+                    <a:bodyPr/>
+                    <a:lstStyle/>
+                    <a:p>
+                      <a:pPr algn="ctr"/>
+                      <a:r>
+                        <a:rPr sz="1600" b="1">
+                          <a:solidFill>
+                            <a:srgbClr val="FFFFFF"/>
+                          </a:solidFill>
+                          <a:latin typeface="Microsoft JhengHei"/>
+                        </a:rPr>
+                        <a:t>T</a:t>
+                      </a:r>
+                    </a:p>
+                  </a:txBody>
+                  <a:tcPr marL="36576" marR="36576" marT="9144" marB="9144">
+                    <a:solidFill>
+                      <a:srgbClr val="1F4E79"/>
+                    </a:solidFill>
+                  </a:tcPr>
+                </a:tc>
+                <a:tc>
+                  <a:txBody>
+                    <a:bodyPr/>
+                    <a:lstStyle/>
+                    <a:p>
+                      <a:pPr algn="ctr"/>
+                      <a:r>
+                        <a:rPr sz="1600" b="1">
+                          <a:solidFill>
+                            <a:srgbClr val="FFFFFF"/>
+                          </a:solidFill>
+                          <a:latin typeface="Microsoft JhengHei"/>
+                        </a:rPr>
+                        <a:t>小網路 100-100</a:t>
+                      </a:r>
+                    </a:p>
+                  </a:txBody>
+                  <a:tcPr marL="36576" marR="36576" marT="9144" marB="9144">
+                    <a:solidFill>
+                      <a:srgbClr val="1F4E79"/>
+                    </a:solidFill>
+                  </a:tcPr>
+                </a:tc>
+                <a:tc>
+                  <a:txBody>
+                    <a:bodyPr/>
+                    <a:lstStyle/>
+                    <a:p>
+                      <a:pPr algn="ctr"/>
+                      <a:r>
+                        <a:rPr sz="1600" b="1">
+                          <a:solidFill>
+                            <a:srgbClr val="FFFFFF"/>
+                          </a:solidFill>
+                          <a:latin typeface="Microsoft JhengHei"/>
+                        </a:rPr>
+                        <a:t>小網路 30-30</a:t>
+                      </a:r>
+                    </a:p>
+                  </a:txBody>
+                  <a:tcPr marL="36576" marR="36576" marT="9144" marB="9144">
+                    <a:solidFill>
+                      <a:srgbClr val="1F4E79"/>
+                    </a:solidFill>
+                  </a:tcPr>
+                </a:tc>
+              </a:tr>
+              <a:tr h="329184">
+                <a:tc>
+                  <a:txBody>
+                    <a:bodyPr/>
+                    <a:lstStyle/>
+                    <a:p>
+                      <a:pPr algn="ctr"/>
+                      <a:r>
+                        <a:rPr sz="1600" b="0">
+                          <a:solidFill>
+                            <a:srgbClr val="202020"/>
+                          </a:solidFill>
+                          <a:latin typeface="Consolas"/>
+                        </a:rPr>
+                        <a:t>只用硬目標</a:t>
+                      </a:r>
+                    </a:p>
+                  </a:txBody>
+                  <a:tcPr marL="36576" marR="36576" marT="9144" marB="9144">
+                    <a:solidFill>
+                      <a:srgbClr val="FFFFFF"/>
+                    </a:solidFill>
+                  </a:tcPr>
+                </a:tc>
+                <a:tc>
+                  <a:txBody>
+                    <a:bodyPr/>
+                    <a:lstStyle/>
+                    <a:p>
+                      <a:pPr algn="ctr"/>
+                      <a:r>
+                        <a:rPr sz="1600" b="0">
+                          <a:solidFill>
+                            <a:srgbClr val="202020"/>
+                          </a:solidFill>
+                          <a:latin typeface="Consolas"/>
+                        </a:rPr>
+                        <a:t>420</a:t>
+                      </a:r>
+                    </a:p>
+                  </a:txBody>
+                  <a:tcPr marL="36576" marR="36576" marT="9144" marB="9144">
+                    <a:solidFill>
+                      <a:srgbClr val="FFFFFF"/>
+                    </a:solidFill>
+                  </a:tcPr>
+                </a:tc>
+                <a:tc>
+                  <a:txBody>
+                    <a:bodyPr/>
+                    <a:lstStyle/>
+                    <a:p>
+                      <a:pPr algn="ctr"/>
+                      <a:r>
+                        <a:rPr sz="1600" b="0">
+                          <a:solidFill>
+                            <a:srgbClr val="202020"/>
+                          </a:solidFill>
+                          <a:latin typeface="Consolas"/>
+                        </a:rPr>
+                        <a:t>568</a:t>
+                      </a:r>
+                    </a:p>
+                  </a:txBody>
+                  <a:tcPr marL="36576" marR="36576" marT="9144" marB="9144">
+                    <a:solidFill>
+                      <a:srgbClr val="FFFFFF"/>
+                    </a:solidFill>
+                  </a:tcPr>
+                </a:tc>
+              </a:tr>
+              <a:tr h="329184">
+                <a:tc>
+                  <a:txBody>
+                    <a:bodyPr/>
+                    <a:lstStyle/>
+                    <a:p>
+                      <a:pPr algn="ctr"/>
+                      <a:r>
+                        <a:rPr sz="1600" b="0">
+                          <a:solidFill>
+                            <a:srgbClr val="202020"/>
+                          </a:solidFill>
+                          <a:latin typeface="Consolas"/>
+                        </a:rPr>
+                        <a:t>1</a:t>
+                      </a:r>
+                    </a:p>
+                  </a:txBody>
+                  <a:tcPr marL="36576" marR="36576" marT="9144" marB="9144">
+                    <a:solidFill>
+                      <a:srgbClr val="FFFFFF"/>
+                    </a:solidFill>
+                  </a:tcPr>
+                </a:tc>
+                <a:tc>
+                  <a:txBody>
+                    <a:bodyPr/>
+                    <a:lstStyle/>
+                    <a:p>
+                      <a:pPr algn="ctr"/>
+                      <a:r>
+                        <a:rPr sz="1600" b="0">
+                          <a:solidFill>
+                            <a:srgbClr val="202020"/>
+                          </a:solidFill>
+                          <a:latin typeface="Consolas"/>
+                        </a:rPr>
+                        <a:t>397</a:t>
+                      </a:r>
+                    </a:p>
+                  </a:txBody>
+                  <a:tcPr marL="36576" marR="36576" marT="9144" marB="9144">
+                    <a:solidFill>
+                      <a:srgbClr val="FFFFFF"/>
+                    </a:solidFill>
+                  </a:tcPr>
+                </a:tc>
+                <a:tc>
+                  <a:txBody>
+                    <a:bodyPr/>
+                    <a:lstStyle/>
+                    <a:p>
+                      <a:pPr algn="ctr"/>
+                      <a:r>
+                        <a:rPr sz="1600" b="0">
+                          <a:solidFill>
+                            <a:srgbClr val="202020"/>
+                          </a:solidFill>
+                          <a:latin typeface="Consolas"/>
+                        </a:rPr>
+                        <a:t>522</a:t>
+                      </a:r>
+                    </a:p>
+                  </a:txBody>
+                  <a:tcPr marL="36576" marR="36576" marT="9144" marB="9144">
+                    <a:solidFill>
+                      <a:srgbClr val="FFFFFF"/>
+                    </a:solidFill>
+                  </a:tcPr>
+                </a:tc>
+              </a:tr>
+              <a:tr h="329184">
+                <a:tc>
+                  <a:txBody>
+                    <a:bodyPr/>
+                    <a:lstStyle/>
+                    <a:p>
+                      <a:pPr algn="ctr"/>
+                      <a:r>
+                        <a:rPr sz="1600" b="0">
+                          <a:solidFill>
+                            <a:srgbClr val="202020"/>
+                          </a:solidFill>
+                          <a:latin typeface="Consolas"/>
+                        </a:rPr>
+                        <a:t>2</a:t>
+                      </a:r>
+                    </a:p>
+                  </a:txBody>
+                  <a:tcPr marL="36576" marR="36576" marT="9144" marB="9144">
+                    <a:solidFill>
+                      <a:srgbClr val="FFFFFF"/>
+                    </a:solidFill>
+                  </a:tcPr>
+                </a:tc>
+                <a:tc>
+                  <a:txBody>
+                    <a:bodyPr/>
+                    <a:lstStyle/>
+                    <a:p>
+                      <a:pPr algn="ctr"/>
+                      <a:r>
+                        <a:rPr sz="1600" b="0">
+                          <a:solidFill>
+                            <a:srgbClr val="202020"/>
+                          </a:solidFill>
+                          <a:latin typeface="Consolas"/>
+                        </a:rPr>
+                        <a:t>343</a:t>
+                      </a:r>
+                    </a:p>
+                  </a:txBody>
+                  <a:tcPr marL="36576" marR="36576" marT="9144" marB="9144">
+                    <a:solidFill>
+                      <a:srgbClr val="FFFFFF"/>
+                    </a:solidFill>
+                  </a:tcPr>
+                </a:tc>
+                <a:tc>
+                  <a:txBody>
+                    <a:bodyPr/>
+                    <a:lstStyle/>
+                    <a:p>
+                      <a:pPr algn="ctr"/>
+                      <a:r>
+                        <a:rPr sz="1600" b="0">
+                          <a:solidFill>
+                            <a:srgbClr val="202020"/>
+                          </a:solidFill>
+                          <a:latin typeface="Consolas"/>
+                        </a:rPr>
+                        <a:t>545</a:t>
+                      </a:r>
+                    </a:p>
+                  </a:txBody>
+                  <a:tcPr marL="36576" marR="36576" marT="9144" marB="9144">
+                    <a:solidFill>
+                      <a:srgbClr val="FFFFFF"/>
+                    </a:solidFill>
+                  </a:tcPr>
+                </a:tc>
+              </a:tr>
+              <a:tr h="329184">
+                <a:tc>
+                  <a:txBody>
+                    <a:bodyPr/>
+                    <a:lstStyle/>
+                    <a:p>
+                      <a:pPr algn="ctr"/>
+                      <a:r>
+                        <a:rPr sz="1600" b="0">
+                          <a:solidFill>
+                            <a:srgbClr val="202020"/>
+                          </a:solidFill>
+                          <a:latin typeface="Consolas"/>
+                        </a:rPr>
+                        <a:t>4</a:t>
+                      </a:r>
+                    </a:p>
+                  </a:txBody>
+                  <a:tcPr marL="36576" marR="36576" marT="9144" marB="9144">
+                    <a:solidFill>
+                      <a:srgbClr val="FFFFFF"/>
+                    </a:solidFill>
+                  </a:tcPr>
+                </a:tc>
+                <a:tc>
+                  <a:txBody>
+                    <a:bodyPr/>
+                    <a:lstStyle/>
+                    <a:p>
+                      <a:pPr algn="ctr"/>
+                      <a:r>
+                        <a:rPr sz="1600" b="0">
+                          <a:solidFill>
+                            <a:srgbClr val="202020"/>
+                          </a:solidFill>
+                          <a:latin typeface="Consolas"/>
+                        </a:rPr>
+                        <a:t>327</a:t>
+                      </a:r>
+                    </a:p>
+                  </a:txBody>
+                  <a:tcPr marL="36576" marR="36576" marT="9144" marB="9144">
+                    <a:solidFill>
+                      <a:srgbClr val="FFFFFF"/>
+                    </a:solidFill>
+                  </a:tcPr>
+                </a:tc>
+                <a:tc>
+                  <a:txBody>
+                    <a:bodyPr/>
+                    <a:lstStyle/>
+                    <a:p>
+                      <a:pPr algn="ctr"/>
+                      <a:r>
+                        <a:rPr sz="1600" b="0">
+                          <a:solidFill>
+                            <a:srgbClr val="202020"/>
+                          </a:solidFill>
+                          <a:latin typeface="Consolas"/>
+                        </a:rPr>
+                        <a:t>498</a:t>
+                      </a:r>
+                    </a:p>
+                  </a:txBody>
+                  <a:tcPr marL="36576" marR="36576" marT="9144" marB="9144">
+                    <a:solidFill>
+                      <a:srgbClr val="FFF3CD"/>
+                    </a:solidFill>
+                  </a:tcPr>
+                </a:tc>
+              </a:tr>
+              <a:tr h="329184">
+                <a:tc>
+                  <a:txBody>
+                    <a:bodyPr/>
+                    <a:lstStyle/>
+                    <a:p>
+                      <a:pPr algn="ctr"/>
+                      <a:r>
+                        <a:rPr sz="1600" b="0">
+                          <a:solidFill>
+                            <a:srgbClr val="202020"/>
+                          </a:solidFill>
+                          <a:latin typeface="Consolas"/>
+                        </a:rPr>
+                        <a:t>8</a:t>
+                      </a:r>
+                    </a:p>
+                  </a:txBody>
+                  <a:tcPr marL="36576" marR="36576" marT="9144" marB="9144">
+                    <a:solidFill>
+                      <a:srgbClr val="FFFFFF"/>
+                    </a:solidFill>
+                  </a:tcPr>
+                </a:tc>
+                <a:tc>
+                  <a:txBody>
+                    <a:bodyPr/>
+                    <a:lstStyle/>
+                    <a:p>
+                      <a:pPr algn="ctr"/>
+                      <a:r>
+                        <a:rPr sz="1600" b="0">
+                          <a:solidFill>
+                            <a:srgbClr val="202020"/>
+                          </a:solidFill>
+                          <a:latin typeface="Consolas"/>
+                        </a:rPr>
+                        <a:t>322</a:t>
+                      </a:r>
+                    </a:p>
+                  </a:txBody>
+                  <a:tcPr marL="36576" marR="36576" marT="9144" marB="9144">
+                    <a:solidFill>
+                      <a:srgbClr val="FFFFFF"/>
+                    </a:solidFill>
+                  </a:tcPr>
+                </a:tc>
+                <a:tc>
+                  <a:txBody>
+                    <a:bodyPr/>
+                    <a:lstStyle/>
+                    <a:p>
+                      <a:pPr algn="ctr"/>
+                      <a:r>
+                        <a:rPr sz="1600" b="0">
+                          <a:solidFill>
+                            <a:srgbClr val="202020"/>
+                          </a:solidFill>
+                          <a:latin typeface="Consolas"/>
+                        </a:rPr>
+                        <a:t>554</a:t>
+                      </a:r>
+                    </a:p>
+                  </a:txBody>
+                  <a:tcPr marL="36576" marR="36576" marT="9144" marB="9144">
+                    <a:solidFill>
+                      <a:srgbClr val="FFFFFF"/>
+                    </a:solidFill>
+                  </a:tcPr>
+                </a:tc>
+              </a:tr>
+              <a:tr h="329184">
+                <a:tc>
+                  <a:txBody>
+                    <a:bodyPr/>
+                    <a:lstStyle/>
+                    <a:p>
+                      <a:pPr algn="ctr"/>
+                      <a:r>
+                        <a:rPr sz="1600" b="0">
+                          <a:solidFill>
+                            <a:srgbClr val="202020"/>
+                          </a:solidFill>
+                          <a:latin typeface="Consolas"/>
+                        </a:rPr>
+                        <a:t>20</a:t>
+                      </a:r>
+                    </a:p>
+                  </a:txBody>
+                  <a:tcPr marL="36576" marR="36576" marT="9144" marB="9144">
+                    <a:solidFill>
+                      <a:srgbClr val="FFFFFF"/>
+                    </a:solidFill>
+                  </a:tcPr>
+                </a:tc>
+                <a:tc>
+                  <a:txBody>
+                    <a:bodyPr/>
+                    <a:lstStyle/>
+                    <a:p>
+                      <a:pPr algn="ctr"/>
+                      <a:r>
+                        <a:rPr sz="1600" b="0">
+                          <a:solidFill>
+                            <a:srgbClr val="202020"/>
+                          </a:solidFill>
+                          <a:latin typeface="Consolas"/>
+                        </a:rPr>
+                        <a:t>319</a:t>
+                      </a:r>
+                    </a:p>
+                  </a:txBody>
+                  <a:tcPr marL="36576" marR="36576" marT="9144" marB="9144">
+                    <a:solidFill>
+                      <a:srgbClr val="FFFFFF"/>
+                    </a:solidFill>
+                  </a:tcPr>
+                </a:tc>
+                <a:tc>
+                  <a:txBody>
+                    <a:bodyPr/>
+                    <a:lstStyle/>
+                    <a:p>
+                      <a:pPr algn="ctr"/>
+                      <a:r>
+                        <a:rPr sz="1600" b="0">
+                          <a:solidFill>
+                            <a:srgbClr val="202020"/>
+                          </a:solidFill>
+                          <a:latin typeface="Consolas"/>
+                        </a:rPr>
+                        <a:t>599</a:t>
+                      </a:r>
+                    </a:p>
+                  </a:txBody>
+                  <a:tcPr marL="36576" marR="36576" marT="9144" marB="9144">
+                    <a:solidFill>
+                      <a:srgbClr val="FFFFFF"/>
+                    </a:solidFill>
+                  </a:tcPr>
+                </a:tc>
+              </a:tr>
+            </a:tbl>
+          </a:graphicData>
+        </a:graphic>
+      </p:graphicFrame>
+      <p:pic>
+        <p:nvPicPr>
+          <p:cNvPr id="7" name="Picture 6" descr="f_temp.png"/>
+          <p:cNvPicPr>
+            <a:picLocks noChangeAspect="1"/>
+          </p:cNvPicPr>
+          <p:nvPr/>
+        </p:nvPicPr>
+        <p:blipFill>
+          <a:blip r:embed="rId2"/>
+          <a:stretch>
+            <a:fillRect/>
+          </a:stretch>
+        </p:blipFill>
+        <p:spPr>
+          <a:xfrm>
+            <a:off x="6583680" y="1097280"/>
+            <a:ext cx="5120640" cy="2720340"/>
+          </a:xfrm>
+          <a:prstGeom prst="rect">
+            <a:avLst/>
+          </a:prstGeom>
+        </p:spPr>
+      </p:pic>
+      <p:sp>
+        <p:nvSpPr>
+          <p:cNvPr id="8" name="Rectangle 7"/>
+          <p:cNvSpPr/>
+          <p:nvPr/>
+        </p:nvSpPr>
+        <p:spPr>
+          <a:xfrm>
+            <a:off x="731520" y="3886200"/>
+            <a:ext cx="10881360" cy="914400"/>
+          </a:xfrm>
+          <a:prstGeom prst="rect">
+            <a:avLst/>
+          </a:prstGeom>
+          <a:solidFill>
+            <a:srgbClr val="F6F8FA"/>
+          </a:solidFill>
+          <a:ln>
+            <a:solidFill>
+              <a:srgbClr val="D0D7DE"/>
+            </a:solidFill>
+          </a:ln>
+          <a:effectLst/>
+        </p:spPr>
+        <p:style>
+          <a:lnRef idx="1">
+            <a:schemeClr val="accent1"/>
+          </a:lnRef>
+          <a:fillRef idx="3">
+            <a:schemeClr val="accent1"/>
+          </a:fillRef>
+          <a:effectRef idx="2">
+            <a:schemeClr val="accent1"/>
+          </a:effectRef>
+          <a:fontRef idx="minor">
+            <a:schemeClr val="lt1"/>
+          </a:fontRef>
+        </p:style>
+        <p:txBody>
+          <a:bodyPr rtlCol="0" anchor="ctr" wrap="square"/>
+          <a:lstStyle/>
+          <a:p>
+            <a:pPr algn="just"/>
+            <a:r>
+              <a:rPr sz="1700" b="1">
+                <a:solidFill>
+                  <a:srgbClr val="1F4E79"/>
+                </a:solidFill>
+                <a:latin typeface="Microsoft JhengHei"/>
+              </a:rPr>
+              <a:t>論文：每層 300 個以上單元時，8 以上的溫度結果相當接近；每層縮減為 30 個時，</a:t>
+            </a:r>
+          </a:p>
+          <a:p>
+            <a:pPr algn="just"/>
+            <a:r>
+              <a:rPr sz="1700" b="1">
+                <a:solidFill>
+                  <a:srgbClr val="1F4E79"/>
+                </a:solidFill>
+                <a:latin typeface="Microsoft JhengHei"/>
+              </a:rPr>
+              <a:t>2.5 至 4 的溫度明顯優於更高或更低的溫度</a:t>
+            </a:r>
+          </a:p>
+        </p:txBody>
+      </p:sp>
+      <p:sp>
+        <p:nvSpPr>
+          <p:cNvPr id="9" name="Rectangle 8"/>
+          <p:cNvSpPr/>
+          <p:nvPr/>
+        </p:nvSpPr>
+        <p:spPr>
+          <a:xfrm>
+            <a:off x="731520" y="4892040"/>
+            <a:ext cx="10881360" cy="914400"/>
+          </a:xfrm>
+          <a:prstGeom prst="rect">
+            <a:avLst/>
+          </a:prstGeom>
+          <a:solidFill>
+            <a:srgbClr val="DCF0E4"/>
+          </a:solidFill>
+          <a:ln>
+            <a:solidFill>
+              <a:srgbClr val="D0D7DE"/>
+            </a:solidFill>
+          </a:ln>
+          <a:effectLst/>
+        </p:spPr>
+        <p:style>
+          <a:lnRef idx="1">
+            <a:schemeClr val="accent1"/>
+          </a:lnRef>
+          <a:fillRef idx="3">
+            <a:schemeClr val="accent1"/>
+          </a:fillRef>
+          <a:effectRef idx="2">
+            <a:schemeClr val="accent1"/>
+          </a:effectRef>
+          <a:fontRef idx="minor">
+            <a:schemeClr val="lt1"/>
+          </a:fontRef>
+        </p:style>
+        <p:txBody>
+          <a:bodyPr rtlCol="0" anchor="ctr" wrap="square"/>
+          <a:lstStyle/>
+          <a:p>
+            <a:pPr algn="just"/>
+            <a:r>
+              <a:rPr sz="1800" b="1">
+                <a:solidFill>
+                  <a:srgbClr val="1E7A45"/>
+                </a:solidFill>
+                <a:latin typeface="Microsoft JhengHei"/>
+              </a:rPr>
+              <a:t>本教材：30-30 在 T = 4 最好（498 個錯誤），T = 20 反而比只用硬目標還差</a:t>
+            </a:r>
+          </a:p>
+        </p:txBody>
+      </p:sp>
+      <p:sp>
+        <p:nvSpPr>
+          <p:cNvPr id="10" name="TextBox 9"/>
+          <p:cNvSpPr txBox="1"/>
+          <p:nvPr/>
+        </p:nvSpPr>
+        <p:spPr>
+          <a:xfrm>
+            <a:off x="731520" y="5897880"/>
+            <a:ext cx="10881360" cy="731520"/>
+          </a:xfrm>
+          <a:prstGeom prst="rect">
+            <a:avLst/>
+          </a:prstGeom>
+          <a:noFill/>
+        </p:spPr>
+        <p:txBody>
+          <a:bodyPr wrap="square">
+            <a:spAutoFit/>
+          </a:bodyPr>
+          <a:lstStyle/>
+          <a:p>
+            <a:pPr algn="just"/>
+            <a:r>
+              <a:rPr sz="1600" b="0">
+                <a:solidFill>
+                  <a:srgbClr val="59636E"/>
+                </a:solidFill>
+                <a:latin typeface="Microsoft JhengHei"/>
+              </a:rPr>
+              <a:t>蒸餾模型小到無法容納笨重模型全部的知識時，忽略那些很負的 logit 反而有幫助。</a:t>
+            </a:r>
+          </a:p>
+        </p:txBody>
+      </p:sp>
+    </p:spTree>
+  </p:cSld>
+  <p:clrMapOvr>
+    <a:masterClrMapping/>
+  </p:clrMapOvr>
+  <p:timing>
+    <p:tnLst>
+      <p:par>
+        <p:cTn id="1" dur="indefinite" restart="never" nodeType="tmRoot">
+          <p:childTnLst>
+            <p:seq concurrent="1" nextAc="seek">
+              <p:cTn id="2" dur="indefinite" nodeType="mainSeq">
+                <p:childTnLst>
+                  <p:par>
+                    <p:cTn id="3" fill="hold">
+                      <p:stCondLst>
+                        <p:cond delay="indefinite"/>
+                      </p:stCondLst>
+                      <p:childTnLst>
+                        <p:par>
+                          <p:cTn id="4" fill="hold">
+                            <p:stCondLst>
+                              <p:cond delay="0"/>
+                            </p:stCondLst>
+                            <p:childTnLst>
+                              <p:par>
+                                <p:cTn id="5" presetID="1" presetClass="entr" presetSubtype="0" fill="hold" grpId="0" nodeType="clickEffect">
+                                  <p:stCondLst>
+                                    <p:cond delay="0"/>
+                                  </p:stCondLst>
+                                  <p:childTnLst>
+                                    <p:set>
+                                      <p:cBhvr>
+                                        <p:cTn id="6" dur="1" fill="hold">
+                                          <p:stCondLst>
+                                            <p:cond delay="0"/>
+                                          </p:stCondLst>
+                                        </p:cTn>
+                                        <p:tgtEl>
+                                          <p:spTgt spid="6"/>
+                                        </p:tgtEl>
+                                        <p:attrNameLst>
+                                          <p:attrName>style.visibility</p:attrName>
+                                        </p:attrNameLst>
+                                      </p:cBhvr>
+                                      <p:to>
+                                        <p:strVal val="visible"/>
+                                      </p:to>
+                                    </p:set>
+                                  </p:childTnLst>
+                                </p:cTn>
+                              </p:par>
+                            </p:childTnLst>
+                          </p:cTn>
+                        </p:par>
+                      </p:childTnLst>
+                    </p:cTn>
+                  </p:par>
+                  <p:par>
+                    <p:cTn id="7" fill="hold">
+                      <p:stCondLst>
+                        <p:cond delay="indefinite"/>
+                      </p:stCondLst>
+                      <p:childTnLst>
+                        <p:par>
+                          <p:cTn id="8" fill="hold">
+                            <p:stCondLst>
+                              <p:cond delay="0"/>
+                            </p:stCondLst>
+                            <p:childTnLst>
+                              <p:par>
+                                <p:cTn id="9" presetID="1" presetClass="entr" presetSubtype="0" fill="hold" grpId="0" nodeType="clickEffect">
+                                  <p:stCondLst>
+                                    <p:cond delay="0"/>
+                                  </p:stCondLst>
+                                  <p:childTnLst>
+                                    <p:set>
+                                      <p:cBhvr>
+                                        <p:cTn id="10" dur="1" fill="hold">
+                                          <p:stCondLst>
+                                            <p:cond delay="0"/>
+                                          </p:stCondLst>
+                                        </p:cTn>
+                                        <p:tgtEl>
+                                          <p:spTgt spid="7"/>
+                                        </p:tgtEl>
+                                        <p:attrNameLst>
+                                          <p:attrName>style.visibility</p:attrName>
+                                        </p:attrNameLst>
+                                      </p:cBhvr>
+                                      <p:to>
+                                        <p:strVal val="visible"/>
+                                      </p:to>
+                                    </p:set>
+                                  </p:childTnLst>
+                                </p:cTn>
+                              </p:par>
+                            </p:childTnLst>
+                          </p:cTn>
+                        </p:par>
+                      </p:childTnLst>
+                    </p:cTn>
+                  </p:par>
+                  <p:par>
+                    <p:cTn id="11" fill="hold">
+                      <p:stCondLst>
+                        <p:cond delay="indefinite"/>
+                      </p:stCondLst>
+                      <p:childTnLst>
+                        <p:par>
+                          <p:cTn id="12" fill="hold">
+                            <p:stCondLst>
+                              <p:cond delay="0"/>
+                            </p:stCondLst>
+                            <p:childTnLst>
+                              <p:par>
+                                <p:cTn id="13" presetID="1" presetClass="entr" presetSubtype="0" fill="hold" grpId="0" nodeType="clickEffect">
+                                  <p:stCondLst>
+                                    <p:cond delay="0"/>
+                                  </p:stCondLst>
+                                  <p:childTnLst>
+                                    <p:set>
+                                      <p:cBhvr>
+                                        <p:cTn id="14" dur="1" fill="hold">
+                                          <p:stCondLst>
+                                            <p:cond delay="0"/>
+                                          </p:stCondLst>
+                                        </p:cTn>
+                                        <p:tgtEl>
+                                          <p:spTgt spid="8"/>
+                                        </p:tgtEl>
+                                        <p:attrNameLst>
+                                          <p:attrName>style.visibility</p:attrName>
+                                        </p:attrNameLst>
+                                      </p:cBhvr>
+                                      <p:to>
+                                        <p:strVal val="visible"/>
+                                      </p:to>
+                                    </p:set>
+                                  </p:childTnLst>
+                                </p:cTn>
+                              </p:par>
+                            </p:childTnLst>
+                          </p:cTn>
+                        </p:par>
+                      </p:childTnLst>
+                    </p:cTn>
+                  </p:par>
+                  <p:par>
+                    <p:cTn id="15" fill="hold">
+                      <p:stCondLst>
+                        <p:cond delay="indefinite"/>
+                      </p:stCondLst>
+                      <p:childTnLst>
+                        <p:par>
+                          <p:cTn id="16" fill="hold">
+                            <p:stCondLst>
+                              <p:cond delay="0"/>
+                            </p:stCondLst>
+                            <p:childTnLst>
+                              <p:par>
+                                <p:cTn id="17" presetID="1" presetClass="entr" presetSubtype="0" fill="hold" grpId="0" nodeType="clickEffect">
+                                  <p:stCondLst>
+                                    <p:cond delay="0"/>
+                                  </p:stCondLst>
+                                  <p:childTnLst>
+                                    <p:set>
+                                      <p:cBhvr>
+                                        <p:cTn id="18" dur="1" fill="hold">
+                                          <p:stCondLst>
+                                            <p:cond delay="0"/>
+                                          </p:stCondLst>
+                                        </p:cTn>
+                                        <p:tgtEl>
+                                          <p:spTgt spid="9"/>
+                                        </p:tgtEl>
+                                        <p:attrNameLst>
+                                          <p:attrName>style.visibility</p:attrName>
+                                        </p:attrNameLst>
+                                      </p:cBhvr>
+                                      <p:to>
+                                        <p:strVal val="visible"/>
+                                      </p:to>
+                                    </p:set>
+                                  </p:childTnLst>
+                                </p:cTn>
+                              </p:par>
+                            </p:childTnLst>
+                          </p:cTn>
+                        </p:par>
+                      </p:childTnLst>
+                    </p:cTn>
+                  </p:par>
+                  <p:par>
+                    <p:cTn id="19" fill="hold">
+                      <p:stCondLst>
+                        <p:cond delay="indefinite"/>
+                      </p:stCondLst>
+                      <p:childTnLst>
+                        <p:par>
+                          <p:cTn id="20" fill="hold">
+                            <p:stCondLst>
+                              <p:cond delay="0"/>
+                            </p:stCondLst>
+                            <p:childTnLst>
+                              <p:par>
+                                <p:cTn id="21" presetID="1" presetClass="entr" presetSubtype="0" fill="hold" grpId="0" nodeType="clickEffect">
+                                  <p:stCondLst>
+                                    <p:cond delay="0"/>
+                                  </p:stCondLst>
+                                  <p:childTnLst>
+                                    <p:set>
+                                      <p:cBhvr>
+                                        <p:cTn id="22" dur="1" fill="hold">
+                                          <p:stCondLst>
+                                            <p:cond delay="0"/>
+                                          </p:stCondLst>
+                                        </p:cTn>
+                                        <p:tgtEl>
+                                          <p:spTgt spid="10"/>
+                                        </p:tgtEl>
+                                        <p:attrNameLst>
+                                          <p:attrName>style.visibility</p:attrName>
+                                        </p:attrNameLst>
+                                      </p:cBhvr>
+                                      <p:to>
+                                        <p:strVal val="visible"/>
+                                      </p:to>
+                                    </p:set>
+                                  </p:childTnLst>
+                                </p:cTn>
+                              </p:par>
+                            </p:childTnLst>
+                          </p:cTn>
+                        </p:par>
+                      </p:childTnLst>
+                    </p:cTn>
+                  </p:par>
+                </p:childTnLst>
+              </p:cTn>
+              <p:prevCondLst>
+                <p:cond evt="onPrev" delay="0">
+                  <p:tgtEl>
+                    <p:sldTgt/>
+                  </p:tgtEl>
+                </p:cond>
+              </p:prevCondLst>
+              <p:nextCondLst>
+                <p:cond evt="onNext" delay="0">
+                  <p:tgtEl>
+                    <p:sldTgt/>
+                  </p:tgtEl>
+                </p:cond>
+              </p:nextCondLst>
+            </p:seq>
+          </p:childTnLst>
+        </p:cTn>
+      </p:par>
+    </p:tnLst>
+    <p:bldLst>
+      <p:bldGraphic spid="6" grpId="0">
+        <p:bldAsOne/>
+      </p:bldGraphic>
+      <p:bldP spid="7" grpId="0" animBg="1"/>
+      <p:bldP spid="8" grpId="0" animBg="1"/>
+      <p:bldP spid="9" grpId="0" animBg="1"/>
+      <p:bldP spid="10" grpId="0" animBg="1"/>
+    </p:bldLst>
+  </p:timing>
+</p:sld>
+</file>
+
+<file path=ppt/slides/slide2.xml><?xml version="1.0" encoding="utf-8"?>
+<p:sld xmlns:a="http://schemas.openxmlformats.org/drawingml/2006/main" xmlns:p="http://schemas.openxmlformats.org/presentationml/2006/main" xmlns:r="http://schemas.openxmlformats.org/officeDocument/2006/relationships">
+  <p:cSld>
+    <p:spTree>
+      <p:nvGrpSpPr>
+        <p:cNvPr id="1" name=""/>
+        <p:cNvGrpSpPr/>
+        <p:nvPr/>
+      </p:nvGrpSpPr>
+      <p:grpSpPr/>
+      <p:sp>
+        <p:nvSpPr>
+          <p:cNvPr id="2" name="Rectangle 1"/>
+          <p:cNvSpPr/>
+          <p:nvPr/>
+        </p:nvSpPr>
+        <p:spPr>
+          <a:xfrm>
+            <a:off x="0" y="0"/>
+            <a:ext cx="12191695" cy="6858000"/>
+          </a:xfrm>
+          <a:prstGeom prst="rect">
+            <a:avLst/>
+          </a:prstGeom>
+          <a:solidFill>
+            <a:srgbClr val="FFFFFF"/>
+          </a:solidFill>
+          <a:ln>
+            <a:noFill/>
+          </a:ln>
+          <a:effectLst/>
+        </p:spPr>
+        <p:style>
+          <a:lnRef idx="1">
+            <a:schemeClr val="accent1"/>
+          </a:lnRef>
+          <a:fillRef idx="3">
+            <a:schemeClr val="accent1"/>
+          </a:fillRef>
+          <a:effectRef idx="2">
+            <a:schemeClr val="accent1"/>
+          </a:effectRef>
+          <a:fontRef idx="minor">
+            <a:schemeClr val="lt1"/>
+          </a:fontRef>
+        </p:style>
+        <p:txBody>
+          <a:bodyPr rtlCol="0" anchor="ctr"/>
+          <a:lstStyle/>
+          <a:p>
+            <a:pPr algn="ctr"/>
+          </a:p>
+        </p:txBody>
+      </p:sp>
+      <p:sp>
+        <p:nvSpPr>
+          <p:cNvPr id="3" name="Rectangle 2"/>
+          <p:cNvSpPr/>
+          <p:nvPr/>
+        </p:nvSpPr>
+        <p:spPr>
+          <a:xfrm>
+            <a:off x="0" y="0"/>
+            <a:ext cx="12191695" cy="868680"/>
+          </a:xfrm>
+          <a:prstGeom prst="rect">
+            <a:avLst/>
+          </a:prstGeom>
+          <a:solidFill>
+            <a:srgbClr val="1F4E79"/>
+          </a:solidFill>
+          <a:ln>
+            <a:noFill/>
+          </a:ln>
+          <a:effectLst/>
+        </p:spPr>
+        <p:style>
+          <a:lnRef idx="1">
+            <a:schemeClr val="accent1"/>
+          </a:lnRef>
+          <a:fillRef idx="3">
+            <a:schemeClr val="accent1"/>
+          </a:fillRef>
+          <a:effectRef idx="2">
+            <a:schemeClr val="accent1"/>
+          </a:effectRef>
+          <a:fontRef idx="minor">
+            <a:schemeClr val="lt1"/>
+          </a:fontRef>
+        </p:style>
+        <p:txBody>
+          <a:bodyPr rtlCol="0" anchor="ctr"/>
+          <a:lstStyle/>
+          <a:p>
+            <a:pPr algn="ctr"/>
+          </a:p>
+        </p:txBody>
+      </p:sp>
+      <p:sp>
+        <p:nvSpPr>
+          <p:cNvPr id="4" name="TextBox 3"/>
+          <p:cNvSpPr txBox="1"/>
+          <p:nvPr/>
+        </p:nvSpPr>
+        <p:spPr>
+          <a:xfrm>
+            <a:off x="411480" y="73152"/>
+            <a:ext cx="11338560" cy="457200"/>
+          </a:xfrm>
+          <a:prstGeom prst="rect">
+            <a:avLst/>
+          </a:prstGeom>
+          <a:noFill/>
+        </p:spPr>
+        <p:txBody>
+          <a:bodyPr wrap="square">
+            <a:spAutoFit/>
+          </a:bodyPr>
+          <a:lstStyle/>
+          <a:p>
+            <a:pPr algn="just"/>
+            <a:r>
+              <a:rPr sz="2700" b="1">
+                <a:solidFill>
+                  <a:srgbClr val="FFFFFF"/>
+                </a:solidFill>
+                <a:latin typeface="Microsoft JhengHei"/>
+              </a:rPr>
+              <a:t>什麼是知識蒸餾</a:t>
+            </a:r>
+          </a:p>
+        </p:txBody>
+      </p:sp>
+      <p:sp>
+        <p:nvSpPr>
+          <p:cNvPr id="5" name="TextBox 4"/>
+          <p:cNvSpPr txBox="1"/>
+          <p:nvPr/>
+        </p:nvSpPr>
+        <p:spPr>
+          <a:xfrm>
+            <a:off x="411480" y="521207"/>
+            <a:ext cx="11338560" cy="301752"/>
+          </a:xfrm>
+          <a:prstGeom prst="rect">
+            <a:avLst/>
+          </a:prstGeom>
+          <a:noFill/>
+        </p:spPr>
+        <p:txBody>
+          <a:bodyPr wrap="square">
+            <a:spAutoFit/>
+          </a:bodyPr>
+          <a:lstStyle/>
+          <a:p>
+            <a:pPr algn="just"/>
+            <a:r>
+              <a:rPr sz="1300" b="0">
+                <a:solidFill>
+                  <a:srgbClr val="C7D6E5"/>
+                </a:solidFill>
+                <a:latin typeface="Microsoft JhengHei"/>
+              </a:rPr>
+              <a:t>依據 Hinton、Vinyals、Dean（2015）</a:t>
+            </a:r>
+          </a:p>
+        </p:txBody>
+      </p:sp>
+      <p:sp>
+        <p:nvSpPr>
+          <p:cNvPr id="6" name="TextBox 5"/>
+          <p:cNvSpPr txBox="1"/>
+          <p:nvPr/>
+        </p:nvSpPr>
+        <p:spPr>
+          <a:xfrm>
+            <a:off x="822960" y="1325880"/>
+            <a:ext cx="10515600" cy="4754880"/>
+          </a:xfrm>
+          <a:prstGeom prst="rect">
+            <a:avLst/>
+          </a:prstGeom>
+          <a:noFill/>
+        </p:spPr>
+        <p:txBody>
+          <a:bodyPr wrap="square">
+            <a:spAutoFit/>
+          </a:bodyPr>
+          <a:lstStyle/>
+          <a:p>
+            <a:pPr algn="just">
+              <a:lnSpc>
+                <a:spcPct val="135000"/>
+              </a:lnSpc>
+            </a:pPr>
+            <a:r>
+              <a:rPr sz="2100" b="0">
+                <a:solidFill>
+                  <a:srgbClr val="202020"/>
+                </a:solidFill>
+                <a:latin typeface="Microsoft JhengHei"/>
+              </a:rPr>
+              <a:t>為了讓準確的模型能部署給大量使用者即時使用，必須解決一個矛盾：訓練時，笨重模型最能從資料中學到規律，例如多個模型的組合，或以強正則化訓練的大型網路；部署時，需要的卻是小而快的模型；而直接以正確標籤訓練小模型，又學不到笨重模型的類推方式。因此，先訓練好笨重模型，並把它的知識視為從輸入到輸出的對應，而非特定的參數值。接著提高 softmax 的溫度，讓笨重模型對每一個類別給出較平均的機率，稱為軟目標；軟目標保留了錯誤類別之間的相對機率，例如某個 2 像 3 的程度高於像 7。最後讓小模型在同樣的溫度下學習軟目標，同時學習正確標籤，使它能以較少的資料，學到與笨重模型相近的類推方式。這個把笨重模型的知識移轉到小模型的訓練過程，稱之為</a:t>
+            </a:r>
+            <a:r>
+              <a:rPr sz="7200" b="1">
+                <a:solidFill>
+                  <a:srgbClr val="C03030"/>
+                </a:solidFill>
+                <a:latin typeface="Microsoft JhengHei"/>
+              </a:rPr>
+              <a:t>知識蒸餾</a:t>
+            </a:r>
+            <a:r>
+              <a:rPr sz="2100" b="0">
+                <a:solidFill>
+                  <a:srgbClr val="202020"/>
+                </a:solidFill>
+                <a:latin typeface="Microsoft JhengHei"/>
+              </a:rPr>
+              <a:t>。</a:t>
+            </a:r>
+          </a:p>
+        </p:txBody>
+      </p:sp>
+    </p:spTree>
+  </p:cSld>
+  <p:clrMapOvr>
+    <a:masterClrMapping/>
+  </p:clrMapOvr>
+  <p:timing>
+    <p:tnLst>
+      <p:par>
+        <p:cTn id="1" dur="indefinite" restart="never" nodeType="tmRoot">
+          <p:childTnLst>
+            <p:seq concurrent="1" nextAc="seek">
+              <p:cTn id="2" dur="indefinite" nodeType="mainSeq">
+                <p:childTnLst>
+                  <p:par>
+                    <p:cTn id="3" fill="hold">
+                      <p:stCondLst>
+                        <p:cond delay="indefinite"/>
+                      </p:stCondLst>
+                      <p:childTnLst>
+                        <p:par>
+                          <p:cTn id="4" fill="hold">
+                            <p:stCondLst>
+                              <p:cond delay="0"/>
+                            </p:stCondLst>
+                            <p:childTnLst>
+                              <p:par>
+                                <p:cTn id="5" presetID="1" presetClass="entr" presetSubtype="0" fill="hold" grpId="0" nodeType="clickEffect">
+                                  <p:stCondLst>
+                                    <p:cond delay="0"/>
+                                  </p:stCondLst>
+                                  <p:childTnLst>
+                                    <p:set>
+                                      <p:cBhvr>
+                                        <p:cTn id="6" dur="1" fill="hold">
+                                          <p:stCondLst>
+                                            <p:cond delay="0"/>
+                                          </p:stCondLst>
+                                        </p:cTn>
+                                        <p:tgtEl>
+                                          <p:spTgt spid="6"/>
+                                        </p:tgtEl>
+                                        <p:attrNameLst>
+                                          <p:attrName>style.visibility</p:attrName>
+                                        </p:attrNameLst>
+                                      </p:cBhvr>
+                                      <p:to>
+                                        <p:strVal val="visible"/>
+                                      </p:to>
+                                    </p:set>
+                                  </p:childTnLst>
+                                </p:cTn>
+                              </p:par>
+                            </p:childTnLst>
+                          </p:cTn>
+                        </p:par>
+                      </p:childTnLst>
+                    </p:cTn>
+                  </p:par>
+                </p:childTnLst>
+              </p:cTn>
+              <p:prevCondLst>
+                <p:cond evt="onPrev" delay="0">
+                  <p:tgtEl>
+                    <p:sldTgt/>
+                  </p:tgtEl>
+                </p:cond>
+              </p:prevCondLst>
+              <p:nextCondLst>
+                <p:cond evt="onNext" delay="0">
+                  <p:tgtEl>
+                    <p:sldTgt/>
+                  </p:tgtEl>
+                </p:cond>
+              </p:nextCondLst>
+            </p:seq>
+          </p:childTnLst>
+        </p:cTn>
+      </p:par>
+    </p:tnLst>
+    <p:bldLst>
+      <p:bldP spid="6" grpId="0" animBg="1"/>
+    </p:bldLst>
+  </p:timing>
+</p:sld>
+</file>
+
+<file path=ppt/slides/slide20.xml><?xml version="1.0" encoding="utf-8"?>
+<p:sld xmlns:a="http://schemas.openxmlformats.org/drawingml/2006/main" xmlns:p="http://schemas.openxmlformats.org/presentationml/2006/main" xmlns:r="http://schemas.openxmlformats.org/officeDocument/2006/relationships">
+  <p:cSld>
+    <p:spTree>
+      <p:nvGrpSpPr>
+        <p:cNvPr id="1" name=""/>
+        <p:cNvGrpSpPr/>
+        <p:nvPr/>
+      </p:nvGrpSpPr>
+      <p:grpSpPr/>
+      <p:sp>
+        <p:nvSpPr>
+          <p:cNvPr id="2" name="Rectangle 1"/>
+          <p:cNvSpPr/>
+          <p:nvPr/>
+        </p:nvSpPr>
+        <p:spPr>
+          <a:xfrm>
+            <a:off x="0" y="0"/>
+            <a:ext cx="12191695" cy="6858000"/>
+          </a:xfrm>
+          <a:prstGeom prst="rect">
+            <a:avLst/>
+          </a:prstGeom>
+          <a:solidFill>
+            <a:srgbClr val="FFFFFF"/>
+          </a:solidFill>
+          <a:ln>
+            <a:noFill/>
+          </a:ln>
+          <a:effectLst/>
+        </p:spPr>
+        <p:style>
+          <a:lnRef idx="1">
+            <a:schemeClr val="accent1"/>
+          </a:lnRef>
+          <a:fillRef idx="3">
+            <a:schemeClr val="accent1"/>
+          </a:fillRef>
+          <a:effectRef idx="2">
+            <a:schemeClr val="accent1"/>
+          </a:effectRef>
+          <a:fontRef idx="minor">
+            <a:schemeClr val="lt1"/>
+          </a:fontRef>
+        </p:style>
+        <p:txBody>
+          <a:bodyPr rtlCol="0" anchor="ctr"/>
+          <a:lstStyle/>
+          <a:p>
+            <a:pPr algn="ctr"/>
+          </a:p>
+        </p:txBody>
+      </p:sp>
+      <p:sp>
+        <p:nvSpPr>
+          <p:cNvPr id="3" name="Rectangle 2"/>
+          <p:cNvSpPr/>
+          <p:nvPr/>
+        </p:nvSpPr>
+        <p:spPr>
+          <a:xfrm>
+            <a:off x="0" y="0"/>
+            <a:ext cx="12191695" cy="868680"/>
+          </a:xfrm>
+          <a:prstGeom prst="rect">
+            <a:avLst/>
+          </a:prstGeom>
+          <a:solidFill>
+            <a:srgbClr val="1F4E79"/>
+          </a:solidFill>
+          <a:ln>
+            <a:noFill/>
+          </a:ln>
+          <a:effectLst/>
+        </p:spPr>
+        <p:style>
+          <a:lnRef idx="1">
+            <a:schemeClr val="accent1"/>
+          </a:lnRef>
+          <a:fillRef idx="3">
+            <a:schemeClr val="accent1"/>
+          </a:fillRef>
+          <a:effectRef idx="2">
+            <a:schemeClr val="accent1"/>
+          </a:effectRef>
+          <a:fontRef idx="minor">
+            <a:schemeClr val="lt1"/>
+          </a:fontRef>
+        </p:style>
+        <p:txBody>
+          <a:bodyPr rtlCol="0" anchor="ctr"/>
+          <a:lstStyle/>
+          <a:p>
+            <a:pPr algn="ctr"/>
+          </a:p>
+        </p:txBody>
+      </p:sp>
+      <p:sp>
+        <p:nvSpPr>
+          <p:cNvPr id="4" name="TextBox 3"/>
+          <p:cNvSpPr txBox="1"/>
+          <p:nvPr/>
+        </p:nvSpPr>
+        <p:spPr>
+          <a:xfrm>
+            <a:off x="411480" y="73152"/>
+            <a:ext cx="11338560" cy="457200"/>
+          </a:xfrm>
+          <a:prstGeom prst="rect">
+            <a:avLst/>
+          </a:prstGeom>
+          <a:noFill/>
+        </p:spPr>
+        <p:txBody>
+          <a:bodyPr wrap="square">
+            <a:spAutoFit/>
+          </a:bodyPr>
+          <a:lstStyle/>
+          <a:p>
+            <a:pPr algn="just"/>
+            <a:r>
+              <a:rPr sz="2700" b="1">
+                <a:solidFill>
+                  <a:srgbClr val="FFFFFF"/>
+                </a:solidFill>
+                <a:latin typeface="Microsoft JhengHei"/>
+              </a:rPr>
               <a:t>四、未曾見過的數字 3</a:t>
             </a:r>
           </a:p>
@@ -16490,318 +18345,7 @@
 </p:sld>
 </file>
 
-<file path=ppt/slides/slide2.xml><?xml version="1.0" encoding="utf-8"?>
-<p:sld xmlns:a="http://schemas.openxmlformats.org/drawingml/2006/main" xmlns:p="http://schemas.openxmlformats.org/presentationml/2006/main" xmlns:r="http://schemas.openxmlformats.org/officeDocument/2006/relationships">
-  <p:cSld>
-    <p:spTree>
-      <p:nvGrpSpPr>
-        <p:cNvPr id="1" name=""/>
-        <p:cNvGrpSpPr/>
-        <p:nvPr/>
-      </p:nvGrpSpPr>
-      <p:grpSpPr/>
-      <p:sp>
-        <p:nvSpPr>
-          <p:cNvPr id="2" name="Rectangle 1"/>
-          <p:cNvSpPr/>
-          <p:nvPr/>
-        </p:nvSpPr>
-        <p:spPr>
-          <a:xfrm>
-            <a:off x="0" y="0"/>
-            <a:ext cx="12191695" cy="6858000"/>
-          </a:xfrm>
-          <a:prstGeom prst="rect">
-            <a:avLst/>
-          </a:prstGeom>
-          <a:solidFill>
-            <a:srgbClr val="FFFFFF"/>
-          </a:solidFill>
-          <a:ln>
-            <a:noFill/>
-          </a:ln>
-          <a:effectLst/>
-        </p:spPr>
-        <p:style>
-          <a:lnRef idx="1">
-            <a:schemeClr val="accent1"/>
-          </a:lnRef>
-          <a:fillRef idx="3">
-            <a:schemeClr val="accent1"/>
-          </a:fillRef>
-          <a:effectRef idx="2">
-            <a:schemeClr val="accent1"/>
-          </a:effectRef>
-          <a:fontRef idx="minor">
-            <a:schemeClr val="lt1"/>
-          </a:fontRef>
-        </p:style>
-        <p:txBody>
-          <a:bodyPr rtlCol="0" anchor="ctr"/>
-          <a:lstStyle/>
-          <a:p>
-            <a:pPr algn="ctr"/>
-          </a:p>
-        </p:txBody>
-      </p:sp>
-      <p:sp>
-        <p:nvSpPr>
-          <p:cNvPr id="3" name="Rectangle 2"/>
-          <p:cNvSpPr/>
-          <p:nvPr/>
-        </p:nvSpPr>
-        <p:spPr>
-          <a:xfrm>
-            <a:off x="0" y="0"/>
-            <a:ext cx="12191695" cy="868680"/>
-          </a:xfrm>
-          <a:prstGeom prst="rect">
-            <a:avLst/>
-          </a:prstGeom>
-          <a:solidFill>
-            <a:srgbClr val="1F4E79"/>
-          </a:solidFill>
-          <a:ln>
-            <a:noFill/>
-          </a:ln>
-          <a:effectLst/>
-        </p:spPr>
-        <p:style>
-          <a:lnRef idx="1">
-            <a:schemeClr val="accent1"/>
-          </a:lnRef>
-          <a:fillRef idx="3">
-            <a:schemeClr val="accent1"/>
-          </a:fillRef>
-          <a:effectRef idx="2">
-            <a:schemeClr val="accent1"/>
-          </a:effectRef>
-          <a:fontRef idx="minor">
-            <a:schemeClr val="lt1"/>
-          </a:fontRef>
-        </p:style>
-        <p:txBody>
-          <a:bodyPr rtlCol="0" anchor="ctr"/>
-          <a:lstStyle/>
-          <a:p>
-            <a:pPr algn="ctr"/>
-          </a:p>
-        </p:txBody>
-      </p:sp>
-      <p:sp>
-        <p:nvSpPr>
-          <p:cNvPr id="4" name="TextBox 3"/>
-          <p:cNvSpPr txBox="1"/>
-          <p:nvPr/>
-        </p:nvSpPr>
-        <p:spPr>
-          <a:xfrm>
-            <a:off x="411480" y="73152"/>
-            <a:ext cx="11338560" cy="457200"/>
-          </a:xfrm>
-          <a:prstGeom prst="rect">
-            <a:avLst/>
-          </a:prstGeom>
-          <a:noFill/>
-        </p:spPr>
-        <p:txBody>
-          <a:bodyPr wrap="square">
-            <a:spAutoFit/>
-          </a:bodyPr>
-          <a:lstStyle/>
-          <a:p>
-            <a:pPr algn="just"/>
-            <a:r>
-              <a:rPr sz="2700" b="1">
-                <a:solidFill>
-                  <a:srgbClr val="FFFFFF"/>
-                </a:solidFill>
-                <a:latin typeface="Microsoft JhengHei"/>
-              </a:rPr>
-              <a:t>什麼是知識蒸餾</a:t>
-            </a:r>
-          </a:p>
-        </p:txBody>
-      </p:sp>
-      <p:sp>
-        <p:nvSpPr>
-          <p:cNvPr id="5" name="TextBox 4"/>
-          <p:cNvSpPr txBox="1"/>
-          <p:nvPr/>
-        </p:nvSpPr>
-        <p:spPr>
-          <a:xfrm>
-            <a:off x="411480" y="521207"/>
-            <a:ext cx="11338560" cy="301752"/>
-          </a:xfrm>
-          <a:prstGeom prst="rect">
-            <a:avLst/>
-          </a:prstGeom>
-          <a:noFill/>
-        </p:spPr>
-        <p:txBody>
-          <a:bodyPr wrap="square">
-            <a:spAutoFit/>
-          </a:bodyPr>
-          <a:lstStyle/>
-          <a:p>
-            <a:pPr algn="just"/>
-            <a:r>
-              <a:rPr sz="1300" b="0">
-                <a:solidFill>
-                  <a:srgbClr val="C7D6E5"/>
-                </a:solidFill>
-                <a:latin typeface="Microsoft JhengHei"/>
-              </a:rPr>
-              <a:t>依據 Hinton、Vinyals、Dean（2015）</a:t>
-            </a:r>
-          </a:p>
-        </p:txBody>
-      </p:sp>
-      <p:sp>
-        <p:nvSpPr>
-          <p:cNvPr id="6" name="TextBox 5"/>
-          <p:cNvSpPr txBox="1"/>
-          <p:nvPr/>
-        </p:nvSpPr>
-        <p:spPr>
-          <a:xfrm>
-            <a:off x="822960" y="1325880"/>
-            <a:ext cx="10515600" cy="4754880"/>
-          </a:xfrm>
-          <a:prstGeom prst="rect">
-            <a:avLst/>
-          </a:prstGeom>
-          <a:noFill/>
-        </p:spPr>
-        <p:txBody>
-          <a:bodyPr wrap="square">
-            <a:spAutoFit/>
-          </a:bodyPr>
-          <a:lstStyle/>
-          <a:p>
-            <a:pPr algn="just">
-              <a:lnSpc>
-                <a:spcPct val="135000"/>
-              </a:lnSpc>
-            </a:pPr>
-            <a:r>
-              <a:rPr sz="2100" b="0">
-                <a:solidFill>
-                  <a:srgbClr val="202020"/>
-                </a:solidFill>
-                <a:latin typeface="Microsoft JhengHei"/>
-              </a:rPr>
-              <a:t>為了讓準確的模型能部署給大量使用者即時使用，必須解決一個矛盾：訓練時，笨重模型最能從資料中學到規律，例如多個模型的組合，或以強正則化訓練的大型網路；部署時，需要的卻是小而快的模型；而直接以正確標籤訓練小模型，又學不到笨重模型的類推方式。因此，先訓練好笨重模型，並把它的知識視為從輸入到輸出的對應，而非特定的參數值。接著提高 softmax 的溫度，讓笨重模型對每一個類別給出較平均的機率，稱為軟目標；軟目標保留了錯誤類別之間的相對機率，例如某個 2 像 3 的程度高於像 7。最後讓小模型在同樣的溫度下學習軟目標，同時學習正確標籤，使它能以較少的資料，學到與笨重模型相近的類推方式。這個把笨重模型的知識移轉到小模型的訓練過程，稱之為</a:t>
-            </a:r>
-            <a:r>
-              <a:rPr sz="7200" b="1">
-                <a:solidFill>
-                  <a:srgbClr val="C03030"/>
-                </a:solidFill>
-                <a:latin typeface="Microsoft JhengHei"/>
-              </a:rPr>
-              <a:t>知識蒸餾</a:t>
-            </a:r>
-            <a:r>
-              <a:rPr sz="2100" b="0">
-                <a:solidFill>
-                  <a:srgbClr val="202020"/>
-                </a:solidFill>
-                <a:latin typeface="Microsoft JhengHei"/>
-              </a:rPr>
-              <a:t>。</a:t>
-            </a:r>
-          </a:p>
-        </p:txBody>
-      </p:sp>
-    </p:spTree>
-  </p:cSld>
-  <p:clrMapOvr>
-    <a:masterClrMapping/>
-  </p:clrMapOvr>
-  <p:timing>
-    <p:tnLst>
-      <p:par>
-        <p:cTn id="1" dur="indefinite" restart="never" nodeType="tmRoot">
-          <p:childTnLst>
-            <p:seq concurrent="1" nextAc="seek">
-              <p:cTn id="2" dur="indefinite" nodeType="mainSeq">
-                <p:childTnLst>
-                  <p:par>
-                    <p:cTn id="3" fill="hold">
-                      <p:stCondLst>
-                        <p:cond delay="indefinite"/>
-                      </p:stCondLst>
-                      <p:childTnLst>
-                        <p:par>
-                          <p:cTn id="4" fill="hold">
-                            <p:stCondLst>
-                              <p:cond delay="0"/>
-                            </p:stCondLst>
-                            <p:childTnLst>
-                              <p:par>
-                                <p:cTn id="5" presetID="1" presetClass="entr" presetSubtype="0" fill="hold" grpId="0" nodeType="clickEffect">
-                                  <p:stCondLst>
-                                    <p:cond delay="0"/>
-                                  </p:stCondLst>
-                                  <p:childTnLst>
-                                    <p:set>
-                                      <p:cBhvr>
-                                        <p:cTn id="6" dur="1" fill="hold">
-                                          <p:stCondLst>
-                                            <p:cond delay="0"/>
-                                          </p:stCondLst>
-                                        </p:cTn>
-                                        <p:tgtEl>
-                                          <p:spTgt spid="6"/>
-                                        </p:tgtEl>
-                                        <p:attrNameLst>
-                                          <p:attrName>style.visibility</p:attrName>
-                                        </p:attrNameLst>
-                                      </p:cBhvr>
-                                      <p:to>
-                                        <p:strVal val="visible"/>
-                                      </p:to>
-                                    </p:set>
-                                  </p:childTnLst>
-                                </p:cTn>
-                              </p:par>
-                            </p:childTnLst>
-                          </p:cTn>
-                        </p:par>
-                      </p:childTnLst>
-                    </p:cTn>
-                  </p:par>
-                </p:childTnLst>
-              </p:cTn>
-              <p:prevCondLst>
-                <p:cond evt="onPrev" delay="0">
-                  <p:tgtEl>
-                    <p:sldTgt/>
-                  </p:tgtEl>
-                </p:cond>
-              </p:prevCondLst>
-              <p:nextCondLst>
-                <p:cond evt="onNext" delay="0">
-                  <p:tgtEl>
-                    <p:sldTgt/>
-                  </p:tgtEl>
-                </p:cond>
-              </p:nextCondLst>
-            </p:seq>
-          </p:childTnLst>
-        </p:cTn>
-      </p:par>
-    </p:tnLst>
-    <p:bldLst>
-      <p:bldP spid="6" grpId="0" animBg="1"/>
-    </p:bldLst>
-  </p:timing>
-</p:sld>
-</file>
-
-<file path=ppt/slides/slide20.xml><?xml version="1.0" encoding="utf-8"?>
+<file path=ppt/slides/slide21.xml><?xml version="1.0" encoding="utf-8"?>
 <p:sld xmlns:a="http://schemas.openxmlformats.org/drawingml/2006/main" xmlns:p="http://schemas.openxmlformats.org/presentationml/2006/main" xmlns:r="http://schemas.openxmlformats.org/officeDocument/2006/relationships">
   <p:cSld>
     <p:spTree>
@@ -18107,7 +19651,7 @@
 </p:sld>
 </file>
 
-<file path=ppt/slides/slide21.xml><?xml version="1.0" encoding="utf-8"?>
+<file path=ppt/slides/slide22.xml><?xml version="1.0" encoding="utf-8"?>
 <p:sld xmlns:a="http://schemas.openxmlformats.org/drawingml/2006/main" xmlns:p="http://schemas.openxmlformats.org/presentationml/2006/main" xmlns:r="http://schemas.openxmlformats.org/officeDocument/2006/relationships">
   <p:cSld>
     <p:spTree>
@@ -18455,7 +19999,7 @@
                 </a:solidFill>
                 <a:latin typeface="Microsoft JhengHei"/>
               </a:rPr>
-              <a:t>練習一　T = 2 時，v = (8, 4, 0) 的軟目標是多少？依第 8 頁的四步計算</a:t>
+              <a:t>練習一　T = 2 時，v = (8, 4, 0) 的軟目標是多少？依第 9 頁的四步計算</a:t>
             </a:r>
           </a:p>
         </p:txBody>
@@ -20242,7 +21786,7 @@
         </p:nvGraphicFramePr>
         <p:xfrm>
           <a:off x="731520" y="1143000"/>
-          <a:ext cx="10881358" cy="1975104"/>
+          <a:ext cx="10881358" cy="2304288"/>
         </p:xfrm>
         <a:graphic>
           <a:graphicData uri="http://schemas.openxmlformats.org/drawingml/2006/table">
@@ -20340,7 +21884,7 @@
                           </a:solidFill>
                           <a:latin typeface="Microsoft JhengHei"/>
                         </a:rPr>
-                        <a:t>一　緒論</a:t>
+                        <a:t>術語對照</a:t>
                       </a:r>
                     </a:p>
                   </a:txBody>
@@ -20363,7 +21907,7 @@
                           </a:solidFill>
                           <a:latin typeface="Microsoft JhengHei"/>
                         </a:rPr>
-                        <a:t>訓練與部署的需求不同；錯誤答案的相對機率</a:t>
+                        <a:t>專有名詞的中文、英文與意義</a:t>
                       </a:r>
                     </a:p>
                   </a:txBody>
@@ -20386,7 +21930,7 @@
                           </a:solidFill>
                           <a:latin typeface="Microsoft JhengHei"/>
                         </a:rPr>
-                        <a:t>5–6</a:t>
+                        <a:t>5</a:t>
                       </a:r>
                     </a:p>
                   </a:txBody>
@@ -20411,7 +21955,7 @@
                           </a:solidFill>
                           <a:latin typeface="Microsoft JhengHei"/>
                         </a:rPr>
-                        <a:t>二　軟目標</a:t>
+                        <a:t>一　緒論</a:t>
                       </a:r>
                     </a:p>
                   </a:txBody>
@@ -20434,7 +21978,7 @@
                           </a:solidFill>
                           <a:latin typeface="Microsoft JhengHei"/>
                         </a:rPr>
-                        <a:t>帶溫度的 softmax 四步計算；T = 1 與 T = 4 的比較</a:t>
+                        <a:t>訓練與部署的需求不同；錯誤答案的相對機率</a:t>
                       </a:r>
                     </a:p>
                   </a:txBody>
@@ -20457,7 +22001,7 @@
                           </a:solidFill>
                           <a:latin typeface="Microsoft JhengHei"/>
                         </a:rPr>
-                        <a:t>7–10</a:t>
+                        <a:t>6–7</a:t>
                       </a:r>
                     </a:p>
                   </a:txBody>
@@ -20482,7 +22026,7 @@
                           </a:solidFill>
                           <a:latin typeface="Microsoft JhengHei"/>
                         </a:rPr>
-                        <a:t>三　蒸餾</a:t>
+                        <a:t>二　軟目標</a:t>
                       </a:r>
                     </a:p>
                   </a:txBody>
@@ -20505,7 +22049,7 @@
                           </a:solidFill>
                           <a:latin typeface="Microsoft JhengHei"/>
                         </a:rPr>
-                        <a:t>L = α T² C_soft + (1 − α) C_hard 逐步計算；梯度；為什麼乘 T²</a:t>
+                        <a:t>帶溫度的 softmax 四步計算；T = 1 與 T = 4 的比較</a:t>
                       </a:r>
                     </a:p>
                   </a:txBody>
@@ -20528,7 +22072,7 @@
                           </a:solidFill>
                           <a:latin typeface="Microsoft JhengHei"/>
                         </a:rPr>
-                        <a:t>11–15</a:t>
+                        <a:t>8–11</a:t>
                       </a:r>
                     </a:p>
                   </a:txBody>
@@ -20553,7 +22097,7 @@
                           </a:solidFill>
                           <a:latin typeface="Microsoft JhengHei"/>
                         </a:rPr>
-                        <a:t>四　MNIST 初步實驗</a:t>
+                        <a:t>三　蒸餾</a:t>
                       </a:r>
                     </a:p>
                   </a:txBody>
@@ -20576,7 +22120,7 @@
                           </a:solidFill>
                           <a:latin typeface="Microsoft JhengHei"/>
                         </a:rPr>
-                        <a:t>測試錯誤數較少；很小的網路取中間溫度；未曾見過的數字 3</a:t>
+                        <a:t>L = α T² C_soft + (1 − α) C_hard 逐步計算；梯度；為什麼乘 T²</a:t>
                       </a:r>
                     </a:p>
                   </a:txBody>
@@ -20599,7 +22143,7 @@
                           </a:solidFill>
                           <a:latin typeface="Microsoft JhengHei"/>
                         </a:rPr>
-                        <a:t>16–20</a:t>
+                        <a:t>12–16</a:t>
                       </a:r>
                     </a:p>
                   </a:txBody>
@@ -20624,6 +22168,77 @@
                           </a:solidFill>
                           <a:latin typeface="Microsoft JhengHei"/>
                         </a:rPr>
+                        <a:t>四　MNIST 初步實驗</a:t>
+                      </a:r>
+                    </a:p>
+                  </a:txBody>
+                  <a:tcPr marL="36576" marR="36576" marT="9144" marB="9144">
+                    <a:solidFill>
+                      <a:srgbClr val="FFFFFF"/>
+                    </a:solidFill>
+                  </a:tcPr>
+                </a:tc>
+                <a:tc>
+                  <a:txBody>
+                    <a:bodyPr/>
+                    <a:lstStyle/>
+                    <a:p>
+                      <a:pPr algn="ctr"/>
+                      <a:r>
+                        <a:rPr sz="1600" b="0">
+                          <a:solidFill>
+                            <a:srgbClr val="202020"/>
+                          </a:solidFill>
+                          <a:latin typeface="Microsoft JhengHei"/>
+                        </a:rPr>
+                        <a:t>測試錯誤數較少；很小的網路取中間溫度；未曾見過的數字 3</a:t>
+                      </a:r>
+                    </a:p>
+                  </a:txBody>
+                  <a:tcPr marL="36576" marR="36576" marT="9144" marB="9144">
+                    <a:solidFill>
+                      <a:srgbClr val="FFFFFF"/>
+                    </a:solidFill>
+                  </a:tcPr>
+                </a:tc>
+                <a:tc>
+                  <a:txBody>
+                    <a:bodyPr/>
+                    <a:lstStyle/>
+                    <a:p>
+                      <a:pPr algn="ctr"/>
+                      <a:r>
+                        <a:rPr sz="1600" b="0">
+                          <a:solidFill>
+                            <a:srgbClr val="202020"/>
+                          </a:solidFill>
+                          <a:latin typeface="Microsoft JhengHei"/>
+                        </a:rPr>
+                        <a:t>17–21</a:t>
+                      </a:r>
+                    </a:p>
+                  </a:txBody>
+                  <a:tcPr marL="36576" marR="36576" marT="9144" marB="9144">
+                    <a:solidFill>
+                      <a:srgbClr val="FFFFFF"/>
+                    </a:solidFill>
+                  </a:tcPr>
+                </a:tc>
+              </a:tr>
+              <a:tr h="329184">
+                <a:tc>
+                  <a:txBody>
+                    <a:bodyPr/>
+                    <a:lstStyle/>
+                    <a:p>
+                      <a:pPr algn="ctr"/>
+                      <a:r>
+                        <a:rPr sz="1600" b="0">
+                          <a:solidFill>
+                            <a:srgbClr val="202020"/>
+                          </a:solidFill>
+                          <a:latin typeface="Microsoft JhengHei"/>
+                        </a:rPr>
                         <a:t>整理與練習</a:t>
                       </a:r>
                     </a:p>
@@ -20670,7 +22285,7 @@
                           </a:solidFill>
                           <a:latin typeface="Microsoft JhengHei"/>
                         </a:rPr>
-                        <a:t>21</a:t>
+                        <a:t>22</a:t>
                       </a:r>
                     </a:p>
                   </a:txBody>
@@ -20693,7 +22308,7 @@
         </p:nvSpPr>
         <p:spPr>
           <a:xfrm>
-            <a:off x="731520" y="3429000"/>
+            <a:off x="731520" y="3657600"/>
             <a:ext cx="10881360" cy="1463040"/>
           </a:xfrm>
           <a:prstGeom prst="rect">
@@ -20784,7 +22399,7 @@
         </p:nvSpPr>
         <p:spPr>
           <a:xfrm>
-            <a:off x="731520" y="5166360"/>
+            <a:off x="731520" y="5349240"/>
             <a:ext cx="10881360" cy="1097280"/>
           </a:xfrm>
           <a:prstGeom prst="rect">
@@ -21004,6 +22619,1212 @@
 </file>
 
 <file path=ppt/slides/slide5.xml><?xml version="1.0" encoding="utf-8"?>
+<p:sld xmlns:a="http://schemas.openxmlformats.org/drawingml/2006/main" xmlns:p="http://schemas.openxmlformats.org/presentationml/2006/main" xmlns:r="http://schemas.openxmlformats.org/officeDocument/2006/relationships">
+  <p:cSld>
+    <p:spTree>
+      <p:nvGrpSpPr>
+        <p:cNvPr id="1" name=""/>
+        <p:cNvGrpSpPr/>
+        <p:nvPr/>
+      </p:nvGrpSpPr>
+      <p:grpSpPr/>
+      <p:sp>
+        <p:nvSpPr>
+          <p:cNvPr id="2" name="Rectangle 1"/>
+          <p:cNvSpPr/>
+          <p:nvPr/>
+        </p:nvSpPr>
+        <p:spPr>
+          <a:xfrm>
+            <a:off x="0" y="0"/>
+            <a:ext cx="12191695" cy="6858000"/>
+          </a:xfrm>
+          <a:prstGeom prst="rect">
+            <a:avLst/>
+          </a:prstGeom>
+          <a:solidFill>
+            <a:srgbClr val="FFFFFF"/>
+          </a:solidFill>
+          <a:ln>
+            <a:noFill/>
+          </a:ln>
+          <a:effectLst/>
+        </p:spPr>
+        <p:style>
+          <a:lnRef idx="1">
+            <a:schemeClr val="accent1"/>
+          </a:lnRef>
+          <a:fillRef idx="3">
+            <a:schemeClr val="accent1"/>
+          </a:fillRef>
+          <a:effectRef idx="2">
+            <a:schemeClr val="accent1"/>
+          </a:effectRef>
+          <a:fontRef idx="minor">
+            <a:schemeClr val="lt1"/>
+          </a:fontRef>
+        </p:style>
+        <p:txBody>
+          <a:bodyPr rtlCol="0" anchor="ctr"/>
+          <a:lstStyle/>
+          <a:p>
+            <a:pPr algn="ctr"/>
+          </a:p>
+        </p:txBody>
+      </p:sp>
+      <p:sp>
+        <p:nvSpPr>
+          <p:cNvPr id="3" name="Rectangle 2"/>
+          <p:cNvSpPr/>
+          <p:nvPr/>
+        </p:nvSpPr>
+        <p:spPr>
+          <a:xfrm>
+            <a:off x="0" y="0"/>
+            <a:ext cx="12191695" cy="868680"/>
+          </a:xfrm>
+          <a:prstGeom prst="rect">
+            <a:avLst/>
+          </a:prstGeom>
+          <a:solidFill>
+            <a:srgbClr val="1F4E79"/>
+          </a:solidFill>
+          <a:ln>
+            <a:noFill/>
+          </a:ln>
+          <a:effectLst/>
+        </p:spPr>
+        <p:style>
+          <a:lnRef idx="1">
+            <a:schemeClr val="accent1"/>
+          </a:lnRef>
+          <a:fillRef idx="3">
+            <a:schemeClr val="accent1"/>
+          </a:fillRef>
+          <a:effectRef idx="2">
+            <a:schemeClr val="accent1"/>
+          </a:effectRef>
+          <a:fontRef idx="minor">
+            <a:schemeClr val="lt1"/>
+          </a:fontRef>
+        </p:style>
+        <p:txBody>
+          <a:bodyPr rtlCol="0" anchor="ctr"/>
+          <a:lstStyle/>
+          <a:p>
+            <a:pPr algn="ctr"/>
+          </a:p>
+        </p:txBody>
+      </p:sp>
+      <p:sp>
+        <p:nvSpPr>
+          <p:cNvPr id="4" name="TextBox 3"/>
+          <p:cNvSpPr txBox="1"/>
+          <p:nvPr/>
+        </p:nvSpPr>
+        <p:spPr>
+          <a:xfrm>
+            <a:off x="411480" y="73152"/>
+            <a:ext cx="11338560" cy="457200"/>
+          </a:xfrm>
+          <a:prstGeom prst="rect">
+            <a:avLst/>
+          </a:prstGeom>
+          <a:noFill/>
+        </p:spPr>
+        <p:txBody>
+          <a:bodyPr wrap="square">
+            <a:spAutoFit/>
+          </a:bodyPr>
+          <a:lstStyle/>
+          <a:p>
+            <a:pPr algn="just"/>
+            <a:r>
+              <a:rPr sz="2700" b="1">
+                <a:solidFill>
+                  <a:srgbClr val="FFFFFF"/>
+                </a:solidFill>
+                <a:latin typeface="Microsoft JhengHei"/>
+              </a:rPr>
+              <a:t>術語對照</a:t>
+            </a:r>
+          </a:p>
+        </p:txBody>
+      </p:sp>
+      <p:sp>
+        <p:nvSpPr>
+          <p:cNvPr id="5" name="TextBox 4"/>
+          <p:cNvSpPr txBox="1"/>
+          <p:nvPr/>
+        </p:nvSpPr>
+        <p:spPr>
+          <a:xfrm>
+            <a:off x="411480" y="521207"/>
+            <a:ext cx="11338560" cy="301752"/>
+          </a:xfrm>
+          <a:prstGeom prst="rect">
+            <a:avLst/>
+          </a:prstGeom>
+          <a:noFill/>
+        </p:spPr>
+        <p:txBody>
+          <a:bodyPr wrap="square">
+            <a:spAutoFit/>
+          </a:bodyPr>
+          <a:lstStyle/>
+          <a:p>
+            <a:pPr algn="just"/>
+            <a:r>
+              <a:rPr sz="1300" b="0">
+                <a:solidFill>
+                  <a:srgbClr val="C7D6E5"/>
+                </a:solidFill>
+                <a:latin typeface="Microsoft JhengHei"/>
+              </a:rPr>
+              <a:t>本教材的專有名詞：中文、英文與意義</a:t>
+            </a:r>
+          </a:p>
+        </p:txBody>
+      </p:sp>
+      <p:graphicFrame>
+        <p:nvGraphicFramePr>
+          <p:cNvPr id="6" name="Table 5"/>
+          <p:cNvGraphicFramePr>
+            <a:graphicFrameLocks noGrp="1"/>
+          </p:cNvGraphicFramePr>
+          <p:nvPr/>
+        </p:nvGraphicFramePr>
+        <p:xfrm>
+          <a:off x="548640" y="1051560"/>
+          <a:ext cx="11109960" cy="4279392"/>
+        </p:xfrm>
+        <a:graphic>
+          <a:graphicData uri="http://schemas.openxmlformats.org/drawingml/2006/table">
+            <a:tbl>
+              <a:tblPr bandRow="1">
+                <a:tableStyleId>{5C22544A-7EE6-4342-B048-85BDC9FD1C3A}</a:tableStyleId>
+              </a:tblPr>
+              <a:tblGrid>
+                <a:gridCol w="1188720"/>
+                <a:gridCol w="2377440"/>
+                <a:gridCol w="7543800"/>
+              </a:tblGrid>
+              <a:tr h="329184">
+                <a:tc>
+                  <a:txBody>
+                    <a:bodyPr/>
+                    <a:lstStyle/>
+                    <a:p>
+                      <a:pPr algn="ctr"/>
+                      <a:r>
+                        <a:rPr sz="1400" b="1">
+                          <a:solidFill>
+                            <a:srgbClr val="FFFFFF"/>
+                          </a:solidFill>
+                          <a:latin typeface="Microsoft JhengHei"/>
+                        </a:rPr>
+                        <a:t>中文</a:t>
+                      </a:r>
+                    </a:p>
+                  </a:txBody>
+                  <a:tcPr marL="36576" marR="36576" marT="9144" marB="9144">
+                    <a:solidFill>
+                      <a:srgbClr val="1F4E79"/>
+                    </a:solidFill>
+                  </a:tcPr>
+                </a:tc>
+                <a:tc>
+                  <a:txBody>
+                    <a:bodyPr/>
+                    <a:lstStyle/>
+                    <a:p>
+                      <a:pPr algn="ctr"/>
+                      <a:r>
+                        <a:rPr sz="1400" b="1">
+                          <a:solidFill>
+                            <a:srgbClr val="FFFFFF"/>
+                          </a:solidFill>
+                          <a:latin typeface="Microsoft JhengHei"/>
+                        </a:rPr>
+                        <a:t>英文</a:t>
+                      </a:r>
+                    </a:p>
+                  </a:txBody>
+                  <a:tcPr marL="36576" marR="36576" marT="9144" marB="9144">
+                    <a:solidFill>
+                      <a:srgbClr val="1F4E79"/>
+                    </a:solidFill>
+                  </a:tcPr>
+                </a:tc>
+                <a:tc>
+                  <a:txBody>
+                    <a:bodyPr/>
+                    <a:lstStyle/>
+                    <a:p>
+                      <a:pPr algn="ctr"/>
+                      <a:r>
+                        <a:rPr sz="1400" b="1">
+                          <a:solidFill>
+                            <a:srgbClr val="FFFFFF"/>
+                          </a:solidFill>
+                          <a:latin typeface="Microsoft JhengHei"/>
+                        </a:rPr>
+                        <a:t>意義</a:t>
+                      </a:r>
+                    </a:p>
+                  </a:txBody>
+                  <a:tcPr marL="36576" marR="36576" marT="9144" marB="9144">
+                    <a:solidFill>
+                      <a:srgbClr val="1F4E79"/>
+                    </a:solidFill>
+                  </a:tcPr>
+                </a:tc>
+              </a:tr>
+              <a:tr h="329184">
+                <a:tc>
+                  <a:txBody>
+                    <a:bodyPr/>
+                    <a:lstStyle/>
+                    <a:p>
+                      <a:pPr algn="ctr"/>
+                      <a:r>
+                        <a:rPr sz="1400" b="1">
+                          <a:solidFill>
+                            <a:srgbClr val="202020"/>
+                          </a:solidFill>
+                          <a:latin typeface="Microsoft JhengHei"/>
+                        </a:rPr>
+                        <a:t>知識蒸餾</a:t>
+                      </a:r>
+                    </a:p>
+                  </a:txBody>
+                  <a:tcPr marL="36576" marR="36576" marT="9144" marB="9144">
+                    <a:solidFill>
+                      <a:srgbClr val="FFFFFF"/>
+                    </a:solidFill>
+                  </a:tcPr>
+                </a:tc>
+                <a:tc>
+                  <a:txBody>
+                    <a:bodyPr/>
+                    <a:lstStyle/>
+                    <a:p>
+                      <a:pPr algn="ctr"/>
+                      <a:r>
+                        <a:rPr sz="1400" b="1">
+                          <a:solidFill>
+                            <a:srgbClr val="202020"/>
+                          </a:solidFill>
+                          <a:latin typeface="Microsoft JhengHei"/>
+                        </a:rPr>
+                        <a:t>knowledge distillation (KD)</a:t>
+                      </a:r>
+                    </a:p>
+                  </a:txBody>
+                  <a:tcPr marL="36576" marR="36576" marT="9144" marB="9144">
+                    <a:solidFill>
+                      <a:srgbClr val="FFFFFF"/>
+                    </a:solidFill>
+                  </a:tcPr>
+                </a:tc>
+                <a:tc>
+                  <a:txBody>
+                    <a:bodyPr/>
+                    <a:lstStyle/>
+                    <a:p>
+                      <a:pPr algn="just"/>
+                      <a:r>
+                        <a:rPr sz="1400" b="0">
+                          <a:solidFill>
+                            <a:srgbClr val="202020"/>
+                          </a:solidFill>
+                          <a:latin typeface="Microsoft JhengHei"/>
+                        </a:rPr>
+                        <a:t>把笨重模型的知識移轉給適合部署的小模型的訓練方式</a:t>
+                      </a:r>
+                    </a:p>
+                  </a:txBody>
+                  <a:tcPr marL="36576" marR="36576" marT="9144" marB="9144">
+                    <a:solidFill>
+                      <a:srgbClr val="FFFFFF"/>
+                    </a:solidFill>
+                  </a:tcPr>
+                </a:tc>
+              </a:tr>
+              <a:tr h="329184">
+                <a:tc>
+                  <a:txBody>
+                    <a:bodyPr/>
+                    <a:lstStyle/>
+                    <a:p>
+                      <a:pPr algn="ctr"/>
+                      <a:r>
+                        <a:rPr sz="1400" b="1">
+                          <a:solidFill>
+                            <a:srgbClr val="202020"/>
+                          </a:solidFill>
+                          <a:latin typeface="Microsoft JhengHei"/>
+                        </a:rPr>
+                        <a:t>笨重模型</a:t>
+                      </a:r>
+                    </a:p>
+                  </a:txBody>
+                  <a:tcPr marL="36576" marR="36576" marT="9144" marB="9144">
+                    <a:solidFill>
+                      <a:srgbClr val="FFFFFF"/>
+                    </a:solidFill>
+                  </a:tcPr>
+                </a:tc>
+                <a:tc>
+                  <a:txBody>
+                    <a:bodyPr/>
+                    <a:lstStyle/>
+                    <a:p>
+                      <a:pPr algn="ctr"/>
+                      <a:r>
+                        <a:rPr sz="1400" b="1">
+                          <a:solidFill>
+                            <a:srgbClr val="202020"/>
+                          </a:solidFill>
+                          <a:latin typeface="Microsoft JhengHei"/>
+                        </a:rPr>
+                        <a:t>cumbersome model</a:t>
+                      </a:r>
+                    </a:p>
+                  </a:txBody>
+                  <a:tcPr marL="36576" marR="36576" marT="9144" marB="9144">
+                    <a:solidFill>
+                      <a:srgbClr val="FFFFFF"/>
+                    </a:solidFill>
+                  </a:tcPr>
+                </a:tc>
+                <a:tc>
+                  <a:txBody>
+                    <a:bodyPr/>
+                    <a:lstStyle/>
+                    <a:p>
+                      <a:pPr algn="just"/>
+                      <a:r>
+                        <a:rPr sz="1400" b="0">
+                          <a:solidFill>
+                            <a:srgbClr val="202020"/>
+                          </a:solidFill>
+                          <a:latin typeface="Microsoft JhengHei"/>
+                        </a:rPr>
+                        <a:t>為了從資料中學到規律而訓練的大模型：多個模型的組合，或以強正則化訓練的大型網路</a:t>
+                      </a:r>
+                    </a:p>
+                  </a:txBody>
+                  <a:tcPr marL="36576" marR="36576" marT="9144" marB="9144">
+                    <a:solidFill>
+                      <a:srgbClr val="FFFFFF"/>
+                    </a:solidFill>
+                  </a:tcPr>
+                </a:tc>
+              </a:tr>
+              <a:tr h="329184">
+                <a:tc>
+                  <a:txBody>
+                    <a:bodyPr/>
+                    <a:lstStyle/>
+                    <a:p>
+                      <a:pPr algn="ctr"/>
+                      <a:r>
+                        <a:rPr sz="1400" b="1">
+                          <a:solidFill>
+                            <a:srgbClr val="202020"/>
+                          </a:solidFill>
+                          <a:latin typeface="Microsoft JhengHei"/>
+                        </a:rPr>
+                        <a:t>蒸餾模型</a:t>
+                      </a:r>
+                    </a:p>
+                  </a:txBody>
+                  <a:tcPr marL="36576" marR="36576" marT="9144" marB="9144">
+                    <a:solidFill>
+                      <a:srgbClr val="FFFFFF"/>
+                    </a:solidFill>
+                  </a:tcPr>
+                </a:tc>
+                <a:tc>
+                  <a:txBody>
+                    <a:bodyPr/>
+                    <a:lstStyle/>
+                    <a:p>
+                      <a:pPr algn="ctr"/>
+                      <a:r>
+                        <a:rPr sz="1400" b="1">
+                          <a:solidFill>
+                            <a:srgbClr val="202020"/>
+                          </a:solidFill>
+                          <a:latin typeface="Microsoft JhengHei"/>
+                        </a:rPr>
+                        <a:t>distilled model</a:t>
+                      </a:r>
+                    </a:p>
+                  </a:txBody>
+                  <a:tcPr marL="36576" marR="36576" marT="9144" marB="9144">
+                    <a:solidFill>
+                      <a:srgbClr val="FFFFFF"/>
+                    </a:solidFill>
+                  </a:tcPr>
+                </a:tc>
+                <a:tc>
+                  <a:txBody>
+                    <a:bodyPr/>
+                    <a:lstStyle/>
+                    <a:p>
+                      <a:pPr algn="just"/>
+                      <a:r>
+                        <a:rPr sz="1400" b="0">
+                          <a:solidFill>
+                            <a:srgbClr val="202020"/>
+                          </a:solidFill>
+                          <a:latin typeface="Microsoft JhengHei"/>
+                        </a:rPr>
+                        <a:t>以軟目標與正確標籤訓練、承接笨重模型知識的小模型；使用時溫度為 1</a:t>
+                      </a:r>
+                    </a:p>
+                  </a:txBody>
+                  <a:tcPr marL="36576" marR="36576" marT="9144" marB="9144">
+                    <a:solidFill>
+                      <a:srgbClr val="FFFFFF"/>
+                    </a:solidFill>
+                  </a:tcPr>
+                </a:tc>
+              </a:tr>
+              <a:tr h="329184">
+                <a:tc>
+                  <a:txBody>
+                    <a:bodyPr/>
+                    <a:lstStyle/>
+                    <a:p>
+                      <a:pPr algn="ctr"/>
+                      <a:r>
+                        <a:rPr sz="1400" b="1">
+                          <a:solidFill>
+                            <a:srgbClr val="202020"/>
+                          </a:solidFill>
+                          <a:latin typeface="Microsoft JhengHei"/>
+                        </a:rPr>
+                        <a:t>組合模型</a:t>
+                      </a:r>
+                    </a:p>
+                  </a:txBody>
+                  <a:tcPr marL="36576" marR="36576" marT="9144" marB="9144">
+                    <a:solidFill>
+                      <a:srgbClr val="FFFFFF"/>
+                    </a:solidFill>
+                  </a:tcPr>
+                </a:tc>
+                <a:tc>
+                  <a:txBody>
+                    <a:bodyPr/>
+                    <a:lstStyle/>
+                    <a:p>
+                      <a:pPr algn="ctr"/>
+                      <a:r>
+                        <a:rPr sz="1400" b="1">
+                          <a:solidFill>
+                            <a:srgbClr val="202020"/>
+                          </a:solidFill>
+                          <a:latin typeface="Microsoft JhengHei"/>
+                        </a:rPr>
+                        <a:t>ensemble</a:t>
+                      </a:r>
+                    </a:p>
+                  </a:txBody>
+                  <a:tcPr marL="36576" marR="36576" marT="9144" marB="9144">
+                    <a:solidFill>
+                      <a:srgbClr val="FFFFFF"/>
+                    </a:solidFill>
+                  </a:tcPr>
+                </a:tc>
+                <a:tc>
+                  <a:txBody>
+                    <a:bodyPr/>
+                    <a:lstStyle/>
+                    <a:p>
+                      <a:pPr algn="just"/>
+                      <a:r>
+                        <a:rPr sz="1400" b="0">
+                          <a:solidFill>
+                            <a:srgbClr val="202020"/>
+                          </a:solidFill>
+                          <a:latin typeface="Microsoft JhengHei"/>
+                        </a:rPr>
+                        <a:t>多個分別訓練的模型，把它們的預測取平均</a:t>
+                      </a:r>
+                    </a:p>
+                  </a:txBody>
+                  <a:tcPr marL="36576" marR="36576" marT="9144" marB="9144">
+                    <a:solidFill>
+                      <a:srgbClr val="FFFFFF"/>
+                    </a:solidFill>
+                  </a:tcPr>
+                </a:tc>
+              </a:tr>
+              <a:tr h="329184">
+                <a:tc>
+                  <a:txBody>
+                    <a:bodyPr/>
+                    <a:lstStyle/>
+                    <a:p>
+                      <a:pPr algn="ctr"/>
+                      <a:r>
+                        <a:rPr sz="1400" b="1">
+                          <a:solidFill>
+                            <a:srgbClr val="202020"/>
+                          </a:solidFill>
+                          <a:latin typeface="Microsoft JhengHei"/>
+                        </a:rPr>
+                        <a:t>logit</a:t>
+                      </a:r>
+                    </a:p>
+                  </a:txBody>
+                  <a:tcPr marL="36576" marR="36576" marT="9144" marB="9144">
+                    <a:solidFill>
+                      <a:srgbClr val="FFFFFF"/>
+                    </a:solidFill>
+                  </a:tcPr>
+                </a:tc>
+                <a:tc>
+                  <a:txBody>
+                    <a:bodyPr/>
+                    <a:lstStyle/>
+                    <a:p>
+                      <a:pPr algn="ctr"/>
+                      <a:r>
+                        <a:rPr sz="1400" b="1">
+                          <a:solidFill>
+                            <a:srgbClr val="202020"/>
+                          </a:solidFill>
+                          <a:latin typeface="Microsoft JhengHei"/>
+                        </a:rPr>
+                        <a:t>logit</a:t>
+                      </a:r>
+                    </a:p>
+                  </a:txBody>
+                  <a:tcPr marL="36576" marR="36576" marT="9144" marB="9144">
+                    <a:solidFill>
+                      <a:srgbClr val="FFFFFF"/>
+                    </a:solidFill>
+                  </a:tcPr>
+                </a:tc>
+                <a:tc>
+                  <a:txBody>
+                    <a:bodyPr/>
+                    <a:lstStyle/>
+                    <a:p>
+                      <a:pPr algn="just"/>
+                      <a:r>
+                        <a:rPr sz="1400" b="0">
+                          <a:solidFill>
+                            <a:srgbClr val="202020"/>
+                          </a:solidFill>
+                          <a:latin typeface="Microsoft JhengHei"/>
+                        </a:rPr>
+                        <a:t>softmax 的輸入：網路最後一層對每個類別算出的數值 z_i</a:t>
+                      </a:r>
+                    </a:p>
+                  </a:txBody>
+                  <a:tcPr marL="36576" marR="36576" marT="9144" marB="9144">
+                    <a:solidFill>
+                      <a:srgbClr val="FFFFFF"/>
+                    </a:solidFill>
+                  </a:tcPr>
+                </a:tc>
+              </a:tr>
+              <a:tr h="329184">
+                <a:tc>
+                  <a:txBody>
+                    <a:bodyPr/>
+                    <a:lstStyle/>
+                    <a:p>
+                      <a:pPr algn="ctr"/>
+                      <a:r>
+                        <a:rPr sz="1400" b="1">
+                          <a:solidFill>
+                            <a:srgbClr val="202020"/>
+                          </a:solidFill>
+                          <a:latin typeface="Microsoft JhengHei"/>
+                        </a:rPr>
+                        <a:t>溫度</a:t>
+                      </a:r>
+                    </a:p>
+                  </a:txBody>
+                  <a:tcPr marL="36576" marR="36576" marT="9144" marB="9144">
+                    <a:solidFill>
+                      <a:srgbClr val="FFFFFF"/>
+                    </a:solidFill>
+                  </a:tcPr>
+                </a:tc>
+                <a:tc>
+                  <a:txBody>
+                    <a:bodyPr/>
+                    <a:lstStyle/>
+                    <a:p>
+                      <a:pPr algn="ctr"/>
+                      <a:r>
+                        <a:rPr sz="1400" b="1">
+                          <a:solidFill>
+                            <a:srgbClr val="202020"/>
+                          </a:solidFill>
+                          <a:latin typeface="Microsoft JhengHei"/>
+                        </a:rPr>
+                        <a:t>temperature (T)</a:t>
+                      </a:r>
+                    </a:p>
+                  </a:txBody>
+                  <a:tcPr marL="36576" marR="36576" marT="9144" marB="9144">
+                    <a:solidFill>
+                      <a:srgbClr val="FFFFFF"/>
+                    </a:solidFill>
+                  </a:tcPr>
+                </a:tc>
+                <a:tc>
+                  <a:txBody>
+                    <a:bodyPr/>
+                    <a:lstStyle/>
+                    <a:p>
+                      <a:pPr algn="just"/>
+                      <a:r>
+                        <a:rPr sz="1400" b="0">
+                          <a:solidFill>
+                            <a:srgbClr val="202020"/>
+                          </a:solidFill>
+                          <a:latin typeface="Microsoft JhengHei"/>
+                        </a:rPr>
+                        <a:t>softmax 中除以 logit 的常數；T 越大，機率分布越軟，通常 T = 1</a:t>
+                      </a:r>
+                    </a:p>
+                  </a:txBody>
+                  <a:tcPr marL="36576" marR="36576" marT="9144" marB="9144">
+                    <a:solidFill>
+                      <a:srgbClr val="FFFFFF"/>
+                    </a:solidFill>
+                  </a:tcPr>
+                </a:tc>
+              </a:tr>
+              <a:tr h="329184">
+                <a:tc>
+                  <a:txBody>
+                    <a:bodyPr/>
+                    <a:lstStyle/>
+                    <a:p>
+                      <a:pPr algn="ctr"/>
+                      <a:r>
+                        <a:rPr sz="1400" b="1">
+                          <a:solidFill>
+                            <a:srgbClr val="202020"/>
+                          </a:solidFill>
+                          <a:latin typeface="Microsoft JhengHei"/>
+                        </a:rPr>
+                        <a:t>軟目標</a:t>
+                      </a:r>
+                    </a:p>
+                  </a:txBody>
+                  <a:tcPr marL="36576" marR="36576" marT="9144" marB="9144">
+                    <a:solidFill>
+                      <a:srgbClr val="FFFFFF"/>
+                    </a:solidFill>
+                  </a:tcPr>
+                </a:tc>
+                <a:tc>
+                  <a:txBody>
+                    <a:bodyPr/>
+                    <a:lstStyle/>
+                    <a:p>
+                      <a:pPr algn="ctr"/>
+                      <a:r>
+                        <a:rPr sz="1400" b="1">
+                          <a:solidFill>
+                            <a:srgbClr val="202020"/>
+                          </a:solidFill>
+                          <a:latin typeface="Microsoft JhengHei"/>
+                        </a:rPr>
+                        <a:t>soft targets</a:t>
+                      </a:r>
+                    </a:p>
+                  </a:txBody>
+                  <a:tcPr marL="36576" marR="36576" marT="9144" marB="9144">
+                    <a:solidFill>
+                      <a:srgbClr val="FFFFFF"/>
+                    </a:solidFill>
+                  </a:tcPr>
+                </a:tc>
+                <a:tc>
+                  <a:txBody>
+                    <a:bodyPr/>
+                    <a:lstStyle/>
+                    <a:p>
+                      <a:pPr algn="just"/>
+                      <a:r>
+                        <a:rPr sz="1400" b="0">
+                          <a:solidFill>
+                            <a:srgbClr val="202020"/>
+                          </a:solidFill>
+                          <a:latin typeface="Microsoft JhengHei"/>
+                        </a:rPr>
+                        <a:t>笨重模型在高溫下產生的類別機率，保留錯誤類別之間的相對機率</a:t>
+                      </a:r>
+                    </a:p>
+                  </a:txBody>
+                  <a:tcPr marL="36576" marR="36576" marT="9144" marB="9144">
+                    <a:solidFill>
+                      <a:srgbClr val="FFFFFF"/>
+                    </a:solidFill>
+                  </a:tcPr>
+                </a:tc>
+              </a:tr>
+              <a:tr h="329184">
+                <a:tc>
+                  <a:txBody>
+                    <a:bodyPr/>
+                    <a:lstStyle/>
+                    <a:p>
+                      <a:pPr algn="ctr"/>
+                      <a:r>
+                        <a:rPr sz="1400" b="1">
+                          <a:solidFill>
+                            <a:srgbClr val="202020"/>
+                          </a:solidFill>
+                          <a:latin typeface="Microsoft JhengHei"/>
+                        </a:rPr>
+                        <a:t>硬目標</a:t>
+                      </a:r>
+                    </a:p>
+                  </a:txBody>
+                  <a:tcPr marL="36576" marR="36576" marT="9144" marB="9144">
+                    <a:solidFill>
+                      <a:srgbClr val="FFFFFF"/>
+                    </a:solidFill>
+                  </a:tcPr>
+                </a:tc>
+                <a:tc>
+                  <a:txBody>
+                    <a:bodyPr/>
+                    <a:lstStyle/>
+                    <a:p>
+                      <a:pPr algn="ctr"/>
+                      <a:r>
+                        <a:rPr sz="1400" b="1">
+                          <a:solidFill>
+                            <a:srgbClr val="202020"/>
+                          </a:solidFill>
+                          <a:latin typeface="Microsoft JhengHei"/>
+                        </a:rPr>
+                        <a:t>hard targets</a:t>
+                      </a:r>
+                    </a:p>
+                  </a:txBody>
+                  <a:tcPr marL="36576" marR="36576" marT="9144" marB="9144">
+                    <a:solidFill>
+                      <a:srgbClr val="FFFFFF"/>
+                    </a:solidFill>
+                  </a:tcPr>
+                </a:tc>
+                <a:tc>
+                  <a:txBody>
+                    <a:bodyPr/>
+                    <a:lstStyle/>
+                    <a:p>
+                      <a:pPr algn="just"/>
+                      <a:r>
+                        <a:rPr sz="1400" b="0">
+                          <a:solidFill>
+                            <a:srgbClr val="202020"/>
+                          </a:solidFill>
+                          <a:latin typeface="Microsoft JhengHei"/>
+                        </a:rPr>
+                        <a:t>正確標籤：只有正確類別為 1，其餘為 0</a:t>
+                      </a:r>
+                    </a:p>
+                  </a:txBody>
+                  <a:tcPr marL="36576" marR="36576" marT="9144" marB="9144">
+                    <a:solidFill>
+                      <a:srgbClr val="FFFFFF"/>
+                    </a:solidFill>
+                  </a:tcPr>
+                </a:tc>
+              </a:tr>
+              <a:tr h="329184">
+                <a:tc>
+                  <a:txBody>
+                    <a:bodyPr/>
+                    <a:lstStyle/>
+                    <a:p>
+                      <a:pPr algn="ctr"/>
+                      <a:r>
+                        <a:rPr sz="1400" b="1">
+                          <a:solidFill>
+                            <a:srgbClr val="202020"/>
+                          </a:solidFill>
+                          <a:latin typeface="Microsoft JhengHei"/>
+                        </a:rPr>
+                        <a:t>移轉集</a:t>
+                      </a:r>
+                    </a:p>
+                  </a:txBody>
+                  <a:tcPr marL="36576" marR="36576" marT="9144" marB="9144">
+                    <a:solidFill>
+                      <a:srgbClr val="FFFFFF"/>
+                    </a:solidFill>
+                  </a:tcPr>
+                </a:tc>
+                <a:tc>
+                  <a:txBody>
+                    <a:bodyPr/>
+                    <a:lstStyle/>
+                    <a:p>
+                      <a:pPr algn="ctr"/>
+                      <a:r>
+                        <a:rPr sz="1400" b="1">
+                          <a:solidFill>
+                            <a:srgbClr val="202020"/>
+                          </a:solidFill>
+                          <a:latin typeface="Microsoft JhengHei"/>
+                        </a:rPr>
+                        <a:t>transfer set</a:t>
+                      </a:r>
+                    </a:p>
+                  </a:txBody>
+                  <a:tcPr marL="36576" marR="36576" marT="9144" marB="9144">
+                    <a:solidFill>
+                      <a:srgbClr val="FFFFFF"/>
+                    </a:solidFill>
+                  </a:tcPr>
+                </a:tc>
+                <a:tc>
+                  <a:txBody>
+                    <a:bodyPr/>
+                    <a:lstStyle/>
+                    <a:p>
+                      <a:pPr algn="just"/>
+                      <a:r>
+                        <a:rPr sz="1400" b="0">
+                          <a:solidFill>
+                            <a:srgbClr val="202020"/>
+                          </a:solidFill>
+                          <a:latin typeface="Microsoft JhengHei"/>
+                        </a:rPr>
+                        <a:t>用來訓練蒸餾模型的資料，可以是原本的訓練集，也可以是無標籤資料</a:t>
+                      </a:r>
+                    </a:p>
+                  </a:txBody>
+                  <a:tcPr marL="36576" marR="36576" marT="9144" marB="9144">
+                    <a:solidFill>
+                      <a:srgbClr val="FFFFFF"/>
+                    </a:solidFill>
+                  </a:tcPr>
+                </a:tc>
+              </a:tr>
+              <a:tr h="329184">
+                <a:tc>
+                  <a:txBody>
+                    <a:bodyPr/>
+                    <a:lstStyle/>
+                    <a:p>
+                      <a:pPr algn="ctr"/>
+                      <a:r>
+                        <a:rPr sz="1400" b="1">
+                          <a:solidFill>
+                            <a:srgbClr val="202020"/>
+                          </a:solidFill>
+                          <a:latin typeface="Microsoft JhengHei"/>
+                        </a:rPr>
+                        <a:t>交叉熵</a:t>
+                      </a:r>
+                    </a:p>
+                  </a:txBody>
+                  <a:tcPr marL="36576" marR="36576" marT="9144" marB="9144">
+                    <a:solidFill>
+                      <a:srgbClr val="FFFFFF"/>
+                    </a:solidFill>
+                  </a:tcPr>
+                </a:tc>
+                <a:tc>
+                  <a:txBody>
+                    <a:bodyPr/>
+                    <a:lstStyle/>
+                    <a:p>
+                      <a:pPr algn="ctr"/>
+                      <a:r>
+                        <a:rPr sz="1400" b="1">
+                          <a:solidFill>
+                            <a:srgbClr val="202020"/>
+                          </a:solidFill>
+                          <a:latin typeface="Microsoft JhengHei"/>
+                        </a:rPr>
+                        <a:t>cross entropy</a:t>
+                      </a:r>
+                    </a:p>
+                  </a:txBody>
+                  <a:tcPr marL="36576" marR="36576" marT="9144" marB="9144">
+                    <a:solidFill>
+                      <a:srgbClr val="FFFFFF"/>
+                    </a:solidFill>
+                  </a:tcPr>
+                </a:tc>
+                <a:tc>
+                  <a:txBody>
+                    <a:bodyPr/>
+                    <a:lstStyle/>
+                    <a:p>
+                      <a:pPr algn="just"/>
+                      <a:r>
+                        <a:rPr sz="1400" b="0">
+                          <a:solidFill>
+                            <a:srgbClr val="202020"/>
+                          </a:solidFill>
+                          <a:latin typeface="Microsoft JhengHei"/>
+                        </a:rPr>
+                        <a:t>兩個機率分布之間差異的度量：C = −Σ p_i log q_i</a:t>
+                      </a:r>
+                    </a:p>
+                  </a:txBody>
+                  <a:tcPr marL="36576" marR="36576" marT="9144" marB="9144">
+                    <a:solidFill>
+                      <a:srgbClr val="FFFFFF"/>
+                    </a:solidFill>
+                  </a:tcPr>
+                </a:tc>
+              </a:tr>
+              <a:tr h="329184">
+                <a:tc>
+                  <a:txBody>
+                    <a:bodyPr/>
+                    <a:lstStyle/>
+                    <a:p>
+                      <a:pPr algn="ctr"/>
+                      <a:r>
+                        <a:rPr sz="1400" b="1">
+                          <a:solidFill>
+                            <a:srgbClr val="202020"/>
+                          </a:solidFill>
+                          <a:latin typeface="Microsoft JhengHei"/>
+                        </a:rPr>
+                        <a:t>比對 logit</a:t>
+                      </a:r>
+                    </a:p>
+                  </a:txBody>
+                  <a:tcPr marL="36576" marR="36576" marT="9144" marB="9144">
+                    <a:solidFill>
+                      <a:srgbClr val="FFFFFF"/>
+                    </a:solidFill>
+                  </a:tcPr>
+                </a:tc>
+                <a:tc>
+                  <a:txBody>
+                    <a:bodyPr/>
+                    <a:lstStyle/>
+                    <a:p>
+                      <a:pPr algn="ctr"/>
+                      <a:r>
+                        <a:rPr sz="1400" b="1">
+                          <a:solidFill>
+                            <a:srgbClr val="202020"/>
+                          </a:solidFill>
+                          <a:latin typeface="Microsoft JhengHei"/>
+                        </a:rPr>
+                        <a:t>matching logits</a:t>
+                      </a:r>
+                    </a:p>
+                  </a:txBody>
+                  <a:tcPr marL="36576" marR="36576" marT="9144" marB="9144">
+                    <a:solidFill>
+                      <a:srgbClr val="FFFFFF"/>
+                    </a:solidFill>
+                  </a:tcPr>
+                </a:tc>
+                <a:tc>
+                  <a:txBody>
+                    <a:bodyPr/>
+                    <a:lstStyle/>
+                    <a:p>
+                      <a:pPr algn="just"/>
+                      <a:r>
+                        <a:rPr sz="1400" b="0">
+                          <a:solidFill>
+                            <a:srgbClr val="202020"/>
+                          </a:solidFill>
+                          <a:latin typeface="Microsoft JhengHei"/>
+                        </a:rPr>
+                        <a:t>讓小模型的 logit 直接貼齊笨重模型的 logit；是高溫極限下的蒸餾</a:t>
+                      </a:r>
+                    </a:p>
+                  </a:txBody>
+                  <a:tcPr marL="36576" marR="36576" marT="9144" marB="9144">
+                    <a:solidFill>
+                      <a:srgbClr val="FFFFFF"/>
+                    </a:solidFill>
+                  </a:tcPr>
+                </a:tc>
+              </a:tr>
+              <a:tr h="329184">
+                <a:tc>
+                  <a:txBody>
+                    <a:bodyPr/>
+                    <a:lstStyle/>
+                    <a:p>
+                      <a:pPr algn="ctr"/>
+                      <a:r>
+                        <a:rPr sz="1400" b="1">
+                          <a:solidFill>
+                            <a:srgbClr val="202020"/>
+                          </a:solidFill>
+                          <a:latin typeface="Microsoft JhengHei"/>
+                        </a:rPr>
+                        <a:t>專家模型</a:t>
+                      </a:r>
+                    </a:p>
+                  </a:txBody>
+                  <a:tcPr marL="36576" marR="36576" marT="9144" marB="9144">
+                    <a:solidFill>
+                      <a:srgbClr val="FFFFFF"/>
+                    </a:solidFill>
+                  </a:tcPr>
+                </a:tc>
+                <a:tc>
+                  <a:txBody>
+                    <a:bodyPr/>
+                    <a:lstStyle/>
+                    <a:p>
+                      <a:pPr algn="ctr"/>
+                      <a:r>
+                        <a:rPr sz="1400" b="1">
+                          <a:solidFill>
+                            <a:srgbClr val="202020"/>
+                          </a:solidFill>
+                          <a:latin typeface="Microsoft JhengHei"/>
+                        </a:rPr>
+                        <a:t>specialist models</a:t>
+                      </a:r>
+                    </a:p>
+                  </a:txBody>
+                  <a:tcPr marL="36576" marR="36576" marT="9144" marB="9144">
+                    <a:solidFill>
+                      <a:srgbClr val="FFFFFF"/>
+                    </a:solidFill>
+                  </a:tcPr>
+                </a:tc>
+                <a:tc>
+                  <a:txBody>
+                    <a:bodyPr/>
+                    <a:lstStyle/>
+                    <a:p>
+                      <a:pPr algn="just"/>
+                      <a:r>
+                        <a:rPr sz="1400" b="0">
+                          <a:solidFill>
+                            <a:srgbClr val="202020"/>
+                          </a:solidFill>
+                          <a:latin typeface="Microsoft JhengHei"/>
+                        </a:rPr>
+                        <a:t>只負責一群容易混淆類別的模型，與通用模型 generalist model 合用</a:t>
+                      </a:r>
+                    </a:p>
+                  </a:txBody>
+                  <a:tcPr marL="36576" marR="36576" marT="9144" marB="9144">
+                    <a:solidFill>
+                      <a:srgbClr val="FFFFFF"/>
+                    </a:solidFill>
+                  </a:tcPr>
+                </a:tc>
+              </a:tr>
+            </a:tbl>
+          </a:graphicData>
+        </a:graphic>
+      </p:graphicFrame>
+    </p:spTree>
+  </p:cSld>
+  <p:clrMapOvr>
+    <a:masterClrMapping/>
+  </p:clrMapOvr>
+  <p:timing>
+    <p:tnLst>
+      <p:par>
+        <p:cTn id="1" dur="indefinite" restart="never" nodeType="tmRoot">
+          <p:childTnLst>
+            <p:seq concurrent="1" nextAc="seek">
+              <p:cTn id="2" dur="indefinite" nodeType="mainSeq">
+                <p:childTnLst>
+                  <p:par>
+                    <p:cTn id="3" fill="hold">
+                      <p:stCondLst>
+                        <p:cond delay="indefinite"/>
+                      </p:stCondLst>
+                      <p:childTnLst>
+                        <p:par>
+                          <p:cTn id="4" fill="hold">
+                            <p:stCondLst>
+                              <p:cond delay="0"/>
+                            </p:stCondLst>
+                            <p:childTnLst>
+                              <p:par>
+                                <p:cTn id="5" presetID="1" presetClass="entr" presetSubtype="0" fill="hold" grpId="0" nodeType="clickEffect">
+                                  <p:stCondLst>
+                                    <p:cond delay="0"/>
+                                  </p:stCondLst>
+                                  <p:childTnLst>
+                                    <p:set>
+                                      <p:cBhvr>
+                                        <p:cTn id="6" dur="1" fill="hold">
+                                          <p:stCondLst>
+                                            <p:cond delay="0"/>
+                                          </p:stCondLst>
+                                        </p:cTn>
+                                        <p:tgtEl>
+                                          <p:spTgt spid="6"/>
+                                        </p:tgtEl>
+                                        <p:attrNameLst>
+                                          <p:attrName>style.visibility</p:attrName>
+                                        </p:attrNameLst>
+                                      </p:cBhvr>
+                                      <p:to>
+                                        <p:strVal val="visible"/>
+                                      </p:to>
+                                    </p:set>
+                                  </p:childTnLst>
+                                </p:cTn>
+                              </p:par>
+                            </p:childTnLst>
+                          </p:cTn>
+                        </p:par>
+                      </p:childTnLst>
+                    </p:cTn>
+                  </p:par>
+                </p:childTnLst>
+              </p:cTn>
+              <p:prevCondLst>
+                <p:cond evt="onPrev" delay="0">
+                  <p:tgtEl>
+                    <p:sldTgt/>
+                  </p:tgtEl>
+                </p:cond>
+              </p:prevCondLst>
+              <p:nextCondLst>
+                <p:cond evt="onNext" delay="0">
+                  <p:tgtEl>
+                    <p:sldTgt/>
+                  </p:tgtEl>
+                </p:cond>
+              </p:nextCondLst>
+            </p:seq>
+          </p:childTnLst>
+        </p:cTn>
+      </p:par>
+    </p:tnLst>
+    <p:bldLst>
+      <p:bldGraphic spid="6" grpId="0">
+        <p:bldAsOne/>
+      </p:bldGraphic>
+    </p:bldLst>
+  </p:timing>
+</p:sld>
+</file>
+
+<file path=ppt/slides/slide6.xml><?xml version="1.0" encoding="utf-8"?>
 <p:sld xmlns:a="http://schemas.openxmlformats.org/drawingml/2006/main" xmlns:p="http://schemas.openxmlformats.org/presentationml/2006/main" xmlns:r="http://schemas.openxmlformats.org/officeDocument/2006/relationships">
   <p:cSld>
     <p:spTree>
@@ -22236,7 +25057,7 @@
 </p:sld>
 </file>
 
-<file path=ppt/slides/slide6.xml><?xml version="1.0" encoding="utf-8"?>
+<file path=ppt/slides/slide7.xml><?xml version="1.0" encoding="utf-8"?>
 <p:sld xmlns:a="http://schemas.openxmlformats.org/drawingml/2006/main" xmlns:p="http://schemas.openxmlformats.org/presentationml/2006/main" xmlns:r="http://schemas.openxmlformats.org/officeDocument/2006/relationships">
   <p:cSld>
     <p:spTree>
@@ -23327,7 +26148,7 @@
 </p:sld>
 </file>
 
-<file path=ppt/slides/slide7.xml><?xml version="1.0" encoding="utf-8"?>
+<file path=ppt/slides/slide8.xml><?xml version="1.0" encoding="utf-8"?>
 <p:sld xmlns:a="http://schemas.openxmlformats.org/drawingml/2006/main" xmlns:p="http://schemas.openxmlformats.org/presentationml/2006/main" xmlns:r="http://schemas.openxmlformats.org/officeDocument/2006/relationships">
   <p:cSld>
     <p:spTree>
@@ -23490,7 +26311,7 @@
                 </a:solidFill>
                 <a:latin typeface="Microsoft JhengHei"/>
               </a:rPr>
-              <a:t>從這一頁到第 15 頁都用這一組數字</a:t>
+              <a:t>從這一頁到第 16 頁都用這一組數字</a:t>
             </a:r>
           </a:p>
         </p:txBody>
@@ -24387,1549 +27208,6 @@
 </p:sld>
 </file>
 
-<file path=ppt/slides/slide8.xml><?xml version="1.0" encoding="utf-8"?>
-<p:sld xmlns:a="http://schemas.openxmlformats.org/drawingml/2006/main" xmlns:p="http://schemas.openxmlformats.org/presentationml/2006/main" xmlns:r="http://schemas.openxmlformats.org/officeDocument/2006/relationships">
-  <p:cSld>
-    <p:spTree>
-      <p:nvGrpSpPr>
-        <p:cNvPr id="1" name=""/>
-        <p:cNvGrpSpPr/>
-        <p:nvPr/>
-      </p:nvGrpSpPr>
-      <p:grpSpPr/>
-      <p:sp>
-        <p:nvSpPr>
-          <p:cNvPr id="2" name="Rectangle 1"/>
-          <p:cNvSpPr/>
-          <p:nvPr/>
-        </p:nvSpPr>
-        <p:spPr>
-          <a:xfrm>
-            <a:off x="0" y="0"/>
-            <a:ext cx="12191695" cy="6858000"/>
-          </a:xfrm>
-          <a:prstGeom prst="rect">
-            <a:avLst/>
-          </a:prstGeom>
-          <a:solidFill>
-            <a:srgbClr val="FFFFFF"/>
-          </a:solidFill>
-          <a:ln>
-            <a:noFill/>
-          </a:ln>
-          <a:effectLst/>
-        </p:spPr>
-        <p:style>
-          <a:lnRef idx="1">
-            <a:schemeClr val="accent1"/>
-          </a:lnRef>
-          <a:fillRef idx="3">
-            <a:schemeClr val="accent1"/>
-          </a:fillRef>
-          <a:effectRef idx="2">
-            <a:schemeClr val="accent1"/>
-          </a:effectRef>
-          <a:fontRef idx="minor">
-            <a:schemeClr val="lt1"/>
-          </a:fontRef>
-        </p:style>
-        <p:txBody>
-          <a:bodyPr rtlCol="0" anchor="ctr"/>
-          <a:lstStyle/>
-          <a:p>
-            <a:pPr algn="ctr"/>
-          </a:p>
-        </p:txBody>
-      </p:sp>
-      <p:sp>
-        <p:nvSpPr>
-          <p:cNvPr id="3" name="Rectangle 2"/>
-          <p:cNvSpPr/>
-          <p:nvPr/>
-        </p:nvSpPr>
-        <p:spPr>
-          <a:xfrm>
-            <a:off x="0" y="0"/>
-            <a:ext cx="12191695" cy="868680"/>
-          </a:xfrm>
-          <a:prstGeom prst="rect">
-            <a:avLst/>
-          </a:prstGeom>
-          <a:solidFill>
-            <a:srgbClr val="1F4E79"/>
-          </a:solidFill>
-          <a:ln>
-            <a:noFill/>
-          </a:ln>
-          <a:effectLst/>
-        </p:spPr>
-        <p:style>
-          <a:lnRef idx="1">
-            <a:schemeClr val="accent1"/>
-          </a:lnRef>
-          <a:fillRef idx="3">
-            <a:schemeClr val="accent1"/>
-          </a:fillRef>
-          <a:effectRef idx="2">
-            <a:schemeClr val="accent1"/>
-          </a:effectRef>
-          <a:fontRef idx="minor">
-            <a:schemeClr val="lt1"/>
-          </a:fontRef>
-        </p:style>
-        <p:txBody>
-          <a:bodyPr rtlCol="0" anchor="ctr"/>
-          <a:lstStyle/>
-          <a:p>
-            <a:pPr algn="ctr"/>
-          </a:p>
-        </p:txBody>
-      </p:sp>
-      <p:sp>
-        <p:nvSpPr>
-          <p:cNvPr id="4" name="TextBox 3"/>
-          <p:cNvSpPr txBox="1"/>
-          <p:nvPr/>
-        </p:nvSpPr>
-        <p:spPr>
-          <a:xfrm>
-            <a:off x="411480" y="73152"/>
-            <a:ext cx="11338560" cy="457200"/>
-          </a:xfrm>
-          <a:prstGeom prst="rect">
-            <a:avLst/>
-          </a:prstGeom>
-          <a:noFill/>
-        </p:spPr>
-        <p:txBody>
-          <a:bodyPr wrap="square">
-            <a:spAutoFit/>
-          </a:bodyPr>
-          <a:lstStyle/>
-          <a:p>
-            <a:pPr algn="just"/>
-            <a:r>
-              <a:rPr sz="2700" b="1">
-                <a:solidFill>
-                  <a:srgbClr val="FFFFFF"/>
-                </a:solidFill>
-                <a:latin typeface="Microsoft JhengHei"/>
-              </a:rPr>
-              <a:t>二、帶溫度的 softmax：T = 1</a:t>
-            </a:r>
-          </a:p>
-        </p:txBody>
-      </p:sp>
-      <p:sp>
-        <p:nvSpPr>
-          <p:cNvPr id="5" name="TextBox 4"/>
-          <p:cNvSpPr txBox="1"/>
-          <p:nvPr/>
-        </p:nvSpPr>
-        <p:spPr>
-          <a:xfrm>
-            <a:off x="411480" y="521207"/>
-            <a:ext cx="11338560" cy="301752"/>
-          </a:xfrm>
-          <a:prstGeom prst="rect">
-            <a:avLst/>
-          </a:prstGeom>
-          <a:noFill/>
-        </p:spPr>
-        <p:txBody>
-          <a:bodyPr wrap="square">
-            <a:spAutoFit/>
-          </a:bodyPr>
-          <a:lstStyle/>
-          <a:p>
-            <a:pPr algn="just"/>
-            <a:r>
-              <a:rPr sz="1300" b="0">
-                <a:solidFill>
-                  <a:srgbClr val="C7D6E5"/>
-                </a:solidFill>
-                <a:latin typeface="Microsoft JhengHei"/>
-              </a:rPr>
-              <a:t>論文式 (1)；T 通常設為 1</a:t>
-            </a:r>
-          </a:p>
-        </p:txBody>
-      </p:sp>
-      <p:pic>
-        <p:nvPicPr>
-          <p:cNvPr id="6" name="Picture 5" descr="m_softmax.png"/>
-          <p:cNvPicPr>
-            <a:picLocks noChangeAspect="1"/>
-          </p:cNvPicPr>
-          <p:nvPr/>
-        </p:nvPicPr>
-        <p:blipFill>
-          <a:blip r:embed="rId2"/>
-          <a:stretch>
-            <a:fillRect/>
-          </a:stretch>
-        </p:blipFill>
-        <p:spPr>
-          <a:xfrm>
-            <a:off x="822960" y="1051560"/>
-            <a:ext cx="1867014" cy="868680"/>
-          </a:xfrm>
-          <a:prstGeom prst="rect">
-            <a:avLst/>
-          </a:prstGeom>
-        </p:spPr>
-      </p:pic>
-      <p:sp>
-        <p:nvSpPr>
-          <p:cNvPr id="7" name="TextBox 6"/>
-          <p:cNvSpPr txBox="1"/>
-          <p:nvPr/>
-        </p:nvSpPr>
-        <p:spPr>
-          <a:xfrm>
-            <a:off x="4754880" y="1097280"/>
-            <a:ext cx="6949440" cy="914400"/>
-          </a:xfrm>
-          <a:prstGeom prst="rect">
-            <a:avLst/>
-          </a:prstGeom>
-          <a:noFill/>
-        </p:spPr>
-        <p:txBody>
-          <a:bodyPr wrap="square">
-            <a:spAutoFit/>
-          </a:bodyPr>
-          <a:lstStyle/>
-          <a:p>
-            <a:pPr algn="just"/>
-            <a:r>
-              <a:rPr sz="1800" b="0">
-                <a:solidFill>
-                  <a:srgbClr val="202020"/>
-                </a:solidFill>
-                <a:latin typeface="Microsoft JhengHei"/>
-              </a:rPr>
-              <a:t>softmax 把每個類別算出的 logit z_i 與其他 logit 比較，</a:t>
-            </a:r>
-          </a:p>
-          <a:p>
-            <a:pPr algn="just"/>
-            <a:r>
-              <a:rPr sz="1800" b="0">
-                <a:solidFill>
-                  <a:srgbClr val="202020"/>
-                </a:solidFill>
-                <a:latin typeface="Microsoft JhengHei"/>
-              </a:rPr>
-              <a:t>轉成機率 q_i；T 是溫度。</a:t>
-            </a:r>
-          </a:p>
-        </p:txBody>
-      </p:sp>
-      <p:graphicFrame>
-        <p:nvGraphicFramePr>
-          <p:cNvPr id="8" name="Table 7"/>
-          <p:cNvGraphicFramePr>
-            <a:graphicFrameLocks noGrp="1"/>
-          </p:cNvGraphicFramePr>
-          <p:nvPr/>
-        </p:nvGraphicFramePr>
-        <p:xfrm>
-          <a:off x="731520" y="2240280"/>
-          <a:ext cx="1188720" cy="1316736"/>
-        </p:xfrm>
-        <a:graphic>
-          <a:graphicData uri="http://schemas.openxmlformats.org/drawingml/2006/table">
-            <a:tbl>
-              <a:tblPr bandRow="1">
-                <a:tableStyleId>{5C22544A-7EE6-4342-B048-85BDC9FD1C3A}</a:tableStyleId>
-              </a:tblPr>
-              <a:tblGrid>
-                <a:gridCol w="1188720"/>
-              </a:tblGrid>
-              <a:tr h="329184">
-                <a:tc>
-                  <a:txBody>
-                    <a:bodyPr/>
-                    <a:lstStyle/>
-                    <a:p>
-                      <a:pPr algn="ctr"/>
-                      <a:r>
-                        <a:rPr sz="1500" b="1">
-                          <a:solidFill>
-                            <a:srgbClr val="FFFFFF"/>
-                          </a:solidFill>
-                          <a:latin typeface="Microsoft JhengHei"/>
-                        </a:rPr>
-                        <a:t>類別</a:t>
-                      </a:r>
-                    </a:p>
-                  </a:txBody>
-                  <a:tcPr marL="36576" marR="36576" marT="9144" marB="9144">
-                    <a:solidFill>
-                      <a:srgbClr val="1F4E79"/>
-                    </a:solidFill>
-                  </a:tcPr>
-                </a:tc>
-              </a:tr>
-              <a:tr h="329184">
-                <a:tc>
-                  <a:txBody>
-                    <a:bodyPr/>
-                    <a:lstStyle/>
-                    <a:p>
-                      <a:pPr algn="ctr"/>
-                      <a:r>
-                        <a:rPr sz="1500" b="0">
-                          <a:solidFill>
-                            <a:srgbClr val="202020"/>
-                          </a:solidFill>
-                          <a:latin typeface="Consolas"/>
-                        </a:rPr>
-                        <a:t>2</a:t>
-                      </a:r>
-                    </a:p>
-                  </a:txBody>
-                  <a:tcPr marL="36576" marR="36576" marT="9144" marB="9144">
-                    <a:solidFill>
-                      <a:srgbClr val="FFFFFF"/>
-                    </a:solidFill>
-                  </a:tcPr>
-                </a:tc>
-              </a:tr>
-              <a:tr h="329184">
-                <a:tc>
-                  <a:txBody>
-                    <a:bodyPr/>
-                    <a:lstStyle/>
-                    <a:p>
-                      <a:pPr algn="ctr"/>
-                      <a:r>
-                        <a:rPr sz="1500" b="0">
-                          <a:solidFill>
-                            <a:srgbClr val="202020"/>
-                          </a:solidFill>
-                          <a:latin typeface="Consolas"/>
-                        </a:rPr>
-                        <a:t>3</a:t>
-                      </a:r>
-                    </a:p>
-                  </a:txBody>
-                  <a:tcPr marL="36576" marR="36576" marT="9144" marB="9144">
-                    <a:solidFill>
-                      <a:srgbClr val="FFFFFF"/>
-                    </a:solidFill>
-                  </a:tcPr>
-                </a:tc>
-              </a:tr>
-              <a:tr h="329184">
-                <a:tc>
-                  <a:txBody>
-                    <a:bodyPr/>
-                    <a:lstStyle/>
-                    <a:p>
-                      <a:pPr algn="ctr"/>
-                      <a:r>
-                        <a:rPr sz="1500" b="0">
-                          <a:solidFill>
-                            <a:srgbClr val="202020"/>
-                          </a:solidFill>
-                          <a:latin typeface="Consolas"/>
-                        </a:rPr>
-                        <a:t>7</a:t>
-                      </a:r>
-                    </a:p>
-                  </a:txBody>
-                  <a:tcPr marL="36576" marR="36576" marT="9144" marB="9144">
-                    <a:solidFill>
-                      <a:srgbClr val="FFFFFF"/>
-                    </a:solidFill>
-                  </a:tcPr>
-                </a:tc>
-              </a:tr>
-            </a:tbl>
-          </a:graphicData>
-        </a:graphic>
-      </p:graphicFrame>
-      <p:graphicFrame>
-        <p:nvGraphicFramePr>
-          <p:cNvPr id="9" name="Table 8"/>
-          <p:cNvGraphicFramePr>
-            <a:graphicFrameLocks noGrp="1"/>
-          </p:cNvGraphicFramePr>
-          <p:nvPr/>
-        </p:nvGraphicFramePr>
-        <p:xfrm>
-          <a:off x="2057400" y="2240280"/>
-          <a:ext cx="1463040" cy="1316736"/>
-        </p:xfrm>
-        <a:graphic>
-          <a:graphicData uri="http://schemas.openxmlformats.org/drawingml/2006/table">
-            <a:tbl>
-              <a:tblPr bandRow="1">
-                <a:tableStyleId>{5C22544A-7EE6-4342-B048-85BDC9FD1C3A}</a:tableStyleId>
-              </a:tblPr>
-              <a:tblGrid>
-                <a:gridCol w="1463040"/>
-              </a:tblGrid>
-              <a:tr h="329184">
-                <a:tc>
-                  <a:txBody>
-                    <a:bodyPr/>
-                    <a:lstStyle/>
-                    <a:p>
-                      <a:pPr algn="ctr"/>
-                      <a:r>
-                        <a:rPr sz="1500" b="1">
-                          <a:solidFill>
-                            <a:srgbClr val="FFFFFF"/>
-                          </a:solidFill>
-                          <a:latin typeface="Microsoft JhengHei"/>
-                        </a:rPr>
-                        <a:t>v</a:t>
-                      </a:r>
-                    </a:p>
-                  </a:txBody>
-                  <a:tcPr marL="36576" marR="36576" marT="9144" marB="9144">
-                    <a:solidFill>
-                      <a:srgbClr val="1F4E79"/>
-                    </a:solidFill>
-                  </a:tcPr>
-                </a:tc>
-              </a:tr>
-              <a:tr h="329184">
-                <a:tc>
-                  <a:txBody>
-                    <a:bodyPr/>
-                    <a:lstStyle/>
-                    <a:p>
-                      <a:pPr algn="ctr"/>
-                      <a:r>
-                        <a:rPr sz="1500" b="0">
-                          <a:solidFill>
-                            <a:srgbClr val="202020"/>
-                          </a:solidFill>
-                          <a:latin typeface="Consolas"/>
-                        </a:rPr>
-                        <a:t>8</a:t>
-                      </a:r>
-                    </a:p>
-                  </a:txBody>
-                  <a:tcPr marL="36576" marR="36576" marT="9144" marB="9144">
-                    <a:solidFill>
-                      <a:srgbClr val="FFFFFF"/>
-                    </a:solidFill>
-                  </a:tcPr>
-                </a:tc>
-              </a:tr>
-              <a:tr h="329184">
-                <a:tc>
-                  <a:txBody>
-                    <a:bodyPr/>
-                    <a:lstStyle/>
-                    <a:p>
-                      <a:pPr algn="ctr"/>
-                      <a:r>
-                        <a:rPr sz="1500" b="0">
-                          <a:solidFill>
-                            <a:srgbClr val="202020"/>
-                          </a:solidFill>
-                          <a:latin typeface="Consolas"/>
-                        </a:rPr>
-                        <a:t>4</a:t>
-                      </a:r>
-                    </a:p>
-                  </a:txBody>
-                  <a:tcPr marL="36576" marR="36576" marT="9144" marB="9144">
-                    <a:solidFill>
-                      <a:srgbClr val="FFFFFF"/>
-                    </a:solidFill>
-                  </a:tcPr>
-                </a:tc>
-              </a:tr>
-              <a:tr h="329184">
-                <a:tc>
-                  <a:txBody>
-                    <a:bodyPr/>
-                    <a:lstStyle/>
-                    <a:p>
-                      <a:pPr algn="ctr"/>
-                      <a:r>
-                        <a:rPr sz="1500" b="0">
-                          <a:solidFill>
-                            <a:srgbClr val="202020"/>
-                          </a:solidFill>
-                          <a:latin typeface="Consolas"/>
-                        </a:rPr>
-                        <a:t>0</a:t>
-                      </a:r>
-                    </a:p>
-                  </a:txBody>
-                  <a:tcPr marL="36576" marR="36576" marT="9144" marB="9144">
-                    <a:solidFill>
-                      <a:srgbClr val="FFFFFF"/>
-                    </a:solidFill>
-                  </a:tcPr>
-                </a:tc>
-              </a:tr>
-            </a:tbl>
-          </a:graphicData>
-        </a:graphic>
-      </p:graphicFrame>
-      <p:graphicFrame>
-        <p:nvGraphicFramePr>
-          <p:cNvPr id="10" name="Table 9"/>
-          <p:cNvGraphicFramePr>
-            <a:graphicFrameLocks noGrp="1"/>
-          </p:cNvGraphicFramePr>
-          <p:nvPr/>
-        </p:nvGraphicFramePr>
-        <p:xfrm>
-          <a:off x="3657600" y="2240280"/>
-          <a:ext cx="1965960" cy="1316736"/>
-        </p:xfrm>
-        <a:graphic>
-          <a:graphicData uri="http://schemas.openxmlformats.org/drawingml/2006/table">
-            <a:tbl>
-              <a:tblPr bandRow="1">
-                <a:tableStyleId>{5C22544A-7EE6-4342-B048-85BDC9FD1C3A}</a:tableStyleId>
-              </a:tblPr>
-              <a:tblGrid>
-                <a:gridCol w="1965960"/>
-              </a:tblGrid>
-              <a:tr h="329184">
-                <a:tc>
-                  <a:txBody>
-                    <a:bodyPr/>
-                    <a:lstStyle/>
-                    <a:p>
-                      <a:pPr algn="ctr"/>
-                      <a:r>
-                        <a:rPr sz="1500" b="1">
-                          <a:solidFill>
-                            <a:srgbClr val="FFFFFF"/>
-                          </a:solidFill>
-                          <a:latin typeface="Microsoft JhengHei"/>
-                        </a:rPr>
-                        <a:t>第 1 步 ÷ T</a:t>
-                      </a:r>
-                    </a:p>
-                  </a:txBody>
-                  <a:tcPr marL="36576" marR="36576" marT="9144" marB="9144">
-                    <a:solidFill>
-                      <a:srgbClr val="1F4E79"/>
-                    </a:solidFill>
-                  </a:tcPr>
-                </a:tc>
-              </a:tr>
-              <a:tr h="329184">
-                <a:tc>
-                  <a:txBody>
-                    <a:bodyPr/>
-                    <a:lstStyle/>
-                    <a:p>
-                      <a:pPr algn="ctr"/>
-                      <a:r>
-                        <a:rPr sz="1500" b="0">
-                          <a:solidFill>
-                            <a:srgbClr val="202020"/>
-                          </a:solidFill>
-                          <a:latin typeface="Consolas"/>
-                        </a:rPr>
-                        <a:t>8.0000</a:t>
-                      </a:r>
-                    </a:p>
-                  </a:txBody>
-                  <a:tcPr marL="36576" marR="36576" marT="9144" marB="9144">
-                    <a:solidFill>
-                      <a:srgbClr val="FFFFFF"/>
-                    </a:solidFill>
-                  </a:tcPr>
-                </a:tc>
-              </a:tr>
-              <a:tr h="329184">
-                <a:tc>
-                  <a:txBody>
-                    <a:bodyPr/>
-                    <a:lstStyle/>
-                    <a:p>
-                      <a:pPr algn="ctr"/>
-                      <a:r>
-                        <a:rPr sz="1500" b="0">
-                          <a:solidFill>
-                            <a:srgbClr val="202020"/>
-                          </a:solidFill>
-                          <a:latin typeface="Consolas"/>
-                        </a:rPr>
-                        <a:t>4.0000</a:t>
-                      </a:r>
-                    </a:p>
-                  </a:txBody>
-                  <a:tcPr marL="36576" marR="36576" marT="9144" marB="9144">
-                    <a:solidFill>
-                      <a:srgbClr val="FFFFFF"/>
-                    </a:solidFill>
-                  </a:tcPr>
-                </a:tc>
-              </a:tr>
-              <a:tr h="329184">
-                <a:tc>
-                  <a:txBody>
-                    <a:bodyPr/>
-                    <a:lstStyle/>
-                    <a:p>
-                      <a:pPr algn="ctr"/>
-                      <a:r>
-                        <a:rPr sz="1500" b="0">
-                          <a:solidFill>
-                            <a:srgbClr val="202020"/>
-                          </a:solidFill>
-                          <a:latin typeface="Consolas"/>
-                        </a:rPr>
-                        <a:t>0.0000</a:t>
-                      </a:r>
-                    </a:p>
-                  </a:txBody>
-                  <a:tcPr marL="36576" marR="36576" marT="9144" marB="9144">
-                    <a:solidFill>
-                      <a:srgbClr val="FFFFFF"/>
-                    </a:solidFill>
-                  </a:tcPr>
-                </a:tc>
-              </a:tr>
-            </a:tbl>
-          </a:graphicData>
-        </a:graphic>
-      </p:graphicFrame>
-      <p:graphicFrame>
-        <p:nvGraphicFramePr>
-          <p:cNvPr id="11" name="Table 10"/>
-          <p:cNvGraphicFramePr>
-            <a:graphicFrameLocks noGrp="1"/>
-          </p:cNvGraphicFramePr>
-          <p:nvPr/>
-        </p:nvGraphicFramePr>
-        <p:xfrm>
-          <a:off x="5760720" y="2240280"/>
-          <a:ext cx="2240279" cy="1316736"/>
-        </p:xfrm>
-        <a:graphic>
-          <a:graphicData uri="http://schemas.openxmlformats.org/drawingml/2006/table">
-            <a:tbl>
-              <a:tblPr bandRow="1">
-                <a:tableStyleId>{5C22544A-7EE6-4342-B048-85BDC9FD1C3A}</a:tableStyleId>
-              </a:tblPr>
-              <a:tblGrid>
-                <a:gridCol w="2240279"/>
-              </a:tblGrid>
-              <a:tr h="329184">
-                <a:tc>
-                  <a:txBody>
-                    <a:bodyPr/>
-                    <a:lstStyle/>
-                    <a:p>
-                      <a:pPr algn="ctr"/>
-                      <a:r>
-                        <a:rPr sz="1500" b="1">
-                          <a:solidFill>
-                            <a:srgbClr val="FFFFFF"/>
-                          </a:solidFill>
-                          <a:latin typeface="Microsoft JhengHei"/>
-                        </a:rPr>
-                        <a:t>第 2 步 exp</a:t>
-                      </a:r>
-                    </a:p>
-                  </a:txBody>
-                  <a:tcPr marL="36576" marR="36576" marT="9144" marB="9144">
-                    <a:solidFill>
-                      <a:srgbClr val="1F4E79"/>
-                    </a:solidFill>
-                  </a:tcPr>
-                </a:tc>
-              </a:tr>
-              <a:tr h="329184">
-                <a:tc>
-                  <a:txBody>
-                    <a:bodyPr/>
-                    <a:lstStyle/>
-                    <a:p>
-                      <a:pPr algn="ctr"/>
-                      <a:r>
-                        <a:rPr sz="1500" b="0">
-                          <a:solidFill>
-                            <a:srgbClr val="202020"/>
-                          </a:solidFill>
-                          <a:latin typeface="Consolas"/>
-                        </a:rPr>
-                        <a:t>2980.9580</a:t>
-                      </a:r>
-                    </a:p>
-                  </a:txBody>
-                  <a:tcPr marL="36576" marR="36576" marT="9144" marB="9144">
-                    <a:solidFill>
-                      <a:srgbClr val="FFFFFF"/>
-                    </a:solidFill>
-                  </a:tcPr>
-                </a:tc>
-              </a:tr>
-              <a:tr h="329184">
-                <a:tc>
-                  <a:txBody>
-                    <a:bodyPr/>
-                    <a:lstStyle/>
-                    <a:p>
-                      <a:pPr algn="ctr"/>
-                      <a:r>
-                        <a:rPr sz="1500" b="0">
-                          <a:solidFill>
-                            <a:srgbClr val="202020"/>
-                          </a:solidFill>
-                          <a:latin typeface="Consolas"/>
-                        </a:rPr>
-                        <a:t>54.5982</a:t>
-                      </a:r>
-                    </a:p>
-                  </a:txBody>
-                  <a:tcPr marL="36576" marR="36576" marT="9144" marB="9144">
-                    <a:solidFill>
-                      <a:srgbClr val="FFFFFF"/>
-                    </a:solidFill>
-                  </a:tcPr>
-                </a:tc>
-              </a:tr>
-              <a:tr h="329184">
-                <a:tc>
-                  <a:txBody>
-                    <a:bodyPr/>
-                    <a:lstStyle/>
-                    <a:p>
-                      <a:pPr algn="ctr"/>
-                      <a:r>
-                        <a:rPr sz="1500" b="0">
-                          <a:solidFill>
-                            <a:srgbClr val="202020"/>
-                          </a:solidFill>
-                          <a:latin typeface="Consolas"/>
-                        </a:rPr>
-                        <a:t>1.0000</a:t>
-                      </a:r>
-                    </a:p>
-                  </a:txBody>
-                  <a:tcPr marL="36576" marR="36576" marT="9144" marB="9144">
-                    <a:solidFill>
-                      <a:srgbClr val="FFFFFF"/>
-                    </a:solidFill>
-                  </a:tcPr>
-                </a:tc>
-              </a:tr>
-            </a:tbl>
-          </a:graphicData>
-        </a:graphic>
-      </p:graphicFrame>
-      <p:sp>
-        <p:nvSpPr>
-          <p:cNvPr id="12" name="Rectangle 11"/>
-          <p:cNvSpPr/>
-          <p:nvPr/>
-        </p:nvSpPr>
-        <p:spPr>
-          <a:xfrm>
-            <a:off x="8138160" y="2240280"/>
-            <a:ext cx="1737360" cy="1316736"/>
-          </a:xfrm>
-          <a:prstGeom prst="rect">
-            <a:avLst/>
-          </a:prstGeom>
-          <a:solidFill>
-            <a:srgbClr val="DAE6F2"/>
-          </a:solidFill>
-          <a:ln>
-            <a:solidFill>
-              <a:srgbClr val="D0D7DE"/>
-            </a:solidFill>
-          </a:ln>
-          <a:effectLst/>
-        </p:spPr>
-        <p:style>
-          <a:lnRef idx="1">
-            <a:schemeClr val="accent1"/>
-          </a:lnRef>
-          <a:fillRef idx="3">
-            <a:schemeClr val="accent1"/>
-          </a:fillRef>
-          <a:effectRef idx="2">
-            <a:schemeClr val="accent1"/>
-          </a:effectRef>
-          <a:fontRef idx="minor">
-            <a:schemeClr val="lt1"/>
-          </a:fontRef>
-        </p:style>
-        <p:txBody>
-          <a:bodyPr rtlCol="0" anchor="ctr" wrap="square"/>
-          <a:lstStyle/>
-          <a:p>
-            <a:pPr algn="ctr"/>
-            <a:r>
-              <a:rPr sz="1700" b="1">
-                <a:solidFill>
-                  <a:srgbClr val="1F4E79"/>
-                </a:solidFill>
-                <a:latin typeface="Microsoft JhengHei"/>
-              </a:rPr>
-              <a:t>第 3 步 加總</a:t>
-            </a:r>
-          </a:p>
-          <a:p>
-            <a:pPr algn="ctr"/>
-            <a:r>
-              <a:rPr sz="1700" b="1">
-                <a:solidFill>
-                  <a:srgbClr val="1F4E79"/>
-                </a:solidFill>
-                <a:latin typeface="Microsoft JhengHei"/>
-              </a:rPr>
-              <a:t>3036.5561</a:t>
-            </a:r>
-          </a:p>
-        </p:txBody>
-      </p:sp>
-      <p:graphicFrame>
-        <p:nvGraphicFramePr>
-          <p:cNvPr id="13" name="Table 12"/>
-          <p:cNvGraphicFramePr>
-            <a:graphicFrameLocks noGrp="1"/>
-          </p:cNvGraphicFramePr>
-          <p:nvPr/>
-        </p:nvGraphicFramePr>
-        <p:xfrm>
-          <a:off x="10012680" y="2240280"/>
-          <a:ext cx="1783080" cy="1316736"/>
-        </p:xfrm>
-        <a:graphic>
-          <a:graphicData uri="http://schemas.openxmlformats.org/drawingml/2006/table">
-            <a:tbl>
-              <a:tblPr bandRow="1">
-                <a:tableStyleId>{5C22544A-7EE6-4342-B048-85BDC9FD1C3A}</a:tableStyleId>
-              </a:tblPr>
-              <a:tblGrid>
-                <a:gridCol w="1783080"/>
-              </a:tblGrid>
-              <a:tr h="329184">
-                <a:tc>
-                  <a:txBody>
-                    <a:bodyPr/>
-                    <a:lstStyle/>
-                    <a:p>
-                      <a:pPr algn="ctr"/>
-                      <a:r>
-                        <a:rPr sz="1500" b="1">
-                          <a:solidFill>
-                            <a:srgbClr val="FFFFFF"/>
-                          </a:solidFill>
-                          <a:latin typeface="Microsoft JhengHei"/>
-                        </a:rPr>
-                        <a:t>第 4 步 p</a:t>
-                      </a:r>
-                    </a:p>
-                  </a:txBody>
-                  <a:tcPr marL="36576" marR="36576" marT="9144" marB="9144">
-                    <a:solidFill>
-                      <a:srgbClr val="1F4E79"/>
-                    </a:solidFill>
-                  </a:tcPr>
-                </a:tc>
-              </a:tr>
-              <a:tr h="329184">
-                <a:tc>
-                  <a:txBody>
-                    <a:bodyPr/>
-                    <a:lstStyle/>
-                    <a:p>
-                      <a:pPr algn="ctr"/>
-                      <a:r>
-                        <a:rPr sz="1500" b="0">
-                          <a:solidFill>
-                            <a:srgbClr val="202020"/>
-                          </a:solidFill>
-                          <a:latin typeface="Consolas"/>
-                        </a:rPr>
-                        <a:t>0.9817</a:t>
-                      </a:r>
-                    </a:p>
-                  </a:txBody>
-                  <a:tcPr marL="36576" marR="36576" marT="9144" marB="9144">
-                    <a:solidFill>
-                      <a:srgbClr val="FFFFFF"/>
-                    </a:solidFill>
-                  </a:tcPr>
-                </a:tc>
-              </a:tr>
-              <a:tr h="329184">
-                <a:tc>
-                  <a:txBody>
-                    <a:bodyPr/>
-                    <a:lstStyle/>
-                    <a:p>
-                      <a:pPr algn="ctr"/>
-                      <a:r>
-                        <a:rPr sz="1500" b="0">
-                          <a:solidFill>
-                            <a:srgbClr val="202020"/>
-                          </a:solidFill>
-                          <a:latin typeface="Consolas"/>
-                        </a:rPr>
-                        <a:t>0.0180</a:t>
-                      </a:r>
-                    </a:p>
-                  </a:txBody>
-                  <a:tcPr marL="36576" marR="36576" marT="9144" marB="9144">
-                    <a:solidFill>
-                      <a:srgbClr val="FFF3CD"/>
-                    </a:solidFill>
-                  </a:tcPr>
-                </a:tc>
-              </a:tr>
-              <a:tr h="329184">
-                <a:tc>
-                  <a:txBody>
-                    <a:bodyPr/>
-                    <a:lstStyle/>
-                    <a:p>
-                      <a:pPr algn="ctr"/>
-                      <a:r>
-                        <a:rPr sz="1500" b="0">
-                          <a:solidFill>
-                            <a:srgbClr val="202020"/>
-                          </a:solidFill>
-                          <a:latin typeface="Consolas"/>
-                        </a:rPr>
-                        <a:t>0.0003</a:t>
-                      </a:r>
-                    </a:p>
-                  </a:txBody>
-                  <a:tcPr marL="36576" marR="36576" marT="9144" marB="9144">
-                    <a:solidFill>
-                      <a:srgbClr val="FFF3CD"/>
-                    </a:solidFill>
-                  </a:tcPr>
-                </a:tc>
-              </a:tr>
-            </a:tbl>
-          </a:graphicData>
-        </a:graphic>
-      </p:graphicFrame>
-      <p:sp>
-        <p:nvSpPr>
-          <p:cNvPr id="14" name="Rectangle 13"/>
-          <p:cNvSpPr/>
-          <p:nvPr/>
-        </p:nvSpPr>
-        <p:spPr>
-          <a:xfrm>
-            <a:off x="731520" y="3931920"/>
-            <a:ext cx="10881360" cy="1051560"/>
-          </a:xfrm>
-          <a:prstGeom prst="rect">
-            <a:avLst/>
-          </a:prstGeom>
-          <a:solidFill>
-            <a:srgbClr val="FFF3CD"/>
-          </a:solidFill>
-          <a:ln>
-            <a:solidFill>
-              <a:srgbClr val="D0D7DE"/>
-            </a:solidFill>
-          </a:ln>
-          <a:effectLst/>
-        </p:spPr>
-        <p:style>
-          <a:lnRef idx="1">
-            <a:schemeClr val="accent1"/>
-          </a:lnRef>
-          <a:fillRef idx="3">
-            <a:schemeClr val="accent1"/>
-          </a:fillRef>
-          <a:effectRef idx="2">
-            <a:schemeClr val="accent1"/>
-          </a:effectRef>
-          <a:fontRef idx="minor">
-            <a:schemeClr val="lt1"/>
-          </a:fontRef>
-        </p:style>
-        <p:txBody>
-          <a:bodyPr rtlCol="0" anchor="ctr" wrap="square"/>
-          <a:lstStyle/>
-          <a:p>
-            <a:pPr algn="just"/>
-            <a:r>
-              <a:rPr sz="1800" b="1">
-                <a:solidFill>
-                  <a:srgbClr val="C03030"/>
-                </a:solidFill>
-                <a:latin typeface="Microsoft JhengHei"/>
-              </a:rPr>
-              <a:t>3 和 7 的機率是 0.0180 與 0.0003。「這個 2 比較像 3、不像 7」的資訊雖然存在，</a:t>
-            </a:r>
-          </a:p>
-          <a:p>
-            <a:pPr algn="just"/>
-            <a:r>
-              <a:rPr sz="1800" b="1">
-                <a:solidFill>
-                  <a:srgbClr val="C03030"/>
-                </a:solidFill>
-                <a:latin typeface="Microsoft JhengHei"/>
-              </a:rPr>
-              <a:t>對交叉熵代價函數卻幾乎沒有影響。</a:t>
-            </a:r>
-          </a:p>
-        </p:txBody>
-      </p:sp>
-      <p:sp>
-        <p:nvSpPr>
-          <p:cNvPr id="15" name="TextBox 14"/>
-          <p:cNvSpPr txBox="1"/>
-          <p:nvPr/>
-        </p:nvSpPr>
-        <p:spPr>
-          <a:xfrm>
-            <a:off x="731520" y="5166360"/>
-            <a:ext cx="10881360" cy="914400"/>
-          </a:xfrm>
-          <a:prstGeom prst="rect">
-            <a:avLst/>
-          </a:prstGeom>
-          <a:noFill/>
-        </p:spPr>
-        <p:txBody>
-          <a:bodyPr wrap="square">
-            <a:spAutoFit/>
-          </a:bodyPr>
-          <a:lstStyle/>
-          <a:p>
-            <a:pPr algn="just"/>
-            <a:r>
-              <a:rPr sz="1700" b="0">
-                <a:solidFill>
-                  <a:srgbClr val="59636E"/>
-                </a:solidFill>
-                <a:latin typeface="Microsoft JhengHei"/>
-              </a:rPr>
-              <a:t>核對：exp(8) = 2980.9580，exp(4) = 54.5982，exp(0) = 1，三者相加 3036.5561。</a:t>
-            </a:r>
-          </a:p>
-        </p:txBody>
-      </p:sp>
-    </p:spTree>
-  </p:cSld>
-  <p:clrMapOvr>
-    <a:masterClrMapping/>
-  </p:clrMapOvr>
-  <p:timing>
-    <p:tnLst>
-      <p:par>
-        <p:cTn id="1" dur="indefinite" restart="never" nodeType="tmRoot">
-          <p:childTnLst>
-            <p:seq concurrent="1" nextAc="seek">
-              <p:cTn id="2" dur="indefinite" nodeType="mainSeq">
-                <p:childTnLst>
-                  <p:par>
-                    <p:cTn id="3" fill="hold">
-                      <p:stCondLst>
-                        <p:cond delay="indefinite"/>
-                      </p:stCondLst>
-                      <p:childTnLst>
-                        <p:par>
-                          <p:cTn id="4" fill="hold">
-                            <p:stCondLst>
-                              <p:cond delay="0"/>
-                            </p:stCondLst>
-                            <p:childTnLst>
-                              <p:par>
-                                <p:cTn id="5" presetID="1" presetClass="entr" presetSubtype="0" fill="hold" grpId="0" nodeType="clickEffect">
-                                  <p:stCondLst>
-                                    <p:cond delay="0"/>
-                                  </p:stCondLst>
-                                  <p:childTnLst>
-                                    <p:set>
-                                      <p:cBhvr>
-                                        <p:cTn id="6" dur="1" fill="hold">
-                                          <p:stCondLst>
-                                            <p:cond delay="0"/>
-                                          </p:stCondLst>
-                                        </p:cTn>
-                                        <p:tgtEl>
-                                          <p:spTgt spid="6"/>
-                                        </p:tgtEl>
-                                        <p:attrNameLst>
-                                          <p:attrName>style.visibility</p:attrName>
-                                        </p:attrNameLst>
-                                      </p:cBhvr>
-                                      <p:to>
-                                        <p:strVal val="visible"/>
-                                      </p:to>
-                                    </p:set>
-                                  </p:childTnLst>
-                                </p:cTn>
-                              </p:par>
-                            </p:childTnLst>
-                          </p:cTn>
-                        </p:par>
-                      </p:childTnLst>
-                    </p:cTn>
-                  </p:par>
-                  <p:par>
-                    <p:cTn id="7" fill="hold">
-                      <p:stCondLst>
-                        <p:cond delay="indefinite"/>
-                      </p:stCondLst>
-                      <p:childTnLst>
-                        <p:par>
-                          <p:cTn id="8" fill="hold">
-                            <p:stCondLst>
-                              <p:cond delay="0"/>
-                            </p:stCondLst>
-                            <p:childTnLst>
-                              <p:par>
-                                <p:cTn id="9" presetID="1" presetClass="entr" presetSubtype="0" fill="hold" grpId="0" nodeType="clickEffect">
-                                  <p:stCondLst>
-                                    <p:cond delay="0"/>
-                                  </p:stCondLst>
-                                  <p:childTnLst>
-                                    <p:set>
-                                      <p:cBhvr>
-                                        <p:cTn id="10" dur="1" fill="hold">
-                                          <p:stCondLst>
-                                            <p:cond delay="0"/>
-                                          </p:stCondLst>
-                                        </p:cTn>
-                                        <p:tgtEl>
-                                          <p:spTgt spid="7"/>
-                                        </p:tgtEl>
-                                        <p:attrNameLst>
-                                          <p:attrName>style.visibility</p:attrName>
-                                        </p:attrNameLst>
-                                      </p:cBhvr>
-                                      <p:to>
-                                        <p:strVal val="visible"/>
-                                      </p:to>
-                                    </p:set>
-                                  </p:childTnLst>
-                                </p:cTn>
-                              </p:par>
-                            </p:childTnLst>
-                          </p:cTn>
-                        </p:par>
-                      </p:childTnLst>
-                    </p:cTn>
-                  </p:par>
-                  <p:par>
-                    <p:cTn id="11" fill="hold">
-                      <p:stCondLst>
-                        <p:cond delay="indefinite"/>
-                      </p:stCondLst>
-                      <p:childTnLst>
-                        <p:par>
-                          <p:cTn id="12" fill="hold">
-                            <p:stCondLst>
-                              <p:cond delay="0"/>
-                            </p:stCondLst>
-                            <p:childTnLst>
-                              <p:par>
-                                <p:cTn id="13" presetID="1" presetClass="entr" presetSubtype="0" fill="hold" grpId="0" nodeType="clickEffect">
-                                  <p:stCondLst>
-                                    <p:cond delay="0"/>
-                                  </p:stCondLst>
-                                  <p:childTnLst>
-                                    <p:set>
-                                      <p:cBhvr>
-                                        <p:cTn id="14" dur="1" fill="hold">
-                                          <p:stCondLst>
-                                            <p:cond delay="0"/>
-                                          </p:stCondLst>
-                                        </p:cTn>
-                                        <p:tgtEl>
-                                          <p:spTgt spid="8"/>
-                                        </p:tgtEl>
-                                        <p:attrNameLst>
-                                          <p:attrName>style.visibility</p:attrName>
-                                        </p:attrNameLst>
-                                      </p:cBhvr>
-                                      <p:to>
-                                        <p:strVal val="visible"/>
-                                      </p:to>
-                                    </p:set>
-                                  </p:childTnLst>
-                                </p:cTn>
-                              </p:par>
-                            </p:childTnLst>
-                          </p:cTn>
-                        </p:par>
-                      </p:childTnLst>
-                    </p:cTn>
-                  </p:par>
-                  <p:par>
-                    <p:cTn id="15" fill="hold">
-                      <p:stCondLst>
-                        <p:cond delay="indefinite"/>
-                      </p:stCondLst>
-                      <p:childTnLst>
-                        <p:par>
-                          <p:cTn id="16" fill="hold">
-                            <p:stCondLst>
-                              <p:cond delay="0"/>
-                            </p:stCondLst>
-                            <p:childTnLst>
-                              <p:par>
-                                <p:cTn id="17" presetID="1" presetClass="entr" presetSubtype="0" fill="hold" grpId="0" nodeType="clickEffect">
-                                  <p:stCondLst>
-                                    <p:cond delay="0"/>
-                                  </p:stCondLst>
-                                  <p:childTnLst>
-                                    <p:set>
-                                      <p:cBhvr>
-                                        <p:cTn id="18" dur="1" fill="hold">
-                                          <p:stCondLst>
-                                            <p:cond delay="0"/>
-                                          </p:stCondLst>
-                                        </p:cTn>
-                                        <p:tgtEl>
-                                          <p:spTgt spid="9"/>
-                                        </p:tgtEl>
-                                        <p:attrNameLst>
-                                          <p:attrName>style.visibility</p:attrName>
-                                        </p:attrNameLst>
-                                      </p:cBhvr>
-                                      <p:to>
-                                        <p:strVal val="visible"/>
-                                      </p:to>
-                                    </p:set>
-                                  </p:childTnLst>
-                                </p:cTn>
-                              </p:par>
-                            </p:childTnLst>
-                          </p:cTn>
-                        </p:par>
-                      </p:childTnLst>
-                    </p:cTn>
-                  </p:par>
-                  <p:par>
-                    <p:cTn id="19" fill="hold">
-                      <p:stCondLst>
-                        <p:cond delay="indefinite"/>
-                      </p:stCondLst>
-                      <p:childTnLst>
-                        <p:par>
-                          <p:cTn id="20" fill="hold">
-                            <p:stCondLst>
-                              <p:cond delay="0"/>
-                            </p:stCondLst>
-                            <p:childTnLst>
-                              <p:par>
-                                <p:cTn id="21" presetID="1" presetClass="entr" presetSubtype="0" fill="hold" grpId="0" nodeType="clickEffect">
-                                  <p:stCondLst>
-                                    <p:cond delay="0"/>
-                                  </p:stCondLst>
-                                  <p:childTnLst>
-                                    <p:set>
-                                      <p:cBhvr>
-                                        <p:cTn id="22" dur="1" fill="hold">
-                                          <p:stCondLst>
-                                            <p:cond delay="0"/>
-                                          </p:stCondLst>
-                                        </p:cTn>
-                                        <p:tgtEl>
-                                          <p:spTgt spid="10"/>
-                                        </p:tgtEl>
-                                        <p:attrNameLst>
-                                          <p:attrName>style.visibility</p:attrName>
-                                        </p:attrNameLst>
-                                      </p:cBhvr>
-                                      <p:to>
-                                        <p:strVal val="visible"/>
-                                      </p:to>
-                                    </p:set>
-                                  </p:childTnLst>
-                                </p:cTn>
-                              </p:par>
-                            </p:childTnLst>
-                          </p:cTn>
-                        </p:par>
-                      </p:childTnLst>
-                    </p:cTn>
-                  </p:par>
-                  <p:par>
-                    <p:cTn id="23" fill="hold">
-                      <p:stCondLst>
-                        <p:cond delay="indefinite"/>
-                      </p:stCondLst>
-                      <p:childTnLst>
-                        <p:par>
-                          <p:cTn id="24" fill="hold">
-                            <p:stCondLst>
-                              <p:cond delay="0"/>
-                            </p:stCondLst>
-                            <p:childTnLst>
-                              <p:par>
-                                <p:cTn id="25" presetID="1" presetClass="entr" presetSubtype="0" fill="hold" grpId="0" nodeType="clickEffect">
-                                  <p:stCondLst>
-                                    <p:cond delay="0"/>
-                                  </p:stCondLst>
-                                  <p:childTnLst>
-                                    <p:set>
-                                      <p:cBhvr>
-                                        <p:cTn id="26" dur="1" fill="hold">
-                                          <p:stCondLst>
-                                            <p:cond delay="0"/>
-                                          </p:stCondLst>
-                                        </p:cTn>
-                                        <p:tgtEl>
-                                          <p:spTgt spid="11"/>
-                                        </p:tgtEl>
-                                        <p:attrNameLst>
-                                          <p:attrName>style.visibility</p:attrName>
-                                        </p:attrNameLst>
-                                      </p:cBhvr>
-                                      <p:to>
-                                        <p:strVal val="visible"/>
-                                      </p:to>
-                                    </p:set>
-                                  </p:childTnLst>
-                                </p:cTn>
-                              </p:par>
-                            </p:childTnLst>
-                          </p:cTn>
-                        </p:par>
-                      </p:childTnLst>
-                    </p:cTn>
-                  </p:par>
-                  <p:par>
-                    <p:cTn id="27" fill="hold">
-                      <p:stCondLst>
-                        <p:cond delay="indefinite"/>
-                      </p:stCondLst>
-                      <p:childTnLst>
-                        <p:par>
-                          <p:cTn id="28" fill="hold">
-                            <p:stCondLst>
-                              <p:cond delay="0"/>
-                            </p:stCondLst>
-                            <p:childTnLst>
-                              <p:par>
-                                <p:cTn id="29" presetID="1" presetClass="entr" presetSubtype="0" fill="hold" grpId="0" nodeType="clickEffect">
-                                  <p:stCondLst>
-                                    <p:cond delay="0"/>
-                                  </p:stCondLst>
-                                  <p:childTnLst>
-                                    <p:set>
-                                      <p:cBhvr>
-                                        <p:cTn id="30" dur="1" fill="hold">
-                                          <p:stCondLst>
-                                            <p:cond delay="0"/>
-                                          </p:stCondLst>
-                                        </p:cTn>
-                                        <p:tgtEl>
-                                          <p:spTgt spid="12"/>
-                                        </p:tgtEl>
-                                        <p:attrNameLst>
-                                          <p:attrName>style.visibility</p:attrName>
-                                        </p:attrNameLst>
-                                      </p:cBhvr>
-                                      <p:to>
-                                        <p:strVal val="visible"/>
-                                      </p:to>
-                                    </p:set>
-                                  </p:childTnLst>
-                                </p:cTn>
-                              </p:par>
-                            </p:childTnLst>
-                          </p:cTn>
-                        </p:par>
-                      </p:childTnLst>
-                    </p:cTn>
-                  </p:par>
-                  <p:par>
-                    <p:cTn id="31" fill="hold">
-                      <p:stCondLst>
-                        <p:cond delay="indefinite"/>
-                      </p:stCondLst>
-                      <p:childTnLst>
-                        <p:par>
-                          <p:cTn id="32" fill="hold">
-                            <p:stCondLst>
-                              <p:cond delay="0"/>
-                            </p:stCondLst>
-                            <p:childTnLst>
-                              <p:par>
-                                <p:cTn id="33" presetID="1" presetClass="entr" presetSubtype="0" fill="hold" grpId="0" nodeType="clickEffect">
-                                  <p:stCondLst>
-                                    <p:cond delay="0"/>
-                                  </p:stCondLst>
-                                  <p:childTnLst>
-                                    <p:set>
-                                      <p:cBhvr>
-                                        <p:cTn id="34" dur="1" fill="hold">
-                                          <p:stCondLst>
-                                            <p:cond delay="0"/>
-                                          </p:stCondLst>
-                                        </p:cTn>
-                                        <p:tgtEl>
-                                          <p:spTgt spid="13"/>
-                                        </p:tgtEl>
-                                        <p:attrNameLst>
-                                          <p:attrName>style.visibility</p:attrName>
-                                        </p:attrNameLst>
-                                      </p:cBhvr>
-                                      <p:to>
-                                        <p:strVal val="visible"/>
-                                      </p:to>
-                                    </p:set>
-                                  </p:childTnLst>
-                                </p:cTn>
-                              </p:par>
-                            </p:childTnLst>
-                          </p:cTn>
-                        </p:par>
-                      </p:childTnLst>
-                    </p:cTn>
-                  </p:par>
-                  <p:par>
-                    <p:cTn id="35" fill="hold">
-                      <p:stCondLst>
-                        <p:cond delay="indefinite"/>
-                      </p:stCondLst>
-                      <p:childTnLst>
-                        <p:par>
-                          <p:cTn id="36" fill="hold">
-                            <p:stCondLst>
-                              <p:cond delay="0"/>
-                            </p:stCondLst>
-                            <p:childTnLst>
-                              <p:par>
-                                <p:cTn id="37" presetID="1" presetClass="entr" presetSubtype="0" fill="hold" grpId="0" nodeType="clickEffect">
-                                  <p:stCondLst>
-                                    <p:cond delay="0"/>
-                                  </p:stCondLst>
-                                  <p:childTnLst>
-                                    <p:set>
-                                      <p:cBhvr>
-                                        <p:cTn id="38" dur="1" fill="hold">
-                                          <p:stCondLst>
-                                            <p:cond delay="0"/>
-                                          </p:stCondLst>
-                                        </p:cTn>
-                                        <p:tgtEl>
-                                          <p:spTgt spid="14"/>
-                                        </p:tgtEl>
-                                        <p:attrNameLst>
-                                          <p:attrName>style.visibility</p:attrName>
-                                        </p:attrNameLst>
-                                      </p:cBhvr>
-                                      <p:to>
-                                        <p:strVal val="visible"/>
-                                      </p:to>
-                                    </p:set>
-                                  </p:childTnLst>
-                                </p:cTn>
-                              </p:par>
-                            </p:childTnLst>
-                          </p:cTn>
-                        </p:par>
-                      </p:childTnLst>
-                    </p:cTn>
-                  </p:par>
-                  <p:par>
-                    <p:cTn id="39" fill="hold">
-                      <p:stCondLst>
-                        <p:cond delay="indefinite"/>
-                      </p:stCondLst>
-                      <p:childTnLst>
-                        <p:par>
-                          <p:cTn id="40" fill="hold">
-                            <p:stCondLst>
-                              <p:cond delay="0"/>
-                            </p:stCondLst>
-                            <p:childTnLst>
-                              <p:par>
-                                <p:cTn id="41" presetID="1" presetClass="entr" presetSubtype="0" fill="hold" grpId="0" nodeType="clickEffect">
-                                  <p:stCondLst>
-                                    <p:cond delay="0"/>
-                                  </p:stCondLst>
-                                  <p:childTnLst>
-                                    <p:set>
-                                      <p:cBhvr>
-                                        <p:cTn id="42" dur="1" fill="hold">
-                                          <p:stCondLst>
-                                            <p:cond delay="0"/>
-                                          </p:stCondLst>
-                                        </p:cTn>
-                                        <p:tgtEl>
-                                          <p:spTgt spid="15"/>
-                                        </p:tgtEl>
-                                        <p:attrNameLst>
-                                          <p:attrName>style.visibility</p:attrName>
-                                        </p:attrNameLst>
-                                      </p:cBhvr>
-                                      <p:to>
-                                        <p:strVal val="visible"/>
-                                      </p:to>
-                                    </p:set>
-                                  </p:childTnLst>
-                                </p:cTn>
-                              </p:par>
-                            </p:childTnLst>
-                          </p:cTn>
-                        </p:par>
-                      </p:childTnLst>
-                    </p:cTn>
-                  </p:par>
-                </p:childTnLst>
-              </p:cTn>
-              <p:prevCondLst>
-                <p:cond evt="onPrev" delay="0">
-                  <p:tgtEl>
-                    <p:sldTgt/>
-                  </p:tgtEl>
-                </p:cond>
-              </p:prevCondLst>
-              <p:nextCondLst>
-                <p:cond evt="onNext" delay="0">
-                  <p:tgtEl>
-                    <p:sldTgt/>
-                  </p:tgtEl>
-                </p:cond>
-              </p:nextCondLst>
-            </p:seq>
-          </p:childTnLst>
-        </p:cTn>
-      </p:par>
-    </p:tnLst>
-    <p:bldLst>
-      <p:bldP spid="6" grpId="0" animBg="1"/>
-      <p:bldP spid="7" grpId="0" animBg="1"/>
-      <p:bldGraphic spid="8" grpId="0">
-        <p:bldAsOne/>
-      </p:bldGraphic>
-      <p:bldGraphic spid="9" grpId="0">
-        <p:bldAsOne/>
-      </p:bldGraphic>
-      <p:bldGraphic spid="10" grpId="0">
-        <p:bldAsOne/>
-      </p:bldGraphic>
-      <p:bldGraphic spid="11" grpId="0">
-        <p:bldAsOne/>
-      </p:bldGraphic>
-      <p:bldP spid="12" grpId="0" animBg="1"/>
-      <p:bldGraphic spid="13" grpId="0">
-        <p:bldAsOne/>
-      </p:bldGraphic>
-      <p:bldP spid="14" grpId="0" animBg="1"/>
-      <p:bldP spid="15" grpId="0" animBg="1"/>
-    </p:bldLst>
-  </p:timing>
-</p:sld>
-</file>
-
 <file path=ppt/slides/slide9.xml><?xml version="1.0" encoding="utf-8"?>
 <p:sld xmlns:a="http://schemas.openxmlformats.org/drawingml/2006/main" xmlns:p="http://schemas.openxmlformats.org/presentationml/2006/main" xmlns:r="http://schemas.openxmlformats.org/officeDocument/2006/relationships">
   <p:cSld>
@@ -26058,7 +27336,7 @@
                 </a:solidFill>
                 <a:latin typeface="Microsoft JhengHei"/>
               </a:rPr>
-              <a:t>二、帶溫度的 softmax：T = 4</a:t>
+              <a:t>二、帶溫度的 softmax：T = 1</a:t>
             </a:r>
           </a:p>
         </p:txBody>
@@ -26093,7 +27371,7 @@
                 </a:solidFill>
                 <a:latin typeface="Microsoft JhengHei"/>
               </a:rPr>
-              <a:t>同一組笨重模型的 logit，改用較高的溫度</a:t>
+              <a:t>論文式 (1)；T 通常設為 1</a:t>
             </a:r>
           </a:p>
         </p:txBody>
@@ -26152,7 +27430,7 @@
                 </a:solidFill>
                 <a:latin typeface="Microsoft JhengHei"/>
               </a:rPr>
-              <a:t>T 取較大的值，類別上的機率分布較軟：</a:t>
+              <a:t>softmax 把每個類別算出的 logit z_i 與其他 logit 比較，</a:t>
             </a:r>
           </a:p>
           <a:p>
@@ -26164,7 +27442,7 @@
                 </a:solidFill>
                 <a:latin typeface="Microsoft JhengHei"/>
               </a:rPr>
-              <a:t>第 1 步把 logit 之間的差距縮小為四分之一。</a:t>
+              <a:t>轉成機率 q_i；T 是溫度。</a:t>
             </a:r>
           </a:p>
         </p:txBody>
@@ -26479,7 +27757,7 @@
                           </a:solidFill>
                           <a:latin typeface="Consolas"/>
                         </a:rPr>
-                        <a:t>2.0000</a:t>
+                        <a:t>8.0000</a:t>
                       </a:r>
                     </a:p>
                   </a:txBody>
@@ -26504,7 +27782,7 @@
                           </a:solidFill>
                           <a:latin typeface="Consolas"/>
                         </a:rPr>
-                        <a:t>1.0000</a:t>
+                        <a:t>4.0000</a:t>
                       </a:r>
                     </a:p>
                   </a:txBody>
@@ -26604,7 +27882,7 @@
                           </a:solidFill>
                           <a:latin typeface="Consolas"/>
                         </a:rPr>
-                        <a:t>7.3891</a:t>
+                        <a:t>2980.9580</a:t>
                       </a:r>
                     </a:p>
                   </a:txBody>
@@ -26629,7 +27907,7 @@
                           </a:solidFill>
                           <a:latin typeface="Consolas"/>
                         </a:rPr>
-                        <a:t>2.7183</a:t>
+                        <a:t>54.5982</a:t>
                       </a:r>
                     </a:p>
                   </a:txBody>
@@ -26731,7 +28009,7 @@
                 </a:solidFill>
                 <a:latin typeface="Microsoft JhengHei"/>
               </a:rPr>
-              <a:t>11.1073</a:t>
+              <a:t>3036.5561</a:t>
             </a:r>
           </a:p>
         </p:txBody>
@@ -26796,7 +28074,7 @@
                           </a:solidFill>
                           <a:latin typeface="Consolas"/>
                         </a:rPr>
-                        <a:t>0.6652</a:t>
+                        <a:t>0.9817</a:t>
                       </a:r>
                     </a:p>
                   </a:txBody>
@@ -26821,7 +28099,7 @@
                           </a:solidFill>
                           <a:latin typeface="Consolas"/>
                         </a:rPr>
-                        <a:t>0.2447</a:t>
+                        <a:t>0.0180</a:t>
                       </a:r>
                     </a:p>
                   </a:txBody>
@@ -26846,7 +28124,7 @@
                           </a:solidFill>
                           <a:latin typeface="Consolas"/>
                         </a:rPr>
-                        <a:t>0.0900</a:t>
+                        <a:t>0.0003</a:t>
                       </a:r>
                     </a:p>
                   </a:txBody>
@@ -26876,7 +28154,7 @@
             <a:avLst/>
           </a:prstGeom>
           <a:solidFill>
-            <a:srgbClr val="DCF0E4"/>
+            <a:srgbClr val="FFF3CD"/>
           </a:solidFill>
           <a:ln>
             <a:solidFill>
@@ -26907,11 +28185,11 @@
             <a:r>
               <a:rPr sz="1800" b="1">
                 <a:solidFill>
-                  <a:srgbClr val="1E7A45"/>
+                  <a:srgbClr val="C03030"/>
                 </a:solidFill>
                 <a:latin typeface="Microsoft JhengHei"/>
               </a:rPr>
-              <a:t>3 和 7 的機率變成 0.2447 與 0.0900。</a:t>
+              <a:t>3 和 7 的機率是 0.0180 與 0.0003。「這個 2 比較像 3、不像 7」的資訊雖然存在，</a:t>
             </a:r>
           </a:p>
           <a:p>
@@ -26919,11 +28197,11 @@
             <a:r>
               <a:rPr sz="1800" b="1">
                 <a:solidFill>
-                  <a:srgbClr val="1E7A45"/>
+                  <a:srgbClr val="C03030"/>
                 </a:solidFill>
                 <a:latin typeface="Microsoft JhengHei"/>
               </a:rPr>
-              <a:t>在這個溫度下，錯誤類別的相對機率大到足以影響學習。</a:t>
+              <a:t>對交叉熵代價函數卻幾乎沒有影響。</a:t>
             </a:r>
           </a:p>
         </p:txBody>
@@ -26958,7 +28236,7 @@
                 </a:solidFill>
                 <a:latin typeface="Microsoft JhengHei"/>
               </a:rPr>
-              <a:t>核對：exp(2) = 7.3891，exp(1) = 2.7183，exp(0) = 1，三者相加 11.1073。</a:t>
+              <a:t>核對：exp(8) = 2980.9580，exp(4) = 54.5982，exp(0) = 1，三者相加 3036.5561。</a:t>
             </a:r>
           </a:p>
         </p:txBody>

--- a/topics/knowledge-distillation/課外主題_知識蒸餾.pptx
+++ b/topics/knowledge-distillation/課外主題_知識蒸餾.pptx
@@ -27,6 +27,7 @@
     <p:sldId id="275" r:id="rId26"/>
     <p:sldId id="276" r:id="rId27"/>
     <p:sldId id="277" r:id="rId28"/>
+    <p:sldId id="278" r:id="rId29"/>
   </p:sldIdLst>
   <p:sldSz cx="12191695" cy="6858000" type="screen4x3"/>
   <p:notesSz cx="6858000" cy="9144000"/>
@@ -3586,7 +3587,7 @@
                 </a:solidFill>
                 <a:latin typeface="Microsoft JhengHei"/>
               </a:rPr>
-              <a:t>二、帶溫度的 softmax：T = 4</a:t>
+              <a:t>二、帶溫度的 softmax：T = 1</a:t>
             </a:r>
           </a:p>
         </p:txBody>
@@ -3621,7 +3622,7 @@
                 </a:solidFill>
                 <a:latin typeface="Microsoft JhengHei"/>
               </a:rPr>
-              <a:t>同一組笨重模型的 logit，改用較高的溫度</a:t>
+              <a:t>論文式 (1)；T 通常設為 1</a:t>
             </a:r>
           </a:p>
         </p:txBody>
@@ -3680,7 +3681,7 @@
                 </a:solidFill>
                 <a:latin typeface="Microsoft JhengHei"/>
               </a:rPr>
-              <a:t>T 取較大的值，類別上的機率分布較軟：</a:t>
+              <a:t>softmax 把每個類別算出的 logit z_i 與其他 logit 比較，</a:t>
             </a:r>
           </a:p>
           <a:p>
@@ -3692,7 +3693,7 @@
                 </a:solidFill>
                 <a:latin typeface="Microsoft JhengHei"/>
               </a:rPr>
-              <a:t>第 1 步把 logit 之間的差距縮小為四分之一。</a:t>
+              <a:t>轉成機率 q_i；T 是溫度。</a:t>
             </a:r>
           </a:p>
         </p:txBody>
@@ -4007,7 +4008,7 @@
                           </a:solidFill>
                           <a:latin typeface="Consolas"/>
                         </a:rPr>
-                        <a:t>2.0000</a:t>
+                        <a:t>8.0000</a:t>
                       </a:r>
                     </a:p>
                   </a:txBody>
@@ -4032,7 +4033,7 @@
                           </a:solidFill>
                           <a:latin typeface="Consolas"/>
                         </a:rPr>
-                        <a:t>1.0000</a:t>
+                        <a:t>4.0000</a:t>
                       </a:r>
                     </a:p>
                   </a:txBody>
@@ -4132,7 +4133,7 @@
                           </a:solidFill>
                           <a:latin typeface="Consolas"/>
                         </a:rPr>
-                        <a:t>7.3891</a:t>
+                        <a:t>2980.9580</a:t>
                       </a:r>
                     </a:p>
                   </a:txBody>
@@ -4157,7 +4158,7 @@
                           </a:solidFill>
                           <a:latin typeface="Consolas"/>
                         </a:rPr>
-                        <a:t>2.7183</a:t>
+                        <a:t>54.5982</a:t>
                       </a:r>
                     </a:p>
                   </a:txBody>
@@ -4259,7 +4260,7 @@
                 </a:solidFill>
                 <a:latin typeface="Microsoft JhengHei"/>
               </a:rPr>
-              <a:t>11.1073</a:t>
+              <a:t>3036.5561</a:t>
             </a:r>
           </a:p>
         </p:txBody>
@@ -4324,7 +4325,7 @@
                           </a:solidFill>
                           <a:latin typeface="Consolas"/>
                         </a:rPr>
-                        <a:t>0.6652</a:t>
+                        <a:t>0.9817</a:t>
                       </a:r>
                     </a:p>
                   </a:txBody>
@@ -4349,7 +4350,7 @@
                           </a:solidFill>
                           <a:latin typeface="Consolas"/>
                         </a:rPr>
-                        <a:t>0.2447</a:t>
+                        <a:t>0.0180</a:t>
                       </a:r>
                     </a:p>
                   </a:txBody>
@@ -4374,7 +4375,7 @@
                           </a:solidFill>
                           <a:latin typeface="Consolas"/>
                         </a:rPr>
-                        <a:t>0.0900</a:t>
+                        <a:t>0.0003</a:t>
                       </a:r>
                     </a:p>
                   </a:txBody>
@@ -4404,7 +4405,7 @@
             <a:avLst/>
           </a:prstGeom>
           <a:solidFill>
-            <a:srgbClr val="DCF0E4"/>
+            <a:srgbClr val="FFF3CD"/>
           </a:solidFill>
           <a:ln>
             <a:solidFill>
@@ -4435,11 +4436,11 @@
             <a:r>
               <a:rPr sz="1800" b="1">
                 <a:solidFill>
-                  <a:srgbClr val="1E7A45"/>
+                  <a:srgbClr val="C03030"/>
                 </a:solidFill>
                 <a:latin typeface="Microsoft JhengHei"/>
               </a:rPr>
-              <a:t>3 和 7 的機率變成 0.2447 與 0.0900。</a:t>
+              <a:t>3 和 7 的機率是 0.0180 與 0.0003。「這個 2 比較像 3、不像 7」的資訊雖然存在，</a:t>
             </a:r>
           </a:p>
           <a:p>
@@ -4447,11 +4448,11 @@
             <a:r>
               <a:rPr sz="1800" b="1">
                 <a:solidFill>
-                  <a:srgbClr val="1E7A45"/>
+                  <a:srgbClr val="C03030"/>
                 </a:solidFill>
                 <a:latin typeface="Microsoft JhengHei"/>
               </a:rPr>
-              <a:t>在這個溫度下，錯誤類別的相對機率大到足以影響學習。</a:t>
+              <a:t>對交叉熵代價函數卻幾乎沒有影響。</a:t>
             </a:r>
           </a:p>
         </p:txBody>
@@ -4486,7 +4487,7 @@
                 </a:solidFill>
                 <a:latin typeface="Microsoft JhengHei"/>
               </a:rPr>
-              <a:t>核對：exp(2) = 7.3891，exp(1) = 2.7183，exp(0) = 1，三者相加 11.1073。</a:t>
+              <a:t>核對：exp(8) = 2980.9580，exp(4) = 54.5982，exp(0) = 1，三者相加 3036.5561。</a:t>
             </a:r>
           </a:p>
         </p:txBody>
@@ -5129,6 +5130,1549 @@
                 </a:solidFill>
                 <a:latin typeface="Microsoft JhengHei"/>
               </a:rPr>
+              <a:t>二、帶溫度的 softmax：T = 4</a:t>
+            </a:r>
+          </a:p>
+        </p:txBody>
+      </p:sp>
+      <p:sp>
+        <p:nvSpPr>
+          <p:cNvPr id="5" name="TextBox 4"/>
+          <p:cNvSpPr txBox="1"/>
+          <p:nvPr/>
+        </p:nvSpPr>
+        <p:spPr>
+          <a:xfrm>
+            <a:off x="411480" y="521207"/>
+            <a:ext cx="11338560" cy="301752"/>
+          </a:xfrm>
+          <a:prstGeom prst="rect">
+            <a:avLst/>
+          </a:prstGeom>
+          <a:noFill/>
+        </p:spPr>
+        <p:txBody>
+          <a:bodyPr wrap="square">
+            <a:spAutoFit/>
+          </a:bodyPr>
+          <a:lstStyle/>
+          <a:p>
+            <a:pPr algn="just"/>
+            <a:r>
+              <a:rPr sz="1300" b="0">
+                <a:solidFill>
+                  <a:srgbClr val="C7D6E5"/>
+                </a:solidFill>
+                <a:latin typeface="Microsoft JhengHei"/>
+              </a:rPr>
+              <a:t>同一組笨重模型的 logit，改用較高的溫度</a:t>
+            </a:r>
+          </a:p>
+        </p:txBody>
+      </p:sp>
+      <p:pic>
+        <p:nvPicPr>
+          <p:cNvPr id="6" name="Picture 5" descr="m_softmax.png"/>
+          <p:cNvPicPr>
+            <a:picLocks noChangeAspect="1"/>
+          </p:cNvPicPr>
+          <p:nvPr/>
+        </p:nvPicPr>
+        <p:blipFill>
+          <a:blip r:embed="rId2"/>
+          <a:stretch>
+            <a:fillRect/>
+          </a:stretch>
+        </p:blipFill>
+        <p:spPr>
+          <a:xfrm>
+            <a:off x="822960" y="1051560"/>
+            <a:ext cx="1867014" cy="868680"/>
+          </a:xfrm>
+          <a:prstGeom prst="rect">
+            <a:avLst/>
+          </a:prstGeom>
+        </p:spPr>
+      </p:pic>
+      <p:sp>
+        <p:nvSpPr>
+          <p:cNvPr id="7" name="TextBox 6"/>
+          <p:cNvSpPr txBox="1"/>
+          <p:nvPr/>
+        </p:nvSpPr>
+        <p:spPr>
+          <a:xfrm>
+            <a:off x="4754880" y="1097280"/>
+            <a:ext cx="6949440" cy="914400"/>
+          </a:xfrm>
+          <a:prstGeom prst="rect">
+            <a:avLst/>
+          </a:prstGeom>
+          <a:noFill/>
+        </p:spPr>
+        <p:txBody>
+          <a:bodyPr wrap="square">
+            <a:spAutoFit/>
+          </a:bodyPr>
+          <a:lstStyle/>
+          <a:p>
+            <a:pPr algn="just"/>
+            <a:r>
+              <a:rPr sz="1800" b="0">
+                <a:solidFill>
+                  <a:srgbClr val="202020"/>
+                </a:solidFill>
+                <a:latin typeface="Microsoft JhengHei"/>
+              </a:rPr>
+              <a:t>T 取較大的值，類別上的機率分布較軟：</a:t>
+            </a:r>
+          </a:p>
+          <a:p>
+            <a:pPr algn="just"/>
+            <a:r>
+              <a:rPr sz="1800" b="0">
+                <a:solidFill>
+                  <a:srgbClr val="202020"/>
+                </a:solidFill>
+                <a:latin typeface="Microsoft JhengHei"/>
+              </a:rPr>
+              <a:t>第 1 步把 logit 之間的差距縮小為四分之一。</a:t>
+            </a:r>
+          </a:p>
+        </p:txBody>
+      </p:sp>
+      <p:graphicFrame>
+        <p:nvGraphicFramePr>
+          <p:cNvPr id="8" name="Table 7"/>
+          <p:cNvGraphicFramePr>
+            <a:graphicFrameLocks noGrp="1"/>
+          </p:cNvGraphicFramePr>
+          <p:nvPr/>
+        </p:nvGraphicFramePr>
+        <p:xfrm>
+          <a:off x="731520" y="2240280"/>
+          <a:ext cx="1188720" cy="1316736"/>
+        </p:xfrm>
+        <a:graphic>
+          <a:graphicData uri="http://schemas.openxmlformats.org/drawingml/2006/table">
+            <a:tbl>
+              <a:tblPr bandRow="1">
+                <a:tableStyleId>{5C22544A-7EE6-4342-B048-85BDC9FD1C3A}</a:tableStyleId>
+              </a:tblPr>
+              <a:tblGrid>
+                <a:gridCol w="1188720"/>
+              </a:tblGrid>
+              <a:tr h="329184">
+                <a:tc>
+                  <a:txBody>
+                    <a:bodyPr/>
+                    <a:lstStyle/>
+                    <a:p>
+                      <a:pPr algn="ctr"/>
+                      <a:r>
+                        <a:rPr sz="1500" b="1">
+                          <a:solidFill>
+                            <a:srgbClr val="FFFFFF"/>
+                          </a:solidFill>
+                          <a:latin typeface="Microsoft JhengHei"/>
+                        </a:rPr>
+                        <a:t>類別</a:t>
+                      </a:r>
+                    </a:p>
+                  </a:txBody>
+                  <a:tcPr marL="36576" marR="36576" marT="9144" marB="9144">
+                    <a:solidFill>
+                      <a:srgbClr val="1F4E79"/>
+                    </a:solidFill>
+                  </a:tcPr>
+                </a:tc>
+              </a:tr>
+              <a:tr h="329184">
+                <a:tc>
+                  <a:txBody>
+                    <a:bodyPr/>
+                    <a:lstStyle/>
+                    <a:p>
+                      <a:pPr algn="ctr"/>
+                      <a:r>
+                        <a:rPr sz="1500" b="0">
+                          <a:solidFill>
+                            <a:srgbClr val="202020"/>
+                          </a:solidFill>
+                          <a:latin typeface="Consolas"/>
+                        </a:rPr>
+                        <a:t>2</a:t>
+                      </a:r>
+                    </a:p>
+                  </a:txBody>
+                  <a:tcPr marL="36576" marR="36576" marT="9144" marB="9144">
+                    <a:solidFill>
+                      <a:srgbClr val="FFFFFF"/>
+                    </a:solidFill>
+                  </a:tcPr>
+                </a:tc>
+              </a:tr>
+              <a:tr h="329184">
+                <a:tc>
+                  <a:txBody>
+                    <a:bodyPr/>
+                    <a:lstStyle/>
+                    <a:p>
+                      <a:pPr algn="ctr"/>
+                      <a:r>
+                        <a:rPr sz="1500" b="0">
+                          <a:solidFill>
+                            <a:srgbClr val="202020"/>
+                          </a:solidFill>
+                          <a:latin typeface="Consolas"/>
+                        </a:rPr>
+                        <a:t>3</a:t>
+                      </a:r>
+                    </a:p>
+                  </a:txBody>
+                  <a:tcPr marL="36576" marR="36576" marT="9144" marB="9144">
+                    <a:solidFill>
+                      <a:srgbClr val="FFFFFF"/>
+                    </a:solidFill>
+                  </a:tcPr>
+                </a:tc>
+              </a:tr>
+              <a:tr h="329184">
+                <a:tc>
+                  <a:txBody>
+                    <a:bodyPr/>
+                    <a:lstStyle/>
+                    <a:p>
+                      <a:pPr algn="ctr"/>
+                      <a:r>
+                        <a:rPr sz="1500" b="0">
+                          <a:solidFill>
+                            <a:srgbClr val="202020"/>
+                          </a:solidFill>
+                          <a:latin typeface="Consolas"/>
+                        </a:rPr>
+                        <a:t>7</a:t>
+                      </a:r>
+                    </a:p>
+                  </a:txBody>
+                  <a:tcPr marL="36576" marR="36576" marT="9144" marB="9144">
+                    <a:solidFill>
+                      <a:srgbClr val="FFFFFF"/>
+                    </a:solidFill>
+                  </a:tcPr>
+                </a:tc>
+              </a:tr>
+            </a:tbl>
+          </a:graphicData>
+        </a:graphic>
+      </p:graphicFrame>
+      <p:graphicFrame>
+        <p:nvGraphicFramePr>
+          <p:cNvPr id="9" name="Table 8"/>
+          <p:cNvGraphicFramePr>
+            <a:graphicFrameLocks noGrp="1"/>
+          </p:cNvGraphicFramePr>
+          <p:nvPr/>
+        </p:nvGraphicFramePr>
+        <p:xfrm>
+          <a:off x="2057400" y="2240280"/>
+          <a:ext cx="1463040" cy="1316736"/>
+        </p:xfrm>
+        <a:graphic>
+          <a:graphicData uri="http://schemas.openxmlformats.org/drawingml/2006/table">
+            <a:tbl>
+              <a:tblPr bandRow="1">
+                <a:tableStyleId>{5C22544A-7EE6-4342-B048-85BDC9FD1C3A}</a:tableStyleId>
+              </a:tblPr>
+              <a:tblGrid>
+                <a:gridCol w="1463040"/>
+              </a:tblGrid>
+              <a:tr h="329184">
+                <a:tc>
+                  <a:txBody>
+                    <a:bodyPr/>
+                    <a:lstStyle/>
+                    <a:p>
+                      <a:pPr algn="ctr"/>
+                      <a:r>
+                        <a:rPr sz="1500" b="1">
+                          <a:solidFill>
+                            <a:srgbClr val="FFFFFF"/>
+                          </a:solidFill>
+                          <a:latin typeface="Microsoft JhengHei"/>
+                        </a:rPr>
+                        <a:t>v</a:t>
+                      </a:r>
+                    </a:p>
+                  </a:txBody>
+                  <a:tcPr marL="36576" marR="36576" marT="9144" marB="9144">
+                    <a:solidFill>
+                      <a:srgbClr val="1F4E79"/>
+                    </a:solidFill>
+                  </a:tcPr>
+                </a:tc>
+              </a:tr>
+              <a:tr h="329184">
+                <a:tc>
+                  <a:txBody>
+                    <a:bodyPr/>
+                    <a:lstStyle/>
+                    <a:p>
+                      <a:pPr algn="ctr"/>
+                      <a:r>
+                        <a:rPr sz="1500" b="0">
+                          <a:solidFill>
+                            <a:srgbClr val="202020"/>
+                          </a:solidFill>
+                          <a:latin typeface="Consolas"/>
+                        </a:rPr>
+                        <a:t>8</a:t>
+                      </a:r>
+                    </a:p>
+                  </a:txBody>
+                  <a:tcPr marL="36576" marR="36576" marT="9144" marB="9144">
+                    <a:solidFill>
+                      <a:srgbClr val="FFFFFF"/>
+                    </a:solidFill>
+                  </a:tcPr>
+                </a:tc>
+              </a:tr>
+              <a:tr h="329184">
+                <a:tc>
+                  <a:txBody>
+                    <a:bodyPr/>
+                    <a:lstStyle/>
+                    <a:p>
+                      <a:pPr algn="ctr"/>
+                      <a:r>
+                        <a:rPr sz="1500" b="0">
+                          <a:solidFill>
+                            <a:srgbClr val="202020"/>
+                          </a:solidFill>
+                          <a:latin typeface="Consolas"/>
+                        </a:rPr>
+                        <a:t>4</a:t>
+                      </a:r>
+                    </a:p>
+                  </a:txBody>
+                  <a:tcPr marL="36576" marR="36576" marT="9144" marB="9144">
+                    <a:solidFill>
+                      <a:srgbClr val="FFFFFF"/>
+                    </a:solidFill>
+                  </a:tcPr>
+                </a:tc>
+              </a:tr>
+              <a:tr h="329184">
+                <a:tc>
+                  <a:txBody>
+                    <a:bodyPr/>
+                    <a:lstStyle/>
+                    <a:p>
+                      <a:pPr algn="ctr"/>
+                      <a:r>
+                        <a:rPr sz="1500" b="0">
+                          <a:solidFill>
+                            <a:srgbClr val="202020"/>
+                          </a:solidFill>
+                          <a:latin typeface="Consolas"/>
+                        </a:rPr>
+                        <a:t>0</a:t>
+                      </a:r>
+                    </a:p>
+                  </a:txBody>
+                  <a:tcPr marL="36576" marR="36576" marT="9144" marB="9144">
+                    <a:solidFill>
+                      <a:srgbClr val="FFFFFF"/>
+                    </a:solidFill>
+                  </a:tcPr>
+                </a:tc>
+              </a:tr>
+            </a:tbl>
+          </a:graphicData>
+        </a:graphic>
+      </p:graphicFrame>
+      <p:graphicFrame>
+        <p:nvGraphicFramePr>
+          <p:cNvPr id="10" name="Table 9"/>
+          <p:cNvGraphicFramePr>
+            <a:graphicFrameLocks noGrp="1"/>
+          </p:cNvGraphicFramePr>
+          <p:nvPr/>
+        </p:nvGraphicFramePr>
+        <p:xfrm>
+          <a:off x="3657600" y="2240280"/>
+          <a:ext cx="1965960" cy="1316736"/>
+        </p:xfrm>
+        <a:graphic>
+          <a:graphicData uri="http://schemas.openxmlformats.org/drawingml/2006/table">
+            <a:tbl>
+              <a:tblPr bandRow="1">
+                <a:tableStyleId>{5C22544A-7EE6-4342-B048-85BDC9FD1C3A}</a:tableStyleId>
+              </a:tblPr>
+              <a:tblGrid>
+                <a:gridCol w="1965960"/>
+              </a:tblGrid>
+              <a:tr h="329184">
+                <a:tc>
+                  <a:txBody>
+                    <a:bodyPr/>
+                    <a:lstStyle/>
+                    <a:p>
+                      <a:pPr algn="ctr"/>
+                      <a:r>
+                        <a:rPr sz="1500" b="1">
+                          <a:solidFill>
+                            <a:srgbClr val="FFFFFF"/>
+                          </a:solidFill>
+                          <a:latin typeface="Microsoft JhengHei"/>
+                        </a:rPr>
+                        <a:t>第 1 步 ÷ T</a:t>
+                      </a:r>
+                    </a:p>
+                  </a:txBody>
+                  <a:tcPr marL="36576" marR="36576" marT="9144" marB="9144">
+                    <a:solidFill>
+                      <a:srgbClr val="1F4E79"/>
+                    </a:solidFill>
+                  </a:tcPr>
+                </a:tc>
+              </a:tr>
+              <a:tr h="329184">
+                <a:tc>
+                  <a:txBody>
+                    <a:bodyPr/>
+                    <a:lstStyle/>
+                    <a:p>
+                      <a:pPr algn="ctr"/>
+                      <a:r>
+                        <a:rPr sz="1500" b="0">
+                          <a:solidFill>
+                            <a:srgbClr val="202020"/>
+                          </a:solidFill>
+                          <a:latin typeface="Consolas"/>
+                        </a:rPr>
+                        <a:t>2.0000</a:t>
+                      </a:r>
+                    </a:p>
+                  </a:txBody>
+                  <a:tcPr marL="36576" marR="36576" marT="9144" marB="9144">
+                    <a:solidFill>
+                      <a:srgbClr val="FFFFFF"/>
+                    </a:solidFill>
+                  </a:tcPr>
+                </a:tc>
+              </a:tr>
+              <a:tr h="329184">
+                <a:tc>
+                  <a:txBody>
+                    <a:bodyPr/>
+                    <a:lstStyle/>
+                    <a:p>
+                      <a:pPr algn="ctr"/>
+                      <a:r>
+                        <a:rPr sz="1500" b="0">
+                          <a:solidFill>
+                            <a:srgbClr val="202020"/>
+                          </a:solidFill>
+                          <a:latin typeface="Consolas"/>
+                        </a:rPr>
+                        <a:t>1.0000</a:t>
+                      </a:r>
+                    </a:p>
+                  </a:txBody>
+                  <a:tcPr marL="36576" marR="36576" marT="9144" marB="9144">
+                    <a:solidFill>
+                      <a:srgbClr val="FFFFFF"/>
+                    </a:solidFill>
+                  </a:tcPr>
+                </a:tc>
+              </a:tr>
+              <a:tr h="329184">
+                <a:tc>
+                  <a:txBody>
+                    <a:bodyPr/>
+                    <a:lstStyle/>
+                    <a:p>
+                      <a:pPr algn="ctr"/>
+                      <a:r>
+                        <a:rPr sz="1500" b="0">
+                          <a:solidFill>
+                            <a:srgbClr val="202020"/>
+                          </a:solidFill>
+                          <a:latin typeface="Consolas"/>
+                        </a:rPr>
+                        <a:t>0.0000</a:t>
+                      </a:r>
+                    </a:p>
+                  </a:txBody>
+                  <a:tcPr marL="36576" marR="36576" marT="9144" marB="9144">
+                    <a:solidFill>
+                      <a:srgbClr val="FFFFFF"/>
+                    </a:solidFill>
+                  </a:tcPr>
+                </a:tc>
+              </a:tr>
+            </a:tbl>
+          </a:graphicData>
+        </a:graphic>
+      </p:graphicFrame>
+      <p:graphicFrame>
+        <p:nvGraphicFramePr>
+          <p:cNvPr id="11" name="Table 10"/>
+          <p:cNvGraphicFramePr>
+            <a:graphicFrameLocks noGrp="1"/>
+          </p:cNvGraphicFramePr>
+          <p:nvPr/>
+        </p:nvGraphicFramePr>
+        <p:xfrm>
+          <a:off x="5760720" y="2240280"/>
+          <a:ext cx="2240279" cy="1316736"/>
+        </p:xfrm>
+        <a:graphic>
+          <a:graphicData uri="http://schemas.openxmlformats.org/drawingml/2006/table">
+            <a:tbl>
+              <a:tblPr bandRow="1">
+                <a:tableStyleId>{5C22544A-7EE6-4342-B048-85BDC9FD1C3A}</a:tableStyleId>
+              </a:tblPr>
+              <a:tblGrid>
+                <a:gridCol w="2240279"/>
+              </a:tblGrid>
+              <a:tr h="329184">
+                <a:tc>
+                  <a:txBody>
+                    <a:bodyPr/>
+                    <a:lstStyle/>
+                    <a:p>
+                      <a:pPr algn="ctr"/>
+                      <a:r>
+                        <a:rPr sz="1500" b="1">
+                          <a:solidFill>
+                            <a:srgbClr val="FFFFFF"/>
+                          </a:solidFill>
+                          <a:latin typeface="Microsoft JhengHei"/>
+                        </a:rPr>
+                        <a:t>第 2 步 exp</a:t>
+                      </a:r>
+                    </a:p>
+                  </a:txBody>
+                  <a:tcPr marL="36576" marR="36576" marT="9144" marB="9144">
+                    <a:solidFill>
+                      <a:srgbClr val="1F4E79"/>
+                    </a:solidFill>
+                  </a:tcPr>
+                </a:tc>
+              </a:tr>
+              <a:tr h="329184">
+                <a:tc>
+                  <a:txBody>
+                    <a:bodyPr/>
+                    <a:lstStyle/>
+                    <a:p>
+                      <a:pPr algn="ctr"/>
+                      <a:r>
+                        <a:rPr sz="1500" b="0">
+                          <a:solidFill>
+                            <a:srgbClr val="202020"/>
+                          </a:solidFill>
+                          <a:latin typeface="Consolas"/>
+                        </a:rPr>
+                        <a:t>7.3891</a:t>
+                      </a:r>
+                    </a:p>
+                  </a:txBody>
+                  <a:tcPr marL="36576" marR="36576" marT="9144" marB="9144">
+                    <a:solidFill>
+                      <a:srgbClr val="FFFFFF"/>
+                    </a:solidFill>
+                  </a:tcPr>
+                </a:tc>
+              </a:tr>
+              <a:tr h="329184">
+                <a:tc>
+                  <a:txBody>
+                    <a:bodyPr/>
+                    <a:lstStyle/>
+                    <a:p>
+                      <a:pPr algn="ctr"/>
+                      <a:r>
+                        <a:rPr sz="1500" b="0">
+                          <a:solidFill>
+                            <a:srgbClr val="202020"/>
+                          </a:solidFill>
+                          <a:latin typeface="Consolas"/>
+                        </a:rPr>
+                        <a:t>2.7183</a:t>
+                      </a:r>
+                    </a:p>
+                  </a:txBody>
+                  <a:tcPr marL="36576" marR="36576" marT="9144" marB="9144">
+                    <a:solidFill>
+                      <a:srgbClr val="FFFFFF"/>
+                    </a:solidFill>
+                  </a:tcPr>
+                </a:tc>
+              </a:tr>
+              <a:tr h="329184">
+                <a:tc>
+                  <a:txBody>
+                    <a:bodyPr/>
+                    <a:lstStyle/>
+                    <a:p>
+                      <a:pPr algn="ctr"/>
+                      <a:r>
+                        <a:rPr sz="1500" b="0">
+                          <a:solidFill>
+                            <a:srgbClr val="202020"/>
+                          </a:solidFill>
+                          <a:latin typeface="Consolas"/>
+                        </a:rPr>
+                        <a:t>1.0000</a:t>
+                      </a:r>
+                    </a:p>
+                  </a:txBody>
+                  <a:tcPr marL="36576" marR="36576" marT="9144" marB="9144">
+                    <a:solidFill>
+                      <a:srgbClr val="FFFFFF"/>
+                    </a:solidFill>
+                  </a:tcPr>
+                </a:tc>
+              </a:tr>
+            </a:tbl>
+          </a:graphicData>
+        </a:graphic>
+      </p:graphicFrame>
+      <p:sp>
+        <p:nvSpPr>
+          <p:cNvPr id="12" name="Rectangle 11"/>
+          <p:cNvSpPr/>
+          <p:nvPr/>
+        </p:nvSpPr>
+        <p:spPr>
+          <a:xfrm>
+            <a:off x="8138160" y="2240280"/>
+            <a:ext cx="1737360" cy="1316736"/>
+          </a:xfrm>
+          <a:prstGeom prst="rect">
+            <a:avLst/>
+          </a:prstGeom>
+          <a:solidFill>
+            <a:srgbClr val="DAE6F2"/>
+          </a:solidFill>
+          <a:ln>
+            <a:solidFill>
+              <a:srgbClr val="D0D7DE"/>
+            </a:solidFill>
+          </a:ln>
+          <a:effectLst/>
+        </p:spPr>
+        <p:style>
+          <a:lnRef idx="1">
+            <a:schemeClr val="accent1"/>
+          </a:lnRef>
+          <a:fillRef idx="3">
+            <a:schemeClr val="accent1"/>
+          </a:fillRef>
+          <a:effectRef idx="2">
+            <a:schemeClr val="accent1"/>
+          </a:effectRef>
+          <a:fontRef idx="minor">
+            <a:schemeClr val="lt1"/>
+          </a:fontRef>
+        </p:style>
+        <p:txBody>
+          <a:bodyPr rtlCol="0" anchor="ctr" wrap="square"/>
+          <a:lstStyle/>
+          <a:p>
+            <a:pPr algn="ctr"/>
+            <a:r>
+              <a:rPr sz="1700" b="1">
+                <a:solidFill>
+                  <a:srgbClr val="1F4E79"/>
+                </a:solidFill>
+                <a:latin typeface="Microsoft JhengHei"/>
+              </a:rPr>
+              <a:t>第 3 步 加總</a:t>
+            </a:r>
+          </a:p>
+          <a:p>
+            <a:pPr algn="ctr"/>
+            <a:r>
+              <a:rPr sz="1700" b="1">
+                <a:solidFill>
+                  <a:srgbClr val="1F4E79"/>
+                </a:solidFill>
+                <a:latin typeface="Microsoft JhengHei"/>
+              </a:rPr>
+              <a:t>11.1073</a:t>
+            </a:r>
+          </a:p>
+        </p:txBody>
+      </p:sp>
+      <p:graphicFrame>
+        <p:nvGraphicFramePr>
+          <p:cNvPr id="13" name="Table 12"/>
+          <p:cNvGraphicFramePr>
+            <a:graphicFrameLocks noGrp="1"/>
+          </p:cNvGraphicFramePr>
+          <p:nvPr/>
+        </p:nvGraphicFramePr>
+        <p:xfrm>
+          <a:off x="10012680" y="2240280"/>
+          <a:ext cx="1783080" cy="1316736"/>
+        </p:xfrm>
+        <a:graphic>
+          <a:graphicData uri="http://schemas.openxmlformats.org/drawingml/2006/table">
+            <a:tbl>
+              <a:tblPr bandRow="1">
+                <a:tableStyleId>{5C22544A-7EE6-4342-B048-85BDC9FD1C3A}</a:tableStyleId>
+              </a:tblPr>
+              <a:tblGrid>
+                <a:gridCol w="1783080"/>
+              </a:tblGrid>
+              <a:tr h="329184">
+                <a:tc>
+                  <a:txBody>
+                    <a:bodyPr/>
+                    <a:lstStyle/>
+                    <a:p>
+                      <a:pPr algn="ctr"/>
+                      <a:r>
+                        <a:rPr sz="1500" b="1">
+                          <a:solidFill>
+                            <a:srgbClr val="FFFFFF"/>
+                          </a:solidFill>
+                          <a:latin typeface="Microsoft JhengHei"/>
+                        </a:rPr>
+                        <a:t>第 4 步 p</a:t>
+                      </a:r>
+                    </a:p>
+                  </a:txBody>
+                  <a:tcPr marL="36576" marR="36576" marT="9144" marB="9144">
+                    <a:solidFill>
+                      <a:srgbClr val="1F4E79"/>
+                    </a:solidFill>
+                  </a:tcPr>
+                </a:tc>
+              </a:tr>
+              <a:tr h="329184">
+                <a:tc>
+                  <a:txBody>
+                    <a:bodyPr/>
+                    <a:lstStyle/>
+                    <a:p>
+                      <a:pPr algn="ctr"/>
+                      <a:r>
+                        <a:rPr sz="1500" b="0">
+                          <a:solidFill>
+                            <a:srgbClr val="202020"/>
+                          </a:solidFill>
+                          <a:latin typeface="Consolas"/>
+                        </a:rPr>
+                        <a:t>0.6652</a:t>
+                      </a:r>
+                    </a:p>
+                  </a:txBody>
+                  <a:tcPr marL="36576" marR="36576" marT="9144" marB="9144">
+                    <a:solidFill>
+                      <a:srgbClr val="FFFFFF"/>
+                    </a:solidFill>
+                  </a:tcPr>
+                </a:tc>
+              </a:tr>
+              <a:tr h="329184">
+                <a:tc>
+                  <a:txBody>
+                    <a:bodyPr/>
+                    <a:lstStyle/>
+                    <a:p>
+                      <a:pPr algn="ctr"/>
+                      <a:r>
+                        <a:rPr sz="1500" b="0">
+                          <a:solidFill>
+                            <a:srgbClr val="202020"/>
+                          </a:solidFill>
+                          <a:latin typeface="Consolas"/>
+                        </a:rPr>
+                        <a:t>0.2447</a:t>
+                      </a:r>
+                    </a:p>
+                  </a:txBody>
+                  <a:tcPr marL="36576" marR="36576" marT="9144" marB="9144">
+                    <a:solidFill>
+                      <a:srgbClr val="FFF3CD"/>
+                    </a:solidFill>
+                  </a:tcPr>
+                </a:tc>
+              </a:tr>
+              <a:tr h="329184">
+                <a:tc>
+                  <a:txBody>
+                    <a:bodyPr/>
+                    <a:lstStyle/>
+                    <a:p>
+                      <a:pPr algn="ctr"/>
+                      <a:r>
+                        <a:rPr sz="1500" b="0">
+                          <a:solidFill>
+                            <a:srgbClr val="202020"/>
+                          </a:solidFill>
+                          <a:latin typeface="Consolas"/>
+                        </a:rPr>
+                        <a:t>0.0900</a:t>
+                      </a:r>
+                    </a:p>
+                  </a:txBody>
+                  <a:tcPr marL="36576" marR="36576" marT="9144" marB="9144">
+                    <a:solidFill>
+                      <a:srgbClr val="FFF3CD"/>
+                    </a:solidFill>
+                  </a:tcPr>
+                </a:tc>
+              </a:tr>
+            </a:tbl>
+          </a:graphicData>
+        </a:graphic>
+      </p:graphicFrame>
+      <p:sp>
+        <p:nvSpPr>
+          <p:cNvPr id="14" name="Rectangle 13"/>
+          <p:cNvSpPr/>
+          <p:nvPr/>
+        </p:nvSpPr>
+        <p:spPr>
+          <a:xfrm>
+            <a:off x="731520" y="3931920"/>
+            <a:ext cx="10881360" cy="1051560"/>
+          </a:xfrm>
+          <a:prstGeom prst="rect">
+            <a:avLst/>
+          </a:prstGeom>
+          <a:solidFill>
+            <a:srgbClr val="DCF0E4"/>
+          </a:solidFill>
+          <a:ln>
+            <a:solidFill>
+              <a:srgbClr val="D0D7DE"/>
+            </a:solidFill>
+          </a:ln>
+          <a:effectLst/>
+        </p:spPr>
+        <p:style>
+          <a:lnRef idx="1">
+            <a:schemeClr val="accent1"/>
+          </a:lnRef>
+          <a:fillRef idx="3">
+            <a:schemeClr val="accent1"/>
+          </a:fillRef>
+          <a:effectRef idx="2">
+            <a:schemeClr val="accent1"/>
+          </a:effectRef>
+          <a:fontRef idx="minor">
+            <a:schemeClr val="lt1"/>
+          </a:fontRef>
+        </p:style>
+        <p:txBody>
+          <a:bodyPr rtlCol="0" anchor="ctr" wrap="square"/>
+          <a:lstStyle/>
+          <a:p>
+            <a:pPr algn="just"/>
+            <a:r>
+              <a:rPr sz="1800" b="1">
+                <a:solidFill>
+                  <a:srgbClr val="1E7A45"/>
+                </a:solidFill>
+                <a:latin typeface="Microsoft JhengHei"/>
+              </a:rPr>
+              <a:t>3 和 7 的機率變成 0.2447 與 0.0900。</a:t>
+            </a:r>
+          </a:p>
+          <a:p>
+            <a:pPr algn="just"/>
+            <a:r>
+              <a:rPr sz="1800" b="1">
+                <a:solidFill>
+                  <a:srgbClr val="1E7A45"/>
+                </a:solidFill>
+                <a:latin typeface="Microsoft JhengHei"/>
+              </a:rPr>
+              <a:t>在這個溫度下，錯誤類別的相對機率大到足以影響學習。</a:t>
+            </a:r>
+          </a:p>
+        </p:txBody>
+      </p:sp>
+      <p:sp>
+        <p:nvSpPr>
+          <p:cNvPr id="15" name="TextBox 14"/>
+          <p:cNvSpPr txBox="1"/>
+          <p:nvPr/>
+        </p:nvSpPr>
+        <p:spPr>
+          <a:xfrm>
+            <a:off x="731520" y="5166360"/>
+            <a:ext cx="10881360" cy="914400"/>
+          </a:xfrm>
+          <a:prstGeom prst="rect">
+            <a:avLst/>
+          </a:prstGeom>
+          <a:noFill/>
+        </p:spPr>
+        <p:txBody>
+          <a:bodyPr wrap="square">
+            <a:spAutoFit/>
+          </a:bodyPr>
+          <a:lstStyle/>
+          <a:p>
+            <a:pPr algn="just"/>
+            <a:r>
+              <a:rPr sz="1700" b="0">
+                <a:solidFill>
+                  <a:srgbClr val="59636E"/>
+                </a:solidFill>
+                <a:latin typeface="Microsoft JhengHei"/>
+              </a:rPr>
+              <a:t>核對：exp(2) = 7.3891，exp(1) = 2.7183，exp(0) = 1，三者相加 11.1073。</a:t>
+            </a:r>
+          </a:p>
+        </p:txBody>
+      </p:sp>
+    </p:spTree>
+  </p:cSld>
+  <p:clrMapOvr>
+    <a:masterClrMapping/>
+  </p:clrMapOvr>
+  <p:timing>
+    <p:tnLst>
+      <p:par>
+        <p:cTn id="1" dur="indefinite" restart="never" nodeType="tmRoot">
+          <p:childTnLst>
+            <p:seq concurrent="1" nextAc="seek">
+              <p:cTn id="2" dur="indefinite" nodeType="mainSeq">
+                <p:childTnLst>
+                  <p:par>
+                    <p:cTn id="3" fill="hold">
+                      <p:stCondLst>
+                        <p:cond delay="indefinite"/>
+                      </p:stCondLst>
+                      <p:childTnLst>
+                        <p:par>
+                          <p:cTn id="4" fill="hold">
+                            <p:stCondLst>
+                              <p:cond delay="0"/>
+                            </p:stCondLst>
+                            <p:childTnLst>
+                              <p:par>
+                                <p:cTn id="5" presetID="1" presetClass="entr" presetSubtype="0" fill="hold" grpId="0" nodeType="clickEffect">
+                                  <p:stCondLst>
+                                    <p:cond delay="0"/>
+                                  </p:stCondLst>
+                                  <p:childTnLst>
+                                    <p:set>
+                                      <p:cBhvr>
+                                        <p:cTn id="6" dur="1" fill="hold">
+                                          <p:stCondLst>
+                                            <p:cond delay="0"/>
+                                          </p:stCondLst>
+                                        </p:cTn>
+                                        <p:tgtEl>
+                                          <p:spTgt spid="6"/>
+                                        </p:tgtEl>
+                                        <p:attrNameLst>
+                                          <p:attrName>style.visibility</p:attrName>
+                                        </p:attrNameLst>
+                                      </p:cBhvr>
+                                      <p:to>
+                                        <p:strVal val="visible"/>
+                                      </p:to>
+                                    </p:set>
+                                  </p:childTnLst>
+                                </p:cTn>
+                              </p:par>
+                            </p:childTnLst>
+                          </p:cTn>
+                        </p:par>
+                      </p:childTnLst>
+                    </p:cTn>
+                  </p:par>
+                  <p:par>
+                    <p:cTn id="7" fill="hold">
+                      <p:stCondLst>
+                        <p:cond delay="indefinite"/>
+                      </p:stCondLst>
+                      <p:childTnLst>
+                        <p:par>
+                          <p:cTn id="8" fill="hold">
+                            <p:stCondLst>
+                              <p:cond delay="0"/>
+                            </p:stCondLst>
+                            <p:childTnLst>
+                              <p:par>
+                                <p:cTn id="9" presetID="1" presetClass="entr" presetSubtype="0" fill="hold" grpId="0" nodeType="clickEffect">
+                                  <p:stCondLst>
+                                    <p:cond delay="0"/>
+                                  </p:stCondLst>
+                                  <p:childTnLst>
+                                    <p:set>
+                                      <p:cBhvr>
+                                        <p:cTn id="10" dur="1" fill="hold">
+                                          <p:stCondLst>
+                                            <p:cond delay="0"/>
+                                          </p:stCondLst>
+                                        </p:cTn>
+                                        <p:tgtEl>
+                                          <p:spTgt spid="7"/>
+                                        </p:tgtEl>
+                                        <p:attrNameLst>
+                                          <p:attrName>style.visibility</p:attrName>
+                                        </p:attrNameLst>
+                                      </p:cBhvr>
+                                      <p:to>
+                                        <p:strVal val="visible"/>
+                                      </p:to>
+                                    </p:set>
+                                  </p:childTnLst>
+                                </p:cTn>
+                              </p:par>
+                            </p:childTnLst>
+                          </p:cTn>
+                        </p:par>
+                      </p:childTnLst>
+                    </p:cTn>
+                  </p:par>
+                  <p:par>
+                    <p:cTn id="11" fill="hold">
+                      <p:stCondLst>
+                        <p:cond delay="indefinite"/>
+                      </p:stCondLst>
+                      <p:childTnLst>
+                        <p:par>
+                          <p:cTn id="12" fill="hold">
+                            <p:stCondLst>
+                              <p:cond delay="0"/>
+                            </p:stCondLst>
+                            <p:childTnLst>
+                              <p:par>
+                                <p:cTn id="13" presetID="1" presetClass="entr" presetSubtype="0" fill="hold" grpId="0" nodeType="clickEffect">
+                                  <p:stCondLst>
+                                    <p:cond delay="0"/>
+                                  </p:stCondLst>
+                                  <p:childTnLst>
+                                    <p:set>
+                                      <p:cBhvr>
+                                        <p:cTn id="14" dur="1" fill="hold">
+                                          <p:stCondLst>
+                                            <p:cond delay="0"/>
+                                          </p:stCondLst>
+                                        </p:cTn>
+                                        <p:tgtEl>
+                                          <p:spTgt spid="8"/>
+                                        </p:tgtEl>
+                                        <p:attrNameLst>
+                                          <p:attrName>style.visibility</p:attrName>
+                                        </p:attrNameLst>
+                                      </p:cBhvr>
+                                      <p:to>
+                                        <p:strVal val="visible"/>
+                                      </p:to>
+                                    </p:set>
+                                  </p:childTnLst>
+                                </p:cTn>
+                              </p:par>
+                            </p:childTnLst>
+                          </p:cTn>
+                        </p:par>
+                      </p:childTnLst>
+                    </p:cTn>
+                  </p:par>
+                  <p:par>
+                    <p:cTn id="15" fill="hold">
+                      <p:stCondLst>
+                        <p:cond delay="indefinite"/>
+                      </p:stCondLst>
+                      <p:childTnLst>
+                        <p:par>
+                          <p:cTn id="16" fill="hold">
+                            <p:stCondLst>
+                              <p:cond delay="0"/>
+                            </p:stCondLst>
+                            <p:childTnLst>
+                              <p:par>
+                                <p:cTn id="17" presetID="1" presetClass="entr" presetSubtype="0" fill="hold" grpId="0" nodeType="clickEffect">
+                                  <p:stCondLst>
+                                    <p:cond delay="0"/>
+                                  </p:stCondLst>
+                                  <p:childTnLst>
+                                    <p:set>
+                                      <p:cBhvr>
+                                        <p:cTn id="18" dur="1" fill="hold">
+                                          <p:stCondLst>
+                                            <p:cond delay="0"/>
+                                          </p:stCondLst>
+                                        </p:cTn>
+                                        <p:tgtEl>
+                                          <p:spTgt spid="9"/>
+                                        </p:tgtEl>
+                                        <p:attrNameLst>
+                                          <p:attrName>style.visibility</p:attrName>
+                                        </p:attrNameLst>
+                                      </p:cBhvr>
+                                      <p:to>
+                                        <p:strVal val="visible"/>
+                                      </p:to>
+                                    </p:set>
+                                  </p:childTnLst>
+                                </p:cTn>
+                              </p:par>
+                            </p:childTnLst>
+                          </p:cTn>
+                        </p:par>
+                      </p:childTnLst>
+                    </p:cTn>
+                  </p:par>
+                  <p:par>
+                    <p:cTn id="19" fill="hold">
+                      <p:stCondLst>
+                        <p:cond delay="indefinite"/>
+                      </p:stCondLst>
+                      <p:childTnLst>
+                        <p:par>
+                          <p:cTn id="20" fill="hold">
+                            <p:stCondLst>
+                              <p:cond delay="0"/>
+                            </p:stCondLst>
+                            <p:childTnLst>
+                              <p:par>
+                                <p:cTn id="21" presetID="1" presetClass="entr" presetSubtype="0" fill="hold" grpId="0" nodeType="clickEffect">
+                                  <p:stCondLst>
+                                    <p:cond delay="0"/>
+                                  </p:stCondLst>
+                                  <p:childTnLst>
+                                    <p:set>
+                                      <p:cBhvr>
+                                        <p:cTn id="22" dur="1" fill="hold">
+                                          <p:stCondLst>
+                                            <p:cond delay="0"/>
+                                          </p:stCondLst>
+                                        </p:cTn>
+                                        <p:tgtEl>
+                                          <p:spTgt spid="10"/>
+                                        </p:tgtEl>
+                                        <p:attrNameLst>
+                                          <p:attrName>style.visibility</p:attrName>
+                                        </p:attrNameLst>
+                                      </p:cBhvr>
+                                      <p:to>
+                                        <p:strVal val="visible"/>
+                                      </p:to>
+                                    </p:set>
+                                  </p:childTnLst>
+                                </p:cTn>
+                              </p:par>
+                            </p:childTnLst>
+                          </p:cTn>
+                        </p:par>
+                      </p:childTnLst>
+                    </p:cTn>
+                  </p:par>
+                  <p:par>
+                    <p:cTn id="23" fill="hold">
+                      <p:stCondLst>
+                        <p:cond delay="indefinite"/>
+                      </p:stCondLst>
+                      <p:childTnLst>
+                        <p:par>
+                          <p:cTn id="24" fill="hold">
+                            <p:stCondLst>
+                              <p:cond delay="0"/>
+                            </p:stCondLst>
+                            <p:childTnLst>
+                              <p:par>
+                                <p:cTn id="25" presetID="1" presetClass="entr" presetSubtype="0" fill="hold" grpId="0" nodeType="clickEffect">
+                                  <p:stCondLst>
+                                    <p:cond delay="0"/>
+                                  </p:stCondLst>
+                                  <p:childTnLst>
+                                    <p:set>
+                                      <p:cBhvr>
+                                        <p:cTn id="26" dur="1" fill="hold">
+                                          <p:stCondLst>
+                                            <p:cond delay="0"/>
+                                          </p:stCondLst>
+                                        </p:cTn>
+                                        <p:tgtEl>
+                                          <p:spTgt spid="11"/>
+                                        </p:tgtEl>
+                                        <p:attrNameLst>
+                                          <p:attrName>style.visibility</p:attrName>
+                                        </p:attrNameLst>
+                                      </p:cBhvr>
+                                      <p:to>
+                                        <p:strVal val="visible"/>
+                                      </p:to>
+                                    </p:set>
+                                  </p:childTnLst>
+                                </p:cTn>
+                              </p:par>
+                            </p:childTnLst>
+                          </p:cTn>
+                        </p:par>
+                      </p:childTnLst>
+                    </p:cTn>
+                  </p:par>
+                  <p:par>
+                    <p:cTn id="27" fill="hold">
+                      <p:stCondLst>
+                        <p:cond delay="indefinite"/>
+                      </p:stCondLst>
+                      <p:childTnLst>
+                        <p:par>
+                          <p:cTn id="28" fill="hold">
+                            <p:stCondLst>
+                              <p:cond delay="0"/>
+                            </p:stCondLst>
+                            <p:childTnLst>
+                              <p:par>
+                                <p:cTn id="29" presetID="1" presetClass="entr" presetSubtype="0" fill="hold" grpId="0" nodeType="clickEffect">
+                                  <p:stCondLst>
+                                    <p:cond delay="0"/>
+                                  </p:stCondLst>
+                                  <p:childTnLst>
+                                    <p:set>
+                                      <p:cBhvr>
+                                        <p:cTn id="30" dur="1" fill="hold">
+                                          <p:stCondLst>
+                                            <p:cond delay="0"/>
+                                          </p:stCondLst>
+                                        </p:cTn>
+                                        <p:tgtEl>
+                                          <p:spTgt spid="12"/>
+                                        </p:tgtEl>
+                                        <p:attrNameLst>
+                                          <p:attrName>style.visibility</p:attrName>
+                                        </p:attrNameLst>
+                                      </p:cBhvr>
+                                      <p:to>
+                                        <p:strVal val="visible"/>
+                                      </p:to>
+                                    </p:set>
+                                  </p:childTnLst>
+                                </p:cTn>
+                              </p:par>
+                            </p:childTnLst>
+                          </p:cTn>
+                        </p:par>
+                      </p:childTnLst>
+                    </p:cTn>
+                  </p:par>
+                  <p:par>
+                    <p:cTn id="31" fill="hold">
+                      <p:stCondLst>
+                        <p:cond delay="indefinite"/>
+                      </p:stCondLst>
+                      <p:childTnLst>
+                        <p:par>
+                          <p:cTn id="32" fill="hold">
+                            <p:stCondLst>
+                              <p:cond delay="0"/>
+                            </p:stCondLst>
+                            <p:childTnLst>
+                              <p:par>
+                                <p:cTn id="33" presetID="1" presetClass="entr" presetSubtype="0" fill="hold" grpId="0" nodeType="clickEffect">
+                                  <p:stCondLst>
+                                    <p:cond delay="0"/>
+                                  </p:stCondLst>
+                                  <p:childTnLst>
+                                    <p:set>
+                                      <p:cBhvr>
+                                        <p:cTn id="34" dur="1" fill="hold">
+                                          <p:stCondLst>
+                                            <p:cond delay="0"/>
+                                          </p:stCondLst>
+                                        </p:cTn>
+                                        <p:tgtEl>
+                                          <p:spTgt spid="13"/>
+                                        </p:tgtEl>
+                                        <p:attrNameLst>
+                                          <p:attrName>style.visibility</p:attrName>
+                                        </p:attrNameLst>
+                                      </p:cBhvr>
+                                      <p:to>
+                                        <p:strVal val="visible"/>
+                                      </p:to>
+                                    </p:set>
+                                  </p:childTnLst>
+                                </p:cTn>
+                              </p:par>
+                            </p:childTnLst>
+                          </p:cTn>
+                        </p:par>
+                      </p:childTnLst>
+                    </p:cTn>
+                  </p:par>
+                  <p:par>
+                    <p:cTn id="35" fill="hold">
+                      <p:stCondLst>
+                        <p:cond delay="indefinite"/>
+                      </p:stCondLst>
+                      <p:childTnLst>
+                        <p:par>
+                          <p:cTn id="36" fill="hold">
+                            <p:stCondLst>
+                              <p:cond delay="0"/>
+                            </p:stCondLst>
+                            <p:childTnLst>
+                              <p:par>
+                                <p:cTn id="37" presetID="1" presetClass="entr" presetSubtype="0" fill="hold" grpId="0" nodeType="clickEffect">
+                                  <p:stCondLst>
+                                    <p:cond delay="0"/>
+                                  </p:stCondLst>
+                                  <p:childTnLst>
+                                    <p:set>
+                                      <p:cBhvr>
+                                        <p:cTn id="38" dur="1" fill="hold">
+                                          <p:stCondLst>
+                                            <p:cond delay="0"/>
+                                          </p:stCondLst>
+                                        </p:cTn>
+                                        <p:tgtEl>
+                                          <p:spTgt spid="14"/>
+                                        </p:tgtEl>
+                                        <p:attrNameLst>
+                                          <p:attrName>style.visibility</p:attrName>
+                                        </p:attrNameLst>
+                                      </p:cBhvr>
+                                      <p:to>
+                                        <p:strVal val="visible"/>
+                                      </p:to>
+                                    </p:set>
+                                  </p:childTnLst>
+                                </p:cTn>
+                              </p:par>
+                            </p:childTnLst>
+                          </p:cTn>
+                        </p:par>
+                      </p:childTnLst>
+                    </p:cTn>
+                  </p:par>
+                  <p:par>
+                    <p:cTn id="39" fill="hold">
+                      <p:stCondLst>
+                        <p:cond delay="indefinite"/>
+                      </p:stCondLst>
+                      <p:childTnLst>
+                        <p:par>
+                          <p:cTn id="40" fill="hold">
+                            <p:stCondLst>
+                              <p:cond delay="0"/>
+                            </p:stCondLst>
+                            <p:childTnLst>
+                              <p:par>
+                                <p:cTn id="41" presetID="1" presetClass="entr" presetSubtype="0" fill="hold" grpId="0" nodeType="clickEffect">
+                                  <p:stCondLst>
+                                    <p:cond delay="0"/>
+                                  </p:stCondLst>
+                                  <p:childTnLst>
+                                    <p:set>
+                                      <p:cBhvr>
+                                        <p:cTn id="42" dur="1" fill="hold">
+                                          <p:stCondLst>
+                                            <p:cond delay="0"/>
+                                          </p:stCondLst>
+                                        </p:cTn>
+                                        <p:tgtEl>
+                                          <p:spTgt spid="15"/>
+                                        </p:tgtEl>
+                                        <p:attrNameLst>
+                                          <p:attrName>style.visibility</p:attrName>
+                                        </p:attrNameLst>
+                                      </p:cBhvr>
+                                      <p:to>
+                                        <p:strVal val="visible"/>
+                                      </p:to>
+                                    </p:set>
+                                  </p:childTnLst>
+                                </p:cTn>
+                              </p:par>
+                            </p:childTnLst>
+                          </p:cTn>
+                        </p:par>
+                      </p:childTnLst>
+                    </p:cTn>
+                  </p:par>
+                </p:childTnLst>
+              </p:cTn>
+              <p:prevCondLst>
+                <p:cond evt="onPrev" delay="0">
+                  <p:tgtEl>
+                    <p:sldTgt/>
+                  </p:tgtEl>
+                </p:cond>
+              </p:prevCondLst>
+              <p:nextCondLst>
+                <p:cond evt="onNext" delay="0">
+                  <p:tgtEl>
+                    <p:sldTgt/>
+                  </p:tgtEl>
+                </p:cond>
+              </p:nextCondLst>
+            </p:seq>
+          </p:childTnLst>
+        </p:cTn>
+      </p:par>
+    </p:tnLst>
+    <p:bldLst>
+      <p:bldP spid="6" grpId="0" animBg="1"/>
+      <p:bldP spid="7" grpId="0" animBg="1"/>
+      <p:bldGraphic spid="8" grpId="0">
+        <p:bldAsOne/>
+      </p:bldGraphic>
+      <p:bldGraphic spid="9" grpId="0">
+        <p:bldAsOne/>
+      </p:bldGraphic>
+      <p:bldGraphic spid="10" grpId="0">
+        <p:bldAsOne/>
+      </p:bldGraphic>
+      <p:bldGraphic spid="11" grpId="0">
+        <p:bldAsOne/>
+      </p:bldGraphic>
+      <p:bldP spid="12" grpId="0" animBg="1"/>
+      <p:bldGraphic spid="13" grpId="0">
+        <p:bldAsOne/>
+      </p:bldGraphic>
+      <p:bldP spid="14" grpId="0" animBg="1"/>
+      <p:bldP spid="15" grpId="0" animBg="1"/>
+    </p:bldLst>
+  </p:timing>
+</p:sld>
+</file>
+
+<file path=ppt/slides/slide12.xml><?xml version="1.0" encoding="utf-8"?>
+<p:sld xmlns:a="http://schemas.openxmlformats.org/drawingml/2006/main" xmlns:p="http://schemas.openxmlformats.org/presentationml/2006/main" xmlns:r="http://schemas.openxmlformats.org/officeDocument/2006/relationships">
+  <p:cSld>
+    <p:spTree>
+      <p:nvGrpSpPr>
+        <p:cNvPr id="1" name=""/>
+        <p:cNvGrpSpPr/>
+        <p:nvPr/>
+      </p:nvGrpSpPr>
+      <p:grpSpPr/>
+      <p:sp>
+        <p:nvSpPr>
+          <p:cNvPr id="2" name="Rectangle 1"/>
+          <p:cNvSpPr/>
+          <p:nvPr/>
+        </p:nvSpPr>
+        <p:spPr>
+          <a:xfrm>
+            <a:off x="0" y="0"/>
+            <a:ext cx="12191695" cy="6858000"/>
+          </a:xfrm>
+          <a:prstGeom prst="rect">
+            <a:avLst/>
+          </a:prstGeom>
+          <a:solidFill>
+            <a:srgbClr val="FFFFFF"/>
+          </a:solidFill>
+          <a:ln>
+            <a:noFill/>
+          </a:ln>
+          <a:effectLst/>
+        </p:spPr>
+        <p:style>
+          <a:lnRef idx="1">
+            <a:schemeClr val="accent1"/>
+          </a:lnRef>
+          <a:fillRef idx="3">
+            <a:schemeClr val="accent1"/>
+          </a:fillRef>
+          <a:effectRef idx="2">
+            <a:schemeClr val="accent1"/>
+          </a:effectRef>
+          <a:fontRef idx="minor">
+            <a:schemeClr val="lt1"/>
+          </a:fontRef>
+        </p:style>
+        <p:txBody>
+          <a:bodyPr rtlCol="0" anchor="ctr"/>
+          <a:lstStyle/>
+          <a:p>
+            <a:pPr algn="ctr"/>
+          </a:p>
+        </p:txBody>
+      </p:sp>
+      <p:sp>
+        <p:nvSpPr>
+          <p:cNvPr id="3" name="Rectangle 2"/>
+          <p:cNvSpPr/>
+          <p:nvPr/>
+        </p:nvSpPr>
+        <p:spPr>
+          <a:xfrm>
+            <a:off x="0" y="0"/>
+            <a:ext cx="12191695" cy="868680"/>
+          </a:xfrm>
+          <a:prstGeom prst="rect">
+            <a:avLst/>
+          </a:prstGeom>
+          <a:solidFill>
+            <a:srgbClr val="1F4E79"/>
+          </a:solidFill>
+          <a:ln>
+            <a:noFill/>
+          </a:ln>
+          <a:effectLst/>
+        </p:spPr>
+        <p:style>
+          <a:lnRef idx="1">
+            <a:schemeClr val="accent1"/>
+          </a:lnRef>
+          <a:fillRef idx="3">
+            <a:schemeClr val="accent1"/>
+          </a:fillRef>
+          <a:effectRef idx="2">
+            <a:schemeClr val="accent1"/>
+          </a:effectRef>
+          <a:fontRef idx="minor">
+            <a:schemeClr val="lt1"/>
+          </a:fontRef>
+        </p:style>
+        <p:txBody>
+          <a:bodyPr rtlCol="0" anchor="ctr"/>
+          <a:lstStyle/>
+          <a:p>
+            <a:pPr algn="ctr"/>
+          </a:p>
+        </p:txBody>
+      </p:sp>
+      <p:sp>
+        <p:nvSpPr>
+          <p:cNvPr id="4" name="TextBox 3"/>
+          <p:cNvSpPr txBox="1"/>
+          <p:nvPr/>
+        </p:nvSpPr>
+        <p:spPr>
+          <a:xfrm>
+            <a:off x="411480" y="73152"/>
+            <a:ext cx="11338560" cy="457200"/>
+          </a:xfrm>
+          <a:prstGeom prst="rect">
+            <a:avLst/>
+          </a:prstGeom>
+          <a:noFill/>
+        </p:spPr>
+        <p:txBody>
+          <a:bodyPr wrap="square">
+            <a:spAutoFit/>
+          </a:bodyPr>
+          <a:lstStyle/>
+          <a:p>
+            <a:pPr algn="just"/>
+            <a:r>
+              <a:rPr sz="2700" b="1">
+                <a:solidFill>
+                  <a:srgbClr val="FFFFFF"/>
+                </a:solidFill>
+                <a:latin typeface="Microsoft JhengHei"/>
+              </a:rPr>
               <a:t>二、軟目標與硬目標</a:t>
             </a:r>
           </a:p>
@@ -6026,7 +7570,7 @@
 </p:sld>
 </file>
 
-<file path=ppt/slides/slide12.xml><?xml version="1.0" encoding="utf-8"?>
+<file path=ppt/slides/slide13.xml><?xml version="1.0" encoding="utf-8"?>
 <p:sld xmlns:a="http://schemas.openxmlformats.org/drawingml/2006/main" xmlns:p="http://schemas.openxmlformats.org/presentationml/2006/main" xmlns:r="http://schemas.openxmlformats.org/officeDocument/2006/relationships">
   <p:cSld>
     <p:spTree>
@@ -6489,7 +8033,7 @@
                 </a:solidFill>
                 <a:latin typeface="Microsoft JhengHei"/>
               </a:rPr>
-              <a:t>大致不變（第 16 頁驗證）</a:t>
+              <a:t>大致不變（第 17 頁驗證）</a:t>
             </a:r>
           </a:p>
         </p:txBody>
@@ -6937,7 +8481,7 @@
 </p:sld>
 </file>
 
-<file path=ppt/slides/slide13.xml><?xml version="1.0" encoding="utf-8"?>
+<file path=ppt/slides/slide14.xml><?xml version="1.0" encoding="utf-8"?>
 <p:sld xmlns:a="http://schemas.openxmlformats.org/drawingml/2006/main" xmlns:p="http://schemas.openxmlformats.org/presentationml/2006/main" xmlns:r="http://schemas.openxmlformats.org/officeDocument/2006/relationships">
   <p:cSld>
     <p:spTree>
@@ -9114,7 +10658,7 @@
 </p:sld>
 </file>
 
-<file path=ppt/slides/slide14.xml><?xml version="1.0" encoding="utf-8"?>
+<file path=ppt/slides/slide15.xml><?xml version="1.0" encoding="utf-8"?>
 <p:sld xmlns:a="http://schemas.openxmlformats.org/drawingml/2006/main" xmlns:p="http://schemas.openxmlformats.org/presentationml/2006/main" xmlns:r="http://schemas.openxmlformats.org/officeDocument/2006/relationships">
   <p:cSld>
     <p:spTree>
@@ -10692,7 +12236,7 @@
 </p:sld>
 </file>
 
-<file path=ppt/slides/slide15.xml><?xml version="1.0" encoding="utf-8"?>
+<file path=ppt/slides/slide16.xml><?xml version="1.0" encoding="utf-8"?>
 <p:sld xmlns:a="http://schemas.openxmlformats.org/drawingml/2006/main" xmlns:p="http://schemas.openxmlformats.org/presentationml/2006/main" xmlns:r="http://schemas.openxmlformats.org/officeDocument/2006/relationships">
   <p:cSld>
     <p:spTree>
@@ -12468,7 +14012,7 @@
 </p:sld>
 </file>
 
-<file path=ppt/slides/slide16.xml><?xml version="1.0" encoding="utf-8"?>
+<file path=ppt/slides/slide17.xml><?xml version="1.0" encoding="utf-8"?>
 <p:sld xmlns:a="http://schemas.openxmlformats.org/drawingml/2006/main" xmlns:p="http://schemas.openxmlformats.org/presentationml/2006/main" xmlns:r="http://schemas.openxmlformats.org/officeDocument/2006/relationships">
   <p:cSld>
     <p:spTree>
@@ -13914,7 +15458,7 @@
 </p:sld>
 </file>
 
-<file path=ppt/slides/slide17.xml><?xml version="1.0" encoding="utf-8"?>
+<file path=ppt/slides/slide18.xml><?xml version="1.0" encoding="utf-8"?>
 <p:sld xmlns:a="http://schemas.openxmlformats.org/drawingml/2006/main" xmlns:p="http://schemas.openxmlformats.org/presentationml/2006/main" xmlns:r="http://schemas.openxmlformats.org/officeDocument/2006/relationships">
   <p:cSld>
     <p:spTree>
@@ -14786,7 +16330,7 @@
 </p:sld>
 </file>
 
-<file path=ppt/slides/slide18.xml><?xml version="1.0" encoding="utf-8"?>
+<file path=ppt/slides/slide19.xml><?xml version="1.0" encoding="utf-8"?>
 <p:sld xmlns:a="http://schemas.openxmlformats.org/drawingml/2006/main" xmlns:p="http://schemas.openxmlformats.org/presentationml/2006/main" xmlns:r="http://schemas.openxmlformats.org/officeDocument/2006/relationships">
   <p:cSld>
     <p:spTree>
@@ -15446,1151 +16990,6 @@
                 <a:latin typeface="Microsoft JhengHei"/>
               </a:rPr>
               <a:t>藍線：小網路 100-100。每個溫度下，蒸餾的測試錯誤數都少於只用硬目標（虛線）。</a:t>
-            </a:r>
-          </a:p>
-        </p:txBody>
-      </p:sp>
-    </p:spTree>
-  </p:cSld>
-  <p:clrMapOvr>
-    <a:masterClrMapping/>
-  </p:clrMapOvr>
-  <p:timing>
-    <p:tnLst>
-      <p:par>
-        <p:cTn id="1" dur="indefinite" restart="never" nodeType="tmRoot">
-          <p:childTnLst>
-            <p:seq concurrent="1" nextAc="seek">
-              <p:cTn id="2" dur="indefinite" nodeType="mainSeq">
-                <p:childTnLst>
-                  <p:par>
-                    <p:cTn id="3" fill="hold">
-                      <p:stCondLst>
-                        <p:cond delay="indefinite"/>
-                      </p:stCondLst>
-                      <p:childTnLst>
-                        <p:par>
-                          <p:cTn id="4" fill="hold">
-                            <p:stCondLst>
-                              <p:cond delay="0"/>
-                            </p:stCondLst>
-                            <p:childTnLst>
-                              <p:par>
-                                <p:cTn id="5" presetID="1" presetClass="entr" presetSubtype="0" fill="hold" grpId="0" nodeType="clickEffect">
-                                  <p:stCondLst>
-                                    <p:cond delay="0"/>
-                                  </p:stCondLst>
-                                  <p:childTnLst>
-                                    <p:set>
-                                      <p:cBhvr>
-                                        <p:cTn id="6" dur="1" fill="hold">
-                                          <p:stCondLst>
-                                            <p:cond delay="0"/>
-                                          </p:stCondLst>
-                                        </p:cTn>
-                                        <p:tgtEl>
-                                          <p:spTgt spid="6"/>
-                                        </p:tgtEl>
-                                        <p:attrNameLst>
-                                          <p:attrName>style.visibility</p:attrName>
-                                        </p:attrNameLst>
-                                      </p:cBhvr>
-                                      <p:to>
-                                        <p:strVal val="visible"/>
-                                      </p:to>
-                                    </p:set>
-                                  </p:childTnLst>
-                                </p:cTn>
-                              </p:par>
-                            </p:childTnLst>
-                          </p:cTn>
-                        </p:par>
-                      </p:childTnLst>
-                    </p:cTn>
-                  </p:par>
-                  <p:par>
-                    <p:cTn id="7" fill="hold">
-                      <p:stCondLst>
-                        <p:cond delay="indefinite"/>
-                      </p:stCondLst>
-                      <p:childTnLst>
-                        <p:par>
-                          <p:cTn id="8" fill="hold">
-                            <p:stCondLst>
-                              <p:cond delay="0"/>
-                            </p:stCondLst>
-                            <p:childTnLst>
-                              <p:par>
-                                <p:cTn id="9" presetID="1" presetClass="entr" presetSubtype="0" fill="hold" grpId="0" nodeType="clickEffect">
-                                  <p:stCondLst>
-                                    <p:cond delay="0"/>
-                                  </p:stCondLst>
-                                  <p:childTnLst>
-                                    <p:set>
-                                      <p:cBhvr>
-                                        <p:cTn id="10" dur="1" fill="hold">
-                                          <p:stCondLst>
-                                            <p:cond delay="0"/>
-                                          </p:stCondLst>
-                                        </p:cTn>
-                                        <p:tgtEl>
-                                          <p:spTgt spid="7"/>
-                                        </p:tgtEl>
-                                        <p:attrNameLst>
-                                          <p:attrName>style.visibility</p:attrName>
-                                        </p:attrNameLst>
-                                      </p:cBhvr>
-                                      <p:to>
-                                        <p:strVal val="visible"/>
-                                      </p:to>
-                                    </p:set>
-                                  </p:childTnLst>
-                                </p:cTn>
-                              </p:par>
-                            </p:childTnLst>
-                          </p:cTn>
-                        </p:par>
-                      </p:childTnLst>
-                    </p:cTn>
-                  </p:par>
-                  <p:par>
-                    <p:cTn id="11" fill="hold">
-                      <p:stCondLst>
-                        <p:cond delay="indefinite"/>
-                      </p:stCondLst>
-                      <p:childTnLst>
-                        <p:par>
-                          <p:cTn id="12" fill="hold">
-                            <p:stCondLst>
-                              <p:cond delay="0"/>
-                            </p:stCondLst>
-                            <p:childTnLst>
-                              <p:par>
-                                <p:cTn id="13" presetID="1" presetClass="entr" presetSubtype="0" fill="hold" grpId="0" nodeType="clickEffect">
-                                  <p:stCondLst>
-                                    <p:cond delay="0"/>
-                                  </p:stCondLst>
-                                  <p:childTnLst>
-                                    <p:set>
-                                      <p:cBhvr>
-                                        <p:cTn id="14" dur="1" fill="hold">
-                                          <p:stCondLst>
-                                            <p:cond delay="0"/>
-                                          </p:stCondLst>
-                                        </p:cTn>
-                                        <p:tgtEl>
-                                          <p:spTgt spid="8"/>
-                                        </p:tgtEl>
-                                        <p:attrNameLst>
-                                          <p:attrName>style.visibility</p:attrName>
-                                        </p:attrNameLst>
-                                      </p:cBhvr>
-                                      <p:to>
-                                        <p:strVal val="visible"/>
-                                      </p:to>
-                                    </p:set>
-                                  </p:childTnLst>
-                                </p:cTn>
-                              </p:par>
-                            </p:childTnLst>
-                          </p:cTn>
-                        </p:par>
-                      </p:childTnLst>
-                    </p:cTn>
-                  </p:par>
-                  <p:par>
-                    <p:cTn id="15" fill="hold">
-                      <p:stCondLst>
-                        <p:cond delay="indefinite"/>
-                      </p:stCondLst>
-                      <p:childTnLst>
-                        <p:par>
-                          <p:cTn id="16" fill="hold">
-                            <p:stCondLst>
-                              <p:cond delay="0"/>
-                            </p:stCondLst>
-                            <p:childTnLst>
-                              <p:par>
-                                <p:cTn id="17" presetID="1" presetClass="entr" presetSubtype="0" fill="hold" grpId="0" nodeType="clickEffect">
-                                  <p:stCondLst>
-                                    <p:cond delay="0"/>
-                                  </p:stCondLst>
-                                  <p:childTnLst>
-                                    <p:set>
-                                      <p:cBhvr>
-                                        <p:cTn id="18" dur="1" fill="hold">
-                                          <p:stCondLst>
-                                            <p:cond delay="0"/>
-                                          </p:stCondLst>
-                                        </p:cTn>
-                                        <p:tgtEl>
-                                          <p:spTgt spid="9"/>
-                                        </p:tgtEl>
-                                        <p:attrNameLst>
-                                          <p:attrName>style.visibility</p:attrName>
-                                        </p:attrNameLst>
-                                      </p:cBhvr>
-                                      <p:to>
-                                        <p:strVal val="visible"/>
-                                      </p:to>
-                                    </p:set>
-                                  </p:childTnLst>
-                                </p:cTn>
-                              </p:par>
-                            </p:childTnLst>
-                          </p:cTn>
-                        </p:par>
-                      </p:childTnLst>
-                    </p:cTn>
-                  </p:par>
-                  <p:par>
-                    <p:cTn id="19" fill="hold">
-                      <p:stCondLst>
-                        <p:cond delay="indefinite"/>
-                      </p:stCondLst>
-                      <p:childTnLst>
-                        <p:par>
-                          <p:cTn id="20" fill="hold">
-                            <p:stCondLst>
-                              <p:cond delay="0"/>
-                            </p:stCondLst>
-                            <p:childTnLst>
-                              <p:par>
-                                <p:cTn id="21" presetID="1" presetClass="entr" presetSubtype="0" fill="hold" grpId="0" nodeType="clickEffect">
-                                  <p:stCondLst>
-                                    <p:cond delay="0"/>
-                                  </p:stCondLst>
-                                  <p:childTnLst>
-                                    <p:set>
-                                      <p:cBhvr>
-                                        <p:cTn id="22" dur="1" fill="hold">
-                                          <p:stCondLst>
-                                            <p:cond delay="0"/>
-                                          </p:stCondLst>
-                                        </p:cTn>
-                                        <p:tgtEl>
-                                          <p:spTgt spid="10"/>
-                                        </p:tgtEl>
-                                        <p:attrNameLst>
-                                          <p:attrName>style.visibility</p:attrName>
-                                        </p:attrNameLst>
-                                      </p:cBhvr>
-                                      <p:to>
-                                        <p:strVal val="visible"/>
-                                      </p:to>
-                                    </p:set>
-                                  </p:childTnLst>
-                                </p:cTn>
-                              </p:par>
-                            </p:childTnLst>
-                          </p:cTn>
-                        </p:par>
-                      </p:childTnLst>
-                    </p:cTn>
-                  </p:par>
-                </p:childTnLst>
-              </p:cTn>
-              <p:prevCondLst>
-                <p:cond evt="onPrev" delay="0">
-                  <p:tgtEl>
-                    <p:sldTgt/>
-                  </p:tgtEl>
-                </p:cond>
-              </p:prevCondLst>
-              <p:nextCondLst>
-                <p:cond evt="onNext" delay="0">
-                  <p:tgtEl>
-                    <p:sldTgt/>
-                  </p:tgtEl>
-                </p:cond>
-              </p:nextCondLst>
-            </p:seq>
-          </p:childTnLst>
-        </p:cTn>
-      </p:par>
-    </p:tnLst>
-    <p:bldLst>
-      <p:bldGraphic spid="6" grpId="0">
-        <p:bldAsOne/>
-      </p:bldGraphic>
-      <p:bldP spid="7" grpId="0" animBg="1"/>
-      <p:bldP spid="8" grpId="0" animBg="1"/>
-      <p:bldP spid="9" grpId="0" animBg="1"/>
-      <p:bldP spid="10" grpId="0" animBg="1"/>
-    </p:bldLst>
-  </p:timing>
-</p:sld>
-</file>
-
-<file path=ppt/slides/slide19.xml><?xml version="1.0" encoding="utf-8"?>
-<p:sld xmlns:a="http://schemas.openxmlformats.org/drawingml/2006/main" xmlns:p="http://schemas.openxmlformats.org/presentationml/2006/main" xmlns:r="http://schemas.openxmlformats.org/officeDocument/2006/relationships">
-  <p:cSld>
-    <p:spTree>
-      <p:nvGrpSpPr>
-        <p:cNvPr id="1" name=""/>
-        <p:cNvGrpSpPr/>
-        <p:nvPr/>
-      </p:nvGrpSpPr>
-      <p:grpSpPr/>
-      <p:sp>
-        <p:nvSpPr>
-          <p:cNvPr id="2" name="Rectangle 1"/>
-          <p:cNvSpPr/>
-          <p:nvPr/>
-        </p:nvSpPr>
-        <p:spPr>
-          <a:xfrm>
-            <a:off x="0" y="0"/>
-            <a:ext cx="12191695" cy="6858000"/>
-          </a:xfrm>
-          <a:prstGeom prst="rect">
-            <a:avLst/>
-          </a:prstGeom>
-          <a:solidFill>
-            <a:srgbClr val="FFFFFF"/>
-          </a:solidFill>
-          <a:ln>
-            <a:noFill/>
-          </a:ln>
-          <a:effectLst/>
-        </p:spPr>
-        <p:style>
-          <a:lnRef idx="1">
-            <a:schemeClr val="accent1"/>
-          </a:lnRef>
-          <a:fillRef idx="3">
-            <a:schemeClr val="accent1"/>
-          </a:fillRef>
-          <a:effectRef idx="2">
-            <a:schemeClr val="accent1"/>
-          </a:effectRef>
-          <a:fontRef idx="minor">
-            <a:schemeClr val="lt1"/>
-          </a:fontRef>
-        </p:style>
-        <p:txBody>
-          <a:bodyPr rtlCol="0" anchor="ctr"/>
-          <a:lstStyle/>
-          <a:p>
-            <a:pPr algn="ctr"/>
-          </a:p>
-        </p:txBody>
-      </p:sp>
-      <p:sp>
-        <p:nvSpPr>
-          <p:cNvPr id="3" name="Rectangle 2"/>
-          <p:cNvSpPr/>
-          <p:nvPr/>
-        </p:nvSpPr>
-        <p:spPr>
-          <a:xfrm>
-            <a:off x="0" y="0"/>
-            <a:ext cx="12191695" cy="868680"/>
-          </a:xfrm>
-          <a:prstGeom prst="rect">
-            <a:avLst/>
-          </a:prstGeom>
-          <a:solidFill>
-            <a:srgbClr val="1F4E79"/>
-          </a:solidFill>
-          <a:ln>
-            <a:noFill/>
-          </a:ln>
-          <a:effectLst/>
-        </p:spPr>
-        <p:style>
-          <a:lnRef idx="1">
-            <a:schemeClr val="accent1"/>
-          </a:lnRef>
-          <a:fillRef idx="3">
-            <a:schemeClr val="accent1"/>
-          </a:fillRef>
-          <a:effectRef idx="2">
-            <a:schemeClr val="accent1"/>
-          </a:effectRef>
-          <a:fontRef idx="minor">
-            <a:schemeClr val="lt1"/>
-          </a:fontRef>
-        </p:style>
-        <p:txBody>
-          <a:bodyPr rtlCol="0" anchor="ctr"/>
-          <a:lstStyle/>
-          <a:p>
-            <a:pPr algn="ctr"/>
-          </a:p>
-        </p:txBody>
-      </p:sp>
-      <p:sp>
-        <p:nvSpPr>
-          <p:cNvPr id="4" name="TextBox 3"/>
-          <p:cNvSpPr txBox="1"/>
-          <p:nvPr/>
-        </p:nvSpPr>
-        <p:spPr>
-          <a:xfrm>
-            <a:off x="411480" y="73152"/>
-            <a:ext cx="11338560" cy="457200"/>
-          </a:xfrm>
-          <a:prstGeom prst="rect">
-            <a:avLst/>
-          </a:prstGeom>
-          <a:noFill/>
-        </p:spPr>
-        <p:txBody>
-          <a:bodyPr wrap="square">
-            <a:spAutoFit/>
-          </a:bodyPr>
-          <a:lstStyle/>
-          <a:p>
-            <a:pPr algn="just"/>
-            <a:r>
-              <a:rPr sz="2700" b="1">
-                <a:solidFill>
-                  <a:srgbClr val="FFFFFF"/>
-                </a:solidFill>
-                <a:latin typeface="Microsoft JhengHei"/>
-              </a:rPr>
-              <a:t>四、很小的網路取中間溫度</a:t>
-            </a:r>
-          </a:p>
-        </p:txBody>
-      </p:sp>
-      <p:sp>
-        <p:nvSpPr>
-          <p:cNvPr id="5" name="TextBox 4"/>
-          <p:cNvSpPr txBox="1"/>
-          <p:nvPr/>
-        </p:nvSpPr>
-        <p:spPr>
-          <a:xfrm>
-            <a:off x="411480" y="521207"/>
-            <a:ext cx="11338560" cy="301752"/>
-          </a:xfrm>
-          <a:prstGeom prst="rect">
-            <a:avLst/>
-          </a:prstGeom>
-          <a:noFill/>
-        </p:spPr>
-        <p:txBody>
-          <a:bodyPr wrap="square">
-            <a:spAutoFit/>
-          </a:bodyPr>
-          <a:lstStyle/>
-          <a:p>
-            <a:pPr algn="just"/>
-            <a:r>
-              <a:rPr sz="1300" b="0">
-                <a:solidFill>
-                  <a:srgbClr val="C7D6E5"/>
-                </a:solidFill>
-                <a:latin typeface="Microsoft JhengHei"/>
-              </a:rPr>
-              <a:t>小網路縮小為 30-30</a:t>
-            </a:r>
-          </a:p>
-        </p:txBody>
-      </p:sp>
-      <p:graphicFrame>
-        <p:nvGraphicFramePr>
-          <p:cNvPr id="6" name="Table 5"/>
-          <p:cNvGraphicFramePr>
-            <a:graphicFrameLocks noGrp="1"/>
-          </p:cNvGraphicFramePr>
-          <p:nvPr/>
-        </p:nvGraphicFramePr>
-        <p:xfrm>
-          <a:off x="731520" y="1143000"/>
-          <a:ext cx="5669280" cy="2304288"/>
-        </p:xfrm>
-        <a:graphic>
-          <a:graphicData uri="http://schemas.openxmlformats.org/drawingml/2006/table">
-            <a:tbl>
-              <a:tblPr bandRow="1">
-                <a:tableStyleId>{5C22544A-7EE6-4342-B048-85BDC9FD1C3A}</a:tableStyleId>
-              </a:tblPr>
-              <a:tblGrid>
-                <a:gridCol w="1889760"/>
-                <a:gridCol w="1889760"/>
-                <a:gridCol w="1889760"/>
-              </a:tblGrid>
-              <a:tr h="329184">
-                <a:tc>
-                  <a:txBody>
-                    <a:bodyPr/>
-                    <a:lstStyle/>
-                    <a:p>
-                      <a:pPr algn="ctr"/>
-                      <a:r>
-                        <a:rPr sz="1600" b="1">
-                          <a:solidFill>
-                            <a:srgbClr val="FFFFFF"/>
-                          </a:solidFill>
-                          <a:latin typeface="Microsoft JhengHei"/>
-                        </a:rPr>
-                        <a:t>T</a:t>
-                      </a:r>
-                    </a:p>
-                  </a:txBody>
-                  <a:tcPr marL="36576" marR="36576" marT="9144" marB="9144">
-                    <a:solidFill>
-                      <a:srgbClr val="1F4E79"/>
-                    </a:solidFill>
-                  </a:tcPr>
-                </a:tc>
-                <a:tc>
-                  <a:txBody>
-                    <a:bodyPr/>
-                    <a:lstStyle/>
-                    <a:p>
-                      <a:pPr algn="ctr"/>
-                      <a:r>
-                        <a:rPr sz="1600" b="1">
-                          <a:solidFill>
-                            <a:srgbClr val="FFFFFF"/>
-                          </a:solidFill>
-                          <a:latin typeface="Microsoft JhengHei"/>
-                        </a:rPr>
-                        <a:t>小網路 100-100</a:t>
-                      </a:r>
-                    </a:p>
-                  </a:txBody>
-                  <a:tcPr marL="36576" marR="36576" marT="9144" marB="9144">
-                    <a:solidFill>
-                      <a:srgbClr val="1F4E79"/>
-                    </a:solidFill>
-                  </a:tcPr>
-                </a:tc>
-                <a:tc>
-                  <a:txBody>
-                    <a:bodyPr/>
-                    <a:lstStyle/>
-                    <a:p>
-                      <a:pPr algn="ctr"/>
-                      <a:r>
-                        <a:rPr sz="1600" b="1">
-                          <a:solidFill>
-                            <a:srgbClr val="FFFFFF"/>
-                          </a:solidFill>
-                          <a:latin typeface="Microsoft JhengHei"/>
-                        </a:rPr>
-                        <a:t>小網路 30-30</a:t>
-                      </a:r>
-                    </a:p>
-                  </a:txBody>
-                  <a:tcPr marL="36576" marR="36576" marT="9144" marB="9144">
-                    <a:solidFill>
-                      <a:srgbClr val="1F4E79"/>
-                    </a:solidFill>
-                  </a:tcPr>
-                </a:tc>
-              </a:tr>
-              <a:tr h="329184">
-                <a:tc>
-                  <a:txBody>
-                    <a:bodyPr/>
-                    <a:lstStyle/>
-                    <a:p>
-                      <a:pPr algn="ctr"/>
-                      <a:r>
-                        <a:rPr sz="1600" b="0">
-                          <a:solidFill>
-                            <a:srgbClr val="202020"/>
-                          </a:solidFill>
-                          <a:latin typeface="Consolas"/>
-                        </a:rPr>
-                        <a:t>只用硬目標</a:t>
-                      </a:r>
-                    </a:p>
-                  </a:txBody>
-                  <a:tcPr marL="36576" marR="36576" marT="9144" marB="9144">
-                    <a:solidFill>
-                      <a:srgbClr val="FFFFFF"/>
-                    </a:solidFill>
-                  </a:tcPr>
-                </a:tc>
-                <a:tc>
-                  <a:txBody>
-                    <a:bodyPr/>
-                    <a:lstStyle/>
-                    <a:p>
-                      <a:pPr algn="ctr"/>
-                      <a:r>
-                        <a:rPr sz="1600" b="0">
-                          <a:solidFill>
-                            <a:srgbClr val="202020"/>
-                          </a:solidFill>
-                          <a:latin typeface="Consolas"/>
-                        </a:rPr>
-                        <a:t>420</a:t>
-                      </a:r>
-                    </a:p>
-                  </a:txBody>
-                  <a:tcPr marL="36576" marR="36576" marT="9144" marB="9144">
-                    <a:solidFill>
-                      <a:srgbClr val="FFFFFF"/>
-                    </a:solidFill>
-                  </a:tcPr>
-                </a:tc>
-                <a:tc>
-                  <a:txBody>
-                    <a:bodyPr/>
-                    <a:lstStyle/>
-                    <a:p>
-                      <a:pPr algn="ctr"/>
-                      <a:r>
-                        <a:rPr sz="1600" b="0">
-                          <a:solidFill>
-                            <a:srgbClr val="202020"/>
-                          </a:solidFill>
-                          <a:latin typeface="Consolas"/>
-                        </a:rPr>
-                        <a:t>568</a:t>
-                      </a:r>
-                    </a:p>
-                  </a:txBody>
-                  <a:tcPr marL="36576" marR="36576" marT="9144" marB="9144">
-                    <a:solidFill>
-                      <a:srgbClr val="FFFFFF"/>
-                    </a:solidFill>
-                  </a:tcPr>
-                </a:tc>
-              </a:tr>
-              <a:tr h="329184">
-                <a:tc>
-                  <a:txBody>
-                    <a:bodyPr/>
-                    <a:lstStyle/>
-                    <a:p>
-                      <a:pPr algn="ctr"/>
-                      <a:r>
-                        <a:rPr sz="1600" b="0">
-                          <a:solidFill>
-                            <a:srgbClr val="202020"/>
-                          </a:solidFill>
-                          <a:latin typeface="Consolas"/>
-                        </a:rPr>
-                        <a:t>1</a:t>
-                      </a:r>
-                    </a:p>
-                  </a:txBody>
-                  <a:tcPr marL="36576" marR="36576" marT="9144" marB="9144">
-                    <a:solidFill>
-                      <a:srgbClr val="FFFFFF"/>
-                    </a:solidFill>
-                  </a:tcPr>
-                </a:tc>
-                <a:tc>
-                  <a:txBody>
-                    <a:bodyPr/>
-                    <a:lstStyle/>
-                    <a:p>
-                      <a:pPr algn="ctr"/>
-                      <a:r>
-                        <a:rPr sz="1600" b="0">
-                          <a:solidFill>
-                            <a:srgbClr val="202020"/>
-                          </a:solidFill>
-                          <a:latin typeface="Consolas"/>
-                        </a:rPr>
-                        <a:t>397</a:t>
-                      </a:r>
-                    </a:p>
-                  </a:txBody>
-                  <a:tcPr marL="36576" marR="36576" marT="9144" marB="9144">
-                    <a:solidFill>
-                      <a:srgbClr val="FFFFFF"/>
-                    </a:solidFill>
-                  </a:tcPr>
-                </a:tc>
-                <a:tc>
-                  <a:txBody>
-                    <a:bodyPr/>
-                    <a:lstStyle/>
-                    <a:p>
-                      <a:pPr algn="ctr"/>
-                      <a:r>
-                        <a:rPr sz="1600" b="0">
-                          <a:solidFill>
-                            <a:srgbClr val="202020"/>
-                          </a:solidFill>
-                          <a:latin typeface="Consolas"/>
-                        </a:rPr>
-                        <a:t>522</a:t>
-                      </a:r>
-                    </a:p>
-                  </a:txBody>
-                  <a:tcPr marL="36576" marR="36576" marT="9144" marB="9144">
-                    <a:solidFill>
-                      <a:srgbClr val="FFFFFF"/>
-                    </a:solidFill>
-                  </a:tcPr>
-                </a:tc>
-              </a:tr>
-              <a:tr h="329184">
-                <a:tc>
-                  <a:txBody>
-                    <a:bodyPr/>
-                    <a:lstStyle/>
-                    <a:p>
-                      <a:pPr algn="ctr"/>
-                      <a:r>
-                        <a:rPr sz="1600" b="0">
-                          <a:solidFill>
-                            <a:srgbClr val="202020"/>
-                          </a:solidFill>
-                          <a:latin typeface="Consolas"/>
-                        </a:rPr>
-                        <a:t>2</a:t>
-                      </a:r>
-                    </a:p>
-                  </a:txBody>
-                  <a:tcPr marL="36576" marR="36576" marT="9144" marB="9144">
-                    <a:solidFill>
-                      <a:srgbClr val="FFFFFF"/>
-                    </a:solidFill>
-                  </a:tcPr>
-                </a:tc>
-                <a:tc>
-                  <a:txBody>
-                    <a:bodyPr/>
-                    <a:lstStyle/>
-                    <a:p>
-                      <a:pPr algn="ctr"/>
-                      <a:r>
-                        <a:rPr sz="1600" b="0">
-                          <a:solidFill>
-                            <a:srgbClr val="202020"/>
-                          </a:solidFill>
-                          <a:latin typeface="Consolas"/>
-                        </a:rPr>
-                        <a:t>343</a:t>
-                      </a:r>
-                    </a:p>
-                  </a:txBody>
-                  <a:tcPr marL="36576" marR="36576" marT="9144" marB="9144">
-                    <a:solidFill>
-                      <a:srgbClr val="FFFFFF"/>
-                    </a:solidFill>
-                  </a:tcPr>
-                </a:tc>
-                <a:tc>
-                  <a:txBody>
-                    <a:bodyPr/>
-                    <a:lstStyle/>
-                    <a:p>
-                      <a:pPr algn="ctr"/>
-                      <a:r>
-                        <a:rPr sz="1600" b="0">
-                          <a:solidFill>
-                            <a:srgbClr val="202020"/>
-                          </a:solidFill>
-                          <a:latin typeface="Consolas"/>
-                        </a:rPr>
-                        <a:t>545</a:t>
-                      </a:r>
-                    </a:p>
-                  </a:txBody>
-                  <a:tcPr marL="36576" marR="36576" marT="9144" marB="9144">
-                    <a:solidFill>
-                      <a:srgbClr val="FFFFFF"/>
-                    </a:solidFill>
-                  </a:tcPr>
-                </a:tc>
-              </a:tr>
-              <a:tr h="329184">
-                <a:tc>
-                  <a:txBody>
-                    <a:bodyPr/>
-                    <a:lstStyle/>
-                    <a:p>
-                      <a:pPr algn="ctr"/>
-                      <a:r>
-                        <a:rPr sz="1600" b="0">
-                          <a:solidFill>
-                            <a:srgbClr val="202020"/>
-                          </a:solidFill>
-                          <a:latin typeface="Consolas"/>
-                        </a:rPr>
-                        <a:t>4</a:t>
-                      </a:r>
-                    </a:p>
-                  </a:txBody>
-                  <a:tcPr marL="36576" marR="36576" marT="9144" marB="9144">
-                    <a:solidFill>
-                      <a:srgbClr val="FFFFFF"/>
-                    </a:solidFill>
-                  </a:tcPr>
-                </a:tc>
-                <a:tc>
-                  <a:txBody>
-                    <a:bodyPr/>
-                    <a:lstStyle/>
-                    <a:p>
-                      <a:pPr algn="ctr"/>
-                      <a:r>
-                        <a:rPr sz="1600" b="0">
-                          <a:solidFill>
-                            <a:srgbClr val="202020"/>
-                          </a:solidFill>
-                          <a:latin typeface="Consolas"/>
-                        </a:rPr>
-                        <a:t>327</a:t>
-                      </a:r>
-                    </a:p>
-                  </a:txBody>
-                  <a:tcPr marL="36576" marR="36576" marT="9144" marB="9144">
-                    <a:solidFill>
-                      <a:srgbClr val="FFFFFF"/>
-                    </a:solidFill>
-                  </a:tcPr>
-                </a:tc>
-                <a:tc>
-                  <a:txBody>
-                    <a:bodyPr/>
-                    <a:lstStyle/>
-                    <a:p>
-                      <a:pPr algn="ctr"/>
-                      <a:r>
-                        <a:rPr sz="1600" b="0">
-                          <a:solidFill>
-                            <a:srgbClr val="202020"/>
-                          </a:solidFill>
-                          <a:latin typeface="Consolas"/>
-                        </a:rPr>
-                        <a:t>498</a:t>
-                      </a:r>
-                    </a:p>
-                  </a:txBody>
-                  <a:tcPr marL="36576" marR="36576" marT="9144" marB="9144">
-                    <a:solidFill>
-                      <a:srgbClr val="FFF3CD"/>
-                    </a:solidFill>
-                  </a:tcPr>
-                </a:tc>
-              </a:tr>
-              <a:tr h="329184">
-                <a:tc>
-                  <a:txBody>
-                    <a:bodyPr/>
-                    <a:lstStyle/>
-                    <a:p>
-                      <a:pPr algn="ctr"/>
-                      <a:r>
-                        <a:rPr sz="1600" b="0">
-                          <a:solidFill>
-                            <a:srgbClr val="202020"/>
-                          </a:solidFill>
-                          <a:latin typeface="Consolas"/>
-                        </a:rPr>
-                        <a:t>8</a:t>
-                      </a:r>
-                    </a:p>
-                  </a:txBody>
-                  <a:tcPr marL="36576" marR="36576" marT="9144" marB="9144">
-                    <a:solidFill>
-                      <a:srgbClr val="FFFFFF"/>
-                    </a:solidFill>
-                  </a:tcPr>
-                </a:tc>
-                <a:tc>
-                  <a:txBody>
-                    <a:bodyPr/>
-                    <a:lstStyle/>
-                    <a:p>
-                      <a:pPr algn="ctr"/>
-                      <a:r>
-                        <a:rPr sz="1600" b="0">
-                          <a:solidFill>
-                            <a:srgbClr val="202020"/>
-                          </a:solidFill>
-                          <a:latin typeface="Consolas"/>
-                        </a:rPr>
-                        <a:t>322</a:t>
-                      </a:r>
-                    </a:p>
-                  </a:txBody>
-                  <a:tcPr marL="36576" marR="36576" marT="9144" marB="9144">
-                    <a:solidFill>
-                      <a:srgbClr val="FFFFFF"/>
-                    </a:solidFill>
-                  </a:tcPr>
-                </a:tc>
-                <a:tc>
-                  <a:txBody>
-                    <a:bodyPr/>
-                    <a:lstStyle/>
-                    <a:p>
-                      <a:pPr algn="ctr"/>
-                      <a:r>
-                        <a:rPr sz="1600" b="0">
-                          <a:solidFill>
-                            <a:srgbClr val="202020"/>
-                          </a:solidFill>
-                          <a:latin typeface="Consolas"/>
-                        </a:rPr>
-                        <a:t>554</a:t>
-                      </a:r>
-                    </a:p>
-                  </a:txBody>
-                  <a:tcPr marL="36576" marR="36576" marT="9144" marB="9144">
-                    <a:solidFill>
-                      <a:srgbClr val="FFFFFF"/>
-                    </a:solidFill>
-                  </a:tcPr>
-                </a:tc>
-              </a:tr>
-              <a:tr h="329184">
-                <a:tc>
-                  <a:txBody>
-                    <a:bodyPr/>
-                    <a:lstStyle/>
-                    <a:p>
-                      <a:pPr algn="ctr"/>
-                      <a:r>
-                        <a:rPr sz="1600" b="0">
-                          <a:solidFill>
-                            <a:srgbClr val="202020"/>
-                          </a:solidFill>
-                          <a:latin typeface="Consolas"/>
-                        </a:rPr>
-                        <a:t>20</a:t>
-                      </a:r>
-                    </a:p>
-                  </a:txBody>
-                  <a:tcPr marL="36576" marR="36576" marT="9144" marB="9144">
-                    <a:solidFill>
-                      <a:srgbClr val="FFFFFF"/>
-                    </a:solidFill>
-                  </a:tcPr>
-                </a:tc>
-                <a:tc>
-                  <a:txBody>
-                    <a:bodyPr/>
-                    <a:lstStyle/>
-                    <a:p>
-                      <a:pPr algn="ctr"/>
-                      <a:r>
-                        <a:rPr sz="1600" b="0">
-                          <a:solidFill>
-                            <a:srgbClr val="202020"/>
-                          </a:solidFill>
-                          <a:latin typeface="Consolas"/>
-                        </a:rPr>
-                        <a:t>319</a:t>
-                      </a:r>
-                    </a:p>
-                  </a:txBody>
-                  <a:tcPr marL="36576" marR="36576" marT="9144" marB="9144">
-                    <a:solidFill>
-                      <a:srgbClr val="FFFFFF"/>
-                    </a:solidFill>
-                  </a:tcPr>
-                </a:tc>
-                <a:tc>
-                  <a:txBody>
-                    <a:bodyPr/>
-                    <a:lstStyle/>
-                    <a:p>
-                      <a:pPr algn="ctr"/>
-                      <a:r>
-                        <a:rPr sz="1600" b="0">
-                          <a:solidFill>
-                            <a:srgbClr val="202020"/>
-                          </a:solidFill>
-                          <a:latin typeface="Consolas"/>
-                        </a:rPr>
-                        <a:t>599</a:t>
-                      </a:r>
-                    </a:p>
-                  </a:txBody>
-                  <a:tcPr marL="36576" marR="36576" marT="9144" marB="9144">
-                    <a:solidFill>
-                      <a:srgbClr val="FFFFFF"/>
-                    </a:solidFill>
-                  </a:tcPr>
-                </a:tc>
-              </a:tr>
-            </a:tbl>
-          </a:graphicData>
-        </a:graphic>
-      </p:graphicFrame>
-      <p:pic>
-        <p:nvPicPr>
-          <p:cNvPr id="7" name="Picture 6" descr="f_temp.png"/>
-          <p:cNvPicPr>
-            <a:picLocks noChangeAspect="1"/>
-          </p:cNvPicPr>
-          <p:nvPr/>
-        </p:nvPicPr>
-        <p:blipFill>
-          <a:blip r:embed="rId2"/>
-          <a:stretch>
-            <a:fillRect/>
-          </a:stretch>
-        </p:blipFill>
-        <p:spPr>
-          <a:xfrm>
-            <a:off x="6583680" y="1097280"/>
-            <a:ext cx="5120640" cy="2720340"/>
-          </a:xfrm>
-          <a:prstGeom prst="rect">
-            <a:avLst/>
-          </a:prstGeom>
-        </p:spPr>
-      </p:pic>
-      <p:sp>
-        <p:nvSpPr>
-          <p:cNvPr id="8" name="Rectangle 7"/>
-          <p:cNvSpPr/>
-          <p:nvPr/>
-        </p:nvSpPr>
-        <p:spPr>
-          <a:xfrm>
-            <a:off x="731520" y="3886200"/>
-            <a:ext cx="10881360" cy="914400"/>
-          </a:xfrm>
-          <a:prstGeom prst="rect">
-            <a:avLst/>
-          </a:prstGeom>
-          <a:solidFill>
-            <a:srgbClr val="F6F8FA"/>
-          </a:solidFill>
-          <a:ln>
-            <a:solidFill>
-              <a:srgbClr val="D0D7DE"/>
-            </a:solidFill>
-          </a:ln>
-          <a:effectLst/>
-        </p:spPr>
-        <p:style>
-          <a:lnRef idx="1">
-            <a:schemeClr val="accent1"/>
-          </a:lnRef>
-          <a:fillRef idx="3">
-            <a:schemeClr val="accent1"/>
-          </a:fillRef>
-          <a:effectRef idx="2">
-            <a:schemeClr val="accent1"/>
-          </a:effectRef>
-          <a:fontRef idx="minor">
-            <a:schemeClr val="lt1"/>
-          </a:fontRef>
-        </p:style>
-        <p:txBody>
-          <a:bodyPr rtlCol="0" anchor="ctr" wrap="square"/>
-          <a:lstStyle/>
-          <a:p>
-            <a:pPr algn="just"/>
-            <a:r>
-              <a:rPr sz="1700" b="1">
-                <a:solidFill>
-                  <a:srgbClr val="1F4E79"/>
-                </a:solidFill>
-                <a:latin typeface="Microsoft JhengHei"/>
-              </a:rPr>
-              <a:t>論文：每層 300 個以上單元時，8 以上的溫度結果相當接近；每層縮減為 30 個時，</a:t>
-            </a:r>
-          </a:p>
-          <a:p>
-            <a:pPr algn="just"/>
-            <a:r>
-              <a:rPr sz="1700" b="1">
-                <a:solidFill>
-                  <a:srgbClr val="1F4E79"/>
-                </a:solidFill>
-                <a:latin typeface="Microsoft JhengHei"/>
-              </a:rPr>
-              <a:t>2.5 至 4 的溫度明顯優於更高或更低的溫度</a:t>
-            </a:r>
-          </a:p>
-        </p:txBody>
-      </p:sp>
-      <p:sp>
-        <p:nvSpPr>
-          <p:cNvPr id="9" name="Rectangle 8"/>
-          <p:cNvSpPr/>
-          <p:nvPr/>
-        </p:nvSpPr>
-        <p:spPr>
-          <a:xfrm>
-            <a:off x="731520" y="4892040"/>
-            <a:ext cx="10881360" cy="914400"/>
-          </a:xfrm>
-          <a:prstGeom prst="rect">
-            <a:avLst/>
-          </a:prstGeom>
-          <a:solidFill>
-            <a:srgbClr val="DCF0E4"/>
-          </a:solidFill>
-          <a:ln>
-            <a:solidFill>
-              <a:srgbClr val="D0D7DE"/>
-            </a:solidFill>
-          </a:ln>
-          <a:effectLst/>
-        </p:spPr>
-        <p:style>
-          <a:lnRef idx="1">
-            <a:schemeClr val="accent1"/>
-          </a:lnRef>
-          <a:fillRef idx="3">
-            <a:schemeClr val="accent1"/>
-          </a:fillRef>
-          <a:effectRef idx="2">
-            <a:schemeClr val="accent1"/>
-          </a:effectRef>
-          <a:fontRef idx="minor">
-            <a:schemeClr val="lt1"/>
-          </a:fontRef>
-        </p:style>
-        <p:txBody>
-          <a:bodyPr rtlCol="0" anchor="ctr" wrap="square"/>
-          <a:lstStyle/>
-          <a:p>
-            <a:pPr algn="just"/>
-            <a:r>
-              <a:rPr sz="1800" b="1">
-                <a:solidFill>
-                  <a:srgbClr val="1E7A45"/>
-                </a:solidFill>
-                <a:latin typeface="Microsoft JhengHei"/>
-              </a:rPr>
-              <a:t>本教材：30-30 在 T = 4 最好（498 個錯誤），T = 20 反而比只用硬目標還差</a:t>
-            </a:r>
-          </a:p>
-        </p:txBody>
-      </p:sp>
-      <p:sp>
-        <p:nvSpPr>
-          <p:cNvPr id="10" name="TextBox 9"/>
-          <p:cNvSpPr txBox="1"/>
-          <p:nvPr/>
-        </p:nvSpPr>
-        <p:spPr>
-          <a:xfrm>
-            <a:off x="731520" y="5897880"/>
-            <a:ext cx="10881360" cy="731520"/>
-          </a:xfrm>
-          <a:prstGeom prst="rect">
-            <a:avLst/>
-          </a:prstGeom>
-          <a:noFill/>
-        </p:spPr>
-        <p:txBody>
-          <a:bodyPr wrap="square">
-            <a:spAutoFit/>
-          </a:bodyPr>
-          <a:lstStyle/>
-          <a:p>
-            <a:pPr algn="just"/>
-            <a:r>
-              <a:rPr sz="1600" b="0">
-                <a:solidFill>
-                  <a:srgbClr val="59636E"/>
-                </a:solidFill>
-                <a:latin typeface="Microsoft JhengHei"/>
-              </a:rPr>
-              <a:t>蒸餾模型小到無法容納笨重模型全部的知識時，忽略那些很負的 logit 反而有幫助。</a:t>
             </a:r>
           </a:p>
         </p:txBody>
@@ -17306,6 +17705,1151 @@
                 </a:solidFill>
                 <a:latin typeface="Microsoft JhengHei"/>
               </a:rPr>
+              <a:t>四、很小的網路取中間溫度</a:t>
+            </a:r>
+          </a:p>
+        </p:txBody>
+      </p:sp>
+      <p:sp>
+        <p:nvSpPr>
+          <p:cNvPr id="5" name="TextBox 4"/>
+          <p:cNvSpPr txBox="1"/>
+          <p:nvPr/>
+        </p:nvSpPr>
+        <p:spPr>
+          <a:xfrm>
+            <a:off x="411480" y="521207"/>
+            <a:ext cx="11338560" cy="301752"/>
+          </a:xfrm>
+          <a:prstGeom prst="rect">
+            <a:avLst/>
+          </a:prstGeom>
+          <a:noFill/>
+        </p:spPr>
+        <p:txBody>
+          <a:bodyPr wrap="square">
+            <a:spAutoFit/>
+          </a:bodyPr>
+          <a:lstStyle/>
+          <a:p>
+            <a:pPr algn="just"/>
+            <a:r>
+              <a:rPr sz="1300" b="0">
+                <a:solidFill>
+                  <a:srgbClr val="C7D6E5"/>
+                </a:solidFill>
+                <a:latin typeface="Microsoft JhengHei"/>
+              </a:rPr>
+              <a:t>小網路縮小為 30-30</a:t>
+            </a:r>
+          </a:p>
+        </p:txBody>
+      </p:sp>
+      <p:graphicFrame>
+        <p:nvGraphicFramePr>
+          <p:cNvPr id="6" name="Table 5"/>
+          <p:cNvGraphicFramePr>
+            <a:graphicFrameLocks noGrp="1"/>
+          </p:cNvGraphicFramePr>
+          <p:nvPr/>
+        </p:nvGraphicFramePr>
+        <p:xfrm>
+          <a:off x="731520" y="1143000"/>
+          <a:ext cx="5669280" cy="2304288"/>
+        </p:xfrm>
+        <a:graphic>
+          <a:graphicData uri="http://schemas.openxmlformats.org/drawingml/2006/table">
+            <a:tbl>
+              <a:tblPr bandRow="1">
+                <a:tableStyleId>{5C22544A-7EE6-4342-B048-85BDC9FD1C3A}</a:tableStyleId>
+              </a:tblPr>
+              <a:tblGrid>
+                <a:gridCol w="1889760"/>
+                <a:gridCol w="1889760"/>
+                <a:gridCol w="1889760"/>
+              </a:tblGrid>
+              <a:tr h="329184">
+                <a:tc>
+                  <a:txBody>
+                    <a:bodyPr/>
+                    <a:lstStyle/>
+                    <a:p>
+                      <a:pPr algn="ctr"/>
+                      <a:r>
+                        <a:rPr sz="1600" b="1">
+                          <a:solidFill>
+                            <a:srgbClr val="FFFFFF"/>
+                          </a:solidFill>
+                          <a:latin typeface="Microsoft JhengHei"/>
+                        </a:rPr>
+                        <a:t>T</a:t>
+                      </a:r>
+                    </a:p>
+                  </a:txBody>
+                  <a:tcPr marL="36576" marR="36576" marT="9144" marB="9144">
+                    <a:solidFill>
+                      <a:srgbClr val="1F4E79"/>
+                    </a:solidFill>
+                  </a:tcPr>
+                </a:tc>
+                <a:tc>
+                  <a:txBody>
+                    <a:bodyPr/>
+                    <a:lstStyle/>
+                    <a:p>
+                      <a:pPr algn="ctr"/>
+                      <a:r>
+                        <a:rPr sz="1600" b="1">
+                          <a:solidFill>
+                            <a:srgbClr val="FFFFFF"/>
+                          </a:solidFill>
+                          <a:latin typeface="Microsoft JhengHei"/>
+                        </a:rPr>
+                        <a:t>小網路 100-100</a:t>
+                      </a:r>
+                    </a:p>
+                  </a:txBody>
+                  <a:tcPr marL="36576" marR="36576" marT="9144" marB="9144">
+                    <a:solidFill>
+                      <a:srgbClr val="1F4E79"/>
+                    </a:solidFill>
+                  </a:tcPr>
+                </a:tc>
+                <a:tc>
+                  <a:txBody>
+                    <a:bodyPr/>
+                    <a:lstStyle/>
+                    <a:p>
+                      <a:pPr algn="ctr"/>
+                      <a:r>
+                        <a:rPr sz="1600" b="1">
+                          <a:solidFill>
+                            <a:srgbClr val="FFFFFF"/>
+                          </a:solidFill>
+                          <a:latin typeface="Microsoft JhengHei"/>
+                        </a:rPr>
+                        <a:t>小網路 30-30</a:t>
+                      </a:r>
+                    </a:p>
+                  </a:txBody>
+                  <a:tcPr marL="36576" marR="36576" marT="9144" marB="9144">
+                    <a:solidFill>
+                      <a:srgbClr val="1F4E79"/>
+                    </a:solidFill>
+                  </a:tcPr>
+                </a:tc>
+              </a:tr>
+              <a:tr h="329184">
+                <a:tc>
+                  <a:txBody>
+                    <a:bodyPr/>
+                    <a:lstStyle/>
+                    <a:p>
+                      <a:pPr algn="ctr"/>
+                      <a:r>
+                        <a:rPr sz="1600" b="0">
+                          <a:solidFill>
+                            <a:srgbClr val="202020"/>
+                          </a:solidFill>
+                          <a:latin typeface="Consolas"/>
+                        </a:rPr>
+                        <a:t>只用硬目標</a:t>
+                      </a:r>
+                    </a:p>
+                  </a:txBody>
+                  <a:tcPr marL="36576" marR="36576" marT="9144" marB="9144">
+                    <a:solidFill>
+                      <a:srgbClr val="FFFFFF"/>
+                    </a:solidFill>
+                  </a:tcPr>
+                </a:tc>
+                <a:tc>
+                  <a:txBody>
+                    <a:bodyPr/>
+                    <a:lstStyle/>
+                    <a:p>
+                      <a:pPr algn="ctr"/>
+                      <a:r>
+                        <a:rPr sz="1600" b="0">
+                          <a:solidFill>
+                            <a:srgbClr val="202020"/>
+                          </a:solidFill>
+                          <a:latin typeface="Consolas"/>
+                        </a:rPr>
+                        <a:t>420</a:t>
+                      </a:r>
+                    </a:p>
+                  </a:txBody>
+                  <a:tcPr marL="36576" marR="36576" marT="9144" marB="9144">
+                    <a:solidFill>
+                      <a:srgbClr val="FFFFFF"/>
+                    </a:solidFill>
+                  </a:tcPr>
+                </a:tc>
+                <a:tc>
+                  <a:txBody>
+                    <a:bodyPr/>
+                    <a:lstStyle/>
+                    <a:p>
+                      <a:pPr algn="ctr"/>
+                      <a:r>
+                        <a:rPr sz="1600" b="0">
+                          <a:solidFill>
+                            <a:srgbClr val="202020"/>
+                          </a:solidFill>
+                          <a:latin typeface="Consolas"/>
+                        </a:rPr>
+                        <a:t>568</a:t>
+                      </a:r>
+                    </a:p>
+                  </a:txBody>
+                  <a:tcPr marL="36576" marR="36576" marT="9144" marB="9144">
+                    <a:solidFill>
+                      <a:srgbClr val="FFFFFF"/>
+                    </a:solidFill>
+                  </a:tcPr>
+                </a:tc>
+              </a:tr>
+              <a:tr h="329184">
+                <a:tc>
+                  <a:txBody>
+                    <a:bodyPr/>
+                    <a:lstStyle/>
+                    <a:p>
+                      <a:pPr algn="ctr"/>
+                      <a:r>
+                        <a:rPr sz="1600" b="0">
+                          <a:solidFill>
+                            <a:srgbClr val="202020"/>
+                          </a:solidFill>
+                          <a:latin typeface="Consolas"/>
+                        </a:rPr>
+                        <a:t>1</a:t>
+                      </a:r>
+                    </a:p>
+                  </a:txBody>
+                  <a:tcPr marL="36576" marR="36576" marT="9144" marB="9144">
+                    <a:solidFill>
+                      <a:srgbClr val="FFFFFF"/>
+                    </a:solidFill>
+                  </a:tcPr>
+                </a:tc>
+                <a:tc>
+                  <a:txBody>
+                    <a:bodyPr/>
+                    <a:lstStyle/>
+                    <a:p>
+                      <a:pPr algn="ctr"/>
+                      <a:r>
+                        <a:rPr sz="1600" b="0">
+                          <a:solidFill>
+                            <a:srgbClr val="202020"/>
+                          </a:solidFill>
+                          <a:latin typeface="Consolas"/>
+                        </a:rPr>
+                        <a:t>397</a:t>
+                      </a:r>
+                    </a:p>
+                  </a:txBody>
+                  <a:tcPr marL="36576" marR="36576" marT="9144" marB="9144">
+                    <a:solidFill>
+                      <a:srgbClr val="FFFFFF"/>
+                    </a:solidFill>
+                  </a:tcPr>
+                </a:tc>
+                <a:tc>
+                  <a:txBody>
+                    <a:bodyPr/>
+                    <a:lstStyle/>
+                    <a:p>
+                      <a:pPr algn="ctr"/>
+                      <a:r>
+                        <a:rPr sz="1600" b="0">
+                          <a:solidFill>
+                            <a:srgbClr val="202020"/>
+                          </a:solidFill>
+                          <a:latin typeface="Consolas"/>
+                        </a:rPr>
+                        <a:t>522</a:t>
+                      </a:r>
+                    </a:p>
+                  </a:txBody>
+                  <a:tcPr marL="36576" marR="36576" marT="9144" marB="9144">
+                    <a:solidFill>
+                      <a:srgbClr val="FFFFFF"/>
+                    </a:solidFill>
+                  </a:tcPr>
+                </a:tc>
+              </a:tr>
+              <a:tr h="329184">
+                <a:tc>
+                  <a:txBody>
+                    <a:bodyPr/>
+                    <a:lstStyle/>
+                    <a:p>
+                      <a:pPr algn="ctr"/>
+                      <a:r>
+                        <a:rPr sz="1600" b="0">
+                          <a:solidFill>
+                            <a:srgbClr val="202020"/>
+                          </a:solidFill>
+                          <a:latin typeface="Consolas"/>
+                        </a:rPr>
+                        <a:t>2</a:t>
+                      </a:r>
+                    </a:p>
+                  </a:txBody>
+                  <a:tcPr marL="36576" marR="36576" marT="9144" marB="9144">
+                    <a:solidFill>
+                      <a:srgbClr val="FFFFFF"/>
+                    </a:solidFill>
+                  </a:tcPr>
+                </a:tc>
+                <a:tc>
+                  <a:txBody>
+                    <a:bodyPr/>
+                    <a:lstStyle/>
+                    <a:p>
+                      <a:pPr algn="ctr"/>
+                      <a:r>
+                        <a:rPr sz="1600" b="0">
+                          <a:solidFill>
+                            <a:srgbClr val="202020"/>
+                          </a:solidFill>
+                          <a:latin typeface="Consolas"/>
+                        </a:rPr>
+                        <a:t>343</a:t>
+                      </a:r>
+                    </a:p>
+                  </a:txBody>
+                  <a:tcPr marL="36576" marR="36576" marT="9144" marB="9144">
+                    <a:solidFill>
+                      <a:srgbClr val="FFFFFF"/>
+                    </a:solidFill>
+                  </a:tcPr>
+                </a:tc>
+                <a:tc>
+                  <a:txBody>
+                    <a:bodyPr/>
+                    <a:lstStyle/>
+                    <a:p>
+                      <a:pPr algn="ctr"/>
+                      <a:r>
+                        <a:rPr sz="1600" b="0">
+                          <a:solidFill>
+                            <a:srgbClr val="202020"/>
+                          </a:solidFill>
+                          <a:latin typeface="Consolas"/>
+                        </a:rPr>
+                        <a:t>545</a:t>
+                      </a:r>
+                    </a:p>
+                  </a:txBody>
+                  <a:tcPr marL="36576" marR="36576" marT="9144" marB="9144">
+                    <a:solidFill>
+                      <a:srgbClr val="FFFFFF"/>
+                    </a:solidFill>
+                  </a:tcPr>
+                </a:tc>
+              </a:tr>
+              <a:tr h="329184">
+                <a:tc>
+                  <a:txBody>
+                    <a:bodyPr/>
+                    <a:lstStyle/>
+                    <a:p>
+                      <a:pPr algn="ctr"/>
+                      <a:r>
+                        <a:rPr sz="1600" b="0">
+                          <a:solidFill>
+                            <a:srgbClr val="202020"/>
+                          </a:solidFill>
+                          <a:latin typeface="Consolas"/>
+                        </a:rPr>
+                        <a:t>4</a:t>
+                      </a:r>
+                    </a:p>
+                  </a:txBody>
+                  <a:tcPr marL="36576" marR="36576" marT="9144" marB="9144">
+                    <a:solidFill>
+                      <a:srgbClr val="FFFFFF"/>
+                    </a:solidFill>
+                  </a:tcPr>
+                </a:tc>
+                <a:tc>
+                  <a:txBody>
+                    <a:bodyPr/>
+                    <a:lstStyle/>
+                    <a:p>
+                      <a:pPr algn="ctr"/>
+                      <a:r>
+                        <a:rPr sz="1600" b="0">
+                          <a:solidFill>
+                            <a:srgbClr val="202020"/>
+                          </a:solidFill>
+                          <a:latin typeface="Consolas"/>
+                        </a:rPr>
+                        <a:t>327</a:t>
+                      </a:r>
+                    </a:p>
+                  </a:txBody>
+                  <a:tcPr marL="36576" marR="36576" marT="9144" marB="9144">
+                    <a:solidFill>
+                      <a:srgbClr val="FFFFFF"/>
+                    </a:solidFill>
+                  </a:tcPr>
+                </a:tc>
+                <a:tc>
+                  <a:txBody>
+                    <a:bodyPr/>
+                    <a:lstStyle/>
+                    <a:p>
+                      <a:pPr algn="ctr"/>
+                      <a:r>
+                        <a:rPr sz="1600" b="0">
+                          <a:solidFill>
+                            <a:srgbClr val="202020"/>
+                          </a:solidFill>
+                          <a:latin typeface="Consolas"/>
+                        </a:rPr>
+                        <a:t>498</a:t>
+                      </a:r>
+                    </a:p>
+                  </a:txBody>
+                  <a:tcPr marL="36576" marR="36576" marT="9144" marB="9144">
+                    <a:solidFill>
+                      <a:srgbClr val="FFF3CD"/>
+                    </a:solidFill>
+                  </a:tcPr>
+                </a:tc>
+              </a:tr>
+              <a:tr h="329184">
+                <a:tc>
+                  <a:txBody>
+                    <a:bodyPr/>
+                    <a:lstStyle/>
+                    <a:p>
+                      <a:pPr algn="ctr"/>
+                      <a:r>
+                        <a:rPr sz="1600" b="0">
+                          <a:solidFill>
+                            <a:srgbClr val="202020"/>
+                          </a:solidFill>
+                          <a:latin typeface="Consolas"/>
+                        </a:rPr>
+                        <a:t>8</a:t>
+                      </a:r>
+                    </a:p>
+                  </a:txBody>
+                  <a:tcPr marL="36576" marR="36576" marT="9144" marB="9144">
+                    <a:solidFill>
+                      <a:srgbClr val="FFFFFF"/>
+                    </a:solidFill>
+                  </a:tcPr>
+                </a:tc>
+                <a:tc>
+                  <a:txBody>
+                    <a:bodyPr/>
+                    <a:lstStyle/>
+                    <a:p>
+                      <a:pPr algn="ctr"/>
+                      <a:r>
+                        <a:rPr sz="1600" b="0">
+                          <a:solidFill>
+                            <a:srgbClr val="202020"/>
+                          </a:solidFill>
+                          <a:latin typeface="Consolas"/>
+                        </a:rPr>
+                        <a:t>322</a:t>
+                      </a:r>
+                    </a:p>
+                  </a:txBody>
+                  <a:tcPr marL="36576" marR="36576" marT="9144" marB="9144">
+                    <a:solidFill>
+                      <a:srgbClr val="FFFFFF"/>
+                    </a:solidFill>
+                  </a:tcPr>
+                </a:tc>
+                <a:tc>
+                  <a:txBody>
+                    <a:bodyPr/>
+                    <a:lstStyle/>
+                    <a:p>
+                      <a:pPr algn="ctr"/>
+                      <a:r>
+                        <a:rPr sz="1600" b="0">
+                          <a:solidFill>
+                            <a:srgbClr val="202020"/>
+                          </a:solidFill>
+                          <a:latin typeface="Consolas"/>
+                        </a:rPr>
+                        <a:t>554</a:t>
+                      </a:r>
+                    </a:p>
+                  </a:txBody>
+                  <a:tcPr marL="36576" marR="36576" marT="9144" marB="9144">
+                    <a:solidFill>
+                      <a:srgbClr val="FFFFFF"/>
+                    </a:solidFill>
+                  </a:tcPr>
+                </a:tc>
+              </a:tr>
+              <a:tr h="329184">
+                <a:tc>
+                  <a:txBody>
+                    <a:bodyPr/>
+                    <a:lstStyle/>
+                    <a:p>
+                      <a:pPr algn="ctr"/>
+                      <a:r>
+                        <a:rPr sz="1600" b="0">
+                          <a:solidFill>
+                            <a:srgbClr val="202020"/>
+                          </a:solidFill>
+                          <a:latin typeface="Consolas"/>
+                        </a:rPr>
+                        <a:t>20</a:t>
+                      </a:r>
+                    </a:p>
+                  </a:txBody>
+                  <a:tcPr marL="36576" marR="36576" marT="9144" marB="9144">
+                    <a:solidFill>
+                      <a:srgbClr val="FFFFFF"/>
+                    </a:solidFill>
+                  </a:tcPr>
+                </a:tc>
+                <a:tc>
+                  <a:txBody>
+                    <a:bodyPr/>
+                    <a:lstStyle/>
+                    <a:p>
+                      <a:pPr algn="ctr"/>
+                      <a:r>
+                        <a:rPr sz="1600" b="0">
+                          <a:solidFill>
+                            <a:srgbClr val="202020"/>
+                          </a:solidFill>
+                          <a:latin typeface="Consolas"/>
+                        </a:rPr>
+                        <a:t>319</a:t>
+                      </a:r>
+                    </a:p>
+                  </a:txBody>
+                  <a:tcPr marL="36576" marR="36576" marT="9144" marB="9144">
+                    <a:solidFill>
+                      <a:srgbClr val="FFFFFF"/>
+                    </a:solidFill>
+                  </a:tcPr>
+                </a:tc>
+                <a:tc>
+                  <a:txBody>
+                    <a:bodyPr/>
+                    <a:lstStyle/>
+                    <a:p>
+                      <a:pPr algn="ctr"/>
+                      <a:r>
+                        <a:rPr sz="1600" b="0">
+                          <a:solidFill>
+                            <a:srgbClr val="202020"/>
+                          </a:solidFill>
+                          <a:latin typeface="Consolas"/>
+                        </a:rPr>
+                        <a:t>599</a:t>
+                      </a:r>
+                    </a:p>
+                  </a:txBody>
+                  <a:tcPr marL="36576" marR="36576" marT="9144" marB="9144">
+                    <a:solidFill>
+                      <a:srgbClr val="FFFFFF"/>
+                    </a:solidFill>
+                  </a:tcPr>
+                </a:tc>
+              </a:tr>
+            </a:tbl>
+          </a:graphicData>
+        </a:graphic>
+      </p:graphicFrame>
+      <p:pic>
+        <p:nvPicPr>
+          <p:cNvPr id="7" name="Picture 6" descr="f_temp.png"/>
+          <p:cNvPicPr>
+            <a:picLocks noChangeAspect="1"/>
+          </p:cNvPicPr>
+          <p:nvPr/>
+        </p:nvPicPr>
+        <p:blipFill>
+          <a:blip r:embed="rId2"/>
+          <a:stretch>
+            <a:fillRect/>
+          </a:stretch>
+        </p:blipFill>
+        <p:spPr>
+          <a:xfrm>
+            <a:off x="6583680" y="1097280"/>
+            <a:ext cx="5120640" cy="2720340"/>
+          </a:xfrm>
+          <a:prstGeom prst="rect">
+            <a:avLst/>
+          </a:prstGeom>
+        </p:spPr>
+      </p:pic>
+      <p:sp>
+        <p:nvSpPr>
+          <p:cNvPr id="8" name="Rectangle 7"/>
+          <p:cNvSpPr/>
+          <p:nvPr/>
+        </p:nvSpPr>
+        <p:spPr>
+          <a:xfrm>
+            <a:off x="731520" y="3886200"/>
+            <a:ext cx="10881360" cy="914400"/>
+          </a:xfrm>
+          <a:prstGeom prst="rect">
+            <a:avLst/>
+          </a:prstGeom>
+          <a:solidFill>
+            <a:srgbClr val="F6F8FA"/>
+          </a:solidFill>
+          <a:ln>
+            <a:solidFill>
+              <a:srgbClr val="D0D7DE"/>
+            </a:solidFill>
+          </a:ln>
+          <a:effectLst/>
+        </p:spPr>
+        <p:style>
+          <a:lnRef idx="1">
+            <a:schemeClr val="accent1"/>
+          </a:lnRef>
+          <a:fillRef idx="3">
+            <a:schemeClr val="accent1"/>
+          </a:fillRef>
+          <a:effectRef idx="2">
+            <a:schemeClr val="accent1"/>
+          </a:effectRef>
+          <a:fontRef idx="minor">
+            <a:schemeClr val="lt1"/>
+          </a:fontRef>
+        </p:style>
+        <p:txBody>
+          <a:bodyPr rtlCol="0" anchor="ctr" wrap="square"/>
+          <a:lstStyle/>
+          <a:p>
+            <a:pPr algn="just"/>
+            <a:r>
+              <a:rPr sz="1700" b="1">
+                <a:solidFill>
+                  <a:srgbClr val="1F4E79"/>
+                </a:solidFill>
+                <a:latin typeface="Microsoft JhengHei"/>
+              </a:rPr>
+              <a:t>論文：每層 300 個以上單元時，8 以上的溫度結果相當接近；每層縮減為 30 個時，</a:t>
+            </a:r>
+          </a:p>
+          <a:p>
+            <a:pPr algn="just"/>
+            <a:r>
+              <a:rPr sz="1700" b="1">
+                <a:solidFill>
+                  <a:srgbClr val="1F4E79"/>
+                </a:solidFill>
+                <a:latin typeface="Microsoft JhengHei"/>
+              </a:rPr>
+              <a:t>2.5 至 4 的溫度明顯優於更高或更低的溫度</a:t>
+            </a:r>
+          </a:p>
+        </p:txBody>
+      </p:sp>
+      <p:sp>
+        <p:nvSpPr>
+          <p:cNvPr id="9" name="Rectangle 8"/>
+          <p:cNvSpPr/>
+          <p:nvPr/>
+        </p:nvSpPr>
+        <p:spPr>
+          <a:xfrm>
+            <a:off x="731520" y="4892040"/>
+            <a:ext cx="10881360" cy="914400"/>
+          </a:xfrm>
+          <a:prstGeom prst="rect">
+            <a:avLst/>
+          </a:prstGeom>
+          <a:solidFill>
+            <a:srgbClr val="DCF0E4"/>
+          </a:solidFill>
+          <a:ln>
+            <a:solidFill>
+              <a:srgbClr val="D0D7DE"/>
+            </a:solidFill>
+          </a:ln>
+          <a:effectLst/>
+        </p:spPr>
+        <p:style>
+          <a:lnRef idx="1">
+            <a:schemeClr val="accent1"/>
+          </a:lnRef>
+          <a:fillRef idx="3">
+            <a:schemeClr val="accent1"/>
+          </a:fillRef>
+          <a:effectRef idx="2">
+            <a:schemeClr val="accent1"/>
+          </a:effectRef>
+          <a:fontRef idx="minor">
+            <a:schemeClr val="lt1"/>
+          </a:fontRef>
+        </p:style>
+        <p:txBody>
+          <a:bodyPr rtlCol="0" anchor="ctr" wrap="square"/>
+          <a:lstStyle/>
+          <a:p>
+            <a:pPr algn="just"/>
+            <a:r>
+              <a:rPr sz="1800" b="1">
+                <a:solidFill>
+                  <a:srgbClr val="1E7A45"/>
+                </a:solidFill>
+                <a:latin typeface="Microsoft JhengHei"/>
+              </a:rPr>
+              <a:t>本教材：30-30 在 T = 4 最好（498 個錯誤），T = 20 反而比只用硬目標還差</a:t>
+            </a:r>
+          </a:p>
+        </p:txBody>
+      </p:sp>
+      <p:sp>
+        <p:nvSpPr>
+          <p:cNvPr id="10" name="TextBox 9"/>
+          <p:cNvSpPr txBox="1"/>
+          <p:nvPr/>
+        </p:nvSpPr>
+        <p:spPr>
+          <a:xfrm>
+            <a:off x="731520" y="5897880"/>
+            <a:ext cx="10881360" cy="731520"/>
+          </a:xfrm>
+          <a:prstGeom prst="rect">
+            <a:avLst/>
+          </a:prstGeom>
+          <a:noFill/>
+        </p:spPr>
+        <p:txBody>
+          <a:bodyPr wrap="square">
+            <a:spAutoFit/>
+          </a:bodyPr>
+          <a:lstStyle/>
+          <a:p>
+            <a:pPr algn="just"/>
+            <a:r>
+              <a:rPr sz="1600" b="0">
+                <a:solidFill>
+                  <a:srgbClr val="59636E"/>
+                </a:solidFill>
+                <a:latin typeface="Microsoft JhengHei"/>
+              </a:rPr>
+              <a:t>蒸餾模型小到無法容納笨重模型全部的知識時，忽略那些很負的 logit 反而有幫助。</a:t>
+            </a:r>
+          </a:p>
+        </p:txBody>
+      </p:sp>
+    </p:spTree>
+  </p:cSld>
+  <p:clrMapOvr>
+    <a:masterClrMapping/>
+  </p:clrMapOvr>
+  <p:timing>
+    <p:tnLst>
+      <p:par>
+        <p:cTn id="1" dur="indefinite" restart="never" nodeType="tmRoot">
+          <p:childTnLst>
+            <p:seq concurrent="1" nextAc="seek">
+              <p:cTn id="2" dur="indefinite" nodeType="mainSeq">
+                <p:childTnLst>
+                  <p:par>
+                    <p:cTn id="3" fill="hold">
+                      <p:stCondLst>
+                        <p:cond delay="indefinite"/>
+                      </p:stCondLst>
+                      <p:childTnLst>
+                        <p:par>
+                          <p:cTn id="4" fill="hold">
+                            <p:stCondLst>
+                              <p:cond delay="0"/>
+                            </p:stCondLst>
+                            <p:childTnLst>
+                              <p:par>
+                                <p:cTn id="5" presetID="1" presetClass="entr" presetSubtype="0" fill="hold" grpId="0" nodeType="clickEffect">
+                                  <p:stCondLst>
+                                    <p:cond delay="0"/>
+                                  </p:stCondLst>
+                                  <p:childTnLst>
+                                    <p:set>
+                                      <p:cBhvr>
+                                        <p:cTn id="6" dur="1" fill="hold">
+                                          <p:stCondLst>
+                                            <p:cond delay="0"/>
+                                          </p:stCondLst>
+                                        </p:cTn>
+                                        <p:tgtEl>
+                                          <p:spTgt spid="6"/>
+                                        </p:tgtEl>
+                                        <p:attrNameLst>
+                                          <p:attrName>style.visibility</p:attrName>
+                                        </p:attrNameLst>
+                                      </p:cBhvr>
+                                      <p:to>
+                                        <p:strVal val="visible"/>
+                                      </p:to>
+                                    </p:set>
+                                  </p:childTnLst>
+                                </p:cTn>
+                              </p:par>
+                            </p:childTnLst>
+                          </p:cTn>
+                        </p:par>
+                      </p:childTnLst>
+                    </p:cTn>
+                  </p:par>
+                  <p:par>
+                    <p:cTn id="7" fill="hold">
+                      <p:stCondLst>
+                        <p:cond delay="indefinite"/>
+                      </p:stCondLst>
+                      <p:childTnLst>
+                        <p:par>
+                          <p:cTn id="8" fill="hold">
+                            <p:stCondLst>
+                              <p:cond delay="0"/>
+                            </p:stCondLst>
+                            <p:childTnLst>
+                              <p:par>
+                                <p:cTn id="9" presetID="1" presetClass="entr" presetSubtype="0" fill="hold" grpId="0" nodeType="clickEffect">
+                                  <p:stCondLst>
+                                    <p:cond delay="0"/>
+                                  </p:stCondLst>
+                                  <p:childTnLst>
+                                    <p:set>
+                                      <p:cBhvr>
+                                        <p:cTn id="10" dur="1" fill="hold">
+                                          <p:stCondLst>
+                                            <p:cond delay="0"/>
+                                          </p:stCondLst>
+                                        </p:cTn>
+                                        <p:tgtEl>
+                                          <p:spTgt spid="7"/>
+                                        </p:tgtEl>
+                                        <p:attrNameLst>
+                                          <p:attrName>style.visibility</p:attrName>
+                                        </p:attrNameLst>
+                                      </p:cBhvr>
+                                      <p:to>
+                                        <p:strVal val="visible"/>
+                                      </p:to>
+                                    </p:set>
+                                  </p:childTnLst>
+                                </p:cTn>
+                              </p:par>
+                            </p:childTnLst>
+                          </p:cTn>
+                        </p:par>
+                      </p:childTnLst>
+                    </p:cTn>
+                  </p:par>
+                  <p:par>
+                    <p:cTn id="11" fill="hold">
+                      <p:stCondLst>
+                        <p:cond delay="indefinite"/>
+                      </p:stCondLst>
+                      <p:childTnLst>
+                        <p:par>
+                          <p:cTn id="12" fill="hold">
+                            <p:stCondLst>
+                              <p:cond delay="0"/>
+                            </p:stCondLst>
+                            <p:childTnLst>
+                              <p:par>
+                                <p:cTn id="13" presetID="1" presetClass="entr" presetSubtype="0" fill="hold" grpId="0" nodeType="clickEffect">
+                                  <p:stCondLst>
+                                    <p:cond delay="0"/>
+                                  </p:stCondLst>
+                                  <p:childTnLst>
+                                    <p:set>
+                                      <p:cBhvr>
+                                        <p:cTn id="14" dur="1" fill="hold">
+                                          <p:stCondLst>
+                                            <p:cond delay="0"/>
+                                          </p:stCondLst>
+                                        </p:cTn>
+                                        <p:tgtEl>
+                                          <p:spTgt spid="8"/>
+                                        </p:tgtEl>
+                                        <p:attrNameLst>
+                                          <p:attrName>style.visibility</p:attrName>
+                                        </p:attrNameLst>
+                                      </p:cBhvr>
+                                      <p:to>
+                                        <p:strVal val="visible"/>
+                                      </p:to>
+                                    </p:set>
+                                  </p:childTnLst>
+                                </p:cTn>
+                              </p:par>
+                            </p:childTnLst>
+                          </p:cTn>
+                        </p:par>
+                      </p:childTnLst>
+                    </p:cTn>
+                  </p:par>
+                  <p:par>
+                    <p:cTn id="15" fill="hold">
+                      <p:stCondLst>
+                        <p:cond delay="indefinite"/>
+                      </p:stCondLst>
+                      <p:childTnLst>
+                        <p:par>
+                          <p:cTn id="16" fill="hold">
+                            <p:stCondLst>
+                              <p:cond delay="0"/>
+                            </p:stCondLst>
+                            <p:childTnLst>
+                              <p:par>
+                                <p:cTn id="17" presetID="1" presetClass="entr" presetSubtype="0" fill="hold" grpId="0" nodeType="clickEffect">
+                                  <p:stCondLst>
+                                    <p:cond delay="0"/>
+                                  </p:stCondLst>
+                                  <p:childTnLst>
+                                    <p:set>
+                                      <p:cBhvr>
+                                        <p:cTn id="18" dur="1" fill="hold">
+                                          <p:stCondLst>
+                                            <p:cond delay="0"/>
+                                          </p:stCondLst>
+                                        </p:cTn>
+                                        <p:tgtEl>
+                                          <p:spTgt spid="9"/>
+                                        </p:tgtEl>
+                                        <p:attrNameLst>
+                                          <p:attrName>style.visibility</p:attrName>
+                                        </p:attrNameLst>
+                                      </p:cBhvr>
+                                      <p:to>
+                                        <p:strVal val="visible"/>
+                                      </p:to>
+                                    </p:set>
+                                  </p:childTnLst>
+                                </p:cTn>
+                              </p:par>
+                            </p:childTnLst>
+                          </p:cTn>
+                        </p:par>
+                      </p:childTnLst>
+                    </p:cTn>
+                  </p:par>
+                  <p:par>
+                    <p:cTn id="19" fill="hold">
+                      <p:stCondLst>
+                        <p:cond delay="indefinite"/>
+                      </p:stCondLst>
+                      <p:childTnLst>
+                        <p:par>
+                          <p:cTn id="20" fill="hold">
+                            <p:stCondLst>
+                              <p:cond delay="0"/>
+                            </p:stCondLst>
+                            <p:childTnLst>
+                              <p:par>
+                                <p:cTn id="21" presetID="1" presetClass="entr" presetSubtype="0" fill="hold" grpId="0" nodeType="clickEffect">
+                                  <p:stCondLst>
+                                    <p:cond delay="0"/>
+                                  </p:stCondLst>
+                                  <p:childTnLst>
+                                    <p:set>
+                                      <p:cBhvr>
+                                        <p:cTn id="22" dur="1" fill="hold">
+                                          <p:stCondLst>
+                                            <p:cond delay="0"/>
+                                          </p:stCondLst>
+                                        </p:cTn>
+                                        <p:tgtEl>
+                                          <p:spTgt spid="10"/>
+                                        </p:tgtEl>
+                                        <p:attrNameLst>
+                                          <p:attrName>style.visibility</p:attrName>
+                                        </p:attrNameLst>
+                                      </p:cBhvr>
+                                      <p:to>
+                                        <p:strVal val="visible"/>
+                                      </p:to>
+                                    </p:set>
+                                  </p:childTnLst>
+                                </p:cTn>
+                              </p:par>
+                            </p:childTnLst>
+                          </p:cTn>
+                        </p:par>
+                      </p:childTnLst>
+                    </p:cTn>
+                  </p:par>
+                </p:childTnLst>
+              </p:cTn>
+              <p:prevCondLst>
+                <p:cond evt="onPrev" delay="0">
+                  <p:tgtEl>
+                    <p:sldTgt/>
+                  </p:tgtEl>
+                </p:cond>
+              </p:prevCondLst>
+              <p:nextCondLst>
+                <p:cond evt="onNext" delay="0">
+                  <p:tgtEl>
+                    <p:sldTgt/>
+                  </p:tgtEl>
+                </p:cond>
+              </p:nextCondLst>
+            </p:seq>
+          </p:childTnLst>
+        </p:cTn>
+      </p:par>
+    </p:tnLst>
+    <p:bldLst>
+      <p:bldGraphic spid="6" grpId="0">
+        <p:bldAsOne/>
+      </p:bldGraphic>
+      <p:bldP spid="7" grpId="0" animBg="1"/>
+      <p:bldP spid="8" grpId="0" animBg="1"/>
+      <p:bldP spid="9" grpId="0" animBg="1"/>
+      <p:bldP spid="10" grpId="0" animBg="1"/>
+    </p:bldLst>
+  </p:timing>
+</p:sld>
+</file>
+
+<file path=ppt/slides/slide21.xml><?xml version="1.0" encoding="utf-8"?>
+<p:sld xmlns:a="http://schemas.openxmlformats.org/drawingml/2006/main" xmlns:p="http://schemas.openxmlformats.org/presentationml/2006/main" xmlns:r="http://schemas.openxmlformats.org/officeDocument/2006/relationships">
+  <p:cSld>
+    <p:spTree>
+      <p:nvGrpSpPr>
+        <p:cNvPr id="1" name=""/>
+        <p:cNvGrpSpPr/>
+        <p:nvPr/>
+      </p:nvGrpSpPr>
+      <p:grpSpPr/>
+      <p:sp>
+        <p:nvSpPr>
+          <p:cNvPr id="2" name="Rectangle 1"/>
+          <p:cNvSpPr/>
+          <p:nvPr/>
+        </p:nvSpPr>
+        <p:spPr>
+          <a:xfrm>
+            <a:off x="0" y="0"/>
+            <a:ext cx="12191695" cy="6858000"/>
+          </a:xfrm>
+          <a:prstGeom prst="rect">
+            <a:avLst/>
+          </a:prstGeom>
+          <a:solidFill>
+            <a:srgbClr val="FFFFFF"/>
+          </a:solidFill>
+          <a:ln>
+            <a:noFill/>
+          </a:ln>
+          <a:effectLst/>
+        </p:spPr>
+        <p:style>
+          <a:lnRef idx="1">
+            <a:schemeClr val="accent1"/>
+          </a:lnRef>
+          <a:fillRef idx="3">
+            <a:schemeClr val="accent1"/>
+          </a:fillRef>
+          <a:effectRef idx="2">
+            <a:schemeClr val="accent1"/>
+          </a:effectRef>
+          <a:fontRef idx="minor">
+            <a:schemeClr val="lt1"/>
+          </a:fontRef>
+        </p:style>
+        <p:txBody>
+          <a:bodyPr rtlCol="0" anchor="ctr"/>
+          <a:lstStyle/>
+          <a:p>
+            <a:pPr algn="ctr"/>
+          </a:p>
+        </p:txBody>
+      </p:sp>
+      <p:sp>
+        <p:nvSpPr>
+          <p:cNvPr id="3" name="Rectangle 2"/>
+          <p:cNvSpPr/>
+          <p:nvPr/>
+        </p:nvSpPr>
+        <p:spPr>
+          <a:xfrm>
+            <a:off x="0" y="0"/>
+            <a:ext cx="12191695" cy="868680"/>
+          </a:xfrm>
+          <a:prstGeom prst="rect">
+            <a:avLst/>
+          </a:prstGeom>
+          <a:solidFill>
+            <a:srgbClr val="1F4E79"/>
+          </a:solidFill>
+          <a:ln>
+            <a:noFill/>
+          </a:ln>
+          <a:effectLst/>
+        </p:spPr>
+        <p:style>
+          <a:lnRef idx="1">
+            <a:schemeClr val="accent1"/>
+          </a:lnRef>
+          <a:fillRef idx="3">
+            <a:schemeClr val="accent1"/>
+          </a:fillRef>
+          <a:effectRef idx="2">
+            <a:schemeClr val="accent1"/>
+          </a:effectRef>
+          <a:fontRef idx="minor">
+            <a:schemeClr val="lt1"/>
+          </a:fontRef>
+        </p:style>
+        <p:txBody>
+          <a:bodyPr rtlCol="0" anchor="ctr"/>
+          <a:lstStyle/>
+          <a:p>
+            <a:pPr algn="ctr"/>
+          </a:p>
+        </p:txBody>
+      </p:sp>
+      <p:sp>
+        <p:nvSpPr>
+          <p:cNvPr id="4" name="TextBox 3"/>
+          <p:cNvSpPr txBox="1"/>
+          <p:nvPr/>
+        </p:nvSpPr>
+        <p:spPr>
+          <a:xfrm>
+            <a:off x="411480" y="73152"/>
+            <a:ext cx="11338560" cy="457200"/>
+          </a:xfrm>
+          <a:prstGeom prst="rect">
+            <a:avLst/>
+          </a:prstGeom>
+          <a:noFill/>
+        </p:spPr>
+        <p:txBody>
+          <a:bodyPr wrap="square">
+            <a:spAutoFit/>
+          </a:bodyPr>
+          <a:lstStyle/>
+          <a:p>
+            <a:pPr algn="just"/>
+            <a:r>
+              <a:rPr sz="2700" b="1">
+                <a:solidFill>
+                  <a:srgbClr val="FFFFFF"/>
+                </a:solidFill>
+                <a:latin typeface="Microsoft JhengHei"/>
+              </a:rPr>
               <a:t>四、未曾見過的數字 3</a:t>
             </a:r>
           </a:p>
@@ -18345,7 +19889,7 @@
 </p:sld>
 </file>
 
-<file path=ppt/slides/slide21.xml><?xml version="1.0" encoding="utf-8"?>
+<file path=ppt/slides/slide22.xml><?xml version="1.0" encoding="utf-8"?>
 <p:sld xmlns:a="http://schemas.openxmlformats.org/drawingml/2006/main" xmlns:p="http://schemas.openxmlformats.org/presentationml/2006/main" xmlns:r="http://schemas.openxmlformats.org/officeDocument/2006/relationships">
   <p:cSld>
     <p:spTree>
@@ -19651,7 +21195,7 @@
 </p:sld>
 </file>
 
-<file path=ppt/slides/slide22.xml><?xml version="1.0" encoding="utf-8"?>
+<file path=ppt/slides/slide23.xml><?xml version="1.0" encoding="utf-8"?>
 <p:sld xmlns:a="http://schemas.openxmlformats.org/drawingml/2006/main" xmlns:p="http://schemas.openxmlformats.org/presentationml/2006/main" xmlns:r="http://schemas.openxmlformats.org/officeDocument/2006/relationships">
   <p:cSld>
     <p:spTree>
@@ -19999,7 +21543,7 @@
                 </a:solidFill>
                 <a:latin typeface="Microsoft JhengHei"/>
               </a:rPr>
-              <a:t>練習一　T = 2 時，v = (8, 4, 0) 的軟目標是多少？依第 9 頁的四步計算</a:t>
+              <a:t>練習一　T = 2 時，v = (8, 4, 0) 的軟目標是多少？依第 10 頁的四步計算</a:t>
             </a:r>
           </a:p>
         </p:txBody>
@@ -21930,7 +23474,7 @@
                           </a:solidFill>
                           <a:latin typeface="Microsoft JhengHei"/>
                         </a:rPr>
-                        <a:t>5</a:t>
+                        <a:t>5–6</a:t>
                       </a:r>
                     </a:p>
                   </a:txBody>
@@ -22001,7 +23545,7 @@
                           </a:solidFill>
                           <a:latin typeface="Microsoft JhengHei"/>
                         </a:rPr>
-                        <a:t>6–7</a:t>
+                        <a:t>7–8</a:t>
                       </a:r>
                     </a:p>
                   </a:txBody>
@@ -22072,7 +23616,7 @@
                           </a:solidFill>
                           <a:latin typeface="Microsoft JhengHei"/>
                         </a:rPr>
-                        <a:t>8–11</a:t>
+                        <a:t>9–12</a:t>
                       </a:r>
                     </a:p>
                   </a:txBody>
@@ -22143,7 +23687,7 @@
                           </a:solidFill>
                           <a:latin typeface="Microsoft JhengHei"/>
                         </a:rPr>
-                        <a:t>12–16</a:t>
+                        <a:t>13–17</a:t>
                       </a:r>
                     </a:p>
                   </a:txBody>
@@ -22214,7 +23758,7 @@
                           </a:solidFill>
                           <a:latin typeface="Microsoft JhengHei"/>
                         </a:rPr>
-                        <a:t>17–21</a:t>
+                        <a:t>18–22</a:t>
                       </a:r>
                     </a:p>
                   </a:txBody>
@@ -22285,7 +23829,7 @@
                           </a:solidFill>
                           <a:latin typeface="Microsoft JhengHei"/>
                         </a:rPr>
-                        <a:t>22</a:t>
+                        <a:t>23</a:t>
                       </a:r>
                     </a:p>
                   </a:txBody>
@@ -22746,7 +24290,7 @@
                 </a:solidFill>
                 <a:latin typeface="Microsoft JhengHei"/>
               </a:rPr>
-              <a:t>術語對照</a:t>
+              <a:t>術語對照（一）</a:t>
             </a:r>
           </a:p>
         </p:txBody>
@@ -22781,7 +24325,7 @@
                 </a:solidFill>
                 <a:latin typeface="Microsoft JhengHei"/>
               </a:rPr>
-              <a:t>本教材的專有名詞：中文、英文與意義</a:t>
+              <a:t>模型與訓練</a:t>
             </a:r>
           </a:p>
         </p:txBody>
@@ -22795,8 +24339,8 @@
           <p:nvPr/>
         </p:nvGraphicFramePr>
         <p:xfrm>
-          <a:off x="548640" y="1051560"/>
-          <a:ext cx="11109960" cy="4279392"/>
+          <a:off x="548640" y="1097280"/>
+          <a:ext cx="11109960" cy="2962656"/>
         </p:xfrm>
         <a:graphic>
           <a:graphicData uri="http://schemas.openxmlformats.org/drawingml/2006/table">
@@ -22817,7 +24361,7 @@
                     <a:p>
                       <a:pPr algn="ctr"/>
                       <a:r>
-                        <a:rPr sz="1400" b="1">
+                        <a:rPr sz="1500" b="1">
                           <a:solidFill>
                             <a:srgbClr val="FFFFFF"/>
                           </a:solidFill>
@@ -22840,7 +24384,7 @@
                     <a:p>
                       <a:pPr algn="ctr"/>
                       <a:r>
-                        <a:rPr sz="1400" b="1">
+                        <a:rPr sz="1500" b="1">
                           <a:solidFill>
                             <a:srgbClr val="FFFFFF"/>
                           </a:solidFill>
@@ -22863,7 +24407,7 @@
                     <a:p>
                       <a:pPr algn="ctr"/>
                       <a:r>
-                        <a:rPr sz="1400" b="1">
+                        <a:rPr sz="1500" b="1">
                           <a:solidFill>
                             <a:srgbClr val="FFFFFF"/>
                           </a:solidFill>
@@ -22888,7 +24432,7 @@
                     <a:p>
                       <a:pPr algn="ctr"/>
                       <a:r>
-                        <a:rPr sz="1400" b="1">
+                        <a:rPr sz="1500" b="1">
                           <a:solidFill>
                             <a:srgbClr val="202020"/>
                           </a:solidFill>
@@ -22911,7 +24455,7 @@
                     <a:p>
                       <a:pPr algn="ctr"/>
                       <a:r>
-                        <a:rPr sz="1400" b="1">
+                        <a:rPr sz="1500" b="1">
                           <a:solidFill>
                             <a:srgbClr val="202020"/>
                           </a:solidFill>
@@ -22934,7 +24478,7 @@
                     <a:p>
                       <a:pPr algn="just"/>
                       <a:r>
-                        <a:rPr sz="1400" b="0">
+                        <a:rPr sz="1500" b="0">
                           <a:solidFill>
                             <a:srgbClr val="202020"/>
                           </a:solidFill>
@@ -22959,7 +24503,7 @@
                     <a:p>
                       <a:pPr algn="ctr"/>
                       <a:r>
-                        <a:rPr sz="1400" b="1">
+                        <a:rPr sz="1500" b="1">
                           <a:solidFill>
                             <a:srgbClr val="202020"/>
                           </a:solidFill>
@@ -22982,7 +24526,7 @@
                     <a:p>
                       <a:pPr algn="ctr"/>
                       <a:r>
-                        <a:rPr sz="1400" b="1">
+                        <a:rPr sz="1500" b="1">
                           <a:solidFill>
                             <a:srgbClr val="202020"/>
                           </a:solidFill>
@@ -23005,13 +24549,13 @@
                     <a:p>
                       <a:pPr algn="just"/>
                       <a:r>
-                        <a:rPr sz="1400" b="0">
+                        <a:rPr sz="1500" b="0">
                           <a:solidFill>
                             <a:srgbClr val="202020"/>
                           </a:solidFill>
                           <a:latin typeface="Microsoft JhengHei"/>
                         </a:rPr>
-                        <a:t>為了從資料中學到規律而訓練的大模型：多個模型的組合，或以強正則化訓練的大型網路</a:t>
+                        <a:t>為了從資料中學到規律而訓練的大模型：多個模型的組合，或以強正則化訓練的大型網路。現今文獻多稱為老師模型 teacher model</a:t>
                       </a:r>
                     </a:p>
                   </a:txBody>
@@ -23030,7 +24574,7 @@
                     <a:p>
                       <a:pPr algn="ctr"/>
                       <a:r>
-                        <a:rPr sz="1400" b="1">
+                        <a:rPr sz="1500" b="1">
                           <a:solidFill>
                             <a:srgbClr val="202020"/>
                           </a:solidFill>
@@ -23053,7 +24597,7 @@
                     <a:p>
                       <a:pPr algn="ctr"/>
                       <a:r>
-                        <a:rPr sz="1400" b="1">
+                        <a:rPr sz="1500" b="1">
                           <a:solidFill>
                             <a:srgbClr val="202020"/>
                           </a:solidFill>
@@ -23076,13 +24620,13 @@
                     <a:p>
                       <a:pPr algn="just"/>
                       <a:r>
-                        <a:rPr sz="1400" b="0">
+                        <a:rPr sz="1500" b="0">
                           <a:solidFill>
                             <a:srgbClr val="202020"/>
                           </a:solidFill>
                           <a:latin typeface="Microsoft JhengHei"/>
                         </a:rPr>
-                        <a:t>以軟目標與正確標籤訓練、承接笨重模型知識的小模型；使用時溫度為 1</a:t>
+                        <a:t>以軟目標與正確標籤訓練、承接笨重模型知識的小模型；使用時溫度為 1。現今文獻多稱為學生模型 student model</a:t>
                       </a:r>
                     </a:p>
                   </a:txBody>
@@ -23101,7 +24645,7 @@
                     <a:p>
                       <a:pPr algn="ctr"/>
                       <a:r>
-                        <a:rPr sz="1400" b="1">
+                        <a:rPr sz="1500" b="1">
                           <a:solidFill>
                             <a:srgbClr val="202020"/>
                           </a:solidFill>
@@ -23124,7 +24668,7 @@
                     <a:p>
                       <a:pPr algn="ctr"/>
                       <a:r>
-                        <a:rPr sz="1400" b="1">
+                        <a:rPr sz="1500" b="1">
                           <a:solidFill>
                             <a:srgbClr val="202020"/>
                           </a:solidFill>
@@ -23147,7 +24691,7 @@
                     <a:p>
                       <a:pPr algn="just"/>
                       <a:r>
-                        <a:rPr sz="1400" b="0">
+                        <a:rPr sz="1500" b="0">
                           <a:solidFill>
                             <a:srgbClr val="202020"/>
                           </a:solidFill>
@@ -23172,13 +24716,13 @@
                     <a:p>
                       <a:pPr algn="ctr"/>
                       <a:r>
-                        <a:rPr sz="1400" b="1">
+                        <a:rPr sz="1500" b="1">
                           <a:solidFill>
                             <a:srgbClr val="202020"/>
                           </a:solidFill>
                           <a:latin typeface="Microsoft JhengHei"/>
                         </a:rPr>
-                        <a:t>logit</a:t>
+                        <a:t>正則化</a:t>
                       </a:r>
                     </a:p>
                   </a:txBody>
@@ -23195,13 +24739,13 @@
                     <a:p>
                       <a:pPr algn="ctr"/>
                       <a:r>
-                        <a:rPr sz="1400" b="1">
+                        <a:rPr sz="1500" b="1">
                           <a:solidFill>
                             <a:srgbClr val="202020"/>
                           </a:solidFill>
                           <a:latin typeface="Microsoft JhengHei"/>
                         </a:rPr>
-                        <a:t>logit</a:t>
+                        <a:t>regularization</a:t>
                       </a:r>
                     </a:p>
                   </a:txBody>
@@ -23218,13 +24762,13 @@
                     <a:p>
                       <a:pPr algn="just"/>
                       <a:r>
-                        <a:rPr sz="1400" b="0">
+                        <a:rPr sz="1500" b="0">
                           <a:solidFill>
                             <a:srgbClr val="202020"/>
                           </a:solidFill>
                           <a:latin typeface="Microsoft JhengHei"/>
                         </a:rPr>
-                        <a:t>softmax 的輸入：網路最後一層對每個類別算出的數值 z_i</a:t>
+                        <a:t>訓練時限制模型、避免它過度貼合訓練資料（稱為過擬合）的方法，例如 dropout 或權重限制</a:t>
                       </a:r>
                     </a:p>
                   </a:txBody>
@@ -23243,13 +24787,13 @@
                     <a:p>
                       <a:pPr algn="ctr"/>
                       <a:r>
-                        <a:rPr sz="1400" b="1">
+                        <a:rPr sz="1500" b="1">
                           <a:solidFill>
                             <a:srgbClr val="202020"/>
                           </a:solidFill>
                           <a:latin typeface="Microsoft JhengHei"/>
                         </a:rPr>
-                        <a:t>溫度</a:t>
+                        <a:t>dropout</a:t>
                       </a:r>
                     </a:p>
                   </a:txBody>
@@ -23266,13 +24810,13 @@
                     <a:p>
                       <a:pPr algn="ctr"/>
                       <a:r>
-                        <a:rPr sz="1400" b="1">
+                        <a:rPr sz="1500" b="1">
                           <a:solidFill>
                             <a:srgbClr val="202020"/>
                           </a:solidFill>
                           <a:latin typeface="Microsoft JhengHei"/>
                         </a:rPr>
-                        <a:t>temperature (T)</a:t>
+                        <a:t>dropout</a:t>
                       </a:r>
                     </a:p>
                   </a:txBody>
@@ -23289,13 +24833,13 @@
                     <a:p>
                       <a:pPr algn="just"/>
                       <a:r>
-                        <a:rPr sz="1400" b="0">
+                        <a:rPr sz="1500" b="0">
                           <a:solidFill>
                             <a:srgbClr val="202020"/>
                           </a:solidFill>
                           <a:latin typeface="Microsoft JhengHei"/>
                         </a:rPr>
-                        <a:t>softmax 中除以 logit 的常數；T 越大，機率分布越軟，通常 T = 1</a:t>
+                        <a:t>訓練時每次隨機停用一部分神經元的正則化方法；可視為同時訓練許多共用權重的模型所組成的組合</a:t>
                       </a:r>
                     </a:p>
                   </a:txBody>
@@ -23314,13 +24858,13 @@
                     <a:p>
                       <a:pPr algn="ctr"/>
                       <a:r>
-                        <a:rPr sz="1400" b="1">
+                        <a:rPr sz="1500" b="1">
                           <a:solidFill>
                             <a:srgbClr val="202020"/>
                           </a:solidFill>
                           <a:latin typeface="Microsoft JhengHei"/>
                         </a:rPr>
-                        <a:t>軟目標</a:t>
+                        <a:t>移轉集</a:t>
                       </a:r>
                     </a:p>
                   </a:txBody>
@@ -23337,13 +24881,13 @@
                     <a:p>
                       <a:pPr algn="ctr"/>
                       <a:r>
-                        <a:rPr sz="1400" b="1">
+                        <a:rPr sz="1500" b="1">
                           <a:solidFill>
                             <a:srgbClr val="202020"/>
                           </a:solidFill>
                           <a:latin typeface="Microsoft JhengHei"/>
                         </a:rPr>
-                        <a:t>soft targets</a:t>
+                        <a:t>transfer set</a:t>
                       </a:r>
                     </a:p>
                   </a:txBody>
@@ -23360,13 +24904,13 @@
                     <a:p>
                       <a:pPr algn="just"/>
                       <a:r>
-                        <a:rPr sz="1400" b="0">
+                        <a:rPr sz="1500" b="0">
                           <a:solidFill>
                             <a:srgbClr val="202020"/>
                           </a:solidFill>
                           <a:latin typeface="Microsoft JhengHei"/>
                         </a:rPr>
-                        <a:t>笨重模型在高溫下產生的類別機率，保留錯誤類別之間的相對機率</a:t>
+                        <a:t>用來訓練蒸餾模型的資料，可以是原本的訓練集，也可以是無標籤資料</a:t>
                       </a:r>
                     </a:p>
                   </a:txBody>
@@ -23385,13 +24929,13 @@
                     <a:p>
                       <a:pPr algn="ctr"/>
                       <a:r>
-                        <a:rPr sz="1400" b="1">
+                        <a:rPr sz="1500" b="1">
                           <a:solidFill>
                             <a:srgbClr val="202020"/>
                           </a:solidFill>
                           <a:latin typeface="Microsoft JhengHei"/>
                         </a:rPr>
-                        <a:t>硬目標</a:t>
+                        <a:t>類推</a:t>
                       </a:r>
                     </a:p>
                   </a:txBody>
@@ -23408,13 +24952,13 @@
                     <a:p>
                       <a:pPr algn="ctr"/>
                       <a:r>
-                        <a:rPr sz="1400" b="1">
+                        <a:rPr sz="1500" b="1">
                           <a:solidFill>
                             <a:srgbClr val="202020"/>
                           </a:solidFill>
                           <a:latin typeface="Microsoft JhengHei"/>
                         </a:rPr>
-                        <a:t>hard targets</a:t>
+                        <a:t>generalization</a:t>
                       </a:r>
                     </a:p>
                   </a:txBody>
@@ -23431,297 +24975,13 @@
                     <a:p>
                       <a:pPr algn="just"/>
                       <a:r>
-                        <a:rPr sz="1400" b="0">
+                        <a:rPr sz="1500" b="0">
                           <a:solidFill>
                             <a:srgbClr val="202020"/>
                           </a:solidFill>
                           <a:latin typeface="Microsoft JhengHei"/>
                         </a:rPr>
-                        <a:t>正確標籤：只有正確類別為 1，其餘為 0</a:t>
-                      </a:r>
-                    </a:p>
-                  </a:txBody>
-                  <a:tcPr marL="36576" marR="36576" marT="9144" marB="9144">
-                    <a:solidFill>
-                      <a:srgbClr val="FFFFFF"/>
-                    </a:solidFill>
-                  </a:tcPr>
-                </a:tc>
-              </a:tr>
-              <a:tr h="329184">
-                <a:tc>
-                  <a:txBody>
-                    <a:bodyPr/>
-                    <a:lstStyle/>
-                    <a:p>
-                      <a:pPr algn="ctr"/>
-                      <a:r>
-                        <a:rPr sz="1400" b="1">
-                          <a:solidFill>
-                            <a:srgbClr val="202020"/>
-                          </a:solidFill>
-                          <a:latin typeface="Microsoft JhengHei"/>
-                        </a:rPr>
-                        <a:t>移轉集</a:t>
-                      </a:r>
-                    </a:p>
-                  </a:txBody>
-                  <a:tcPr marL="36576" marR="36576" marT="9144" marB="9144">
-                    <a:solidFill>
-                      <a:srgbClr val="FFFFFF"/>
-                    </a:solidFill>
-                  </a:tcPr>
-                </a:tc>
-                <a:tc>
-                  <a:txBody>
-                    <a:bodyPr/>
-                    <a:lstStyle/>
-                    <a:p>
-                      <a:pPr algn="ctr"/>
-                      <a:r>
-                        <a:rPr sz="1400" b="1">
-                          <a:solidFill>
-                            <a:srgbClr val="202020"/>
-                          </a:solidFill>
-                          <a:latin typeface="Microsoft JhengHei"/>
-                        </a:rPr>
-                        <a:t>transfer set</a:t>
-                      </a:r>
-                    </a:p>
-                  </a:txBody>
-                  <a:tcPr marL="36576" marR="36576" marT="9144" marB="9144">
-                    <a:solidFill>
-                      <a:srgbClr val="FFFFFF"/>
-                    </a:solidFill>
-                  </a:tcPr>
-                </a:tc>
-                <a:tc>
-                  <a:txBody>
-                    <a:bodyPr/>
-                    <a:lstStyle/>
-                    <a:p>
-                      <a:pPr algn="just"/>
-                      <a:r>
-                        <a:rPr sz="1400" b="0">
-                          <a:solidFill>
-                            <a:srgbClr val="202020"/>
-                          </a:solidFill>
-                          <a:latin typeface="Microsoft JhengHei"/>
-                        </a:rPr>
-                        <a:t>用來訓練蒸餾模型的資料，可以是原本的訓練集，也可以是無標籤資料</a:t>
-                      </a:r>
-                    </a:p>
-                  </a:txBody>
-                  <a:tcPr marL="36576" marR="36576" marT="9144" marB="9144">
-                    <a:solidFill>
-                      <a:srgbClr val="FFFFFF"/>
-                    </a:solidFill>
-                  </a:tcPr>
-                </a:tc>
-              </a:tr>
-              <a:tr h="329184">
-                <a:tc>
-                  <a:txBody>
-                    <a:bodyPr/>
-                    <a:lstStyle/>
-                    <a:p>
-                      <a:pPr algn="ctr"/>
-                      <a:r>
-                        <a:rPr sz="1400" b="1">
-                          <a:solidFill>
-                            <a:srgbClr val="202020"/>
-                          </a:solidFill>
-                          <a:latin typeface="Microsoft JhengHei"/>
-                        </a:rPr>
-                        <a:t>交叉熵</a:t>
-                      </a:r>
-                    </a:p>
-                  </a:txBody>
-                  <a:tcPr marL="36576" marR="36576" marT="9144" marB="9144">
-                    <a:solidFill>
-                      <a:srgbClr val="FFFFFF"/>
-                    </a:solidFill>
-                  </a:tcPr>
-                </a:tc>
-                <a:tc>
-                  <a:txBody>
-                    <a:bodyPr/>
-                    <a:lstStyle/>
-                    <a:p>
-                      <a:pPr algn="ctr"/>
-                      <a:r>
-                        <a:rPr sz="1400" b="1">
-                          <a:solidFill>
-                            <a:srgbClr val="202020"/>
-                          </a:solidFill>
-                          <a:latin typeface="Microsoft JhengHei"/>
-                        </a:rPr>
-                        <a:t>cross entropy</a:t>
-                      </a:r>
-                    </a:p>
-                  </a:txBody>
-                  <a:tcPr marL="36576" marR="36576" marT="9144" marB="9144">
-                    <a:solidFill>
-                      <a:srgbClr val="FFFFFF"/>
-                    </a:solidFill>
-                  </a:tcPr>
-                </a:tc>
-                <a:tc>
-                  <a:txBody>
-                    <a:bodyPr/>
-                    <a:lstStyle/>
-                    <a:p>
-                      <a:pPr algn="just"/>
-                      <a:r>
-                        <a:rPr sz="1400" b="0">
-                          <a:solidFill>
-                            <a:srgbClr val="202020"/>
-                          </a:solidFill>
-                          <a:latin typeface="Microsoft JhengHei"/>
-                        </a:rPr>
-                        <a:t>兩個機率分布之間差異的度量：C = −Σ p_i log q_i</a:t>
-                      </a:r>
-                    </a:p>
-                  </a:txBody>
-                  <a:tcPr marL="36576" marR="36576" marT="9144" marB="9144">
-                    <a:solidFill>
-                      <a:srgbClr val="FFFFFF"/>
-                    </a:solidFill>
-                  </a:tcPr>
-                </a:tc>
-              </a:tr>
-              <a:tr h="329184">
-                <a:tc>
-                  <a:txBody>
-                    <a:bodyPr/>
-                    <a:lstStyle/>
-                    <a:p>
-                      <a:pPr algn="ctr"/>
-                      <a:r>
-                        <a:rPr sz="1400" b="1">
-                          <a:solidFill>
-                            <a:srgbClr val="202020"/>
-                          </a:solidFill>
-                          <a:latin typeface="Microsoft JhengHei"/>
-                        </a:rPr>
-                        <a:t>比對 logit</a:t>
-                      </a:r>
-                    </a:p>
-                  </a:txBody>
-                  <a:tcPr marL="36576" marR="36576" marT="9144" marB="9144">
-                    <a:solidFill>
-                      <a:srgbClr val="FFFFFF"/>
-                    </a:solidFill>
-                  </a:tcPr>
-                </a:tc>
-                <a:tc>
-                  <a:txBody>
-                    <a:bodyPr/>
-                    <a:lstStyle/>
-                    <a:p>
-                      <a:pPr algn="ctr"/>
-                      <a:r>
-                        <a:rPr sz="1400" b="1">
-                          <a:solidFill>
-                            <a:srgbClr val="202020"/>
-                          </a:solidFill>
-                          <a:latin typeface="Microsoft JhengHei"/>
-                        </a:rPr>
-                        <a:t>matching logits</a:t>
-                      </a:r>
-                    </a:p>
-                  </a:txBody>
-                  <a:tcPr marL="36576" marR="36576" marT="9144" marB="9144">
-                    <a:solidFill>
-                      <a:srgbClr val="FFFFFF"/>
-                    </a:solidFill>
-                  </a:tcPr>
-                </a:tc>
-                <a:tc>
-                  <a:txBody>
-                    <a:bodyPr/>
-                    <a:lstStyle/>
-                    <a:p>
-                      <a:pPr algn="just"/>
-                      <a:r>
-                        <a:rPr sz="1400" b="0">
-                          <a:solidFill>
-                            <a:srgbClr val="202020"/>
-                          </a:solidFill>
-                          <a:latin typeface="Microsoft JhengHei"/>
-                        </a:rPr>
-                        <a:t>讓小模型的 logit 直接貼齊笨重模型的 logit；是高溫極限下的蒸餾</a:t>
-                      </a:r>
-                    </a:p>
-                  </a:txBody>
-                  <a:tcPr marL="36576" marR="36576" marT="9144" marB="9144">
-                    <a:solidFill>
-                      <a:srgbClr val="FFFFFF"/>
-                    </a:solidFill>
-                  </a:tcPr>
-                </a:tc>
-              </a:tr>
-              <a:tr h="329184">
-                <a:tc>
-                  <a:txBody>
-                    <a:bodyPr/>
-                    <a:lstStyle/>
-                    <a:p>
-                      <a:pPr algn="ctr"/>
-                      <a:r>
-                        <a:rPr sz="1400" b="1">
-                          <a:solidFill>
-                            <a:srgbClr val="202020"/>
-                          </a:solidFill>
-                          <a:latin typeface="Microsoft JhengHei"/>
-                        </a:rPr>
-                        <a:t>專家模型</a:t>
-                      </a:r>
-                    </a:p>
-                  </a:txBody>
-                  <a:tcPr marL="36576" marR="36576" marT="9144" marB="9144">
-                    <a:solidFill>
-                      <a:srgbClr val="FFFFFF"/>
-                    </a:solidFill>
-                  </a:tcPr>
-                </a:tc>
-                <a:tc>
-                  <a:txBody>
-                    <a:bodyPr/>
-                    <a:lstStyle/>
-                    <a:p>
-                      <a:pPr algn="ctr"/>
-                      <a:r>
-                        <a:rPr sz="1400" b="1">
-                          <a:solidFill>
-                            <a:srgbClr val="202020"/>
-                          </a:solidFill>
-                          <a:latin typeface="Microsoft JhengHei"/>
-                        </a:rPr>
-                        <a:t>specialist models</a:t>
-                      </a:r>
-                    </a:p>
-                  </a:txBody>
-                  <a:tcPr marL="36576" marR="36576" marT="9144" marB="9144">
-                    <a:solidFill>
-                      <a:srgbClr val="FFFFFF"/>
-                    </a:solidFill>
-                  </a:tcPr>
-                </a:tc>
-                <a:tc>
-                  <a:txBody>
-                    <a:bodyPr/>
-                    <a:lstStyle/>
-                    <a:p>
-                      <a:pPr algn="just"/>
-                      <a:r>
-                        <a:rPr sz="1400" b="0">
-                          <a:solidFill>
-                            <a:srgbClr val="202020"/>
-                          </a:solidFill>
-                          <a:latin typeface="Microsoft JhengHei"/>
-                        </a:rPr>
-                        <a:t>只負責一群容易混淆類別的模型，與通用模型 generalist model 合用</a:t>
+                        <a:t>模型對沒見過的新資料做出正確判斷的能力，又稱泛化</a:t>
                       </a:r>
                     </a:p>
                   </a:txBody>
@@ -23736,6 +24996,41 @@
           </a:graphicData>
         </a:graphic>
       </p:graphicFrame>
+      <p:sp>
+        <p:nvSpPr>
+          <p:cNvPr id="7" name="TextBox 6"/>
+          <p:cNvSpPr txBox="1"/>
+          <p:nvPr/>
+        </p:nvSpPr>
+        <p:spPr>
+          <a:xfrm>
+            <a:off x="548640" y="5989320"/>
+            <a:ext cx="11109960" cy="457200"/>
+          </a:xfrm>
+          <a:prstGeom prst="rect">
+            <a:avLst/>
+          </a:prstGeom>
+          <a:noFill/>
+        </p:spPr>
+        <p:txBody>
+          <a:bodyPr wrap="square">
+            <a:spAutoFit/>
+          </a:bodyPr>
+          <a:lstStyle/>
+          <a:p>
+            <a:pPr algn="just"/>
+            <a:r>
+              <a:rPr sz="1400" b="0">
+                <a:solidFill>
+                  <a:srgbClr val="59636E"/>
+                </a:solidFill>
+                <a:latin typeface="Microsoft JhengHei"/>
+              </a:rPr>
+              <a:t>本教材其餘頁面沿用論文的術語（笨重模型、蒸餾模型），以便和原文對照。</a:t>
+            </a:r>
+          </a:p>
+        </p:txBody>
+      </p:sp>
     </p:spTree>
   </p:cSld>
   <p:clrMapOvr>
@@ -23794,6 +25089,51 @@
                       </p:childTnLst>
                     </p:cTn>
                   </p:par>
+                  <p:par>
+                    <p:cTn id="7" fill="hold">
+                      <p:stCondLst>
+                        <p:cond delay="indefinite"/>
+                      </p:stCondLst>
+                      <p:childTnLst>
+                        <p:par>
+                          <p:cTn id="8" fill="hold">
+                            <p:stCondLst>
+                              <p:cond delay="0"/>
+                            </p:stCondLst>
+                            <p:childTnLst>
+                              <p:par>
+                                <p:cTn id="9" presetID="1" presetClass="entr" presetSubtype="0" fill="hold" grpId="0" nodeType="clickEffect">
+                                  <p:stCondLst>
+                                    <p:cond delay="0"/>
+                                  </p:stCondLst>
+                                  <p:childTnLst>
+                                    <p:set>
+                                      <p:cBhvr>
+                                        <p:cTn id="10" dur="1" fill="hold">
+                                          <p:stCondLst>
+                                            <p:cond delay="0"/>
+                                          </p:stCondLst>
+                                        </p:cTn>
+                                        <p:tgtEl>
+                                          <p:spTgt spid="7"/>
+                                        </p:tgtEl>
+                                        <p:attrNameLst>
+                                          <p:attrName>style.visibility</p:attrName>
+                                        </p:attrNameLst>
+                                      </p:cBhvr>
+                                      <p:to>
+                                        <p:strVal val="visible"/>
+                                      </p:to>
+                                    </p:set>
+                                  </p:childTnLst>
+                                </p:cTn>
+                              </p:par>
+                            </p:childTnLst>
+                          </p:cTn>
+                        </p:par>
+                      </p:childTnLst>
+                    </p:cTn>
+                  </p:par>
                 </p:childTnLst>
               </p:cTn>
               <p:prevCondLst>
@@ -23819,12 +25159,1016 @@
       <p:bldGraphic spid="6" grpId="0">
         <p:bldAsOne/>
       </p:bldGraphic>
+      <p:bldP spid="7" grpId="0" animBg="1"/>
     </p:bldLst>
   </p:timing>
 </p:sld>
 </file>
 
 <file path=ppt/slides/slide6.xml><?xml version="1.0" encoding="utf-8"?>
+<p:sld xmlns:a="http://schemas.openxmlformats.org/drawingml/2006/main" xmlns:p="http://schemas.openxmlformats.org/presentationml/2006/main" xmlns:r="http://schemas.openxmlformats.org/officeDocument/2006/relationships">
+  <p:cSld>
+    <p:spTree>
+      <p:nvGrpSpPr>
+        <p:cNvPr id="1" name=""/>
+        <p:cNvGrpSpPr/>
+        <p:nvPr/>
+      </p:nvGrpSpPr>
+      <p:grpSpPr/>
+      <p:sp>
+        <p:nvSpPr>
+          <p:cNvPr id="2" name="Rectangle 1"/>
+          <p:cNvSpPr/>
+          <p:nvPr/>
+        </p:nvSpPr>
+        <p:spPr>
+          <a:xfrm>
+            <a:off x="0" y="0"/>
+            <a:ext cx="12191695" cy="6858000"/>
+          </a:xfrm>
+          <a:prstGeom prst="rect">
+            <a:avLst/>
+          </a:prstGeom>
+          <a:solidFill>
+            <a:srgbClr val="FFFFFF"/>
+          </a:solidFill>
+          <a:ln>
+            <a:noFill/>
+          </a:ln>
+          <a:effectLst/>
+        </p:spPr>
+        <p:style>
+          <a:lnRef idx="1">
+            <a:schemeClr val="accent1"/>
+          </a:lnRef>
+          <a:fillRef idx="3">
+            <a:schemeClr val="accent1"/>
+          </a:fillRef>
+          <a:effectRef idx="2">
+            <a:schemeClr val="accent1"/>
+          </a:effectRef>
+          <a:fontRef idx="minor">
+            <a:schemeClr val="lt1"/>
+          </a:fontRef>
+        </p:style>
+        <p:txBody>
+          <a:bodyPr rtlCol="0" anchor="ctr"/>
+          <a:lstStyle/>
+          <a:p>
+            <a:pPr algn="ctr"/>
+          </a:p>
+        </p:txBody>
+      </p:sp>
+      <p:sp>
+        <p:nvSpPr>
+          <p:cNvPr id="3" name="Rectangle 2"/>
+          <p:cNvSpPr/>
+          <p:nvPr/>
+        </p:nvSpPr>
+        <p:spPr>
+          <a:xfrm>
+            <a:off x="0" y="0"/>
+            <a:ext cx="12191695" cy="868680"/>
+          </a:xfrm>
+          <a:prstGeom prst="rect">
+            <a:avLst/>
+          </a:prstGeom>
+          <a:solidFill>
+            <a:srgbClr val="1F4E79"/>
+          </a:solidFill>
+          <a:ln>
+            <a:noFill/>
+          </a:ln>
+          <a:effectLst/>
+        </p:spPr>
+        <p:style>
+          <a:lnRef idx="1">
+            <a:schemeClr val="accent1"/>
+          </a:lnRef>
+          <a:fillRef idx="3">
+            <a:schemeClr val="accent1"/>
+          </a:fillRef>
+          <a:effectRef idx="2">
+            <a:schemeClr val="accent1"/>
+          </a:effectRef>
+          <a:fontRef idx="minor">
+            <a:schemeClr val="lt1"/>
+          </a:fontRef>
+        </p:style>
+        <p:txBody>
+          <a:bodyPr rtlCol="0" anchor="ctr"/>
+          <a:lstStyle/>
+          <a:p>
+            <a:pPr algn="ctr"/>
+          </a:p>
+        </p:txBody>
+      </p:sp>
+      <p:sp>
+        <p:nvSpPr>
+          <p:cNvPr id="4" name="TextBox 3"/>
+          <p:cNvSpPr txBox="1"/>
+          <p:nvPr/>
+        </p:nvSpPr>
+        <p:spPr>
+          <a:xfrm>
+            <a:off x="411480" y="73152"/>
+            <a:ext cx="11338560" cy="457200"/>
+          </a:xfrm>
+          <a:prstGeom prst="rect">
+            <a:avLst/>
+          </a:prstGeom>
+          <a:noFill/>
+        </p:spPr>
+        <p:txBody>
+          <a:bodyPr wrap="square">
+            <a:spAutoFit/>
+          </a:bodyPr>
+          <a:lstStyle/>
+          <a:p>
+            <a:pPr algn="just"/>
+            <a:r>
+              <a:rPr sz="2700" b="1">
+                <a:solidFill>
+                  <a:srgbClr val="FFFFFF"/>
+                </a:solidFill>
+                <a:latin typeface="Microsoft JhengHei"/>
+              </a:rPr>
+              <a:t>術語對照（二）</a:t>
+            </a:r>
+          </a:p>
+        </p:txBody>
+      </p:sp>
+      <p:sp>
+        <p:nvSpPr>
+          <p:cNvPr id="5" name="TextBox 4"/>
+          <p:cNvSpPr txBox="1"/>
+          <p:nvPr/>
+        </p:nvSpPr>
+        <p:spPr>
+          <a:xfrm>
+            <a:off x="411480" y="521207"/>
+            <a:ext cx="11338560" cy="301752"/>
+          </a:xfrm>
+          <a:prstGeom prst="rect">
+            <a:avLst/>
+          </a:prstGeom>
+          <a:noFill/>
+        </p:spPr>
+        <p:txBody>
+          <a:bodyPr wrap="square">
+            <a:spAutoFit/>
+          </a:bodyPr>
+          <a:lstStyle/>
+          <a:p>
+            <a:pPr algn="just"/>
+            <a:r>
+              <a:rPr sz="1300" b="0">
+                <a:solidFill>
+                  <a:srgbClr val="C7D6E5"/>
+                </a:solidFill>
+                <a:latin typeface="Microsoft JhengHei"/>
+              </a:rPr>
+              <a:t>軟目標與計算</a:t>
+            </a:r>
+          </a:p>
+        </p:txBody>
+      </p:sp>
+      <p:graphicFrame>
+        <p:nvGraphicFramePr>
+          <p:cNvPr id="6" name="Table 5"/>
+          <p:cNvGraphicFramePr>
+            <a:graphicFrameLocks noGrp="1"/>
+          </p:cNvGraphicFramePr>
+          <p:nvPr/>
+        </p:nvGraphicFramePr>
+        <p:xfrm>
+          <a:off x="548640" y="1097280"/>
+          <a:ext cx="11109960" cy="2962656"/>
+        </p:xfrm>
+        <a:graphic>
+          <a:graphicData uri="http://schemas.openxmlformats.org/drawingml/2006/table">
+            <a:tbl>
+              <a:tblPr bandRow="1">
+                <a:tableStyleId>{5C22544A-7EE6-4342-B048-85BDC9FD1C3A}</a:tableStyleId>
+              </a:tblPr>
+              <a:tblGrid>
+                <a:gridCol w="1188720"/>
+                <a:gridCol w="2377440"/>
+                <a:gridCol w="7543800"/>
+              </a:tblGrid>
+              <a:tr h="329184">
+                <a:tc>
+                  <a:txBody>
+                    <a:bodyPr/>
+                    <a:lstStyle/>
+                    <a:p>
+                      <a:pPr algn="ctr"/>
+                      <a:r>
+                        <a:rPr sz="1500" b="1">
+                          <a:solidFill>
+                            <a:srgbClr val="FFFFFF"/>
+                          </a:solidFill>
+                          <a:latin typeface="Microsoft JhengHei"/>
+                        </a:rPr>
+                        <a:t>中文</a:t>
+                      </a:r>
+                    </a:p>
+                  </a:txBody>
+                  <a:tcPr marL="36576" marR="36576" marT="9144" marB="9144">
+                    <a:solidFill>
+                      <a:srgbClr val="1F4E79"/>
+                    </a:solidFill>
+                  </a:tcPr>
+                </a:tc>
+                <a:tc>
+                  <a:txBody>
+                    <a:bodyPr/>
+                    <a:lstStyle/>
+                    <a:p>
+                      <a:pPr algn="ctr"/>
+                      <a:r>
+                        <a:rPr sz="1500" b="1">
+                          <a:solidFill>
+                            <a:srgbClr val="FFFFFF"/>
+                          </a:solidFill>
+                          <a:latin typeface="Microsoft JhengHei"/>
+                        </a:rPr>
+                        <a:t>英文</a:t>
+                      </a:r>
+                    </a:p>
+                  </a:txBody>
+                  <a:tcPr marL="36576" marR="36576" marT="9144" marB="9144">
+                    <a:solidFill>
+                      <a:srgbClr val="1F4E79"/>
+                    </a:solidFill>
+                  </a:tcPr>
+                </a:tc>
+                <a:tc>
+                  <a:txBody>
+                    <a:bodyPr/>
+                    <a:lstStyle/>
+                    <a:p>
+                      <a:pPr algn="ctr"/>
+                      <a:r>
+                        <a:rPr sz="1500" b="1">
+                          <a:solidFill>
+                            <a:srgbClr val="FFFFFF"/>
+                          </a:solidFill>
+                          <a:latin typeface="Microsoft JhengHei"/>
+                        </a:rPr>
+                        <a:t>意義</a:t>
+                      </a:r>
+                    </a:p>
+                  </a:txBody>
+                  <a:tcPr marL="36576" marR="36576" marT="9144" marB="9144">
+                    <a:solidFill>
+                      <a:srgbClr val="1F4E79"/>
+                    </a:solidFill>
+                  </a:tcPr>
+                </a:tc>
+              </a:tr>
+              <a:tr h="329184">
+                <a:tc>
+                  <a:txBody>
+                    <a:bodyPr/>
+                    <a:lstStyle/>
+                    <a:p>
+                      <a:pPr algn="ctr"/>
+                      <a:r>
+                        <a:rPr sz="1500" b="1">
+                          <a:solidFill>
+                            <a:srgbClr val="202020"/>
+                          </a:solidFill>
+                          <a:latin typeface="Microsoft JhengHei"/>
+                        </a:rPr>
+                        <a:t>logit</a:t>
+                      </a:r>
+                    </a:p>
+                  </a:txBody>
+                  <a:tcPr marL="36576" marR="36576" marT="9144" marB="9144">
+                    <a:solidFill>
+                      <a:srgbClr val="FFFFFF"/>
+                    </a:solidFill>
+                  </a:tcPr>
+                </a:tc>
+                <a:tc>
+                  <a:txBody>
+                    <a:bodyPr/>
+                    <a:lstStyle/>
+                    <a:p>
+                      <a:pPr algn="ctr"/>
+                      <a:r>
+                        <a:rPr sz="1500" b="1">
+                          <a:solidFill>
+                            <a:srgbClr val="202020"/>
+                          </a:solidFill>
+                          <a:latin typeface="Microsoft JhengHei"/>
+                        </a:rPr>
+                        <a:t>logit</a:t>
+                      </a:r>
+                    </a:p>
+                  </a:txBody>
+                  <a:tcPr marL="36576" marR="36576" marT="9144" marB="9144">
+                    <a:solidFill>
+                      <a:srgbClr val="FFFFFF"/>
+                    </a:solidFill>
+                  </a:tcPr>
+                </a:tc>
+                <a:tc>
+                  <a:txBody>
+                    <a:bodyPr/>
+                    <a:lstStyle/>
+                    <a:p>
+                      <a:pPr algn="just"/>
+                      <a:r>
+                        <a:rPr sz="1500" b="0">
+                          <a:solidFill>
+                            <a:srgbClr val="202020"/>
+                          </a:solidFill>
+                          <a:latin typeface="Microsoft JhengHei"/>
+                        </a:rPr>
+                        <a:t>softmax 的輸入：網路最後一層對每個類別算出的數值 z_i</a:t>
+                      </a:r>
+                    </a:p>
+                  </a:txBody>
+                  <a:tcPr marL="36576" marR="36576" marT="9144" marB="9144">
+                    <a:solidFill>
+                      <a:srgbClr val="FFFFFF"/>
+                    </a:solidFill>
+                  </a:tcPr>
+                </a:tc>
+              </a:tr>
+              <a:tr h="329184">
+                <a:tc>
+                  <a:txBody>
+                    <a:bodyPr/>
+                    <a:lstStyle/>
+                    <a:p>
+                      <a:pPr algn="ctr"/>
+                      <a:r>
+                        <a:rPr sz="1500" b="1">
+                          <a:solidFill>
+                            <a:srgbClr val="202020"/>
+                          </a:solidFill>
+                          <a:latin typeface="Microsoft JhengHei"/>
+                        </a:rPr>
+                        <a:t>softmax</a:t>
+                      </a:r>
+                    </a:p>
+                  </a:txBody>
+                  <a:tcPr marL="36576" marR="36576" marT="9144" marB="9144">
+                    <a:solidFill>
+                      <a:srgbClr val="FFFFFF"/>
+                    </a:solidFill>
+                  </a:tcPr>
+                </a:tc>
+                <a:tc>
+                  <a:txBody>
+                    <a:bodyPr/>
+                    <a:lstStyle/>
+                    <a:p>
+                      <a:pPr algn="ctr"/>
+                      <a:r>
+                        <a:rPr sz="1500" b="1">
+                          <a:solidFill>
+                            <a:srgbClr val="202020"/>
+                          </a:solidFill>
+                          <a:latin typeface="Microsoft JhengHei"/>
+                        </a:rPr>
+                        <a:t>softmax</a:t>
+                      </a:r>
+                    </a:p>
+                  </a:txBody>
+                  <a:tcPr marL="36576" marR="36576" marT="9144" marB="9144">
+                    <a:solidFill>
+                      <a:srgbClr val="FFFFFF"/>
+                    </a:solidFill>
+                  </a:tcPr>
+                </a:tc>
+                <a:tc>
+                  <a:txBody>
+                    <a:bodyPr/>
+                    <a:lstStyle/>
+                    <a:p>
+                      <a:pPr algn="just"/>
+                      <a:r>
+                        <a:rPr sz="1500" b="0">
+                          <a:solidFill>
+                            <a:srgbClr val="202020"/>
+                          </a:solidFill>
+                          <a:latin typeface="Microsoft JhengHei"/>
+                        </a:rPr>
+                        <a:t>把每個類別的 logit 轉成機率的函數，所有類別的機率加總為 1</a:t>
+                      </a:r>
+                    </a:p>
+                  </a:txBody>
+                  <a:tcPr marL="36576" marR="36576" marT="9144" marB="9144">
+                    <a:solidFill>
+                      <a:srgbClr val="FFFFFF"/>
+                    </a:solidFill>
+                  </a:tcPr>
+                </a:tc>
+              </a:tr>
+              <a:tr h="329184">
+                <a:tc>
+                  <a:txBody>
+                    <a:bodyPr/>
+                    <a:lstStyle/>
+                    <a:p>
+                      <a:pPr algn="ctr"/>
+                      <a:r>
+                        <a:rPr sz="1500" b="1">
+                          <a:solidFill>
+                            <a:srgbClr val="202020"/>
+                          </a:solidFill>
+                          <a:latin typeface="Microsoft JhengHei"/>
+                        </a:rPr>
+                        <a:t>溫度</a:t>
+                      </a:r>
+                    </a:p>
+                  </a:txBody>
+                  <a:tcPr marL="36576" marR="36576" marT="9144" marB="9144">
+                    <a:solidFill>
+                      <a:srgbClr val="FFFFFF"/>
+                    </a:solidFill>
+                  </a:tcPr>
+                </a:tc>
+                <a:tc>
+                  <a:txBody>
+                    <a:bodyPr/>
+                    <a:lstStyle/>
+                    <a:p>
+                      <a:pPr algn="ctr"/>
+                      <a:r>
+                        <a:rPr sz="1500" b="1">
+                          <a:solidFill>
+                            <a:srgbClr val="202020"/>
+                          </a:solidFill>
+                          <a:latin typeface="Microsoft JhengHei"/>
+                        </a:rPr>
+                        <a:t>temperature (T)</a:t>
+                      </a:r>
+                    </a:p>
+                  </a:txBody>
+                  <a:tcPr marL="36576" marR="36576" marT="9144" marB="9144">
+                    <a:solidFill>
+                      <a:srgbClr val="FFFFFF"/>
+                    </a:solidFill>
+                  </a:tcPr>
+                </a:tc>
+                <a:tc>
+                  <a:txBody>
+                    <a:bodyPr/>
+                    <a:lstStyle/>
+                    <a:p>
+                      <a:pPr algn="just"/>
+                      <a:r>
+                        <a:rPr sz="1500" b="0">
+                          <a:solidFill>
+                            <a:srgbClr val="202020"/>
+                          </a:solidFill>
+                          <a:latin typeface="Microsoft JhengHei"/>
+                        </a:rPr>
+                        <a:t>softmax 中除以 logit 的常數；T 越大，機率分布越軟，通常 T = 1</a:t>
+                      </a:r>
+                    </a:p>
+                  </a:txBody>
+                  <a:tcPr marL="36576" marR="36576" marT="9144" marB="9144">
+                    <a:solidFill>
+                      <a:srgbClr val="FFFFFF"/>
+                    </a:solidFill>
+                  </a:tcPr>
+                </a:tc>
+              </a:tr>
+              <a:tr h="329184">
+                <a:tc>
+                  <a:txBody>
+                    <a:bodyPr/>
+                    <a:lstStyle/>
+                    <a:p>
+                      <a:pPr algn="ctr"/>
+                      <a:r>
+                        <a:rPr sz="1500" b="1">
+                          <a:solidFill>
+                            <a:srgbClr val="202020"/>
+                          </a:solidFill>
+                          <a:latin typeface="Microsoft JhengHei"/>
+                        </a:rPr>
+                        <a:t>軟目標</a:t>
+                      </a:r>
+                    </a:p>
+                  </a:txBody>
+                  <a:tcPr marL="36576" marR="36576" marT="9144" marB="9144">
+                    <a:solidFill>
+                      <a:srgbClr val="FFFFFF"/>
+                    </a:solidFill>
+                  </a:tcPr>
+                </a:tc>
+                <a:tc>
+                  <a:txBody>
+                    <a:bodyPr/>
+                    <a:lstStyle/>
+                    <a:p>
+                      <a:pPr algn="ctr"/>
+                      <a:r>
+                        <a:rPr sz="1500" b="1">
+                          <a:solidFill>
+                            <a:srgbClr val="202020"/>
+                          </a:solidFill>
+                          <a:latin typeface="Microsoft JhengHei"/>
+                        </a:rPr>
+                        <a:t>soft targets</a:t>
+                      </a:r>
+                    </a:p>
+                  </a:txBody>
+                  <a:tcPr marL="36576" marR="36576" marT="9144" marB="9144">
+                    <a:solidFill>
+                      <a:srgbClr val="FFFFFF"/>
+                    </a:solidFill>
+                  </a:tcPr>
+                </a:tc>
+                <a:tc>
+                  <a:txBody>
+                    <a:bodyPr/>
+                    <a:lstStyle/>
+                    <a:p>
+                      <a:pPr algn="just"/>
+                      <a:r>
+                        <a:rPr sz="1500" b="0">
+                          <a:solidFill>
+                            <a:srgbClr val="202020"/>
+                          </a:solidFill>
+                          <a:latin typeface="Microsoft JhengHei"/>
+                        </a:rPr>
+                        <a:t>笨重模型在高溫下產生的類別機率，保留錯誤類別之間的相對機率</a:t>
+                      </a:r>
+                    </a:p>
+                  </a:txBody>
+                  <a:tcPr marL="36576" marR="36576" marT="9144" marB="9144">
+                    <a:solidFill>
+                      <a:srgbClr val="FFFFFF"/>
+                    </a:solidFill>
+                  </a:tcPr>
+                </a:tc>
+              </a:tr>
+              <a:tr h="329184">
+                <a:tc>
+                  <a:txBody>
+                    <a:bodyPr/>
+                    <a:lstStyle/>
+                    <a:p>
+                      <a:pPr algn="ctr"/>
+                      <a:r>
+                        <a:rPr sz="1500" b="1">
+                          <a:solidFill>
+                            <a:srgbClr val="202020"/>
+                          </a:solidFill>
+                          <a:latin typeface="Microsoft JhengHei"/>
+                        </a:rPr>
+                        <a:t>硬目標</a:t>
+                      </a:r>
+                    </a:p>
+                  </a:txBody>
+                  <a:tcPr marL="36576" marR="36576" marT="9144" marB="9144">
+                    <a:solidFill>
+                      <a:srgbClr val="FFFFFF"/>
+                    </a:solidFill>
+                  </a:tcPr>
+                </a:tc>
+                <a:tc>
+                  <a:txBody>
+                    <a:bodyPr/>
+                    <a:lstStyle/>
+                    <a:p>
+                      <a:pPr algn="ctr"/>
+                      <a:r>
+                        <a:rPr sz="1500" b="1">
+                          <a:solidFill>
+                            <a:srgbClr val="202020"/>
+                          </a:solidFill>
+                          <a:latin typeface="Microsoft JhengHei"/>
+                        </a:rPr>
+                        <a:t>hard targets</a:t>
+                      </a:r>
+                    </a:p>
+                  </a:txBody>
+                  <a:tcPr marL="36576" marR="36576" marT="9144" marB="9144">
+                    <a:solidFill>
+                      <a:srgbClr val="FFFFFF"/>
+                    </a:solidFill>
+                  </a:tcPr>
+                </a:tc>
+                <a:tc>
+                  <a:txBody>
+                    <a:bodyPr/>
+                    <a:lstStyle/>
+                    <a:p>
+                      <a:pPr algn="just"/>
+                      <a:r>
+                        <a:rPr sz="1500" b="0">
+                          <a:solidFill>
+                            <a:srgbClr val="202020"/>
+                          </a:solidFill>
+                          <a:latin typeface="Microsoft JhengHei"/>
+                        </a:rPr>
+                        <a:t>正確標籤：只有正確類別為 1，其餘為 0</a:t>
+                      </a:r>
+                    </a:p>
+                  </a:txBody>
+                  <a:tcPr marL="36576" marR="36576" marT="9144" marB="9144">
+                    <a:solidFill>
+                      <a:srgbClr val="FFFFFF"/>
+                    </a:solidFill>
+                  </a:tcPr>
+                </a:tc>
+              </a:tr>
+              <a:tr h="329184">
+                <a:tc>
+                  <a:txBody>
+                    <a:bodyPr/>
+                    <a:lstStyle/>
+                    <a:p>
+                      <a:pPr algn="ctr"/>
+                      <a:r>
+                        <a:rPr sz="1500" b="1">
+                          <a:solidFill>
+                            <a:srgbClr val="202020"/>
+                          </a:solidFill>
+                          <a:latin typeface="Microsoft JhengHei"/>
+                        </a:rPr>
+                        <a:t>交叉熵</a:t>
+                      </a:r>
+                    </a:p>
+                  </a:txBody>
+                  <a:tcPr marL="36576" marR="36576" marT="9144" marB="9144">
+                    <a:solidFill>
+                      <a:srgbClr val="FFFFFF"/>
+                    </a:solidFill>
+                  </a:tcPr>
+                </a:tc>
+                <a:tc>
+                  <a:txBody>
+                    <a:bodyPr/>
+                    <a:lstStyle/>
+                    <a:p>
+                      <a:pPr algn="ctr"/>
+                      <a:r>
+                        <a:rPr sz="1500" b="1">
+                          <a:solidFill>
+                            <a:srgbClr val="202020"/>
+                          </a:solidFill>
+                          <a:latin typeface="Microsoft JhengHei"/>
+                        </a:rPr>
+                        <a:t>cross entropy</a:t>
+                      </a:r>
+                    </a:p>
+                  </a:txBody>
+                  <a:tcPr marL="36576" marR="36576" marT="9144" marB="9144">
+                    <a:solidFill>
+                      <a:srgbClr val="FFFFFF"/>
+                    </a:solidFill>
+                  </a:tcPr>
+                </a:tc>
+                <a:tc>
+                  <a:txBody>
+                    <a:bodyPr/>
+                    <a:lstStyle/>
+                    <a:p>
+                      <a:pPr algn="just"/>
+                      <a:r>
+                        <a:rPr sz="1500" b="0">
+                          <a:solidFill>
+                            <a:srgbClr val="202020"/>
+                          </a:solidFill>
+                          <a:latin typeface="Microsoft JhengHei"/>
+                        </a:rPr>
+                        <a:t>兩個機率分布之間差異的度量：C = −Σ p_i log q_i</a:t>
+                      </a:r>
+                    </a:p>
+                  </a:txBody>
+                  <a:tcPr marL="36576" marR="36576" marT="9144" marB="9144">
+                    <a:solidFill>
+                      <a:srgbClr val="FFFFFF"/>
+                    </a:solidFill>
+                  </a:tcPr>
+                </a:tc>
+              </a:tr>
+              <a:tr h="329184">
+                <a:tc>
+                  <a:txBody>
+                    <a:bodyPr/>
+                    <a:lstStyle/>
+                    <a:p>
+                      <a:pPr algn="ctr"/>
+                      <a:r>
+                        <a:rPr sz="1500" b="1">
+                          <a:solidFill>
+                            <a:srgbClr val="202020"/>
+                          </a:solidFill>
+                          <a:latin typeface="Microsoft JhengHei"/>
+                        </a:rPr>
+                        <a:t>比對 logit</a:t>
+                      </a:r>
+                    </a:p>
+                  </a:txBody>
+                  <a:tcPr marL="36576" marR="36576" marT="9144" marB="9144">
+                    <a:solidFill>
+                      <a:srgbClr val="FFFFFF"/>
+                    </a:solidFill>
+                  </a:tcPr>
+                </a:tc>
+                <a:tc>
+                  <a:txBody>
+                    <a:bodyPr/>
+                    <a:lstStyle/>
+                    <a:p>
+                      <a:pPr algn="ctr"/>
+                      <a:r>
+                        <a:rPr sz="1500" b="1">
+                          <a:solidFill>
+                            <a:srgbClr val="202020"/>
+                          </a:solidFill>
+                          <a:latin typeface="Microsoft JhengHei"/>
+                        </a:rPr>
+                        <a:t>matching logits</a:t>
+                      </a:r>
+                    </a:p>
+                  </a:txBody>
+                  <a:tcPr marL="36576" marR="36576" marT="9144" marB="9144">
+                    <a:solidFill>
+                      <a:srgbClr val="FFFFFF"/>
+                    </a:solidFill>
+                  </a:tcPr>
+                </a:tc>
+                <a:tc>
+                  <a:txBody>
+                    <a:bodyPr/>
+                    <a:lstStyle/>
+                    <a:p>
+                      <a:pPr algn="just"/>
+                      <a:r>
+                        <a:rPr sz="1500" b="0">
+                          <a:solidFill>
+                            <a:srgbClr val="202020"/>
+                          </a:solidFill>
+                          <a:latin typeface="Microsoft JhengHei"/>
+                        </a:rPr>
+                        <a:t>讓小模型的 logit 直接貼齊笨重模型的 logit；是高溫極限下的蒸餾</a:t>
+                      </a:r>
+                    </a:p>
+                  </a:txBody>
+                  <a:tcPr marL="36576" marR="36576" marT="9144" marB="9144">
+                    <a:solidFill>
+                      <a:srgbClr val="FFFFFF"/>
+                    </a:solidFill>
+                  </a:tcPr>
+                </a:tc>
+              </a:tr>
+              <a:tr h="329184">
+                <a:tc>
+                  <a:txBody>
+                    <a:bodyPr/>
+                    <a:lstStyle/>
+                    <a:p>
+                      <a:pPr algn="ctr"/>
+                      <a:r>
+                        <a:rPr sz="1500" b="1">
+                          <a:solidFill>
+                            <a:srgbClr val="202020"/>
+                          </a:solidFill>
+                          <a:latin typeface="Microsoft JhengHei"/>
+                        </a:rPr>
+                        <a:t>專家模型</a:t>
+                      </a:r>
+                    </a:p>
+                  </a:txBody>
+                  <a:tcPr marL="36576" marR="36576" marT="9144" marB="9144">
+                    <a:solidFill>
+                      <a:srgbClr val="FFFFFF"/>
+                    </a:solidFill>
+                  </a:tcPr>
+                </a:tc>
+                <a:tc>
+                  <a:txBody>
+                    <a:bodyPr/>
+                    <a:lstStyle/>
+                    <a:p>
+                      <a:pPr algn="ctr"/>
+                      <a:r>
+                        <a:rPr sz="1500" b="1">
+                          <a:solidFill>
+                            <a:srgbClr val="202020"/>
+                          </a:solidFill>
+                          <a:latin typeface="Microsoft JhengHei"/>
+                        </a:rPr>
+                        <a:t>specialist models</a:t>
+                      </a:r>
+                    </a:p>
+                  </a:txBody>
+                  <a:tcPr marL="36576" marR="36576" marT="9144" marB="9144">
+                    <a:solidFill>
+                      <a:srgbClr val="FFFFFF"/>
+                    </a:solidFill>
+                  </a:tcPr>
+                </a:tc>
+                <a:tc>
+                  <a:txBody>
+                    <a:bodyPr/>
+                    <a:lstStyle/>
+                    <a:p>
+                      <a:pPr algn="just"/>
+                      <a:r>
+                        <a:rPr sz="1500" b="0">
+                          <a:solidFill>
+                            <a:srgbClr val="202020"/>
+                          </a:solidFill>
+                          <a:latin typeface="Microsoft JhengHei"/>
+                        </a:rPr>
+                        <a:t>只負責一群容易混淆類別的模型，與通用模型 generalist model 合用</a:t>
+                      </a:r>
+                    </a:p>
+                  </a:txBody>
+                  <a:tcPr marL="36576" marR="36576" marT="9144" marB="9144">
+                    <a:solidFill>
+                      <a:srgbClr val="FFFFFF"/>
+                    </a:solidFill>
+                  </a:tcPr>
+                </a:tc>
+              </a:tr>
+            </a:tbl>
+          </a:graphicData>
+        </a:graphic>
+      </p:graphicFrame>
+      <p:sp>
+        <p:nvSpPr>
+          <p:cNvPr id="7" name="TextBox 6"/>
+          <p:cNvSpPr txBox="1"/>
+          <p:nvPr/>
+        </p:nvSpPr>
+        <p:spPr>
+          <a:xfrm>
+            <a:off x="548640" y="5989320"/>
+            <a:ext cx="11109960" cy="457200"/>
+          </a:xfrm>
+          <a:prstGeom prst="rect">
+            <a:avLst/>
+          </a:prstGeom>
+          <a:noFill/>
+        </p:spPr>
+        <p:txBody>
+          <a:bodyPr wrap="square">
+            <a:spAutoFit/>
+          </a:bodyPr>
+          <a:lstStyle/>
+          <a:p>
+            <a:pPr algn="just"/>
+            <a:r>
+              <a:rPr sz="1400" b="0">
+                <a:solidFill>
+                  <a:srgbClr val="59636E"/>
+                </a:solidFill>
+                <a:latin typeface="Microsoft JhengHei"/>
+              </a:rPr>
+              <a:t>本教材其餘頁面沿用論文的術語（笨重模型、蒸餾模型），以便和原文對照。</a:t>
+            </a:r>
+          </a:p>
+        </p:txBody>
+      </p:sp>
+    </p:spTree>
+  </p:cSld>
+  <p:clrMapOvr>
+    <a:masterClrMapping/>
+  </p:clrMapOvr>
+  <p:timing>
+    <p:tnLst>
+      <p:par>
+        <p:cTn id="1" dur="indefinite" restart="never" nodeType="tmRoot">
+          <p:childTnLst>
+            <p:seq concurrent="1" nextAc="seek">
+              <p:cTn id="2" dur="indefinite" nodeType="mainSeq">
+                <p:childTnLst>
+                  <p:par>
+                    <p:cTn id="3" fill="hold">
+                      <p:stCondLst>
+                        <p:cond delay="indefinite"/>
+                      </p:stCondLst>
+                      <p:childTnLst>
+                        <p:par>
+                          <p:cTn id="4" fill="hold">
+                            <p:stCondLst>
+                              <p:cond delay="0"/>
+                            </p:stCondLst>
+                            <p:childTnLst>
+                              <p:par>
+                                <p:cTn id="5" presetID="1" presetClass="entr" presetSubtype="0" fill="hold" grpId="0" nodeType="clickEffect">
+                                  <p:stCondLst>
+                                    <p:cond delay="0"/>
+                                  </p:stCondLst>
+                                  <p:childTnLst>
+                                    <p:set>
+                                      <p:cBhvr>
+                                        <p:cTn id="6" dur="1" fill="hold">
+                                          <p:stCondLst>
+                                            <p:cond delay="0"/>
+                                          </p:stCondLst>
+                                        </p:cTn>
+                                        <p:tgtEl>
+                                          <p:spTgt spid="6"/>
+                                        </p:tgtEl>
+                                        <p:attrNameLst>
+                                          <p:attrName>style.visibility</p:attrName>
+                                        </p:attrNameLst>
+                                      </p:cBhvr>
+                                      <p:to>
+                                        <p:strVal val="visible"/>
+                                      </p:to>
+                                    </p:set>
+                                  </p:childTnLst>
+                                </p:cTn>
+                              </p:par>
+                            </p:childTnLst>
+                          </p:cTn>
+                        </p:par>
+                      </p:childTnLst>
+                    </p:cTn>
+                  </p:par>
+                  <p:par>
+                    <p:cTn id="7" fill="hold">
+                      <p:stCondLst>
+                        <p:cond delay="indefinite"/>
+                      </p:stCondLst>
+                      <p:childTnLst>
+                        <p:par>
+                          <p:cTn id="8" fill="hold">
+                            <p:stCondLst>
+                              <p:cond delay="0"/>
+                            </p:stCondLst>
+                            <p:childTnLst>
+                              <p:par>
+                                <p:cTn id="9" presetID="1" presetClass="entr" presetSubtype="0" fill="hold" grpId="0" nodeType="clickEffect">
+                                  <p:stCondLst>
+                                    <p:cond delay="0"/>
+                                  </p:stCondLst>
+                                  <p:childTnLst>
+                                    <p:set>
+                                      <p:cBhvr>
+                                        <p:cTn id="10" dur="1" fill="hold">
+                                          <p:stCondLst>
+                                            <p:cond delay="0"/>
+                                          </p:stCondLst>
+                                        </p:cTn>
+                                        <p:tgtEl>
+                                          <p:spTgt spid="7"/>
+                                        </p:tgtEl>
+                                        <p:attrNameLst>
+                                          <p:attrName>style.visibility</p:attrName>
+                                        </p:attrNameLst>
+                                      </p:cBhvr>
+                                      <p:to>
+                                        <p:strVal val="visible"/>
+                                      </p:to>
+                                    </p:set>
+                                  </p:childTnLst>
+                                </p:cTn>
+                              </p:par>
+                            </p:childTnLst>
+                          </p:cTn>
+                        </p:par>
+                      </p:childTnLst>
+                    </p:cTn>
+                  </p:par>
+                </p:childTnLst>
+              </p:cTn>
+              <p:prevCondLst>
+                <p:cond evt="onPrev" delay="0">
+                  <p:tgtEl>
+                    <p:sldTgt/>
+                  </p:tgtEl>
+                </p:cond>
+              </p:prevCondLst>
+              <p:nextCondLst>
+                <p:cond evt="onNext" delay="0">
+                  <p:tgtEl>
+                    <p:sldTgt/>
+                  </p:tgtEl>
+                </p:cond>
+              </p:nextCondLst>
+            </p:seq>
+          </p:childTnLst>
+        </p:cTn>
+      </p:par>
+    </p:tnLst>
+    <p:bldLst>
+      <p:bldGraphic spid="6" grpId="0">
+        <p:bldAsOne/>
+      </p:bldGraphic>
+      <p:bldP spid="7" grpId="0" animBg="1"/>
+    </p:bldLst>
+  </p:timing>
+</p:sld>
+</file>
+
+<file path=ppt/slides/slide7.xml><?xml version="1.0" encoding="utf-8"?>
 <p:sld xmlns:a="http://schemas.openxmlformats.org/drawingml/2006/main" xmlns:p="http://schemas.openxmlformats.org/presentationml/2006/main" xmlns:r="http://schemas.openxmlformats.org/officeDocument/2006/relationships">
   <p:cSld>
     <p:spTree>
@@ -25057,7 +27401,7 @@
 </p:sld>
 </file>
 
-<file path=ppt/slides/slide7.xml><?xml version="1.0" encoding="utf-8"?>
+<file path=ppt/slides/slide8.xml><?xml version="1.0" encoding="utf-8"?>
 <p:sld xmlns:a="http://schemas.openxmlformats.org/drawingml/2006/main" xmlns:p="http://schemas.openxmlformats.org/presentationml/2006/main" xmlns:r="http://schemas.openxmlformats.org/officeDocument/2006/relationships">
   <p:cSld>
     <p:spTree>
@@ -26148,7 +28492,7 @@
 </p:sld>
 </file>
 
-<file path=ppt/slides/slide8.xml><?xml version="1.0" encoding="utf-8"?>
+<file path=ppt/slides/slide9.xml><?xml version="1.0" encoding="utf-8"?>
 <p:sld xmlns:a="http://schemas.openxmlformats.org/drawingml/2006/main" xmlns:p="http://schemas.openxmlformats.org/presentationml/2006/main" xmlns:r="http://schemas.openxmlformats.org/officeDocument/2006/relationships">
   <p:cSld>
     <p:spTree>
@@ -26311,7 +28655,7 @@
                 </a:solidFill>
                 <a:latin typeface="Microsoft JhengHei"/>
               </a:rPr>
-              <a:t>從這一頁到第 16 頁都用這一組數字</a:t>
+              <a:t>從這一頁到第 17 頁都用這一組數字</a:t>
             </a:r>
           </a:p>
         </p:txBody>
@@ -27203,1549 +29547,6 @@
       <p:bldP spid="8" grpId="0" animBg="1"/>
       <p:bldP spid="9" grpId="0" animBg="1"/>
       <p:bldP spid="10" grpId="0" animBg="1"/>
-    </p:bldLst>
-  </p:timing>
-</p:sld>
-</file>
-
-<file path=ppt/slides/slide9.xml><?xml version="1.0" encoding="utf-8"?>
-<p:sld xmlns:a="http://schemas.openxmlformats.org/drawingml/2006/main" xmlns:p="http://schemas.openxmlformats.org/presentationml/2006/main" xmlns:r="http://schemas.openxmlformats.org/officeDocument/2006/relationships">
-  <p:cSld>
-    <p:spTree>
-      <p:nvGrpSpPr>
-        <p:cNvPr id="1" name=""/>
-        <p:cNvGrpSpPr/>
-        <p:nvPr/>
-      </p:nvGrpSpPr>
-      <p:grpSpPr/>
-      <p:sp>
-        <p:nvSpPr>
-          <p:cNvPr id="2" name="Rectangle 1"/>
-          <p:cNvSpPr/>
-          <p:nvPr/>
-        </p:nvSpPr>
-        <p:spPr>
-          <a:xfrm>
-            <a:off x="0" y="0"/>
-            <a:ext cx="12191695" cy="6858000"/>
-          </a:xfrm>
-          <a:prstGeom prst="rect">
-            <a:avLst/>
-          </a:prstGeom>
-          <a:solidFill>
-            <a:srgbClr val="FFFFFF"/>
-          </a:solidFill>
-          <a:ln>
-            <a:noFill/>
-          </a:ln>
-          <a:effectLst/>
-        </p:spPr>
-        <p:style>
-          <a:lnRef idx="1">
-            <a:schemeClr val="accent1"/>
-          </a:lnRef>
-          <a:fillRef idx="3">
-            <a:schemeClr val="accent1"/>
-          </a:fillRef>
-          <a:effectRef idx="2">
-            <a:schemeClr val="accent1"/>
-          </a:effectRef>
-          <a:fontRef idx="minor">
-            <a:schemeClr val="lt1"/>
-          </a:fontRef>
-        </p:style>
-        <p:txBody>
-          <a:bodyPr rtlCol="0" anchor="ctr"/>
-          <a:lstStyle/>
-          <a:p>
-            <a:pPr algn="ctr"/>
-          </a:p>
-        </p:txBody>
-      </p:sp>
-      <p:sp>
-        <p:nvSpPr>
-          <p:cNvPr id="3" name="Rectangle 2"/>
-          <p:cNvSpPr/>
-          <p:nvPr/>
-        </p:nvSpPr>
-        <p:spPr>
-          <a:xfrm>
-            <a:off x="0" y="0"/>
-            <a:ext cx="12191695" cy="868680"/>
-          </a:xfrm>
-          <a:prstGeom prst="rect">
-            <a:avLst/>
-          </a:prstGeom>
-          <a:solidFill>
-            <a:srgbClr val="1F4E79"/>
-          </a:solidFill>
-          <a:ln>
-            <a:noFill/>
-          </a:ln>
-          <a:effectLst/>
-        </p:spPr>
-        <p:style>
-          <a:lnRef idx="1">
-            <a:schemeClr val="accent1"/>
-          </a:lnRef>
-          <a:fillRef idx="3">
-            <a:schemeClr val="accent1"/>
-          </a:fillRef>
-          <a:effectRef idx="2">
-            <a:schemeClr val="accent1"/>
-          </a:effectRef>
-          <a:fontRef idx="minor">
-            <a:schemeClr val="lt1"/>
-          </a:fontRef>
-        </p:style>
-        <p:txBody>
-          <a:bodyPr rtlCol="0" anchor="ctr"/>
-          <a:lstStyle/>
-          <a:p>
-            <a:pPr algn="ctr"/>
-          </a:p>
-        </p:txBody>
-      </p:sp>
-      <p:sp>
-        <p:nvSpPr>
-          <p:cNvPr id="4" name="TextBox 3"/>
-          <p:cNvSpPr txBox="1"/>
-          <p:nvPr/>
-        </p:nvSpPr>
-        <p:spPr>
-          <a:xfrm>
-            <a:off x="411480" y="73152"/>
-            <a:ext cx="11338560" cy="457200"/>
-          </a:xfrm>
-          <a:prstGeom prst="rect">
-            <a:avLst/>
-          </a:prstGeom>
-          <a:noFill/>
-        </p:spPr>
-        <p:txBody>
-          <a:bodyPr wrap="square">
-            <a:spAutoFit/>
-          </a:bodyPr>
-          <a:lstStyle/>
-          <a:p>
-            <a:pPr algn="just"/>
-            <a:r>
-              <a:rPr sz="2700" b="1">
-                <a:solidFill>
-                  <a:srgbClr val="FFFFFF"/>
-                </a:solidFill>
-                <a:latin typeface="Microsoft JhengHei"/>
-              </a:rPr>
-              <a:t>二、帶溫度的 softmax：T = 1</a:t>
-            </a:r>
-          </a:p>
-        </p:txBody>
-      </p:sp>
-      <p:sp>
-        <p:nvSpPr>
-          <p:cNvPr id="5" name="TextBox 4"/>
-          <p:cNvSpPr txBox="1"/>
-          <p:nvPr/>
-        </p:nvSpPr>
-        <p:spPr>
-          <a:xfrm>
-            <a:off x="411480" y="521207"/>
-            <a:ext cx="11338560" cy="301752"/>
-          </a:xfrm>
-          <a:prstGeom prst="rect">
-            <a:avLst/>
-          </a:prstGeom>
-          <a:noFill/>
-        </p:spPr>
-        <p:txBody>
-          <a:bodyPr wrap="square">
-            <a:spAutoFit/>
-          </a:bodyPr>
-          <a:lstStyle/>
-          <a:p>
-            <a:pPr algn="just"/>
-            <a:r>
-              <a:rPr sz="1300" b="0">
-                <a:solidFill>
-                  <a:srgbClr val="C7D6E5"/>
-                </a:solidFill>
-                <a:latin typeface="Microsoft JhengHei"/>
-              </a:rPr>
-              <a:t>論文式 (1)；T 通常設為 1</a:t>
-            </a:r>
-          </a:p>
-        </p:txBody>
-      </p:sp>
-      <p:pic>
-        <p:nvPicPr>
-          <p:cNvPr id="6" name="Picture 5" descr="m_softmax.png"/>
-          <p:cNvPicPr>
-            <a:picLocks noChangeAspect="1"/>
-          </p:cNvPicPr>
-          <p:nvPr/>
-        </p:nvPicPr>
-        <p:blipFill>
-          <a:blip r:embed="rId2"/>
-          <a:stretch>
-            <a:fillRect/>
-          </a:stretch>
-        </p:blipFill>
-        <p:spPr>
-          <a:xfrm>
-            <a:off x="822960" y="1051560"/>
-            <a:ext cx="1867014" cy="868680"/>
-          </a:xfrm>
-          <a:prstGeom prst="rect">
-            <a:avLst/>
-          </a:prstGeom>
-        </p:spPr>
-      </p:pic>
-      <p:sp>
-        <p:nvSpPr>
-          <p:cNvPr id="7" name="TextBox 6"/>
-          <p:cNvSpPr txBox="1"/>
-          <p:nvPr/>
-        </p:nvSpPr>
-        <p:spPr>
-          <a:xfrm>
-            <a:off x="4754880" y="1097280"/>
-            <a:ext cx="6949440" cy="914400"/>
-          </a:xfrm>
-          <a:prstGeom prst="rect">
-            <a:avLst/>
-          </a:prstGeom>
-          <a:noFill/>
-        </p:spPr>
-        <p:txBody>
-          <a:bodyPr wrap="square">
-            <a:spAutoFit/>
-          </a:bodyPr>
-          <a:lstStyle/>
-          <a:p>
-            <a:pPr algn="just"/>
-            <a:r>
-              <a:rPr sz="1800" b="0">
-                <a:solidFill>
-                  <a:srgbClr val="202020"/>
-                </a:solidFill>
-                <a:latin typeface="Microsoft JhengHei"/>
-              </a:rPr>
-              <a:t>softmax 把每個類別算出的 logit z_i 與其他 logit 比較，</a:t>
-            </a:r>
-          </a:p>
-          <a:p>
-            <a:pPr algn="just"/>
-            <a:r>
-              <a:rPr sz="1800" b="0">
-                <a:solidFill>
-                  <a:srgbClr val="202020"/>
-                </a:solidFill>
-                <a:latin typeface="Microsoft JhengHei"/>
-              </a:rPr>
-              <a:t>轉成機率 q_i；T 是溫度。</a:t>
-            </a:r>
-          </a:p>
-        </p:txBody>
-      </p:sp>
-      <p:graphicFrame>
-        <p:nvGraphicFramePr>
-          <p:cNvPr id="8" name="Table 7"/>
-          <p:cNvGraphicFramePr>
-            <a:graphicFrameLocks noGrp="1"/>
-          </p:cNvGraphicFramePr>
-          <p:nvPr/>
-        </p:nvGraphicFramePr>
-        <p:xfrm>
-          <a:off x="731520" y="2240280"/>
-          <a:ext cx="1188720" cy="1316736"/>
-        </p:xfrm>
-        <a:graphic>
-          <a:graphicData uri="http://schemas.openxmlformats.org/drawingml/2006/table">
-            <a:tbl>
-              <a:tblPr bandRow="1">
-                <a:tableStyleId>{5C22544A-7EE6-4342-B048-85BDC9FD1C3A}</a:tableStyleId>
-              </a:tblPr>
-              <a:tblGrid>
-                <a:gridCol w="1188720"/>
-              </a:tblGrid>
-              <a:tr h="329184">
-                <a:tc>
-                  <a:txBody>
-                    <a:bodyPr/>
-                    <a:lstStyle/>
-                    <a:p>
-                      <a:pPr algn="ctr"/>
-                      <a:r>
-                        <a:rPr sz="1500" b="1">
-                          <a:solidFill>
-                            <a:srgbClr val="FFFFFF"/>
-                          </a:solidFill>
-                          <a:latin typeface="Microsoft JhengHei"/>
-                        </a:rPr>
-                        <a:t>類別</a:t>
-                      </a:r>
-                    </a:p>
-                  </a:txBody>
-                  <a:tcPr marL="36576" marR="36576" marT="9144" marB="9144">
-                    <a:solidFill>
-                      <a:srgbClr val="1F4E79"/>
-                    </a:solidFill>
-                  </a:tcPr>
-                </a:tc>
-              </a:tr>
-              <a:tr h="329184">
-                <a:tc>
-                  <a:txBody>
-                    <a:bodyPr/>
-                    <a:lstStyle/>
-                    <a:p>
-                      <a:pPr algn="ctr"/>
-                      <a:r>
-                        <a:rPr sz="1500" b="0">
-                          <a:solidFill>
-                            <a:srgbClr val="202020"/>
-                          </a:solidFill>
-                          <a:latin typeface="Consolas"/>
-                        </a:rPr>
-                        <a:t>2</a:t>
-                      </a:r>
-                    </a:p>
-                  </a:txBody>
-                  <a:tcPr marL="36576" marR="36576" marT="9144" marB="9144">
-                    <a:solidFill>
-                      <a:srgbClr val="FFFFFF"/>
-                    </a:solidFill>
-                  </a:tcPr>
-                </a:tc>
-              </a:tr>
-              <a:tr h="329184">
-                <a:tc>
-                  <a:txBody>
-                    <a:bodyPr/>
-                    <a:lstStyle/>
-                    <a:p>
-                      <a:pPr algn="ctr"/>
-                      <a:r>
-                        <a:rPr sz="1500" b="0">
-                          <a:solidFill>
-                            <a:srgbClr val="202020"/>
-                          </a:solidFill>
-                          <a:latin typeface="Consolas"/>
-                        </a:rPr>
-                        <a:t>3</a:t>
-                      </a:r>
-                    </a:p>
-                  </a:txBody>
-                  <a:tcPr marL="36576" marR="36576" marT="9144" marB="9144">
-                    <a:solidFill>
-                      <a:srgbClr val="FFFFFF"/>
-                    </a:solidFill>
-                  </a:tcPr>
-                </a:tc>
-              </a:tr>
-              <a:tr h="329184">
-                <a:tc>
-                  <a:txBody>
-                    <a:bodyPr/>
-                    <a:lstStyle/>
-                    <a:p>
-                      <a:pPr algn="ctr"/>
-                      <a:r>
-                        <a:rPr sz="1500" b="0">
-                          <a:solidFill>
-                            <a:srgbClr val="202020"/>
-                          </a:solidFill>
-                          <a:latin typeface="Consolas"/>
-                        </a:rPr>
-                        <a:t>7</a:t>
-                      </a:r>
-                    </a:p>
-                  </a:txBody>
-                  <a:tcPr marL="36576" marR="36576" marT="9144" marB="9144">
-                    <a:solidFill>
-                      <a:srgbClr val="FFFFFF"/>
-                    </a:solidFill>
-                  </a:tcPr>
-                </a:tc>
-              </a:tr>
-            </a:tbl>
-          </a:graphicData>
-        </a:graphic>
-      </p:graphicFrame>
-      <p:graphicFrame>
-        <p:nvGraphicFramePr>
-          <p:cNvPr id="9" name="Table 8"/>
-          <p:cNvGraphicFramePr>
-            <a:graphicFrameLocks noGrp="1"/>
-          </p:cNvGraphicFramePr>
-          <p:nvPr/>
-        </p:nvGraphicFramePr>
-        <p:xfrm>
-          <a:off x="2057400" y="2240280"/>
-          <a:ext cx="1463040" cy="1316736"/>
-        </p:xfrm>
-        <a:graphic>
-          <a:graphicData uri="http://schemas.openxmlformats.org/drawingml/2006/table">
-            <a:tbl>
-              <a:tblPr bandRow="1">
-                <a:tableStyleId>{5C22544A-7EE6-4342-B048-85BDC9FD1C3A}</a:tableStyleId>
-              </a:tblPr>
-              <a:tblGrid>
-                <a:gridCol w="1463040"/>
-              </a:tblGrid>
-              <a:tr h="329184">
-                <a:tc>
-                  <a:txBody>
-                    <a:bodyPr/>
-                    <a:lstStyle/>
-                    <a:p>
-                      <a:pPr algn="ctr"/>
-                      <a:r>
-                        <a:rPr sz="1500" b="1">
-                          <a:solidFill>
-                            <a:srgbClr val="FFFFFF"/>
-                          </a:solidFill>
-                          <a:latin typeface="Microsoft JhengHei"/>
-                        </a:rPr>
-                        <a:t>v</a:t>
-                      </a:r>
-                    </a:p>
-                  </a:txBody>
-                  <a:tcPr marL="36576" marR="36576" marT="9144" marB="9144">
-                    <a:solidFill>
-                      <a:srgbClr val="1F4E79"/>
-                    </a:solidFill>
-                  </a:tcPr>
-                </a:tc>
-              </a:tr>
-              <a:tr h="329184">
-                <a:tc>
-                  <a:txBody>
-                    <a:bodyPr/>
-                    <a:lstStyle/>
-                    <a:p>
-                      <a:pPr algn="ctr"/>
-                      <a:r>
-                        <a:rPr sz="1500" b="0">
-                          <a:solidFill>
-                            <a:srgbClr val="202020"/>
-                          </a:solidFill>
-                          <a:latin typeface="Consolas"/>
-                        </a:rPr>
-                        <a:t>8</a:t>
-                      </a:r>
-                    </a:p>
-                  </a:txBody>
-                  <a:tcPr marL="36576" marR="36576" marT="9144" marB="9144">
-                    <a:solidFill>
-                      <a:srgbClr val="FFFFFF"/>
-                    </a:solidFill>
-                  </a:tcPr>
-                </a:tc>
-              </a:tr>
-              <a:tr h="329184">
-                <a:tc>
-                  <a:txBody>
-                    <a:bodyPr/>
-                    <a:lstStyle/>
-                    <a:p>
-                      <a:pPr algn="ctr"/>
-                      <a:r>
-                        <a:rPr sz="1500" b="0">
-                          <a:solidFill>
-                            <a:srgbClr val="202020"/>
-                          </a:solidFill>
-                          <a:latin typeface="Consolas"/>
-                        </a:rPr>
-                        <a:t>4</a:t>
-                      </a:r>
-                    </a:p>
-                  </a:txBody>
-                  <a:tcPr marL="36576" marR="36576" marT="9144" marB="9144">
-                    <a:solidFill>
-                      <a:srgbClr val="FFFFFF"/>
-                    </a:solidFill>
-                  </a:tcPr>
-                </a:tc>
-              </a:tr>
-              <a:tr h="329184">
-                <a:tc>
-                  <a:txBody>
-                    <a:bodyPr/>
-                    <a:lstStyle/>
-                    <a:p>
-                      <a:pPr algn="ctr"/>
-                      <a:r>
-                        <a:rPr sz="1500" b="0">
-                          <a:solidFill>
-                            <a:srgbClr val="202020"/>
-                          </a:solidFill>
-                          <a:latin typeface="Consolas"/>
-                        </a:rPr>
-                        <a:t>0</a:t>
-                      </a:r>
-                    </a:p>
-                  </a:txBody>
-                  <a:tcPr marL="36576" marR="36576" marT="9144" marB="9144">
-                    <a:solidFill>
-                      <a:srgbClr val="FFFFFF"/>
-                    </a:solidFill>
-                  </a:tcPr>
-                </a:tc>
-              </a:tr>
-            </a:tbl>
-          </a:graphicData>
-        </a:graphic>
-      </p:graphicFrame>
-      <p:graphicFrame>
-        <p:nvGraphicFramePr>
-          <p:cNvPr id="10" name="Table 9"/>
-          <p:cNvGraphicFramePr>
-            <a:graphicFrameLocks noGrp="1"/>
-          </p:cNvGraphicFramePr>
-          <p:nvPr/>
-        </p:nvGraphicFramePr>
-        <p:xfrm>
-          <a:off x="3657600" y="2240280"/>
-          <a:ext cx="1965960" cy="1316736"/>
-        </p:xfrm>
-        <a:graphic>
-          <a:graphicData uri="http://schemas.openxmlformats.org/drawingml/2006/table">
-            <a:tbl>
-              <a:tblPr bandRow="1">
-                <a:tableStyleId>{5C22544A-7EE6-4342-B048-85BDC9FD1C3A}</a:tableStyleId>
-              </a:tblPr>
-              <a:tblGrid>
-                <a:gridCol w="1965960"/>
-              </a:tblGrid>
-              <a:tr h="329184">
-                <a:tc>
-                  <a:txBody>
-                    <a:bodyPr/>
-                    <a:lstStyle/>
-                    <a:p>
-                      <a:pPr algn="ctr"/>
-                      <a:r>
-                        <a:rPr sz="1500" b="1">
-                          <a:solidFill>
-                            <a:srgbClr val="FFFFFF"/>
-                          </a:solidFill>
-                          <a:latin typeface="Microsoft JhengHei"/>
-                        </a:rPr>
-                        <a:t>第 1 步 ÷ T</a:t>
-                      </a:r>
-                    </a:p>
-                  </a:txBody>
-                  <a:tcPr marL="36576" marR="36576" marT="9144" marB="9144">
-                    <a:solidFill>
-                      <a:srgbClr val="1F4E79"/>
-                    </a:solidFill>
-                  </a:tcPr>
-                </a:tc>
-              </a:tr>
-              <a:tr h="329184">
-                <a:tc>
-                  <a:txBody>
-                    <a:bodyPr/>
-                    <a:lstStyle/>
-                    <a:p>
-                      <a:pPr algn="ctr"/>
-                      <a:r>
-                        <a:rPr sz="1500" b="0">
-                          <a:solidFill>
-                            <a:srgbClr val="202020"/>
-                          </a:solidFill>
-                          <a:latin typeface="Consolas"/>
-                        </a:rPr>
-                        <a:t>8.0000</a:t>
-                      </a:r>
-                    </a:p>
-                  </a:txBody>
-                  <a:tcPr marL="36576" marR="36576" marT="9144" marB="9144">
-                    <a:solidFill>
-                      <a:srgbClr val="FFFFFF"/>
-                    </a:solidFill>
-                  </a:tcPr>
-                </a:tc>
-              </a:tr>
-              <a:tr h="329184">
-                <a:tc>
-                  <a:txBody>
-                    <a:bodyPr/>
-                    <a:lstStyle/>
-                    <a:p>
-                      <a:pPr algn="ctr"/>
-                      <a:r>
-                        <a:rPr sz="1500" b="0">
-                          <a:solidFill>
-                            <a:srgbClr val="202020"/>
-                          </a:solidFill>
-                          <a:latin typeface="Consolas"/>
-                        </a:rPr>
-                        <a:t>4.0000</a:t>
-                      </a:r>
-                    </a:p>
-                  </a:txBody>
-                  <a:tcPr marL="36576" marR="36576" marT="9144" marB="9144">
-                    <a:solidFill>
-                      <a:srgbClr val="FFFFFF"/>
-                    </a:solidFill>
-                  </a:tcPr>
-                </a:tc>
-              </a:tr>
-              <a:tr h="329184">
-                <a:tc>
-                  <a:txBody>
-                    <a:bodyPr/>
-                    <a:lstStyle/>
-                    <a:p>
-                      <a:pPr algn="ctr"/>
-                      <a:r>
-                        <a:rPr sz="1500" b="0">
-                          <a:solidFill>
-                            <a:srgbClr val="202020"/>
-                          </a:solidFill>
-                          <a:latin typeface="Consolas"/>
-                        </a:rPr>
-                        <a:t>0.0000</a:t>
-                      </a:r>
-                    </a:p>
-                  </a:txBody>
-                  <a:tcPr marL="36576" marR="36576" marT="9144" marB="9144">
-                    <a:solidFill>
-                      <a:srgbClr val="FFFFFF"/>
-                    </a:solidFill>
-                  </a:tcPr>
-                </a:tc>
-              </a:tr>
-            </a:tbl>
-          </a:graphicData>
-        </a:graphic>
-      </p:graphicFrame>
-      <p:graphicFrame>
-        <p:nvGraphicFramePr>
-          <p:cNvPr id="11" name="Table 10"/>
-          <p:cNvGraphicFramePr>
-            <a:graphicFrameLocks noGrp="1"/>
-          </p:cNvGraphicFramePr>
-          <p:nvPr/>
-        </p:nvGraphicFramePr>
-        <p:xfrm>
-          <a:off x="5760720" y="2240280"/>
-          <a:ext cx="2240279" cy="1316736"/>
-        </p:xfrm>
-        <a:graphic>
-          <a:graphicData uri="http://schemas.openxmlformats.org/drawingml/2006/table">
-            <a:tbl>
-              <a:tblPr bandRow="1">
-                <a:tableStyleId>{5C22544A-7EE6-4342-B048-85BDC9FD1C3A}</a:tableStyleId>
-              </a:tblPr>
-              <a:tblGrid>
-                <a:gridCol w="2240279"/>
-              </a:tblGrid>
-              <a:tr h="329184">
-                <a:tc>
-                  <a:txBody>
-                    <a:bodyPr/>
-                    <a:lstStyle/>
-                    <a:p>
-                      <a:pPr algn="ctr"/>
-                      <a:r>
-                        <a:rPr sz="1500" b="1">
-                          <a:solidFill>
-                            <a:srgbClr val="FFFFFF"/>
-                          </a:solidFill>
-                          <a:latin typeface="Microsoft JhengHei"/>
-                        </a:rPr>
-                        <a:t>第 2 步 exp</a:t>
-                      </a:r>
-                    </a:p>
-                  </a:txBody>
-                  <a:tcPr marL="36576" marR="36576" marT="9144" marB="9144">
-                    <a:solidFill>
-                      <a:srgbClr val="1F4E79"/>
-                    </a:solidFill>
-                  </a:tcPr>
-                </a:tc>
-              </a:tr>
-              <a:tr h="329184">
-                <a:tc>
-                  <a:txBody>
-                    <a:bodyPr/>
-                    <a:lstStyle/>
-                    <a:p>
-                      <a:pPr algn="ctr"/>
-                      <a:r>
-                        <a:rPr sz="1500" b="0">
-                          <a:solidFill>
-                            <a:srgbClr val="202020"/>
-                          </a:solidFill>
-                          <a:latin typeface="Consolas"/>
-                        </a:rPr>
-                        <a:t>2980.9580</a:t>
-                      </a:r>
-                    </a:p>
-                  </a:txBody>
-                  <a:tcPr marL="36576" marR="36576" marT="9144" marB="9144">
-                    <a:solidFill>
-                      <a:srgbClr val="FFFFFF"/>
-                    </a:solidFill>
-                  </a:tcPr>
-                </a:tc>
-              </a:tr>
-              <a:tr h="329184">
-                <a:tc>
-                  <a:txBody>
-                    <a:bodyPr/>
-                    <a:lstStyle/>
-                    <a:p>
-                      <a:pPr algn="ctr"/>
-                      <a:r>
-                        <a:rPr sz="1500" b="0">
-                          <a:solidFill>
-                            <a:srgbClr val="202020"/>
-                          </a:solidFill>
-                          <a:latin typeface="Consolas"/>
-                        </a:rPr>
-                        <a:t>54.5982</a:t>
-                      </a:r>
-                    </a:p>
-                  </a:txBody>
-                  <a:tcPr marL="36576" marR="36576" marT="9144" marB="9144">
-                    <a:solidFill>
-                      <a:srgbClr val="FFFFFF"/>
-                    </a:solidFill>
-                  </a:tcPr>
-                </a:tc>
-              </a:tr>
-              <a:tr h="329184">
-                <a:tc>
-                  <a:txBody>
-                    <a:bodyPr/>
-                    <a:lstStyle/>
-                    <a:p>
-                      <a:pPr algn="ctr"/>
-                      <a:r>
-                        <a:rPr sz="1500" b="0">
-                          <a:solidFill>
-                            <a:srgbClr val="202020"/>
-                          </a:solidFill>
-                          <a:latin typeface="Consolas"/>
-                        </a:rPr>
-                        <a:t>1.0000</a:t>
-                      </a:r>
-                    </a:p>
-                  </a:txBody>
-                  <a:tcPr marL="36576" marR="36576" marT="9144" marB="9144">
-                    <a:solidFill>
-                      <a:srgbClr val="FFFFFF"/>
-                    </a:solidFill>
-                  </a:tcPr>
-                </a:tc>
-              </a:tr>
-            </a:tbl>
-          </a:graphicData>
-        </a:graphic>
-      </p:graphicFrame>
-      <p:sp>
-        <p:nvSpPr>
-          <p:cNvPr id="12" name="Rectangle 11"/>
-          <p:cNvSpPr/>
-          <p:nvPr/>
-        </p:nvSpPr>
-        <p:spPr>
-          <a:xfrm>
-            <a:off x="8138160" y="2240280"/>
-            <a:ext cx="1737360" cy="1316736"/>
-          </a:xfrm>
-          <a:prstGeom prst="rect">
-            <a:avLst/>
-          </a:prstGeom>
-          <a:solidFill>
-            <a:srgbClr val="DAE6F2"/>
-          </a:solidFill>
-          <a:ln>
-            <a:solidFill>
-              <a:srgbClr val="D0D7DE"/>
-            </a:solidFill>
-          </a:ln>
-          <a:effectLst/>
-        </p:spPr>
-        <p:style>
-          <a:lnRef idx="1">
-            <a:schemeClr val="accent1"/>
-          </a:lnRef>
-          <a:fillRef idx="3">
-            <a:schemeClr val="accent1"/>
-          </a:fillRef>
-          <a:effectRef idx="2">
-            <a:schemeClr val="accent1"/>
-          </a:effectRef>
-          <a:fontRef idx="minor">
-            <a:schemeClr val="lt1"/>
-          </a:fontRef>
-        </p:style>
-        <p:txBody>
-          <a:bodyPr rtlCol="0" anchor="ctr" wrap="square"/>
-          <a:lstStyle/>
-          <a:p>
-            <a:pPr algn="ctr"/>
-            <a:r>
-              <a:rPr sz="1700" b="1">
-                <a:solidFill>
-                  <a:srgbClr val="1F4E79"/>
-                </a:solidFill>
-                <a:latin typeface="Microsoft JhengHei"/>
-              </a:rPr>
-              <a:t>第 3 步 加總</a:t>
-            </a:r>
-          </a:p>
-          <a:p>
-            <a:pPr algn="ctr"/>
-            <a:r>
-              <a:rPr sz="1700" b="1">
-                <a:solidFill>
-                  <a:srgbClr val="1F4E79"/>
-                </a:solidFill>
-                <a:latin typeface="Microsoft JhengHei"/>
-              </a:rPr>
-              <a:t>3036.5561</a:t>
-            </a:r>
-          </a:p>
-        </p:txBody>
-      </p:sp>
-      <p:graphicFrame>
-        <p:nvGraphicFramePr>
-          <p:cNvPr id="13" name="Table 12"/>
-          <p:cNvGraphicFramePr>
-            <a:graphicFrameLocks noGrp="1"/>
-          </p:cNvGraphicFramePr>
-          <p:nvPr/>
-        </p:nvGraphicFramePr>
-        <p:xfrm>
-          <a:off x="10012680" y="2240280"/>
-          <a:ext cx="1783080" cy="1316736"/>
-        </p:xfrm>
-        <a:graphic>
-          <a:graphicData uri="http://schemas.openxmlformats.org/drawingml/2006/table">
-            <a:tbl>
-              <a:tblPr bandRow="1">
-                <a:tableStyleId>{5C22544A-7EE6-4342-B048-85BDC9FD1C3A}</a:tableStyleId>
-              </a:tblPr>
-              <a:tblGrid>
-                <a:gridCol w="1783080"/>
-              </a:tblGrid>
-              <a:tr h="329184">
-                <a:tc>
-                  <a:txBody>
-                    <a:bodyPr/>
-                    <a:lstStyle/>
-                    <a:p>
-                      <a:pPr algn="ctr"/>
-                      <a:r>
-                        <a:rPr sz="1500" b="1">
-                          <a:solidFill>
-                            <a:srgbClr val="FFFFFF"/>
-                          </a:solidFill>
-                          <a:latin typeface="Microsoft JhengHei"/>
-                        </a:rPr>
-                        <a:t>第 4 步 p</a:t>
-                      </a:r>
-                    </a:p>
-                  </a:txBody>
-                  <a:tcPr marL="36576" marR="36576" marT="9144" marB="9144">
-                    <a:solidFill>
-                      <a:srgbClr val="1F4E79"/>
-                    </a:solidFill>
-                  </a:tcPr>
-                </a:tc>
-              </a:tr>
-              <a:tr h="329184">
-                <a:tc>
-                  <a:txBody>
-                    <a:bodyPr/>
-                    <a:lstStyle/>
-                    <a:p>
-                      <a:pPr algn="ctr"/>
-                      <a:r>
-                        <a:rPr sz="1500" b="0">
-                          <a:solidFill>
-                            <a:srgbClr val="202020"/>
-                          </a:solidFill>
-                          <a:latin typeface="Consolas"/>
-                        </a:rPr>
-                        <a:t>0.9817</a:t>
-                      </a:r>
-                    </a:p>
-                  </a:txBody>
-                  <a:tcPr marL="36576" marR="36576" marT="9144" marB="9144">
-                    <a:solidFill>
-                      <a:srgbClr val="FFFFFF"/>
-                    </a:solidFill>
-                  </a:tcPr>
-                </a:tc>
-              </a:tr>
-              <a:tr h="329184">
-                <a:tc>
-                  <a:txBody>
-                    <a:bodyPr/>
-                    <a:lstStyle/>
-                    <a:p>
-                      <a:pPr algn="ctr"/>
-                      <a:r>
-                        <a:rPr sz="1500" b="0">
-                          <a:solidFill>
-                            <a:srgbClr val="202020"/>
-                          </a:solidFill>
-                          <a:latin typeface="Consolas"/>
-                        </a:rPr>
-                        <a:t>0.0180</a:t>
-                      </a:r>
-                    </a:p>
-                  </a:txBody>
-                  <a:tcPr marL="36576" marR="36576" marT="9144" marB="9144">
-                    <a:solidFill>
-                      <a:srgbClr val="FFF3CD"/>
-                    </a:solidFill>
-                  </a:tcPr>
-                </a:tc>
-              </a:tr>
-              <a:tr h="329184">
-                <a:tc>
-                  <a:txBody>
-                    <a:bodyPr/>
-                    <a:lstStyle/>
-                    <a:p>
-                      <a:pPr algn="ctr"/>
-                      <a:r>
-                        <a:rPr sz="1500" b="0">
-                          <a:solidFill>
-                            <a:srgbClr val="202020"/>
-                          </a:solidFill>
-                          <a:latin typeface="Consolas"/>
-                        </a:rPr>
-                        <a:t>0.0003</a:t>
-                      </a:r>
-                    </a:p>
-                  </a:txBody>
-                  <a:tcPr marL="36576" marR="36576" marT="9144" marB="9144">
-                    <a:solidFill>
-                      <a:srgbClr val="FFF3CD"/>
-                    </a:solidFill>
-                  </a:tcPr>
-                </a:tc>
-              </a:tr>
-            </a:tbl>
-          </a:graphicData>
-        </a:graphic>
-      </p:graphicFrame>
-      <p:sp>
-        <p:nvSpPr>
-          <p:cNvPr id="14" name="Rectangle 13"/>
-          <p:cNvSpPr/>
-          <p:nvPr/>
-        </p:nvSpPr>
-        <p:spPr>
-          <a:xfrm>
-            <a:off x="731520" y="3931920"/>
-            <a:ext cx="10881360" cy="1051560"/>
-          </a:xfrm>
-          <a:prstGeom prst="rect">
-            <a:avLst/>
-          </a:prstGeom>
-          <a:solidFill>
-            <a:srgbClr val="FFF3CD"/>
-          </a:solidFill>
-          <a:ln>
-            <a:solidFill>
-              <a:srgbClr val="D0D7DE"/>
-            </a:solidFill>
-          </a:ln>
-          <a:effectLst/>
-        </p:spPr>
-        <p:style>
-          <a:lnRef idx="1">
-            <a:schemeClr val="accent1"/>
-          </a:lnRef>
-          <a:fillRef idx="3">
-            <a:schemeClr val="accent1"/>
-          </a:fillRef>
-          <a:effectRef idx="2">
-            <a:schemeClr val="accent1"/>
-          </a:effectRef>
-          <a:fontRef idx="minor">
-            <a:schemeClr val="lt1"/>
-          </a:fontRef>
-        </p:style>
-        <p:txBody>
-          <a:bodyPr rtlCol="0" anchor="ctr" wrap="square"/>
-          <a:lstStyle/>
-          <a:p>
-            <a:pPr algn="just"/>
-            <a:r>
-              <a:rPr sz="1800" b="1">
-                <a:solidFill>
-                  <a:srgbClr val="C03030"/>
-                </a:solidFill>
-                <a:latin typeface="Microsoft JhengHei"/>
-              </a:rPr>
-              <a:t>3 和 7 的機率是 0.0180 與 0.0003。「這個 2 比較像 3、不像 7」的資訊雖然存在，</a:t>
-            </a:r>
-          </a:p>
-          <a:p>
-            <a:pPr algn="just"/>
-            <a:r>
-              <a:rPr sz="1800" b="1">
-                <a:solidFill>
-                  <a:srgbClr val="C03030"/>
-                </a:solidFill>
-                <a:latin typeface="Microsoft JhengHei"/>
-              </a:rPr>
-              <a:t>對交叉熵代價函數卻幾乎沒有影響。</a:t>
-            </a:r>
-          </a:p>
-        </p:txBody>
-      </p:sp>
-      <p:sp>
-        <p:nvSpPr>
-          <p:cNvPr id="15" name="TextBox 14"/>
-          <p:cNvSpPr txBox="1"/>
-          <p:nvPr/>
-        </p:nvSpPr>
-        <p:spPr>
-          <a:xfrm>
-            <a:off x="731520" y="5166360"/>
-            <a:ext cx="10881360" cy="914400"/>
-          </a:xfrm>
-          <a:prstGeom prst="rect">
-            <a:avLst/>
-          </a:prstGeom>
-          <a:noFill/>
-        </p:spPr>
-        <p:txBody>
-          <a:bodyPr wrap="square">
-            <a:spAutoFit/>
-          </a:bodyPr>
-          <a:lstStyle/>
-          <a:p>
-            <a:pPr algn="just"/>
-            <a:r>
-              <a:rPr sz="1700" b="0">
-                <a:solidFill>
-                  <a:srgbClr val="59636E"/>
-                </a:solidFill>
-                <a:latin typeface="Microsoft JhengHei"/>
-              </a:rPr>
-              <a:t>核對：exp(8) = 2980.9580，exp(4) = 54.5982，exp(0) = 1，三者相加 3036.5561。</a:t>
-            </a:r>
-          </a:p>
-        </p:txBody>
-      </p:sp>
-    </p:spTree>
-  </p:cSld>
-  <p:clrMapOvr>
-    <a:masterClrMapping/>
-  </p:clrMapOvr>
-  <p:timing>
-    <p:tnLst>
-      <p:par>
-        <p:cTn id="1" dur="indefinite" restart="never" nodeType="tmRoot">
-          <p:childTnLst>
-            <p:seq concurrent="1" nextAc="seek">
-              <p:cTn id="2" dur="indefinite" nodeType="mainSeq">
-                <p:childTnLst>
-                  <p:par>
-                    <p:cTn id="3" fill="hold">
-                      <p:stCondLst>
-                        <p:cond delay="indefinite"/>
-                      </p:stCondLst>
-                      <p:childTnLst>
-                        <p:par>
-                          <p:cTn id="4" fill="hold">
-                            <p:stCondLst>
-                              <p:cond delay="0"/>
-                            </p:stCondLst>
-                            <p:childTnLst>
-                              <p:par>
-                                <p:cTn id="5" presetID="1" presetClass="entr" presetSubtype="0" fill="hold" grpId="0" nodeType="clickEffect">
-                                  <p:stCondLst>
-                                    <p:cond delay="0"/>
-                                  </p:stCondLst>
-                                  <p:childTnLst>
-                                    <p:set>
-                                      <p:cBhvr>
-                                        <p:cTn id="6" dur="1" fill="hold">
-                                          <p:stCondLst>
-                                            <p:cond delay="0"/>
-                                          </p:stCondLst>
-                                        </p:cTn>
-                                        <p:tgtEl>
-                                          <p:spTgt spid="6"/>
-                                        </p:tgtEl>
-                                        <p:attrNameLst>
-                                          <p:attrName>style.visibility</p:attrName>
-                                        </p:attrNameLst>
-                                      </p:cBhvr>
-                                      <p:to>
-                                        <p:strVal val="visible"/>
-                                      </p:to>
-                                    </p:set>
-                                  </p:childTnLst>
-                                </p:cTn>
-                              </p:par>
-                            </p:childTnLst>
-                          </p:cTn>
-                        </p:par>
-                      </p:childTnLst>
-                    </p:cTn>
-                  </p:par>
-                  <p:par>
-                    <p:cTn id="7" fill="hold">
-                      <p:stCondLst>
-                        <p:cond delay="indefinite"/>
-                      </p:stCondLst>
-                      <p:childTnLst>
-                        <p:par>
-                          <p:cTn id="8" fill="hold">
-                            <p:stCondLst>
-                              <p:cond delay="0"/>
-                            </p:stCondLst>
-                            <p:childTnLst>
-                              <p:par>
-                                <p:cTn id="9" presetID="1" presetClass="entr" presetSubtype="0" fill="hold" grpId="0" nodeType="clickEffect">
-                                  <p:stCondLst>
-                                    <p:cond delay="0"/>
-                                  </p:stCondLst>
-                                  <p:childTnLst>
-                                    <p:set>
-                                      <p:cBhvr>
-                                        <p:cTn id="10" dur="1" fill="hold">
-                                          <p:stCondLst>
-                                            <p:cond delay="0"/>
-                                          </p:stCondLst>
-                                        </p:cTn>
-                                        <p:tgtEl>
-                                          <p:spTgt spid="7"/>
-                                        </p:tgtEl>
-                                        <p:attrNameLst>
-                                          <p:attrName>style.visibility</p:attrName>
-                                        </p:attrNameLst>
-                                      </p:cBhvr>
-                                      <p:to>
-                                        <p:strVal val="visible"/>
-                                      </p:to>
-                                    </p:set>
-                                  </p:childTnLst>
-                                </p:cTn>
-                              </p:par>
-                            </p:childTnLst>
-                          </p:cTn>
-                        </p:par>
-                      </p:childTnLst>
-                    </p:cTn>
-                  </p:par>
-                  <p:par>
-                    <p:cTn id="11" fill="hold">
-                      <p:stCondLst>
-                        <p:cond delay="indefinite"/>
-                      </p:stCondLst>
-                      <p:childTnLst>
-                        <p:par>
-                          <p:cTn id="12" fill="hold">
-                            <p:stCondLst>
-                              <p:cond delay="0"/>
-                            </p:stCondLst>
-                            <p:childTnLst>
-                              <p:par>
-                                <p:cTn id="13" presetID="1" presetClass="entr" presetSubtype="0" fill="hold" grpId="0" nodeType="clickEffect">
-                                  <p:stCondLst>
-                                    <p:cond delay="0"/>
-                                  </p:stCondLst>
-                                  <p:childTnLst>
-                                    <p:set>
-                                      <p:cBhvr>
-                                        <p:cTn id="14" dur="1" fill="hold">
-                                          <p:stCondLst>
-                                            <p:cond delay="0"/>
-                                          </p:stCondLst>
-                                        </p:cTn>
-                                        <p:tgtEl>
-                                          <p:spTgt spid="8"/>
-                                        </p:tgtEl>
-                                        <p:attrNameLst>
-                                          <p:attrName>style.visibility</p:attrName>
-                                        </p:attrNameLst>
-                                      </p:cBhvr>
-                                      <p:to>
-                                        <p:strVal val="visible"/>
-                                      </p:to>
-                                    </p:set>
-                                  </p:childTnLst>
-                                </p:cTn>
-                              </p:par>
-                            </p:childTnLst>
-                          </p:cTn>
-                        </p:par>
-                      </p:childTnLst>
-                    </p:cTn>
-                  </p:par>
-                  <p:par>
-                    <p:cTn id="15" fill="hold">
-                      <p:stCondLst>
-                        <p:cond delay="indefinite"/>
-                      </p:stCondLst>
-                      <p:childTnLst>
-                        <p:par>
-                          <p:cTn id="16" fill="hold">
-                            <p:stCondLst>
-                              <p:cond delay="0"/>
-                            </p:stCondLst>
-                            <p:childTnLst>
-                              <p:par>
-                                <p:cTn id="17" presetID="1" presetClass="entr" presetSubtype="0" fill="hold" grpId="0" nodeType="clickEffect">
-                                  <p:stCondLst>
-                                    <p:cond delay="0"/>
-                                  </p:stCondLst>
-                                  <p:childTnLst>
-                                    <p:set>
-                                      <p:cBhvr>
-                                        <p:cTn id="18" dur="1" fill="hold">
-                                          <p:stCondLst>
-                                            <p:cond delay="0"/>
-                                          </p:stCondLst>
-                                        </p:cTn>
-                                        <p:tgtEl>
-                                          <p:spTgt spid="9"/>
-                                        </p:tgtEl>
-                                        <p:attrNameLst>
-                                          <p:attrName>style.visibility</p:attrName>
-                                        </p:attrNameLst>
-                                      </p:cBhvr>
-                                      <p:to>
-                                        <p:strVal val="visible"/>
-                                      </p:to>
-                                    </p:set>
-                                  </p:childTnLst>
-                                </p:cTn>
-                              </p:par>
-                            </p:childTnLst>
-                          </p:cTn>
-                        </p:par>
-                      </p:childTnLst>
-                    </p:cTn>
-                  </p:par>
-                  <p:par>
-                    <p:cTn id="19" fill="hold">
-                      <p:stCondLst>
-                        <p:cond delay="indefinite"/>
-                      </p:stCondLst>
-                      <p:childTnLst>
-                        <p:par>
-                          <p:cTn id="20" fill="hold">
-                            <p:stCondLst>
-                              <p:cond delay="0"/>
-                            </p:stCondLst>
-                            <p:childTnLst>
-                              <p:par>
-                                <p:cTn id="21" presetID="1" presetClass="entr" presetSubtype="0" fill="hold" grpId="0" nodeType="clickEffect">
-                                  <p:stCondLst>
-                                    <p:cond delay="0"/>
-                                  </p:stCondLst>
-                                  <p:childTnLst>
-                                    <p:set>
-                                      <p:cBhvr>
-                                        <p:cTn id="22" dur="1" fill="hold">
-                                          <p:stCondLst>
-                                            <p:cond delay="0"/>
-                                          </p:stCondLst>
-                                        </p:cTn>
-                                        <p:tgtEl>
-                                          <p:spTgt spid="10"/>
-                                        </p:tgtEl>
-                                        <p:attrNameLst>
-                                          <p:attrName>style.visibility</p:attrName>
-                                        </p:attrNameLst>
-                                      </p:cBhvr>
-                                      <p:to>
-                                        <p:strVal val="visible"/>
-                                      </p:to>
-                                    </p:set>
-                                  </p:childTnLst>
-                                </p:cTn>
-                              </p:par>
-                            </p:childTnLst>
-                          </p:cTn>
-                        </p:par>
-                      </p:childTnLst>
-                    </p:cTn>
-                  </p:par>
-                  <p:par>
-                    <p:cTn id="23" fill="hold">
-                      <p:stCondLst>
-                        <p:cond delay="indefinite"/>
-                      </p:stCondLst>
-                      <p:childTnLst>
-                        <p:par>
-                          <p:cTn id="24" fill="hold">
-                            <p:stCondLst>
-                              <p:cond delay="0"/>
-                            </p:stCondLst>
-                            <p:childTnLst>
-                              <p:par>
-                                <p:cTn id="25" presetID="1" presetClass="entr" presetSubtype="0" fill="hold" grpId="0" nodeType="clickEffect">
-                                  <p:stCondLst>
-                                    <p:cond delay="0"/>
-                                  </p:stCondLst>
-                                  <p:childTnLst>
-                                    <p:set>
-                                      <p:cBhvr>
-                                        <p:cTn id="26" dur="1" fill="hold">
-                                          <p:stCondLst>
-                                            <p:cond delay="0"/>
-                                          </p:stCondLst>
-                                        </p:cTn>
-                                        <p:tgtEl>
-                                          <p:spTgt spid="11"/>
-                                        </p:tgtEl>
-                                        <p:attrNameLst>
-                                          <p:attrName>style.visibility</p:attrName>
-                                        </p:attrNameLst>
-                                      </p:cBhvr>
-                                      <p:to>
-                                        <p:strVal val="visible"/>
-                                      </p:to>
-                                    </p:set>
-                                  </p:childTnLst>
-                                </p:cTn>
-                              </p:par>
-                            </p:childTnLst>
-                          </p:cTn>
-                        </p:par>
-                      </p:childTnLst>
-                    </p:cTn>
-                  </p:par>
-                  <p:par>
-                    <p:cTn id="27" fill="hold">
-                      <p:stCondLst>
-                        <p:cond delay="indefinite"/>
-                      </p:stCondLst>
-                      <p:childTnLst>
-                        <p:par>
-                          <p:cTn id="28" fill="hold">
-                            <p:stCondLst>
-                              <p:cond delay="0"/>
-                            </p:stCondLst>
-                            <p:childTnLst>
-                              <p:par>
-                                <p:cTn id="29" presetID="1" presetClass="entr" presetSubtype="0" fill="hold" grpId="0" nodeType="clickEffect">
-                                  <p:stCondLst>
-                                    <p:cond delay="0"/>
-                                  </p:stCondLst>
-                                  <p:childTnLst>
-                                    <p:set>
-                                      <p:cBhvr>
-                                        <p:cTn id="30" dur="1" fill="hold">
-                                          <p:stCondLst>
-                                            <p:cond delay="0"/>
-                                          </p:stCondLst>
-                                        </p:cTn>
-                                        <p:tgtEl>
-                                          <p:spTgt spid="12"/>
-                                        </p:tgtEl>
-                                        <p:attrNameLst>
-                                          <p:attrName>style.visibility</p:attrName>
-                                        </p:attrNameLst>
-                                      </p:cBhvr>
-                                      <p:to>
-                                        <p:strVal val="visible"/>
-                                      </p:to>
-                                    </p:set>
-                                  </p:childTnLst>
-                                </p:cTn>
-                              </p:par>
-                            </p:childTnLst>
-                          </p:cTn>
-                        </p:par>
-                      </p:childTnLst>
-                    </p:cTn>
-                  </p:par>
-                  <p:par>
-                    <p:cTn id="31" fill="hold">
-                      <p:stCondLst>
-                        <p:cond delay="indefinite"/>
-                      </p:stCondLst>
-                      <p:childTnLst>
-                        <p:par>
-                          <p:cTn id="32" fill="hold">
-                            <p:stCondLst>
-                              <p:cond delay="0"/>
-                            </p:stCondLst>
-                            <p:childTnLst>
-                              <p:par>
-                                <p:cTn id="33" presetID="1" presetClass="entr" presetSubtype="0" fill="hold" grpId="0" nodeType="clickEffect">
-                                  <p:stCondLst>
-                                    <p:cond delay="0"/>
-                                  </p:stCondLst>
-                                  <p:childTnLst>
-                                    <p:set>
-                                      <p:cBhvr>
-                                        <p:cTn id="34" dur="1" fill="hold">
-                                          <p:stCondLst>
-                                            <p:cond delay="0"/>
-                                          </p:stCondLst>
-                                        </p:cTn>
-                                        <p:tgtEl>
-                                          <p:spTgt spid="13"/>
-                                        </p:tgtEl>
-                                        <p:attrNameLst>
-                                          <p:attrName>style.visibility</p:attrName>
-                                        </p:attrNameLst>
-                                      </p:cBhvr>
-                                      <p:to>
-                                        <p:strVal val="visible"/>
-                                      </p:to>
-                                    </p:set>
-                                  </p:childTnLst>
-                                </p:cTn>
-                              </p:par>
-                            </p:childTnLst>
-                          </p:cTn>
-                        </p:par>
-                      </p:childTnLst>
-                    </p:cTn>
-                  </p:par>
-                  <p:par>
-                    <p:cTn id="35" fill="hold">
-                      <p:stCondLst>
-                        <p:cond delay="indefinite"/>
-                      </p:stCondLst>
-                      <p:childTnLst>
-                        <p:par>
-                          <p:cTn id="36" fill="hold">
-                            <p:stCondLst>
-                              <p:cond delay="0"/>
-                            </p:stCondLst>
-                            <p:childTnLst>
-                              <p:par>
-                                <p:cTn id="37" presetID="1" presetClass="entr" presetSubtype="0" fill="hold" grpId="0" nodeType="clickEffect">
-                                  <p:stCondLst>
-                                    <p:cond delay="0"/>
-                                  </p:stCondLst>
-                                  <p:childTnLst>
-                                    <p:set>
-                                      <p:cBhvr>
-                                        <p:cTn id="38" dur="1" fill="hold">
-                                          <p:stCondLst>
-                                            <p:cond delay="0"/>
-                                          </p:stCondLst>
-                                        </p:cTn>
-                                        <p:tgtEl>
-                                          <p:spTgt spid="14"/>
-                                        </p:tgtEl>
-                                        <p:attrNameLst>
-                                          <p:attrName>style.visibility</p:attrName>
-                                        </p:attrNameLst>
-                                      </p:cBhvr>
-                                      <p:to>
-                                        <p:strVal val="visible"/>
-                                      </p:to>
-                                    </p:set>
-                                  </p:childTnLst>
-                                </p:cTn>
-                              </p:par>
-                            </p:childTnLst>
-                          </p:cTn>
-                        </p:par>
-                      </p:childTnLst>
-                    </p:cTn>
-                  </p:par>
-                  <p:par>
-                    <p:cTn id="39" fill="hold">
-                      <p:stCondLst>
-                        <p:cond delay="indefinite"/>
-                      </p:stCondLst>
-                      <p:childTnLst>
-                        <p:par>
-                          <p:cTn id="40" fill="hold">
-                            <p:stCondLst>
-                              <p:cond delay="0"/>
-                            </p:stCondLst>
-                            <p:childTnLst>
-                              <p:par>
-                                <p:cTn id="41" presetID="1" presetClass="entr" presetSubtype="0" fill="hold" grpId="0" nodeType="clickEffect">
-                                  <p:stCondLst>
-                                    <p:cond delay="0"/>
-                                  </p:stCondLst>
-                                  <p:childTnLst>
-                                    <p:set>
-                                      <p:cBhvr>
-                                        <p:cTn id="42" dur="1" fill="hold">
-                                          <p:stCondLst>
-                                            <p:cond delay="0"/>
-                                          </p:stCondLst>
-                                        </p:cTn>
-                                        <p:tgtEl>
-                                          <p:spTgt spid="15"/>
-                                        </p:tgtEl>
-                                        <p:attrNameLst>
-                                          <p:attrName>style.visibility</p:attrName>
-                                        </p:attrNameLst>
-                                      </p:cBhvr>
-                                      <p:to>
-                                        <p:strVal val="visible"/>
-                                      </p:to>
-                                    </p:set>
-                                  </p:childTnLst>
-                                </p:cTn>
-                              </p:par>
-                            </p:childTnLst>
-                          </p:cTn>
-                        </p:par>
-                      </p:childTnLst>
-                    </p:cTn>
-                  </p:par>
-                </p:childTnLst>
-              </p:cTn>
-              <p:prevCondLst>
-                <p:cond evt="onPrev" delay="0">
-                  <p:tgtEl>
-                    <p:sldTgt/>
-                  </p:tgtEl>
-                </p:cond>
-              </p:prevCondLst>
-              <p:nextCondLst>
-                <p:cond evt="onNext" delay="0">
-                  <p:tgtEl>
-                    <p:sldTgt/>
-                  </p:tgtEl>
-                </p:cond>
-              </p:nextCondLst>
-            </p:seq>
-          </p:childTnLst>
-        </p:cTn>
-      </p:par>
-    </p:tnLst>
-    <p:bldLst>
-      <p:bldP spid="6" grpId="0" animBg="1"/>
-      <p:bldP spid="7" grpId="0" animBg="1"/>
-      <p:bldGraphic spid="8" grpId="0">
-        <p:bldAsOne/>
-      </p:bldGraphic>
-      <p:bldGraphic spid="9" grpId="0">
-        <p:bldAsOne/>
-      </p:bldGraphic>
-      <p:bldGraphic spid="10" grpId="0">
-        <p:bldAsOne/>
-      </p:bldGraphic>
-      <p:bldGraphic spid="11" grpId="0">
-        <p:bldAsOne/>
-      </p:bldGraphic>
-      <p:bldP spid="12" grpId="0" animBg="1"/>
-      <p:bldGraphic spid="13" grpId="0">
-        <p:bldAsOne/>
-      </p:bldGraphic>
-      <p:bldP spid="14" grpId="0" animBg="1"/>
-      <p:bldP spid="15" grpId="0" animBg="1"/>
     </p:bldLst>
   </p:timing>
 </p:sld>

--- a/topics/knowledge-distillation/課外主題_知識蒸餾.pptx
+++ b/topics/knowledge-distillation/課外主題_知識蒸餾.pptx
@@ -3315,7 +3315,7 @@
           <a:p>
             <a:pPr algn="l"/>
             <a:r>
-              <a:rPr sz="1700" b="0">
+              <a:rPr sz="1900" b="0">
                 <a:solidFill>
                   <a:srgbClr val="C7D6E5"/>
                 </a:solidFill>
@@ -3327,7 +3327,7 @@
           <a:p>
             <a:pPr algn="l"/>
             <a:r>
-              <a:rPr sz="1700" b="0">
+              <a:rPr sz="1900" b="0">
                 <a:solidFill>
                   <a:srgbClr val="C7D6E5"/>
                 </a:solidFill>
@@ -3362,7 +3362,7 @@
           <a:p>
             <a:pPr algn="l"/>
             <a:r>
-              <a:rPr sz="1400" b="0">
+              <a:rPr sz="1600" b="0">
                 <a:solidFill>
                   <a:srgbClr val="C7D6E5"/>
                 </a:solidFill>
@@ -3616,7 +3616,7 @@
           <a:p>
             <a:pPr algn="just"/>
             <a:r>
-              <a:rPr sz="1300" b="0">
+              <a:rPr sz="1500" b="0">
                 <a:solidFill>
                   <a:srgbClr val="C7D6E5"/>
                 </a:solidFill>
@@ -3675,25 +3675,13 @@
           <a:p>
             <a:pPr algn="just"/>
             <a:r>
-              <a:rPr sz="1800" b="0">
+              <a:rPr sz="2000" b="0">
                 <a:solidFill>
                   <a:srgbClr val="202020"/>
                 </a:solidFill>
                 <a:latin typeface="Microsoft JhengHei"/>
               </a:rPr>
-              <a:t>softmax 把每個類別算出的 logit z_i 與其他 logit 比較，</a:t>
-            </a:r>
-          </a:p>
-          <a:p>
-            <a:pPr algn="just"/>
-            <a:r>
-              <a:rPr sz="1800" b="0">
-                <a:solidFill>
-                  <a:srgbClr val="202020"/>
-                </a:solidFill>
-                <a:latin typeface="Microsoft JhengHei"/>
-              </a:rPr>
-              <a:t>轉成機率 q_i；T 是溫度。</a:t>
+              <a:t>softmax 把每個類別算出的 logit z_i 與其他 logit 比較，轉成機率 q_i；T 是溫度。</a:t>
             </a:r>
           </a:p>
         </p:txBody>
@@ -3727,7 +3715,7 @@
                     <a:p>
                       <a:pPr algn="ctr"/>
                       <a:r>
-                        <a:rPr sz="1500" b="1">
+                        <a:rPr sz="1600" b="1">
                           <a:solidFill>
                             <a:srgbClr val="FFFFFF"/>
                           </a:solidFill>
@@ -3752,7 +3740,7 @@
                     <a:p>
                       <a:pPr algn="ctr"/>
                       <a:r>
-                        <a:rPr sz="1500" b="0">
+                        <a:rPr sz="1600" b="0">
                           <a:solidFill>
                             <a:srgbClr val="202020"/>
                           </a:solidFill>
@@ -3777,7 +3765,7 @@
                     <a:p>
                       <a:pPr algn="ctr"/>
                       <a:r>
-                        <a:rPr sz="1500" b="0">
+                        <a:rPr sz="1600" b="0">
                           <a:solidFill>
                             <a:srgbClr val="202020"/>
                           </a:solidFill>
@@ -3802,7 +3790,7 @@
                     <a:p>
                       <a:pPr algn="ctr"/>
                       <a:r>
-                        <a:rPr sz="1500" b="0">
+                        <a:rPr sz="1600" b="0">
                           <a:solidFill>
                             <a:srgbClr val="202020"/>
                           </a:solidFill>
@@ -3852,7 +3840,7 @@
                     <a:p>
                       <a:pPr algn="ctr"/>
                       <a:r>
-                        <a:rPr sz="1500" b="1">
+                        <a:rPr sz="1600" b="1">
                           <a:solidFill>
                             <a:srgbClr val="FFFFFF"/>
                           </a:solidFill>
@@ -3877,7 +3865,7 @@
                     <a:p>
                       <a:pPr algn="ctr"/>
                       <a:r>
-                        <a:rPr sz="1500" b="0">
+                        <a:rPr sz="1600" b="0">
                           <a:solidFill>
                             <a:srgbClr val="202020"/>
                           </a:solidFill>
@@ -3902,7 +3890,7 @@
                     <a:p>
                       <a:pPr algn="ctr"/>
                       <a:r>
-                        <a:rPr sz="1500" b="0">
+                        <a:rPr sz="1600" b="0">
                           <a:solidFill>
                             <a:srgbClr val="202020"/>
                           </a:solidFill>
@@ -3927,7 +3915,7 @@
                     <a:p>
                       <a:pPr algn="ctr"/>
                       <a:r>
-                        <a:rPr sz="1500" b="0">
+                        <a:rPr sz="1600" b="0">
                           <a:solidFill>
                             <a:srgbClr val="202020"/>
                           </a:solidFill>
@@ -3977,7 +3965,7 @@
                     <a:p>
                       <a:pPr algn="ctr"/>
                       <a:r>
-                        <a:rPr sz="1500" b="1">
+                        <a:rPr sz="1600" b="1">
                           <a:solidFill>
                             <a:srgbClr val="FFFFFF"/>
                           </a:solidFill>
@@ -4002,7 +3990,7 @@
                     <a:p>
                       <a:pPr algn="ctr"/>
                       <a:r>
-                        <a:rPr sz="1500" b="0">
+                        <a:rPr sz="1600" b="0">
                           <a:solidFill>
                             <a:srgbClr val="202020"/>
                           </a:solidFill>
@@ -4027,7 +4015,7 @@
                     <a:p>
                       <a:pPr algn="ctr"/>
                       <a:r>
-                        <a:rPr sz="1500" b="0">
+                        <a:rPr sz="1600" b="0">
                           <a:solidFill>
                             <a:srgbClr val="202020"/>
                           </a:solidFill>
@@ -4052,7 +4040,7 @@
                     <a:p>
                       <a:pPr algn="ctr"/>
                       <a:r>
-                        <a:rPr sz="1500" b="0">
+                        <a:rPr sz="1600" b="0">
                           <a:solidFill>
                             <a:srgbClr val="202020"/>
                           </a:solidFill>
@@ -4102,7 +4090,7 @@
                     <a:p>
                       <a:pPr algn="ctr"/>
                       <a:r>
-                        <a:rPr sz="1500" b="1">
+                        <a:rPr sz="1600" b="1">
                           <a:solidFill>
                             <a:srgbClr val="FFFFFF"/>
                           </a:solidFill>
@@ -4127,7 +4115,7 @@
                     <a:p>
                       <a:pPr algn="ctr"/>
                       <a:r>
-                        <a:rPr sz="1500" b="0">
+                        <a:rPr sz="1600" b="0">
                           <a:solidFill>
                             <a:srgbClr val="202020"/>
                           </a:solidFill>
@@ -4152,7 +4140,7 @@
                     <a:p>
                       <a:pPr algn="ctr"/>
                       <a:r>
-                        <a:rPr sz="1500" b="0">
+                        <a:rPr sz="1600" b="0">
                           <a:solidFill>
                             <a:srgbClr val="202020"/>
                           </a:solidFill>
@@ -4177,7 +4165,7 @@
                     <a:p>
                       <a:pPr algn="ctr"/>
                       <a:r>
-                        <a:rPr sz="1500" b="0">
+                        <a:rPr sz="1600" b="0">
                           <a:solidFill>
                             <a:srgbClr val="202020"/>
                           </a:solidFill>
@@ -4242,7 +4230,7 @@
           <a:p>
             <a:pPr algn="ctr"/>
             <a:r>
-              <a:rPr sz="1700" b="1">
+              <a:rPr sz="1900" b="1">
                 <a:solidFill>
                   <a:srgbClr val="1F4E79"/>
                 </a:solidFill>
@@ -4254,7 +4242,7 @@
           <a:p>
             <a:pPr algn="ctr"/>
             <a:r>
-              <a:rPr sz="1700" b="1">
+              <a:rPr sz="1900" b="1">
                 <a:solidFill>
                   <a:srgbClr val="1F4E79"/>
                 </a:solidFill>
@@ -4294,7 +4282,7 @@
                     <a:p>
                       <a:pPr algn="ctr"/>
                       <a:r>
-                        <a:rPr sz="1500" b="1">
+                        <a:rPr sz="1600" b="1">
                           <a:solidFill>
                             <a:srgbClr val="FFFFFF"/>
                           </a:solidFill>
@@ -4319,7 +4307,7 @@
                     <a:p>
                       <a:pPr algn="ctr"/>
                       <a:r>
-                        <a:rPr sz="1500" b="0">
+                        <a:rPr sz="1600" b="0">
                           <a:solidFill>
                             <a:srgbClr val="202020"/>
                           </a:solidFill>
@@ -4344,7 +4332,7 @@
                     <a:p>
                       <a:pPr algn="ctr"/>
                       <a:r>
-                        <a:rPr sz="1500" b="0">
+                        <a:rPr sz="1600" b="0">
                           <a:solidFill>
                             <a:srgbClr val="202020"/>
                           </a:solidFill>
@@ -4369,7 +4357,7 @@
                     <a:p>
                       <a:pPr algn="ctr"/>
                       <a:r>
-                        <a:rPr sz="1500" b="0">
+                        <a:rPr sz="1600" b="0">
                           <a:solidFill>
                             <a:srgbClr val="202020"/>
                           </a:solidFill>
@@ -4434,25 +4422,13 @@
           <a:p>
             <a:pPr algn="just"/>
             <a:r>
-              <a:rPr sz="1800" b="1">
+              <a:rPr sz="2000" b="1">
                 <a:solidFill>
                   <a:srgbClr val="C03030"/>
                 </a:solidFill>
                 <a:latin typeface="Microsoft JhengHei"/>
               </a:rPr>
-              <a:t>3 和 7 的機率是 0.0180 與 0.0003。「這個 2 比較像 3、不像 7」的資訊雖然存在，</a:t>
-            </a:r>
-          </a:p>
-          <a:p>
-            <a:pPr algn="just"/>
-            <a:r>
-              <a:rPr sz="1800" b="1">
-                <a:solidFill>
-                  <a:srgbClr val="C03030"/>
-                </a:solidFill>
-                <a:latin typeface="Microsoft JhengHei"/>
-              </a:rPr>
-              <a:t>對交叉熵代價函數卻幾乎沒有影響。</a:t>
+              <a:t>3 和 7 的機率是 0.0180 與 0.0003。「這個 2 比較像 3、不像 7」的資訊雖然存在，對交叉熵代價函數卻幾乎沒有影響。</a:t>
             </a:r>
           </a:p>
         </p:txBody>
@@ -4481,7 +4457,7 @@
           <a:p>
             <a:pPr algn="just"/>
             <a:r>
-              <a:rPr sz="1700" b="0">
+              <a:rPr sz="1900" b="0">
                 <a:solidFill>
                   <a:srgbClr val="59636E"/>
                 </a:solidFill>
@@ -5159,7 +5135,7 @@
           <a:p>
             <a:pPr algn="just"/>
             <a:r>
-              <a:rPr sz="1300" b="0">
+              <a:rPr sz="1500" b="0">
                 <a:solidFill>
                   <a:srgbClr val="C7D6E5"/>
                 </a:solidFill>
@@ -5218,7 +5194,7 @@
           <a:p>
             <a:pPr algn="just"/>
             <a:r>
-              <a:rPr sz="1800" b="0">
+              <a:rPr sz="2000" b="0">
                 <a:solidFill>
                   <a:srgbClr val="202020"/>
                 </a:solidFill>
@@ -5230,7 +5206,7 @@
           <a:p>
             <a:pPr algn="just"/>
             <a:r>
-              <a:rPr sz="1800" b="0">
+              <a:rPr sz="2000" b="0">
                 <a:solidFill>
                   <a:srgbClr val="202020"/>
                 </a:solidFill>
@@ -5270,7 +5246,7 @@
                     <a:p>
                       <a:pPr algn="ctr"/>
                       <a:r>
-                        <a:rPr sz="1500" b="1">
+                        <a:rPr sz="1600" b="1">
                           <a:solidFill>
                             <a:srgbClr val="FFFFFF"/>
                           </a:solidFill>
@@ -5295,7 +5271,7 @@
                     <a:p>
                       <a:pPr algn="ctr"/>
                       <a:r>
-                        <a:rPr sz="1500" b="0">
+                        <a:rPr sz="1600" b="0">
                           <a:solidFill>
                             <a:srgbClr val="202020"/>
                           </a:solidFill>
@@ -5320,7 +5296,7 @@
                     <a:p>
                       <a:pPr algn="ctr"/>
                       <a:r>
-                        <a:rPr sz="1500" b="0">
+                        <a:rPr sz="1600" b="0">
                           <a:solidFill>
                             <a:srgbClr val="202020"/>
                           </a:solidFill>
@@ -5345,7 +5321,7 @@
                     <a:p>
                       <a:pPr algn="ctr"/>
                       <a:r>
-                        <a:rPr sz="1500" b="0">
+                        <a:rPr sz="1600" b="0">
                           <a:solidFill>
                             <a:srgbClr val="202020"/>
                           </a:solidFill>
@@ -5395,7 +5371,7 @@
                     <a:p>
                       <a:pPr algn="ctr"/>
                       <a:r>
-                        <a:rPr sz="1500" b="1">
+                        <a:rPr sz="1600" b="1">
                           <a:solidFill>
                             <a:srgbClr val="FFFFFF"/>
                           </a:solidFill>
@@ -5420,7 +5396,7 @@
                     <a:p>
                       <a:pPr algn="ctr"/>
                       <a:r>
-                        <a:rPr sz="1500" b="0">
+                        <a:rPr sz="1600" b="0">
                           <a:solidFill>
                             <a:srgbClr val="202020"/>
                           </a:solidFill>
@@ -5445,7 +5421,7 @@
                     <a:p>
                       <a:pPr algn="ctr"/>
                       <a:r>
-                        <a:rPr sz="1500" b="0">
+                        <a:rPr sz="1600" b="0">
                           <a:solidFill>
                             <a:srgbClr val="202020"/>
                           </a:solidFill>
@@ -5470,7 +5446,7 @@
                     <a:p>
                       <a:pPr algn="ctr"/>
                       <a:r>
-                        <a:rPr sz="1500" b="0">
+                        <a:rPr sz="1600" b="0">
                           <a:solidFill>
                             <a:srgbClr val="202020"/>
                           </a:solidFill>
@@ -5520,7 +5496,7 @@
                     <a:p>
                       <a:pPr algn="ctr"/>
                       <a:r>
-                        <a:rPr sz="1500" b="1">
+                        <a:rPr sz="1600" b="1">
                           <a:solidFill>
                             <a:srgbClr val="FFFFFF"/>
                           </a:solidFill>
@@ -5545,7 +5521,7 @@
                     <a:p>
                       <a:pPr algn="ctr"/>
                       <a:r>
-                        <a:rPr sz="1500" b="0">
+                        <a:rPr sz="1600" b="0">
                           <a:solidFill>
                             <a:srgbClr val="202020"/>
                           </a:solidFill>
@@ -5570,7 +5546,7 @@
                     <a:p>
                       <a:pPr algn="ctr"/>
                       <a:r>
-                        <a:rPr sz="1500" b="0">
+                        <a:rPr sz="1600" b="0">
                           <a:solidFill>
                             <a:srgbClr val="202020"/>
                           </a:solidFill>
@@ -5595,7 +5571,7 @@
                     <a:p>
                       <a:pPr algn="ctr"/>
                       <a:r>
-                        <a:rPr sz="1500" b="0">
+                        <a:rPr sz="1600" b="0">
                           <a:solidFill>
                             <a:srgbClr val="202020"/>
                           </a:solidFill>
@@ -5645,7 +5621,7 @@
                     <a:p>
                       <a:pPr algn="ctr"/>
                       <a:r>
-                        <a:rPr sz="1500" b="1">
+                        <a:rPr sz="1600" b="1">
                           <a:solidFill>
                             <a:srgbClr val="FFFFFF"/>
                           </a:solidFill>
@@ -5670,7 +5646,7 @@
                     <a:p>
                       <a:pPr algn="ctr"/>
                       <a:r>
-                        <a:rPr sz="1500" b="0">
+                        <a:rPr sz="1600" b="0">
                           <a:solidFill>
                             <a:srgbClr val="202020"/>
                           </a:solidFill>
@@ -5695,7 +5671,7 @@
                     <a:p>
                       <a:pPr algn="ctr"/>
                       <a:r>
-                        <a:rPr sz="1500" b="0">
+                        <a:rPr sz="1600" b="0">
                           <a:solidFill>
                             <a:srgbClr val="202020"/>
                           </a:solidFill>
@@ -5720,7 +5696,7 @@
                     <a:p>
                       <a:pPr algn="ctr"/>
                       <a:r>
-                        <a:rPr sz="1500" b="0">
+                        <a:rPr sz="1600" b="0">
                           <a:solidFill>
                             <a:srgbClr val="202020"/>
                           </a:solidFill>
@@ -5785,7 +5761,7 @@
           <a:p>
             <a:pPr algn="ctr"/>
             <a:r>
-              <a:rPr sz="1700" b="1">
+              <a:rPr sz="1900" b="1">
                 <a:solidFill>
                   <a:srgbClr val="1F4E79"/>
                 </a:solidFill>
@@ -5797,7 +5773,7 @@
           <a:p>
             <a:pPr algn="ctr"/>
             <a:r>
-              <a:rPr sz="1700" b="1">
+              <a:rPr sz="1900" b="1">
                 <a:solidFill>
                   <a:srgbClr val="1F4E79"/>
                 </a:solidFill>
@@ -5837,7 +5813,7 @@
                     <a:p>
                       <a:pPr algn="ctr"/>
                       <a:r>
-                        <a:rPr sz="1500" b="1">
+                        <a:rPr sz="1600" b="1">
                           <a:solidFill>
                             <a:srgbClr val="FFFFFF"/>
                           </a:solidFill>
@@ -5862,7 +5838,7 @@
                     <a:p>
                       <a:pPr algn="ctr"/>
                       <a:r>
-                        <a:rPr sz="1500" b="0">
+                        <a:rPr sz="1600" b="0">
                           <a:solidFill>
                             <a:srgbClr val="202020"/>
                           </a:solidFill>
@@ -5887,7 +5863,7 @@
                     <a:p>
                       <a:pPr algn="ctr"/>
                       <a:r>
-                        <a:rPr sz="1500" b="0">
+                        <a:rPr sz="1600" b="0">
                           <a:solidFill>
                             <a:srgbClr val="202020"/>
                           </a:solidFill>
@@ -5912,7 +5888,7 @@
                     <a:p>
                       <a:pPr algn="ctr"/>
                       <a:r>
-                        <a:rPr sz="1500" b="0">
+                        <a:rPr sz="1600" b="0">
                           <a:solidFill>
                             <a:srgbClr val="202020"/>
                           </a:solidFill>
@@ -5977,7 +5953,7 @@
           <a:p>
             <a:pPr algn="just"/>
             <a:r>
-              <a:rPr sz="1800" b="1">
+              <a:rPr sz="2000" b="1">
                 <a:solidFill>
                   <a:srgbClr val="1E7A45"/>
                 </a:solidFill>
@@ -5989,7 +5965,7 @@
           <a:p>
             <a:pPr algn="just"/>
             <a:r>
-              <a:rPr sz="1800" b="1">
+              <a:rPr sz="2000" b="1">
                 <a:solidFill>
                   <a:srgbClr val="1E7A45"/>
                 </a:solidFill>
@@ -6024,7 +6000,7 @@
           <a:p>
             <a:pPr algn="just"/>
             <a:r>
-              <a:rPr sz="1700" b="0">
+              <a:rPr sz="1900" b="0">
                 <a:solidFill>
                   <a:srgbClr val="59636E"/>
                 </a:solidFill>
@@ -6702,7 +6678,7 @@
           <a:p>
             <a:pPr algn="just"/>
             <a:r>
-              <a:rPr sz="1300" b="0">
+              <a:rPr sz="1500" b="0">
                 <a:solidFill>
                   <a:srgbClr val="C7D6E5"/>
                 </a:solidFill>
@@ -6768,7 +6744,7 @@
                     <a:p>
                       <a:pPr algn="ctr"/>
                       <a:r>
-                        <a:rPr sz="1700" b="1">
+                        <a:rPr sz="1800" b="1">
                           <a:solidFill>
                             <a:srgbClr val="FFFFFF"/>
                           </a:solidFill>
@@ -6791,7 +6767,7 @@
                     <a:p>
                       <a:pPr algn="ctr"/>
                       <a:r>
-                        <a:rPr sz="1700" b="1">
+                        <a:rPr sz="1800" b="1">
                           <a:solidFill>
                             <a:srgbClr val="FFFFFF"/>
                           </a:solidFill>
@@ -6814,7 +6790,7 @@
                     <a:p>
                       <a:pPr algn="ctr"/>
                       <a:r>
-                        <a:rPr sz="1700" b="1">
+                        <a:rPr sz="1800" b="1">
                           <a:solidFill>
                             <a:srgbClr val="FFFFFF"/>
                           </a:solidFill>
@@ -6839,7 +6815,7 @@
                     <a:p>
                       <a:pPr algn="ctr"/>
                       <a:r>
-                        <a:rPr sz="1700" b="0">
+                        <a:rPr sz="1800" b="0">
                           <a:solidFill>
                             <a:srgbClr val="202020"/>
                           </a:solidFill>
@@ -6862,7 +6838,7 @@
                     <a:p>
                       <a:pPr algn="ctr"/>
                       <a:r>
-                        <a:rPr sz="1700" b="0">
+                        <a:rPr sz="1800" b="0">
                           <a:solidFill>
                             <a:srgbClr val="202020"/>
                           </a:solidFill>
@@ -6885,7 +6861,7 @@
                     <a:p>
                       <a:pPr algn="ctr"/>
                       <a:r>
-                        <a:rPr sz="1700" b="0">
+                        <a:rPr sz="1800" b="0">
                           <a:solidFill>
                             <a:srgbClr val="202020"/>
                           </a:solidFill>
@@ -6910,7 +6886,7 @@
                     <a:p>
                       <a:pPr algn="ctr"/>
                       <a:r>
-                        <a:rPr sz="1700" b="0">
+                        <a:rPr sz="1800" b="0">
                           <a:solidFill>
                             <a:srgbClr val="202020"/>
                           </a:solidFill>
@@ -6933,7 +6909,7 @@
                     <a:p>
                       <a:pPr algn="ctr"/>
                       <a:r>
-                        <a:rPr sz="1700" b="0">
+                        <a:rPr sz="1800" b="0">
                           <a:solidFill>
                             <a:srgbClr val="202020"/>
                           </a:solidFill>
@@ -6956,7 +6932,7 @@
                     <a:p>
                       <a:pPr algn="ctr"/>
                       <a:r>
-                        <a:rPr sz="1700" b="0">
+                        <a:rPr sz="1800" b="0">
                           <a:solidFill>
                             <a:srgbClr val="202020"/>
                           </a:solidFill>
@@ -6981,7 +6957,7 @@
                     <a:p>
                       <a:pPr algn="ctr"/>
                       <a:r>
-                        <a:rPr sz="1700" b="0">
+                        <a:rPr sz="1800" b="0">
                           <a:solidFill>
                             <a:srgbClr val="202020"/>
                           </a:solidFill>
@@ -7004,7 +6980,7 @@
                     <a:p>
                       <a:pPr algn="ctr"/>
                       <a:r>
-                        <a:rPr sz="1700" b="0">
+                        <a:rPr sz="1800" b="0">
                           <a:solidFill>
                             <a:srgbClr val="202020"/>
                           </a:solidFill>
@@ -7027,7 +7003,7 @@
                     <a:p>
                       <a:pPr algn="ctr"/>
                       <a:r>
-                        <a:rPr sz="1700" b="0">
+                        <a:rPr sz="1800" b="0">
                           <a:solidFill>
                             <a:srgbClr val="202020"/>
                           </a:solidFill>
@@ -7072,7 +7048,7 @@
           <a:p>
             <a:pPr algn="just"/>
             <a:r>
-              <a:rPr sz="1600" b="0">
+              <a:rPr sz="1800" b="0">
                 <a:solidFill>
                   <a:srgbClr val="59636E"/>
                 </a:solidFill>
@@ -7084,7 +7060,7 @@
           <a:p>
             <a:pPr algn="just"/>
             <a:r>
-              <a:rPr sz="1600" b="0">
+              <a:rPr sz="1800" b="0">
                 <a:solidFill>
                   <a:srgbClr val="59636E"/>
                 </a:solidFill>
@@ -7139,7 +7115,7 @@
           <a:p>
             <a:pPr algn="just"/>
             <a:r>
-              <a:rPr sz="1900" b="1">
+              <a:rPr sz="2100" b="1">
                 <a:solidFill>
                   <a:srgbClr val="1E7A45"/>
                 </a:solidFill>
@@ -7194,7 +7170,7 @@
           <a:p>
             <a:pPr algn="just"/>
             <a:r>
-              <a:rPr sz="1900" b="1">
+              <a:rPr sz="2100" b="1">
                 <a:solidFill>
                   <a:srgbClr val="1F4E79"/>
                 </a:solidFill>
@@ -7229,7 +7205,7 @@
           <a:p>
             <a:pPr algn="just"/>
             <a:r>
-              <a:rPr sz="1600" b="0">
+              <a:rPr sz="1800" b="0">
                 <a:solidFill>
                   <a:srgbClr val="202020"/>
                 </a:solidFill>
@@ -7241,7 +7217,7 @@
           <a:p>
             <a:pPr algn="just"/>
             <a:r>
-              <a:rPr sz="1600" b="0">
+              <a:rPr sz="1800" b="0">
                 <a:solidFill>
                   <a:srgbClr val="202020"/>
                 </a:solidFill>
@@ -7727,7 +7703,7 @@
           <a:p>
             <a:pPr algn="just"/>
             <a:r>
-              <a:rPr sz="1300" b="0">
+              <a:rPr sz="1500" b="0">
                 <a:solidFill>
                   <a:srgbClr val="C7D6E5"/>
                 </a:solidFill>
@@ -7810,7 +7786,7 @@
           <a:p>
             <a:pPr algn="just"/>
             <a:r>
-              <a:rPr sz="1700" b="0">
+              <a:rPr sz="1900" b="0">
                 <a:solidFill>
                   <a:srgbClr val="202020"/>
                 </a:solidFill>
@@ -7869,7 +7845,7 @@
           <a:p>
             <a:pPr algn="just"/>
             <a:r>
-              <a:rPr sz="1700" b="0">
+              <a:rPr sz="1900" b="0">
                 <a:solidFill>
                   <a:srgbClr val="202020"/>
                 </a:solidFill>
@@ -7924,31 +7900,19 @@
           <a:p>
             <a:pPr algn="just"/>
             <a:r>
-              <a:rPr sz="1700" b="0">
+              <a:rPr sz="1900" b="0">
                 <a:solidFill>
                   <a:srgbClr val="1F4E79"/>
                 </a:solidFill>
                 <a:latin typeface="Microsoft JhengHei"/>
               </a:rPr>
-              <a:t>α：論文發現，第二個目標函數的權重</a:t>
+              <a:t>α：論文發現，第二個目標函數的權重取得低很多時，結果通常最好；</a:t>
             </a:r>
           </a:p>
           <a:p>
             <a:pPr algn="just"/>
             <a:r>
-              <a:rPr sz="1700" b="0">
-                <a:solidFill>
-                  <a:srgbClr val="1F4E79"/>
-                </a:solidFill>
-                <a:latin typeface="Microsoft JhengHei"/>
-              </a:rPr>
-              <a:t>取得低很多時，結果通常最好；</a:t>
-            </a:r>
-          </a:p>
-          <a:p>
-            <a:pPr algn="just"/>
-            <a:r>
-              <a:rPr sz="1700" b="0">
+              <a:rPr sz="1900" b="0">
                 <a:solidFill>
                   <a:srgbClr val="1F4E79"/>
                 </a:solidFill>
@@ -8003,37 +7967,13 @@
           <a:p>
             <a:pPr algn="just"/>
             <a:r>
-              <a:rPr sz="1700" b="0">
+              <a:rPr sz="1900" b="0">
                 <a:solidFill>
                   <a:srgbClr val="C03030"/>
                 </a:solidFill>
                 <a:latin typeface="Microsoft JhengHei"/>
               </a:rPr>
-              <a:t>T²：軟目標產生的梯度大小與 1/T² 成正比，</a:t>
-            </a:r>
-          </a:p>
-          <a:p>
-            <a:pPr algn="just"/>
-            <a:r>
-              <a:rPr sz="1700" b="0">
-                <a:solidFill>
-                  <a:srgbClr val="C03030"/>
-                </a:solidFill>
-                <a:latin typeface="Microsoft JhengHei"/>
-              </a:rPr>
-              <a:t>因此乘上 T²，換溫度時兩項的相對貢獻</a:t>
-            </a:r>
-          </a:p>
-          <a:p>
-            <a:pPr algn="just"/>
-            <a:r>
-              <a:rPr sz="1700" b="0">
-                <a:solidFill>
-                  <a:srgbClr val="C03030"/>
-                </a:solidFill>
-                <a:latin typeface="Microsoft JhengHei"/>
-              </a:rPr>
-              <a:t>大致不變（第 17 頁驗證）</a:t>
+              <a:t>T²：軟目標產生的梯度大小與 1/T² 成正比，因此乘上 T²，換溫度時兩項的相對貢獻大致不變（第 17 頁驗證）</a:t>
             </a:r>
           </a:p>
         </p:txBody>
@@ -8062,7 +8002,7 @@
           <a:p>
             <a:pPr algn="just"/>
             <a:r>
-              <a:rPr sz="1900" b="1">
+              <a:rPr sz="2100" b="1">
                 <a:solidFill>
                   <a:srgbClr val="1E7A45"/>
                 </a:solidFill>
@@ -8638,7 +8578,7 @@
           <a:p>
             <a:pPr algn="just"/>
             <a:r>
-              <a:rPr sz="1300" b="0">
+              <a:rPr sz="1500" b="0">
                 <a:solidFill>
                   <a:srgbClr val="C7D6E5"/>
                 </a:solidFill>
@@ -8678,7 +8618,7 @@
                     <a:p>
                       <a:pPr algn="ctr"/>
                       <a:r>
-                        <a:rPr sz="1500" b="1">
+                        <a:rPr sz="1600" b="1">
                           <a:solidFill>
                             <a:srgbClr val="FFFFFF"/>
                           </a:solidFill>
@@ -8703,7 +8643,7 @@
                     <a:p>
                       <a:pPr algn="ctr"/>
                       <a:r>
-                        <a:rPr sz="1500" b="0">
+                        <a:rPr sz="1600" b="0">
                           <a:solidFill>
                             <a:srgbClr val="202020"/>
                           </a:solidFill>
@@ -8728,7 +8668,7 @@
                     <a:p>
                       <a:pPr algn="ctr"/>
                       <a:r>
-                        <a:rPr sz="1500" b="0">
+                        <a:rPr sz="1600" b="0">
                           <a:solidFill>
                             <a:srgbClr val="202020"/>
                           </a:solidFill>
@@ -8753,7 +8693,7 @@
                     <a:p>
                       <a:pPr algn="ctr"/>
                       <a:r>
-                        <a:rPr sz="1500" b="0">
+                        <a:rPr sz="1600" b="0">
                           <a:solidFill>
                             <a:srgbClr val="202020"/>
                           </a:solidFill>
@@ -8803,7 +8743,7 @@
                     <a:p>
                       <a:pPr algn="ctr"/>
                       <a:r>
-                        <a:rPr sz="1500" b="1">
+                        <a:rPr sz="1600" b="1">
                           <a:solidFill>
                             <a:srgbClr val="FFFFFF"/>
                           </a:solidFill>
@@ -8828,7 +8768,7 @@
                     <a:p>
                       <a:pPr algn="ctr"/>
                       <a:r>
-                        <a:rPr sz="1500" b="0">
+                        <a:rPr sz="1600" b="0">
                           <a:solidFill>
                             <a:srgbClr val="202020"/>
                           </a:solidFill>
@@ -8853,7 +8793,7 @@
                     <a:p>
                       <a:pPr algn="ctr"/>
                       <a:r>
-                        <a:rPr sz="1500" b="0">
+                        <a:rPr sz="1600" b="0">
                           <a:solidFill>
                             <a:srgbClr val="202020"/>
                           </a:solidFill>
@@ -8878,7 +8818,7 @@
                     <a:p>
                       <a:pPr algn="ctr"/>
                       <a:r>
-                        <a:rPr sz="1500" b="0">
+                        <a:rPr sz="1600" b="0">
                           <a:solidFill>
                             <a:srgbClr val="202020"/>
                           </a:solidFill>
@@ -8928,7 +8868,7 @@
                     <a:p>
                       <a:pPr algn="ctr"/>
                       <a:r>
-                        <a:rPr sz="1500" b="1">
+                        <a:rPr sz="1600" b="1">
                           <a:solidFill>
                             <a:srgbClr val="FFFFFF"/>
                           </a:solidFill>
@@ -8953,7 +8893,7 @@
                     <a:p>
                       <a:pPr algn="ctr"/>
                       <a:r>
-                        <a:rPr sz="1500" b="0">
+                        <a:rPr sz="1600" b="0">
                           <a:solidFill>
                             <a:srgbClr val="202020"/>
                           </a:solidFill>
@@ -8978,7 +8918,7 @@
                     <a:p>
                       <a:pPr algn="ctr"/>
                       <a:r>
-                        <a:rPr sz="1500" b="0">
+                        <a:rPr sz="1600" b="0">
                           <a:solidFill>
                             <a:srgbClr val="202020"/>
                           </a:solidFill>
@@ -9003,7 +8943,7 @@
                     <a:p>
                       <a:pPr algn="ctr"/>
                       <a:r>
-                        <a:rPr sz="1500" b="0">
+                        <a:rPr sz="1600" b="0">
                           <a:solidFill>
                             <a:srgbClr val="202020"/>
                           </a:solidFill>
@@ -9053,7 +8993,7 @@
                     <a:p>
                       <a:pPr algn="ctr"/>
                       <a:r>
-                        <a:rPr sz="1500" b="1">
+                        <a:rPr sz="1600" b="1">
                           <a:solidFill>
                             <a:srgbClr val="FFFFFF"/>
                           </a:solidFill>
@@ -9078,7 +9018,7 @@
                     <a:p>
                       <a:pPr algn="ctr"/>
                       <a:r>
-                        <a:rPr sz="1500" b="0">
+                        <a:rPr sz="1600" b="0">
                           <a:solidFill>
                             <a:srgbClr val="202020"/>
                           </a:solidFill>
@@ -9103,7 +9043,7 @@
                     <a:p>
                       <a:pPr algn="ctr"/>
                       <a:r>
-                        <a:rPr sz="1500" b="0">
+                        <a:rPr sz="1600" b="0">
                           <a:solidFill>
                             <a:srgbClr val="202020"/>
                           </a:solidFill>
@@ -9128,7 +9068,7 @@
                     <a:p>
                       <a:pPr algn="ctr"/>
                       <a:r>
-                        <a:rPr sz="1500" b="0">
+                        <a:rPr sz="1600" b="0">
                           <a:solidFill>
                             <a:srgbClr val="202020"/>
                           </a:solidFill>
@@ -9193,7 +9133,7 @@
           <a:p>
             <a:pPr algn="ctr"/>
             <a:r>
-              <a:rPr sz="1700" b="1">
+              <a:rPr sz="1900" b="1">
                 <a:solidFill>
                   <a:srgbClr val="1F4E79"/>
                 </a:solidFill>
@@ -9205,7 +9145,7 @@
           <a:p>
             <a:pPr algn="ctr"/>
             <a:r>
-              <a:rPr sz="1700" b="1">
+              <a:rPr sz="1900" b="1">
                 <a:solidFill>
                   <a:srgbClr val="1F4E79"/>
                 </a:solidFill>
@@ -9245,7 +9185,7 @@
                     <a:p>
                       <a:pPr algn="ctr"/>
                       <a:r>
-                        <a:rPr sz="1500" b="1">
+                        <a:rPr sz="1600" b="1">
                           <a:solidFill>
                             <a:srgbClr val="FFFFFF"/>
                           </a:solidFill>
@@ -9270,7 +9210,7 @@
                     <a:p>
                       <a:pPr algn="ctr"/>
                       <a:r>
-                        <a:rPr sz="1500" b="0">
+                        <a:rPr sz="1600" b="0">
                           <a:solidFill>
                             <a:srgbClr val="202020"/>
                           </a:solidFill>
@@ -9295,7 +9235,7 @@
                     <a:p>
                       <a:pPr algn="ctr"/>
                       <a:r>
-                        <a:rPr sz="1500" b="0">
+                        <a:rPr sz="1600" b="0">
                           <a:solidFill>
                             <a:srgbClr val="202020"/>
                           </a:solidFill>
@@ -9320,7 +9260,7 @@
                     <a:p>
                       <a:pPr algn="ctr"/>
                       <a:r>
-                        <a:rPr sz="1500" b="0">
+                        <a:rPr sz="1600" b="0">
                           <a:solidFill>
                             <a:srgbClr val="202020"/>
                           </a:solidFill>
@@ -9365,25 +9305,13 @@
           <a:p>
             <a:pPr algn="just"/>
             <a:r>
-              <a:rPr sz="1600" b="0">
+              <a:rPr sz="1800" b="0">
                 <a:solidFill>
                   <a:srgbClr val="59636E"/>
                 </a:solidFill>
                 <a:latin typeface="Microsoft JhengHei"/>
               </a:rPr>
-              <a:t>T = 4 時，蒸餾模型</a:t>
-            </a:r>
-          </a:p>
-          <a:p>
-            <a:pPr algn="just"/>
-            <a:r>
-              <a:rPr sz="1600" b="0">
-                <a:solidFill>
-                  <a:srgbClr val="59636E"/>
-                </a:solidFill>
-                <a:latin typeface="Microsoft JhengHei"/>
-              </a:rPr>
-              <a:t>給 3 與 7 相同的機率</a:t>
+              <a:t>T = 4 時，蒸餾模型給 3 與 7 相同的機率</a:t>
             </a:r>
           </a:p>
         </p:txBody>
@@ -9417,7 +9345,7 @@
                     <a:p>
                       <a:pPr algn="ctr"/>
                       <a:r>
-                        <a:rPr sz="1500" b="1">
+                        <a:rPr sz="1600" b="1">
                           <a:solidFill>
                             <a:srgbClr val="FFFFFF"/>
                           </a:solidFill>
@@ -9442,7 +9370,7 @@
                     <a:p>
                       <a:pPr algn="ctr"/>
                       <a:r>
-                        <a:rPr sz="1500" b="0">
+                        <a:rPr sz="1600" b="0">
                           <a:solidFill>
                             <a:srgbClr val="202020"/>
                           </a:solidFill>
@@ -9467,7 +9395,7 @@
                     <a:p>
                       <a:pPr algn="ctr"/>
                       <a:r>
-                        <a:rPr sz="1500" b="0">
+                        <a:rPr sz="1600" b="0">
                           <a:solidFill>
                             <a:srgbClr val="202020"/>
                           </a:solidFill>
@@ -9492,7 +9420,7 @@
                     <a:p>
                       <a:pPr algn="ctr"/>
                       <a:r>
-                        <a:rPr sz="1500" b="0">
+                        <a:rPr sz="1600" b="0">
                           <a:solidFill>
                             <a:srgbClr val="202020"/>
                           </a:solidFill>
@@ -9542,7 +9470,7 @@
                     <a:p>
                       <a:pPr algn="ctr"/>
                       <a:r>
-                        <a:rPr sz="1500" b="1">
+                        <a:rPr sz="1600" b="1">
                           <a:solidFill>
                             <a:srgbClr val="FFFFFF"/>
                           </a:solidFill>
@@ -9567,7 +9495,7 @@
                     <a:p>
                       <a:pPr algn="ctr"/>
                       <a:r>
-                        <a:rPr sz="1500" b="0">
+                        <a:rPr sz="1600" b="0">
                           <a:solidFill>
                             <a:srgbClr val="202020"/>
                           </a:solidFill>
@@ -9592,7 +9520,7 @@
                     <a:p>
                       <a:pPr algn="ctr"/>
                       <a:r>
-                        <a:rPr sz="1500" b="0">
+                        <a:rPr sz="1600" b="0">
                           <a:solidFill>
                             <a:srgbClr val="202020"/>
                           </a:solidFill>
@@ -9617,7 +9545,7 @@
                     <a:p>
                       <a:pPr algn="ctr"/>
                       <a:r>
-                        <a:rPr sz="1500" b="0">
+                        <a:rPr sz="1600" b="0">
                           <a:solidFill>
                             <a:srgbClr val="202020"/>
                           </a:solidFill>
@@ -9667,7 +9595,7 @@
                     <a:p>
                       <a:pPr algn="ctr"/>
                       <a:r>
-                        <a:rPr sz="1500" b="1">
+                        <a:rPr sz="1600" b="1">
                           <a:solidFill>
                             <a:srgbClr val="FFFFFF"/>
                           </a:solidFill>
@@ -9692,7 +9620,7 @@
                     <a:p>
                       <a:pPr algn="ctr"/>
                       <a:r>
-                        <a:rPr sz="1500" b="0">
+                        <a:rPr sz="1600" b="0">
                           <a:solidFill>
                             <a:srgbClr val="202020"/>
                           </a:solidFill>
@@ -9717,7 +9645,7 @@
                     <a:p>
                       <a:pPr algn="ctr"/>
                       <a:r>
-                        <a:rPr sz="1500" b="0">
+                        <a:rPr sz="1600" b="0">
                           <a:solidFill>
                             <a:srgbClr val="202020"/>
                           </a:solidFill>
@@ -9742,7 +9670,7 @@
                     <a:p>
                       <a:pPr algn="ctr"/>
                       <a:r>
-                        <a:rPr sz="1500" b="0">
+                        <a:rPr sz="1600" b="0">
                           <a:solidFill>
                             <a:srgbClr val="202020"/>
                           </a:solidFill>
@@ -9792,7 +9720,7 @@
                     <a:p>
                       <a:pPr algn="ctr"/>
                       <a:r>
-                        <a:rPr sz="1500" b="1">
+                        <a:rPr sz="1600" b="1">
                           <a:solidFill>
                             <a:srgbClr val="FFFFFF"/>
                           </a:solidFill>
@@ -9817,7 +9745,7 @@
                     <a:p>
                       <a:pPr algn="ctr"/>
                       <a:r>
-                        <a:rPr sz="1500" b="0">
+                        <a:rPr sz="1600" b="0">
                           <a:solidFill>
                             <a:srgbClr val="202020"/>
                           </a:solidFill>
@@ -9842,7 +9770,7 @@
                     <a:p>
                       <a:pPr algn="ctr"/>
                       <a:r>
-                        <a:rPr sz="1500" b="0">
+                        <a:rPr sz="1600" b="0">
                           <a:solidFill>
                             <a:srgbClr val="202020"/>
                           </a:solidFill>
@@ -9867,7 +9795,7 @@
                     <a:p>
                       <a:pPr algn="ctr"/>
                       <a:r>
-                        <a:rPr sz="1500" b="0">
+                        <a:rPr sz="1600" b="0">
                           <a:solidFill>
                             <a:srgbClr val="202020"/>
                           </a:solidFill>
@@ -9932,7 +9860,7 @@
           <a:p>
             <a:pPr algn="ctr"/>
             <a:r>
-              <a:rPr sz="1900" b="1">
+              <a:rPr sz="2100" b="1">
                 <a:solidFill>
                   <a:srgbClr val="1E7A45"/>
                 </a:solidFill>
@@ -9944,7 +9872,7 @@
           <a:p>
             <a:pPr algn="ctr"/>
             <a:r>
-              <a:rPr sz="1900" b="1">
+              <a:rPr sz="2100" b="1">
                 <a:solidFill>
                   <a:srgbClr val="1E7A45"/>
                 </a:solidFill>
@@ -9979,7 +9907,7 @@
           <a:p>
             <a:pPr algn="just"/>
             <a:r>
-              <a:rPr sz="1700" b="0">
+              <a:rPr sz="1900" b="0">
                 <a:solidFill>
                   <a:srgbClr val="202020"/>
                 </a:solidFill>
@@ -9991,7 +9919,7 @@
           <a:p>
             <a:pPr algn="just"/>
             <a:r>
-              <a:rPr sz="1700" b="0">
+              <a:rPr sz="1900" b="0">
                 <a:solidFill>
                   <a:srgbClr val="202020"/>
                 </a:solidFill>
@@ -10815,7 +10743,7 @@
           <a:p>
             <a:pPr algn="just"/>
             <a:r>
-              <a:rPr sz="1300" b="0">
+              <a:rPr sz="1500" b="0">
                 <a:solidFill>
                   <a:srgbClr val="C7D6E5"/>
                 </a:solidFill>
@@ -10855,7 +10783,7 @@
                     <a:p>
                       <a:pPr algn="ctr"/>
                       <a:r>
-                        <a:rPr sz="1500" b="1">
+                        <a:rPr sz="1600" b="1">
                           <a:solidFill>
                             <a:srgbClr val="FFFFFF"/>
                           </a:solidFill>
@@ -10880,7 +10808,7 @@
                     <a:p>
                       <a:pPr algn="ctr"/>
                       <a:r>
-                        <a:rPr sz="1500" b="0">
+                        <a:rPr sz="1600" b="0">
                           <a:solidFill>
                             <a:srgbClr val="202020"/>
                           </a:solidFill>
@@ -10905,7 +10833,7 @@
                     <a:p>
                       <a:pPr algn="ctr"/>
                       <a:r>
-                        <a:rPr sz="1500" b="0">
+                        <a:rPr sz="1600" b="0">
                           <a:solidFill>
                             <a:srgbClr val="202020"/>
                           </a:solidFill>
@@ -10930,7 +10858,7 @@
                     <a:p>
                       <a:pPr algn="ctr"/>
                       <a:r>
-                        <a:rPr sz="1500" b="0">
+                        <a:rPr sz="1600" b="0">
                           <a:solidFill>
                             <a:srgbClr val="202020"/>
                           </a:solidFill>
@@ -10980,7 +10908,7 @@
                     <a:p>
                       <a:pPr algn="ctr"/>
                       <a:r>
-                        <a:rPr sz="1500" b="1">
+                        <a:rPr sz="1600" b="1">
                           <a:solidFill>
                             <a:srgbClr val="FFFFFF"/>
                           </a:solidFill>
@@ -11005,7 +10933,7 @@
                     <a:p>
                       <a:pPr algn="ctr"/>
                       <a:r>
-                        <a:rPr sz="1500" b="0">
+                        <a:rPr sz="1600" b="0">
                           <a:solidFill>
                             <a:srgbClr val="202020"/>
                           </a:solidFill>
@@ -11030,7 +10958,7 @@
                     <a:p>
                       <a:pPr algn="ctr"/>
                       <a:r>
-                        <a:rPr sz="1500" b="0">
+                        <a:rPr sz="1600" b="0">
                           <a:solidFill>
                             <a:srgbClr val="202020"/>
                           </a:solidFill>
@@ -11055,7 +10983,7 @@
                     <a:p>
                       <a:pPr algn="ctr"/>
                       <a:r>
-                        <a:rPr sz="1500" b="0">
+                        <a:rPr sz="1600" b="0">
                           <a:solidFill>
                             <a:srgbClr val="202020"/>
                           </a:solidFill>
@@ -11105,7 +11033,7 @@
                     <a:p>
                       <a:pPr algn="ctr"/>
                       <a:r>
-                        <a:rPr sz="1500" b="1">
+                        <a:rPr sz="1600" b="1">
                           <a:solidFill>
                             <a:srgbClr val="FFFFFF"/>
                           </a:solidFill>
@@ -11130,7 +11058,7 @@
                     <a:p>
                       <a:pPr algn="ctr"/>
                       <a:r>
-                        <a:rPr sz="1500" b="0">
+                        <a:rPr sz="1600" b="0">
                           <a:solidFill>
                             <a:srgbClr val="202020"/>
                           </a:solidFill>
@@ -11155,7 +11083,7 @@
                     <a:p>
                       <a:pPr algn="ctr"/>
                       <a:r>
-                        <a:rPr sz="1500" b="0">
+                        <a:rPr sz="1600" b="0">
                           <a:solidFill>
                             <a:srgbClr val="202020"/>
                           </a:solidFill>
@@ -11180,7 +11108,7 @@
                     <a:p>
                       <a:pPr algn="ctr"/>
                       <a:r>
-                        <a:rPr sz="1500" b="0">
+                        <a:rPr sz="1600" b="0">
                           <a:solidFill>
                             <a:srgbClr val="202020"/>
                           </a:solidFill>
@@ -11245,7 +11173,7 @@
           <a:p>
             <a:pPr algn="ctr"/>
             <a:r>
-              <a:rPr sz="1700" b="1">
+              <a:rPr sz="1900" b="1">
                 <a:solidFill>
                   <a:srgbClr val="1F4E79"/>
                 </a:solidFill>
@@ -11257,7 +11185,7 @@
           <a:p>
             <a:pPr algn="ctr"/>
             <a:r>
-              <a:rPr sz="1700" b="1">
+              <a:rPr sz="1900" b="1">
                 <a:solidFill>
                   <a:srgbClr val="1F4E79"/>
                 </a:solidFill>
@@ -11297,7 +11225,7 @@
                     <a:p>
                       <a:pPr algn="ctr"/>
                       <a:r>
-                        <a:rPr sz="1500" b="1">
+                        <a:rPr sz="1600" b="1">
                           <a:solidFill>
                             <a:srgbClr val="FFFFFF"/>
                           </a:solidFill>
@@ -11322,7 +11250,7 @@
                     <a:p>
                       <a:pPr algn="ctr"/>
                       <a:r>
-                        <a:rPr sz="1500" b="0">
+                        <a:rPr sz="1600" b="0">
                           <a:solidFill>
                             <a:srgbClr val="202020"/>
                           </a:solidFill>
@@ -11347,7 +11275,7 @@
                     <a:p>
                       <a:pPr algn="ctr"/>
                       <a:r>
-                        <a:rPr sz="1500" b="0">
+                        <a:rPr sz="1600" b="0">
                           <a:solidFill>
                             <a:srgbClr val="202020"/>
                           </a:solidFill>
@@ -11372,7 +11300,7 @@
                     <a:p>
                       <a:pPr algn="ctr"/>
                       <a:r>
-                        <a:rPr sz="1500" b="0">
+                        <a:rPr sz="1600" b="0">
                           <a:solidFill>
                             <a:srgbClr val="202020"/>
                           </a:solidFill>
@@ -11437,7 +11365,7 @@
           <a:p>
             <a:pPr algn="ctr"/>
             <a:r>
-              <a:rPr sz="1800" b="1">
+              <a:rPr sz="2000" b="1">
                 <a:solidFill>
                   <a:srgbClr val="1E7A45"/>
                 </a:solidFill>
@@ -11449,7 +11377,7 @@
           <a:p>
             <a:pPr algn="ctr"/>
             <a:r>
-              <a:rPr sz="1800" b="1">
+              <a:rPr sz="2000" b="1">
                 <a:solidFill>
                   <a:srgbClr val="1E7A45"/>
                 </a:solidFill>
@@ -11461,7 +11389,7 @@
           <a:p>
             <a:pPr algn="ctr"/>
             <a:r>
-              <a:rPr sz="1800" b="1">
+              <a:rPr sz="2000" b="1">
                 <a:solidFill>
                   <a:srgbClr val="1E7A45"/>
                 </a:solidFill>
@@ -11503,7 +11431,7 @@
                     <a:p>
                       <a:pPr algn="ctr"/>
                       <a:r>
-                        <a:rPr sz="1800" b="1">
+                        <a:rPr sz="1900" b="1">
                           <a:solidFill>
                             <a:srgbClr val="FFFFFF"/>
                           </a:solidFill>
@@ -11526,7 +11454,7 @@
                     <a:p>
                       <a:pPr algn="ctr"/>
                       <a:r>
-                        <a:rPr sz="1800" b="1">
+                        <a:rPr sz="1900" b="1">
                           <a:solidFill>
                             <a:srgbClr val="FFFFFF"/>
                           </a:solidFill>
@@ -11549,7 +11477,7 @@
                     <a:p>
                       <a:pPr algn="ctr"/>
                       <a:r>
-                        <a:rPr sz="1800" b="1">
+                        <a:rPr sz="1900" b="1">
                           <a:solidFill>
                             <a:srgbClr val="FFFFFF"/>
                           </a:solidFill>
@@ -11574,7 +11502,7 @@
                     <a:p>
                       <a:pPr algn="ctr"/>
                       <a:r>
-                        <a:rPr sz="1800" b="0">
+                        <a:rPr sz="1900" b="0">
                           <a:solidFill>
                             <a:srgbClr val="202020"/>
                           </a:solidFill>
@@ -11597,7 +11525,7 @@
                     <a:p>
                       <a:pPr algn="ctr"/>
                       <a:r>
-                        <a:rPr sz="1800" b="0">
+                        <a:rPr sz="1900" b="0">
                           <a:solidFill>
                             <a:srgbClr val="202020"/>
                           </a:solidFill>
@@ -11620,7 +11548,7 @@
                     <a:p>
                       <a:pPr algn="ctr"/>
                       <a:r>
-                        <a:rPr sz="1800" b="0">
+                        <a:rPr sz="1900" b="0">
                           <a:solidFill>
                             <a:srgbClr val="202020"/>
                           </a:solidFill>
@@ -11645,7 +11573,7 @@
                     <a:p>
                       <a:pPr algn="ctr"/>
                       <a:r>
-                        <a:rPr sz="1800" b="0">
+                        <a:rPr sz="1900" b="0">
                           <a:solidFill>
                             <a:srgbClr val="202020"/>
                           </a:solidFill>
@@ -11668,7 +11596,7 @@
                     <a:p>
                       <a:pPr algn="ctr"/>
                       <a:r>
-                        <a:rPr sz="1800" b="0">
+                        <a:rPr sz="1900" b="0">
                           <a:solidFill>
                             <a:srgbClr val="202020"/>
                           </a:solidFill>
@@ -11691,7 +11619,7 @@
                     <a:p>
                       <a:pPr algn="ctr"/>
                       <a:r>
-                        <a:rPr sz="1800" b="0">
+                        <a:rPr sz="1900" b="0">
                           <a:solidFill>
                             <a:srgbClr val="202020"/>
                           </a:solidFill>
@@ -11716,7 +11644,7 @@
                     <a:p>
                       <a:pPr algn="ctr"/>
                       <a:r>
-                        <a:rPr sz="1800" b="0">
+                        <a:rPr sz="1900" b="0">
                           <a:solidFill>
                             <a:srgbClr val="202020"/>
                           </a:solidFill>
@@ -11739,7 +11667,7 @@
                     <a:p>
                       <a:pPr algn="ctr"/>
                       <a:r>
-                        <a:rPr sz="1800" b="0">
+                        <a:rPr sz="1900" b="0">
                           <a:solidFill>
                             <a:srgbClr val="202020"/>
                           </a:solidFill>
@@ -11762,7 +11690,7 @@
                     <a:p>
                       <a:pPr algn="ctr"/>
                       <a:r>
-                        <a:rPr sz="1800" b="0">
+                        <a:rPr sz="1900" b="0">
                           <a:solidFill>
                             <a:srgbClr val="202020"/>
                           </a:solidFill>
@@ -11807,7 +11735,7 @@
           <a:p>
             <a:pPr algn="just"/>
             <a:r>
-              <a:rPr sz="1700" b="0">
+              <a:rPr sz="1900" b="0">
                 <a:solidFill>
                   <a:srgbClr val="59636E"/>
                 </a:solidFill>
@@ -12393,7 +12321,7 @@
           <a:p>
             <a:pPr algn="just"/>
             <a:r>
-              <a:rPr sz="1300" b="0">
+              <a:rPr sz="1500" b="0">
                 <a:solidFill>
                   <a:srgbClr val="C7D6E5"/>
                 </a:solidFill>
@@ -12452,7 +12380,7 @@
           <a:p>
             <a:pPr algn="just"/>
             <a:r>
-              <a:rPr sz="1800" b="0">
+              <a:rPr sz="2000" b="0">
                 <a:solidFill>
                   <a:srgbClr val="202020"/>
                 </a:solidFill>
@@ -12492,7 +12420,7 @@
                     <a:p>
                       <a:pPr algn="ctr"/>
                       <a:r>
-                        <a:rPr sz="1500" b="1">
+                        <a:rPr sz="1600" b="1">
                           <a:solidFill>
                             <a:srgbClr val="FFFFFF"/>
                           </a:solidFill>
@@ -12517,7 +12445,7 @@
                     <a:p>
                       <a:pPr algn="ctr"/>
                       <a:r>
-                        <a:rPr sz="1500" b="0">
+                        <a:rPr sz="1600" b="0">
                           <a:solidFill>
                             <a:srgbClr val="202020"/>
                           </a:solidFill>
@@ -12542,7 +12470,7 @@
                     <a:p>
                       <a:pPr algn="ctr"/>
                       <a:r>
-                        <a:rPr sz="1500" b="0">
+                        <a:rPr sz="1600" b="0">
                           <a:solidFill>
                             <a:srgbClr val="202020"/>
                           </a:solidFill>
@@ -12567,7 +12495,7 @@
                     <a:p>
                       <a:pPr algn="ctr"/>
                       <a:r>
-                        <a:rPr sz="1500" b="0">
+                        <a:rPr sz="1600" b="0">
                           <a:solidFill>
                             <a:srgbClr val="202020"/>
                           </a:solidFill>
@@ -12617,7 +12545,7 @@
                     <a:p>
                       <a:pPr algn="ctr"/>
                       <a:r>
-                        <a:rPr sz="1500" b="1">
+                        <a:rPr sz="1600" b="1">
                           <a:solidFill>
                             <a:srgbClr val="FFFFFF"/>
                           </a:solidFill>
@@ -12642,7 +12570,7 @@
                     <a:p>
                       <a:pPr algn="ctr"/>
                       <a:r>
-                        <a:rPr sz="1500" b="0">
+                        <a:rPr sz="1600" b="0">
                           <a:solidFill>
                             <a:srgbClr val="202020"/>
                           </a:solidFill>
@@ -12667,7 +12595,7 @@
                     <a:p>
                       <a:pPr algn="ctr"/>
                       <a:r>
-                        <a:rPr sz="1500" b="0">
+                        <a:rPr sz="1600" b="0">
                           <a:solidFill>
                             <a:srgbClr val="202020"/>
                           </a:solidFill>
@@ -12692,7 +12620,7 @@
                     <a:p>
                       <a:pPr algn="ctr"/>
                       <a:r>
-                        <a:rPr sz="1500" b="0">
+                        <a:rPr sz="1600" b="0">
                           <a:solidFill>
                             <a:srgbClr val="202020"/>
                           </a:solidFill>
@@ -12742,7 +12670,7 @@
                     <a:p>
                       <a:pPr algn="ctr"/>
                       <a:r>
-                        <a:rPr sz="1500" b="1">
+                        <a:rPr sz="1600" b="1">
                           <a:solidFill>
                             <a:srgbClr val="FFFFFF"/>
                           </a:solidFill>
@@ -12767,7 +12695,7 @@
                     <a:p>
                       <a:pPr algn="ctr"/>
                       <a:r>
-                        <a:rPr sz="1500" b="0">
+                        <a:rPr sz="1600" b="0">
                           <a:solidFill>
                             <a:srgbClr val="202020"/>
                           </a:solidFill>
@@ -12792,7 +12720,7 @@
                     <a:p>
                       <a:pPr algn="ctr"/>
                       <a:r>
-                        <a:rPr sz="1500" b="0">
+                        <a:rPr sz="1600" b="0">
                           <a:solidFill>
                             <a:srgbClr val="202020"/>
                           </a:solidFill>
@@ -12817,7 +12745,7 @@
                     <a:p>
                       <a:pPr algn="ctr"/>
                       <a:r>
-                        <a:rPr sz="1500" b="0">
+                        <a:rPr sz="1600" b="0">
                           <a:solidFill>
                             <a:srgbClr val="202020"/>
                           </a:solidFill>
@@ -12867,7 +12795,7 @@
                     <a:p>
                       <a:pPr algn="ctr"/>
                       <a:r>
-                        <a:rPr sz="1500" b="1">
+                        <a:rPr sz="1600" b="1">
                           <a:solidFill>
                             <a:srgbClr val="FFFFFF"/>
                           </a:solidFill>
@@ -12892,7 +12820,7 @@
                     <a:p>
                       <a:pPr algn="ctr"/>
                       <a:r>
-                        <a:rPr sz="1500" b="0">
+                        <a:rPr sz="1600" b="0">
                           <a:solidFill>
                             <a:srgbClr val="202020"/>
                           </a:solidFill>
@@ -12917,7 +12845,7 @@
                     <a:p>
                       <a:pPr algn="ctr"/>
                       <a:r>
-                        <a:rPr sz="1500" b="0">
+                        <a:rPr sz="1600" b="0">
                           <a:solidFill>
                             <a:srgbClr val="202020"/>
                           </a:solidFill>
@@ -12942,7 +12870,7 @@
                     <a:p>
                       <a:pPr algn="ctr"/>
                       <a:r>
-                        <a:rPr sz="1500" b="0">
+                        <a:rPr sz="1600" b="0">
                           <a:solidFill>
                             <a:srgbClr val="202020"/>
                           </a:solidFill>
@@ -12992,7 +12920,7 @@
                     <a:p>
                       <a:pPr algn="ctr"/>
                       <a:r>
-                        <a:rPr sz="1500" b="1">
+                        <a:rPr sz="1600" b="1">
                           <a:solidFill>
                             <a:srgbClr val="FFFFFF"/>
                           </a:solidFill>
@@ -13017,7 +12945,7 @@
                     <a:p>
                       <a:pPr algn="ctr"/>
                       <a:r>
-                        <a:rPr sz="1500" b="0">
+                        <a:rPr sz="1600" b="0">
                           <a:solidFill>
                             <a:srgbClr val="202020"/>
                           </a:solidFill>
@@ -13042,7 +12970,7 @@
                     <a:p>
                       <a:pPr algn="ctr"/>
                       <a:r>
-                        <a:rPr sz="1500" b="0">
+                        <a:rPr sz="1600" b="0">
                           <a:solidFill>
                             <a:srgbClr val="202020"/>
                           </a:solidFill>
@@ -13067,7 +12995,7 @@
                     <a:p>
                       <a:pPr algn="ctr"/>
                       <a:r>
-                        <a:rPr sz="1500" b="0">
+                        <a:rPr sz="1600" b="0">
                           <a:solidFill>
                             <a:srgbClr val="202020"/>
                           </a:solidFill>
@@ -13117,7 +13045,7 @@
                     <a:p>
                       <a:pPr algn="ctr"/>
                       <a:r>
-                        <a:rPr sz="1500" b="1">
+                        <a:rPr sz="1600" b="1">
                           <a:solidFill>
                             <a:srgbClr val="FFFFFF"/>
                           </a:solidFill>
@@ -13142,7 +13070,7 @@
                     <a:p>
                       <a:pPr algn="ctr"/>
                       <a:r>
-                        <a:rPr sz="1500" b="0">
+                        <a:rPr sz="1600" b="0">
                           <a:solidFill>
                             <a:srgbClr val="202020"/>
                           </a:solidFill>
@@ -13167,7 +13095,7 @@
                     <a:p>
                       <a:pPr algn="ctr"/>
                       <a:r>
-                        <a:rPr sz="1500" b="0">
+                        <a:rPr sz="1600" b="0">
                           <a:solidFill>
                             <a:srgbClr val="202020"/>
                           </a:solidFill>
@@ -13192,7 +13120,7 @@
                     <a:p>
                       <a:pPr algn="ctr"/>
                       <a:r>
-                        <a:rPr sz="1500" b="0">
+                        <a:rPr sz="1600" b="0">
                           <a:solidFill>
                             <a:srgbClr val="202020"/>
                           </a:solidFill>
@@ -13242,7 +13170,7 @@
                     <a:p>
                       <a:pPr algn="ctr"/>
                       <a:r>
-                        <a:rPr sz="1500" b="1">
+                        <a:rPr sz="1600" b="1">
                           <a:solidFill>
                             <a:srgbClr val="FFFFFF"/>
                           </a:solidFill>
@@ -13267,7 +13195,7 @@
                     <a:p>
                       <a:pPr algn="ctr"/>
                       <a:r>
-                        <a:rPr sz="1500" b="0">
+                        <a:rPr sz="1600" b="0">
                           <a:solidFill>
                             <a:srgbClr val="202020"/>
                           </a:solidFill>
@@ -13292,7 +13220,7 @@
                     <a:p>
                       <a:pPr algn="ctr"/>
                       <a:r>
-                        <a:rPr sz="1500" b="0">
+                        <a:rPr sz="1600" b="0">
                           <a:solidFill>
                             <a:srgbClr val="202020"/>
                           </a:solidFill>
@@ -13317,7 +13245,7 @@
                     <a:p>
                       <a:pPr algn="ctr"/>
                       <a:r>
-                        <a:rPr sz="1500" b="0">
+                        <a:rPr sz="1600" b="0">
                           <a:solidFill>
                             <a:srgbClr val="202020"/>
                           </a:solidFill>
@@ -13382,25 +13310,13 @@
           <a:p>
             <a:pPr algn="just"/>
             <a:r>
-              <a:rPr sz="1800" b="1">
+              <a:rPr sz="2000" b="1">
                 <a:solidFill>
                   <a:srgbClr val="1E7A45"/>
                 </a:solidFill>
                 <a:latin typeface="Microsoft JhengHei"/>
               </a:rPr>
-              <a:t>梯度下降使 2 的 logit 上升、7 的 logit 下降最多、3 的 logit 只略為下降，</a:t>
-            </a:r>
-          </a:p>
-          <a:p>
-            <a:pPr algn="just"/>
-            <a:r>
-              <a:rPr sz="1800" b="1">
-                <a:solidFill>
-                  <a:srgbClr val="1E7A45"/>
-                </a:solidFill>
-                <a:latin typeface="Microsoft JhengHei"/>
-              </a:rPr>
-              <a:t>蒸餾模型因而往笨重模型的看法靠近：先是 2，其次是 3，最後是 7。</a:t>
+              <a:t>梯度下降使 2 的 logit 上升、7 的 logit 下降最多、3 的 logit 只略為下降，蒸餾模型因而往笨重模型的看法靠近：先是 2，其次是 3，最後是 7。</a:t>
             </a:r>
           </a:p>
         </p:txBody>
@@ -13429,25 +13345,13 @@
           <a:p>
             <a:pPr algn="just"/>
             <a:r>
-              <a:rPr sz="1700" b="0">
+              <a:rPr sz="1900" b="0">
                 <a:solidFill>
                   <a:srgbClr val="59636E"/>
                 </a:solidFill>
                 <a:latin typeface="Microsoft JhengHei"/>
               </a:rPr>
-              <a:t>Colab 第 3 段以自動微分（TensorFlow GradientTape）重算，</a:t>
-            </a:r>
-          </a:p>
-          <a:p>
-            <a:pPr algn="just"/>
-            <a:r>
-              <a:rPr sz="1700" b="0">
-                <a:solidFill>
-                  <a:srgbClr val="59636E"/>
-                </a:solidFill>
-                <a:latin typeface="Microsoft JhengHei"/>
-              </a:rPr>
-              <a:t>得到相同的目標函數值 13.8732 與相同的梯度。</a:t>
+              <a:t>Colab 第 3 段以自動微分（TensorFlow GradientTape）重算，得到相同的目標函數值 13.8732 與相同的梯度。</a:t>
             </a:r>
           </a:p>
         </p:txBody>
@@ -14169,7 +14073,7 @@
           <a:p>
             <a:pPr algn="just"/>
             <a:r>
-              <a:rPr sz="1300" b="0">
+              <a:rPr sz="1500" b="0">
                 <a:solidFill>
                   <a:srgbClr val="C7D6E5"/>
                 </a:solidFill>
@@ -14211,7 +14115,7 @@
                     <a:p>
                       <a:pPr algn="ctr"/>
                       <a:r>
-                        <a:rPr sz="1600" b="1">
+                        <a:rPr sz="1700" b="1">
                           <a:solidFill>
                             <a:srgbClr val="FFFFFF"/>
                           </a:solidFill>
@@ -14234,7 +14138,7 @@
                     <a:p>
                       <a:pPr algn="ctr"/>
                       <a:r>
-                        <a:rPr sz="1600" b="1">
+                        <a:rPr sz="1700" b="1">
                           <a:solidFill>
                             <a:srgbClr val="FFFFFF"/>
                           </a:solidFill>
@@ -14257,7 +14161,7 @@
                     <a:p>
                       <a:pPr algn="ctr"/>
                       <a:r>
-                        <a:rPr sz="1600" b="1">
+                        <a:rPr sz="1700" b="1">
                           <a:solidFill>
                             <a:srgbClr val="FFFFFF"/>
                           </a:solidFill>
@@ -14282,7 +14186,7 @@
                     <a:p>
                       <a:pPr algn="ctr"/>
                       <a:r>
-                        <a:rPr sz="1600" b="0">
+                        <a:rPr sz="1700" b="0">
                           <a:solidFill>
                             <a:srgbClr val="202020"/>
                           </a:solidFill>
@@ -14305,7 +14209,7 @@
                     <a:p>
                       <a:pPr algn="ctr"/>
                       <a:r>
-                        <a:rPr sz="1600" b="0">
+                        <a:rPr sz="1700" b="0">
                           <a:solidFill>
                             <a:srgbClr val="202020"/>
                           </a:solidFill>
@@ -14328,7 +14232,7 @@
                     <a:p>
                       <a:pPr algn="ctr"/>
                       <a:r>
-                        <a:rPr sz="1600" b="0">
+                        <a:rPr sz="1700" b="0">
                           <a:solidFill>
                             <a:srgbClr val="202020"/>
                           </a:solidFill>
@@ -14353,7 +14257,7 @@
                     <a:p>
                       <a:pPr algn="ctr"/>
                       <a:r>
-                        <a:rPr sz="1600" b="0">
+                        <a:rPr sz="1700" b="0">
                           <a:solidFill>
                             <a:srgbClr val="202020"/>
                           </a:solidFill>
@@ -14376,7 +14280,7 @@
                     <a:p>
                       <a:pPr algn="ctr"/>
                       <a:r>
-                        <a:rPr sz="1600" b="0">
+                        <a:rPr sz="1700" b="0">
                           <a:solidFill>
                             <a:srgbClr val="202020"/>
                           </a:solidFill>
@@ -14399,7 +14303,7 @@
                     <a:p>
                       <a:pPr algn="ctr"/>
                       <a:r>
-                        <a:rPr sz="1600" b="0">
+                        <a:rPr sz="1700" b="0">
                           <a:solidFill>
                             <a:srgbClr val="202020"/>
                           </a:solidFill>
@@ -14424,7 +14328,7 @@
                     <a:p>
                       <a:pPr algn="ctr"/>
                       <a:r>
-                        <a:rPr sz="1600" b="0">
+                        <a:rPr sz="1700" b="0">
                           <a:solidFill>
                             <a:srgbClr val="202020"/>
                           </a:solidFill>
@@ -14447,7 +14351,7 @@
                     <a:p>
                       <a:pPr algn="ctr"/>
                       <a:r>
-                        <a:rPr sz="1600" b="0">
+                        <a:rPr sz="1700" b="0">
                           <a:solidFill>
                             <a:srgbClr val="202020"/>
                           </a:solidFill>
@@ -14470,7 +14374,7 @@
                     <a:p>
                       <a:pPr algn="ctr"/>
                       <a:r>
-                        <a:rPr sz="1600" b="0">
+                        <a:rPr sz="1700" b="0">
                           <a:solidFill>
                             <a:srgbClr val="202020"/>
                           </a:solidFill>
@@ -14515,7 +14419,7 @@
           <a:p>
             <a:pPr algn="just"/>
             <a:r>
-              <a:rPr sz="1600" b="0">
+              <a:rPr sz="1800" b="0">
                 <a:solidFill>
                   <a:srgbClr val="202020"/>
                 </a:solidFill>
@@ -14527,7 +14431,7 @@
           <a:p>
             <a:pPr algn="just"/>
             <a:r>
-              <a:rPr sz="1600" b="0">
+              <a:rPr sz="1800" b="0">
                 <a:solidFill>
                   <a:srgbClr val="202020"/>
                 </a:solidFill>
@@ -14539,7 +14443,7 @@
           <a:p>
             <a:pPr algn="just"/>
             <a:r>
-              <a:rPr sz="1600" b="0">
+              <a:rPr sz="1800" b="0">
                 <a:solidFill>
                   <a:srgbClr val="202020"/>
                 </a:solidFill>
@@ -14598,25 +14502,13 @@
           <a:p>
             <a:pPr algn="just"/>
             <a:r>
-              <a:rPr sz="1600" b="0">
+              <a:rPr sz="1800" b="0">
                 <a:solidFill>
                   <a:srgbClr val="202020"/>
                 </a:solidFill>
                 <a:latin typeface="Microsoft JhengHei"/>
               </a:rPr>
-              <a:t>若溫度遠大於 logit，且 logit 對每個移轉樣本</a:t>
-            </a:r>
-          </a:p>
-          <a:p>
-            <a:pPr algn="just"/>
-            <a:r>
-              <a:rPr sz="1600" b="0">
-                <a:solidFill>
-                  <a:srgbClr val="202020"/>
-                </a:solidFill>
-                <a:latin typeface="Microsoft JhengHei"/>
-              </a:rPr>
-              <a:t>各自減去平均（N 為類別數），蒸餾等於最小化</a:t>
+              <a:t>若溫度遠大於 logit，且 logit 對每個移轉樣本各自減去平均（N 為類別數），蒸餾等於最小化</a:t>
             </a:r>
           </a:p>
         </p:txBody>
@@ -14676,7 +14568,7 @@
                     <a:p>
                       <a:pPr algn="ctr"/>
                       <a:r>
-                        <a:rPr sz="1500" b="1">
+                        <a:rPr sz="1600" b="1">
                           <a:solidFill>
                             <a:srgbClr val="FFFFFF"/>
                           </a:solidFill>
@@ -14699,7 +14591,7 @@
                     <a:p>
                       <a:pPr algn="ctr"/>
                       <a:r>
-                        <a:rPr sz="1500" b="1">
+                        <a:rPr sz="1600" b="1">
                           <a:solidFill>
                             <a:srgbClr val="FFFFFF"/>
                           </a:solidFill>
@@ -14722,7 +14614,7 @@
                     <a:p>
                       <a:pPr algn="ctr"/>
                       <a:r>
-                        <a:rPr sz="1500" b="1">
+                        <a:rPr sz="1600" b="1">
                           <a:solidFill>
                             <a:srgbClr val="FFFFFF"/>
                           </a:solidFill>
@@ -14747,7 +14639,7 @@
                     <a:p>
                       <a:pPr algn="ctr"/>
                       <a:r>
-                        <a:rPr sz="1500" b="0">
+                        <a:rPr sz="1600" b="0">
                           <a:solidFill>
                             <a:srgbClr val="202020"/>
                           </a:solidFill>
@@ -14770,7 +14662,7 @@
                     <a:p>
                       <a:pPr algn="ctr"/>
                       <a:r>
-                        <a:rPr sz="1500" b="0">
+                        <a:rPr sz="1600" b="0">
                           <a:solidFill>
                             <a:srgbClr val="202020"/>
                           </a:solidFill>
@@ -14793,7 +14685,7 @@
                     <a:p>
                       <a:pPr algn="ctr"/>
                       <a:r>
-                        <a:rPr sz="1500" b="0">
+                        <a:rPr sz="1600" b="0">
                           <a:solidFill>
                             <a:srgbClr val="202020"/>
                           </a:solidFill>
@@ -14818,7 +14710,7 @@
                     <a:p>
                       <a:pPr algn="ctr"/>
                       <a:r>
-                        <a:rPr sz="1500" b="0">
+                        <a:rPr sz="1600" b="0">
                           <a:solidFill>
                             <a:srgbClr val="202020"/>
                           </a:solidFill>
@@ -14841,7 +14733,7 @@
                     <a:p>
                       <a:pPr algn="ctr"/>
                       <a:r>
-                        <a:rPr sz="1500" b="0">
+                        <a:rPr sz="1600" b="0">
                           <a:solidFill>
                             <a:srgbClr val="202020"/>
                           </a:solidFill>
@@ -14864,7 +14756,7 @@
                     <a:p>
                       <a:pPr algn="ctr"/>
                       <a:r>
-                        <a:rPr sz="1500" b="0">
+                        <a:rPr sz="1600" b="0">
                           <a:solidFill>
                             <a:srgbClr val="202020"/>
                           </a:solidFill>
@@ -14889,7 +14781,7 @@
                     <a:p>
                       <a:pPr algn="ctr"/>
                       <a:r>
-                        <a:rPr sz="1500" b="0">
+                        <a:rPr sz="1600" b="0">
                           <a:solidFill>
                             <a:srgbClr val="202020"/>
                           </a:solidFill>
@@ -14912,7 +14804,7 @@
                     <a:p>
                       <a:pPr algn="ctr"/>
                       <a:r>
-                        <a:rPr sz="1500" b="0">
+                        <a:rPr sz="1600" b="0">
                           <a:solidFill>
                             <a:srgbClr val="202020"/>
                           </a:solidFill>
@@ -14935,7 +14827,7 @@
                     <a:p>
                       <a:pPr algn="ctr"/>
                       <a:r>
-                        <a:rPr sz="1500" b="0">
+                        <a:rPr sz="1600" b="0">
                           <a:solidFill>
                             <a:srgbClr val="202020"/>
                           </a:solidFill>
@@ -14980,7 +14872,7 @@
           <a:p>
             <a:pPr algn="just"/>
             <a:r>
-              <a:rPr sz="1400" b="0">
+              <a:rPr sz="1600" b="0">
                 <a:solidFill>
                   <a:srgbClr val="59636E"/>
                 </a:solidFill>
@@ -15035,13 +14927,13 @@
           <a:p>
             <a:pPr algn="just"/>
             <a:r>
-              <a:rPr sz="1800" b="1">
+              <a:rPr sz="2000" b="1">
                 <a:solidFill>
                   <a:srgbClr val="1E7A45"/>
                 </a:solidFill>
                 <a:latin typeface="Microsoft JhengHei"/>
               </a:rPr>
-              <a:t>比對 logit 是蒸餾的特例。溫度較低時，蒸餾對「比平均負很多的 logit」的比對注意得少得多。</a:t>
+              <a:t>比對 logit 是蒸餾的特例。溫度較低時，蒸餾較少要求比平均負很多的 logit 也要貼齊。</a:t>
             </a:r>
           </a:p>
         </p:txBody>
@@ -15615,7 +15507,7 @@
           <a:p>
             <a:pPr algn="just"/>
             <a:r>
-              <a:rPr sz="1300" b="0">
+              <a:rPr sz="1500" b="0">
                 <a:solidFill>
                   <a:srgbClr val="C7D6E5"/>
                 </a:solidFill>
@@ -15681,7 +15573,7 @@
                     <a:p>
                       <a:pPr algn="ctr"/>
                       <a:r>
-                        <a:rPr sz="1600" b="1">
+                        <a:rPr sz="1700" b="1">
                           <a:solidFill>
                             <a:srgbClr val="FFFFFF"/>
                           </a:solidFill>
@@ -15704,7 +15596,7 @@
                     <a:p>
                       <a:pPr algn="ctr"/>
                       <a:r>
-                        <a:rPr sz="1600" b="1">
+                        <a:rPr sz="1700" b="1">
                           <a:solidFill>
                             <a:srgbClr val="FFFFFF"/>
                           </a:solidFill>
@@ -15727,7 +15619,7 @@
                     <a:p>
                       <a:pPr algn="ctr"/>
                       <a:r>
-                        <a:rPr sz="1600" b="1">
+                        <a:rPr sz="1700" b="1">
                           <a:solidFill>
                             <a:srgbClr val="FFFFFF"/>
                           </a:solidFill>
@@ -15752,7 +15644,7 @@
                     <a:p>
                       <a:pPr algn="ctr"/>
                       <a:r>
-                        <a:rPr sz="1600" b="0">
+                        <a:rPr sz="1700" b="0">
                           <a:solidFill>
                             <a:srgbClr val="202020"/>
                           </a:solidFill>
@@ -15775,7 +15667,7 @@
                     <a:p>
                       <a:pPr algn="ctr"/>
                       <a:r>
-                        <a:rPr sz="1600" b="0">
+                        <a:rPr sz="1700" b="0">
                           <a:solidFill>
                             <a:srgbClr val="202020"/>
                           </a:solidFill>
@@ -15798,7 +15690,7 @@
                     <a:p>
                       <a:pPr algn="ctr"/>
                       <a:r>
-                        <a:rPr sz="1600" b="0">
+                        <a:rPr sz="1700" b="0">
                           <a:solidFill>
                             <a:srgbClr val="202020"/>
                           </a:solidFill>
@@ -15823,7 +15715,7 @@
                     <a:p>
                       <a:pPr algn="ctr"/>
                       <a:r>
-                        <a:rPr sz="1600" b="0">
+                        <a:rPr sz="1700" b="0">
                           <a:solidFill>
                             <a:srgbClr val="202020"/>
                           </a:solidFill>
@@ -15846,7 +15738,7 @@
                     <a:p>
                       <a:pPr algn="ctr"/>
                       <a:r>
-                        <a:rPr sz="1600" b="0">
+                        <a:rPr sz="1700" b="0">
                           <a:solidFill>
                             <a:srgbClr val="202020"/>
                           </a:solidFill>
@@ -15869,7 +15761,7 @@
                     <a:p>
                       <a:pPr algn="ctr"/>
                       <a:r>
-                        <a:rPr sz="1600" b="0">
+                        <a:rPr sz="1700" b="0">
                           <a:solidFill>
                             <a:srgbClr val="202020"/>
                           </a:solidFill>
@@ -15894,7 +15786,7 @@
                     <a:p>
                       <a:pPr algn="ctr"/>
                       <a:r>
-                        <a:rPr sz="1600" b="0">
+                        <a:rPr sz="1700" b="0">
                           <a:solidFill>
                             <a:srgbClr val="202020"/>
                           </a:solidFill>
@@ -15917,7 +15809,7 @@
                     <a:p>
                       <a:pPr algn="ctr"/>
                       <a:r>
-                        <a:rPr sz="1600" b="0">
+                        <a:rPr sz="1700" b="0">
                           <a:solidFill>
                             <a:srgbClr val="202020"/>
                           </a:solidFill>
@@ -15940,7 +15832,7 @@
                     <a:p>
                       <a:pPr algn="ctr"/>
                       <a:r>
-                        <a:rPr sz="1600" b="0">
+                        <a:rPr sz="1700" b="0">
                           <a:solidFill>
                             <a:srgbClr val="202020"/>
                           </a:solidFill>
@@ -15965,7 +15857,7 @@
                     <a:p>
                       <a:pPr algn="ctr"/>
                       <a:r>
-                        <a:rPr sz="1600" b="0">
+                        <a:rPr sz="1700" b="0">
                           <a:solidFill>
                             <a:srgbClr val="202020"/>
                           </a:solidFill>
@@ -15988,7 +15880,7 @@
                     <a:p>
                       <a:pPr algn="ctr"/>
                       <a:r>
-                        <a:rPr sz="1600" b="0">
+                        <a:rPr sz="1700" b="0">
                           <a:solidFill>
                             <a:srgbClr val="202020"/>
                           </a:solidFill>
@@ -16011,7 +15903,7 @@
                     <a:p>
                       <a:pPr algn="ctr"/>
                       <a:r>
-                        <a:rPr sz="1600" b="0">
+                        <a:rPr sz="1700" b="0">
                           <a:solidFill>
                             <a:srgbClr val="202020"/>
                           </a:solidFill>
@@ -16036,7 +15928,7 @@
                     <a:p>
                       <a:pPr algn="ctr"/>
                       <a:r>
-                        <a:rPr sz="1600" b="0">
+                        <a:rPr sz="1700" b="0">
                           <a:solidFill>
                             <a:srgbClr val="202020"/>
                           </a:solidFill>
@@ -16059,7 +15951,7 @@
                     <a:p>
                       <a:pPr algn="ctr"/>
                       <a:r>
-                        <a:rPr sz="1600" b="0">
+                        <a:rPr sz="1700" b="0">
                           <a:solidFill>
                             <a:srgbClr val="202020"/>
                           </a:solidFill>
@@ -16082,7 +15974,7 @@
                     <a:p>
                       <a:pPr algn="ctr"/>
                       <a:r>
-                        <a:rPr sz="1600" b="0">
+                        <a:rPr sz="1700" b="0">
                           <a:solidFill>
                             <a:srgbClr val="202020"/>
                           </a:solidFill>
@@ -16127,7 +16019,7 @@
           <a:p>
             <a:pPr algn="just"/>
             <a:r>
-              <a:rPr sz="1700" b="0">
+              <a:rPr sz="1900" b="0">
                 <a:solidFill>
                   <a:srgbClr val="202020"/>
                 </a:solidFill>
@@ -16139,7 +16031,7 @@
           <a:p>
             <a:pPr algn="just"/>
             <a:r>
-              <a:rPr sz="1700" b="0">
+              <a:rPr sz="1900" b="0">
                 <a:solidFill>
                   <a:srgbClr val="202020"/>
                 </a:solidFill>
@@ -16487,7 +16379,7 @@
           <a:p>
             <a:pPr algn="just"/>
             <a:r>
-              <a:rPr sz="1300" b="0">
+              <a:rPr sz="1500" b="0">
                 <a:solidFill>
                   <a:srgbClr val="C7D6E5"/>
                 </a:solidFill>
@@ -16529,7 +16421,7 @@
                     <a:p>
                       <a:pPr algn="ctr"/>
                       <a:r>
-                        <a:rPr sz="1700" b="1">
+                        <a:rPr sz="1800" b="1">
                           <a:solidFill>
                             <a:srgbClr val="FFFFFF"/>
                           </a:solidFill>
@@ -16552,7 +16444,7 @@
                     <a:p>
                       <a:pPr algn="ctr"/>
                       <a:r>
-                        <a:rPr sz="1700" b="1">
+                        <a:rPr sz="1800" b="1">
                           <a:solidFill>
                             <a:srgbClr val="FFFFFF"/>
                           </a:solidFill>
@@ -16575,7 +16467,7 @@
                     <a:p>
                       <a:pPr algn="ctr"/>
                       <a:r>
-                        <a:rPr sz="1700" b="1">
+                        <a:rPr sz="1800" b="1">
                           <a:solidFill>
                             <a:srgbClr val="FFFFFF"/>
                           </a:solidFill>
@@ -16600,7 +16492,7 @@
                     <a:p>
                       <a:pPr algn="ctr"/>
                       <a:r>
-                        <a:rPr sz="1700" b="0">
+                        <a:rPr sz="1800" b="0">
                           <a:solidFill>
                             <a:srgbClr val="202020"/>
                           </a:solidFill>
@@ -16623,7 +16515,7 @@
                     <a:p>
                       <a:pPr algn="ctr"/>
                       <a:r>
-                        <a:rPr sz="1700" b="0">
+                        <a:rPr sz="1800" b="0">
                           <a:solidFill>
                             <a:srgbClr val="202020"/>
                           </a:solidFill>
@@ -16646,13 +16538,13 @@
                     <a:p>
                       <a:pPr algn="ctr"/>
                       <a:r>
-                        <a:rPr sz="1700" b="0">
+                        <a:rPr sz="1800" b="0">
                           <a:solidFill>
                             <a:srgbClr val="202020"/>
                           </a:solidFill>
                           <a:latin typeface="Microsoft JhengHei"/>
                         </a:rPr>
-                        <a:t>222</a:t>
+                        <a:t>203</a:t>
                       </a:r>
                     </a:p>
                   </a:txBody>
@@ -16671,7 +16563,7 @@
                     <a:p>
                       <a:pPr algn="ctr"/>
                       <a:r>
-                        <a:rPr sz="1700" b="0">
+                        <a:rPr sz="1800" b="0">
                           <a:solidFill>
                             <a:srgbClr val="202020"/>
                           </a:solidFill>
@@ -16694,7 +16586,7 @@
                     <a:p>
                       <a:pPr algn="ctr"/>
                       <a:r>
-                        <a:rPr sz="1700" b="0">
+                        <a:rPr sz="1800" b="0">
                           <a:solidFill>
                             <a:srgbClr val="202020"/>
                           </a:solidFill>
@@ -16717,7 +16609,7 @@
                     <a:p>
                       <a:pPr algn="ctr"/>
                       <a:r>
-                        <a:rPr sz="1700" b="0">
+                        <a:rPr sz="1800" b="0">
                           <a:solidFill>
                             <a:srgbClr val="202020"/>
                           </a:solidFill>
@@ -16742,7 +16634,7 @@
                     <a:p>
                       <a:pPr algn="ctr"/>
                       <a:r>
-                        <a:rPr sz="1700" b="0">
+                        <a:rPr sz="1800" b="0">
                           <a:solidFill>
                             <a:srgbClr val="202020"/>
                           </a:solidFill>
@@ -16765,7 +16657,7 @@
                     <a:p>
                       <a:pPr algn="ctr"/>
                       <a:r>
-                        <a:rPr sz="1700" b="0">
+                        <a:rPr sz="1800" b="0">
                           <a:solidFill>
                             <a:srgbClr val="202020"/>
                           </a:solidFill>
@@ -16788,13 +16680,13 @@
                     <a:p>
                       <a:pPr algn="ctr"/>
                       <a:r>
-                        <a:rPr sz="1700" b="0">
+                        <a:rPr sz="1800" b="0">
                           <a:solidFill>
                             <a:srgbClr val="202020"/>
                           </a:solidFill>
                           <a:latin typeface="Microsoft JhengHei"/>
                         </a:rPr>
-                        <a:t>319（T = 20）</a:t>
+                        <a:t>318（T = 20）</a:t>
                       </a:r>
                     </a:p>
                   </a:txBody>
@@ -16877,25 +16769,13 @@
           <a:p>
             <a:pPr algn="just"/>
             <a:r>
-              <a:rPr sz="1800" b="1">
+              <a:rPr sz="2000" b="1">
                 <a:solidFill>
                   <a:srgbClr val="1E7A45"/>
                 </a:solidFill>
                 <a:latin typeface="Microsoft JhengHei"/>
               </a:rPr>
-              <a:t>本教材：蒸餾把小網路與笨重模型的差距</a:t>
-            </a:r>
-          </a:p>
-          <a:p>
-            <a:pPr algn="just"/>
-            <a:r>
-              <a:rPr sz="1800" b="1">
-                <a:solidFill>
-                  <a:srgbClr val="1E7A45"/>
-                </a:solidFill>
-                <a:latin typeface="Microsoft JhengHei"/>
-              </a:rPr>
-              <a:t>從 198 個錯誤縮小到 97 個</a:t>
+              <a:t>本教材：蒸餾把小網路與笨重模型的差距從 217 個錯誤縮小到 115 個</a:t>
             </a:r>
           </a:p>
         </p:txBody>
@@ -16924,37 +16804,13 @@
           <a:p>
             <a:pPr algn="just"/>
             <a:r>
-              <a:rPr sz="1700" b="0">
+              <a:rPr sz="1900" b="0">
                 <a:solidFill>
                   <a:srgbClr val="202020"/>
                 </a:solidFill>
                 <a:latin typeface="Microsoft JhengHei"/>
               </a:rPr>
-              <a:t>論文指出：軟目標能把大量知識移轉給蒸餾模型，</a:t>
-            </a:r>
-          </a:p>
-          <a:p>
-            <a:pPr algn="just"/>
-            <a:r>
-              <a:rPr sz="1700" b="0">
-                <a:solidFill>
-                  <a:srgbClr val="202020"/>
-                </a:solidFill>
-                <a:latin typeface="Microsoft JhengHei"/>
-              </a:rPr>
-              <a:t>包括從平移過的訓練資料學到的類推方式，</a:t>
-            </a:r>
-          </a:p>
-          <a:p>
-            <a:pPr algn="just"/>
-            <a:r>
-              <a:rPr sz="1700" b="0">
-                <a:solidFill>
-                  <a:srgbClr val="202020"/>
-                </a:solidFill>
-                <a:latin typeface="Microsoft JhengHei"/>
-              </a:rPr>
-              <a:t>即使移轉集裡沒有任何平移過的影像。</a:t>
+              <a:t>論文指出：軟目標能把大量知識移轉給蒸餾模型，包括從平移過的訓練資料學到的類推方式，即使移轉集裡沒有任何平移過的影像。</a:t>
             </a:r>
           </a:p>
         </p:txBody>
@@ -16983,7 +16839,7 @@
           <a:p>
             <a:pPr algn="just"/>
             <a:r>
-              <a:rPr sz="1500" b="0">
+              <a:rPr sz="1700" b="0">
                 <a:solidFill>
                   <a:srgbClr val="59636E"/>
                 </a:solidFill>
@@ -17423,7 +17279,7 @@
           <a:p>
             <a:pPr algn="just"/>
             <a:r>
-              <a:rPr sz="1300" b="0">
+              <a:rPr sz="1500" b="0">
                 <a:solidFill>
                   <a:srgbClr val="C7D6E5"/>
                 </a:solidFill>
@@ -17734,7 +17590,7 @@
           <a:p>
             <a:pPr algn="just"/>
             <a:r>
-              <a:rPr sz="1300" b="0">
+              <a:rPr sz="1500" b="0">
                 <a:solidFill>
                   <a:srgbClr val="C7D6E5"/>
                 </a:solidFill>
@@ -17776,7 +17632,7 @@
                     <a:p>
                       <a:pPr algn="ctr"/>
                       <a:r>
-                        <a:rPr sz="1600" b="1">
+                        <a:rPr sz="1700" b="1">
                           <a:solidFill>
                             <a:srgbClr val="FFFFFF"/>
                           </a:solidFill>
@@ -17799,7 +17655,7 @@
                     <a:p>
                       <a:pPr algn="ctr"/>
                       <a:r>
-                        <a:rPr sz="1600" b="1">
+                        <a:rPr sz="1700" b="1">
                           <a:solidFill>
                             <a:srgbClr val="FFFFFF"/>
                           </a:solidFill>
@@ -17822,7 +17678,7 @@
                     <a:p>
                       <a:pPr algn="ctr"/>
                       <a:r>
-                        <a:rPr sz="1600" b="1">
+                        <a:rPr sz="1700" b="1">
                           <a:solidFill>
                             <a:srgbClr val="FFFFFF"/>
                           </a:solidFill>
@@ -17847,7 +17703,7 @@
                     <a:p>
                       <a:pPr algn="ctr"/>
                       <a:r>
-                        <a:rPr sz="1600" b="0">
+                        <a:rPr sz="1700" b="0">
                           <a:solidFill>
                             <a:srgbClr val="202020"/>
                           </a:solidFill>
@@ -17870,7 +17726,7 @@
                     <a:p>
                       <a:pPr algn="ctr"/>
                       <a:r>
-                        <a:rPr sz="1600" b="0">
+                        <a:rPr sz="1700" b="0">
                           <a:solidFill>
                             <a:srgbClr val="202020"/>
                           </a:solidFill>
@@ -17893,7 +17749,7 @@
                     <a:p>
                       <a:pPr algn="ctr"/>
                       <a:r>
-                        <a:rPr sz="1600" b="0">
+                        <a:rPr sz="1700" b="0">
                           <a:solidFill>
                             <a:srgbClr val="202020"/>
                           </a:solidFill>
@@ -17918,7 +17774,7 @@
                     <a:p>
                       <a:pPr algn="ctr"/>
                       <a:r>
-                        <a:rPr sz="1600" b="0">
+                        <a:rPr sz="1700" b="0">
                           <a:solidFill>
                             <a:srgbClr val="202020"/>
                           </a:solidFill>
@@ -17941,13 +17797,13 @@
                     <a:p>
                       <a:pPr algn="ctr"/>
                       <a:r>
-                        <a:rPr sz="1600" b="0">
+                        <a:rPr sz="1700" b="0">
                           <a:solidFill>
                             <a:srgbClr val="202020"/>
                           </a:solidFill>
                           <a:latin typeface="Consolas"/>
                         </a:rPr>
-                        <a:t>397</a:t>
+                        <a:t>402</a:t>
                       </a:r>
                     </a:p>
                   </a:txBody>
@@ -17964,13 +17820,13 @@
                     <a:p>
                       <a:pPr algn="ctr"/>
                       <a:r>
-                        <a:rPr sz="1600" b="0">
+                        <a:rPr sz="1700" b="0">
                           <a:solidFill>
                             <a:srgbClr val="202020"/>
                           </a:solidFill>
                           <a:latin typeface="Consolas"/>
                         </a:rPr>
-                        <a:t>522</a:t>
+                        <a:t>561</a:t>
                       </a:r>
                     </a:p>
                   </a:txBody>
@@ -17989,7 +17845,7 @@
                     <a:p>
                       <a:pPr algn="ctr"/>
                       <a:r>
-                        <a:rPr sz="1600" b="0">
+                        <a:rPr sz="1700" b="0">
                           <a:solidFill>
                             <a:srgbClr val="202020"/>
                           </a:solidFill>
@@ -18012,13 +17868,13 @@
                     <a:p>
                       <a:pPr algn="ctr"/>
                       <a:r>
-                        <a:rPr sz="1600" b="0">
+                        <a:rPr sz="1700" b="0">
                           <a:solidFill>
                             <a:srgbClr val="202020"/>
                           </a:solidFill>
                           <a:latin typeface="Consolas"/>
                         </a:rPr>
-                        <a:t>343</a:t>
+                        <a:t>349</a:t>
                       </a:r>
                     </a:p>
                   </a:txBody>
@@ -18035,13 +17891,13 @@
                     <a:p>
                       <a:pPr algn="ctr"/>
                       <a:r>
-                        <a:rPr sz="1600" b="0">
+                        <a:rPr sz="1700" b="0">
                           <a:solidFill>
                             <a:srgbClr val="202020"/>
                           </a:solidFill>
                           <a:latin typeface="Consolas"/>
                         </a:rPr>
-                        <a:t>545</a:t>
+                        <a:t>544</a:t>
                       </a:r>
                     </a:p>
                   </a:txBody>
@@ -18060,7 +17916,7 @@
                     <a:p>
                       <a:pPr algn="ctr"/>
                       <a:r>
-                        <a:rPr sz="1600" b="0">
+                        <a:rPr sz="1700" b="0">
                           <a:solidFill>
                             <a:srgbClr val="202020"/>
                           </a:solidFill>
@@ -18083,13 +17939,13 @@
                     <a:p>
                       <a:pPr algn="ctr"/>
                       <a:r>
-                        <a:rPr sz="1600" b="0">
+                        <a:rPr sz="1700" b="0">
                           <a:solidFill>
                             <a:srgbClr val="202020"/>
                           </a:solidFill>
                           <a:latin typeface="Consolas"/>
                         </a:rPr>
-                        <a:t>327</a:t>
+                        <a:t>349</a:t>
                       </a:r>
                     </a:p>
                   </a:txBody>
@@ -18106,13 +17962,13 @@
                     <a:p>
                       <a:pPr algn="ctr"/>
                       <a:r>
-                        <a:rPr sz="1600" b="0">
+                        <a:rPr sz="1700" b="0">
                           <a:solidFill>
                             <a:srgbClr val="202020"/>
                           </a:solidFill>
                           <a:latin typeface="Consolas"/>
                         </a:rPr>
-                        <a:t>498</a:t>
+                        <a:t>526</a:t>
                       </a:r>
                     </a:p>
                   </a:txBody>
@@ -18131,7 +17987,7 @@
                     <a:p>
                       <a:pPr algn="ctr"/>
                       <a:r>
-                        <a:rPr sz="1600" b="0">
+                        <a:rPr sz="1700" b="0">
                           <a:solidFill>
                             <a:srgbClr val="202020"/>
                           </a:solidFill>
@@ -18154,13 +18010,13 @@
                     <a:p>
                       <a:pPr algn="ctr"/>
                       <a:r>
-                        <a:rPr sz="1600" b="0">
+                        <a:rPr sz="1700" b="0">
                           <a:solidFill>
                             <a:srgbClr val="202020"/>
                           </a:solidFill>
                           <a:latin typeface="Consolas"/>
                         </a:rPr>
-                        <a:t>322</a:t>
+                        <a:t>347</a:t>
                       </a:r>
                     </a:p>
                   </a:txBody>
@@ -18177,13 +18033,13 @@
                     <a:p>
                       <a:pPr algn="ctr"/>
                       <a:r>
-                        <a:rPr sz="1600" b="0">
+                        <a:rPr sz="1700" b="0">
                           <a:solidFill>
                             <a:srgbClr val="202020"/>
                           </a:solidFill>
                           <a:latin typeface="Consolas"/>
                         </a:rPr>
-                        <a:t>554</a:t>
+                        <a:t>570</a:t>
                       </a:r>
                     </a:p>
                   </a:txBody>
@@ -18202,7 +18058,7 @@
                     <a:p>
                       <a:pPr algn="ctr"/>
                       <a:r>
-                        <a:rPr sz="1600" b="0">
+                        <a:rPr sz="1700" b="0">
                           <a:solidFill>
                             <a:srgbClr val="202020"/>
                           </a:solidFill>
@@ -18225,13 +18081,13 @@
                     <a:p>
                       <a:pPr algn="ctr"/>
                       <a:r>
-                        <a:rPr sz="1600" b="0">
+                        <a:rPr sz="1700" b="0">
                           <a:solidFill>
                             <a:srgbClr val="202020"/>
                           </a:solidFill>
                           <a:latin typeface="Consolas"/>
                         </a:rPr>
-                        <a:t>319</a:t>
+                        <a:t>318</a:t>
                       </a:r>
                     </a:p>
                   </a:txBody>
@@ -18248,13 +18104,13 @@
                     <a:p>
                       <a:pPr algn="ctr"/>
                       <a:r>
-                        <a:rPr sz="1600" b="0">
+                        <a:rPr sz="1700" b="0">
                           <a:solidFill>
                             <a:srgbClr val="202020"/>
                           </a:solidFill>
                           <a:latin typeface="Consolas"/>
                         </a:rPr>
-                        <a:t>599</a:t>
+                        <a:t>598</a:t>
                       </a:r>
                     </a:p>
                   </a:txBody>
@@ -18337,25 +18193,13 @@
           <a:p>
             <a:pPr algn="just"/>
             <a:r>
-              <a:rPr sz="1700" b="1">
+              <a:rPr sz="1900" b="1">
                 <a:solidFill>
                   <a:srgbClr val="1F4E79"/>
                 </a:solidFill>
                 <a:latin typeface="Microsoft JhengHei"/>
               </a:rPr>
-              <a:t>論文：每層 300 個以上單元時，8 以上的溫度結果相當接近；每層縮減為 30 個時，</a:t>
-            </a:r>
-          </a:p>
-          <a:p>
-            <a:pPr algn="just"/>
-            <a:r>
-              <a:rPr sz="1700" b="1">
-                <a:solidFill>
-                  <a:srgbClr val="1F4E79"/>
-                </a:solidFill>
-                <a:latin typeface="Microsoft JhengHei"/>
-              </a:rPr>
-              <a:t>2.5 至 4 的溫度明顯優於更高或更低的溫度</a:t>
+              <a:t>論文：每層 300 個以上單元時，8 以上的溫度結果相當接近；每層縮減為 30 個時，2.5 至 4 的溫度明顯優於更高或更低的溫度</a:t>
             </a:r>
           </a:p>
         </p:txBody>
@@ -18404,13 +18248,13 @@
           <a:p>
             <a:pPr algn="just"/>
             <a:r>
-              <a:rPr sz="1800" b="1">
+              <a:rPr sz="2000" b="1">
                 <a:solidFill>
                   <a:srgbClr val="1E7A45"/>
                 </a:solidFill>
                 <a:latin typeface="Microsoft JhengHei"/>
               </a:rPr>
-              <a:t>本教材：30-30 在 T = 4 最好（498 個錯誤），T = 20 反而比只用硬目標還差</a:t>
+              <a:t>本教材：30-30 在 T = 4 最好（526 個錯誤），T = 20 反而比只用硬目標還差</a:t>
             </a:r>
           </a:p>
         </p:txBody>
@@ -18439,7 +18283,7 @@
           <a:p>
             <a:pPr algn="just"/>
             <a:r>
-              <a:rPr sz="1600" b="0">
+              <a:rPr sz="1800" b="0">
                 <a:solidFill>
                   <a:srgbClr val="59636E"/>
                 </a:solidFill>
@@ -18879,7 +18723,7 @@
           <a:p>
             <a:pPr algn="just"/>
             <a:r>
-              <a:rPr sz="1300" b="0">
+              <a:rPr sz="1500" b="0">
                 <a:solidFill>
                   <a:srgbClr val="C7D6E5"/>
                 </a:solidFill>
@@ -18922,7 +18766,7 @@
                     <a:p>
                       <a:pPr algn="ctr"/>
                       <a:r>
-                        <a:rPr sz="1600" b="1">
+                        <a:rPr sz="1700" b="1">
                           <a:solidFill>
                             <a:srgbClr val="FFFFFF"/>
                           </a:solidFill>
@@ -18945,7 +18789,7 @@
                     <a:p>
                       <a:pPr algn="ctr"/>
                       <a:r>
-                        <a:rPr sz="1600" b="1">
+                        <a:rPr sz="1700" b="1">
                           <a:solidFill>
                             <a:srgbClr val="FFFFFF"/>
                           </a:solidFill>
@@ -18968,7 +18812,7 @@
                     <a:p>
                       <a:pPr algn="ctr"/>
                       <a:r>
-                        <a:rPr sz="1600" b="1">
+                        <a:rPr sz="1700" b="1">
                           <a:solidFill>
                             <a:srgbClr val="FFFFFF"/>
                           </a:solidFill>
@@ -18991,7 +18835,7 @@
                     <a:p>
                       <a:pPr algn="ctr"/>
                       <a:r>
-                        <a:rPr sz="1600" b="1">
+                        <a:rPr sz="1700" b="1">
                           <a:solidFill>
                             <a:srgbClr val="FFFFFF"/>
                           </a:solidFill>
@@ -19016,7 +18860,7 @@
                     <a:p>
                       <a:pPr algn="ctr"/>
                       <a:r>
-                        <a:rPr sz="1600" b="0">
+                        <a:rPr sz="1700" b="0">
                           <a:solidFill>
                             <a:srgbClr val="202020"/>
                           </a:solidFill>
@@ -19039,7 +18883,7 @@
                     <a:p>
                       <a:pPr algn="ctr"/>
                       <a:r>
-                        <a:rPr sz="1600" b="0">
+                        <a:rPr sz="1700" b="0">
                           <a:solidFill>
                             <a:srgbClr val="202020"/>
                           </a:solidFill>
@@ -19062,7 +18906,7 @@
                     <a:p>
                       <a:pPr algn="ctr"/>
                       <a:r>
-                        <a:rPr sz="1600" b="0">
+                        <a:rPr sz="1700" b="0">
                           <a:solidFill>
                             <a:srgbClr val="202020"/>
                           </a:solidFill>
@@ -19085,7 +18929,7 @@
                     <a:p>
                       <a:pPr algn="ctr"/>
                       <a:r>
-                        <a:rPr sz="1600" b="0">
+                        <a:rPr sz="1700" b="0">
                           <a:solidFill>
                             <a:srgbClr val="202020"/>
                           </a:solidFill>
@@ -19110,7 +18954,7 @@
                     <a:p>
                       <a:pPr algn="ctr"/>
                       <a:r>
-                        <a:rPr sz="1600" b="0">
+                        <a:rPr sz="1700" b="0">
                           <a:solidFill>
                             <a:srgbClr val="202020"/>
                           </a:solidFill>
@@ -19133,13 +18977,13 @@
                     <a:p>
                       <a:pPr algn="ctr"/>
                       <a:r>
-                        <a:rPr sz="1600" b="0">
+                        <a:rPr sz="1700" b="0">
                           <a:solidFill>
                             <a:srgbClr val="202020"/>
                           </a:solidFill>
                           <a:latin typeface="Consolas"/>
                         </a:rPr>
-                        <a:t>727</a:t>
+                        <a:t>646</a:t>
                       </a:r>
                     </a:p>
                   </a:txBody>
@@ -19156,13 +19000,13 @@
                     <a:p>
                       <a:pPr algn="ctr"/>
                       <a:r>
-                        <a:rPr sz="1600" b="0">
+                        <a:rPr sz="1700" b="0">
                           <a:solidFill>
                             <a:srgbClr val="202020"/>
                           </a:solidFill>
                           <a:latin typeface="Consolas"/>
                         </a:rPr>
-                        <a:t>457 / 1010</a:t>
+                        <a:t>378 / 1010</a:t>
                       </a:r>
                     </a:p>
                   </a:txBody>
@@ -19179,13 +19023,13 @@
                     <a:p>
                       <a:pPr algn="ctr"/>
                       <a:r>
-                        <a:rPr sz="1600" b="0">
+                        <a:rPr sz="1700" b="0">
                           <a:solidFill>
                             <a:srgbClr val="202020"/>
                           </a:solidFill>
                           <a:latin typeface="Consolas"/>
                         </a:rPr>
-                        <a:t>54.8%</a:t>
+                        <a:t>62.6%</a:t>
                       </a:r>
                     </a:p>
                   </a:txBody>
@@ -19204,7 +19048,7 @@
                     <a:p>
                       <a:pPr algn="ctr"/>
                       <a:r>
-                        <a:rPr sz="1600" b="0">
+                        <a:rPr sz="1700" b="0">
                           <a:solidFill>
                             <a:srgbClr val="202020"/>
                           </a:solidFill>
@@ -19227,13 +19071,13 @@
                     <a:p>
                       <a:pPr algn="ctr"/>
                       <a:r>
-                        <a:rPr sz="1600" b="0">
+                        <a:rPr sz="1700" b="0">
                           <a:solidFill>
                             <a:srgbClr val="202020"/>
                           </a:solidFill>
                           <a:latin typeface="Consolas"/>
                         </a:rPr>
-                        <a:t>442</a:t>
+                        <a:t>430</a:t>
                       </a:r>
                     </a:p>
                   </a:txBody>
@@ -19250,13 +19094,13 @@
                     <a:p>
                       <a:pPr algn="ctr"/>
                       <a:r>
-                        <a:rPr sz="1600" b="0">
+                        <a:rPr sz="1700" b="0">
                           <a:solidFill>
                             <a:srgbClr val="202020"/>
                           </a:solidFill>
                           <a:latin typeface="Consolas"/>
                         </a:rPr>
-                        <a:t>104 / 1010</a:t>
+                        <a:t>84 / 1010</a:t>
                       </a:r>
                     </a:p>
                   </a:txBody>
@@ -19273,13 +19117,13 @@
                     <a:p>
                       <a:pPr algn="ctr"/>
                       <a:r>
-                        <a:rPr sz="1600" b="0">
+                        <a:rPr sz="1700" b="0">
                           <a:solidFill>
                             <a:srgbClr val="202020"/>
                           </a:solidFill>
                           <a:latin typeface="Consolas"/>
                         </a:rPr>
-                        <a:t>89.7%</a:t>
+                        <a:t>91.7%</a:t>
                       </a:r>
                     </a:p>
                   </a:txBody>
@@ -19298,7 +19142,7 @@
                     <a:p>
                       <a:pPr algn="ctr"/>
                       <a:r>
-                        <a:rPr sz="1600" b="0">
+                        <a:rPr sz="1700" b="0">
                           <a:solidFill>
                             <a:srgbClr val="202020"/>
                           </a:solidFill>
@@ -19321,7 +19165,7 @@
                     <a:p>
                       <a:pPr algn="ctr"/>
                       <a:r>
-                        <a:rPr sz="1600" b="0">
+                        <a:rPr sz="1700" b="0">
                           <a:solidFill>
                             <a:srgbClr val="202020"/>
                           </a:solidFill>
@@ -19344,7 +19188,7 @@
                     <a:p>
                       <a:pPr algn="ctr"/>
                       <a:r>
-                        <a:rPr sz="1600" b="0">
+                        <a:rPr sz="1700" b="0">
                           <a:solidFill>
                             <a:srgbClr val="202020"/>
                           </a:solidFill>
@@ -19367,7 +19211,7 @@
                     <a:p>
                       <a:pPr algn="ctr"/>
                       <a:r>
-                        <a:rPr sz="1600" b="0">
+                        <a:rPr sz="1700" b="0">
                           <a:solidFill>
                             <a:srgbClr val="202020"/>
                           </a:solidFill>
@@ -19392,7 +19236,7 @@
                     <a:p>
                       <a:pPr algn="ctr"/>
                       <a:r>
-                        <a:rPr sz="1600" b="0">
+                        <a:rPr sz="1700" b="0">
                           <a:solidFill>
                             <a:srgbClr val="202020"/>
                           </a:solidFill>
@@ -19415,7 +19259,7 @@
                     <a:p>
                       <a:pPr algn="ctr"/>
                       <a:r>
-                        <a:rPr sz="1600" b="0">
+                        <a:rPr sz="1700" b="0">
                           <a:solidFill>
                             <a:srgbClr val="202020"/>
                           </a:solidFill>
@@ -19438,7 +19282,7 @@
                     <a:p>
                       <a:pPr algn="ctr"/>
                       <a:r>
-                        <a:rPr sz="1600" b="0">
+                        <a:rPr sz="1700" b="0">
                           <a:solidFill>
                             <a:srgbClr val="202020"/>
                           </a:solidFill>
@@ -19461,7 +19305,7 @@
                     <a:p>
                       <a:pPr algn="ctr"/>
                       <a:r>
-                        <a:rPr sz="1600" b="0">
+                        <a:rPr sz="1700" b="0">
                           <a:solidFill>
                             <a:srgbClr val="202020"/>
                           </a:solidFill>
@@ -19526,25 +19370,13 @@
           <a:p>
             <a:pPr algn="just"/>
             <a:r>
-              <a:rPr sz="1700" b="1">
+              <a:rPr sz="1900" b="1">
                 <a:solidFill>
                   <a:srgbClr val="59636E"/>
                 </a:solidFill>
                 <a:latin typeface="Microsoft JhengHei"/>
               </a:rPr>
-              <a:t>只用硬目標：沒有任何訓練樣本的標籤是 3，</a:t>
-            </a:r>
-          </a:p>
-          <a:p>
-            <a:pPr algn="just"/>
-            <a:r>
-              <a:rPr sz="1700" b="1">
-                <a:solidFill>
-                  <a:srgbClr val="59636E"/>
-                </a:solidFill>
-                <a:latin typeface="Microsoft JhengHei"/>
-              </a:rPr>
-              <a:t>網路永遠不會輸出 3</a:t>
+              <a:t>只用硬目標：沒有任何訓練樣本的標籤是 3，網路永遠不會輸出 3</a:t>
             </a:r>
           </a:p>
         </p:txBody>
@@ -19593,25 +19425,13 @@
           <a:p>
             <a:pPr algn="just"/>
             <a:r>
-              <a:rPr sz="1700" b="1">
+              <a:rPr sz="1900" b="1">
                 <a:solidFill>
                   <a:srgbClr val="1E7A45"/>
                 </a:solidFill>
                 <a:latin typeface="Microsoft JhengHei"/>
               </a:rPr>
-              <a:t>蒸餾：其他數字的軟目標說明了它們各自</a:t>
-            </a:r>
-          </a:p>
-          <a:p>
-            <a:pPr algn="just"/>
-            <a:r>
-              <a:rPr sz="1700" b="1">
-                <a:solidFill>
-                  <a:srgbClr val="1E7A45"/>
-                </a:solidFill>
-                <a:latin typeface="Microsoft JhengHei"/>
-              </a:rPr>
-              <a:t>有幾分像 3，蒸餾模型由此學到 3</a:t>
+              <a:t>蒸餾：其他數字的軟目標說明了它們各自有幾分像 3，蒸餾模型由此學到 3</a:t>
             </a:r>
           </a:p>
         </p:txBody>
@@ -19640,7 +19460,7 @@
           <a:p>
             <a:pPr algn="just"/>
             <a:r>
-              <a:rPr sz="1700" b="0">
+              <a:rPr sz="1900" b="0">
                 <a:solidFill>
                   <a:srgbClr val="202020"/>
                 </a:solidFill>
@@ -19652,7 +19472,7 @@
           <a:p>
             <a:pPr algn="just"/>
             <a:r>
-              <a:rPr sz="1700" b="0">
+              <a:rPr sz="1900" b="0">
                 <a:solidFill>
                   <a:srgbClr val="202020"/>
                 </a:solidFill>
@@ -20046,7 +19866,7 @@
           <a:p>
             <a:pPr algn="just"/>
             <a:r>
-              <a:rPr sz="1300" b="0">
+              <a:rPr sz="1500" b="0">
                 <a:solidFill>
                   <a:srgbClr val="C7D6E5"/>
                 </a:solidFill>
@@ -20088,7 +19908,7 @@
                     <a:p>
                       <a:pPr algn="ctr"/>
                       <a:r>
-                        <a:rPr sz="1600" b="1">
+                        <a:rPr sz="1700" b="1">
                           <a:solidFill>
                             <a:srgbClr val="FFFFFF"/>
                           </a:solidFill>
@@ -20111,7 +19931,7 @@
                     <a:p>
                       <a:pPr algn="ctr"/>
                       <a:r>
-                        <a:rPr sz="1600" b="1">
+                        <a:rPr sz="1700" b="1">
                           <a:solidFill>
                             <a:srgbClr val="FFFFFF"/>
                           </a:solidFill>
@@ -20134,7 +19954,7 @@
                     <a:p>
                       <a:pPr algn="ctr"/>
                       <a:r>
-                        <a:rPr sz="1600" b="1">
+                        <a:rPr sz="1700" b="1">
                           <a:solidFill>
                             <a:srgbClr val="FFFFFF"/>
                           </a:solidFill>
@@ -20159,7 +19979,7 @@
                     <a:p>
                       <a:pPr algn="ctr"/>
                       <a:r>
-                        <a:rPr sz="1600" b="0">
+                        <a:rPr sz="1700" b="0">
                           <a:solidFill>
                             <a:srgbClr val="202020"/>
                           </a:solidFill>
@@ -20182,7 +20002,7 @@
                     <a:p>
                       <a:pPr algn="ctr"/>
                       <a:r>
-                        <a:rPr sz="1600" b="0">
+                        <a:rPr sz="1700" b="0">
                           <a:solidFill>
                             <a:srgbClr val="202020"/>
                           </a:solidFill>
@@ -20205,7 +20025,7 @@
                     <a:p>
                       <a:pPr algn="ctr"/>
                       <a:r>
-                        <a:rPr sz="1600" b="0">
+                        <a:rPr sz="1700" b="0">
                           <a:solidFill>
                             <a:srgbClr val="202020"/>
                           </a:solidFill>
@@ -20230,7 +20050,7 @@
                     <a:p>
                       <a:pPr algn="ctr"/>
                       <a:r>
-                        <a:rPr sz="1600" b="0">
+                        <a:rPr sz="1700" b="0">
                           <a:solidFill>
                             <a:srgbClr val="202020"/>
                           </a:solidFill>
@@ -20253,7 +20073,7 @@
                     <a:p>
                       <a:pPr algn="ctr"/>
                       <a:r>
-                        <a:rPr sz="1600" b="0">
+                        <a:rPr sz="1700" b="0">
                           <a:solidFill>
                             <a:srgbClr val="202020"/>
                           </a:solidFill>
@@ -20276,7 +20096,7 @@
                     <a:p>
                       <a:pPr algn="ctr"/>
                       <a:r>
-                        <a:rPr sz="1600" b="0">
+                        <a:rPr sz="1700" b="0">
                           <a:solidFill>
                             <a:srgbClr val="202020"/>
                           </a:solidFill>
@@ -20301,7 +20121,7 @@
                     <a:p>
                       <a:pPr algn="ctr"/>
                       <a:r>
-                        <a:rPr sz="1600" b="0">
+                        <a:rPr sz="1700" b="0">
                           <a:solidFill>
                             <a:srgbClr val="202020"/>
                           </a:solidFill>
@@ -20324,7 +20144,7 @@
                     <a:p>
                       <a:pPr algn="ctr"/>
                       <a:r>
-                        <a:rPr sz="1600" b="0">
+                        <a:rPr sz="1700" b="0">
                           <a:solidFill>
                             <a:srgbClr val="202020"/>
                           </a:solidFill>
@@ -20347,7 +20167,7 @@
                     <a:p>
                       <a:pPr algn="ctr"/>
                       <a:r>
-                        <a:rPr sz="1600" b="0">
+                        <a:rPr sz="1700" b="0">
                           <a:solidFill>
                             <a:srgbClr val="202020"/>
                           </a:solidFill>
@@ -20392,25 +20212,13 @@
           <a:p>
             <a:pPr algn="just"/>
             <a:r>
-              <a:rPr sz="1500" b="0">
+              <a:rPr sz="1700" b="0">
                 <a:solidFill>
                   <a:srgbClr val="202020"/>
                 </a:solidFill>
                 <a:latin typeface="Microsoft JhengHei"/>
               </a:rPr>
-              <a:t>Android 語音搜尋的聲學模型：組合模型在框架分類準確率上</a:t>
-            </a:r>
-          </a:p>
-          <a:p>
-            <a:pPr algn="just"/>
-            <a:r>
-              <a:rPr sz="1500" b="0">
-                <a:solidFill>
-                  <a:srgbClr val="202020"/>
-                </a:solidFill>
-                <a:latin typeface="Microsoft JhengHei"/>
-              </a:rPr>
-              <a:t>的進步，超過 80% 移轉到蒸餾模型。</a:t>
+              <a:t>Android 語音搜尋的聲學模型：組合模型在框架分類準確率上的進步，超過 80% 移轉到蒸餾模型。</a:t>
             </a:r>
           </a:p>
         </p:txBody>
@@ -20446,7 +20254,7 @@
                     <a:p>
                       <a:pPr algn="ctr"/>
                       <a:r>
-                        <a:rPr sz="1600" b="1">
+                        <a:rPr sz="1700" b="1">
                           <a:solidFill>
                             <a:srgbClr val="FFFFFF"/>
                           </a:solidFill>
@@ -20469,7 +20277,7 @@
                     <a:p>
                       <a:pPr algn="ctr"/>
                       <a:r>
-                        <a:rPr sz="1600" b="1">
+                        <a:rPr sz="1700" b="1">
                           <a:solidFill>
                             <a:srgbClr val="FFFFFF"/>
                           </a:solidFill>
@@ -20492,7 +20300,7 @@
                     <a:p>
                       <a:pPr algn="ctr"/>
                       <a:r>
-                        <a:rPr sz="1600" b="1">
+                        <a:rPr sz="1700" b="1">
                           <a:solidFill>
                             <a:srgbClr val="FFFFFF"/>
                           </a:solidFill>
@@ -20517,7 +20325,7 @@
                     <a:p>
                       <a:pPr algn="ctr"/>
                       <a:r>
-                        <a:rPr sz="1600" b="0">
+                        <a:rPr sz="1700" b="0">
                           <a:solidFill>
                             <a:srgbClr val="202020"/>
                           </a:solidFill>
@@ -20540,7 +20348,7 @@
                     <a:p>
                       <a:pPr algn="ctr"/>
                       <a:r>
-                        <a:rPr sz="1600" b="0">
+                        <a:rPr sz="1700" b="0">
                           <a:solidFill>
                             <a:srgbClr val="202020"/>
                           </a:solidFill>
@@ -20563,7 +20371,7 @@
                     <a:p>
                       <a:pPr algn="ctr"/>
                       <a:r>
-                        <a:rPr sz="1600" b="0">
+                        <a:rPr sz="1700" b="0">
                           <a:solidFill>
                             <a:srgbClr val="202020"/>
                           </a:solidFill>
@@ -20588,7 +20396,7 @@
                     <a:p>
                       <a:pPr algn="ctr"/>
                       <a:r>
-                        <a:rPr sz="1600" b="0">
+                        <a:rPr sz="1700" b="0">
                           <a:solidFill>
                             <a:srgbClr val="202020"/>
                           </a:solidFill>
@@ -20611,7 +20419,7 @@
                     <a:p>
                       <a:pPr algn="ctr"/>
                       <a:r>
-                        <a:rPr sz="1600" b="0">
+                        <a:rPr sz="1700" b="0">
                           <a:solidFill>
                             <a:srgbClr val="202020"/>
                           </a:solidFill>
@@ -20634,7 +20442,7 @@
                     <a:p>
                       <a:pPr algn="ctr"/>
                       <a:r>
-                        <a:rPr sz="1600" b="0">
+                        <a:rPr sz="1700" b="0">
                           <a:solidFill>
                             <a:srgbClr val="202020"/>
                           </a:solidFill>
@@ -20659,7 +20467,7 @@
                     <a:p>
                       <a:pPr algn="ctr"/>
                       <a:r>
-                        <a:rPr sz="1600" b="0">
+                        <a:rPr sz="1700" b="0">
                           <a:solidFill>
                             <a:srgbClr val="202020"/>
                           </a:solidFill>
@@ -20682,7 +20490,7 @@
                     <a:p>
                       <a:pPr algn="ctr"/>
                       <a:r>
-                        <a:rPr sz="1600" b="0">
+                        <a:rPr sz="1700" b="0">
                           <a:solidFill>
                             <a:srgbClr val="202020"/>
                           </a:solidFill>
@@ -20705,7 +20513,7 @@
                     <a:p>
                       <a:pPr algn="ctr"/>
                       <a:r>
-                        <a:rPr sz="1600" b="0">
+                        <a:rPr sz="1700" b="0">
                           <a:solidFill>
                             <a:srgbClr val="202020"/>
                           </a:solidFill>
@@ -20750,7 +20558,7 @@
           <a:p>
             <a:pPr algn="just"/>
             <a:r>
-              <a:rPr sz="1500" b="0">
+              <a:rPr sz="1700" b="0">
                 <a:solidFill>
                   <a:srgbClr val="202020"/>
                 </a:solidFill>
@@ -20762,7 +20570,7 @@
           <a:p>
             <a:pPr algn="just"/>
             <a:r>
-              <a:rPr sz="1500" b="0">
+              <a:rPr sz="1700" b="0">
                 <a:solidFill>
                   <a:srgbClr val="202020"/>
                 </a:solidFill>
@@ -20817,25 +20625,13 @@
           <a:p>
             <a:pPr algn="just"/>
             <a:r>
-              <a:rPr sz="1700" b="0">
+              <a:rPr sz="1900" b="0">
                 <a:solidFill>
                   <a:srgbClr val="1F4E79"/>
                 </a:solidFill>
                 <a:latin typeface="Microsoft JhengHei"/>
               </a:rPr>
-              <a:t>專家模型：在 JFT（1 億張有標籤影像、15,000 個標籤）上，另訓練 61 個專家模型，各自負責一群</a:t>
-            </a:r>
-          </a:p>
-          <a:p>
-            <a:pPr algn="just"/>
-            <a:r>
-              <a:rPr sz="1700" b="0">
-                <a:solidFill>
-                  <a:srgbClr val="1F4E79"/>
-                </a:solidFill>
-                <a:latin typeface="Microsoft JhengHei"/>
-              </a:rPr>
-              <a:t>容易混淆的類別，與通用模型合用，測試準確率由 25.0% 提高到 26.1%。</a:t>
+              <a:t>專家模型：在 JFT（1 億張有標籤影像、15,000 個標籤）上，另訓練 61 個專家模型，各自負責一群容易混淆的類別，與通用模型合用，測試準確率由 25.0% 提高到 26.1%。</a:t>
             </a:r>
           </a:p>
         </p:txBody>
@@ -20864,7 +20660,7 @@
           <a:p>
             <a:pPr algn="just"/>
             <a:r>
-              <a:rPr sz="1500" b="0">
+              <a:rPr sz="1700" b="0">
                 <a:solidFill>
                   <a:srgbClr val="59636E"/>
                 </a:solidFill>
@@ -21372,7 +21168,7 @@
           <a:p>
             <a:pPr algn="just"/>
             <a:r>
-              <a:rPr sz="1900" b="1">
+              <a:rPr sz="2100" b="1">
                 <a:solidFill>
                   <a:srgbClr val="1F4E79"/>
                 </a:solidFill>
@@ -21427,7 +21223,7 @@
           <a:p>
             <a:pPr algn="just"/>
             <a:r>
-              <a:rPr sz="1900" b="1">
+              <a:rPr sz="2100" b="1">
                 <a:solidFill>
                   <a:srgbClr val="1F4E79"/>
                 </a:solidFill>
@@ -21482,7 +21278,7 @@
           <a:p>
             <a:pPr algn="just"/>
             <a:r>
-              <a:rPr sz="1900" b="1">
+              <a:rPr sz="2100" b="1">
                 <a:solidFill>
                   <a:srgbClr val="1F4E79"/>
                 </a:solidFill>
@@ -21537,7 +21333,7 @@
           <a:p>
             <a:pPr algn="just"/>
             <a:r>
-              <a:rPr sz="1800" b="1">
+              <a:rPr sz="2000" b="1">
                 <a:solidFill>
                   <a:srgbClr val="C03030"/>
                 </a:solidFill>
@@ -21592,7 +21388,7 @@
           <a:p>
             <a:pPr algn="just"/>
             <a:r>
-              <a:rPr sz="1800" b="1">
+              <a:rPr sz="2000" b="1">
                 <a:solidFill>
                   <a:srgbClr val="C03030"/>
                 </a:solidFill>
@@ -21647,7 +21443,7 @@
           <a:p>
             <a:pPr algn="just"/>
             <a:r>
-              <a:rPr sz="1800" b="1">
+              <a:rPr sz="2000" b="1">
                 <a:solidFill>
                   <a:srgbClr val="C03030"/>
                 </a:solidFill>
@@ -21682,7 +21478,7 @@
           <a:p>
             <a:pPr algn="just"/>
             <a:r>
-              <a:rPr sz="1700" b="1">
+              <a:rPr sz="1900" b="1">
                 <a:solidFill>
                   <a:srgbClr val="59636E"/>
                 </a:solidFill>
@@ -22212,7 +22008,7 @@
           <a:p>
             <a:pPr algn="just"/>
             <a:r>
-              <a:rPr sz="1300" b="0">
+              <a:rPr sz="1500" b="0">
                 <a:solidFill>
                   <a:srgbClr val="C7D6E5"/>
                 </a:solidFill>
@@ -22267,7 +22063,7 @@
           <a:p>
             <a:pPr algn="just"/>
             <a:r>
-              <a:rPr sz="1800" b="1">
+              <a:rPr sz="2000" b="1">
                 <a:solidFill>
                   <a:srgbClr val="C03030"/>
                 </a:solidFill>
@@ -23309,7 +23105,7 @@
           <a:p>
             <a:pPr algn="just"/>
             <a:r>
-              <a:rPr sz="1300" b="0">
+              <a:rPr sz="1500" b="0">
                 <a:solidFill>
                   <a:srgbClr val="C7D6E5"/>
                 </a:solidFill>
@@ -23351,7 +23147,7 @@
                     <a:p>
                       <a:pPr algn="ctr"/>
                       <a:r>
-                        <a:rPr sz="1600" b="1">
+                        <a:rPr sz="1700" b="1">
                           <a:solidFill>
                             <a:srgbClr val="FFFFFF"/>
                           </a:solidFill>
@@ -23374,7 +23170,7 @@
                     <a:p>
                       <a:pPr algn="ctr"/>
                       <a:r>
-                        <a:rPr sz="1600" b="1">
+                        <a:rPr sz="1700" b="1">
                           <a:solidFill>
                             <a:srgbClr val="FFFFFF"/>
                           </a:solidFill>
@@ -23397,7 +23193,7 @@
                     <a:p>
                       <a:pPr algn="ctr"/>
                       <a:r>
-                        <a:rPr sz="1600" b="1">
+                        <a:rPr sz="1700" b="1">
                           <a:solidFill>
                             <a:srgbClr val="FFFFFF"/>
                           </a:solidFill>
@@ -23422,7 +23218,7 @@
                     <a:p>
                       <a:pPr algn="ctr"/>
                       <a:r>
-                        <a:rPr sz="1600" b="0">
+                        <a:rPr sz="1700" b="0">
                           <a:solidFill>
                             <a:srgbClr val="202020"/>
                           </a:solidFill>
@@ -23445,7 +23241,7 @@
                     <a:p>
                       <a:pPr algn="ctr"/>
                       <a:r>
-                        <a:rPr sz="1600" b="0">
+                        <a:rPr sz="1700" b="0">
                           <a:solidFill>
                             <a:srgbClr val="202020"/>
                           </a:solidFill>
@@ -23468,7 +23264,7 @@
                     <a:p>
                       <a:pPr algn="ctr"/>
                       <a:r>
-                        <a:rPr sz="1600" b="0">
+                        <a:rPr sz="1700" b="0">
                           <a:solidFill>
                             <a:srgbClr val="202020"/>
                           </a:solidFill>
@@ -23493,7 +23289,7 @@
                     <a:p>
                       <a:pPr algn="ctr"/>
                       <a:r>
-                        <a:rPr sz="1600" b="0">
+                        <a:rPr sz="1700" b="0">
                           <a:solidFill>
                             <a:srgbClr val="202020"/>
                           </a:solidFill>
@@ -23516,7 +23312,7 @@
                     <a:p>
                       <a:pPr algn="ctr"/>
                       <a:r>
-                        <a:rPr sz="1600" b="0">
+                        <a:rPr sz="1700" b="0">
                           <a:solidFill>
                             <a:srgbClr val="202020"/>
                           </a:solidFill>
@@ -23539,7 +23335,7 @@
                     <a:p>
                       <a:pPr algn="ctr"/>
                       <a:r>
-                        <a:rPr sz="1600" b="0">
+                        <a:rPr sz="1700" b="0">
                           <a:solidFill>
                             <a:srgbClr val="202020"/>
                           </a:solidFill>
@@ -23564,7 +23360,7 @@
                     <a:p>
                       <a:pPr algn="ctr"/>
                       <a:r>
-                        <a:rPr sz="1600" b="0">
+                        <a:rPr sz="1700" b="0">
                           <a:solidFill>
                             <a:srgbClr val="202020"/>
                           </a:solidFill>
@@ -23587,7 +23383,7 @@
                     <a:p>
                       <a:pPr algn="ctr"/>
                       <a:r>
-                        <a:rPr sz="1600" b="0">
+                        <a:rPr sz="1700" b="0">
                           <a:solidFill>
                             <a:srgbClr val="202020"/>
                           </a:solidFill>
@@ -23610,7 +23406,7 @@
                     <a:p>
                       <a:pPr algn="ctr"/>
                       <a:r>
-                        <a:rPr sz="1600" b="0">
+                        <a:rPr sz="1700" b="0">
                           <a:solidFill>
                             <a:srgbClr val="202020"/>
                           </a:solidFill>
@@ -23635,7 +23431,7 @@
                     <a:p>
                       <a:pPr algn="ctr"/>
                       <a:r>
-                        <a:rPr sz="1600" b="0">
+                        <a:rPr sz="1700" b="0">
                           <a:solidFill>
                             <a:srgbClr val="202020"/>
                           </a:solidFill>
@@ -23658,7 +23454,7 @@
                     <a:p>
                       <a:pPr algn="ctr"/>
                       <a:r>
-                        <a:rPr sz="1600" b="0">
+                        <a:rPr sz="1700" b="0">
                           <a:solidFill>
                             <a:srgbClr val="202020"/>
                           </a:solidFill>
@@ -23681,7 +23477,7 @@
                     <a:p>
                       <a:pPr algn="ctr"/>
                       <a:r>
-                        <a:rPr sz="1600" b="0">
+                        <a:rPr sz="1700" b="0">
                           <a:solidFill>
                             <a:srgbClr val="202020"/>
                           </a:solidFill>
@@ -23706,7 +23502,7 @@
                     <a:p>
                       <a:pPr algn="ctr"/>
                       <a:r>
-                        <a:rPr sz="1600" b="0">
+                        <a:rPr sz="1700" b="0">
                           <a:solidFill>
                             <a:srgbClr val="202020"/>
                           </a:solidFill>
@@ -23729,7 +23525,7 @@
                     <a:p>
                       <a:pPr algn="ctr"/>
                       <a:r>
-                        <a:rPr sz="1600" b="0">
+                        <a:rPr sz="1700" b="0">
                           <a:solidFill>
                             <a:srgbClr val="202020"/>
                           </a:solidFill>
@@ -23752,7 +23548,7 @@
                     <a:p>
                       <a:pPr algn="ctr"/>
                       <a:r>
-                        <a:rPr sz="1600" b="0">
+                        <a:rPr sz="1700" b="0">
                           <a:solidFill>
                             <a:srgbClr val="202020"/>
                           </a:solidFill>
@@ -23777,7 +23573,7 @@
                     <a:p>
                       <a:pPr algn="ctr"/>
                       <a:r>
-                        <a:rPr sz="1600" b="0">
+                        <a:rPr sz="1700" b="0">
                           <a:solidFill>
                             <a:srgbClr val="202020"/>
                           </a:solidFill>
@@ -23800,7 +23596,7 @@
                     <a:p>
                       <a:pPr algn="ctr"/>
                       <a:r>
-                        <a:rPr sz="1600" b="0">
+                        <a:rPr sz="1700" b="0">
                           <a:solidFill>
                             <a:srgbClr val="202020"/>
                           </a:solidFill>
@@ -23823,7 +23619,7 @@
                     <a:p>
                       <a:pPr algn="ctr"/>
                       <a:r>
-                        <a:rPr sz="1600" b="0">
+                        <a:rPr sz="1700" b="0">
                           <a:solidFill>
                             <a:srgbClr val="202020"/>
                           </a:solidFill>
@@ -23888,7 +23684,7 @@
           <a:p>
             <a:pPr algn="just"/>
             <a:r>
-              <a:rPr sz="1700" b="1">
+              <a:rPr sz="1900" b="1">
                 <a:solidFill>
                   <a:srgbClr val="1E7A45"/>
                 </a:solidFill>
@@ -23900,37 +23696,13 @@
           <a:p>
             <a:pPr algn="just"/>
             <a:r>
-              <a:rPr sz="1700" b="1">
+              <a:rPr sz="1900" b="1">
                 <a:solidFill>
                   <a:srgbClr val="1E7A45"/>
                 </a:solidFill>
                 <a:latin typeface="Microsoft JhengHei"/>
               </a:rPr>
-              <a:t>1. 手算帶溫度的 softmax，說明軟目標比硬目標多傳遞了什麼資訊</a:t>
-            </a:r>
-          </a:p>
-          <a:p>
-            <a:pPr algn="just"/>
-            <a:r>
-              <a:rPr sz="1700" b="1">
-                <a:solidFill>
-                  <a:srgbClr val="1E7A45"/>
-                </a:solidFill>
-                <a:latin typeface="Microsoft JhengHei"/>
-              </a:rPr>
-              <a:t>2. 寫出蒸餾的目標函數，逐步算出其值與梯度</a:t>
-            </a:r>
-          </a:p>
-          <a:p>
-            <a:pPr algn="just"/>
-            <a:r>
-              <a:rPr sz="1700" b="1">
-                <a:solidFill>
-                  <a:srgbClr val="1E7A45"/>
-                </a:solidFill>
-                <a:latin typeface="Microsoft JhengHei"/>
-              </a:rPr>
-              <a:t>3. 在 Colab 訓練笨重模型與蒸餾模型，並解讀溫度的影響</a:t>
+              <a:t>1. 手算帶溫度的 softmax，說明軟目標比硬目標多傳遞了什麼資訊2. 寫出蒸餾的目標函數，逐步算出其值與梯度3. 在 Colab 訓練笨重模型與蒸餾模型，並解讀溫度的影響</a:t>
             </a:r>
           </a:p>
         </p:txBody>
@@ -23959,7 +23731,7 @@
           <a:p>
             <a:pPr algn="just"/>
             <a:r>
-              <a:rPr sz="1600" b="0">
+              <a:rPr sz="1800" b="0">
                 <a:solidFill>
                   <a:srgbClr val="59636E"/>
                 </a:solidFill>
@@ -23971,7 +23743,7 @@
           <a:p>
             <a:pPr algn="just"/>
             <a:r>
-              <a:rPr sz="1600" b="0">
+              <a:rPr sz="1800" b="0">
                 <a:solidFill>
                   <a:srgbClr val="59636E"/>
                 </a:solidFill>
@@ -24319,7 +24091,7 @@
           <a:p>
             <a:pPr algn="just"/>
             <a:r>
-              <a:rPr sz="1300" b="0">
+              <a:rPr sz="1500" b="0">
                 <a:solidFill>
                   <a:srgbClr val="C7D6E5"/>
                 </a:solidFill>
@@ -24361,7 +24133,7 @@
                     <a:p>
                       <a:pPr algn="ctr"/>
                       <a:r>
-                        <a:rPr sz="1500" b="1">
+                        <a:rPr sz="1600" b="1">
                           <a:solidFill>
                             <a:srgbClr val="FFFFFF"/>
                           </a:solidFill>
@@ -24384,7 +24156,7 @@
                     <a:p>
                       <a:pPr algn="ctr"/>
                       <a:r>
-                        <a:rPr sz="1500" b="1">
+                        <a:rPr sz="1600" b="1">
                           <a:solidFill>
                             <a:srgbClr val="FFFFFF"/>
                           </a:solidFill>
@@ -24407,7 +24179,7 @@
                     <a:p>
                       <a:pPr algn="ctr"/>
                       <a:r>
-                        <a:rPr sz="1500" b="1">
+                        <a:rPr sz="1600" b="1">
                           <a:solidFill>
                             <a:srgbClr val="FFFFFF"/>
                           </a:solidFill>
@@ -24432,7 +24204,7 @@
                     <a:p>
                       <a:pPr algn="ctr"/>
                       <a:r>
-                        <a:rPr sz="1500" b="1">
+                        <a:rPr sz="1600" b="1">
                           <a:solidFill>
                             <a:srgbClr val="202020"/>
                           </a:solidFill>
@@ -24455,7 +24227,7 @@
                     <a:p>
                       <a:pPr algn="ctr"/>
                       <a:r>
-                        <a:rPr sz="1500" b="1">
+                        <a:rPr sz="1600" b="1">
                           <a:solidFill>
                             <a:srgbClr val="202020"/>
                           </a:solidFill>
@@ -24478,7 +24250,7 @@
                     <a:p>
                       <a:pPr algn="just"/>
                       <a:r>
-                        <a:rPr sz="1500" b="0">
+                        <a:rPr sz="1600" b="0">
                           <a:solidFill>
                             <a:srgbClr val="202020"/>
                           </a:solidFill>
@@ -24503,7 +24275,7 @@
                     <a:p>
                       <a:pPr algn="ctr"/>
                       <a:r>
-                        <a:rPr sz="1500" b="1">
+                        <a:rPr sz="1600" b="1">
                           <a:solidFill>
                             <a:srgbClr val="202020"/>
                           </a:solidFill>
@@ -24526,7 +24298,7 @@
                     <a:p>
                       <a:pPr algn="ctr"/>
                       <a:r>
-                        <a:rPr sz="1500" b="1">
+                        <a:rPr sz="1600" b="1">
                           <a:solidFill>
                             <a:srgbClr val="202020"/>
                           </a:solidFill>
@@ -24549,13 +24321,13 @@
                     <a:p>
                       <a:pPr algn="just"/>
                       <a:r>
-                        <a:rPr sz="1500" b="0">
+                        <a:rPr sz="1600" b="0">
                           <a:solidFill>
                             <a:srgbClr val="202020"/>
                           </a:solidFill>
                           <a:latin typeface="Microsoft JhengHei"/>
                         </a:rPr>
-                        <a:t>為了從資料中學到規律而訓練的大模型：多個模型的組合，或以強正則化訓練的大型網路。現今文獻多稱為老師模型 teacher model</a:t>
+                        <a:t>為了從資料中學到規律而訓練的大模型：多個模型的組合，或以強正則化訓練的大型網路。現今文獻多稱為老師模型 teacher model（Li et al., 2014）</a:t>
                       </a:r>
                     </a:p>
                   </a:txBody>
@@ -24574,7 +24346,7 @@
                     <a:p>
                       <a:pPr algn="ctr"/>
                       <a:r>
-                        <a:rPr sz="1500" b="1">
+                        <a:rPr sz="1600" b="1">
                           <a:solidFill>
                             <a:srgbClr val="202020"/>
                           </a:solidFill>
@@ -24597,7 +24369,7 @@
                     <a:p>
                       <a:pPr algn="ctr"/>
                       <a:r>
-                        <a:rPr sz="1500" b="1">
+                        <a:rPr sz="1600" b="1">
                           <a:solidFill>
                             <a:srgbClr val="202020"/>
                           </a:solidFill>
@@ -24620,13 +24392,13 @@
                     <a:p>
                       <a:pPr algn="just"/>
                       <a:r>
-                        <a:rPr sz="1500" b="0">
+                        <a:rPr sz="1600" b="0">
                           <a:solidFill>
                             <a:srgbClr val="202020"/>
                           </a:solidFill>
                           <a:latin typeface="Microsoft JhengHei"/>
                         </a:rPr>
-                        <a:t>以軟目標與正確標籤訓練、承接笨重模型知識的小模型；使用時溫度為 1。現今文獻多稱為學生模型 student model</a:t>
+                        <a:t>以軟目標與正確標籤訓練、承接笨重模型知識的小模型；使用時溫度為 1。現今文獻多稱為學生模型 student model（Li et al., 2014）</a:t>
                       </a:r>
                     </a:p>
                   </a:txBody>
@@ -24645,7 +24417,7 @@
                     <a:p>
                       <a:pPr algn="ctr"/>
                       <a:r>
-                        <a:rPr sz="1500" b="1">
+                        <a:rPr sz="1600" b="1">
                           <a:solidFill>
                             <a:srgbClr val="202020"/>
                           </a:solidFill>
@@ -24668,7 +24440,7 @@
                     <a:p>
                       <a:pPr algn="ctr"/>
                       <a:r>
-                        <a:rPr sz="1500" b="1">
+                        <a:rPr sz="1600" b="1">
                           <a:solidFill>
                             <a:srgbClr val="202020"/>
                           </a:solidFill>
@@ -24691,7 +24463,7 @@
                     <a:p>
                       <a:pPr algn="just"/>
                       <a:r>
-                        <a:rPr sz="1500" b="0">
+                        <a:rPr sz="1600" b="0">
                           <a:solidFill>
                             <a:srgbClr val="202020"/>
                           </a:solidFill>
@@ -24716,7 +24488,7 @@
                     <a:p>
                       <a:pPr algn="ctr"/>
                       <a:r>
-                        <a:rPr sz="1500" b="1">
+                        <a:rPr sz="1600" b="1">
                           <a:solidFill>
                             <a:srgbClr val="202020"/>
                           </a:solidFill>
@@ -24739,7 +24511,7 @@
                     <a:p>
                       <a:pPr algn="ctr"/>
                       <a:r>
-                        <a:rPr sz="1500" b="1">
+                        <a:rPr sz="1600" b="1">
                           <a:solidFill>
                             <a:srgbClr val="202020"/>
                           </a:solidFill>
@@ -24762,7 +24534,7 @@
                     <a:p>
                       <a:pPr algn="just"/>
                       <a:r>
-                        <a:rPr sz="1500" b="0">
+                        <a:rPr sz="1600" b="0">
                           <a:solidFill>
                             <a:srgbClr val="202020"/>
                           </a:solidFill>
@@ -24787,7 +24559,7 @@
                     <a:p>
                       <a:pPr algn="ctr"/>
                       <a:r>
-                        <a:rPr sz="1500" b="1">
+                        <a:rPr sz="1600" b="1">
                           <a:solidFill>
                             <a:srgbClr val="202020"/>
                           </a:solidFill>
@@ -24810,7 +24582,7 @@
                     <a:p>
                       <a:pPr algn="ctr"/>
                       <a:r>
-                        <a:rPr sz="1500" b="1">
+                        <a:rPr sz="1600" b="1">
                           <a:solidFill>
                             <a:srgbClr val="202020"/>
                           </a:solidFill>
@@ -24833,7 +24605,7 @@
                     <a:p>
                       <a:pPr algn="just"/>
                       <a:r>
-                        <a:rPr sz="1500" b="0">
+                        <a:rPr sz="1600" b="0">
                           <a:solidFill>
                             <a:srgbClr val="202020"/>
                           </a:solidFill>
@@ -24858,7 +24630,7 @@
                     <a:p>
                       <a:pPr algn="ctr"/>
                       <a:r>
-                        <a:rPr sz="1500" b="1">
+                        <a:rPr sz="1600" b="1">
                           <a:solidFill>
                             <a:srgbClr val="202020"/>
                           </a:solidFill>
@@ -24881,7 +24653,7 @@
                     <a:p>
                       <a:pPr algn="ctr"/>
                       <a:r>
-                        <a:rPr sz="1500" b="1">
+                        <a:rPr sz="1600" b="1">
                           <a:solidFill>
                             <a:srgbClr val="202020"/>
                           </a:solidFill>
@@ -24904,7 +24676,7 @@
                     <a:p>
                       <a:pPr algn="just"/>
                       <a:r>
-                        <a:rPr sz="1500" b="0">
+                        <a:rPr sz="1600" b="0">
                           <a:solidFill>
                             <a:srgbClr val="202020"/>
                           </a:solidFill>
@@ -24929,7 +24701,7 @@
                     <a:p>
                       <a:pPr algn="ctr"/>
                       <a:r>
-                        <a:rPr sz="1500" b="1">
+                        <a:rPr sz="1600" b="1">
                           <a:solidFill>
                             <a:srgbClr val="202020"/>
                           </a:solidFill>
@@ -24952,7 +24724,7 @@
                     <a:p>
                       <a:pPr algn="ctr"/>
                       <a:r>
-                        <a:rPr sz="1500" b="1">
+                        <a:rPr sz="1600" b="1">
                           <a:solidFill>
                             <a:srgbClr val="202020"/>
                           </a:solidFill>
@@ -24975,7 +24747,7 @@
                     <a:p>
                       <a:pPr algn="just"/>
                       <a:r>
-                        <a:rPr sz="1500" b="0">
+                        <a:rPr sz="1600" b="0">
                           <a:solidFill>
                             <a:srgbClr val="202020"/>
                           </a:solidFill>
@@ -25004,8 +24776,8 @@
         </p:nvSpPr>
         <p:spPr>
           <a:xfrm>
-            <a:off x="548640" y="5989320"/>
-            <a:ext cx="11109960" cy="457200"/>
+            <a:off x="548640" y="5760720"/>
+            <a:ext cx="11109960" cy="822960"/>
           </a:xfrm>
           <a:prstGeom prst="rect">
             <a:avLst/>
@@ -25020,13 +24792,13 @@
           <a:p>
             <a:pPr algn="just"/>
             <a:r>
-              <a:rPr sz="1400" b="0">
+              <a:rPr sz="1600" b="0">
                 <a:solidFill>
                   <a:srgbClr val="59636E"/>
                 </a:solidFill>
                 <a:latin typeface="Microsoft JhengHei"/>
               </a:rPr>
-              <a:t>本教材其餘頁面沿用論文的術語（笨重模型、蒸餾模型），以便和原文對照。</a:t>
+              <a:t>老師／學生模型的稱呼，目前查到最早的明確定義是 J. Li、R. Zhao、J.-T. Huang、Y. Gong，〈Learning Small-Size DNN with Output-Distribution-Based Criteria〉，Interspeech 2014：「we sometimes call the large-size DNN as the teacher DNN, and the small-size DNN as the student DNN」。本教材其餘頁面沿用論文的術語。</a:t>
             </a:r>
           </a:p>
         </p:txBody>
@@ -25322,7 +25094,7 @@
           <a:p>
             <a:pPr algn="just"/>
             <a:r>
-              <a:rPr sz="1300" b="0">
+              <a:rPr sz="1500" b="0">
                 <a:solidFill>
                   <a:srgbClr val="C7D6E5"/>
                 </a:solidFill>
@@ -25364,7 +25136,7 @@
                     <a:p>
                       <a:pPr algn="ctr"/>
                       <a:r>
-                        <a:rPr sz="1500" b="1">
+                        <a:rPr sz="1600" b="1">
                           <a:solidFill>
                             <a:srgbClr val="FFFFFF"/>
                           </a:solidFill>
@@ -25387,7 +25159,7 @@
                     <a:p>
                       <a:pPr algn="ctr"/>
                       <a:r>
-                        <a:rPr sz="1500" b="1">
+                        <a:rPr sz="1600" b="1">
                           <a:solidFill>
                             <a:srgbClr val="FFFFFF"/>
                           </a:solidFill>
@@ -25410,7 +25182,7 @@
                     <a:p>
                       <a:pPr algn="ctr"/>
                       <a:r>
-                        <a:rPr sz="1500" b="1">
+                        <a:rPr sz="1600" b="1">
                           <a:solidFill>
                             <a:srgbClr val="FFFFFF"/>
                           </a:solidFill>
@@ -25435,7 +25207,7 @@
                     <a:p>
                       <a:pPr algn="ctr"/>
                       <a:r>
-                        <a:rPr sz="1500" b="1">
+                        <a:rPr sz="1600" b="1">
                           <a:solidFill>
                             <a:srgbClr val="202020"/>
                           </a:solidFill>
@@ -25458,7 +25230,7 @@
                     <a:p>
                       <a:pPr algn="ctr"/>
                       <a:r>
-                        <a:rPr sz="1500" b="1">
+                        <a:rPr sz="1600" b="1">
                           <a:solidFill>
                             <a:srgbClr val="202020"/>
                           </a:solidFill>
@@ -25481,7 +25253,7 @@
                     <a:p>
                       <a:pPr algn="just"/>
                       <a:r>
-                        <a:rPr sz="1500" b="0">
+                        <a:rPr sz="1600" b="0">
                           <a:solidFill>
                             <a:srgbClr val="202020"/>
                           </a:solidFill>
@@ -25506,7 +25278,7 @@
                     <a:p>
                       <a:pPr algn="ctr"/>
                       <a:r>
-                        <a:rPr sz="1500" b="1">
+                        <a:rPr sz="1600" b="1">
                           <a:solidFill>
                             <a:srgbClr val="202020"/>
                           </a:solidFill>
@@ -25529,7 +25301,7 @@
                     <a:p>
                       <a:pPr algn="ctr"/>
                       <a:r>
-                        <a:rPr sz="1500" b="1">
+                        <a:rPr sz="1600" b="1">
                           <a:solidFill>
                             <a:srgbClr val="202020"/>
                           </a:solidFill>
@@ -25552,7 +25324,7 @@
                     <a:p>
                       <a:pPr algn="just"/>
                       <a:r>
-                        <a:rPr sz="1500" b="0">
+                        <a:rPr sz="1600" b="0">
                           <a:solidFill>
                             <a:srgbClr val="202020"/>
                           </a:solidFill>
@@ -25577,7 +25349,7 @@
                     <a:p>
                       <a:pPr algn="ctr"/>
                       <a:r>
-                        <a:rPr sz="1500" b="1">
+                        <a:rPr sz="1600" b="1">
                           <a:solidFill>
                             <a:srgbClr val="202020"/>
                           </a:solidFill>
@@ -25600,7 +25372,7 @@
                     <a:p>
                       <a:pPr algn="ctr"/>
                       <a:r>
-                        <a:rPr sz="1500" b="1">
+                        <a:rPr sz="1600" b="1">
                           <a:solidFill>
                             <a:srgbClr val="202020"/>
                           </a:solidFill>
@@ -25623,7 +25395,7 @@
                     <a:p>
                       <a:pPr algn="just"/>
                       <a:r>
-                        <a:rPr sz="1500" b="0">
+                        <a:rPr sz="1600" b="0">
                           <a:solidFill>
                             <a:srgbClr val="202020"/>
                           </a:solidFill>
@@ -25648,7 +25420,7 @@
                     <a:p>
                       <a:pPr algn="ctr"/>
                       <a:r>
-                        <a:rPr sz="1500" b="1">
+                        <a:rPr sz="1600" b="1">
                           <a:solidFill>
                             <a:srgbClr val="202020"/>
                           </a:solidFill>
@@ -25671,7 +25443,7 @@
                     <a:p>
                       <a:pPr algn="ctr"/>
                       <a:r>
-                        <a:rPr sz="1500" b="1">
+                        <a:rPr sz="1600" b="1">
                           <a:solidFill>
                             <a:srgbClr val="202020"/>
                           </a:solidFill>
@@ -25694,7 +25466,7 @@
                     <a:p>
                       <a:pPr algn="just"/>
                       <a:r>
-                        <a:rPr sz="1500" b="0">
+                        <a:rPr sz="1600" b="0">
                           <a:solidFill>
                             <a:srgbClr val="202020"/>
                           </a:solidFill>
@@ -25719,7 +25491,7 @@
                     <a:p>
                       <a:pPr algn="ctr"/>
                       <a:r>
-                        <a:rPr sz="1500" b="1">
+                        <a:rPr sz="1600" b="1">
                           <a:solidFill>
                             <a:srgbClr val="202020"/>
                           </a:solidFill>
@@ -25742,7 +25514,7 @@
                     <a:p>
                       <a:pPr algn="ctr"/>
                       <a:r>
-                        <a:rPr sz="1500" b="1">
+                        <a:rPr sz="1600" b="1">
                           <a:solidFill>
                             <a:srgbClr val="202020"/>
                           </a:solidFill>
@@ -25765,7 +25537,7 @@
                     <a:p>
                       <a:pPr algn="just"/>
                       <a:r>
-                        <a:rPr sz="1500" b="0">
+                        <a:rPr sz="1600" b="0">
                           <a:solidFill>
                             <a:srgbClr val="202020"/>
                           </a:solidFill>
@@ -25790,7 +25562,7 @@
                     <a:p>
                       <a:pPr algn="ctr"/>
                       <a:r>
-                        <a:rPr sz="1500" b="1">
+                        <a:rPr sz="1600" b="1">
                           <a:solidFill>
                             <a:srgbClr val="202020"/>
                           </a:solidFill>
@@ -25813,7 +25585,7 @@
                     <a:p>
                       <a:pPr algn="ctr"/>
                       <a:r>
-                        <a:rPr sz="1500" b="1">
+                        <a:rPr sz="1600" b="1">
                           <a:solidFill>
                             <a:srgbClr val="202020"/>
                           </a:solidFill>
@@ -25836,7 +25608,7 @@
                     <a:p>
                       <a:pPr algn="just"/>
                       <a:r>
-                        <a:rPr sz="1500" b="0">
+                        <a:rPr sz="1600" b="0">
                           <a:solidFill>
                             <a:srgbClr val="202020"/>
                           </a:solidFill>
@@ -25861,7 +25633,7 @@
                     <a:p>
                       <a:pPr algn="ctr"/>
                       <a:r>
-                        <a:rPr sz="1500" b="1">
+                        <a:rPr sz="1600" b="1">
                           <a:solidFill>
                             <a:srgbClr val="202020"/>
                           </a:solidFill>
@@ -25884,7 +25656,7 @@
                     <a:p>
                       <a:pPr algn="ctr"/>
                       <a:r>
-                        <a:rPr sz="1500" b="1">
+                        <a:rPr sz="1600" b="1">
                           <a:solidFill>
                             <a:srgbClr val="202020"/>
                           </a:solidFill>
@@ -25907,7 +25679,7 @@
                     <a:p>
                       <a:pPr algn="just"/>
                       <a:r>
-                        <a:rPr sz="1500" b="0">
+                        <a:rPr sz="1600" b="0">
                           <a:solidFill>
                             <a:srgbClr val="202020"/>
                           </a:solidFill>
@@ -25932,7 +25704,7 @@
                     <a:p>
                       <a:pPr algn="ctr"/>
                       <a:r>
-                        <a:rPr sz="1500" b="1">
+                        <a:rPr sz="1600" b="1">
                           <a:solidFill>
                             <a:srgbClr val="202020"/>
                           </a:solidFill>
@@ -25955,7 +25727,7 @@
                     <a:p>
                       <a:pPr algn="ctr"/>
                       <a:r>
-                        <a:rPr sz="1500" b="1">
+                        <a:rPr sz="1600" b="1">
                           <a:solidFill>
                             <a:srgbClr val="202020"/>
                           </a:solidFill>
@@ -25978,7 +25750,7 @@
                     <a:p>
                       <a:pPr algn="just"/>
                       <a:r>
-                        <a:rPr sz="1500" b="0">
+                        <a:rPr sz="1600" b="0">
                           <a:solidFill>
                             <a:srgbClr val="202020"/>
                           </a:solidFill>
@@ -26007,8 +25779,8 @@
         </p:nvSpPr>
         <p:spPr>
           <a:xfrm>
-            <a:off x="548640" y="5989320"/>
-            <a:ext cx="11109960" cy="457200"/>
+            <a:off x="548640" y="5760720"/>
+            <a:ext cx="11109960" cy="822960"/>
           </a:xfrm>
           <a:prstGeom prst="rect">
             <a:avLst/>
@@ -26023,7 +25795,7 @@
           <a:p>
             <a:pPr algn="just"/>
             <a:r>
-              <a:rPr sz="1400" b="0">
+              <a:rPr sz="1600" b="0">
                 <a:solidFill>
                   <a:srgbClr val="59636E"/>
                 </a:solidFill>
@@ -26325,7 +26097,7 @@
           <a:p>
             <a:pPr algn="just"/>
             <a:r>
-              <a:rPr sz="1300" b="0">
+              <a:rPr sz="1500" b="0">
                 <a:solidFill>
                   <a:srgbClr val="C7D6E5"/>
                 </a:solidFill>
@@ -26367,7 +26139,7 @@
                     <a:p>
                       <a:pPr algn="ctr"/>
                       <a:r>
-                        <a:rPr sz="1700" b="1">
+                        <a:rPr sz="1800" b="1">
                           <a:solidFill>
                             <a:srgbClr val="FFFFFF"/>
                           </a:solidFill>
@@ -26390,7 +26162,7 @@
                     <a:p>
                       <a:pPr algn="ctr"/>
                       <a:r>
-                        <a:rPr sz="1700" b="1">
+                        <a:rPr sz="1800" b="1">
                           <a:solidFill>
                             <a:srgbClr val="FFFFFF"/>
                           </a:solidFill>
@@ -26413,7 +26185,7 @@
                     <a:p>
                       <a:pPr algn="ctr"/>
                       <a:r>
-                        <a:rPr sz="1700" b="1">
+                        <a:rPr sz="1800" b="1">
                           <a:solidFill>
                             <a:srgbClr val="FFFFFF"/>
                           </a:solidFill>
@@ -26438,7 +26210,7 @@
                     <a:p>
                       <a:pPr algn="ctr"/>
                       <a:r>
-                        <a:rPr sz="1700" b="0">
+                        <a:rPr sz="1800" b="0">
                           <a:solidFill>
                             <a:srgbClr val="202020"/>
                           </a:solidFill>
@@ -26461,7 +26233,7 @@
                     <a:p>
                       <a:pPr algn="ctr"/>
                       <a:r>
-                        <a:rPr sz="1700" b="0">
+                        <a:rPr sz="1800" b="0">
                           <a:solidFill>
                             <a:srgbClr val="202020"/>
                           </a:solidFill>
@@ -26484,7 +26256,7 @@
                     <a:p>
                       <a:pPr algn="ctr"/>
                       <a:r>
-                        <a:rPr sz="1700" b="0">
+                        <a:rPr sz="1800" b="0">
                           <a:solidFill>
                             <a:srgbClr val="202020"/>
                           </a:solidFill>
@@ -26509,7 +26281,7 @@
                     <a:p>
                       <a:pPr algn="ctr"/>
                       <a:r>
-                        <a:rPr sz="1700" b="0">
+                        <a:rPr sz="1800" b="0">
                           <a:solidFill>
                             <a:srgbClr val="202020"/>
                           </a:solidFill>
@@ -26532,7 +26304,7 @@
                     <a:p>
                       <a:pPr algn="ctr"/>
                       <a:r>
-                        <a:rPr sz="1700" b="0">
+                        <a:rPr sz="1800" b="0">
                           <a:solidFill>
                             <a:srgbClr val="202020"/>
                           </a:solidFill>
@@ -26555,7 +26327,7 @@
                     <a:p>
                       <a:pPr algn="ctr"/>
                       <a:r>
-                        <a:rPr sz="1700" b="0">
+                        <a:rPr sz="1800" b="0">
                           <a:solidFill>
                             <a:srgbClr val="202020"/>
                           </a:solidFill>
@@ -26580,7 +26352,7 @@
                     <a:p>
                       <a:pPr algn="ctr"/>
                       <a:r>
-                        <a:rPr sz="1700" b="0">
+                        <a:rPr sz="1800" b="0">
                           <a:solidFill>
                             <a:srgbClr val="202020"/>
                           </a:solidFill>
@@ -26603,7 +26375,7 @@
                     <a:p>
                       <a:pPr algn="ctr"/>
                       <a:r>
-                        <a:rPr sz="1700" b="0">
+                        <a:rPr sz="1800" b="0">
                           <a:solidFill>
                             <a:srgbClr val="202020"/>
                           </a:solidFill>
@@ -26626,7 +26398,7 @@
                     <a:p>
                       <a:pPr algn="ctr"/>
                       <a:r>
-                        <a:rPr sz="1700" b="0">
+                        <a:rPr sz="1800" b="0">
                           <a:solidFill>
                             <a:srgbClr val="202020"/>
                           </a:solidFill>
@@ -26651,7 +26423,7 @@
                     <a:p>
                       <a:pPr algn="ctr"/>
                       <a:r>
-                        <a:rPr sz="1700" b="0">
+                        <a:rPr sz="1800" b="0">
                           <a:solidFill>
                             <a:srgbClr val="202020"/>
                           </a:solidFill>
@@ -26674,7 +26446,7 @@
                     <a:p>
                       <a:pPr algn="ctr"/>
                       <a:r>
-                        <a:rPr sz="1700" b="0">
+                        <a:rPr sz="1800" b="0">
                           <a:solidFill>
                             <a:srgbClr val="202020"/>
                           </a:solidFill>
@@ -26697,7 +26469,7 @@
                     <a:p>
                       <a:pPr algn="ctr"/>
                       <a:r>
-                        <a:rPr sz="1700" b="0">
+                        <a:rPr sz="1800" b="0">
                           <a:solidFill>
                             <a:srgbClr val="202020"/>
                           </a:solidFill>
@@ -26845,7 +26617,7 @@
           <a:p>
             <a:pPr algn="just"/>
             <a:r>
-              <a:rPr sz="1800" b="1">
+              <a:rPr sz="2000" b="1">
                 <a:solidFill>
                   <a:srgbClr val="1E7A45"/>
                 </a:solidFill>
@@ -26967,25 +26739,13 @@
           <a:p>
             <a:pPr algn="just"/>
             <a:r>
-              <a:rPr sz="1900" b="1">
+              <a:rPr sz="2100" b="1">
                 <a:solidFill>
                   <a:srgbClr val="1E7A45"/>
                 </a:solidFill>
                 <a:latin typeface="Microsoft JhengHei"/>
               </a:rPr>
-              <a:t>蒸餾 distillation：另一種訓練方式，</a:t>
-            </a:r>
-          </a:p>
-          <a:p>
-            <a:pPr algn="just"/>
-            <a:r>
-              <a:rPr sz="1900" b="1">
-                <a:solidFill>
-                  <a:srgbClr val="1E7A45"/>
-                </a:solidFill>
-                <a:latin typeface="Microsoft JhengHei"/>
-              </a:rPr>
-              <a:t>把笨重模型的知識移轉到適合部署的小模型</a:t>
+              <a:t>蒸餾 distillation：另一種訓練方式，把笨重模型的知識移轉到適合部署的小模型</a:t>
             </a:r>
           </a:p>
         </p:txBody>
@@ -27014,7 +26774,7 @@
           <a:p>
             <a:pPr algn="just"/>
             <a:r>
-              <a:rPr sz="1800" b="0">
+              <a:rPr sz="2000" b="0">
                 <a:solidFill>
                   <a:srgbClr val="202020"/>
                 </a:solidFill>
@@ -27026,7 +26786,7 @@
           <a:p>
             <a:pPr algn="just"/>
             <a:r>
-              <a:rPr sz="1800" b="0">
+              <a:rPr sz="2000" b="0">
                 <a:solidFill>
                   <a:srgbClr val="202020"/>
                 </a:solidFill>
@@ -27558,7 +27318,7 @@
           <a:p>
             <a:pPr algn="just"/>
             <a:r>
-              <a:rPr sz="1300" b="0">
+              <a:rPr sz="1500" b="0">
                 <a:solidFill>
                   <a:srgbClr val="C7D6E5"/>
                 </a:solidFill>
@@ -27593,7 +27353,7 @@
           <a:p>
             <a:pPr algn="just"/>
             <a:r>
-              <a:rPr sz="1800" b="0">
+              <a:rPr sz="2000" b="0">
                 <a:solidFill>
                   <a:srgbClr val="202020"/>
                 </a:solidFill>
@@ -27635,7 +27395,7 @@
                     <a:p>
                       <a:pPr algn="ctr"/>
                       <a:r>
-                        <a:rPr sz="1700" b="1">
+                        <a:rPr sz="1800" b="1">
                           <a:solidFill>
                             <a:srgbClr val="FFFFFF"/>
                           </a:solidFill>
@@ -27658,7 +27418,7 @@
                     <a:p>
                       <a:pPr algn="ctr"/>
                       <a:r>
-                        <a:rPr sz="1700" b="1">
+                        <a:rPr sz="1800" b="1">
                           <a:solidFill>
                             <a:srgbClr val="FFFFFF"/>
                           </a:solidFill>
@@ -27681,7 +27441,7 @@
                     <a:p>
                       <a:pPr algn="ctr"/>
                       <a:r>
-                        <a:rPr sz="1700" b="1">
+                        <a:rPr sz="1800" b="1">
                           <a:solidFill>
                             <a:srgbClr val="FFFFFF"/>
                           </a:solidFill>
@@ -27706,7 +27466,7 @@
                     <a:p>
                       <a:pPr algn="ctr"/>
                       <a:r>
-                        <a:rPr sz="1700" b="0">
+                        <a:rPr sz="1800" b="0">
                           <a:solidFill>
                             <a:srgbClr val="202020"/>
                           </a:solidFill>
@@ -27729,7 +27489,7 @@
                     <a:p>
                       <a:pPr algn="ctr"/>
                       <a:r>
-                        <a:rPr sz="1700" b="0">
+                        <a:rPr sz="1800" b="0">
                           <a:solidFill>
                             <a:srgbClr val="202020"/>
                           </a:solidFill>
@@ -27752,7 +27512,7 @@
                     <a:p>
                       <a:pPr algn="ctr"/>
                       <a:r>
-                        <a:rPr sz="1700" b="0">
+                        <a:rPr sz="1800" b="0">
                           <a:solidFill>
                             <a:srgbClr val="202020"/>
                           </a:solidFill>
@@ -27777,7 +27537,7 @@
                     <a:p>
                       <a:pPr algn="ctr"/>
                       <a:r>
-                        <a:rPr sz="1700" b="0">
+                        <a:rPr sz="1800" b="0">
                           <a:solidFill>
                             <a:srgbClr val="202020"/>
                           </a:solidFill>
@@ -27800,7 +27560,7 @@
                     <a:p>
                       <a:pPr algn="ctr"/>
                       <a:r>
-                        <a:rPr sz="1700" b="0">
+                        <a:rPr sz="1800" b="0">
                           <a:solidFill>
                             <a:srgbClr val="202020"/>
                           </a:solidFill>
@@ -27823,7 +27583,7 @@
                     <a:p>
                       <a:pPr algn="ctr"/>
                       <a:r>
-                        <a:rPr sz="1700" b="0">
+                        <a:rPr sz="1800" b="0">
                           <a:solidFill>
                             <a:srgbClr val="202020"/>
                           </a:solidFill>
@@ -27875,7 +27635,7 @@
                     <a:p>
                       <a:pPr algn="ctr"/>
                       <a:r>
-                        <a:rPr sz="1700" b="1">
+                        <a:rPr sz="1800" b="1">
                           <a:solidFill>
                             <a:srgbClr val="FFFFFF"/>
                           </a:solidFill>
@@ -27898,7 +27658,7 @@
                     <a:p>
                       <a:pPr algn="ctr"/>
                       <a:r>
-                        <a:rPr sz="1700" b="1">
+                        <a:rPr sz="1800" b="1">
                           <a:solidFill>
                             <a:srgbClr val="FFFFFF"/>
                           </a:solidFill>
@@ -27921,7 +27681,7 @@
                     <a:p>
                       <a:pPr algn="ctr"/>
                       <a:r>
-                        <a:rPr sz="1700" b="1">
+                        <a:rPr sz="1800" b="1">
                           <a:solidFill>
                             <a:srgbClr val="FFFFFF"/>
                           </a:solidFill>
@@ -27946,7 +27706,7 @@
                     <a:p>
                       <a:pPr algn="ctr"/>
                       <a:r>
-                        <a:rPr sz="1700" b="0">
+                        <a:rPr sz="1800" b="0">
                           <a:solidFill>
                             <a:srgbClr val="202020"/>
                           </a:solidFill>
@@ -27969,7 +27729,7 @@
                     <a:p>
                       <a:pPr algn="ctr"/>
                       <a:r>
-                        <a:rPr sz="1700" b="0">
+                        <a:rPr sz="1800" b="0">
                           <a:solidFill>
                             <a:srgbClr val="202020"/>
                           </a:solidFill>
@@ -27992,7 +27752,7 @@
                     <a:p>
                       <a:pPr algn="ctr"/>
                       <a:r>
-                        <a:rPr sz="1700" b="0">
+                        <a:rPr sz="1800" b="0">
                           <a:solidFill>
                             <a:srgbClr val="202020"/>
                           </a:solidFill>
@@ -28017,7 +27777,7 @@
                     <a:p>
                       <a:pPr algn="ctr"/>
                       <a:r>
-                        <a:rPr sz="1700" b="0">
+                        <a:rPr sz="1800" b="0">
                           <a:solidFill>
                             <a:srgbClr val="202020"/>
                           </a:solidFill>
@@ -28040,7 +27800,7 @@
                     <a:p>
                       <a:pPr algn="ctr"/>
                       <a:r>
-                        <a:rPr sz="1700" b="0">
+                        <a:rPr sz="1800" b="0">
                           <a:solidFill>
                             <a:srgbClr val="202020"/>
                           </a:solidFill>
@@ -28063,7 +27823,7 @@
                     <a:p>
                       <a:pPr algn="ctr"/>
                       <a:r>
-                        <a:rPr sz="1700" b="0">
+                        <a:rPr sz="1800" b="0">
                           <a:solidFill>
                             <a:srgbClr val="202020"/>
                           </a:solidFill>
@@ -28128,7 +27888,7 @@
           <a:p>
             <a:pPr algn="just"/>
             <a:r>
-              <a:rPr sz="1900" b="1">
+              <a:rPr sz="2100" b="1">
                 <a:solidFill>
                   <a:srgbClr val="1E7A45"/>
                 </a:solidFill>
@@ -28140,7 +27900,7 @@
           <a:p>
             <a:pPr algn="just"/>
             <a:r>
-              <a:rPr sz="1900" b="1">
+              <a:rPr sz="2100" b="1">
                 <a:solidFill>
                   <a:srgbClr val="1E7A45"/>
                 </a:solidFill>
@@ -28195,7 +27955,7 @@
           <a:p>
             <a:pPr algn="just"/>
             <a:r>
-              <a:rPr sz="1800" b="1">
+              <a:rPr sz="2000" b="1">
                 <a:solidFill>
                   <a:srgbClr val="C03030"/>
                 </a:solidFill>
@@ -28207,7 +27967,7 @@
           <a:p>
             <a:pPr algn="just"/>
             <a:r>
-              <a:rPr sz="1800" b="1">
+              <a:rPr sz="2000" b="1">
                 <a:solidFill>
                   <a:srgbClr val="C03030"/>
                 </a:solidFill>
@@ -28649,7 +28409,7 @@
           <a:p>
             <a:pPr algn="just"/>
             <a:r>
-              <a:rPr sz="1300" b="0">
+              <a:rPr sz="1500" b="0">
                 <a:solidFill>
                   <a:srgbClr val="C7D6E5"/>
                 </a:solidFill>
@@ -28684,7 +28444,7 @@
           <a:p>
             <a:pPr algn="just"/>
             <a:r>
-              <a:rPr sz="1900" b="0">
+              <a:rPr sz="2100" b="0">
                 <a:solidFill>
                   <a:srgbClr val="202020"/>
                 </a:solidFill>
@@ -28727,7 +28487,7 @@
                     <a:p>
                       <a:pPr algn="ctr"/>
                       <a:r>
-                        <a:rPr sz="1700" b="1">
+                        <a:rPr sz="1800" b="1">
                           <a:solidFill>
                             <a:srgbClr val="FFFFFF"/>
                           </a:solidFill>
@@ -28750,7 +28510,7 @@
                     <a:p>
                       <a:pPr algn="ctr"/>
                       <a:r>
-                        <a:rPr sz="1700" b="1">
+                        <a:rPr sz="1800" b="1">
                           <a:solidFill>
                             <a:srgbClr val="FFFFFF"/>
                           </a:solidFill>
@@ -28773,7 +28533,7 @@
                     <a:p>
                       <a:pPr algn="ctr"/>
                       <a:r>
-                        <a:rPr sz="1700" b="1">
+                        <a:rPr sz="1800" b="1">
                           <a:solidFill>
                             <a:srgbClr val="FFFFFF"/>
                           </a:solidFill>
@@ -28796,7 +28556,7 @@
                     <a:p>
                       <a:pPr algn="ctr"/>
                       <a:r>
-                        <a:rPr sz="1700" b="1">
+                        <a:rPr sz="1800" b="1">
                           <a:solidFill>
                             <a:srgbClr val="FFFFFF"/>
                           </a:solidFill>
@@ -28821,7 +28581,7 @@
                     <a:p>
                       <a:pPr algn="ctr"/>
                       <a:r>
-                        <a:rPr sz="1700" b="0">
+                        <a:rPr sz="1800" b="0">
                           <a:solidFill>
                             <a:srgbClr val="202020"/>
                           </a:solidFill>
@@ -28844,7 +28604,7 @@
                     <a:p>
                       <a:pPr algn="ctr"/>
                       <a:r>
-                        <a:rPr sz="1700" b="0">
+                        <a:rPr sz="1800" b="0">
                           <a:solidFill>
                             <a:srgbClr val="202020"/>
                           </a:solidFill>
@@ -28867,7 +28627,7 @@
                     <a:p>
                       <a:pPr algn="ctr"/>
                       <a:r>
-                        <a:rPr sz="1700" b="0">
+                        <a:rPr sz="1800" b="0">
                           <a:solidFill>
                             <a:srgbClr val="202020"/>
                           </a:solidFill>
@@ -28890,7 +28650,7 @@
                     <a:p>
                       <a:pPr algn="ctr"/>
                       <a:r>
-                        <a:rPr sz="1700" b="0">
+                        <a:rPr sz="1800" b="0">
                           <a:solidFill>
                             <a:srgbClr val="202020"/>
                           </a:solidFill>
@@ -28915,7 +28675,7 @@
                     <a:p>
                       <a:pPr algn="ctr"/>
                       <a:r>
-                        <a:rPr sz="1700" b="0">
+                        <a:rPr sz="1800" b="0">
                           <a:solidFill>
                             <a:srgbClr val="202020"/>
                           </a:solidFill>
@@ -28938,7 +28698,7 @@
                     <a:p>
                       <a:pPr algn="ctr"/>
                       <a:r>
-                        <a:rPr sz="1700" b="0">
+                        <a:rPr sz="1800" b="0">
                           <a:solidFill>
                             <a:srgbClr val="202020"/>
                           </a:solidFill>
@@ -28961,7 +28721,7 @@
                     <a:p>
                       <a:pPr algn="ctr"/>
                       <a:r>
-                        <a:rPr sz="1700" b="0">
+                        <a:rPr sz="1800" b="0">
                           <a:solidFill>
                             <a:srgbClr val="202020"/>
                           </a:solidFill>
@@ -28984,7 +28744,7 @@
                     <a:p>
                       <a:pPr algn="ctr"/>
                       <a:r>
-                        <a:rPr sz="1700" b="0">
+                        <a:rPr sz="1800" b="0">
                           <a:solidFill>
                             <a:srgbClr val="202020"/>
                           </a:solidFill>
@@ -29009,7 +28769,7 @@
                     <a:p>
                       <a:pPr algn="ctr"/>
                       <a:r>
-                        <a:rPr sz="1700" b="0">
+                        <a:rPr sz="1800" b="0">
                           <a:solidFill>
                             <a:srgbClr val="202020"/>
                           </a:solidFill>
@@ -29032,7 +28792,7 @@
                     <a:p>
                       <a:pPr algn="ctr"/>
                       <a:r>
-                        <a:rPr sz="1700" b="0">
+                        <a:rPr sz="1800" b="0">
                           <a:solidFill>
                             <a:srgbClr val="202020"/>
                           </a:solidFill>
@@ -29055,7 +28815,7 @@
                     <a:p>
                       <a:pPr algn="ctr"/>
                       <a:r>
-                        <a:rPr sz="1700" b="0">
+                        <a:rPr sz="1800" b="0">
                           <a:solidFill>
                             <a:srgbClr val="202020"/>
                           </a:solidFill>
@@ -29078,7 +28838,7 @@
                     <a:p>
                       <a:pPr algn="ctr"/>
                       <a:r>
-                        <a:rPr sz="1700" b="0">
+                        <a:rPr sz="1800" b="0">
                           <a:solidFill>
                             <a:srgbClr val="202020"/>
                           </a:solidFill>
@@ -29143,25 +28903,13 @@
           <a:p>
             <a:pPr algn="just"/>
             <a:r>
-              <a:rPr sz="1900" b="1">
+              <a:rPr sz="2100" b="1">
                 <a:solidFill>
                   <a:srgbClr val="1F4E79"/>
                 </a:solidFill>
                 <a:latin typeface="Microsoft JhengHei"/>
               </a:rPr>
-              <a:t>笨重模型確定這是 2，</a:t>
-            </a:r>
-          </a:p>
-          <a:p>
-            <a:pPr algn="just"/>
-            <a:r>
-              <a:rPr sz="1900" b="1">
-                <a:solidFill>
-                  <a:srgbClr val="1F4E79"/>
-                </a:solidFill>
-                <a:latin typeface="Microsoft JhengHei"/>
-              </a:rPr>
-              <a:t>並認為 3 比 7 像</a:t>
+              <a:t>笨重模型確定這是 2，並認為 3 比 7 像</a:t>
             </a:r>
           </a:p>
         </p:txBody>
@@ -29210,7 +28958,7 @@
           <a:p>
             <a:pPr algn="just"/>
             <a:r>
-              <a:rPr sz="1900" b="1">
+              <a:rPr sz="2100" b="1">
                 <a:solidFill>
                   <a:srgbClr val="59636E"/>
                 </a:solidFill>
@@ -29222,7 +28970,7 @@
           <a:p>
             <a:pPr algn="just"/>
             <a:r>
-              <a:rPr sz="1900" b="1">
+              <a:rPr sz="2100" b="1">
                 <a:solidFill>
                   <a:srgbClr val="59636E"/>
                 </a:solidFill>
@@ -29257,7 +29005,7 @@
           <a:p>
             <a:pPr algn="just"/>
             <a:r>
-              <a:rPr sz="1700" b="0">
+              <a:rPr sz="1900" b="0">
                 <a:solidFill>
                   <a:srgbClr val="59636E"/>
                 </a:solidFill>
@@ -29269,7 +29017,7 @@
           <a:p>
             <a:pPr algn="just"/>
             <a:r>
-              <a:rPr sz="1700" b="0">
+              <a:rPr sz="1900" b="0">
                 <a:solidFill>
                   <a:srgbClr val="59636E"/>
                 </a:solidFill>
